--- a/slides/5_finetuning.pptx
+++ b/slides/5_finetuning.pptx
@@ -5,7 +5,7 @@
     <p:sldMasterId id="2147483648" r:id="rId1"/>
   </p:sldMasterIdLst>
   <p:notesMasterIdLst>
-    <p:notesMasterId r:id="rId12"/>
+    <p:notesMasterId r:id="rId28"/>
   </p:notesMasterIdLst>
   <p:sldIdLst>
     <p:sldId id="256" r:id="rId2"/>
@@ -13,11 +13,27 @@
     <p:sldId id="790" r:id="rId4"/>
     <p:sldId id="811" r:id="rId5"/>
     <p:sldId id="754" r:id="rId6"/>
-    <p:sldId id="804" r:id="rId7"/>
-    <p:sldId id="812" r:id="rId8"/>
-    <p:sldId id="736" r:id="rId9"/>
-    <p:sldId id="766" r:id="rId10"/>
-    <p:sldId id="333" r:id="rId11"/>
+    <p:sldId id="832" r:id="rId7"/>
+    <p:sldId id="816" r:id="rId8"/>
+    <p:sldId id="834" r:id="rId9"/>
+    <p:sldId id="833" r:id="rId10"/>
+    <p:sldId id="815" r:id="rId11"/>
+    <p:sldId id="814" r:id="rId12"/>
+    <p:sldId id="804" r:id="rId13"/>
+    <p:sldId id="812" r:id="rId14"/>
+    <p:sldId id="736" r:id="rId15"/>
+    <p:sldId id="766" r:id="rId16"/>
+    <p:sldId id="280" r:id="rId17"/>
+    <p:sldId id="828" r:id="rId18"/>
+    <p:sldId id="810" r:id="rId19"/>
+    <p:sldId id="829" r:id="rId20"/>
+    <p:sldId id="827" r:id="rId21"/>
+    <p:sldId id="830" r:id="rId22"/>
+    <p:sldId id="800" r:id="rId23"/>
+    <p:sldId id="819" r:id="rId24"/>
+    <p:sldId id="821" r:id="rId25"/>
+    <p:sldId id="831" r:id="rId26"/>
+    <p:sldId id="333" r:id="rId27"/>
   </p:sldIdLst>
   <p:sldSz cx="12192000" cy="6858000"/>
   <p:notesSz cx="6858000" cy="9144000"/>
@@ -959,43 +975,6 @@
         </a:p>
       </dgm:t>
     </dgm:pt>
-    <dgm:pt modelId="{288D3E87-5781-4F83-84CB-1610EAD21773}">
-      <dgm:prSet/>
-      <dgm:spPr/>
-      <dgm:t>
-        <a:bodyPr/>
-        <a:lstStyle/>
-        <a:p>
-          <a:r>
-            <a:rPr lang="de-DE" b="1" dirty="0"/>
-            <a:t>Finetuning</a:t>
-          </a:r>
-          <a:endParaRPr lang="en-US" b="1" dirty="0"/>
-        </a:p>
-      </dgm:t>
-    </dgm:pt>
-    <dgm:pt modelId="{5D1CA44E-A2B8-416C-AF5D-FE642F689AF8}" type="parTrans" cxnId="{4B05A8AF-8E44-411A-9840-24940C52F31E}">
-      <dgm:prSet/>
-      <dgm:spPr/>
-      <dgm:t>
-        <a:bodyPr/>
-        <a:lstStyle/>
-        <a:p>
-          <a:endParaRPr lang="en-US"/>
-        </a:p>
-      </dgm:t>
-    </dgm:pt>
-    <dgm:pt modelId="{E930F8F9-CD27-4F21-8645-528352089D37}" type="sibTrans" cxnId="{4B05A8AF-8E44-411A-9840-24940C52F31E}">
-      <dgm:prSet/>
-      <dgm:spPr/>
-      <dgm:t>
-        <a:bodyPr/>
-        <a:lstStyle/>
-        <a:p>
-          <a:endParaRPr lang="en-US"/>
-        </a:p>
-      </dgm:t>
-    </dgm:pt>
     <dgm:pt modelId="{DDA901FD-5C05-41F1-A824-5C833C35698E}">
       <dgm:prSet/>
       <dgm:spPr/>
@@ -1106,42 +1085,6 @@
         </a:p>
       </dgm:t>
     </dgm:pt>
-    <dgm:pt modelId="{769F0AC1-E7CF-C944-B9AF-EA28932D2656}">
-      <dgm:prSet/>
-      <dgm:spPr/>
-      <dgm:t>
-        <a:bodyPr/>
-        <a:lstStyle/>
-        <a:p>
-          <a:r>
-            <a:rPr lang="en-US" b="0" dirty="0"/>
-            <a:t>Instruction Tuning</a:t>
-          </a:r>
-        </a:p>
-      </dgm:t>
-    </dgm:pt>
-    <dgm:pt modelId="{8FBFB482-1FAC-2647-9582-FBF2BE51B42C}" type="parTrans" cxnId="{B2C31AC5-CC8D-7848-BF48-4E93CF15F78C}">
-      <dgm:prSet/>
-      <dgm:spPr/>
-      <dgm:t>
-        <a:bodyPr/>
-        <a:lstStyle/>
-        <a:p>
-          <a:endParaRPr lang="de-DE"/>
-        </a:p>
-      </dgm:t>
-    </dgm:pt>
-    <dgm:pt modelId="{202C7746-1898-184B-8901-869D8C7ADB05}" type="sibTrans" cxnId="{B2C31AC5-CC8D-7848-BF48-4E93CF15F78C}">
-      <dgm:prSet/>
-      <dgm:spPr/>
-      <dgm:t>
-        <a:bodyPr/>
-        <a:lstStyle/>
-        <a:p>
-          <a:endParaRPr lang="de-DE"/>
-        </a:p>
-      </dgm:t>
-    </dgm:pt>
     <dgm:pt modelId="{A5BBF571-5253-6E40-82D7-7DFA55C403EE}">
       <dgm:prSet/>
       <dgm:spPr/>
@@ -1178,6 +1121,43 @@
         </a:p>
       </dgm:t>
     </dgm:pt>
+    <dgm:pt modelId="{288D3E87-5781-4F83-84CB-1610EAD21773}">
+      <dgm:prSet/>
+      <dgm:spPr/>
+      <dgm:t>
+        <a:bodyPr/>
+        <a:lstStyle/>
+        <a:p>
+          <a:r>
+            <a:rPr lang="de-DE" b="1"/>
+            <a:t>Finetuning</a:t>
+          </a:r>
+          <a:endParaRPr lang="en-US" b="1" dirty="0"/>
+        </a:p>
+      </dgm:t>
+    </dgm:pt>
+    <dgm:pt modelId="{E930F8F9-CD27-4F21-8645-528352089D37}" type="sibTrans" cxnId="{4B05A8AF-8E44-411A-9840-24940C52F31E}">
+      <dgm:prSet/>
+      <dgm:spPr/>
+      <dgm:t>
+        <a:bodyPr/>
+        <a:lstStyle/>
+        <a:p>
+          <a:endParaRPr lang="en-US"/>
+        </a:p>
+      </dgm:t>
+    </dgm:pt>
+    <dgm:pt modelId="{5D1CA44E-A2B8-416C-AF5D-FE642F689AF8}" type="parTrans" cxnId="{4B05A8AF-8E44-411A-9840-24940C52F31E}">
+      <dgm:prSet/>
+      <dgm:spPr/>
+      <dgm:t>
+        <a:bodyPr/>
+        <a:lstStyle/>
+        <a:p>
+          <a:endParaRPr lang="en-US"/>
+        </a:p>
+      </dgm:t>
+    </dgm:pt>
     <dgm:pt modelId="{7852B3C2-A44C-F446-9060-CA21A0D28991}" type="pres">
       <dgm:prSet presAssocID="{56648FB5-C09B-4C87-AEF3-A553C798BCF5}" presName="vert0" presStyleCnt="0">
         <dgm:presLayoutVars>
@@ -1189,7 +1169,7 @@
       <dgm:spPr/>
     </dgm:pt>
     <dgm:pt modelId="{4F1690E2-16BD-2B42-AE98-F2A735104EFA}" type="pres">
-      <dgm:prSet presAssocID="{1EA944AD-327D-427D-A5F0-7AE39B4AFACB}" presName="thickLine" presStyleLbl="alignNode1" presStyleIdx="0" presStyleCnt="8"/>
+      <dgm:prSet presAssocID="{1EA944AD-327D-427D-A5F0-7AE39B4AFACB}" presName="thickLine" presStyleLbl="alignNode1" presStyleIdx="0" presStyleCnt="7"/>
       <dgm:spPr/>
     </dgm:pt>
     <dgm:pt modelId="{7B746AAE-0D31-DE44-A5F6-86F76B8A3E80}" type="pres">
@@ -1197,7 +1177,7 @@
       <dgm:spPr/>
     </dgm:pt>
     <dgm:pt modelId="{D28CB533-C51E-334E-9261-65C425A19706}" type="pres">
-      <dgm:prSet presAssocID="{1EA944AD-327D-427D-A5F0-7AE39B4AFACB}" presName="tx1" presStyleLbl="revTx" presStyleIdx="0" presStyleCnt="8"/>
+      <dgm:prSet presAssocID="{1EA944AD-327D-427D-A5F0-7AE39B4AFACB}" presName="tx1" presStyleLbl="revTx" presStyleIdx="0" presStyleCnt="7"/>
       <dgm:spPr/>
     </dgm:pt>
     <dgm:pt modelId="{4B5756DB-F77A-B44F-B3F7-F3894F36872A}" type="pres">
@@ -1205,7 +1185,7 @@
       <dgm:spPr/>
     </dgm:pt>
     <dgm:pt modelId="{A11F9CE2-7889-D042-B67A-3B946F072596}" type="pres">
-      <dgm:prSet presAssocID="{0C6B1536-6269-470E-891B-548B1A1741C8}" presName="thickLine" presStyleLbl="alignNode1" presStyleIdx="1" presStyleCnt="8"/>
+      <dgm:prSet presAssocID="{0C6B1536-6269-470E-891B-548B1A1741C8}" presName="thickLine" presStyleLbl="alignNode1" presStyleIdx="1" presStyleCnt="7"/>
       <dgm:spPr/>
     </dgm:pt>
     <dgm:pt modelId="{FDBEDC87-8791-4D44-8FD8-85B48AD39373}" type="pres">
@@ -1213,7 +1193,7 @@
       <dgm:spPr/>
     </dgm:pt>
     <dgm:pt modelId="{8D7BB36B-DCB0-1945-8136-BD40AAFC958C}" type="pres">
-      <dgm:prSet presAssocID="{0C6B1536-6269-470E-891B-548B1A1741C8}" presName="tx1" presStyleLbl="revTx" presStyleIdx="1" presStyleCnt="8"/>
+      <dgm:prSet presAssocID="{0C6B1536-6269-470E-891B-548B1A1741C8}" presName="tx1" presStyleLbl="revTx" presStyleIdx="1" presStyleCnt="7"/>
       <dgm:spPr/>
     </dgm:pt>
     <dgm:pt modelId="{DCBD3594-6E80-0B41-BD87-AFAFE90B7B0C}" type="pres">
@@ -1221,7 +1201,7 @@
       <dgm:spPr/>
     </dgm:pt>
     <dgm:pt modelId="{9D950D6B-5C89-8A48-9960-CA8B4C499A1A}" type="pres">
-      <dgm:prSet presAssocID="{A5BBF571-5253-6E40-82D7-7DFA55C403EE}" presName="thickLine" presStyleLbl="alignNode1" presStyleIdx="2" presStyleCnt="8"/>
+      <dgm:prSet presAssocID="{A5BBF571-5253-6E40-82D7-7DFA55C403EE}" presName="thickLine" presStyleLbl="alignNode1" presStyleIdx="2" presStyleCnt="7"/>
       <dgm:spPr/>
     </dgm:pt>
     <dgm:pt modelId="{743C7BE5-F107-5047-8108-35976C730BE6}" type="pres">
@@ -1229,7 +1209,7 @@
       <dgm:spPr/>
     </dgm:pt>
     <dgm:pt modelId="{1B96839A-94C6-3747-AECB-6AFE26E91254}" type="pres">
-      <dgm:prSet presAssocID="{A5BBF571-5253-6E40-82D7-7DFA55C403EE}" presName="tx1" presStyleLbl="revTx" presStyleIdx="2" presStyleCnt="8"/>
+      <dgm:prSet presAssocID="{A5BBF571-5253-6E40-82D7-7DFA55C403EE}" presName="tx1" presStyleLbl="revTx" presStyleIdx="2" presStyleCnt="7"/>
       <dgm:spPr/>
     </dgm:pt>
     <dgm:pt modelId="{437624BB-39AA-794C-B0F6-B2CF5CA2B5A0}" type="pres">
@@ -1237,7 +1217,7 @@
       <dgm:spPr/>
     </dgm:pt>
     <dgm:pt modelId="{34CF0AAF-5C3E-5349-AD9D-2034F634313C}" type="pres">
-      <dgm:prSet presAssocID="{5F8A9840-886B-1549-86FA-DFF28283C6F7}" presName="thickLine" presStyleLbl="alignNode1" presStyleIdx="3" presStyleCnt="8"/>
+      <dgm:prSet presAssocID="{5F8A9840-886B-1549-86FA-DFF28283C6F7}" presName="thickLine" presStyleLbl="alignNode1" presStyleIdx="3" presStyleCnt="7"/>
       <dgm:spPr/>
     </dgm:pt>
     <dgm:pt modelId="{2F409A89-4A7E-3D4A-93C7-15493EA49A4E}" type="pres">
@@ -1245,7 +1225,7 @@
       <dgm:spPr/>
     </dgm:pt>
     <dgm:pt modelId="{D2ABD2C0-EDD7-194E-81CA-D9A5311A1607}" type="pres">
-      <dgm:prSet presAssocID="{5F8A9840-886B-1549-86FA-DFF28283C6F7}" presName="tx1" presStyleLbl="revTx" presStyleIdx="3" presStyleCnt="8"/>
+      <dgm:prSet presAssocID="{5F8A9840-886B-1549-86FA-DFF28283C6F7}" presName="tx1" presStyleLbl="revTx" presStyleIdx="3" presStyleCnt="7"/>
       <dgm:spPr/>
     </dgm:pt>
     <dgm:pt modelId="{F666EF11-8510-CD40-BB10-489FF0DA3CFF}" type="pres">
@@ -1253,7 +1233,7 @@
       <dgm:spPr/>
     </dgm:pt>
     <dgm:pt modelId="{8A505F94-65E4-9D41-AC2C-CCE8BD4C175F}" type="pres">
-      <dgm:prSet presAssocID="{288D3E87-5781-4F83-84CB-1610EAD21773}" presName="thickLine" presStyleLbl="alignNode1" presStyleIdx="4" presStyleCnt="8"/>
+      <dgm:prSet presAssocID="{288D3E87-5781-4F83-84CB-1610EAD21773}" presName="thickLine" presStyleLbl="alignNode1" presStyleIdx="4" presStyleCnt="7"/>
       <dgm:spPr/>
     </dgm:pt>
     <dgm:pt modelId="{B678B193-63FE-3044-8C53-579A035591F8}" type="pres">
@@ -1261,31 +1241,15 @@
       <dgm:spPr/>
     </dgm:pt>
     <dgm:pt modelId="{6E572D5D-DE9A-BF49-8B86-50D4250D1411}" type="pres">
-      <dgm:prSet presAssocID="{288D3E87-5781-4F83-84CB-1610EAD21773}" presName="tx1" presStyleLbl="revTx" presStyleIdx="4" presStyleCnt="8"/>
+      <dgm:prSet presAssocID="{288D3E87-5781-4F83-84CB-1610EAD21773}" presName="tx1" presStyleLbl="revTx" presStyleIdx="4" presStyleCnt="7"/>
       <dgm:spPr/>
     </dgm:pt>
     <dgm:pt modelId="{7F071049-5D5A-2445-8B31-652B1063C281}" type="pres">
       <dgm:prSet presAssocID="{288D3E87-5781-4F83-84CB-1610EAD21773}" presName="vert1" presStyleCnt="0"/>
       <dgm:spPr/>
     </dgm:pt>
-    <dgm:pt modelId="{322460D7-6763-F646-87E9-10A1FE9FDC20}" type="pres">
-      <dgm:prSet presAssocID="{769F0AC1-E7CF-C944-B9AF-EA28932D2656}" presName="thickLine" presStyleLbl="alignNode1" presStyleIdx="5" presStyleCnt="8"/>
-      <dgm:spPr/>
-    </dgm:pt>
-    <dgm:pt modelId="{2E474F08-D54F-E14D-9A99-2C037C893DD5}" type="pres">
-      <dgm:prSet presAssocID="{769F0AC1-E7CF-C944-B9AF-EA28932D2656}" presName="horz1" presStyleCnt="0"/>
-      <dgm:spPr/>
-    </dgm:pt>
-    <dgm:pt modelId="{9B5DA0EB-3C02-EE40-A02E-5B28D39BEF31}" type="pres">
-      <dgm:prSet presAssocID="{769F0AC1-E7CF-C944-B9AF-EA28932D2656}" presName="tx1" presStyleLbl="revTx" presStyleIdx="5" presStyleCnt="8"/>
-      <dgm:spPr/>
-    </dgm:pt>
-    <dgm:pt modelId="{062608B4-F5A4-C943-8091-EEFBA40E325A}" type="pres">
-      <dgm:prSet presAssocID="{769F0AC1-E7CF-C944-B9AF-EA28932D2656}" presName="vert1" presStyleCnt="0"/>
-      <dgm:spPr/>
-    </dgm:pt>
     <dgm:pt modelId="{3D5DC94A-13EE-9348-AB63-BA6D7AB77EF3}" type="pres">
-      <dgm:prSet presAssocID="{DDA901FD-5C05-41F1-A824-5C833C35698E}" presName="thickLine" presStyleLbl="alignNode1" presStyleIdx="6" presStyleCnt="8"/>
+      <dgm:prSet presAssocID="{DDA901FD-5C05-41F1-A824-5C833C35698E}" presName="thickLine" presStyleLbl="alignNode1" presStyleIdx="5" presStyleCnt="7"/>
       <dgm:spPr/>
     </dgm:pt>
     <dgm:pt modelId="{27EB4548-6597-7A48-B8EB-8D5D075E0879}" type="pres">
@@ -1293,7 +1257,7 @@
       <dgm:spPr/>
     </dgm:pt>
     <dgm:pt modelId="{B71E94BA-938F-EC4F-AA59-749EE236EA14}" type="pres">
-      <dgm:prSet presAssocID="{DDA901FD-5C05-41F1-A824-5C833C35698E}" presName="tx1" presStyleLbl="revTx" presStyleIdx="6" presStyleCnt="8"/>
+      <dgm:prSet presAssocID="{DDA901FD-5C05-41F1-A824-5C833C35698E}" presName="tx1" presStyleLbl="revTx" presStyleIdx="5" presStyleCnt="7"/>
       <dgm:spPr/>
     </dgm:pt>
     <dgm:pt modelId="{AB286E63-B7A7-4244-8719-A27E1E499373}" type="pres">
@@ -1301,7 +1265,7 @@
       <dgm:spPr/>
     </dgm:pt>
     <dgm:pt modelId="{20D72B1E-AD82-9E49-86D8-09A4DD4D6212}" type="pres">
-      <dgm:prSet presAssocID="{5F30F6BE-7A6E-4F0D-B3AA-2B05FD8FA60B}" presName="thickLine" presStyleLbl="alignNode1" presStyleIdx="7" presStyleCnt="8"/>
+      <dgm:prSet presAssocID="{5F30F6BE-7A6E-4F0D-B3AA-2B05FD8FA60B}" presName="thickLine" presStyleLbl="alignNode1" presStyleIdx="6" presStyleCnt="7"/>
       <dgm:spPr/>
     </dgm:pt>
     <dgm:pt modelId="{FE30EA44-022B-FF41-BE9E-EF735E26A50E}" type="pres">
@@ -1309,7 +1273,7 @@
       <dgm:spPr/>
     </dgm:pt>
     <dgm:pt modelId="{08701614-A5A0-9544-95A3-640A46D860BF}" type="pres">
-      <dgm:prSet presAssocID="{5F30F6BE-7A6E-4F0D-B3AA-2B05FD8FA60B}" presName="tx1" presStyleLbl="revTx" presStyleIdx="7" presStyleCnt="8"/>
+      <dgm:prSet presAssocID="{5F30F6BE-7A6E-4F0D-B3AA-2B05FD8FA60B}" presName="tx1" presStyleLbl="revTx" presStyleIdx="6" presStyleCnt="7"/>
       <dgm:spPr/>
     </dgm:pt>
     <dgm:pt modelId="{5BC0372B-66B7-0640-8199-37B331256C9A}" type="pres">
@@ -1321,7 +1285,7 @@
     <dgm:cxn modelId="{48E2F92B-7174-CF40-BB56-062756623EA4}" type="presOf" srcId="{288D3E87-5781-4F83-84CB-1610EAD21773}" destId="{6E572D5D-DE9A-BF49-8B86-50D4250D1411}" srcOrd="0" destOrd="0" presId="urn:microsoft.com/office/officeart/2008/layout/LinedList"/>
     <dgm:cxn modelId="{7F381230-3114-44FB-913E-0CD35BF36BA2}" srcId="{56648FB5-C09B-4C87-AEF3-A553C798BCF5}" destId="{0C6B1536-6269-470E-891B-548B1A1741C8}" srcOrd="1" destOrd="0" parTransId="{BA3188B2-0301-4CA0-AC58-59A0732D4CC9}" sibTransId="{E7BF0292-5C5E-44B5-9020-5B605116E8F8}"/>
     <dgm:cxn modelId="{47933137-DA02-BE4A-92B7-574CA30C7525}" srcId="{56648FB5-C09B-4C87-AEF3-A553C798BCF5}" destId="{A5BBF571-5253-6E40-82D7-7DFA55C403EE}" srcOrd="2" destOrd="0" parTransId="{3F510184-3A7A-F04A-AB3A-A6DA046D9501}" sibTransId="{EBB0758C-E85A-AE4B-A658-5E0A4625321C}"/>
-    <dgm:cxn modelId="{76557D45-55A9-46E4-80D0-E1396A52CE52}" srcId="{56648FB5-C09B-4C87-AEF3-A553C798BCF5}" destId="{DDA901FD-5C05-41F1-A824-5C833C35698E}" srcOrd="6" destOrd="0" parTransId="{D760294E-1D9B-408E-B689-8391D4CF7D9C}" sibTransId="{EDCB14DE-D3C3-4E5C-A331-71113C0250BD}"/>
+    <dgm:cxn modelId="{76557D45-55A9-46E4-80D0-E1396A52CE52}" srcId="{56648FB5-C09B-4C87-AEF3-A553C798BCF5}" destId="{DDA901FD-5C05-41F1-A824-5C833C35698E}" srcOrd="5" destOrd="0" parTransId="{D760294E-1D9B-408E-B689-8391D4CF7D9C}" sibTransId="{EDCB14DE-D3C3-4E5C-A331-71113C0250BD}"/>
     <dgm:cxn modelId="{DC6A2B55-9959-9E41-8C4C-FB8FF415BF70}" type="presOf" srcId="{A5BBF571-5253-6E40-82D7-7DFA55C403EE}" destId="{1B96839A-94C6-3747-AECB-6AFE26E91254}" srcOrd="0" destOrd="0" presId="urn:microsoft.com/office/officeart/2008/layout/LinedList"/>
     <dgm:cxn modelId="{5328FF68-AF12-2640-82DD-4A8558848644}" type="presOf" srcId="{5F8A9840-886B-1549-86FA-DFF28283C6F7}" destId="{D2ABD2C0-EDD7-194E-81CA-D9A5311A1607}" srcOrd="0" destOrd="0" presId="urn:microsoft.com/office/officeart/2008/layout/LinedList"/>
     <dgm:cxn modelId="{B8B43377-1557-2042-BB5A-D55D04913284}" type="presOf" srcId="{0C6B1536-6269-470E-891B-548B1A1741C8}" destId="{8D7BB36B-DCB0-1945-8136-BD40AAFC958C}" srcOrd="0" destOrd="0" presId="urn:microsoft.com/office/officeart/2008/layout/LinedList"/>
@@ -1329,10 +1293,8 @@
     <dgm:cxn modelId="{D9602A80-E4B9-A44F-8F18-41878FC23717}" type="presOf" srcId="{1EA944AD-327D-427D-A5F0-7AE39B4AFACB}" destId="{D28CB533-C51E-334E-9261-65C425A19706}" srcOrd="0" destOrd="0" presId="urn:microsoft.com/office/officeart/2008/layout/LinedList"/>
     <dgm:cxn modelId="{4B05A8AF-8E44-411A-9840-24940C52F31E}" srcId="{56648FB5-C09B-4C87-AEF3-A553C798BCF5}" destId="{288D3E87-5781-4F83-84CB-1610EAD21773}" srcOrd="4" destOrd="0" parTransId="{5D1CA44E-A2B8-416C-AF5D-FE642F689AF8}" sibTransId="{E930F8F9-CD27-4F21-8645-528352089D37}"/>
     <dgm:cxn modelId="{946460B5-6A24-4AD5-9BDB-D5E7AE78994B}" srcId="{56648FB5-C09B-4C87-AEF3-A553C798BCF5}" destId="{1EA944AD-327D-427D-A5F0-7AE39B4AFACB}" srcOrd="0" destOrd="0" parTransId="{C379FD06-505A-41F8-9A66-4E9F695F9C1A}" sibTransId="{AD9B37F6-7A60-4E62-AE70-54601B347097}"/>
-    <dgm:cxn modelId="{5E824FB9-2CC4-6F45-B749-FE401FFAEECB}" type="presOf" srcId="{769F0AC1-E7CF-C944-B9AF-EA28932D2656}" destId="{9B5DA0EB-3C02-EE40-A02E-5B28D39BEF31}" srcOrd="0" destOrd="0" presId="urn:microsoft.com/office/officeart/2008/layout/LinedList"/>
-    <dgm:cxn modelId="{B2C31AC5-CC8D-7848-BF48-4E93CF15F78C}" srcId="{56648FB5-C09B-4C87-AEF3-A553C798BCF5}" destId="{769F0AC1-E7CF-C944-B9AF-EA28932D2656}" srcOrd="5" destOrd="0" parTransId="{8FBFB482-1FAC-2647-9582-FBF2BE51B42C}" sibTransId="{202C7746-1898-184B-8901-869D8C7ADB05}"/>
     <dgm:cxn modelId="{AA560ECB-5494-694A-8753-2D77B2337369}" type="presOf" srcId="{DDA901FD-5C05-41F1-A824-5C833C35698E}" destId="{B71E94BA-938F-EC4F-AA59-749EE236EA14}" srcOrd="0" destOrd="0" presId="urn:microsoft.com/office/officeart/2008/layout/LinedList"/>
-    <dgm:cxn modelId="{336AE3DC-37F1-4955-813F-D94B74C0A559}" srcId="{56648FB5-C09B-4C87-AEF3-A553C798BCF5}" destId="{5F30F6BE-7A6E-4F0D-B3AA-2B05FD8FA60B}" srcOrd="7" destOrd="0" parTransId="{204DD833-1CD5-42F1-B596-8D8B6D369E5E}" sibTransId="{838162BB-5917-468F-85CC-DC0FE427929A}"/>
+    <dgm:cxn modelId="{336AE3DC-37F1-4955-813F-D94B74C0A559}" srcId="{56648FB5-C09B-4C87-AEF3-A553C798BCF5}" destId="{5F30F6BE-7A6E-4F0D-B3AA-2B05FD8FA60B}" srcOrd="6" destOrd="0" parTransId="{204DD833-1CD5-42F1-B596-8D8B6D369E5E}" sibTransId="{838162BB-5917-468F-85CC-DC0FE427929A}"/>
     <dgm:cxn modelId="{9C4437E1-A996-CF40-B2F7-2FD90BC18B8E}" srcId="{56648FB5-C09B-4C87-AEF3-A553C798BCF5}" destId="{5F8A9840-886B-1549-86FA-DFF28283C6F7}" srcOrd="3" destOrd="0" parTransId="{A0E52CAA-BC0A-2241-8286-5195FC90ACDB}" sibTransId="{1EDED046-CF50-0248-AC64-C3620E7361E1}"/>
     <dgm:cxn modelId="{83FBB8F5-9153-F24C-B359-92AB22A3F5BF}" type="presOf" srcId="{56648FB5-C09B-4C87-AEF3-A553C798BCF5}" destId="{7852B3C2-A44C-F446-9060-CA21A0D28991}" srcOrd="0" destOrd="0" presId="urn:microsoft.com/office/officeart/2008/layout/LinedList"/>
     <dgm:cxn modelId="{F5D2E861-C6DE-FB42-B7C6-B065F1F84377}" type="presParOf" srcId="{7852B3C2-A44C-F446-9060-CA21A0D28991}" destId="{4F1690E2-16BD-2B42-AE98-F2A735104EFA}" srcOrd="0" destOrd="0" presId="urn:microsoft.com/office/officeart/2008/layout/LinedList"/>
@@ -1355,16 +1317,12 @@
     <dgm:cxn modelId="{0B980FB1-5585-2342-BD3C-2366897F0984}" type="presParOf" srcId="{7852B3C2-A44C-F446-9060-CA21A0D28991}" destId="{B678B193-63FE-3044-8C53-579A035591F8}" srcOrd="9" destOrd="0" presId="urn:microsoft.com/office/officeart/2008/layout/LinedList"/>
     <dgm:cxn modelId="{240D9A74-D193-CC40-97CA-ADC859B1D81F}" type="presParOf" srcId="{B678B193-63FE-3044-8C53-579A035591F8}" destId="{6E572D5D-DE9A-BF49-8B86-50D4250D1411}" srcOrd="0" destOrd="0" presId="urn:microsoft.com/office/officeart/2008/layout/LinedList"/>
     <dgm:cxn modelId="{3B1F9830-A4D6-E140-AE33-31C05CB5B37E}" type="presParOf" srcId="{B678B193-63FE-3044-8C53-579A035591F8}" destId="{7F071049-5D5A-2445-8B31-652B1063C281}" srcOrd="1" destOrd="0" presId="urn:microsoft.com/office/officeart/2008/layout/LinedList"/>
-    <dgm:cxn modelId="{9A7F5AD0-DD95-3843-95C2-CCB3573D0F7B}" type="presParOf" srcId="{7852B3C2-A44C-F446-9060-CA21A0D28991}" destId="{322460D7-6763-F646-87E9-10A1FE9FDC20}" srcOrd="10" destOrd="0" presId="urn:microsoft.com/office/officeart/2008/layout/LinedList"/>
-    <dgm:cxn modelId="{0F8C97D4-B05E-6947-AB11-E0CE7BA1FBBB}" type="presParOf" srcId="{7852B3C2-A44C-F446-9060-CA21A0D28991}" destId="{2E474F08-D54F-E14D-9A99-2C037C893DD5}" srcOrd="11" destOrd="0" presId="urn:microsoft.com/office/officeart/2008/layout/LinedList"/>
-    <dgm:cxn modelId="{24B86091-C966-5641-9975-3A18E8CC2451}" type="presParOf" srcId="{2E474F08-D54F-E14D-9A99-2C037C893DD5}" destId="{9B5DA0EB-3C02-EE40-A02E-5B28D39BEF31}" srcOrd="0" destOrd="0" presId="urn:microsoft.com/office/officeart/2008/layout/LinedList"/>
-    <dgm:cxn modelId="{C6076B37-8BDA-7348-B420-D00A46E8547E}" type="presParOf" srcId="{2E474F08-D54F-E14D-9A99-2C037C893DD5}" destId="{062608B4-F5A4-C943-8091-EEFBA40E325A}" srcOrd="1" destOrd="0" presId="urn:microsoft.com/office/officeart/2008/layout/LinedList"/>
-    <dgm:cxn modelId="{7A9EE529-C307-D440-8910-336F08C35B83}" type="presParOf" srcId="{7852B3C2-A44C-F446-9060-CA21A0D28991}" destId="{3D5DC94A-13EE-9348-AB63-BA6D7AB77EF3}" srcOrd="12" destOrd="0" presId="urn:microsoft.com/office/officeart/2008/layout/LinedList"/>
-    <dgm:cxn modelId="{B6134942-BB7E-6A49-B625-7DF71CC12E8A}" type="presParOf" srcId="{7852B3C2-A44C-F446-9060-CA21A0D28991}" destId="{27EB4548-6597-7A48-B8EB-8D5D075E0879}" srcOrd="13" destOrd="0" presId="urn:microsoft.com/office/officeart/2008/layout/LinedList"/>
+    <dgm:cxn modelId="{7A9EE529-C307-D440-8910-336F08C35B83}" type="presParOf" srcId="{7852B3C2-A44C-F446-9060-CA21A0D28991}" destId="{3D5DC94A-13EE-9348-AB63-BA6D7AB77EF3}" srcOrd="10" destOrd="0" presId="urn:microsoft.com/office/officeart/2008/layout/LinedList"/>
+    <dgm:cxn modelId="{B6134942-BB7E-6A49-B625-7DF71CC12E8A}" type="presParOf" srcId="{7852B3C2-A44C-F446-9060-CA21A0D28991}" destId="{27EB4548-6597-7A48-B8EB-8D5D075E0879}" srcOrd="11" destOrd="0" presId="urn:microsoft.com/office/officeart/2008/layout/LinedList"/>
     <dgm:cxn modelId="{305C651D-0D92-1E46-AC15-0FFBF9C77550}" type="presParOf" srcId="{27EB4548-6597-7A48-B8EB-8D5D075E0879}" destId="{B71E94BA-938F-EC4F-AA59-749EE236EA14}" srcOrd="0" destOrd="0" presId="urn:microsoft.com/office/officeart/2008/layout/LinedList"/>
     <dgm:cxn modelId="{6A8C2A6C-DA48-E74E-9F29-7B72A279E967}" type="presParOf" srcId="{27EB4548-6597-7A48-B8EB-8D5D075E0879}" destId="{AB286E63-B7A7-4244-8719-A27E1E499373}" srcOrd="1" destOrd="0" presId="urn:microsoft.com/office/officeart/2008/layout/LinedList"/>
-    <dgm:cxn modelId="{D4FDD938-A0E5-1344-91E8-DB626E229B73}" type="presParOf" srcId="{7852B3C2-A44C-F446-9060-CA21A0D28991}" destId="{20D72B1E-AD82-9E49-86D8-09A4DD4D6212}" srcOrd="14" destOrd="0" presId="urn:microsoft.com/office/officeart/2008/layout/LinedList"/>
-    <dgm:cxn modelId="{3CB3EB14-3FB4-7040-B2C6-572E38DFBAF8}" type="presParOf" srcId="{7852B3C2-A44C-F446-9060-CA21A0D28991}" destId="{FE30EA44-022B-FF41-BE9E-EF735E26A50E}" srcOrd="15" destOrd="0" presId="urn:microsoft.com/office/officeart/2008/layout/LinedList"/>
+    <dgm:cxn modelId="{D4FDD938-A0E5-1344-91E8-DB626E229B73}" type="presParOf" srcId="{7852B3C2-A44C-F446-9060-CA21A0D28991}" destId="{20D72B1E-AD82-9E49-86D8-09A4DD4D6212}" srcOrd="12" destOrd="0" presId="urn:microsoft.com/office/officeart/2008/layout/LinedList"/>
+    <dgm:cxn modelId="{3CB3EB14-3FB4-7040-B2C6-572E38DFBAF8}" type="presParOf" srcId="{7852B3C2-A44C-F446-9060-CA21A0D28991}" destId="{FE30EA44-022B-FF41-BE9E-EF735E26A50E}" srcOrd="13" destOrd="0" presId="urn:microsoft.com/office/officeart/2008/layout/LinedList"/>
     <dgm:cxn modelId="{0ECA1AF6-D499-C74C-B742-8D288CCF75FA}" type="presParOf" srcId="{FE30EA44-022B-FF41-BE9E-EF735E26A50E}" destId="{08701614-A5A0-9544-95A3-640A46D860BF}" srcOrd="0" destOrd="0" presId="urn:microsoft.com/office/officeart/2008/layout/LinedList"/>
     <dgm:cxn modelId="{AD84564D-97AD-C847-ACA7-6607F1C92514}" type="presParOf" srcId="{FE30EA44-022B-FF41-BE9E-EF735E26A50E}" destId="{5BC0372B-66B7-0640-8199-37B331256C9A}" srcOrd="1" destOrd="0" presId="urn:microsoft.com/office/officeart/2008/layout/LinedList"/>
   </dgm:cxnLst>
@@ -1393,7 +1351,7 @@
       </dsp:nvSpPr>
       <dsp:spPr>
         <a:xfrm>
-          <a:off x="0" y="0"/>
+          <a:off x="0" y="531"/>
           <a:ext cx="10515600" cy="0"/>
         </a:xfrm>
         <a:prstGeom prst="line">
@@ -1443,8 +1401,8 @@
       </dsp:nvSpPr>
       <dsp:spPr>
         <a:xfrm>
-          <a:off x="0" y="0"/>
-          <a:ext cx="10515600" cy="543917"/>
+          <a:off x="0" y="531"/>
+          <a:ext cx="10515600" cy="621467"/>
         </a:xfrm>
         <a:prstGeom prst="rect">
           <a:avLst/>
@@ -1468,12 +1426,12 @@
         <a:fontRef idx="minor"/>
       </dsp:style>
       <dsp:txBody>
-        <a:bodyPr spcFirstLastPara="0" vert="horz" wrap="square" lIns="95250" tIns="95250" rIns="95250" bIns="95250" numCol="1" spcCol="1270" anchor="t" anchorCtr="0">
+        <a:bodyPr spcFirstLastPara="0" vert="horz" wrap="square" lIns="106680" tIns="106680" rIns="106680" bIns="106680" numCol="1" spcCol="1270" anchor="t" anchorCtr="0">
           <a:noAutofit/>
         </a:bodyPr>
         <a:lstStyle/>
         <a:p>
-          <a:pPr marL="0" lvl="0" indent="0" algn="l" defTabSz="1111250">
+          <a:pPr marL="0" lvl="0" indent="0" algn="l" defTabSz="1244600">
             <a:lnSpc>
               <a:spcPct val="90000"/>
             </a:lnSpc>
@@ -1486,15 +1444,15 @@
             <a:buNone/>
           </a:pPr>
           <a:r>
-            <a:rPr lang="de-DE" sz="2500" b="0" kern="1200" dirty="0"/>
+            <a:rPr lang="de-DE" sz="2800" b="0" kern="1200" dirty="0"/>
             <a:t>Deep Learning</a:t>
           </a:r>
-          <a:endParaRPr lang="en-US" sz="2500" b="0" kern="1200" dirty="0"/>
+          <a:endParaRPr lang="en-US" sz="2800" b="0" kern="1200" dirty="0"/>
         </a:p>
       </dsp:txBody>
       <dsp:txXfrm>
-        <a:off x="0" y="0"/>
-        <a:ext cx="10515600" cy="543917"/>
+        <a:off x="0" y="531"/>
+        <a:ext cx="10515600" cy="621467"/>
       </dsp:txXfrm>
     </dsp:sp>
     <dsp:sp modelId="{A11F9CE2-7889-D042-B67A-3B946F072596}">
@@ -1504,7 +1462,7 @@
       </dsp:nvSpPr>
       <dsp:spPr>
         <a:xfrm>
-          <a:off x="0" y="543917"/>
+          <a:off x="0" y="621999"/>
           <a:ext cx="10515600" cy="0"/>
         </a:xfrm>
         <a:prstGeom prst="line">
@@ -1554,8 +1512,8 @@
       </dsp:nvSpPr>
       <dsp:spPr>
         <a:xfrm>
-          <a:off x="0" y="543917"/>
-          <a:ext cx="10515600" cy="543917"/>
+          <a:off x="0" y="621999"/>
+          <a:ext cx="10515600" cy="621467"/>
         </a:xfrm>
         <a:prstGeom prst="rect">
           <a:avLst/>
@@ -1579,12 +1537,12 @@
         <a:fontRef idx="minor"/>
       </dsp:style>
       <dsp:txBody>
-        <a:bodyPr spcFirstLastPara="0" vert="horz" wrap="square" lIns="95250" tIns="95250" rIns="95250" bIns="95250" numCol="1" spcCol="1270" anchor="t" anchorCtr="0">
+        <a:bodyPr spcFirstLastPara="0" vert="horz" wrap="square" lIns="106680" tIns="106680" rIns="106680" bIns="106680" numCol="1" spcCol="1270" anchor="t" anchorCtr="0">
           <a:noAutofit/>
         </a:bodyPr>
         <a:lstStyle/>
         <a:p>
-          <a:pPr marL="0" lvl="0" indent="0" algn="l" defTabSz="1111250">
+          <a:pPr marL="0" lvl="0" indent="0" algn="l" defTabSz="1244600">
             <a:lnSpc>
               <a:spcPct val="90000"/>
             </a:lnSpc>
@@ -1597,15 +1555,15 @@
             <a:buNone/>
           </a:pPr>
           <a:r>
-            <a:rPr lang="de-DE" sz="2500" b="0" kern="1200" dirty="0"/>
+            <a:rPr lang="de-DE" sz="2800" b="0" kern="1200" dirty="0"/>
             <a:t>Transformer</a:t>
           </a:r>
-          <a:endParaRPr lang="en-US" sz="2500" b="0" kern="1200" dirty="0"/>
+          <a:endParaRPr lang="en-US" sz="2800" b="0" kern="1200" dirty="0"/>
         </a:p>
       </dsp:txBody>
       <dsp:txXfrm>
-        <a:off x="0" y="543917"/>
-        <a:ext cx="10515600" cy="543917"/>
+        <a:off x="0" y="621999"/>
+        <a:ext cx="10515600" cy="621467"/>
       </dsp:txXfrm>
     </dsp:sp>
     <dsp:sp modelId="{9D950D6B-5C89-8A48-9960-CA8B4C499A1A}">
@@ -1615,7 +1573,7 @@
       </dsp:nvSpPr>
       <dsp:spPr>
         <a:xfrm>
-          <a:off x="0" y="1087834"/>
+          <a:off x="0" y="1243467"/>
           <a:ext cx="10515600" cy="0"/>
         </a:xfrm>
         <a:prstGeom prst="line">
@@ -1665,8 +1623,8 @@
       </dsp:nvSpPr>
       <dsp:spPr>
         <a:xfrm>
-          <a:off x="0" y="1087834"/>
-          <a:ext cx="10515600" cy="543917"/>
+          <a:off x="0" y="1243467"/>
+          <a:ext cx="10515600" cy="621467"/>
         </a:xfrm>
         <a:prstGeom prst="rect">
           <a:avLst/>
@@ -1690,12 +1648,12 @@
         <a:fontRef idx="minor"/>
       </dsp:style>
       <dsp:txBody>
-        <a:bodyPr spcFirstLastPara="0" vert="horz" wrap="square" lIns="95250" tIns="95250" rIns="95250" bIns="95250" numCol="1" spcCol="1270" anchor="t" anchorCtr="0">
+        <a:bodyPr spcFirstLastPara="0" vert="horz" wrap="square" lIns="106680" tIns="106680" rIns="106680" bIns="106680" numCol="1" spcCol="1270" anchor="t" anchorCtr="0">
           <a:noAutofit/>
         </a:bodyPr>
         <a:lstStyle/>
         <a:p>
-          <a:pPr marL="0" lvl="0" indent="0" algn="l" defTabSz="1111250">
+          <a:pPr marL="0" lvl="0" indent="0" algn="l" defTabSz="1244600">
             <a:lnSpc>
               <a:spcPct val="90000"/>
             </a:lnSpc>
@@ -1708,14 +1666,14 @@
             <a:buNone/>
           </a:pPr>
           <a:r>
-            <a:rPr lang="en-US" sz="2500" b="0" kern="1200" dirty="0"/>
+            <a:rPr lang="en-US" sz="2800" b="0" kern="1200" dirty="0"/>
             <a:t>LLMs</a:t>
           </a:r>
         </a:p>
       </dsp:txBody>
       <dsp:txXfrm>
-        <a:off x="0" y="1087834"/>
-        <a:ext cx="10515600" cy="543917"/>
+        <a:off x="0" y="1243467"/>
+        <a:ext cx="10515600" cy="621467"/>
       </dsp:txXfrm>
     </dsp:sp>
     <dsp:sp modelId="{34CF0AAF-5C3E-5349-AD9D-2034F634313C}">
@@ -1725,7 +1683,7 @@
       </dsp:nvSpPr>
       <dsp:spPr>
         <a:xfrm>
-          <a:off x="0" y="1631751"/>
+          <a:off x="0" y="1864935"/>
           <a:ext cx="10515600" cy="0"/>
         </a:xfrm>
         <a:prstGeom prst="line">
@@ -1775,8 +1733,8 @@
       </dsp:nvSpPr>
       <dsp:spPr>
         <a:xfrm>
-          <a:off x="0" y="1631751"/>
-          <a:ext cx="10515600" cy="543917"/>
+          <a:off x="0" y="1864935"/>
+          <a:ext cx="10515600" cy="621467"/>
         </a:xfrm>
         <a:prstGeom prst="rect">
           <a:avLst/>
@@ -1800,12 +1758,12 @@
         <a:fontRef idx="minor"/>
       </dsp:style>
       <dsp:txBody>
-        <a:bodyPr spcFirstLastPara="0" vert="horz" wrap="square" lIns="95250" tIns="95250" rIns="95250" bIns="95250" numCol="1" spcCol="1270" anchor="t" anchorCtr="0">
+        <a:bodyPr spcFirstLastPara="0" vert="horz" wrap="square" lIns="106680" tIns="106680" rIns="106680" bIns="106680" numCol="1" spcCol="1270" anchor="t" anchorCtr="0">
           <a:noAutofit/>
         </a:bodyPr>
         <a:lstStyle/>
         <a:p>
-          <a:pPr marL="0" lvl="0" indent="0" algn="l" defTabSz="1111250">
+          <a:pPr marL="0" lvl="0" indent="0" algn="l" defTabSz="1244600">
             <a:lnSpc>
               <a:spcPct val="90000"/>
             </a:lnSpc>
@@ -1818,14 +1776,14 @@
             <a:buNone/>
           </a:pPr>
           <a:r>
-            <a:rPr lang="en-US" sz="2500" b="0" kern="1200" dirty="0"/>
+            <a:rPr lang="en-US" sz="2800" b="0" kern="1200" dirty="0"/>
             <a:t>Context Engineering</a:t>
           </a:r>
         </a:p>
       </dsp:txBody>
       <dsp:txXfrm>
-        <a:off x="0" y="1631751"/>
-        <a:ext cx="10515600" cy="543917"/>
+        <a:off x="0" y="1864935"/>
+        <a:ext cx="10515600" cy="621467"/>
       </dsp:txXfrm>
     </dsp:sp>
     <dsp:sp modelId="{8A505F94-65E4-9D41-AC2C-CCE8BD4C175F}">
@@ -1835,7 +1793,7 @@
       </dsp:nvSpPr>
       <dsp:spPr>
         <a:xfrm>
-          <a:off x="0" y="2175669"/>
+          <a:off x="0" y="2486402"/>
           <a:ext cx="10515600" cy="0"/>
         </a:xfrm>
         <a:prstGeom prst="line">
@@ -1885,8 +1843,8 @@
       </dsp:nvSpPr>
       <dsp:spPr>
         <a:xfrm>
-          <a:off x="0" y="2175669"/>
-          <a:ext cx="10515600" cy="543917"/>
+          <a:off x="0" y="2486402"/>
+          <a:ext cx="10515600" cy="621467"/>
         </a:xfrm>
         <a:prstGeom prst="rect">
           <a:avLst/>
@@ -1910,12 +1868,12 @@
         <a:fontRef idx="minor"/>
       </dsp:style>
       <dsp:txBody>
-        <a:bodyPr spcFirstLastPara="0" vert="horz" wrap="square" lIns="95250" tIns="95250" rIns="95250" bIns="95250" numCol="1" spcCol="1270" anchor="t" anchorCtr="0">
+        <a:bodyPr spcFirstLastPara="0" vert="horz" wrap="square" lIns="106680" tIns="106680" rIns="106680" bIns="106680" numCol="1" spcCol="1270" anchor="t" anchorCtr="0">
           <a:noAutofit/>
         </a:bodyPr>
         <a:lstStyle/>
         <a:p>
-          <a:pPr marL="0" lvl="0" indent="0" algn="l" defTabSz="1111250">
+          <a:pPr marL="0" lvl="0" indent="0" algn="l" defTabSz="1244600">
             <a:lnSpc>
               <a:spcPct val="90000"/>
             </a:lnSpc>
@@ -1928,125 +1886,15 @@
             <a:buNone/>
           </a:pPr>
           <a:r>
-            <a:rPr lang="de-DE" sz="2500" b="1" kern="1200" dirty="0"/>
+            <a:rPr lang="de-DE" sz="2800" b="1" kern="1200"/>
             <a:t>Finetuning</a:t>
           </a:r>
-          <a:endParaRPr lang="en-US" sz="2500" b="1" kern="1200" dirty="0"/>
+          <a:endParaRPr lang="en-US" sz="2800" b="1" kern="1200" dirty="0"/>
         </a:p>
       </dsp:txBody>
       <dsp:txXfrm>
-        <a:off x="0" y="2175669"/>
-        <a:ext cx="10515600" cy="543917"/>
-      </dsp:txXfrm>
-    </dsp:sp>
-    <dsp:sp modelId="{322460D7-6763-F646-87E9-10A1FE9FDC20}">
-      <dsp:nvSpPr>
-        <dsp:cNvPr id="0" name=""/>
-        <dsp:cNvSpPr/>
-      </dsp:nvSpPr>
-      <dsp:spPr>
-        <a:xfrm>
-          <a:off x="0" y="2719586"/>
-          <a:ext cx="10515600" cy="0"/>
-        </a:xfrm>
-        <a:prstGeom prst="line">
-          <a:avLst/>
-        </a:prstGeom>
-        <a:solidFill>
-          <a:schemeClr val="accent1">
-            <a:hueOff val="0"/>
-            <a:satOff val="0"/>
-            <a:lumOff val="0"/>
-            <a:alphaOff val="0"/>
-          </a:schemeClr>
-        </a:solidFill>
-        <a:ln w="19050" cap="flat" cmpd="sng" algn="ctr">
-          <a:solidFill>
-            <a:schemeClr val="accent1">
-              <a:hueOff val="0"/>
-              <a:satOff val="0"/>
-              <a:lumOff val="0"/>
-              <a:alphaOff val="0"/>
-            </a:schemeClr>
-          </a:solidFill>
-          <a:prstDash val="solid"/>
-          <a:miter lim="800000"/>
-        </a:ln>
-        <a:effectLst/>
-      </dsp:spPr>
-      <dsp:style>
-        <a:lnRef idx="2">
-          <a:scrgbClr r="0" g="0" b="0"/>
-        </a:lnRef>
-        <a:fillRef idx="1">
-          <a:scrgbClr r="0" g="0" b="0"/>
-        </a:fillRef>
-        <a:effectRef idx="0">
-          <a:scrgbClr r="0" g="0" b="0"/>
-        </a:effectRef>
-        <a:fontRef idx="minor">
-          <a:schemeClr val="lt1"/>
-        </a:fontRef>
-      </dsp:style>
-    </dsp:sp>
-    <dsp:sp modelId="{9B5DA0EB-3C02-EE40-A02E-5B28D39BEF31}">
-      <dsp:nvSpPr>
-        <dsp:cNvPr id="0" name=""/>
-        <dsp:cNvSpPr/>
-      </dsp:nvSpPr>
-      <dsp:spPr>
-        <a:xfrm>
-          <a:off x="0" y="2719586"/>
-          <a:ext cx="10515600" cy="543917"/>
-        </a:xfrm>
-        <a:prstGeom prst="rect">
-          <a:avLst/>
-        </a:prstGeom>
-        <a:noFill/>
-        <a:ln>
-          <a:noFill/>
-        </a:ln>
-        <a:effectLst/>
-      </dsp:spPr>
-      <dsp:style>
-        <a:lnRef idx="0">
-          <a:scrgbClr r="0" g="0" b="0"/>
-        </a:lnRef>
-        <a:fillRef idx="0">
-          <a:scrgbClr r="0" g="0" b="0"/>
-        </a:fillRef>
-        <a:effectRef idx="0">
-          <a:scrgbClr r="0" g="0" b="0"/>
-        </a:effectRef>
-        <a:fontRef idx="minor"/>
-      </dsp:style>
-      <dsp:txBody>
-        <a:bodyPr spcFirstLastPara="0" vert="horz" wrap="square" lIns="95250" tIns="95250" rIns="95250" bIns="95250" numCol="1" spcCol="1270" anchor="t" anchorCtr="0">
-          <a:noAutofit/>
-        </a:bodyPr>
-        <a:lstStyle/>
-        <a:p>
-          <a:pPr marL="0" lvl="0" indent="0" algn="l" defTabSz="1111250">
-            <a:lnSpc>
-              <a:spcPct val="90000"/>
-            </a:lnSpc>
-            <a:spcBef>
-              <a:spcPct val="0"/>
-            </a:spcBef>
-            <a:spcAft>
-              <a:spcPct val="35000"/>
-            </a:spcAft>
-            <a:buNone/>
-          </a:pPr>
-          <a:r>
-            <a:rPr lang="en-US" sz="2500" b="0" kern="1200" dirty="0"/>
-            <a:t>Instruction Tuning</a:t>
-          </a:r>
-        </a:p>
-      </dsp:txBody>
-      <dsp:txXfrm>
-        <a:off x="0" y="2719586"/>
-        <a:ext cx="10515600" cy="543917"/>
+        <a:off x="0" y="2486402"/>
+        <a:ext cx="10515600" cy="621467"/>
       </dsp:txXfrm>
     </dsp:sp>
     <dsp:sp modelId="{3D5DC94A-13EE-9348-AB63-BA6D7AB77EF3}">
@@ -2056,7 +1904,7 @@
       </dsp:nvSpPr>
       <dsp:spPr>
         <a:xfrm>
-          <a:off x="0" y="3263503"/>
+          <a:off x="0" y="3107870"/>
           <a:ext cx="10515600" cy="0"/>
         </a:xfrm>
         <a:prstGeom prst="line">
@@ -2106,8 +1954,8 @@
       </dsp:nvSpPr>
       <dsp:spPr>
         <a:xfrm>
-          <a:off x="0" y="3263503"/>
-          <a:ext cx="10515600" cy="543917"/>
+          <a:off x="0" y="3107870"/>
+          <a:ext cx="10515600" cy="621467"/>
         </a:xfrm>
         <a:prstGeom prst="rect">
           <a:avLst/>
@@ -2131,12 +1979,12 @@
         <a:fontRef idx="minor"/>
       </dsp:style>
       <dsp:txBody>
-        <a:bodyPr spcFirstLastPara="0" vert="horz" wrap="square" lIns="95250" tIns="95250" rIns="95250" bIns="95250" numCol="1" spcCol="1270" anchor="t" anchorCtr="0">
+        <a:bodyPr spcFirstLastPara="0" vert="horz" wrap="square" lIns="106680" tIns="106680" rIns="106680" bIns="106680" numCol="1" spcCol="1270" anchor="t" anchorCtr="0">
           <a:noAutofit/>
         </a:bodyPr>
         <a:lstStyle/>
         <a:p>
-          <a:pPr marL="0" lvl="0" indent="0" algn="l" defTabSz="1111250">
+          <a:pPr marL="0" lvl="0" indent="0" algn="l" defTabSz="1244600">
             <a:lnSpc>
               <a:spcPct val="90000"/>
             </a:lnSpc>
@@ -2149,15 +1997,15 @@
             <a:buNone/>
           </a:pPr>
           <a:r>
-            <a:rPr lang="de-DE" sz="2500" kern="1200" dirty="0" err="1"/>
+            <a:rPr lang="de-DE" sz="2800" kern="1200" dirty="0" err="1"/>
             <a:t>Agents</a:t>
           </a:r>
-          <a:endParaRPr lang="en-US" sz="2500" kern="1200" dirty="0"/>
+          <a:endParaRPr lang="en-US" sz="2800" kern="1200" dirty="0"/>
         </a:p>
       </dsp:txBody>
       <dsp:txXfrm>
-        <a:off x="0" y="3263503"/>
-        <a:ext cx="10515600" cy="543917"/>
+        <a:off x="0" y="3107870"/>
+        <a:ext cx="10515600" cy="621467"/>
       </dsp:txXfrm>
     </dsp:sp>
     <dsp:sp modelId="{20D72B1E-AD82-9E49-86D8-09A4DD4D6212}">
@@ -2167,7 +2015,7 @@
       </dsp:nvSpPr>
       <dsp:spPr>
         <a:xfrm>
-          <a:off x="0" y="3807420"/>
+          <a:off x="0" y="3729338"/>
           <a:ext cx="10515600" cy="0"/>
         </a:xfrm>
         <a:prstGeom prst="line">
@@ -2217,8 +2065,8 @@
       </dsp:nvSpPr>
       <dsp:spPr>
         <a:xfrm>
-          <a:off x="0" y="3807420"/>
-          <a:ext cx="10515600" cy="543917"/>
+          <a:off x="0" y="3729338"/>
+          <a:ext cx="10515600" cy="621467"/>
         </a:xfrm>
         <a:prstGeom prst="rect">
           <a:avLst/>
@@ -2242,12 +2090,12 @@
         <a:fontRef idx="minor"/>
       </dsp:style>
       <dsp:txBody>
-        <a:bodyPr spcFirstLastPara="0" vert="horz" wrap="square" lIns="95250" tIns="95250" rIns="95250" bIns="95250" numCol="1" spcCol="1270" anchor="t" anchorCtr="0">
+        <a:bodyPr spcFirstLastPara="0" vert="horz" wrap="square" lIns="106680" tIns="106680" rIns="106680" bIns="106680" numCol="1" spcCol="1270" anchor="t" anchorCtr="0">
           <a:noAutofit/>
         </a:bodyPr>
         <a:lstStyle/>
         <a:p>
-          <a:pPr marL="0" lvl="0" indent="0" algn="l" defTabSz="1111250">
+          <a:pPr marL="0" lvl="0" indent="0" algn="l" defTabSz="1244600">
             <a:lnSpc>
               <a:spcPct val="90000"/>
             </a:lnSpc>
@@ -2260,15 +2108,15 @@
             <a:buNone/>
           </a:pPr>
           <a:r>
-            <a:rPr lang="de-DE" sz="2500" b="0" kern="1200" dirty="0"/>
+            <a:rPr lang="de-DE" sz="2800" b="0" kern="1200" dirty="0"/>
             <a:t>The Bigger Picture</a:t>
           </a:r>
-          <a:endParaRPr lang="en-US" sz="2500" b="0" kern="1200" dirty="0"/>
+          <a:endParaRPr lang="en-US" sz="2800" b="0" kern="1200" dirty="0"/>
         </a:p>
       </dsp:txBody>
       <dsp:txXfrm>
-        <a:off x="0" y="3807420"/>
-        <a:ext cx="10515600" cy="543917"/>
+        <a:off x="0" y="3729338"/>
+        <a:ext cx="10515600" cy="621467"/>
       </dsp:txXfrm>
     </dsp:sp>
   </dsp:spTree>
@@ -3857,7 +3705,7 @@
           <a:p>
             <a:fld id="{17938448-F949-A340-94CF-EFC7FB146DC3}" type="datetimeFigureOut">
               <a:rPr lang="de-DE" smtClean="0"/>
-              <a:t>18.07.25</a:t>
+              <a:t>12.09.25</a:t>
             </a:fld>
             <a:endParaRPr lang="de-DE"/>
           </a:p>
@@ -4271,7 +4119,7 @@
           <a:p>
             <a:fld id="{E5C7ACC2-601D-4B49-AF12-AE7E0A409668}" type="datetime1">
               <a:rPr lang="de-DE" smtClean="0"/>
-              <a:t>18.07.25</a:t>
+              <a:t>12.09.25</a:t>
             </a:fld>
             <a:endParaRPr lang="de-DE"/>
           </a:p>
@@ -4469,7 +4317,7 @@
           <a:p>
             <a:fld id="{B1E06029-94C2-D041-AE64-8D99E258F8A3}" type="datetime1">
               <a:rPr lang="de-DE" smtClean="0"/>
-              <a:t>18.07.25</a:t>
+              <a:t>12.09.25</a:t>
             </a:fld>
             <a:endParaRPr lang="de-DE"/>
           </a:p>
@@ -4677,7 +4525,7 @@
           <a:p>
             <a:fld id="{68EC3790-B7B2-CE44-8ABE-1653D553799B}" type="datetime1">
               <a:rPr lang="de-DE" smtClean="0"/>
-              <a:t>18.07.25</a:t>
+              <a:t>12.09.25</a:t>
             </a:fld>
             <a:endParaRPr lang="de-DE"/>
           </a:p>
@@ -4875,7 +4723,7 @@
           <a:p>
             <a:fld id="{BC54D07D-C13F-4E4C-B9AC-279F2B3CA927}" type="datetime1">
               <a:rPr lang="de-DE" smtClean="0"/>
-              <a:t>18.07.25</a:t>
+              <a:t>12.09.25</a:t>
             </a:fld>
             <a:endParaRPr lang="de-DE"/>
           </a:p>
@@ -5150,7 +4998,7 @@
           <a:p>
             <a:fld id="{E5E61780-2A28-3749-A212-7540F54B9465}" type="datetime1">
               <a:rPr lang="de-DE" smtClean="0"/>
-              <a:t>18.07.25</a:t>
+              <a:t>12.09.25</a:t>
             </a:fld>
             <a:endParaRPr lang="de-DE"/>
           </a:p>
@@ -5415,7 +5263,7 @@
           <a:p>
             <a:fld id="{A8E8D020-F608-DA44-840A-F653D7B34645}" type="datetime1">
               <a:rPr lang="de-DE" smtClean="0"/>
-              <a:t>18.07.25</a:t>
+              <a:t>12.09.25</a:t>
             </a:fld>
             <a:endParaRPr lang="de-DE"/>
           </a:p>
@@ -5827,7 +5675,7 @@
           <a:p>
             <a:fld id="{4E584096-D809-3C4A-B49B-20A875EFDFE8}" type="datetime1">
               <a:rPr lang="de-DE" smtClean="0"/>
-              <a:t>18.07.25</a:t>
+              <a:t>12.09.25</a:t>
             </a:fld>
             <a:endParaRPr lang="de-DE"/>
           </a:p>
@@ -5968,7 +5816,7 @@
           <a:p>
             <a:fld id="{88338CED-7C3B-D243-A7A7-180C1477BFE9}" type="datetime1">
               <a:rPr lang="de-DE" smtClean="0"/>
-              <a:t>18.07.25</a:t>
+              <a:t>12.09.25</a:t>
             </a:fld>
             <a:endParaRPr lang="de-DE"/>
           </a:p>
@@ -6081,7 +5929,7 @@
           <a:p>
             <a:fld id="{38293341-36E1-684C-B37A-E1CF770EFEDF}" type="datetime1">
               <a:rPr lang="de-DE" smtClean="0"/>
-              <a:t>18.07.25</a:t>
+              <a:t>12.09.25</a:t>
             </a:fld>
             <a:endParaRPr lang="de-DE"/>
           </a:p>
@@ -6392,7 +6240,7 @@
           <a:p>
             <a:fld id="{6700489F-99E0-0B4E-AC85-0F547BC7C4E9}" type="datetime1">
               <a:rPr lang="de-DE" smtClean="0"/>
-              <a:t>18.07.25</a:t>
+              <a:t>12.09.25</a:t>
             </a:fld>
             <a:endParaRPr lang="de-DE"/>
           </a:p>
@@ -6680,7 +6528,7 @@
           <a:p>
             <a:fld id="{92068F7F-BE24-2A45-927E-12FDF36DDAB4}" type="datetime1">
               <a:rPr lang="de-DE" smtClean="0"/>
-              <a:t>18.07.25</a:t>
+              <a:t>12.09.25</a:t>
             </a:fld>
             <a:endParaRPr lang="de-DE"/>
           </a:p>
@@ -6921,7 +6769,7 @@
           <a:p>
             <a:fld id="{7E62EDA1-0F0F-7343-82D4-3054E662EA0E}" type="datetime1">
               <a:rPr lang="de-DE" smtClean="0"/>
-              <a:t>18.07.25</a:t>
+              <a:t>12.09.25</a:t>
             </a:fld>
             <a:endParaRPr lang="de-DE"/>
           </a:p>
@@ -7427,10 +7275,10 @@
       </p:grpSpPr>
       <p:sp>
         <p:nvSpPr>
-          <p:cNvPr id="2" name="Title 1">
-            <a:extLst>
-              <a:ext uri="{FF2B5EF4-FFF2-40B4-BE49-F238E27FC236}">
-                <a16:creationId xmlns:a16="http://schemas.microsoft.com/office/drawing/2014/main" id="{C69AD07C-8362-D471-3F09-B2FC347557A6}"/>
+          <p:cNvPr id="2" name="Titel 1">
+            <a:extLst>
+              <a:ext uri="{FF2B5EF4-FFF2-40B4-BE49-F238E27FC236}">
+                <a16:creationId xmlns:a16="http://schemas.microsoft.com/office/drawing/2014/main" id="{2893F29B-BD86-3EF8-10C3-E57EA752C0F3}"/>
               </a:ext>
             </a:extLst>
           </p:cNvPr>
@@ -7446,19 +7294,16 @@
           <a:bodyPr/>
           <a:lstStyle/>
           <a:p>
-            <a:r>
-              <a:rPr lang="en-GB" dirty="0"/>
-              <a:t>Parameter-Efficient Finetuning (PEFT)</a:t>
-            </a:r>
-          </a:p>
-        </p:txBody>
-      </p:sp>
-      <p:sp>
-        <p:nvSpPr>
-          <p:cNvPr id="3" name="Content Placeholder 2">
-            <a:extLst>
-              <a:ext uri="{FF2B5EF4-FFF2-40B4-BE49-F238E27FC236}">
-                <a16:creationId xmlns:a16="http://schemas.microsoft.com/office/drawing/2014/main" id="{E9876C3D-25E9-6468-66D7-A1D0E870E374}"/>
+            <a:endParaRPr lang="de-DE"/>
+          </a:p>
+        </p:txBody>
+      </p:sp>
+      <p:sp>
+        <p:nvSpPr>
+          <p:cNvPr id="3" name="Inhaltsplatzhalter 2">
+            <a:extLst>
+              <a:ext uri="{FF2B5EF4-FFF2-40B4-BE49-F238E27FC236}">
+                <a16:creationId xmlns:a16="http://schemas.microsoft.com/office/drawing/2014/main" id="{EF684A05-346A-6203-E269-C1F6CFBE41A3}"/>
               </a:ext>
             </a:extLst>
           </p:cNvPr>
@@ -7469,6 +7314,4965 @@
             <p:ph idx="1"/>
           </p:nvPr>
         </p:nvSpPr>
+        <p:spPr/>
+        <p:txBody>
+          <a:bodyPr>
+            <a:normAutofit fontScale="55000" lnSpcReduction="20000"/>
+          </a:bodyPr>
+          <a:lstStyle/>
+          <a:p>
+            <a:pPr marL="0" indent="0">
+              <a:buNone/>
+            </a:pPr>
+            <a:r>
+              <a:rPr lang="en-GB" dirty="0"/>
+              <a:t>but uses a combination (average pooling or [CLS] token) of the hidden states of every token for projection to vector of logits</a:t>
+            </a:r>
+          </a:p>
+          <a:p>
+            <a:pPr marL="0" indent="0">
+              <a:buNone/>
+            </a:pPr>
+            <a:endParaRPr lang="de-DE" dirty="0">
+              <a:hlinkClick r:id="rId2"/>
+            </a:endParaRPr>
+          </a:p>
+          <a:p>
+            <a:pPr marL="0" indent="0">
+              <a:buNone/>
+            </a:pPr>
+            <a:r>
+              <a:rPr lang="en-DE">
+                <a:hlinkClick r:id="rId2"/>
+              </a:rPr>
+              <a:t>BERT</a:t>
+            </a:r>
+            <a:r>
+              <a:rPr lang="de-DE" dirty="0"/>
+              <a:t> (</a:t>
+            </a:r>
+            <a:r>
+              <a:rPr lang="de-DE" dirty="0" err="1"/>
+              <a:t>uses</a:t>
+            </a:r>
+            <a:r>
+              <a:rPr lang="de-DE" dirty="0"/>
+              <a:t> </a:t>
+            </a:r>
+            <a:r>
+              <a:rPr lang="en-GB" dirty="0"/>
+              <a:t>next-sentence prediction as additional pretraining objective</a:t>
+            </a:r>
+            <a:r>
+              <a:rPr lang="de-DE" dirty="0"/>
+              <a:t>)</a:t>
+            </a:r>
+          </a:p>
+          <a:p>
+            <a:pPr marL="0" indent="0">
+              <a:buNone/>
+            </a:pPr>
+            <a:endParaRPr lang="de-DE" dirty="0"/>
+          </a:p>
+          <a:p>
+            <a:r>
+              <a:rPr lang="de-DE" dirty="0" err="1"/>
+              <a:t>For</a:t>
+            </a:r>
+            <a:r>
+              <a:rPr lang="de-DE" dirty="0"/>
+              <a:t> </a:t>
+            </a:r>
+            <a:r>
+              <a:rPr lang="de-DE" dirty="0" err="1"/>
+              <a:t>each</a:t>
+            </a:r>
+            <a:r>
+              <a:rPr lang="de-DE" dirty="0"/>
+              <a:t> </a:t>
+            </a:r>
+            <a:r>
+              <a:rPr lang="de-DE" dirty="0" err="1"/>
+              <a:t>token</a:t>
+            </a:r>
+            <a:r>
+              <a:rPr lang="de-DE" dirty="0"/>
+              <a:t> </a:t>
+            </a:r>
+            <a:r>
+              <a:rPr lang="de-DE" dirty="0" err="1"/>
+              <a:t>selected</a:t>
+            </a:r>
+            <a:r>
+              <a:rPr lang="de-DE" dirty="0"/>
+              <a:t> </a:t>
+            </a:r>
+            <a:r>
+              <a:rPr lang="de-DE" dirty="0" err="1"/>
+              <a:t>for</a:t>
+            </a:r>
+            <a:r>
+              <a:rPr lang="de-DE" dirty="0"/>
+              <a:t> </a:t>
+            </a:r>
+            <a:r>
+              <a:rPr lang="de-DE" dirty="0" err="1"/>
+              <a:t>masking</a:t>
+            </a:r>
+            <a:r>
+              <a:rPr lang="de-DE" dirty="0"/>
+              <a:t> (15% </a:t>
+            </a:r>
+            <a:r>
+              <a:rPr lang="de-DE" dirty="0" err="1"/>
+              <a:t>of</a:t>
+            </a:r>
+            <a:r>
+              <a:rPr lang="de-DE" dirty="0"/>
+              <a:t> all </a:t>
+            </a:r>
+            <a:r>
+              <a:rPr lang="de-DE" dirty="0" err="1"/>
+              <a:t>tokens</a:t>
+            </a:r>
+            <a:r>
+              <a:rPr lang="de-DE" dirty="0"/>
+              <a:t>):</a:t>
+            </a:r>
+          </a:p>
+          <a:p>
+            <a:r>
+              <a:rPr lang="de-DE" b="1" dirty="0"/>
+              <a:t>80% </a:t>
+            </a:r>
+            <a:r>
+              <a:rPr lang="de-DE" b="1" dirty="0" err="1"/>
+              <a:t>of</a:t>
+            </a:r>
+            <a:r>
+              <a:rPr lang="de-DE" b="1" dirty="0"/>
+              <a:t> </a:t>
+            </a:r>
+            <a:r>
+              <a:rPr lang="de-DE" b="1" dirty="0" err="1"/>
+              <a:t>the</a:t>
+            </a:r>
+            <a:r>
+              <a:rPr lang="de-DE" b="1" dirty="0"/>
+              <a:t> time</a:t>
+            </a:r>
+            <a:r>
+              <a:rPr lang="de-DE" dirty="0"/>
+              <a:t> → </a:t>
+            </a:r>
+            <a:r>
+              <a:rPr lang="de-DE" dirty="0" err="1"/>
+              <a:t>Replace</a:t>
+            </a:r>
+            <a:r>
+              <a:rPr lang="de-DE" dirty="0"/>
+              <a:t> </a:t>
+            </a:r>
+            <a:r>
+              <a:rPr lang="de-DE" dirty="0" err="1"/>
+              <a:t>it</a:t>
+            </a:r>
+            <a:r>
+              <a:rPr lang="de-DE" dirty="0"/>
+              <a:t> </a:t>
+            </a:r>
+            <a:r>
+              <a:rPr lang="de-DE" dirty="0" err="1"/>
+              <a:t>with</a:t>
+            </a:r>
+            <a:r>
+              <a:rPr lang="de-DE" dirty="0"/>
+              <a:t> [MASK].</a:t>
+            </a:r>
+          </a:p>
+          <a:p>
+            <a:r>
+              <a:rPr lang="de-DE" dirty="0" err="1"/>
+              <a:t>Example</a:t>
+            </a:r>
+            <a:r>
+              <a:rPr lang="de-DE" dirty="0"/>
+              <a:t>: "</a:t>
+            </a:r>
+            <a:r>
+              <a:rPr lang="de-DE" dirty="0" err="1"/>
+              <a:t>the</a:t>
+            </a:r>
+            <a:r>
+              <a:rPr lang="de-DE" dirty="0"/>
+              <a:t> </a:t>
+            </a:r>
+            <a:r>
+              <a:rPr lang="de-DE" dirty="0" err="1"/>
+              <a:t>cat</a:t>
+            </a:r>
+            <a:r>
+              <a:rPr lang="de-DE" dirty="0"/>
+              <a:t> </a:t>
+            </a:r>
+            <a:r>
+              <a:rPr lang="de-DE" dirty="0" err="1"/>
+              <a:t>sat</a:t>
+            </a:r>
+            <a:r>
+              <a:rPr lang="de-DE" dirty="0"/>
+              <a:t>" → "</a:t>
+            </a:r>
+            <a:r>
+              <a:rPr lang="de-DE" dirty="0" err="1"/>
+              <a:t>the</a:t>
+            </a:r>
+            <a:r>
+              <a:rPr lang="de-DE" dirty="0"/>
+              <a:t> [MASK] </a:t>
+            </a:r>
+            <a:r>
+              <a:rPr lang="de-DE" dirty="0" err="1"/>
+              <a:t>sat</a:t>
+            </a:r>
+            <a:r>
+              <a:rPr lang="de-DE" dirty="0"/>
+              <a:t>".</a:t>
+            </a:r>
+          </a:p>
+          <a:p>
+            <a:r>
+              <a:rPr lang="de-DE" dirty="0"/>
+              <a:t>The </a:t>
+            </a:r>
+            <a:r>
+              <a:rPr lang="de-DE" dirty="0" err="1"/>
+              <a:t>embedding</a:t>
+            </a:r>
+            <a:r>
+              <a:rPr lang="de-DE" dirty="0"/>
+              <a:t> </a:t>
+            </a:r>
+            <a:r>
+              <a:rPr lang="de-DE" dirty="0" err="1"/>
+              <a:t>is</a:t>
+            </a:r>
+            <a:r>
+              <a:rPr lang="de-DE" dirty="0"/>
+              <a:t> </a:t>
+            </a:r>
+            <a:r>
+              <a:rPr lang="de-DE" dirty="0" err="1"/>
+              <a:t>the</a:t>
+            </a:r>
+            <a:r>
+              <a:rPr lang="de-DE" dirty="0"/>
+              <a:t> </a:t>
+            </a:r>
+            <a:r>
+              <a:rPr lang="de-DE" dirty="0" err="1"/>
+              <a:t>learned</a:t>
+            </a:r>
+            <a:r>
+              <a:rPr lang="de-DE" dirty="0"/>
+              <a:t> </a:t>
+            </a:r>
+            <a:r>
+              <a:rPr lang="de-DE" dirty="0" err="1"/>
+              <a:t>embedding</a:t>
+            </a:r>
+            <a:r>
+              <a:rPr lang="de-DE" dirty="0"/>
+              <a:t> </a:t>
+            </a:r>
+            <a:r>
+              <a:rPr lang="de-DE" dirty="0" err="1"/>
+              <a:t>vector</a:t>
+            </a:r>
+            <a:r>
+              <a:rPr lang="de-DE" dirty="0"/>
+              <a:t> </a:t>
+            </a:r>
+            <a:r>
+              <a:rPr lang="de-DE" dirty="0" err="1"/>
+              <a:t>for</a:t>
+            </a:r>
+            <a:r>
+              <a:rPr lang="de-DE" dirty="0"/>
+              <a:t> </a:t>
+            </a:r>
+            <a:r>
+              <a:rPr lang="de-DE" dirty="0" err="1"/>
+              <a:t>the</a:t>
+            </a:r>
+            <a:r>
+              <a:rPr lang="de-DE" dirty="0"/>
+              <a:t> [MASK] </a:t>
+            </a:r>
+            <a:r>
+              <a:rPr lang="de-DE" dirty="0" err="1"/>
+              <a:t>token</a:t>
+            </a:r>
+            <a:r>
+              <a:rPr lang="de-DE" dirty="0"/>
+              <a:t> (just like </a:t>
+            </a:r>
+            <a:r>
+              <a:rPr lang="de-DE" dirty="0" err="1"/>
+              <a:t>any</a:t>
+            </a:r>
+            <a:r>
+              <a:rPr lang="de-DE" dirty="0"/>
+              <a:t> </a:t>
+            </a:r>
+            <a:r>
+              <a:rPr lang="de-DE" dirty="0" err="1"/>
+              <a:t>other</a:t>
+            </a:r>
+            <a:r>
+              <a:rPr lang="de-DE" dirty="0"/>
+              <a:t> </a:t>
+            </a:r>
+            <a:r>
+              <a:rPr lang="de-DE" dirty="0" err="1"/>
+              <a:t>token</a:t>
+            </a:r>
+            <a:r>
+              <a:rPr lang="de-DE" dirty="0"/>
+              <a:t>).</a:t>
+            </a:r>
+          </a:p>
+          <a:p>
+            <a:r>
+              <a:rPr lang="de-DE" b="1" dirty="0"/>
+              <a:t>10% </a:t>
+            </a:r>
+            <a:r>
+              <a:rPr lang="de-DE" b="1" dirty="0" err="1"/>
+              <a:t>of</a:t>
+            </a:r>
+            <a:r>
+              <a:rPr lang="de-DE" b="1" dirty="0"/>
+              <a:t> </a:t>
+            </a:r>
+            <a:r>
+              <a:rPr lang="de-DE" b="1" dirty="0" err="1"/>
+              <a:t>the</a:t>
+            </a:r>
+            <a:r>
+              <a:rPr lang="de-DE" b="1" dirty="0"/>
+              <a:t> time</a:t>
+            </a:r>
+            <a:r>
+              <a:rPr lang="de-DE" dirty="0"/>
+              <a:t> → </a:t>
+            </a:r>
+            <a:r>
+              <a:rPr lang="de-DE" dirty="0" err="1"/>
+              <a:t>Replace</a:t>
+            </a:r>
+            <a:r>
+              <a:rPr lang="de-DE" dirty="0"/>
+              <a:t> </a:t>
+            </a:r>
+            <a:r>
+              <a:rPr lang="de-DE" dirty="0" err="1"/>
+              <a:t>it</a:t>
+            </a:r>
+            <a:r>
+              <a:rPr lang="de-DE" dirty="0"/>
+              <a:t> </a:t>
+            </a:r>
+            <a:r>
+              <a:rPr lang="de-DE" dirty="0" err="1"/>
+              <a:t>with</a:t>
+            </a:r>
+            <a:r>
+              <a:rPr lang="de-DE" dirty="0"/>
+              <a:t> a </a:t>
+            </a:r>
+            <a:r>
+              <a:rPr lang="de-DE" b="1" dirty="0" err="1"/>
+              <a:t>random</a:t>
+            </a:r>
+            <a:r>
+              <a:rPr lang="de-DE" b="1" dirty="0"/>
+              <a:t> </a:t>
+            </a:r>
+            <a:r>
+              <a:rPr lang="de-DE" b="1" dirty="0" err="1"/>
+              <a:t>token</a:t>
+            </a:r>
+            <a:r>
+              <a:rPr lang="de-DE" dirty="0"/>
+              <a:t> </a:t>
+            </a:r>
+            <a:r>
+              <a:rPr lang="de-DE" dirty="0" err="1"/>
+              <a:t>from</a:t>
+            </a:r>
+            <a:r>
+              <a:rPr lang="de-DE" dirty="0"/>
+              <a:t> </a:t>
+            </a:r>
+            <a:r>
+              <a:rPr lang="de-DE" dirty="0" err="1"/>
+              <a:t>the</a:t>
+            </a:r>
+            <a:r>
+              <a:rPr lang="de-DE" dirty="0"/>
+              <a:t> </a:t>
+            </a:r>
+            <a:r>
+              <a:rPr lang="de-DE" dirty="0" err="1"/>
+              <a:t>vocabulary</a:t>
+            </a:r>
+            <a:r>
+              <a:rPr lang="de-DE" dirty="0"/>
+              <a:t>.</a:t>
+            </a:r>
+          </a:p>
+          <a:p>
+            <a:r>
+              <a:rPr lang="de-DE" dirty="0" err="1"/>
+              <a:t>Prevents</a:t>
+            </a:r>
+            <a:r>
+              <a:rPr lang="de-DE" dirty="0"/>
+              <a:t> </a:t>
+            </a:r>
+            <a:r>
+              <a:rPr lang="de-DE" dirty="0" err="1"/>
+              <a:t>the</a:t>
+            </a:r>
+            <a:r>
+              <a:rPr lang="de-DE" dirty="0"/>
+              <a:t> </a:t>
+            </a:r>
+            <a:r>
+              <a:rPr lang="de-DE" dirty="0" err="1"/>
+              <a:t>model</a:t>
+            </a:r>
+            <a:r>
+              <a:rPr lang="de-DE" dirty="0"/>
+              <a:t> </a:t>
+            </a:r>
+            <a:r>
+              <a:rPr lang="de-DE" dirty="0" err="1"/>
+              <a:t>from</a:t>
+            </a:r>
+            <a:r>
+              <a:rPr lang="de-DE" dirty="0"/>
+              <a:t> </a:t>
+            </a:r>
+            <a:r>
+              <a:rPr lang="de-DE" dirty="0" err="1"/>
+              <a:t>overfitting</a:t>
+            </a:r>
+            <a:r>
+              <a:rPr lang="de-DE" dirty="0"/>
+              <a:t> </a:t>
+            </a:r>
+            <a:r>
+              <a:rPr lang="de-DE" dirty="0" err="1"/>
+              <a:t>to</a:t>
+            </a:r>
+            <a:r>
+              <a:rPr lang="de-DE" dirty="0"/>
+              <a:t> </a:t>
+            </a:r>
+            <a:r>
+              <a:rPr lang="de-DE" dirty="0" err="1"/>
+              <a:t>always</a:t>
+            </a:r>
+            <a:r>
+              <a:rPr lang="de-DE" dirty="0"/>
+              <a:t> </a:t>
+            </a:r>
+            <a:r>
+              <a:rPr lang="de-DE" dirty="0" err="1"/>
+              <a:t>associating</a:t>
+            </a:r>
+            <a:r>
+              <a:rPr lang="de-DE" dirty="0"/>
+              <a:t> [MASK] </a:t>
+            </a:r>
+            <a:r>
+              <a:rPr lang="de-DE" dirty="0" err="1"/>
+              <a:t>with</a:t>
+            </a:r>
+            <a:r>
+              <a:rPr lang="de-DE" dirty="0"/>
+              <a:t> </a:t>
+            </a:r>
+            <a:r>
+              <a:rPr lang="de-DE" dirty="0" err="1"/>
+              <a:t>prediction</a:t>
+            </a:r>
+            <a:r>
+              <a:rPr lang="de-DE" dirty="0"/>
+              <a:t>.</a:t>
+            </a:r>
+          </a:p>
+          <a:p>
+            <a:r>
+              <a:rPr lang="de-DE" b="1" dirty="0"/>
+              <a:t>10% </a:t>
+            </a:r>
+            <a:r>
+              <a:rPr lang="de-DE" b="1" dirty="0" err="1"/>
+              <a:t>of</a:t>
+            </a:r>
+            <a:r>
+              <a:rPr lang="de-DE" b="1" dirty="0"/>
+              <a:t> </a:t>
+            </a:r>
+            <a:r>
+              <a:rPr lang="de-DE" b="1" dirty="0" err="1"/>
+              <a:t>the</a:t>
+            </a:r>
+            <a:r>
+              <a:rPr lang="de-DE" b="1" dirty="0"/>
+              <a:t> time</a:t>
+            </a:r>
+            <a:r>
+              <a:rPr lang="de-DE" dirty="0"/>
+              <a:t> → </a:t>
+            </a:r>
+            <a:r>
+              <a:rPr lang="de-DE" dirty="0" err="1"/>
+              <a:t>Leave</a:t>
+            </a:r>
+            <a:r>
+              <a:rPr lang="de-DE" dirty="0"/>
+              <a:t> </a:t>
+            </a:r>
+            <a:r>
+              <a:rPr lang="de-DE" dirty="0" err="1"/>
+              <a:t>it</a:t>
+            </a:r>
+            <a:r>
+              <a:rPr lang="de-DE" dirty="0"/>
+              <a:t> </a:t>
+            </a:r>
+            <a:r>
+              <a:rPr lang="de-DE" b="1" dirty="0" err="1"/>
+              <a:t>unchanged</a:t>
+            </a:r>
+            <a:r>
+              <a:rPr lang="de-DE" dirty="0"/>
+              <a:t>.</a:t>
+            </a:r>
+          </a:p>
+          <a:p>
+            <a:r>
+              <a:rPr lang="de-DE" dirty="0"/>
+              <a:t>Forces </a:t>
+            </a:r>
+            <a:r>
+              <a:rPr lang="de-DE" dirty="0" err="1"/>
+              <a:t>the</a:t>
+            </a:r>
+            <a:r>
+              <a:rPr lang="de-DE" dirty="0"/>
+              <a:t> </a:t>
+            </a:r>
+            <a:r>
+              <a:rPr lang="de-DE" dirty="0" err="1"/>
+              <a:t>model</a:t>
+            </a:r>
+            <a:r>
+              <a:rPr lang="de-DE" dirty="0"/>
+              <a:t> </a:t>
+            </a:r>
+            <a:r>
+              <a:rPr lang="de-DE" dirty="0" err="1"/>
+              <a:t>to</a:t>
+            </a:r>
+            <a:r>
+              <a:rPr lang="de-DE" dirty="0"/>
+              <a:t> </a:t>
+            </a:r>
+            <a:r>
+              <a:rPr lang="de-DE" dirty="0" err="1"/>
+              <a:t>sometimes</a:t>
+            </a:r>
+            <a:r>
+              <a:rPr lang="de-DE" dirty="0"/>
+              <a:t> </a:t>
+            </a:r>
+            <a:r>
+              <a:rPr lang="de-DE" dirty="0" err="1"/>
+              <a:t>predict</a:t>
+            </a:r>
+            <a:r>
+              <a:rPr lang="de-DE" dirty="0"/>
+              <a:t> </a:t>
+            </a:r>
+            <a:r>
+              <a:rPr lang="de-DE" dirty="0" err="1"/>
+              <a:t>without</a:t>
+            </a:r>
+            <a:r>
+              <a:rPr lang="de-DE" dirty="0"/>
+              <a:t> </a:t>
+            </a:r>
+            <a:r>
+              <a:rPr lang="de-DE" dirty="0" err="1"/>
+              <a:t>seeing</a:t>
+            </a:r>
+            <a:r>
+              <a:rPr lang="de-DE" dirty="0"/>
+              <a:t> an explicit [MASK].</a:t>
+            </a:r>
+          </a:p>
+          <a:p>
+            <a:pPr marL="0" indent="0">
+              <a:buNone/>
+            </a:pPr>
+            <a:br>
+              <a:rPr lang="de-DE" dirty="0"/>
+            </a:br>
+            <a:r>
+              <a:rPr lang="de-DE" dirty="0" err="1"/>
+              <a:t>Regardless</a:t>
+            </a:r>
+            <a:r>
+              <a:rPr lang="de-DE" dirty="0"/>
+              <a:t> </a:t>
+            </a:r>
+            <a:r>
+              <a:rPr lang="de-DE" dirty="0" err="1"/>
+              <a:t>of</a:t>
+            </a:r>
+            <a:r>
+              <a:rPr lang="de-DE" dirty="0"/>
+              <a:t> </a:t>
+            </a:r>
+            <a:r>
+              <a:rPr lang="de-DE" dirty="0" err="1"/>
+              <a:t>which</a:t>
+            </a:r>
+            <a:r>
+              <a:rPr lang="de-DE" dirty="0"/>
+              <a:t> </a:t>
+            </a:r>
+            <a:r>
+              <a:rPr lang="de-DE" dirty="0" err="1"/>
+              <a:t>replacement</a:t>
+            </a:r>
+            <a:r>
+              <a:rPr lang="de-DE" dirty="0"/>
+              <a:t> </a:t>
+            </a:r>
+            <a:r>
+              <a:rPr lang="de-DE" dirty="0" err="1"/>
+              <a:t>is</a:t>
+            </a:r>
+            <a:r>
+              <a:rPr lang="de-DE" dirty="0"/>
+              <a:t> </a:t>
+            </a:r>
+            <a:r>
+              <a:rPr lang="de-DE" dirty="0" err="1"/>
+              <a:t>used</a:t>
+            </a:r>
+            <a:r>
+              <a:rPr lang="de-DE" dirty="0"/>
+              <a:t>, </a:t>
+            </a:r>
+            <a:r>
+              <a:rPr lang="de-DE" dirty="0" err="1"/>
+              <a:t>the</a:t>
+            </a:r>
+            <a:r>
+              <a:rPr lang="de-DE" dirty="0"/>
+              <a:t> </a:t>
+            </a:r>
+            <a:r>
+              <a:rPr lang="de-DE" b="1" dirty="0" err="1"/>
+              <a:t>loss</a:t>
+            </a:r>
+            <a:r>
+              <a:rPr lang="de-DE" b="1" dirty="0"/>
+              <a:t> </a:t>
+            </a:r>
+            <a:r>
+              <a:rPr lang="de-DE" b="1" dirty="0" err="1"/>
+              <a:t>is</a:t>
+            </a:r>
+            <a:r>
+              <a:rPr lang="de-DE" b="1" dirty="0"/>
+              <a:t> still </a:t>
+            </a:r>
+            <a:r>
+              <a:rPr lang="de-DE" b="1" dirty="0" err="1"/>
+              <a:t>computed</a:t>
+            </a:r>
+            <a:r>
+              <a:rPr lang="de-DE" b="1" dirty="0"/>
+              <a:t> </a:t>
+            </a:r>
+            <a:r>
+              <a:rPr lang="de-DE" b="1" dirty="0" err="1"/>
+              <a:t>against</a:t>
+            </a:r>
+            <a:r>
+              <a:rPr lang="de-DE" b="1" dirty="0"/>
+              <a:t> </a:t>
+            </a:r>
+            <a:r>
+              <a:rPr lang="de-DE" b="1" dirty="0" err="1"/>
+              <a:t>the</a:t>
+            </a:r>
+            <a:r>
+              <a:rPr lang="de-DE" b="1" dirty="0"/>
+              <a:t> original </a:t>
+            </a:r>
+            <a:r>
+              <a:rPr lang="de-DE" b="1" dirty="0" err="1"/>
+              <a:t>token</a:t>
+            </a:r>
+            <a:r>
+              <a:rPr lang="de-DE" dirty="0"/>
+              <a:t>.</a:t>
+            </a:r>
+          </a:p>
+        </p:txBody>
+      </p:sp>
+      <p:sp>
+        <p:nvSpPr>
+          <p:cNvPr id="4" name="Foliennummernplatzhalter 3">
+            <a:extLst>
+              <a:ext uri="{FF2B5EF4-FFF2-40B4-BE49-F238E27FC236}">
+                <a16:creationId xmlns:a16="http://schemas.microsoft.com/office/drawing/2014/main" id="{98A71D12-1308-5AA4-28A9-50891017FA54}"/>
+              </a:ext>
+            </a:extLst>
+          </p:cNvPr>
+          <p:cNvSpPr>
+            <a:spLocks noGrp="1"/>
+          </p:cNvSpPr>
+          <p:nvPr>
+            <p:ph type="sldNum" sz="quarter" idx="12"/>
+          </p:nvPr>
+        </p:nvSpPr>
+        <p:spPr/>
+        <p:txBody>
+          <a:bodyPr/>
+          <a:lstStyle/>
+          <a:p>
+            <a:fld id="{4055531C-5681-6B44-B2CA-926D7A74B06D}" type="slidenum">
+              <a:rPr lang="de-DE" smtClean="0"/>
+              <a:t>10</a:t>
+            </a:fld>
+            <a:endParaRPr lang="de-DE"/>
+          </a:p>
+        </p:txBody>
+      </p:sp>
+    </p:spTree>
+    <p:extLst>
+      <p:ext uri="{BB962C8B-B14F-4D97-AF65-F5344CB8AC3E}">
+        <p14:creationId xmlns:p14="http://schemas.microsoft.com/office/powerpoint/2010/main" val="209083973"/>
+      </p:ext>
+    </p:extLst>
+  </p:cSld>
+  <p:clrMapOvr>
+    <a:masterClrMapping/>
+  </p:clrMapOvr>
+</p:sld>
+</file>
+
+<file path=ppt/slides/slide11.xml><?xml version="1.0" encoding="utf-8"?>
+<p:sld xmlns:a="http://schemas.openxmlformats.org/drawingml/2006/main" xmlns:r="http://schemas.openxmlformats.org/officeDocument/2006/relationships" xmlns:p="http://schemas.openxmlformats.org/presentationml/2006/main">
+  <p:cSld>
+    <p:spTree>
+      <p:nvGrpSpPr>
+        <p:cNvPr id="1" name=""/>
+        <p:cNvGrpSpPr/>
+        <p:nvPr/>
+      </p:nvGrpSpPr>
+      <p:grpSpPr>
+        <a:xfrm>
+          <a:off x="0" y="0"/>
+          <a:ext cx="0" cy="0"/>
+          <a:chOff x="0" y="0"/>
+          <a:chExt cx="0" cy="0"/>
+        </a:xfrm>
+      </p:grpSpPr>
+      <p:sp>
+        <p:nvSpPr>
+          <p:cNvPr id="2" name="Titel 1">
+            <a:extLst>
+              <a:ext uri="{FF2B5EF4-FFF2-40B4-BE49-F238E27FC236}">
+                <a16:creationId xmlns:a16="http://schemas.microsoft.com/office/drawing/2014/main" id="{47377014-5C9A-61F9-AEB0-5422FFC74E48}"/>
+              </a:ext>
+            </a:extLst>
+          </p:cNvPr>
+          <p:cNvSpPr>
+            <a:spLocks noGrp="1"/>
+          </p:cNvSpPr>
+          <p:nvPr>
+            <p:ph type="title"/>
+          </p:nvPr>
+        </p:nvSpPr>
+        <p:spPr/>
+        <p:txBody>
+          <a:bodyPr/>
+          <a:lstStyle/>
+          <a:p>
+            <a:r>
+              <a:rPr lang="de-DE" dirty="0"/>
+              <a:t>BERT </a:t>
+            </a:r>
+            <a:r>
+              <a:rPr lang="de-DE" dirty="0" err="1"/>
+              <a:t>Variants</a:t>
+            </a:r>
+            <a:endParaRPr lang="de-DE" dirty="0"/>
+          </a:p>
+        </p:txBody>
+      </p:sp>
+      <p:sp>
+        <p:nvSpPr>
+          <p:cNvPr id="3" name="Inhaltsplatzhalter 2">
+            <a:extLst>
+              <a:ext uri="{FF2B5EF4-FFF2-40B4-BE49-F238E27FC236}">
+                <a16:creationId xmlns:a16="http://schemas.microsoft.com/office/drawing/2014/main" id="{E32E57AC-9AEC-A942-0A0F-644BB5F978B9}"/>
+              </a:ext>
+            </a:extLst>
+          </p:cNvPr>
+          <p:cNvSpPr>
+            <a:spLocks noGrp="1"/>
+          </p:cNvSpPr>
+          <p:nvPr>
+            <p:ph idx="1"/>
+          </p:nvPr>
+        </p:nvSpPr>
+        <p:spPr/>
+        <p:txBody>
+          <a:bodyPr>
+            <a:normAutofit/>
+          </a:bodyPr>
+          <a:lstStyle/>
+          <a:p>
+            <a:pPr marL="0" indent="0">
+              <a:buNone/>
+            </a:pPr>
+            <a:r>
+              <a:rPr lang="de-DE" sz="2400" dirty="0">
+                <a:hlinkClick r:id="rId2"/>
+              </a:rPr>
+              <a:t>RoBERTa</a:t>
+            </a:r>
+            <a:r>
+              <a:rPr lang="de-DE" sz="2400" b="1" dirty="0"/>
+              <a:t>: </a:t>
+            </a:r>
+            <a:r>
+              <a:rPr lang="de-DE" sz="2400" dirty="0" err="1"/>
+              <a:t>improved</a:t>
+            </a:r>
+            <a:r>
+              <a:rPr lang="de-DE" sz="2400" dirty="0"/>
+              <a:t> </a:t>
+            </a:r>
+            <a:r>
+              <a:rPr lang="de-DE" sz="2400" dirty="0" err="1"/>
+              <a:t>performance</a:t>
+            </a:r>
+            <a:endParaRPr lang="de-DE" sz="2400" dirty="0"/>
+          </a:p>
+          <a:p>
+            <a:r>
+              <a:rPr lang="de-DE" sz="1800" dirty="0" err="1"/>
+              <a:t>removed</a:t>
+            </a:r>
+            <a:r>
+              <a:rPr lang="de-DE" sz="1800" dirty="0"/>
+              <a:t> </a:t>
+            </a:r>
+            <a:r>
+              <a:rPr lang="de-DE" sz="1800" dirty="0" err="1"/>
+              <a:t>next</a:t>
+            </a:r>
+            <a:r>
+              <a:rPr lang="de-DE" sz="1800" dirty="0"/>
+              <a:t> </a:t>
+            </a:r>
+            <a:r>
+              <a:rPr lang="de-DE" sz="1800" dirty="0" err="1"/>
+              <a:t>sentence</a:t>
+            </a:r>
+            <a:r>
+              <a:rPr lang="de-DE" sz="1800" dirty="0"/>
+              <a:t> </a:t>
+            </a:r>
+            <a:r>
+              <a:rPr lang="de-DE" sz="1800" dirty="0" err="1"/>
+              <a:t>prediction</a:t>
+            </a:r>
+            <a:r>
+              <a:rPr lang="de-DE" sz="1800" dirty="0"/>
+              <a:t> </a:t>
+            </a:r>
+            <a:r>
+              <a:rPr lang="de-DE" sz="1800" dirty="0" err="1"/>
+              <a:t>as</a:t>
+            </a:r>
+            <a:r>
+              <a:rPr lang="de-DE" sz="1800" dirty="0"/>
+              <a:t> </a:t>
+            </a:r>
+            <a:r>
+              <a:rPr lang="de-DE" sz="1800" dirty="0" err="1"/>
+              <a:t>pretraining</a:t>
+            </a:r>
+            <a:r>
+              <a:rPr lang="de-DE" sz="1800" dirty="0"/>
+              <a:t> </a:t>
+            </a:r>
+            <a:r>
+              <a:rPr lang="de-DE" sz="1800" dirty="0" err="1"/>
+              <a:t>objective</a:t>
+            </a:r>
+            <a:r>
+              <a:rPr lang="de-DE" sz="1800" dirty="0"/>
+              <a:t> and …</a:t>
+            </a:r>
+          </a:p>
+          <a:p>
+            <a:r>
+              <a:rPr lang="de-DE" sz="1800" dirty="0"/>
+              <a:t>~</a:t>
+            </a:r>
+            <a:r>
+              <a:rPr lang="de-DE" sz="1800" dirty="0" err="1"/>
+              <a:t>ten</a:t>
+            </a:r>
+            <a:r>
+              <a:rPr lang="de-DE" sz="1800" dirty="0"/>
+              <a:t> </a:t>
+            </a:r>
+            <a:r>
+              <a:rPr lang="de-DE" sz="1800" dirty="0" err="1"/>
+              <a:t>times</a:t>
+            </a:r>
+            <a:r>
+              <a:rPr lang="de-DE" sz="1800" dirty="0"/>
+              <a:t> </a:t>
+            </a:r>
+            <a:r>
+              <a:rPr lang="de-DE" sz="1800" dirty="0" err="1"/>
+              <a:t>more</a:t>
+            </a:r>
+            <a:r>
+              <a:rPr lang="de-DE" sz="1800" dirty="0"/>
+              <a:t> </a:t>
+            </a:r>
+            <a:r>
+              <a:rPr lang="de-DE" sz="1800" dirty="0" err="1"/>
+              <a:t>training</a:t>
+            </a:r>
+            <a:r>
+              <a:rPr lang="de-DE" sz="1800" dirty="0"/>
+              <a:t> </a:t>
+            </a:r>
+            <a:r>
+              <a:rPr lang="de-DE" sz="1800" dirty="0" err="1"/>
+              <a:t>data</a:t>
+            </a:r>
+            <a:r>
+              <a:rPr lang="de-DE" sz="1800" dirty="0"/>
+              <a:t>, </a:t>
+            </a:r>
+            <a:r>
+              <a:rPr lang="de-DE" sz="1800" dirty="0" err="1"/>
+              <a:t>longer</a:t>
+            </a:r>
+            <a:r>
+              <a:rPr lang="de-DE" sz="1800" dirty="0"/>
+              <a:t> </a:t>
+            </a:r>
+            <a:r>
+              <a:rPr lang="de-DE" sz="1800" dirty="0" err="1"/>
+              <a:t>training</a:t>
+            </a:r>
+            <a:r>
+              <a:rPr lang="de-DE" sz="1800" dirty="0"/>
+              <a:t>, larger </a:t>
+            </a:r>
+            <a:r>
+              <a:rPr lang="de-DE" sz="1800" dirty="0" err="1"/>
+              <a:t>batches</a:t>
+            </a:r>
+            <a:r>
+              <a:rPr lang="de-DE" sz="1800" dirty="0"/>
+              <a:t>, </a:t>
+            </a:r>
+            <a:r>
+              <a:rPr lang="de-DE" sz="1800" dirty="0" err="1"/>
+              <a:t>longer</a:t>
+            </a:r>
+            <a:r>
+              <a:rPr lang="de-DE" sz="1800" dirty="0"/>
+              <a:t> </a:t>
+            </a:r>
+            <a:r>
+              <a:rPr lang="de-DE" sz="1800" dirty="0" err="1"/>
+              <a:t>sequences</a:t>
+            </a:r>
+            <a:endParaRPr lang="de-DE" sz="1800" dirty="0"/>
+          </a:p>
+          <a:p>
+            <a:r>
+              <a:rPr lang="de-DE" sz="1800" dirty="0" err="1"/>
+              <a:t>dynamic</a:t>
+            </a:r>
+            <a:r>
+              <a:rPr lang="de-DE" sz="1800" dirty="0"/>
+              <a:t> </a:t>
+            </a:r>
+            <a:r>
+              <a:rPr lang="de-DE" sz="1800" dirty="0" err="1"/>
+              <a:t>masking</a:t>
+            </a:r>
+            <a:r>
+              <a:rPr lang="de-DE" sz="1800" dirty="0"/>
+              <a:t>: </a:t>
+            </a:r>
+            <a:r>
+              <a:rPr lang="de-DE" sz="1800" dirty="0" err="1"/>
+              <a:t>instead</a:t>
+            </a:r>
+            <a:r>
+              <a:rPr lang="de-DE" sz="1800" dirty="0"/>
+              <a:t> </a:t>
+            </a:r>
+            <a:r>
+              <a:rPr lang="de-DE" sz="1800" dirty="0" err="1"/>
+              <a:t>of</a:t>
+            </a:r>
+            <a:r>
+              <a:rPr lang="de-DE" sz="1800" dirty="0"/>
+              <a:t> </a:t>
+            </a:r>
+            <a:r>
+              <a:rPr lang="de-DE" sz="1800" dirty="0" err="1"/>
+              <a:t>fixed</a:t>
+            </a:r>
+            <a:r>
+              <a:rPr lang="de-DE" sz="1800" dirty="0"/>
+              <a:t> </a:t>
+            </a:r>
+            <a:r>
+              <a:rPr lang="de-DE" sz="1800" dirty="0" err="1"/>
+              <a:t>masked</a:t>
+            </a:r>
+            <a:r>
+              <a:rPr lang="de-DE" sz="1800" dirty="0"/>
+              <a:t> </a:t>
+            </a:r>
+            <a:r>
+              <a:rPr lang="de-DE" sz="1800" dirty="0" err="1"/>
+              <a:t>tokens</a:t>
+            </a:r>
+            <a:r>
+              <a:rPr lang="de-DE" sz="1800" dirty="0"/>
+              <a:t> </a:t>
+            </a:r>
+            <a:r>
+              <a:rPr lang="de-DE" sz="1800" dirty="0" err="1"/>
+              <a:t>for</a:t>
+            </a:r>
+            <a:r>
+              <a:rPr lang="de-DE" sz="1800" dirty="0"/>
+              <a:t> </a:t>
+            </a:r>
+            <a:r>
+              <a:rPr lang="de-DE" sz="1800" dirty="0" err="1"/>
+              <a:t>each</a:t>
+            </a:r>
+            <a:r>
+              <a:rPr lang="de-DE" sz="1800" dirty="0"/>
+              <a:t> </a:t>
+            </a:r>
+            <a:r>
+              <a:rPr lang="de-DE" sz="1800" dirty="0" err="1"/>
+              <a:t>sequence</a:t>
+            </a:r>
+            <a:r>
+              <a:rPr lang="de-DE" sz="1800" dirty="0"/>
+              <a:t>, </a:t>
+            </a:r>
+            <a:r>
+              <a:rPr lang="de-DE" sz="1800" dirty="0" err="1"/>
+              <a:t>masks</a:t>
+            </a:r>
+            <a:r>
+              <a:rPr lang="de-DE" sz="1800" dirty="0"/>
+              <a:t> </a:t>
+            </a:r>
+            <a:r>
+              <a:rPr lang="de-DE" sz="1800" dirty="0" err="1"/>
+              <a:t>change</a:t>
+            </a:r>
+            <a:r>
+              <a:rPr lang="de-DE" sz="1800" dirty="0"/>
+              <a:t> </a:t>
+            </a:r>
+            <a:r>
+              <a:rPr lang="de-DE" sz="1800" dirty="0" err="1"/>
+              <a:t>each</a:t>
+            </a:r>
+            <a:r>
+              <a:rPr lang="de-DE" sz="1800" dirty="0"/>
+              <a:t> </a:t>
+            </a:r>
+            <a:r>
+              <a:rPr lang="de-DE" sz="1800" dirty="0" err="1"/>
+              <a:t>epoch</a:t>
+            </a:r>
+            <a:endParaRPr lang="de-DE" sz="1800" dirty="0"/>
+          </a:p>
+          <a:p>
+            <a:pPr marL="0" indent="0">
+              <a:buNone/>
+            </a:pPr>
+            <a:endParaRPr lang="de-DE" sz="2400" dirty="0"/>
+          </a:p>
+          <a:p>
+            <a:pPr marL="0" indent="0">
+              <a:buNone/>
+            </a:pPr>
+            <a:r>
+              <a:rPr lang="de-DE" sz="2400" dirty="0" err="1">
+                <a:hlinkClick r:id="rId3"/>
+              </a:rPr>
+              <a:t>DistilBERT</a:t>
+            </a:r>
+            <a:r>
+              <a:rPr lang="de-DE" sz="2400" dirty="0"/>
+              <a:t>: </a:t>
+            </a:r>
+            <a:r>
+              <a:rPr lang="de-DE" sz="2400" dirty="0" err="1"/>
+              <a:t>much</a:t>
+            </a:r>
+            <a:r>
+              <a:rPr lang="de-DE" sz="2400" dirty="0"/>
+              <a:t> </a:t>
+            </a:r>
+            <a:r>
+              <a:rPr lang="de-DE" sz="2400" dirty="0" err="1"/>
+              <a:t>lighter</a:t>
+            </a:r>
+            <a:r>
+              <a:rPr lang="de-DE" sz="2400" dirty="0"/>
+              <a:t> and </a:t>
+            </a:r>
+            <a:r>
+              <a:rPr lang="de-DE" sz="2400" dirty="0" err="1"/>
+              <a:t>faster</a:t>
+            </a:r>
+            <a:r>
+              <a:rPr lang="de-DE" sz="2400" dirty="0"/>
+              <a:t>, </a:t>
+            </a:r>
+            <a:r>
+              <a:rPr lang="de-DE" sz="2400" dirty="0" err="1"/>
+              <a:t>retaining</a:t>
+            </a:r>
+            <a:r>
+              <a:rPr lang="de-DE" sz="2400" dirty="0"/>
+              <a:t> ~95% </a:t>
+            </a:r>
+            <a:r>
+              <a:rPr lang="de-DE" sz="2400" dirty="0" err="1"/>
+              <a:t>of</a:t>
+            </a:r>
+            <a:r>
+              <a:rPr lang="de-DE" sz="2400" dirty="0"/>
+              <a:t> </a:t>
+            </a:r>
+            <a:r>
+              <a:rPr lang="de-DE" sz="2400" dirty="0" err="1"/>
+              <a:t>BERT’s</a:t>
+            </a:r>
+            <a:r>
+              <a:rPr lang="de-DE" sz="2400" dirty="0"/>
+              <a:t> </a:t>
+            </a:r>
+            <a:r>
+              <a:rPr lang="de-DE" sz="2400" dirty="0" err="1"/>
+              <a:t>performance</a:t>
+            </a:r>
+            <a:endParaRPr lang="de-DE" sz="2400" dirty="0"/>
+          </a:p>
+          <a:p>
+            <a:r>
+              <a:rPr lang="de-DE" sz="1800" dirty="0"/>
+              <a:t>a </a:t>
+            </a:r>
+            <a:r>
+              <a:rPr lang="de-DE" sz="1800" dirty="0" err="1"/>
+              <a:t>smaller</a:t>
+            </a:r>
+            <a:r>
+              <a:rPr lang="de-DE" sz="1800" dirty="0"/>
+              <a:t> “</a:t>
+            </a:r>
+            <a:r>
+              <a:rPr lang="de-DE" sz="1800" dirty="0" err="1"/>
+              <a:t>student</a:t>
+            </a:r>
+            <a:r>
+              <a:rPr lang="de-DE" sz="1800" dirty="0"/>
+              <a:t>” </a:t>
+            </a:r>
+            <a:r>
+              <a:rPr lang="de-DE" sz="1800" dirty="0" err="1"/>
+              <a:t>model</a:t>
+            </a:r>
+            <a:r>
+              <a:rPr lang="de-DE" sz="1800" dirty="0"/>
+              <a:t> </a:t>
+            </a:r>
+            <a:r>
+              <a:rPr lang="de-DE" sz="1800" dirty="0" err="1"/>
+              <a:t>is</a:t>
+            </a:r>
+            <a:r>
+              <a:rPr lang="de-DE" sz="1800" dirty="0"/>
+              <a:t> </a:t>
+            </a:r>
+            <a:r>
+              <a:rPr lang="de-DE" sz="1800" dirty="0" err="1"/>
+              <a:t>trained</a:t>
+            </a:r>
+            <a:r>
+              <a:rPr lang="de-DE" sz="1800" dirty="0"/>
+              <a:t> </a:t>
+            </a:r>
+            <a:r>
+              <a:rPr lang="de-DE" sz="1800" dirty="0" err="1"/>
+              <a:t>to</a:t>
+            </a:r>
+            <a:r>
+              <a:rPr lang="de-DE" sz="1800" dirty="0"/>
+              <a:t> </a:t>
+            </a:r>
+            <a:r>
+              <a:rPr lang="de-DE" sz="1800" dirty="0" err="1"/>
+              <a:t>mimic</a:t>
+            </a:r>
+            <a:r>
+              <a:rPr lang="de-DE" sz="1800" dirty="0"/>
+              <a:t> </a:t>
+            </a:r>
+            <a:r>
+              <a:rPr lang="de-DE" sz="1800" dirty="0" err="1"/>
+              <a:t>BERT’s</a:t>
+            </a:r>
+            <a:r>
+              <a:rPr lang="de-DE" sz="1800" dirty="0"/>
+              <a:t> </a:t>
+            </a:r>
+            <a:r>
+              <a:rPr lang="de-DE" sz="1800" dirty="0" err="1"/>
+              <a:t>predictions</a:t>
+            </a:r>
+            <a:endParaRPr lang="de-DE" sz="1800" dirty="0"/>
+          </a:p>
+          <a:p>
+            <a:r>
+              <a:rPr lang="de-DE" sz="1800" dirty="0"/>
+              <a:t>40% </a:t>
+            </a:r>
+            <a:r>
+              <a:rPr lang="de-DE" sz="1800" dirty="0" err="1"/>
+              <a:t>fewer</a:t>
+            </a:r>
+            <a:r>
+              <a:rPr lang="de-DE" sz="1800" dirty="0"/>
+              <a:t> </a:t>
+            </a:r>
+            <a:r>
+              <a:rPr lang="de-DE" sz="1800" dirty="0" err="1"/>
+              <a:t>parameters</a:t>
+            </a:r>
+            <a:r>
+              <a:rPr lang="de-DE" sz="1800" dirty="0"/>
+              <a:t> </a:t>
+            </a:r>
+            <a:r>
+              <a:rPr lang="de-DE" sz="1800" dirty="0" err="1"/>
+              <a:t>than</a:t>
+            </a:r>
+            <a:r>
+              <a:rPr lang="de-DE" sz="1800" dirty="0"/>
+              <a:t> BERT, 60% </a:t>
+            </a:r>
+            <a:r>
+              <a:rPr lang="de-DE" sz="1800" dirty="0" err="1"/>
+              <a:t>faster</a:t>
+            </a:r>
+            <a:r>
+              <a:rPr lang="de-DE" sz="1800" dirty="0"/>
+              <a:t> </a:t>
+            </a:r>
+            <a:r>
+              <a:rPr lang="de-DE" sz="1800" dirty="0" err="1"/>
+              <a:t>inference</a:t>
+            </a:r>
+            <a:r>
+              <a:rPr lang="de-DE" sz="1800" dirty="0"/>
+              <a:t>, </a:t>
+            </a:r>
+            <a:r>
+              <a:rPr lang="de-DE" sz="1800" dirty="0" err="1"/>
+              <a:t>using</a:t>
+            </a:r>
+            <a:r>
+              <a:rPr lang="de-DE" sz="1800" dirty="0"/>
+              <a:t> half </a:t>
+            </a:r>
+            <a:r>
+              <a:rPr lang="de-DE" sz="1800" dirty="0" err="1"/>
+              <a:t>the</a:t>
+            </a:r>
+            <a:r>
+              <a:rPr lang="de-DE" sz="1800" dirty="0"/>
+              <a:t> </a:t>
+            </a:r>
+            <a:r>
+              <a:rPr lang="de-DE" sz="1800" dirty="0" err="1"/>
+              <a:t>memory</a:t>
+            </a:r>
+            <a:endParaRPr lang="de-DE" sz="1800" dirty="0"/>
+          </a:p>
+          <a:p>
+            <a:r>
+              <a:rPr lang="de-DE" sz="1800" dirty="0"/>
+              <a:t>… also </a:t>
+            </a:r>
+            <a:r>
+              <a:rPr lang="de-DE" sz="1800" dirty="0" err="1"/>
+              <a:t>removed</a:t>
+            </a:r>
+            <a:r>
+              <a:rPr lang="de-DE" sz="1800" dirty="0"/>
+              <a:t> </a:t>
+            </a:r>
+            <a:r>
+              <a:rPr lang="de-DE" sz="1800" dirty="0" err="1"/>
+              <a:t>next</a:t>
+            </a:r>
+            <a:r>
+              <a:rPr lang="de-DE" sz="1800" dirty="0"/>
+              <a:t> </a:t>
+            </a:r>
+            <a:r>
+              <a:rPr lang="de-DE" sz="1800" dirty="0" err="1"/>
+              <a:t>sentence</a:t>
+            </a:r>
+            <a:r>
+              <a:rPr lang="de-DE" sz="1800" dirty="0"/>
+              <a:t> </a:t>
+            </a:r>
+            <a:r>
+              <a:rPr lang="de-DE" sz="1800" dirty="0" err="1"/>
+              <a:t>prediction</a:t>
+            </a:r>
+            <a:r>
+              <a:rPr lang="de-DE" sz="1800" dirty="0"/>
+              <a:t> </a:t>
+            </a:r>
+            <a:r>
+              <a:rPr lang="de-DE" sz="1800" dirty="0" err="1"/>
+              <a:t>as</a:t>
+            </a:r>
+            <a:r>
+              <a:rPr lang="de-DE" sz="1800" dirty="0"/>
+              <a:t> </a:t>
+            </a:r>
+            <a:r>
+              <a:rPr lang="de-DE" sz="1800" dirty="0" err="1"/>
+              <a:t>pretraining</a:t>
+            </a:r>
+            <a:r>
+              <a:rPr lang="de-DE" sz="1800" dirty="0"/>
+              <a:t> </a:t>
+            </a:r>
+            <a:r>
+              <a:rPr lang="de-DE" sz="1800" dirty="0" err="1"/>
+              <a:t>objective</a:t>
+            </a:r>
+            <a:r>
+              <a:rPr lang="de-DE" sz="1800" dirty="0"/>
+              <a:t> …</a:t>
+            </a:r>
+          </a:p>
+        </p:txBody>
+      </p:sp>
+      <p:sp>
+        <p:nvSpPr>
+          <p:cNvPr id="4" name="Foliennummernplatzhalter 3">
+            <a:extLst>
+              <a:ext uri="{FF2B5EF4-FFF2-40B4-BE49-F238E27FC236}">
+                <a16:creationId xmlns:a16="http://schemas.microsoft.com/office/drawing/2014/main" id="{6C9E7DDC-F9E4-F124-BF7B-7A2E77B7C25C}"/>
+              </a:ext>
+            </a:extLst>
+          </p:cNvPr>
+          <p:cNvSpPr>
+            <a:spLocks noGrp="1"/>
+          </p:cNvSpPr>
+          <p:nvPr>
+            <p:ph type="sldNum" sz="quarter" idx="12"/>
+          </p:nvPr>
+        </p:nvSpPr>
+        <p:spPr/>
+        <p:txBody>
+          <a:bodyPr/>
+          <a:lstStyle/>
+          <a:p>
+            <a:fld id="{3D4C94FE-FF23-4504-88E9-14D481113291}" type="slidenum">
+              <a:rPr lang="en-GB" smtClean="0"/>
+              <a:t>11</a:t>
+            </a:fld>
+            <a:endParaRPr lang="en-GB"/>
+          </a:p>
+        </p:txBody>
+      </p:sp>
+    </p:spTree>
+    <p:extLst>
+      <p:ext uri="{BB962C8B-B14F-4D97-AF65-F5344CB8AC3E}">
+        <p14:creationId xmlns:p14="http://schemas.microsoft.com/office/powerpoint/2010/main" val="3675046636"/>
+      </p:ext>
+    </p:extLst>
+  </p:cSld>
+  <p:clrMapOvr>
+    <a:masterClrMapping/>
+  </p:clrMapOvr>
+</p:sld>
+</file>
+
+<file path=ppt/slides/slide12.xml><?xml version="1.0" encoding="utf-8"?>
+<p:sld xmlns:a="http://schemas.openxmlformats.org/drawingml/2006/main" xmlns:r="http://schemas.openxmlformats.org/officeDocument/2006/relationships" xmlns:p="http://schemas.openxmlformats.org/presentationml/2006/main">
+  <p:cSld>
+    <p:spTree>
+      <p:nvGrpSpPr>
+        <p:cNvPr id="1" name=""/>
+        <p:cNvGrpSpPr/>
+        <p:nvPr/>
+      </p:nvGrpSpPr>
+      <p:grpSpPr>
+        <a:xfrm>
+          <a:off x="0" y="0"/>
+          <a:ext cx="0" cy="0"/>
+          <a:chOff x="0" y="0"/>
+          <a:chExt cx="0" cy="0"/>
+        </a:xfrm>
+      </p:grpSpPr>
+      <p:sp>
+        <p:nvSpPr>
+          <p:cNvPr id="2" name="Titel 1">
+            <a:extLst>
+              <a:ext uri="{FF2B5EF4-FFF2-40B4-BE49-F238E27FC236}">
+                <a16:creationId xmlns:a16="http://schemas.microsoft.com/office/drawing/2014/main" id="{F8835DB9-A493-0493-6DC6-1A59F1955546}"/>
+              </a:ext>
+            </a:extLst>
+          </p:cNvPr>
+          <p:cNvSpPr>
+            <a:spLocks noGrp="1"/>
+          </p:cNvSpPr>
+          <p:nvPr>
+            <p:ph type="title"/>
+          </p:nvPr>
+        </p:nvSpPr>
+        <p:spPr/>
+        <p:txBody>
+          <a:bodyPr/>
+          <a:lstStyle/>
+          <a:p>
+            <a:r>
+              <a:rPr lang="de-DE" dirty="0"/>
+              <a:t>Text Classification</a:t>
+            </a:r>
+          </a:p>
+        </p:txBody>
+      </p:sp>
+      <p:sp>
+        <p:nvSpPr>
+          <p:cNvPr id="3" name="Inhaltsplatzhalter 2">
+            <a:extLst>
+              <a:ext uri="{FF2B5EF4-FFF2-40B4-BE49-F238E27FC236}">
+                <a16:creationId xmlns:a16="http://schemas.microsoft.com/office/drawing/2014/main" id="{C8B9C882-7432-CB1C-F348-C72E3D7ABCC1}"/>
+              </a:ext>
+            </a:extLst>
+          </p:cNvPr>
+          <p:cNvSpPr>
+            <a:spLocks noGrp="1"/>
+          </p:cNvSpPr>
+          <p:nvPr>
+            <p:ph idx="1"/>
+          </p:nvPr>
+        </p:nvSpPr>
+        <p:spPr/>
+        <p:txBody>
+          <a:bodyPr>
+            <a:normAutofit/>
+          </a:bodyPr>
+          <a:lstStyle/>
+          <a:p>
+            <a:pPr marL="0" indent="0">
+              <a:buNone/>
+            </a:pPr>
+            <a:r>
+              <a:rPr lang="de-DE" dirty="0"/>
+              <a:t>…</a:t>
+            </a:r>
+          </a:p>
+          <a:p>
+            <a:pPr marL="0" indent="0">
+              <a:buNone/>
+            </a:pPr>
+            <a:endParaRPr lang="de-DE" dirty="0"/>
+          </a:p>
+          <a:p>
+            <a:pPr marL="0" indent="0">
+              <a:buNone/>
+            </a:pPr>
+            <a:r>
+              <a:rPr lang="en-GB" dirty="0"/>
+              <a:t>exercise: </a:t>
+            </a:r>
+            <a:r>
+              <a:rPr lang="en-GB" dirty="0">
+                <a:hlinkClick r:id="rId2"/>
+              </a:rPr>
+              <a:t>Kaggle Disaster Tweets</a:t>
+            </a:r>
+            <a:endParaRPr lang="en-GB" dirty="0"/>
+          </a:p>
+        </p:txBody>
+      </p:sp>
+      <p:sp>
+        <p:nvSpPr>
+          <p:cNvPr id="4" name="Foliennummernplatzhalter 3">
+            <a:extLst>
+              <a:ext uri="{FF2B5EF4-FFF2-40B4-BE49-F238E27FC236}">
+                <a16:creationId xmlns:a16="http://schemas.microsoft.com/office/drawing/2014/main" id="{BD68B0B8-AEDC-2BFB-161C-7E00CD7BC98C}"/>
+              </a:ext>
+            </a:extLst>
+          </p:cNvPr>
+          <p:cNvSpPr>
+            <a:spLocks noGrp="1"/>
+          </p:cNvSpPr>
+          <p:nvPr>
+            <p:ph type="sldNum" sz="quarter" idx="12"/>
+          </p:nvPr>
+        </p:nvSpPr>
+        <p:spPr/>
+        <p:txBody>
+          <a:bodyPr/>
+          <a:lstStyle/>
+          <a:p>
+            <a:fld id="{4055531C-5681-6B44-B2CA-926D7A74B06D}" type="slidenum">
+              <a:rPr lang="de-DE" smtClean="0"/>
+              <a:t>12</a:t>
+            </a:fld>
+            <a:endParaRPr lang="de-DE"/>
+          </a:p>
+        </p:txBody>
+      </p:sp>
+      <p:sp>
+        <p:nvSpPr>
+          <p:cNvPr id="5" name="TextBox 4">
+            <a:extLst>
+              <a:ext uri="{FF2B5EF4-FFF2-40B4-BE49-F238E27FC236}">
+                <a16:creationId xmlns:a16="http://schemas.microsoft.com/office/drawing/2014/main" id="{8D99F652-C896-0305-B650-D8E63E971F3C}"/>
+              </a:ext>
+            </a:extLst>
+          </p:cNvPr>
+          <p:cNvSpPr txBox="1"/>
+          <p:nvPr/>
+        </p:nvSpPr>
+        <p:spPr>
+          <a:xfrm>
+            <a:off x="11529848" y="5325559"/>
+            <a:ext cx="572811" cy="246221"/>
+          </a:xfrm>
+          <a:prstGeom prst="rect">
+            <a:avLst/>
+          </a:prstGeom>
+          <a:noFill/>
+        </p:spPr>
+        <p:txBody>
+          <a:bodyPr wrap="square" rtlCol="0">
+            <a:spAutoFit/>
+          </a:bodyPr>
+          <a:lstStyle/>
+          <a:p>
+            <a:r>
+              <a:rPr lang="de-DE" sz="1000" dirty="0">
+                <a:hlinkClick r:id="rId3"/>
+              </a:rPr>
+              <a:t>source</a:t>
+            </a:r>
+            <a:endParaRPr lang="de-DE" sz="1000" dirty="0"/>
+          </a:p>
+        </p:txBody>
+      </p:sp>
+      <p:pic>
+        <p:nvPicPr>
+          <p:cNvPr id="6" name="Picture 7" descr="A screen shot of a computer&#10;&#10;Description automatically generated">
+            <a:extLst>
+              <a:ext uri="{FF2B5EF4-FFF2-40B4-BE49-F238E27FC236}">
+                <a16:creationId xmlns:a16="http://schemas.microsoft.com/office/drawing/2014/main" id="{C8F59914-648D-5650-D612-D3EE335423E8}"/>
+              </a:ext>
+            </a:extLst>
+          </p:cNvPr>
+          <p:cNvPicPr>
+            <a:picLocks noChangeAspect="1"/>
+          </p:cNvPicPr>
+          <p:nvPr/>
+        </p:nvPicPr>
+        <p:blipFill>
+          <a:blip r:embed="rId4"/>
+          <a:stretch>
+            <a:fillRect/>
+          </a:stretch>
+        </p:blipFill>
+        <p:spPr>
+          <a:xfrm>
+            <a:off x="8610600" y="2458788"/>
+            <a:ext cx="3581400" cy="2866770"/>
+          </a:xfrm>
+          <a:prstGeom prst="rect">
+            <a:avLst/>
+          </a:prstGeom>
+        </p:spPr>
+      </p:pic>
+      <p:sp>
+        <p:nvSpPr>
+          <p:cNvPr id="7" name="TextBox 8">
+            <a:extLst>
+              <a:ext uri="{FF2B5EF4-FFF2-40B4-BE49-F238E27FC236}">
+                <a16:creationId xmlns:a16="http://schemas.microsoft.com/office/drawing/2014/main" id="{BD7EAC5A-7507-A820-5AD8-104092932C7D}"/>
+              </a:ext>
+            </a:extLst>
+          </p:cNvPr>
+          <p:cNvSpPr txBox="1"/>
+          <p:nvPr/>
+        </p:nvSpPr>
+        <p:spPr>
+          <a:xfrm>
+            <a:off x="8958029" y="5568144"/>
+            <a:ext cx="2878371" cy="646331"/>
+          </a:xfrm>
+          <a:prstGeom prst="rect">
+            <a:avLst/>
+          </a:prstGeom>
+          <a:noFill/>
+        </p:spPr>
+        <p:txBody>
+          <a:bodyPr wrap="square" rtlCol="0">
+            <a:spAutoFit/>
+          </a:bodyPr>
+          <a:lstStyle/>
+          <a:p>
+            <a:r>
+              <a:rPr lang="en-GB" dirty="0"/>
+              <a:t>sentence classification via [CLS] token</a:t>
+            </a:r>
+          </a:p>
+        </p:txBody>
+      </p:sp>
+      <p:cxnSp>
+        <p:nvCxnSpPr>
+          <p:cNvPr id="8" name="Straight Arrow Connector 10">
+            <a:extLst>
+              <a:ext uri="{FF2B5EF4-FFF2-40B4-BE49-F238E27FC236}">
+                <a16:creationId xmlns:a16="http://schemas.microsoft.com/office/drawing/2014/main" id="{EB53C338-64C6-0C11-4269-811E0771F4FD}"/>
+              </a:ext>
+            </a:extLst>
+          </p:cNvPr>
+          <p:cNvCxnSpPr>
+            <a:cxnSpLocks/>
+          </p:cNvCxnSpPr>
+          <p:nvPr/>
+        </p:nvCxnSpPr>
+        <p:spPr>
+          <a:xfrm flipH="1" flipV="1">
+            <a:off x="8958029" y="5004381"/>
+            <a:ext cx="228304" cy="651933"/>
+          </a:xfrm>
+          <a:prstGeom prst="straightConnector1">
+            <a:avLst/>
+          </a:prstGeom>
+          <a:ln>
+            <a:tailEnd type="triangle"/>
+          </a:ln>
+        </p:spPr>
+        <p:style>
+          <a:lnRef idx="1">
+            <a:schemeClr val="accent1"/>
+          </a:lnRef>
+          <a:fillRef idx="0">
+            <a:schemeClr val="accent1"/>
+          </a:fillRef>
+          <a:effectRef idx="0">
+            <a:schemeClr val="accent1"/>
+          </a:effectRef>
+          <a:fontRef idx="minor">
+            <a:schemeClr val="tx1"/>
+          </a:fontRef>
+        </p:style>
+      </p:cxnSp>
+    </p:spTree>
+    <p:extLst>
+      <p:ext uri="{BB962C8B-B14F-4D97-AF65-F5344CB8AC3E}">
+        <p14:creationId xmlns:p14="http://schemas.microsoft.com/office/powerpoint/2010/main" val="1774381992"/>
+      </p:ext>
+    </p:extLst>
+  </p:cSld>
+  <p:clrMapOvr>
+    <a:masterClrMapping/>
+  </p:clrMapOvr>
+</p:sld>
+</file>
+
+<file path=ppt/slides/slide13.xml><?xml version="1.0" encoding="utf-8"?>
+<p:sld xmlns:a="http://schemas.openxmlformats.org/drawingml/2006/main" xmlns:r="http://schemas.openxmlformats.org/officeDocument/2006/relationships" xmlns:p="http://schemas.openxmlformats.org/presentationml/2006/main">
+  <p:cSld>
+    <p:spTree>
+      <p:nvGrpSpPr>
+        <p:cNvPr id="1" name=""/>
+        <p:cNvGrpSpPr/>
+        <p:nvPr/>
+      </p:nvGrpSpPr>
+      <p:grpSpPr>
+        <a:xfrm>
+          <a:off x="0" y="0"/>
+          <a:ext cx="0" cy="0"/>
+          <a:chOff x="0" y="0"/>
+          <a:chExt cx="0" cy="0"/>
+        </a:xfrm>
+      </p:grpSpPr>
+      <p:sp>
+        <p:nvSpPr>
+          <p:cNvPr id="2" name="Titel 1">
+            <a:extLst>
+              <a:ext uri="{FF2B5EF4-FFF2-40B4-BE49-F238E27FC236}">
+                <a16:creationId xmlns:a16="http://schemas.microsoft.com/office/drawing/2014/main" id="{36DF84C9-7C51-3B5E-CEAC-B8DAC520A141}"/>
+              </a:ext>
+            </a:extLst>
+          </p:cNvPr>
+          <p:cNvSpPr>
+            <a:spLocks noGrp="1"/>
+          </p:cNvSpPr>
+          <p:nvPr>
+            <p:ph type="title"/>
+          </p:nvPr>
+        </p:nvSpPr>
+        <p:spPr/>
+        <p:txBody>
+          <a:bodyPr/>
+          <a:lstStyle/>
+          <a:p>
+            <a:r>
+              <a:rPr lang="de-DE" dirty="0"/>
+              <a:t>Feature </a:t>
+            </a:r>
+            <a:r>
+              <a:rPr lang="de-DE" dirty="0" err="1"/>
+              <a:t>Extraction</a:t>
+            </a:r>
+            <a:endParaRPr lang="de-DE" dirty="0"/>
+          </a:p>
+        </p:txBody>
+      </p:sp>
+      <p:sp>
+        <p:nvSpPr>
+          <p:cNvPr id="3" name="Inhaltsplatzhalter 2">
+            <a:extLst>
+              <a:ext uri="{FF2B5EF4-FFF2-40B4-BE49-F238E27FC236}">
+                <a16:creationId xmlns:a16="http://schemas.microsoft.com/office/drawing/2014/main" id="{B0397F5D-3B96-44CC-0D86-A08B51D4C434}"/>
+              </a:ext>
+            </a:extLst>
+          </p:cNvPr>
+          <p:cNvSpPr>
+            <a:spLocks noGrp="1"/>
+          </p:cNvSpPr>
+          <p:nvPr>
+            <p:ph idx="1"/>
+          </p:nvPr>
+        </p:nvSpPr>
+        <p:spPr>
+          <a:xfrm>
+            <a:off x="838200" y="1825625"/>
+            <a:ext cx="7683059" cy="4351338"/>
+          </a:xfrm>
+        </p:spPr>
+        <p:txBody>
+          <a:bodyPr>
+            <a:normAutofit fontScale="92500"/>
+          </a:bodyPr>
+          <a:lstStyle/>
+          <a:p>
+            <a:r>
+              <a:rPr lang="de-DE" dirty="0" err="1"/>
+              <a:t>get</a:t>
+            </a:r>
+            <a:r>
+              <a:rPr lang="de-DE" dirty="0"/>
+              <a:t> </a:t>
+            </a:r>
+            <a:r>
+              <a:rPr lang="de-DE" dirty="0" err="1"/>
+              <a:t>pretrained</a:t>
+            </a:r>
+            <a:r>
+              <a:rPr lang="de-DE" dirty="0"/>
+              <a:t> </a:t>
+            </a:r>
+            <a:r>
+              <a:rPr lang="de-DE" dirty="0" err="1"/>
+              <a:t>encoder</a:t>
+            </a:r>
+            <a:r>
+              <a:rPr lang="de-DE" dirty="0"/>
+              <a:t> LLM </a:t>
+            </a:r>
+            <a:r>
+              <a:rPr lang="de-DE" dirty="0" err="1"/>
+              <a:t>as</a:t>
+            </a:r>
+            <a:r>
+              <a:rPr lang="de-DE" dirty="0"/>
+              <a:t> </a:t>
+            </a:r>
+            <a:r>
+              <a:rPr lang="de-DE" dirty="0" err="1"/>
+              <a:t>foundation</a:t>
+            </a:r>
+            <a:r>
+              <a:rPr lang="de-DE" dirty="0"/>
+              <a:t> </a:t>
+            </a:r>
+            <a:r>
+              <a:rPr lang="de-DE" dirty="0" err="1"/>
+              <a:t>model</a:t>
+            </a:r>
+            <a:endParaRPr lang="de-DE" dirty="0"/>
+          </a:p>
+          <a:p>
+            <a:pPr marL="0" indent="0">
+              <a:buNone/>
+            </a:pPr>
+            <a:endParaRPr lang="de-DE" dirty="0"/>
+          </a:p>
+          <a:p>
+            <a:r>
+              <a:rPr lang="de-DE" dirty="0" err="1"/>
+              <a:t>remove</a:t>
+            </a:r>
+            <a:r>
+              <a:rPr lang="de-DE" dirty="0"/>
+              <a:t> </a:t>
+            </a:r>
+            <a:r>
+              <a:rPr lang="de-DE" dirty="0" err="1"/>
+              <a:t>classifier</a:t>
+            </a:r>
+            <a:r>
+              <a:rPr lang="de-DE" dirty="0"/>
+              <a:t> </a:t>
+            </a:r>
+            <a:r>
+              <a:rPr lang="de-DE" dirty="0" err="1"/>
+              <a:t>head</a:t>
+            </a:r>
+            <a:r>
+              <a:rPr lang="de-DE" dirty="0"/>
+              <a:t> </a:t>
+            </a:r>
+            <a:r>
+              <a:rPr lang="de-DE" dirty="0" err="1"/>
+              <a:t>from</a:t>
+            </a:r>
+            <a:r>
+              <a:rPr lang="de-DE" dirty="0"/>
+              <a:t> </a:t>
+            </a:r>
+            <a:r>
+              <a:rPr lang="de-DE" dirty="0" err="1"/>
+              <a:t>pretraining</a:t>
+            </a:r>
+            <a:r>
+              <a:rPr lang="de-DE" dirty="0"/>
+              <a:t> (after final </a:t>
+            </a:r>
+            <a:r>
+              <a:rPr lang="de-DE" dirty="0" err="1"/>
+              <a:t>contextual</a:t>
+            </a:r>
+            <a:r>
+              <a:rPr lang="de-DE" dirty="0"/>
+              <a:t> </a:t>
+            </a:r>
+            <a:r>
+              <a:rPr lang="de-DE" dirty="0" err="1"/>
+              <a:t>embeddings</a:t>
+            </a:r>
+            <a:r>
+              <a:rPr lang="de-DE" dirty="0"/>
+              <a:t>)</a:t>
+            </a:r>
+          </a:p>
+          <a:p>
+            <a:pPr marL="0" indent="0">
+              <a:buNone/>
+            </a:pPr>
+            <a:endParaRPr lang="de-DE" dirty="0"/>
+          </a:p>
+          <a:p>
+            <a:r>
+              <a:rPr lang="de-DE" dirty="0"/>
+              <a:t>pass </a:t>
+            </a:r>
+            <a:r>
+              <a:rPr lang="de-DE" dirty="0" err="1"/>
+              <a:t>training</a:t>
+            </a:r>
+            <a:r>
+              <a:rPr lang="de-DE" dirty="0"/>
+              <a:t> </a:t>
+            </a:r>
+            <a:r>
+              <a:rPr lang="de-DE" dirty="0" err="1"/>
+              <a:t>data</a:t>
+            </a:r>
+            <a:r>
+              <a:rPr lang="de-DE" dirty="0"/>
+              <a:t> (</a:t>
+            </a:r>
+            <a:r>
+              <a:rPr lang="de-DE" dirty="0" err="1"/>
+              <a:t>for</a:t>
+            </a:r>
+            <a:r>
+              <a:rPr lang="de-DE" dirty="0"/>
+              <a:t> </a:t>
+            </a:r>
+            <a:r>
+              <a:rPr lang="de-DE" dirty="0" err="1"/>
+              <a:t>the</a:t>
+            </a:r>
+            <a:r>
+              <a:rPr lang="de-DE" dirty="0"/>
+              <a:t> </a:t>
+            </a:r>
+            <a:r>
+              <a:rPr lang="de-DE" dirty="0" err="1"/>
+              <a:t>task</a:t>
+            </a:r>
+            <a:r>
+              <a:rPr lang="de-DE" dirty="0"/>
+              <a:t> at </a:t>
+            </a:r>
+            <a:r>
+              <a:rPr lang="de-DE" dirty="0" err="1"/>
+              <a:t>hand</a:t>
+            </a:r>
+            <a:r>
+              <a:rPr lang="de-DE" dirty="0"/>
+              <a:t>) </a:t>
+            </a:r>
+            <a:r>
+              <a:rPr lang="de-DE" dirty="0" err="1"/>
+              <a:t>through</a:t>
+            </a:r>
+            <a:r>
+              <a:rPr lang="de-DE" dirty="0"/>
+              <a:t> </a:t>
+            </a:r>
+            <a:r>
+              <a:rPr lang="de-DE" dirty="0" err="1"/>
+              <a:t>the</a:t>
+            </a:r>
+            <a:r>
+              <a:rPr lang="de-DE" dirty="0"/>
+              <a:t> </a:t>
+            </a:r>
+            <a:r>
+              <a:rPr lang="de-DE" dirty="0" err="1"/>
+              <a:t>model</a:t>
+            </a:r>
+            <a:r>
+              <a:rPr lang="de-DE" dirty="0"/>
+              <a:t> and </a:t>
+            </a:r>
+            <a:r>
+              <a:rPr lang="de-DE" dirty="0" err="1"/>
+              <a:t>use</a:t>
+            </a:r>
+            <a:r>
+              <a:rPr lang="de-DE" dirty="0"/>
+              <a:t> </a:t>
+            </a:r>
+            <a:r>
+              <a:rPr lang="de-DE" dirty="0" err="1"/>
+              <a:t>the</a:t>
+            </a:r>
+            <a:r>
+              <a:rPr lang="de-DE" dirty="0"/>
+              <a:t> [CLS] </a:t>
+            </a:r>
+            <a:r>
+              <a:rPr lang="de-DE" dirty="0" err="1"/>
+              <a:t>token</a:t>
+            </a:r>
+            <a:r>
+              <a:rPr lang="de-DE" dirty="0"/>
+              <a:t> </a:t>
+            </a:r>
+            <a:r>
+              <a:rPr lang="de-DE" dirty="0" err="1"/>
+              <a:t>embedding</a:t>
+            </a:r>
+            <a:r>
+              <a:rPr lang="de-DE" dirty="0"/>
+              <a:t> </a:t>
+            </a:r>
+            <a:r>
+              <a:rPr lang="de-DE" dirty="0" err="1"/>
+              <a:t>as</a:t>
+            </a:r>
+            <a:r>
+              <a:rPr lang="de-DE" dirty="0"/>
+              <a:t> </a:t>
+            </a:r>
+            <a:r>
+              <a:rPr lang="de-DE" dirty="0" err="1"/>
+              <a:t>input</a:t>
+            </a:r>
+            <a:r>
+              <a:rPr lang="de-DE" dirty="0"/>
+              <a:t> </a:t>
+            </a:r>
+            <a:r>
+              <a:rPr lang="de-DE" dirty="0" err="1"/>
+              <a:t>for</a:t>
+            </a:r>
+            <a:r>
+              <a:rPr lang="de-DE" dirty="0"/>
+              <a:t> a </a:t>
+            </a:r>
+            <a:r>
+              <a:rPr lang="de-DE" dirty="0" err="1"/>
+              <a:t>small</a:t>
+            </a:r>
+            <a:r>
+              <a:rPr lang="de-DE" dirty="0"/>
+              <a:t>, task-</a:t>
+            </a:r>
+            <a:r>
+              <a:rPr lang="de-DE" dirty="0" err="1"/>
+              <a:t>specific</a:t>
+            </a:r>
+            <a:r>
+              <a:rPr lang="de-DE" dirty="0"/>
+              <a:t> </a:t>
+            </a:r>
+            <a:r>
+              <a:rPr lang="de-DE" dirty="0" err="1"/>
+              <a:t>model</a:t>
+            </a:r>
+            <a:endParaRPr lang="de-DE" dirty="0"/>
+          </a:p>
+          <a:p>
+            <a:pPr marL="0" indent="0">
+              <a:buNone/>
+            </a:pPr>
+            <a:r>
+              <a:rPr lang="de-DE" dirty="0"/>
+              <a:t>alternative </a:t>
+            </a:r>
+            <a:r>
+              <a:rPr lang="de-DE" dirty="0" err="1"/>
+              <a:t>to</a:t>
+            </a:r>
+            <a:r>
+              <a:rPr lang="de-DE" dirty="0"/>
+              <a:t> [CLS] </a:t>
+            </a:r>
+            <a:r>
+              <a:rPr lang="de-DE" dirty="0" err="1"/>
+              <a:t>token</a:t>
+            </a:r>
+            <a:r>
+              <a:rPr lang="de-DE" dirty="0"/>
+              <a:t>: </a:t>
+            </a:r>
+            <a:r>
+              <a:rPr lang="de-DE" dirty="0" err="1"/>
+              <a:t>mean</a:t>
+            </a:r>
+            <a:r>
+              <a:rPr lang="de-DE" dirty="0"/>
+              <a:t>/</a:t>
+            </a:r>
+            <a:r>
+              <a:rPr lang="de-DE" dirty="0" err="1"/>
+              <a:t>max</a:t>
+            </a:r>
+            <a:r>
+              <a:rPr lang="de-DE" dirty="0"/>
+              <a:t> </a:t>
+            </a:r>
+            <a:r>
+              <a:rPr lang="de-DE" dirty="0" err="1"/>
+              <a:t>pooling</a:t>
+            </a:r>
+            <a:r>
+              <a:rPr lang="de-DE" dirty="0"/>
+              <a:t> </a:t>
+            </a:r>
+            <a:r>
+              <a:rPr lang="de-DE" dirty="0" err="1"/>
+              <a:t>over</a:t>
+            </a:r>
+            <a:r>
+              <a:rPr lang="de-DE" dirty="0"/>
+              <a:t> final </a:t>
+            </a:r>
+            <a:r>
+              <a:rPr lang="de-DE" dirty="0" err="1"/>
+              <a:t>token</a:t>
+            </a:r>
+            <a:r>
+              <a:rPr lang="de-DE" dirty="0"/>
+              <a:t> </a:t>
+            </a:r>
+            <a:r>
+              <a:rPr lang="de-DE" dirty="0" err="1"/>
+              <a:t>embeddings</a:t>
+            </a:r>
+            <a:r>
+              <a:rPr lang="de-DE" dirty="0"/>
+              <a:t> (e.g., </a:t>
+            </a:r>
+            <a:r>
+              <a:rPr lang="de-DE" dirty="0" err="1"/>
+              <a:t>for</a:t>
+            </a:r>
+            <a:r>
+              <a:rPr lang="de-DE" dirty="0"/>
+              <a:t> </a:t>
+            </a:r>
+            <a:r>
+              <a:rPr lang="de-DE" dirty="0" err="1"/>
+              <a:t>sentence</a:t>
+            </a:r>
+            <a:r>
+              <a:rPr lang="de-DE" dirty="0"/>
+              <a:t> </a:t>
+            </a:r>
+            <a:r>
+              <a:rPr lang="de-DE" dirty="0" err="1"/>
+              <a:t>similarity</a:t>
+            </a:r>
+            <a:r>
+              <a:rPr lang="de-DE" dirty="0"/>
+              <a:t>)</a:t>
+            </a:r>
+          </a:p>
+          <a:p>
+            <a:endParaRPr lang="de-DE" dirty="0"/>
+          </a:p>
+        </p:txBody>
+      </p:sp>
+      <p:sp>
+        <p:nvSpPr>
+          <p:cNvPr id="4" name="Foliennummernplatzhalter 3">
+            <a:extLst>
+              <a:ext uri="{FF2B5EF4-FFF2-40B4-BE49-F238E27FC236}">
+                <a16:creationId xmlns:a16="http://schemas.microsoft.com/office/drawing/2014/main" id="{0BF87474-2FE1-1D25-ABD2-967B5E868E5E}"/>
+              </a:ext>
+            </a:extLst>
+          </p:cNvPr>
+          <p:cNvSpPr>
+            <a:spLocks noGrp="1"/>
+          </p:cNvSpPr>
+          <p:nvPr>
+            <p:ph type="sldNum" sz="quarter" idx="12"/>
+          </p:nvPr>
+        </p:nvSpPr>
+        <p:spPr/>
+        <p:txBody>
+          <a:bodyPr/>
+          <a:lstStyle/>
+          <a:p>
+            <a:fld id="{4055531C-5681-6B44-B2CA-926D7A74B06D}" type="slidenum">
+              <a:rPr lang="de-DE" smtClean="0"/>
+              <a:t>13</a:t>
+            </a:fld>
+            <a:endParaRPr lang="de-DE"/>
+          </a:p>
+        </p:txBody>
+      </p:sp>
+      <p:sp>
+        <p:nvSpPr>
+          <p:cNvPr id="5" name="TextBox 4">
+            <a:extLst>
+              <a:ext uri="{FF2B5EF4-FFF2-40B4-BE49-F238E27FC236}">
+                <a16:creationId xmlns:a16="http://schemas.microsoft.com/office/drawing/2014/main" id="{E310B2C6-3A5F-9519-04DA-E6239220BB59}"/>
+              </a:ext>
+            </a:extLst>
+          </p:cNvPr>
+          <p:cNvSpPr txBox="1"/>
+          <p:nvPr/>
+        </p:nvSpPr>
+        <p:spPr>
+          <a:xfrm>
+            <a:off x="11529848" y="4800045"/>
+            <a:ext cx="572811" cy="246221"/>
+          </a:xfrm>
+          <a:prstGeom prst="rect">
+            <a:avLst/>
+          </a:prstGeom>
+          <a:noFill/>
+        </p:spPr>
+        <p:txBody>
+          <a:bodyPr wrap="square" rtlCol="0">
+            <a:spAutoFit/>
+          </a:bodyPr>
+          <a:lstStyle/>
+          <a:p>
+            <a:r>
+              <a:rPr lang="de-DE" sz="1000" dirty="0">
+                <a:hlinkClick r:id="rId2"/>
+              </a:rPr>
+              <a:t>source</a:t>
+            </a:r>
+            <a:endParaRPr lang="de-DE" sz="1000" dirty="0"/>
+          </a:p>
+        </p:txBody>
+      </p:sp>
+      <p:pic>
+        <p:nvPicPr>
+          <p:cNvPr id="6" name="Picture 7" descr="A screen shot of a computer&#10;&#10;Description automatically generated">
+            <a:extLst>
+              <a:ext uri="{FF2B5EF4-FFF2-40B4-BE49-F238E27FC236}">
+                <a16:creationId xmlns:a16="http://schemas.microsoft.com/office/drawing/2014/main" id="{3E9F7FDF-48D5-7328-35E3-E99E3D3B4CD7}"/>
+              </a:ext>
+            </a:extLst>
+          </p:cNvPr>
+          <p:cNvPicPr>
+            <a:picLocks noChangeAspect="1"/>
+          </p:cNvPicPr>
+          <p:nvPr/>
+        </p:nvPicPr>
+        <p:blipFill>
+          <a:blip r:embed="rId3"/>
+          <a:stretch>
+            <a:fillRect/>
+          </a:stretch>
+        </p:blipFill>
+        <p:spPr>
+          <a:xfrm>
+            <a:off x="8610600" y="1933274"/>
+            <a:ext cx="3581400" cy="2866770"/>
+          </a:xfrm>
+          <a:prstGeom prst="rect">
+            <a:avLst/>
+          </a:prstGeom>
+        </p:spPr>
+      </p:pic>
+      <p:sp>
+        <p:nvSpPr>
+          <p:cNvPr id="7" name="TextBox 8">
+            <a:extLst>
+              <a:ext uri="{FF2B5EF4-FFF2-40B4-BE49-F238E27FC236}">
+                <a16:creationId xmlns:a16="http://schemas.microsoft.com/office/drawing/2014/main" id="{D4D6E73C-E984-5CF0-54C9-1C7FBF2544C7}"/>
+              </a:ext>
+            </a:extLst>
+          </p:cNvPr>
+          <p:cNvSpPr txBox="1"/>
+          <p:nvPr/>
+        </p:nvSpPr>
+        <p:spPr>
+          <a:xfrm>
+            <a:off x="8958029" y="5042630"/>
+            <a:ext cx="2878371" cy="646331"/>
+          </a:xfrm>
+          <a:prstGeom prst="rect">
+            <a:avLst/>
+          </a:prstGeom>
+          <a:noFill/>
+        </p:spPr>
+        <p:txBody>
+          <a:bodyPr wrap="square" rtlCol="0">
+            <a:spAutoFit/>
+          </a:bodyPr>
+          <a:lstStyle/>
+          <a:p>
+            <a:r>
+              <a:rPr lang="en-GB" dirty="0"/>
+              <a:t>sentence classification via [CLS] token</a:t>
+            </a:r>
+          </a:p>
+        </p:txBody>
+      </p:sp>
+      <p:cxnSp>
+        <p:nvCxnSpPr>
+          <p:cNvPr id="8" name="Straight Arrow Connector 10">
+            <a:extLst>
+              <a:ext uri="{FF2B5EF4-FFF2-40B4-BE49-F238E27FC236}">
+                <a16:creationId xmlns:a16="http://schemas.microsoft.com/office/drawing/2014/main" id="{001A42F3-47EB-3340-CC48-9BE4AC6D2692}"/>
+              </a:ext>
+            </a:extLst>
+          </p:cNvPr>
+          <p:cNvCxnSpPr>
+            <a:cxnSpLocks/>
+          </p:cNvCxnSpPr>
+          <p:nvPr/>
+        </p:nvCxnSpPr>
+        <p:spPr>
+          <a:xfrm flipH="1" flipV="1">
+            <a:off x="8958029" y="4478867"/>
+            <a:ext cx="228304" cy="651933"/>
+          </a:xfrm>
+          <a:prstGeom prst="straightConnector1">
+            <a:avLst/>
+          </a:prstGeom>
+          <a:ln>
+            <a:tailEnd type="triangle"/>
+          </a:ln>
+        </p:spPr>
+        <p:style>
+          <a:lnRef idx="1">
+            <a:schemeClr val="accent1"/>
+          </a:lnRef>
+          <a:fillRef idx="0">
+            <a:schemeClr val="accent1"/>
+          </a:fillRef>
+          <a:effectRef idx="0">
+            <a:schemeClr val="accent1"/>
+          </a:effectRef>
+          <a:fontRef idx="minor">
+            <a:schemeClr val="tx1"/>
+          </a:fontRef>
+        </p:style>
+      </p:cxnSp>
+    </p:spTree>
+    <p:extLst>
+      <p:ext uri="{BB962C8B-B14F-4D97-AF65-F5344CB8AC3E}">
+        <p14:creationId xmlns:p14="http://schemas.microsoft.com/office/powerpoint/2010/main" val="4258369310"/>
+      </p:ext>
+    </p:extLst>
+  </p:cSld>
+  <p:clrMapOvr>
+    <a:masterClrMapping/>
+  </p:clrMapOvr>
+</p:sld>
+</file>
+
+<file path=ppt/slides/slide14.xml><?xml version="1.0" encoding="utf-8"?>
+<p:sld xmlns:a="http://schemas.openxmlformats.org/drawingml/2006/main" xmlns:r="http://schemas.openxmlformats.org/officeDocument/2006/relationships" xmlns:p="http://schemas.openxmlformats.org/presentationml/2006/main">
+  <p:cSld>
+    <p:spTree>
+      <p:nvGrpSpPr>
+        <p:cNvPr id="1" name=""/>
+        <p:cNvGrpSpPr/>
+        <p:nvPr/>
+      </p:nvGrpSpPr>
+      <p:grpSpPr>
+        <a:xfrm>
+          <a:off x="0" y="0"/>
+          <a:ext cx="0" cy="0"/>
+          <a:chOff x="0" y="0"/>
+          <a:chExt cx="0" cy="0"/>
+        </a:xfrm>
+      </p:grpSpPr>
+      <p:sp>
+        <p:nvSpPr>
+          <p:cNvPr id="4" name="Title 3">
+            <a:extLst>
+              <a:ext uri="{FF2B5EF4-FFF2-40B4-BE49-F238E27FC236}">
+                <a16:creationId xmlns:a16="http://schemas.microsoft.com/office/drawing/2014/main" id="{028E18EF-EC53-ACA5-61E8-A955218138B3}"/>
+              </a:ext>
+            </a:extLst>
+          </p:cNvPr>
+          <p:cNvSpPr>
+            <a:spLocks noGrp="1"/>
+          </p:cNvSpPr>
+          <p:nvPr>
+            <p:ph type="title"/>
+          </p:nvPr>
+        </p:nvSpPr>
+        <p:spPr/>
+        <p:txBody>
+          <a:bodyPr/>
+          <a:lstStyle/>
+          <a:p>
+            <a:r>
+              <a:rPr lang="en-GB" dirty="0"/>
+              <a:t>Finetuning</a:t>
+            </a:r>
+          </a:p>
+        </p:txBody>
+      </p:sp>
+      <p:sp>
+        <p:nvSpPr>
+          <p:cNvPr id="3" name="Content Placeholder 2">
+            <a:extLst>
+              <a:ext uri="{FF2B5EF4-FFF2-40B4-BE49-F238E27FC236}">
+                <a16:creationId xmlns:a16="http://schemas.microsoft.com/office/drawing/2014/main" id="{FF7F4B16-9855-AFD2-D174-7FE315330462}"/>
+              </a:ext>
+            </a:extLst>
+          </p:cNvPr>
+          <p:cNvSpPr>
+            <a:spLocks noGrp="1"/>
+          </p:cNvSpPr>
+          <p:nvPr>
+            <p:ph idx="1"/>
+          </p:nvPr>
+        </p:nvSpPr>
+        <p:spPr>
+          <a:xfrm>
+            <a:off x="838200" y="1825625"/>
+            <a:ext cx="5219637" cy="4530725"/>
+          </a:xfrm>
+        </p:spPr>
+        <p:txBody>
+          <a:bodyPr>
+            <a:normAutofit/>
+          </a:bodyPr>
+          <a:lstStyle/>
+          <a:p>
+            <a:r>
+              <a:rPr lang="de-DE" dirty="0" err="1"/>
+              <a:t>get</a:t>
+            </a:r>
+            <a:r>
+              <a:rPr lang="de-DE" dirty="0"/>
+              <a:t> </a:t>
+            </a:r>
+            <a:r>
+              <a:rPr lang="de-DE" dirty="0" err="1"/>
+              <a:t>pretrained</a:t>
+            </a:r>
+            <a:r>
+              <a:rPr lang="de-DE" dirty="0"/>
+              <a:t> </a:t>
+            </a:r>
+            <a:r>
+              <a:rPr lang="de-DE" dirty="0" err="1"/>
+              <a:t>encoder</a:t>
+            </a:r>
+            <a:r>
+              <a:rPr lang="de-DE" dirty="0"/>
+              <a:t> LLM as </a:t>
+            </a:r>
+            <a:r>
+              <a:rPr lang="de-DE" dirty="0" err="1"/>
+              <a:t>foundation</a:t>
+            </a:r>
+            <a:r>
+              <a:rPr lang="de-DE" dirty="0"/>
+              <a:t> </a:t>
+            </a:r>
+            <a:r>
+              <a:rPr lang="de-DE" dirty="0" err="1"/>
+              <a:t>model</a:t>
+            </a:r>
+            <a:endParaRPr lang="de-DE" dirty="0"/>
+          </a:p>
+          <a:p>
+            <a:pPr marL="0" indent="0">
+              <a:buNone/>
+            </a:pPr>
+            <a:endParaRPr lang="de-DE" dirty="0"/>
+          </a:p>
+          <a:p>
+            <a:r>
+              <a:rPr lang="de-DE" dirty="0" err="1"/>
+              <a:t>replace</a:t>
+            </a:r>
+            <a:r>
+              <a:rPr lang="de-DE" dirty="0"/>
+              <a:t> </a:t>
+            </a:r>
+            <a:r>
+              <a:rPr lang="de-DE" dirty="0" err="1"/>
+              <a:t>classifier</a:t>
+            </a:r>
+            <a:r>
+              <a:rPr lang="de-DE" dirty="0"/>
+              <a:t> </a:t>
+            </a:r>
+            <a:r>
+              <a:rPr lang="de-DE" dirty="0" err="1"/>
+              <a:t>head</a:t>
+            </a:r>
+            <a:r>
+              <a:rPr lang="de-DE" dirty="0"/>
+              <a:t> </a:t>
+            </a:r>
+            <a:r>
+              <a:rPr lang="de-DE" dirty="0" err="1"/>
+              <a:t>from</a:t>
+            </a:r>
+            <a:r>
+              <a:rPr lang="de-DE" dirty="0"/>
+              <a:t> </a:t>
+            </a:r>
+            <a:r>
+              <a:rPr lang="de-DE" dirty="0" err="1"/>
+              <a:t>pretraining</a:t>
+            </a:r>
+            <a:r>
+              <a:rPr lang="de-DE" dirty="0"/>
+              <a:t> </a:t>
+            </a:r>
+            <a:r>
+              <a:rPr lang="de-DE" dirty="0" err="1"/>
+              <a:t>with</a:t>
+            </a:r>
+            <a:r>
+              <a:rPr lang="de-DE" dirty="0"/>
+              <a:t> task-</a:t>
+            </a:r>
+            <a:r>
+              <a:rPr lang="de-DE" dirty="0" err="1"/>
+              <a:t>specific</a:t>
+            </a:r>
+            <a:r>
+              <a:rPr lang="de-DE" dirty="0"/>
+              <a:t> </a:t>
+            </a:r>
+            <a:r>
+              <a:rPr lang="de-DE" dirty="0" err="1"/>
+              <a:t>head</a:t>
+            </a:r>
+            <a:endParaRPr lang="de-DE" dirty="0"/>
+          </a:p>
+          <a:p>
+            <a:pPr marL="0" indent="0">
+              <a:buNone/>
+            </a:pPr>
+            <a:endParaRPr lang="en-GB" dirty="0"/>
+          </a:p>
+          <a:p>
+            <a:r>
+              <a:rPr lang="de-DE" dirty="0"/>
+              <a:t>continue (starting with weights after pretraining) training with data for task at </a:t>
+            </a:r>
+            <a:r>
+              <a:rPr lang="de-DE" dirty="0" err="1"/>
+              <a:t>hand</a:t>
+            </a:r>
+            <a:endParaRPr lang="de-DE" dirty="0"/>
+          </a:p>
+        </p:txBody>
+      </p:sp>
+      <p:sp>
+        <p:nvSpPr>
+          <p:cNvPr id="2" name="Slide Number Placeholder 1">
+            <a:extLst>
+              <a:ext uri="{FF2B5EF4-FFF2-40B4-BE49-F238E27FC236}">
+                <a16:creationId xmlns:a16="http://schemas.microsoft.com/office/drawing/2014/main" id="{E455EA56-7CB1-7041-F3BA-0AEA9E42E1D7}"/>
+              </a:ext>
+            </a:extLst>
+          </p:cNvPr>
+          <p:cNvSpPr>
+            <a:spLocks noGrp="1"/>
+          </p:cNvSpPr>
+          <p:nvPr>
+            <p:ph type="sldNum" sz="quarter" idx="12"/>
+          </p:nvPr>
+        </p:nvSpPr>
+        <p:spPr/>
+        <p:txBody>
+          <a:bodyPr/>
+          <a:lstStyle/>
+          <a:p>
+            <a:fld id="{3D4C94FE-FF23-4504-88E9-14D481113291}" type="slidenum">
+              <a:rPr lang="en-GB" smtClean="0"/>
+              <a:t>14</a:t>
+            </a:fld>
+            <a:endParaRPr lang="en-GB"/>
+          </a:p>
+        </p:txBody>
+      </p:sp>
+      <p:pic>
+        <p:nvPicPr>
+          <p:cNvPr id="5" name="44F0CE3B-0B30-475E-9AB0-8A52FDC60368" descr="Two-types-of-fine-tuning-techniques-using-pretrained-model-trained-on-ImageNet-The-first.png">
+            <a:extLst>
+              <a:ext uri="{FF2B5EF4-FFF2-40B4-BE49-F238E27FC236}">
+                <a16:creationId xmlns:a16="http://schemas.microsoft.com/office/drawing/2014/main" id="{41955F9F-8537-8F49-68AF-A52D399B0B1D}"/>
+              </a:ext>
+            </a:extLst>
+          </p:cNvPr>
+          <p:cNvPicPr>
+            <a:picLocks noChangeAspect="1" noChangeArrowheads="1"/>
+          </p:cNvPicPr>
+          <p:nvPr/>
+        </p:nvPicPr>
+        <p:blipFill>
+          <a:blip r:embed="rId2">
+            <a:extLst>
+              <a:ext uri="{28A0092B-C50C-407E-A947-70E740481C1C}">
+                <a14:useLocalDpi xmlns:a14="http://schemas.microsoft.com/office/drawing/2010/main" val="0"/>
+              </a:ext>
+            </a:extLst>
+          </a:blip>
+          <a:srcRect/>
+          <a:stretch>
+            <a:fillRect/>
+          </a:stretch>
+        </p:blipFill>
+        <p:spPr bwMode="auto">
+          <a:xfrm>
+            <a:off x="6278098" y="1117410"/>
+            <a:ext cx="5829368" cy="5308358"/>
+          </a:xfrm>
+          <a:prstGeom prst="rect">
+            <a:avLst/>
+          </a:prstGeom>
+          <a:noFill/>
+          <a:ln>
+            <a:noFill/>
+          </a:ln>
+          <a:extLst>
+            <a:ext uri="{909E8E84-426E-40DD-AFC4-6F175D3DCCD1}">
+              <a14:hiddenFill xmlns:a14="http://schemas.microsoft.com/office/drawing/2010/main">
+                <a:solidFill>
+                  <a:srgbClr val="FFFFFF"/>
+                </a:solidFill>
+              </a14:hiddenFill>
+            </a:ext>
+            <a:ext uri="{91240B29-F687-4F45-9708-019B960494DF}">
+              <a14:hiddenLine xmlns:a14="http://schemas.microsoft.com/office/drawing/2010/main" w="9525">
+                <a:solidFill>
+                  <a:srgbClr val="000000"/>
+                </a:solidFill>
+                <a:miter lim="800000"/>
+                <a:headEnd/>
+                <a:tailEnd/>
+              </a14:hiddenLine>
+            </a:ext>
+          </a:extLst>
+        </p:spPr>
+      </p:pic>
+      <p:sp>
+        <p:nvSpPr>
+          <p:cNvPr id="6" name="TextBox 5">
+            <a:extLst>
+              <a:ext uri="{FF2B5EF4-FFF2-40B4-BE49-F238E27FC236}">
+                <a16:creationId xmlns:a16="http://schemas.microsoft.com/office/drawing/2014/main" id="{2FEDA80F-387A-F82C-BB62-44CC7DCEF2FD}"/>
+              </a:ext>
+            </a:extLst>
+          </p:cNvPr>
+          <p:cNvSpPr txBox="1"/>
+          <p:nvPr/>
+        </p:nvSpPr>
+        <p:spPr>
+          <a:xfrm>
+            <a:off x="7230529" y="6538912"/>
+            <a:ext cx="532518" cy="246221"/>
+          </a:xfrm>
+          <a:prstGeom prst="rect">
+            <a:avLst/>
+          </a:prstGeom>
+          <a:noFill/>
+        </p:spPr>
+        <p:txBody>
+          <a:bodyPr wrap="none" rtlCol="0">
+            <a:spAutoFit/>
+          </a:bodyPr>
+          <a:lstStyle/>
+          <a:p>
+            <a:r>
+              <a:rPr lang="de-DE" sz="1000" dirty="0">
+                <a:hlinkClick r:id="rId3"/>
+              </a:rPr>
+              <a:t>source</a:t>
+            </a:r>
+            <a:endParaRPr lang="de-DE" sz="1000" dirty="0"/>
+          </a:p>
+        </p:txBody>
+      </p:sp>
+      <p:sp>
+        <p:nvSpPr>
+          <p:cNvPr id="7" name="TextBox 6">
+            <a:extLst>
+              <a:ext uri="{FF2B5EF4-FFF2-40B4-BE49-F238E27FC236}">
+                <a16:creationId xmlns:a16="http://schemas.microsoft.com/office/drawing/2014/main" id="{8E527FE3-CED6-2943-D4A9-D8312B6F38C1}"/>
+              </a:ext>
+            </a:extLst>
+          </p:cNvPr>
+          <p:cNvSpPr txBox="1"/>
+          <p:nvPr/>
+        </p:nvSpPr>
+        <p:spPr>
+          <a:xfrm>
+            <a:off x="6944578" y="291397"/>
+            <a:ext cx="5162888" cy="769441"/>
+          </a:xfrm>
+          <a:prstGeom prst="rect">
+            <a:avLst/>
+          </a:prstGeom>
+          <a:noFill/>
+        </p:spPr>
+        <p:txBody>
+          <a:bodyPr wrap="none" rtlCol="0">
+            <a:spAutoFit/>
+          </a:bodyPr>
+          <a:lstStyle/>
+          <a:p>
+            <a:r>
+              <a:rPr lang="de-DE" sz="2200" dirty="0"/>
+              <a:t>options: finetune all weights or just </a:t>
+            </a:r>
+            <a:r>
+              <a:rPr lang="de-DE" sz="2200" dirty="0" err="1"/>
+              <a:t>some</a:t>
+            </a:r>
+            <a:endParaRPr lang="de-DE" sz="2200" dirty="0"/>
+          </a:p>
+          <a:p>
+            <a:r>
+              <a:rPr lang="de-DE" sz="2200" dirty="0"/>
+              <a:t>(</a:t>
+            </a:r>
+            <a:r>
+              <a:rPr lang="de-DE" sz="2200" dirty="0" err="1"/>
+              <a:t>image</a:t>
+            </a:r>
+            <a:r>
+              <a:rPr lang="de-DE" sz="2200" dirty="0"/>
+              <a:t> </a:t>
+            </a:r>
+            <a:r>
+              <a:rPr lang="de-DE" sz="2200" dirty="0" err="1"/>
+              <a:t>classfication</a:t>
+            </a:r>
+            <a:r>
+              <a:rPr lang="de-DE" sz="2200" dirty="0"/>
+              <a:t> </a:t>
+            </a:r>
+            <a:r>
+              <a:rPr lang="de-DE" sz="2200" dirty="0" err="1"/>
+              <a:t>example</a:t>
+            </a:r>
+            <a:r>
+              <a:rPr lang="de-DE" sz="2200" dirty="0"/>
+              <a:t>)</a:t>
+            </a:r>
+            <a:endParaRPr lang="en-GB" sz="2200" dirty="0"/>
+          </a:p>
+        </p:txBody>
+      </p:sp>
+    </p:spTree>
+    <p:extLst>
+      <p:ext uri="{BB962C8B-B14F-4D97-AF65-F5344CB8AC3E}">
+        <p14:creationId xmlns:p14="http://schemas.microsoft.com/office/powerpoint/2010/main" val="880903615"/>
+      </p:ext>
+    </p:extLst>
+  </p:cSld>
+  <p:clrMapOvr>
+    <a:masterClrMapping/>
+  </p:clrMapOvr>
+</p:sld>
+</file>
+
+<file path=ppt/slides/slide15.xml><?xml version="1.0" encoding="utf-8"?>
+<p:sld xmlns:a="http://schemas.openxmlformats.org/drawingml/2006/main" xmlns:r="http://schemas.openxmlformats.org/officeDocument/2006/relationships" xmlns:p="http://schemas.openxmlformats.org/presentationml/2006/main">
+  <p:cSld>
+    <p:spTree>
+      <p:nvGrpSpPr>
+        <p:cNvPr id="1" name=""/>
+        <p:cNvGrpSpPr/>
+        <p:nvPr/>
+      </p:nvGrpSpPr>
+      <p:grpSpPr>
+        <a:xfrm>
+          <a:off x="0" y="0"/>
+          <a:ext cx="0" cy="0"/>
+          <a:chOff x="0" y="0"/>
+          <a:chExt cx="0" cy="0"/>
+        </a:xfrm>
+      </p:grpSpPr>
+      <p:sp>
+        <p:nvSpPr>
+          <p:cNvPr id="2" name="Title 1">
+            <a:extLst>
+              <a:ext uri="{FF2B5EF4-FFF2-40B4-BE49-F238E27FC236}">
+                <a16:creationId xmlns:a16="http://schemas.microsoft.com/office/drawing/2014/main" id="{3EC70418-8F83-3C9E-7A93-DF61EC41A1E3}"/>
+              </a:ext>
+            </a:extLst>
+          </p:cNvPr>
+          <p:cNvSpPr>
+            <a:spLocks noGrp="1"/>
+          </p:cNvSpPr>
+          <p:nvPr>
+            <p:ph type="title"/>
+          </p:nvPr>
+        </p:nvSpPr>
+        <p:spPr/>
+        <p:txBody>
+          <a:bodyPr/>
+          <a:lstStyle/>
+          <a:p>
+            <a:r>
+              <a:rPr lang="en-GB" dirty="0"/>
+              <a:t>Finetuning Scenarios</a:t>
+            </a:r>
+          </a:p>
+        </p:txBody>
+      </p:sp>
+      <p:sp>
+        <p:nvSpPr>
+          <p:cNvPr id="3" name="Content Placeholder 2">
+            <a:extLst>
+              <a:ext uri="{FF2B5EF4-FFF2-40B4-BE49-F238E27FC236}">
+                <a16:creationId xmlns:a16="http://schemas.microsoft.com/office/drawing/2014/main" id="{6CAFF65F-2B24-83B6-1383-8EC4F9454843}"/>
+              </a:ext>
+            </a:extLst>
+          </p:cNvPr>
+          <p:cNvSpPr>
+            <a:spLocks noGrp="1"/>
+          </p:cNvSpPr>
+          <p:nvPr>
+            <p:ph idx="1"/>
+          </p:nvPr>
+        </p:nvSpPr>
+        <p:spPr/>
+        <p:txBody>
+          <a:bodyPr>
+            <a:noAutofit/>
+          </a:bodyPr>
+          <a:lstStyle/>
+          <a:p>
+            <a:pPr marL="0" indent="0">
+              <a:buNone/>
+            </a:pPr>
+            <a:r>
+              <a:rPr lang="de-DE" sz="2400" dirty="0"/>
+              <a:t>finetuning gives better adjustment to new task than feature extraction (important if new task differs a lot from pretraining task)</a:t>
+            </a:r>
+          </a:p>
+          <a:p>
+            <a:pPr marL="0" indent="0">
+              <a:buNone/>
+            </a:pPr>
+            <a:r>
+              <a:rPr lang="en-GB" sz="2400" dirty="0">
+                <a:sym typeface="Wingdings" panose="05000000000000000000" pitchFamily="2" charset="2"/>
+              </a:rPr>
+              <a:t> coming along with </a:t>
+            </a:r>
+            <a:r>
+              <a:rPr lang="en-GB" sz="2400" dirty="0"/>
+              <a:t>danger of overfitting</a:t>
+            </a:r>
+          </a:p>
+          <a:p>
+            <a:pPr marL="0" indent="0">
+              <a:buNone/>
+            </a:pPr>
+            <a:endParaRPr lang="en-GB" sz="2400" dirty="0"/>
+          </a:p>
+          <a:p>
+            <a:pPr marL="0" indent="0">
+              <a:buNone/>
+            </a:pPr>
+            <a:r>
+              <a:rPr lang="en-GB" sz="2400" dirty="0"/>
+              <a:t>features more generic in early layers (</a:t>
+            </a:r>
+            <a:r>
+              <a:rPr lang="de-DE" sz="2400" dirty="0"/>
+              <a:t>e.g., </a:t>
+            </a:r>
+            <a:r>
+              <a:rPr lang="de-DE" sz="2400" dirty="0" err="1"/>
+              <a:t>token</a:t>
+            </a:r>
+            <a:r>
+              <a:rPr lang="de-DE" sz="2400" dirty="0"/>
+              <a:t> </a:t>
+            </a:r>
+            <a:r>
+              <a:rPr lang="de-DE" sz="2400" dirty="0" err="1"/>
+              <a:t>structure</a:t>
+            </a:r>
+            <a:r>
+              <a:rPr lang="de-DE" sz="2400" dirty="0"/>
+              <a:t>, </a:t>
+            </a:r>
+            <a:r>
+              <a:rPr lang="de-DE" sz="2400" dirty="0" err="1"/>
+              <a:t>syntax</a:t>
+            </a:r>
+            <a:r>
+              <a:rPr lang="de-DE" sz="2400" dirty="0"/>
+              <a:t>, </a:t>
+            </a:r>
+            <a:r>
+              <a:rPr lang="de-DE" sz="2400" dirty="0" err="1"/>
+              <a:t>part-of-speech</a:t>
+            </a:r>
+            <a:r>
+              <a:rPr lang="en-GB" sz="2400" dirty="0"/>
+              <a:t>) and more specific to the pretraining data in later layers (</a:t>
+            </a:r>
+            <a:r>
+              <a:rPr lang="de-DE" sz="2400" dirty="0"/>
+              <a:t>e.g., </a:t>
+            </a:r>
+            <a:r>
+              <a:rPr lang="de-DE" sz="2400" dirty="0" err="1"/>
+              <a:t>word</a:t>
+            </a:r>
+            <a:r>
+              <a:rPr lang="de-DE" sz="2400" dirty="0"/>
+              <a:t> sense, </a:t>
+            </a:r>
+            <a:r>
+              <a:rPr lang="de-DE" sz="2400" dirty="0" err="1"/>
+              <a:t>entity</a:t>
+            </a:r>
+            <a:r>
+              <a:rPr lang="de-DE" sz="2400" dirty="0"/>
+              <a:t> </a:t>
+            </a:r>
+            <a:r>
+              <a:rPr lang="de-DE" sz="2400" dirty="0" err="1"/>
+              <a:t>linking</a:t>
+            </a:r>
+            <a:r>
+              <a:rPr lang="en-GB" sz="2400" dirty="0"/>
+              <a:t>)</a:t>
+            </a:r>
+          </a:p>
+          <a:p>
+            <a:pPr marL="0" indent="0">
+              <a:buNone/>
+            </a:pPr>
+            <a:r>
+              <a:rPr lang="en-GB" sz="2400" dirty="0">
+                <a:sym typeface="Wingdings" panose="05000000000000000000" pitchFamily="2" charset="2"/>
+              </a:rPr>
+              <a:t> for small finetuning data sets, typically keep weights of early layers fixed to avoid overfitting</a:t>
+            </a:r>
+          </a:p>
+          <a:p>
+            <a:pPr marL="0" indent="0">
+              <a:buNone/>
+            </a:pPr>
+            <a:endParaRPr lang="en-GB" sz="2400" dirty="0"/>
+          </a:p>
+          <a:p>
+            <a:pPr marL="0" indent="0">
+              <a:buNone/>
+            </a:pPr>
+            <a:r>
+              <a:rPr lang="en-GB" sz="2400" dirty="0"/>
+              <a:t>for large finetuning data sets (less danger of overfitting), finetuning all layers can be beneficial</a:t>
+            </a:r>
+          </a:p>
+        </p:txBody>
+      </p:sp>
+      <p:sp>
+        <p:nvSpPr>
+          <p:cNvPr id="4" name="Slide Number Placeholder 3">
+            <a:extLst>
+              <a:ext uri="{FF2B5EF4-FFF2-40B4-BE49-F238E27FC236}">
+                <a16:creationId xmlns:a16="http://schemas.microsoft.com/office/drawing/2014/main" id="{61A47A66-9C27-B5A5-879C-001B250652C9}"/>
+              </a:ext>
+            </a:extLst>
+          </p:cNvPr>
+          <p:cNvSpPr>
+            <a:spLocks noGrp="1"/>
+          </p:cNvSpPr>
+          <p:nvPr>
+            <p:ph type="sldNum" sz="quarter" idx="12"/>
+          </p:nvPr>
+        </p:nvSpPr>
+        <p:spPr/>
+        <p:txBody>
+          <a:bodyPr/>
+          <a:lstStyle/>
+          <a:p>
+            <a:fld id="{3D4C94FE-FF23-4504-88E9-14D481113291}" type="slidenum">
+              <a:rPr lang="en-GB" smtClean="0"/>
+              <a:t>15</a:t>
+            </a:fld>
+            <a:endParaRPr lang="en-GB"/>
+          </a:p>
+        </p:txBody>
+      </p:sp>
+    </p:spTree>
+    <p:extLst>
+      <p:ext uri="{BB962C8B-B14F-4D97-AF65-F5344CB8AC3E}">
+        <p14:creationId xmlns:p14="http://schemas.microsoft.com/office/powerpoint/2010/main" val="2407320420"/>
+      </p:ext>
+    </p:extLst>
+  </p:cSld>
+  <p:clrMapOvr>
+    <a:masterClrMapping/>
+  </p:clrMapOvr>
+</p:sld>
+</file>
+
+<file path=ppt/slides/slide16.xml><?xml version="1.0" encoding="utf-8"?>
+<p:sld xmlns:a="http://schemas.openxmlformats.org/drawingml/2006/main" xmlns:r="http://schemas.openxmlformats.org/officeDocument/2006/relationships" xmlns:p="http://schemas.openxmlformats.org/presentationml/2006/main">
+  <p:cSld>
+    <p:spTree>
+      <p:nvGrpSpPr>
+        <p:cNvPr id="1" name=""/>
+        <p:cNvGrpSpPr/>
+        <p:nvPr/>
+      </p:nvGrpSpPr>
+      <p:grpSpPr>
+        <a:xfrm>
+          <a:off x="0" y="0"/>
+          <a:ext cx="0" cy="0"/>
+          <a:chOff x="0" y="0"/>
+          <a:chExt cx="0" cy="0"/>
+        </a:xfrm>
+      </p:grpSpPr>
+      <p:sp>
+        <p:nvSpPr>
+          <p:cNvPr id="2" name="Title 1">
+            <a:extLst>
+              <a:ext uri="{FF2B5EF4-FFF2-40B4-BE49-F238E27FC236}">
+                <a16:creationId xmlns:a16="http://schemas.microsoft.com/office/drawing/2014/main" id="{B3CEFB21-2CCA-564A-D312-3A4B41E5AAE8}"/>
+              </a:ext>
+            </a:extLst>
+          </p:cNvPr>
+          <p:cNvSpPr>
+            <a:spLocks noGrp="1"/>
+          </p:cNvSpPr>
+          <p:nvPr>
+            <p:ph type="title"/>
+          </p:nvPr>
+        </p:nvSpPr>
+        <p:spPr/>
+        <p:txBody>
+          <a:bodyPr/>
+          <a:lstStyle/>
+          <a:p>
+            <a:r>
+              <a:rPr lang="de-DE" dirty="0" err="1"/>
+              <a:t>Why</a:t>
+            </a:r>
+            <a:r>
+              <a:rPr lang="de-DE" dirty="0"/>
+              <a:t> Finetuning? </a:t>
+            </a:r>
+            <a:endParaRPr lang="en-DE" dirty="0"/>
+          </a:p>
+        </p:txBody>
+      </p:sp>
+      <p:sp>
+        <p:nvSpPr>
+          <p:cNvPr id="4" name="Slide Number Placeholder 3">
+            <a:extLst>
+              <a:ext uri="{FF2B5EF4-FFF2-40B4-BE49-F238E27FC236}">
+                <a16:creationId xmlns:a16="http://schemas.microsoft.com/office/drawing/2014/main" id="{FDB15F20-2568-EEBA-AF76-03A86D63DFE2}"/>
+              </a:ext>
+            </a:extLst>
+          </p:cNvPr>
+          <p:cNvSpPr>
+            <a:spLocks noGrp="1"/>
+          </p:cNvSpPr>
+          <p:nvPr>
+            <p:ph type="sldNum" sz="quarter" idx="12"/>
+          </p:nvPr>
+        </p:nvSpPr>
+        <p:spPr/>
+        <p:txBody>
+          <a:bodyPr/>
+          <a:lstStyle/>
+          <a:p>
+            <a:fld id="{849D05A8-43E9-1C49-8606-50AB68220DEC}" type="slidenum">
+              <a:rPr lang="en-DE" smtClean="0"/>
+              <a:t>16</a:t>
+            </a:fld>
+            <a:endParaRPr lang="en-DE"/>
+          </a:p>
+        </p:txBody>
+      </p:sp>
+      <p:pic>
+        <p:nvPicPr>
+          <p:cNvPr id="7" name="Picture 6">
+            <a:extLst>
+              <a:ext uri="{FF2B5EF4-FFF2-40B4-BE49-F238E27FC236}">
+                <a16:creationId xmlns:a16="http://schemas.microsoft.com/office/drawing/2014/main" id="{18758AB1-B3B0-0616-5CEB-865CA618E6D8}"/>
+              </a:ext>
+            </a:extLst>
+          </p:cNvPr>
+          <p:cNvPicPr>
+            <a:picLocks noChangeAspect="1"/>
+          </p:cNvPicPr>
+          <p:nvPr/>
+        </p:nvPicPr>
+        <p:blipFill>
+          <a:blip r:embed="rId2"/>
+          <a:stretch>
+            <a:fillRect/>
+          </a:stretch>
+        </p:blipFill>
+        <p:spPr>
+          <a:xfrm>
+            <a:off x="2613454" y="4100715"/>
+            <a:ext cx="6965091" cy="2261627"/>
+          </a:xfrm>
+          <a:prstGeom prst="rect">
+            <a:avLst/>
+          </a:prstGeom>
+        </p:spPr>
+      </p:pic>
+      <p:sp>
+        <p:nvSpPr>
+          <p:cNvPr id="8" name="TextBox 7">
+            <a:extLst>
+              <a:ext uri="{FF2B5EF4-FFF2-40B4-BE49-F238E27FC236}">
+                <a16:creationId xmlns:a16="http://schemas.microsoft.com/office/drawing/2014/main" id="{CCBF6A85-5F13-3267-7016-A5B242B7FF98}"/>
+              </a:ext>
+            </a:extLst>
+          </p:cNvPr>
+          <p:cNvSpPr txBox="1"/>
+          <p:nvPr/>
+        </p:nvSpPr>
+        <p:spPr>
+          <a:xfrm>
+            <a:off x="6302826" y="6356350"/>
+            <a:ext cx="644512" cy="246221"/>
+          </a:xfrm>
+          <a:prstGeom prst="rect">
+            <a:avLst/>
+          </a:prstGeom>
+          <a:noFill/>
+        </p:spPr>
+        <p:txBody>
+          <a:bodyPr wrap="square" rtlCol="0">
+            <a:spAutoFit/>
+          </a:bodyPr>
+          <a:lstStyle/>
+          <a:p>
+            <a:r>
+              <a:rPr lang="de-DE" sz="1000" dirty="0">
+                <a:hlinkClick r:id="rId3"/>
+              </a:rPr>
+              <a:t>source</a:t>
+            </a:r>
+            <a:endParaRPr lang="de-DE" sz="1000" dirty="0"/>
+          </a:p>
+        </p:txBody>
+      </p:sp>
+      <p:sp>
+        <p:nvSpPr>
+          <p:cNvPr id="9" name="Inhaltsplatzhalter 8">
+            <a:extLst>
+              <a:ext uri="{FF2B5EF4-FFF2-40B4-BE49-F238E27FC236}">
+                <a16:creationId xmlns:a16="http://schemas.microsoft.com/office/drawing/2014/main" id="{26BAE1A0-1615-EE5C-7E82-5B0C212C8B02}"/>
+              </a:ext>
+            </a:extLst>
+          </p:cNvPr>
+          <p:cNvSpPr>
+            <a:spLocks noGrp="1"/>
+          </p:cNvSpPr>
+          <p:nvPr>
+            <p:ph idx="1"/>
+          </p:nvPr>
+        </p:nvSpPr>
+        <p:spPr/>
+        <p:txBody>
+          <a:bodyPr/>
+          <a:lstStyle/>
+          <a:p>
+            <a:pPr marL="0" indent="0">
+              <a:buNone/>
+            </a:pPr>
+            <a:r>
+              <a:rPr lang="de-DE" dirty="0" err="1"/>
+              <a:t>make</a:t>
+            </a:r>
+            <a:r>
+              <a:rPr lang="de-DE" dirty="0"/>
+              <a:t> </a:t>
+            </a:r>
+            <a:r>
+              <a:rPr lang="de-DE" dirty="0" err="1"/>
+              <a:t>use</a:t>
+            </a:r>
+            <a:r>
+              <a:rPr lang="de-DE" dirty="0"/>
+              <a:t> </a:t>
+            </a:r>
+            <a:r>
+              <a:rPr lang="de-DE" dirty="0" err="1"/>
+              <a:t>of</a:t>
+            </a:r>
+            <a:r>
+              <a:rPr lang="de-DE" dirty="0"/>
+              <a:t> </a:t>
+            </a:r>
+            <a:r>
+              <a:rPr lang="de-DE" dirty="0" err="1"/>
+              <a:t>your</a:t>
+            </a:r>
+            <a:r>
+              <a:rPr lang="de-DE" dirty="0"/>
+              <a:t> own </a:t>
+            </a:r>
+            <a:r>
+              <a:rPr lang="de-DE" dirty="0" err="1"/>
+              <a:t>data</a:t>
+            </a:r>
+            <a:r>
+              <a:rPr lang="de-DE" dirty="0"/>
+              <a:t> (domain-</a:t>
+            </a:r>
+            <a:r>
+              <a:rPr lang="de-DE" dirty="0" err="1"/>
+              <a:t>specific</a:t>
+            </a:r>
+            <a:r>
+              <a:rPr lang="de-DE" dirty="0"/>
+              <a:t>, high-quality)</a:t>
+            </a:r>
+          </a:p>
+          <a:p>
+            <a:pPr marL="0" indent="0">
+              <a:buNone/>
+            </a:pPr>
+            <a:endParaRPr lang="de-DE" dirty="0"/>
+          </a:p>
+          <a:p>
+            <a:pPr marL="0" indent="0">
+              <a:buNone/>
+            </a:pPr>
+            <a:r>
+              <a:rPr lang="de-DE" dirty="0" err="1"/>
+              <a:t>instruction</a:t>
+            </a:r>
+            <a:r>
+              <a:rPr lang="de-DE" dirty="0"/>
+              <a:t> </a:t>
+            </a:r>
+            <a:r>
+              <a:rPr lang="de-DE" dirty="0" err="1"/>
+              <a:t>tuning</a:t>
+            </a:r>
+            <a:r>
+              <a:rPr lang="de-DE" dirty="0"/>
+              <a:t> </a:t>
+            </a:r>
+            <a:r>
+              <a:rPr lang="de-DE" dirty="0" err="1"/>
+              <a:t>typically</a:t>
+            </a:r>
+            <a:r>
+              <a:rPr lang="de-DE" dirty="0"/>
+              <a:t> </a:t>
+            </a:r>
+            <a:r>
+              <a:rPr lang="de-DE" dirty="0" err="1"/>
+              <a:t>for</a:t>
+            </a:r>
+            <a:r>
+              <a:rPr lang="de-DE" dirty="0"/>
+              <a:t> </a:t>
+            </a:r>
+            <a:r>
+              <a:rPr lang="de-DE" dirty="0" err="1"/>
+              <a:t>more</a:t>
+            </a:r>
+            <a:r>
+              <a:rPr lang="de-DE" dirty="0"/>
+              <a:t> </a:t>
+            </a:r>
+            <a:r>
+              <a:rPr lang="de-DE" dirty="0" err="1"/>
+              <a:t>generic</a:t>
+            </a:r>
+            <a:r>
+              <a:rPr lang="de-DE" dirty="0"/>
+              <a:t> expert, like </a:t>
+            </a:r>
+            <a:r>
+              <a:rPr lang="de-DE" dirty="0" err="1"/>
+              <a:t>coding</a:t>
+            </a:r>
+            <a:r>
+              <a:rPr lang="de-DE" dirty="0"/>
+              <a:t> (but </a:t>
+            </a:r>
+            <a:r>
+              <a:rPr lang="de-DE" dirty="0" err="1"/>
+              <a:t>can</a:t>
+            </a:r>
+            <a:r>
+              <a:rPr lang="de-DE" dirty="0"/>
+              <a:t> also </a:t>
+            </a:r>
+            <a:r>
+              <a:rPr lang="de-DE" dirty="0" err="1"/>
+              <a:t>be</a:t>
+            </a:r>
+            <a:r>
+              <a:rPr lang="de-DE" dirty="0"/>
+              <a:t> a </a:t>
+            </a:r>
+            <a:r>
+              <a:rPr lang="de-DE" dirty="0" err="1"/>
+              <a:t>more</a:t>
+            </a:r>
+            <a:r>
+              <a:rPr lang="de-DE" dirty="0"/>
+              <a:t> </a:t>
+            </a:r>
+            <a:r>
+              <a:rPr lang="de-DE" dirty="0" err="1"/>
+              <a:t>specific</a:t>
+            </a:r>
+            <a:r>
+              <a:rPr lang="de-DE" dirty="0"/>
+              <a:t> </a:t>
+            </a:r>
+            <a:r>
+              <a:rPr lang="de-DE" dirty="0" err="1"/>
+              <a:t>thing</a:t>
+            </a:r>
+            <a:r>
+              <a:rPr lang="de-DE" dirty="0"/>
+              <a:t> on private </a:t>
+            </a:r>
+            <a:r>
+              <a:rPr lang="de-DE" dirty="0" err="1"/>
+              <a:t>data</a:t>
+            </a:r>
+            <a:r>
+              <a:rPr lang="de-DE" dirty="0"/>
+              <a:t>)</a:t>
+            </a:r>
+          </a:p>
+        </p:txBody>
+      </p:sp>
+    </p:spTree>
+    <p:extLst>
+      <p:ext uri="{BB962C8B-B14F-4D97-AF65-F5344CB8AC3E}">
+        <p14:creationId xmlns:p14="http://schemas.microsoft.com/office/powerpoint/2010/main" val="3433214716"/>
+      </p:ext>
+    </p:extLst>
+  </p:cSld>
+  <p:clrMapOvr>
+    <a:masterClrMapping/>
+  </p:clrMapOvr>
+</p:sld>
+</file>
+
+<file path=ppt/slides/slide17.xml><?xml version="1.0" encoding="utf-8"?>
+<p:sld xmlns:a="http://schemas.openxmlformats.org/drawingml/2006/main" xmlns:r="http://schemas.openxmlformats.org/officeDocument/2006/relationships" xmlns:p="http://schemas.openxmlformats.org/presentationml/2006/main">
+  <p:cSld>
+    <p:spTree>
+      <p:nvGrpSpPr>
+        <p:cNvPr id="1" name=""/>
+        <p:cNvGrpSpPr/>
+        <p:nvPr/>
+      </p:nvGrpSpPr>
+      <p:grpSpPr>
+        <a:xfrm>
+          <a:off x="0" y="0"/>
+          <a:ext cx="0" cy="0"/>
+          <a:chOff x="0" y="0"/>
+          <a:chExt cx="0" cy="0"/>
+        </a:xfrm>
+      </p:grpSpPr>
+      <p:sp>
+        <p:nvSpPr>
+          <p:cNvPr id="5" name="Titel 4">
+            <a:extLst>
+              <a:ext uri="{FF2B5EF4-FFF2-40B4-BE49-F238E27FC236}">
+                <a16:creationId xmlns:a16="http://schemas.microsoft.com/office/drawing/2014/main" id="{4ED462E1-7391-FF3F-8ADF-6D5135CCE104}"/>
+              </a:ext>
+            </a:extLst>
+          </p:cNvPr>
+          <p:cNvSpPr>
+            <a:spLocks noGrp="1"/>
+          </p:cNvSpPr>
+          <p:nvPr>
+            <p:ph type="title"/>
+          </p:nvPr>
+        </p:nvSpPr>
+        <p:spPr/>
+        <p:txBody>
+          <a:bodyPr/>
+          <a:lstStyle/>
+          <a:p>
+            <a:endParaRPr lang="de-DE"/>
+          </a:p>
+        </p:txBody>
+      </p:sp>
+      <p:sp>
+        <p:nvSpPr>
+          <p:cNvPr id="4" name="Foliennummernplatzhalter 3">
+            <a:extLst>
+              <a:ext uri="{FF2B5EF4-FFF2-40B4-BE49-F238E27FC236}">
+                <a16:creationId xmlns:a16="http://schemas.microsoft.com/office/drawing/2014/main" id="{7B347D77-2736-E668-977C-E7F81439B1C6}"/>
+              </a:ext>
+            </a:extLst>
+          </p:cNvPr>
+          <p:cNvSpPr>
+            <a:spLocks noGrp="1"/>
+          </p:cNvSpPr>
+          <p:nvPr>
+            <p:ph type="sldNum" sz="quarter" idx="12"/>
+          </p:nvPr>
+        </p:nvSpPr>
+        <p:spPr/>
+        <p:txBody>
+          <a:bodyPr/>
+          <a:lstStyle/>
+          <a:p>
+            <a:fld id="{4055531C-5681-6B44-B2CA-926D7A74B06D}" type="slidenum">
+              <a:rPr lang="de-DE" smtClean="0"/>
+              <a:t>17</a:t>
+            </a:fld>
+            <a:endParaRPr lang="de-DE"/>
+          </a:p>
+        </p:txBody>
+      </p:sp>
+      <p:pic>
+        <p:nvPicPr>
+          <p:cNvPr id="7" name="Grafik 6" descr="Ein Bild, das Text, Diagramm, Screenshot, Reihe enthält.&#10;&#10;KI-generierte Inhalte können fehlerhaft sein.">
+            <a:extLst>
+              <a:ext uri="{FF2B5EF4-FFF2-40B4-BE49-F238E27FC236}">
+                <a16:creationId xmlns:a16="http://schemas.microsoft.com/office/drawing/2014/main" id="{140FEE93-8F5D-CF9B-C151-C259F9021E2E}"/>
+              </a:ext>
+            </a:extLst>
+          </p:cNvPr>
+          <p:cNvPicPr>
+            <a:picLocks noChangeAspect="1"/>
+          </p:cNvPicPr>
+          <p:nvPr/>
+        </p:nvPicPr>
+        <p:blipFill>
+          <a:blip r:embed="rId2"/>
+          <a:stretch>
+            <a:fillRect/>
+          </a:stretch>
+        </p:blipFill>
+        <p:spPr>
+          <a:xfrm>
+            <a:off x="2209800" y="2308259"/>
+            <a:ext cx="7772400" cy="4184616"/>
+          </a:xfrm>
+          <a:prstGeom prst="rect">
+            <a:avLst/>
+          </a:prstGeom>
+        </p:spPr>
+      </p:pic>
+    </p:spTree>
+    <p:extLst>
+      <p:ext uri="{BB962C8B-B14F-4D97-AF65-F5344CB8AC3E}">
+        <p14:creationId xmlns:p14="http://schemas.microsoft.com/office/powerpoint/2010/main" val="1330775425"/>
+      </p:ext>
+    </p:extLst>
+  </p:cSld>
+  <p:clrMapOvr>
+    <a:masterClrMapping/>
+  </p:clrMapOvr>
+</p:sld>
+</file>
+
+<file path=ppt/slides/slide18.xml><?xml version="1.0" encoding="utf-8"?>
+<p:sld xmlns:a="http://schemas.openxmlformats.org/drawingml/2006/main" xmlns:r="http://schemas.openxmlformats.org/officeDocument/2006/relationships" xmlns:p="http://schemas.openxmlformats.org/presentationml/2006/main">
+  <p:cSld>
+    <p:spTree>
+      <p:nvGrpSpPr>
+        <p:cNvPr id="1" name=""/>
+        <p:cNvGrpSpPr/>
+        <p:nvPr/>
+      </p:nvGrpSpPr>
+      <p:grpSpPr>
+        <a:xfrm>
+          <a:off x="0" y="0"/>
+          <a:ext cx="0" cy="0"/>
+          <a:chOff x="0" y="0"/>
+          <a:chExt cx="0" cy="0"/>
+        </a:xfrm>
+      </p:grpSpPr>
+      <p:sp>
+        <p:nvSpPr>
+          <p:cNvPr id="2" name="Titel 1">
+            <a:extLst>
+              <a:ext uri="{FF2B5EF4-FFF2-40B4-BE49-F238E27FC236}">
+                <a16:creationId xmlns:a16="http://schemas.microsoft.com/office/drawing/2014/main" id="{E8DCEE70-38C0-6533-2AC9-319D23948A94}"/>
+              </a:ext>
+            </a:extLst>
+          </p:cNvPr>
+          <p:cNvSpPr>
+            <a:spLocks noGrp="1"/>
+          </p:cNvSpPr>
+          <p:nvPr>
+            <p:ph type="title"/>
+          </p:nvPr>
+        </p:nvSpPr>
+        <p:spPr/>
+        <p:txBody>
+          <a:bodyPr/>
+          <a:lstStyle/>
+          <a:p>
+            <a:r>
+              <a:rPr lang="de-DE" dirty="0" err="1"/>
+              <a:t>Instruction</a:t>
+            </a:r>
+            <a:r>
+              <a:rPr lang="de-DE" dirty="0"/>
+              <a:t> Tuning</a:t>
+            </a:r>
+          </a:p>
+        </p:txBody>
+      </p:sp>
+      <p:sp>
+        <p:nvSpPr>
+          <p:cNvPr id="3" name="Inhaltsplatzhalter 2">
+            <a:extLst>
+              <a:ext uri="{FF2B5EF4-FFF2-40B4-BE49-F238E27FC236}">
+                <a16:creationId xmlns:a16="http://schemas.microsoft.com/office/drawing/2014/main" id="{6058E5BD-E8C1-3A42-10A3-CBE78B1726A4}"/>
+              </a:ext>
+            </a:extLst>
+          </p:cNvPr>
+          <p:cNvSpPr>
+            <a:spLocks noGrp="1"/>
+          </p:cNvSpPr>
+          <p:nvPr>
+            <p:ph idx="1"/>
+          </p:nvPr>
+        </p:nvSpPr>
+        <p:spPr/>
+        <p:txBody>
+          <a:bodyPr/>
+          <a:lstStyle/>
+          <a:p>
+            <a:r>
+              <a:rPr lang="de-DE" dirty="0"/>
+              <a:t>…</a:t>
+            </a:r>
+          </a:p>
+          <a:p>
+            <a:r>
+              <a:rPr lang="en-GB" dirty="0"/>
+              <a:t>supervised fine-tuning (</a:t>
+            </a:r>
+            <a:r>
+              <a:rPr lang="en-GB" dirty="0">
+                <a:hlinkClick r:id="rId2"/>
+              </a:rPr>
+              <a:t>SFT</a:t>
+            </a:r>
+            <a:r>
+              <a:rPr lang="en-GB" dirty="0"/>
+              <a:t>)</a:t>
+            </a:r>
+          </a:p>
+          <a:p>
+            <a:r>
+              <a:rPr lang="en-GB" dirty="0"/>
+              <a:t>(e.g., formatting)</a:t>
+            </a:r>
+            <a:endParaRPr lang="de-DE" dirty="0"/>
+          </a:p>
+        </p:txBody>
+      </p:sp>
+      <p:sp>
+        <p:nvSpPr>
+          <p:cNvPr id="4" name="Foliennummernplatzhalter 3">
+            <a:extLst>
+              <a:ext uri="{FF2B5EF4-FFF2-40B4-BE49-F238E27FC236}">
+                <a16:creationId xmlns:a16="http://schemas.microsoft.com/office/drawing/2014/main" id="{97D7E70E-8F09-7DCF-2E5A-5879BF103E88}"/>
+              </a:ext>
+            </a:extLst>
+          </p:cNvPr>
+          <p:cNvSpPr>
+            <a:spLocks noGrp="1"/>
+          </p:cNvSpPr>
+          <p:nvPr>
+            <p:ph type="sldNum" sz="quarter" idx="12"/>
+          </p:nvPr>
+        </p:nvSpPr>
+        <p:spPr/>
+        <p:txBody>
+          <a:bodyPr/>
+          <a:lstStyle/>
+          <a:p>
+            <a:fld id="{4055531C-5681-6B44-B2CA-926D7A74B06D}" type="slidenum">
+              <a:rPr lang="de-DE" smtClean="0"/>
+              <a:t>18</a:t>
+            </a:fld>
+            <a:endParaRPr lang="de-DE"/>
+          </a:p>
+        </p:txBody>
+      </p:sp>
+    </p:spTree>
+    <p:extLst>
+      <p:ext uri="{BB962C8B-B14F-4D97-AF65-F5344CB8AC3E}">
+        <p14:creationId xmlns:p14="http://schemas.microsoft.com/office/powerpoint/2010/main" val="3009532390"/>
+      </p:ext>
+    </p:extLst>
+  </p:cSld>
+  <p:clrMapOvr>
+    <a:masterClrMapping/>
+  </p:clrMapOvr>
+</p:sld>
+</file>
+
+<file path=ppt/slides/slide19.xml><?xml version="1.0" encoding="utf-8"?>
+<p:sld xmlns:a="http://schemas.openxmlformats.org/drawingml/2006/main" xmlns:r="http://schemas.openxmlformats.org/officeDocument/2006/relationships" xmlns:p="http://schemas.openxmlformats.org/presentationml/2006/main">
+  <p:cSld>
+    <p:spTree>
+      <p:nvGrpSpPr>
+        <p:cNvPr id="1" name=""/>
+        <p:cNvGrpSpPr/>
+        <p:nvPr/>
+      </p:nvGrpSpPr>
+      <p:grpSpPr>
+        <a:xfrm>
+          <a:off x="0" y="0"/>
+          <a:ext cx="0" cy="0"/>
+          <a:chOff x="0" y="0"/>
+          <a:chExt cx="0" cy="0"/>
+        </a:xfrm>
+      </p:grpSpPr>
+      <p:sp>
+        <p:nvSpPr>
+          <p:cNvPr id="2" name="Titel 1">
+            <a:extLst>
+              <a:ext uri="{FF2B5EF4-FFF2-40B4-BE49-F238E27FC236}">
+                <a16:creationId xmlns:a16="http://schemas.microsoft.com/office/drawing/2014/main" id="{66694547-5151-D7D3-A925-23192933D4D6}"/>
+              </a:ext>
+            </a:extLst>
+          </p:cNvPr>
+          <p:cNvSpPr>
+            <a:spLocks noGrp="1"/>
+          </p:cNvSpPr>
+          <p:nvPr>
+            <p:ph type="title"/>
+          </p:nvPr>
+        </p:nvSpPr>
+        <p:spPr/>
+        <p:txBody>
+          <a:bodyPr/>
+          <a:lstStyle/>
+          <a:p>
+            <a:r>
+              <a:rPr lang="de-DE" dirty="0"/>
+              <a:t>Use Case: Question </a:t>
+            </a:r>
+            <a:r>
+              <a:rPr lang="de-DE" dirty="0" err="1"/>
+              <a:t>Answering</a:t>
+            </a:r>
+            <a:endParaRPr lang="de-DE" dirty="0"/>
+          </a:p>
+        </p:txBody>
+      </p:sp>
+      <p:sp>
+        <p:nvSpPr>
+          <p:cNvPr id="3" name="Inhaltsplatzhalter 2">
+            <a:extLst>
+              <a:ext uri="{FF2B5EF4-FFF2-40B4-BE49-F238E27FC236}">
+                <a16:creationId xmlns:a16="http://schemas.microsoft.com/office/drawing/2014/main" id="{16ECF3B4-00CD-08EC-E43D-808D6F92E4C7}"/>
+              </a:ext>
+            </a:extLst>
+          </p:cNvPr>
+          <p:cNvSpPr>
+            <a:spLocks noGrp="1"/>
+          </p:cNvSpPr>
+          <p:nvPr>
+            <p:ph idx="1"/>
+          </p:nvPr>
+        </p:nvSpPr>
+        <p:spPr/>
+        <p:txBody>
+          <a:bodyPr/>
+          <a:lstStyle/>
+          <a:p>
+            <a:endParaRPr lang="de-DE"/>
+          </a:p>
+        </p:txBody>
+      </p:sp>
+      <p:sp>
+        <p:nvSpPr>
+          <p:cNvPr id="4" name="Foliennummernplatzhalter 3">
+            <a:extLst>
+              <a:ext uri="{FF2B5EF4-FFF2-40B4-BE49-F238E27FC236}">
+                <a16:creationId xmlns:a16="http://schemas.microsoft.com/office/drawing/2014/main" id="{FF4B0235-81C4-B185-7A07-065F0D4471A3}"/>
+              </a:ext>
+            </a:extLst>
+          </p:cNvPr>
+          <p:cNvSpPr>
+            <a:spLocks noGrp="1"/>
+          </p:cNvSpPr>
+          <p:nvPr>
+            <p:ph type="sldNum" sz="quarter" idx="12"/>
+          </p:nvPr>
+        </p:nvSpPr>
+        <p:spPr/>
+        <p:txBody>
+          <a:bodyPr/>
+          <a:lstStyle/>
+          <a:p>
+            <a:fld id="{4055531C-5681-6B44-B2CA-926D7A74B06D}" type="slidenum">
+              <a:rPr lang="de-DE" smtClean="0"/>
+              <a:t>19</a:t>
+            </a:fld>
+            <a:endParaRPr lang="de-DE"/>
+          </a:p>
+        </p:txBody>
+      </p:sp>
+    </p:spTree>
+    <p:extLst>
+      <p:ext uri="{BB962C8B-B14F-4D97-AF65-F5344CB8AC3E}">
+        <p14:creationId xmlns:p14="http://schemas.microsoft.com/office/powerpoint/2010/main" val="687081360"/>
+      </p:ext>
+    </p:extLst>
+  </p:cSld>
+  <p:clrMapOvr>
+    <a:masterClrMapping/>
+  </p:clrMapOvr>
+</p:sld>
+</file>
+
+<file path=ppt/slides/slide2.xml><?xml version="1.0" encoding="utf-8"?>
+<p:sld xmlns:a="http://schemas.openxmlformats.org/drawingml/2006/main" xmlns:r="http://schemas.openxmlformats.org/officeDocument/2006/relationships" xmlns:p="http://schemas.openxmlformats.org/presentationml/2006/main">
+  <p:cSld>
+    <p:spTree>
+      <p:nvGrpSpPr>
+        <p:cNvPr id="1" name=""/>
+        <p:cNvGrpSpPr/>
+        <p:nvPr/>
+      </p:nvGrpSpPr>
+      <p:grpSpPr>
+        <a:xfrm>
+          <a:off x="0" y="0"/>
+          <a:ext cx="0" cy="0"/>
+          <a:chOff x="0" y="0"/>
+          <a:chExt cx="0" cy="0"/>
+        </a:xfrm>
+      </p:grpSpPr>
+      <p:sp>
+        <p:nvSpPr>
+          <p:cNvPr id="2" name="Titel 1">
+            <a:extLst>
+              <a:ext uri="{FF2B5EF4-FFF2-40B4-BE49-F238E27FC236}">
+                <a16:creationId xmlns:a16="http://schemas.microsoft.com/office/drawing/2014/main" id="{931DC26F-F544-96F9-A23C-5F55F871FBD9}"/>
+              </a:ext>
+            </a:extLst>
+          </p:cNvPr>
+          <p:cNvSpPr>
+            <a:spLocks noGrp="1"/>
+          </p:cNvSpPr>
+          <p:nvPr>
+            <p:ph type="title"/>
+          </p:nvPr>
+        </p:nvSpPr>
+        <p:spPr/>
+        <p:txBody>
+          <a:bodyPr/>
+          <a:lstStyle/>
+          <a:p>
+            <a:r>
+              <a:rPr lang="de-DE" dirty="0"/>
+              <a:t>Course Contents</a:t>
+            </a:r>
+          </a:p>
+        </p:txBody>
+      </p:sp>
+      <p:graphicFrame>
+        <p:nvGraphicFramePr>
+          <p:cNvPr id="5" name="Inhaltsplatzhalter 2">
+            <a:extLst>
+              <a:ext uri="{FF2B5EF4-FFF2-40B4-BE49-F238E27FC236}">
+                <a16:creationId xmlns:a16="http://schemas.microsoft.com/office/drawing/2014/main" id="{94E61397-BED1-A35E-59D6-1913902B1876}"/>
+              </a:ext>
+            </a:extLst>
+          </p:cNvPr>
+          <p:cNvGraphicFramePr>
+            <a:graphicFrameLocks noGrp="1"/>
+          </p:cNvGraphicFramePr>
+          <p:nvPr>
+            <p:ph idx="1"/>
+            <p:extLst>
+              <p:ext uri="{D42A27DB-BD31-4B8C-83A1-F6EECF244321}">
+                <p14:modId xmlns:p14="http://schemas.microsoft.com/office/powerpoint/2010/main" val="3278787944"/>
+              </p:ext>
+            </p:extLst>
+          </p:nvPr>
+        </p:nvGraphicFramePr>
+        <p:xfrm>
+          <a:off x="838200" y="1825625"/>
+          <a:ext cx="10515600" cy="4351338"/>
+        </p:xfrm>
+        <a:graphic>
+          <a:graphicData uri="http://schemas.openxmlformats.org/drawingml/2006/diagram">
+            <dgm:relIds xmlns:dgm="http://schemas.openxmlformats.org/drawingml/2006/diagram" xmlns:r="http://schemas.openxmlformats.org/officeDocument/2006/relationships" r:dm="rId2" r:lo="rId3" r:qs="rId4" r:cs="rId5"/>
+          </a:graphicData>
+        </a:graphic>
+      </p:graphicFrame>
+      <p:sp>
+        <p:nvSpPr>
+          <p:cNvPr id="3" name="Foliennummernplatzhalter 2">
+            <a:extLst>
+              <a:ext uri="{FF2B5EF4-FFF2-40B4-BE49-F238E27FC236}">
+                <a16:creationId xmlns:a16="http://schemas.microsoft.com/office/drawing/2014/main" id="{AAA6BD21-F227-F385-D9F5-42230CC45670}"/>
+              </a:ext>
+            </a:extLst>
+          </p:cNvPr>
+          <p:cNvSpPr>
+            <a:spLocks noGrp="1"/>
+          </p:cNvSpPr>
+          <p:nvPr>
+            <p:ph type="sldNum" sz="quarter" idx="12"/>
+          </p:nvPr>
+        </p:nvSpPr>
+        <p:spPr/>
+        <p:txBody>
+          <a:bodyPr/>
+          <a:lstStyle/>
+          <a:p>
+            <a:fld id="{4055531C-5681-6B44-B2CA-926D7A74B06D}" type="slidenum">
+              <a:rPr lang="de-DE" smtClean="0"/>
+              <a:t>2</a:t>
+            </a:fld>
+            <a:endParaRPr lang="de-DE"/>
+          </a:p>
+        </p:txBody>
+      </p:sp>
+    </p:spTree>
+    <p:extLst>
+      <p:ext uri="{BB962C8B-B14F-4D97-AF65-F5344CB8AC3E}">
+        <p14:creationId xmlns:p14="http://schemas.microsoft.com/office/powerpoint/2010/main" val="2666028082"/>
+      </p:ext>
+    </p:extLst>
+  </p:cSld>
+  <p:clrMapOvr>
+    <a:masterClrMapping/>
+  </p:clrMapOvr>
+</p:sld>
+</file>
+
+<file path=ppt/slides/slide20.xml><?xml version="1.0" encoding="utf-8"?>
+<p:sld xmlns:a="http://schemas.openxmlformats.org/drawingml/2006/main" xmlns:r="http://schemas.openxmlformats.org/officeDocument/2006/relationships" xmlns:p="http://schemas.openxmlformats.org/presentationml/2006/main">
+  <p:cSld>
+    <p:spTree>
+      <p:nvGrpSpPr>
+        <p:cNvPr id="1" name=""/>
+        <p:cNvGrpSpPr/>
+        <p:nvPr/>
+      </p:nvGrpSpPr>
+      <p:grpSpPr>
+        <a:xfrm>
+          <a:off x="0" y="0"/>
+          <a:ext cx="0" cy="0"/>
+          <a:chOff x="0" y="0"/>
+          <a:chExt cx="0" cy="0"/>
+        </a:xfrm>
+      </p:grpSpPr>
+      <p:sp>
+        <p:nvSpPr>
+          <p:cNvPr id="3" name="Titel 2">
+            <a:extLst>
+              <a:ext uri="{FF2B5EF4-FFF2-40B4-BE49-F238E27FC236}">
+                <a16:creationId xmlns:a16="http://schemas.microsoft.com/office/drawing/2014/main" id="{4B6824DA-8B74-F684-F880-FDAAE5FC687C}"/>
+              </a:ext>
+            </a:extLst>
+          </p:cNvPr>
+          <p:cNvSpPr>
+            <a:spLocks noGrp="1"/>
+          </p:cNvSpPr>
+          <p:nvPr>
+            <p:ph type="title"/>
+          </p:nvPr>
+        </p:nvSpPr>
+        <p:spPr/>
+        <p:txBody>
+          <a:bodyPr/>
+          <a:lstStyle/>
+          <a:p>
+            <a:r>
+              <a:rPr lang="de-DE" dirty="0"/>
+              <a:t>Vibe Coding</a:t>
+            </a:r>
+          </a:p>
+        </p:txBody>
+      </p:sp>
+      <p:sp>
+        <p:nvSpPr>
+          <p:cNvPr id="4" name="Inhaltsplatzhalter 3">
+            <a:extLst>
+              <a:ext uri="{FF2B5EF4-FFF2-40B4-BE49-F238E27FC236}">
+                <a16:creationId xmlns:a16="http://schemas.microsoft.com/office/drawing/2014/main" id="{6F9C158D-A2EE-2A3F-360F-3F48C1631E96}"/>
+              </a:ext>
+            </a:extLst>
+          </p:cNvPr>
+          <p:cNvSpPr>
+            <a:spLocks noGrp="1"/>
+          </p:cNvSpPr>
+          <p:nvPr>
+            <p:ph idx="1"/>
+          </p:nvPr>
+        </p:nvSpPr>
+        <p:spPr/>
+        <p:txBody>
+          <a:bodyPr/>
+          <a:lstStyle/>
+          <a:p>
+            <a:endParaRPr lang="de-DE"/>
+          </a:p>
+        </p:txBody>
+      </p:sp>
+      <p:sp>
+        <p:nvSpPr>
+          <p:cNvPr id="2" name="Foliennummernplatzhalter 1">
+            <a:extLst>
+              <a:ext uri="{FF2B5EF4-FFF2-40B4-BE49-F238E27FC236}">
+                <a16:creationId xmlns:a16="http://schemas.microsoft.com/office/drawing/2014/main" id="{2FCD1A9F-76D0-3A1D-0524-21380D475A5C}"/>
+              </a:ext>
+            </a:extLst>
+          </p:cNvPr>
+          <p:cNvSpPr>
+            <a:spLocks noGrp="1"/>
+          </p:cNvSpPr>
+          <p:nvPr>
+            <p:ph type="sldNum" sz="quarter" idx="12"/>
+          </p:nvPr>
+        </p:nvSpPr>
+        <p:spPr/>
+        <p:txBody>
+          <a:bodyPr/>
+          <a:lstStyle/>
+          <a:p>
+            <a:fld id="{4055531C-5681-6B44-B2CA-926D7A74B06D}" type="slidenum">
+              <a:rPr lang="de-DE" smtClean="0"/>
+              <a:t>20</a:t>
+            </a:fld>
+            <a:endParaRPr lang="de-DE"/>
+          </a:p>
+        </p:txBody>
+      </p:sp>
+    </p:spTree>
+    <p:extLst>
+      <p:ext uri="{BB962C8B-B14F-4D97-AF65-F5344CB8AC3E}">
+        <p14:creationId xmlns:p14="http://schemas.microsoft.com/office/powerpoint/2010/main" val="2476970652"/>
+      </p:ext>
+    </p:extLst>
+  </p:cSld>
+  <p:clrMapOvr>
+    <a:masterClrMapping/>
+  </p:clrMapOvr>
+</p:sld>
+</file>
+
+<file path=ppt/slides/slide21.xml><?xml version="1.0" encoding="utf-8"?>
+<p:sld xmlns:a="http://schemas.openxmlformats.org/drawingml/2006/main" xmlns:r="http://schemas.openxmlformats.org/officeDocument/2006/relationships" xmlns:p="http://schemas.openxmlformats.org/presentationml/2006/main">
+  <p:cSld>
+    <p:spTree>
+      <p:nvGrpSpPr>
+        <p:cNvPr id="1" name=""/>
+        <p:cNvGrpSpPr/>
+        <p:nvPr/>
+      </p:nvGrpSpPr>
+      <p:grpSpPr>
+        <a:xfrm>
+          <a:off x="0" y="0"/>
+          <a:ext cx="0" cy="0"/>
+          <a:chOff x="0" y="0"/>
+          <a:chExt cx="0" cy="0"/>
+        </a:xfrm>
+      </p:grpSpPr>
+      <p:pic>
+        <p:nvPicPr>
+          <p:cNvPr id="5" name="Grafik 4" descr="Ein Bild, das Text, Diagramm, Reihe, Screenshot enthält.&#10;&#10;KI-generierte Inhalte können fehlerhaft sein.">
+            <a:extLst>
+              <a:ext uri="{FF2B5EF4-FFF2-40B4-BE49-F238E27FC236}">
+                <a16:creationId xmlns:a16="http://schemas.microsoft.com/office/drawing/2014/main" id="{96747100-59AE-6262-89EF-8C7470AFFDAD}"/>
+              </a:ext>
+            </a:extLst>
+          </p:cNvPr>
+          <p:cNvPicPr>
+            <a:picLocks noChangeAspect="1"/>
+          </p:cNvPicPr>
+          <p:nvPr/>
+        </p:nvPicPr>
+        <p:blipFill>
+          <a:blip r:embed="rId2"/>
+          <a:stretch>
+            <a:fillRect/>
+          </a:stretch>
+        </p:blipFill>
+        <p:spPr>
+          <a:xfrm>
+            <a:off x="838200" y="3334977"/>
+            <a:ext cx="10515600" cy="3298525"/>
+          </a:xfrm>
+          <a:prstGeom prst="rect">
+            <a:avLst/>
+          </a:prstGeom>
+        </p:spPr>
+      </p:pic>
+      <p:sp>
+        <p:nvSpPr>
+          <p:cNvPr id="2" name="Titel 1">
+            <a:extLst>
+              <a:ext uri="{FF2B5EF4-FFF2-40B4-BE49-F238E27FC236}">
+                <a16:creationId xmlns:a16="http://schemas.microsoft.com/office/drawing/2014/main" id="{A2D747F7-B5C9-14F0-BC67-84479A070FE6}"/>
+              </a:ext>
+            </a:extLst>
+          </p:cNvPr>
+          <p:cNvSpPr>
+            <a:spLocks noGrp="1"/>
+          </p:cNvSpPr>
+          <p:nvPr>
+            <p:ph type="title"/>
+          </p:nvPr>
+        </p:nvSpPr>
+        <p:spPr/>
+        <p:txBody>
+          <a:bodyPr/>
+          <a:lstStyle/>
+          <a:p>
+            <a:r>
+              <a:rPr lang="de-DE" dirty="0"/>
+              <a:t>Alignment</a:t>
+            </a:r>
+          </a:p>
+        </p:txBody>
+      </p:sp>
+      <p:sp>
+        <p:nvSpPr>
+          <p:cNvPr id="3" name="Inhaltsplatzhalter 2">
+            <a:extLst>
+              <a:ext uri="{FF2B5EF4-FFF2-40B4-BE49-F238E27FC236}">
+                <a16:creationId xmlns:a16="http://schemas.microsoft.com/office/drawing/2014/main" id="{FDF9E407-E7CD-CEC9-08A9-C9287C7FD409}"/>
+              </a:ext>
+            </a:extLst>
+          </p:cNvPr>
+          <p:cNvSpPr>
+            <a:spLocks noGrp="1"/>
+          </p:cNvSpPr>
+          <p:nvPr>
+            <p:ph idx="1"/>
+          </p:nvPr>
+        </p:nvSpPr>
+        <p:spPr/>
+        <p:txBody>
+          <a:bodyPr/>
+          <a:lstStyle/>
+          <a:p>
+            <a:r>
+              <a:rPr lang="de-DE" dirty="0"/>
+              <a:t>…</a:t>
+            </a:r>
+          </a:p>
+          <a:p>
+            <a:r>
+              <a:rPr lang="en-GB" dirty="0"/>
+              <a:t>reinforcement learning from human feedback (</a:t>
+            </a:r>
+            <a:r>
+              <a:rPr lang="en-GB" dirty="0">
+                <a:hlinkClick r:id="rId3"/>
+              </a:rPr>
+              <a:t>RLHF</a:t>
+            </a:r>
+            <a:r>
+              <a:rPr lang="en-GB" dirty="0"/>
+              <a:t>)</a:t>
+            </a:r>
+          </a:p>
+          <a:p>
+            <a:r>
+              <a:rPr lang="en-GB" dirty="0"/>
+              <a:t>alternatives: </a:t>
+            </a:r>
+            <a:r>
+              <a:rPr lang="en-GB" dirty="0">
+                <a:hlinkClick r:id="rId4"/>
+              </a:rPr>
+              <a:t>DPO</a:t>
+            </a:r>
+            <a:r>
+              <a:rPr lang="en-GB" dirty="0"/>
+              <a:t>, </a:t>
+            </a:r>
+            <a:r>
+              <a:rPr lang="en-GB" dirty="0">
+                <a:hlinkClick r:id="rId5"/>
+              </a:rPr>
+              <a:t>ORPO</a:t>
+            </a:r>
+            <a:endParaRPr lang="en-GB" dirty="0"/>
+          </a:p>
+        </p:txBody>
+      </p:sp>
+      <p:sp>
+        <p:nvSpPr>
+          <p:cNvPr id="4" name="Foliennummernplatzhalter 3">
+            <a:extLst>
+              <a:ext uri="{FF2B5EF4-FFF2-40B4-BE49-F238E27FC236}">
+                <a16:creationId xmlns:a16="http://schemas.microsoft.com/office/drawing/2014/main" id="{EAE107DF-A4FD-7351-4A7D-0434F1EAC98D}"/>
+              </a:ext>
+            </a:extLst>
+          </p:cNvPr>
+          <p:cNvSpPr>
+            <a:spLocks noGrp="1"/>
+          </p:cNvSpPr>
+          <p:nvPr>
+            <p:ph type="sldNum" sz="quarter" idx="12"/>
+          </p:nvPr>
+        </p:nvSpPr>
+        <p:spPr/>
+        <p:txBody>
+          <a:bodyPr/>
+          <a:lstStyle/>
+          <a:p>
+            <a:fld id="{4055531C-5681-6B44-B2CA-926D7A74B06D}" type="slidenum">
+              <a:rPr lang="de-DE" smtClean="0"/>
+              <a:t>21</a:t>
+            </a:fld>
+            <a:endParaRPr lang="de-DE"/>
+          </a:p>
+        </p:txBody>
+      </p:sp>
+    </p:spTree>
+    <p:extLst>
+      <p:ext uri="{BB962C8B-B14F-4D97-AF65-F5344CB8AC3E}">
+        <p14:creationId xmlns:p14="http://schemas.microsoft.com/office/powerpoint/2010/main" val="1126874156"/>
+      </p:ext>
+    </p:extLst>
+  </p:cSld>
+  <p:clrMapOvr>
+    <a:masterClrMapping/>
+  </p:clrMapOvr>
+</p:sld>
+</file>
+
+<file path=ppt/slides/slide22.xml><?xml version="1.0" encoding="utf-8"?>
+<p:sld xmlns:a="http://schemas.openxmlformats.org/drawingml/2006/main" xmlns:r="http://schemas.openxmlformats.org/officeDocument/2006/relationships" xmlns:p="http://schemas.openxmlformats.org/presentationml/2006/main">
+  <p:cSld>
+    <p:spTree>
+      <p:nvGrpSpPr>
+        <p:cNvPr id="1" name=""/>
+        <p:cNvGrpSpPr/>
+        <p:nvPr/>
+      </p:nvGrpSpPr>
+      <p:grpSpPr>
+        <a:xfrm>
+          <a:off x="0" y="0"/>
+          <a:ext cx="0" cy="0"/>
+          <a:chOff x="0" y="0"/>
+          <a:chExt cx="0" cy="0"/>
+        </a:xfrm>
+      </p:grpSpPr>
+      <p:sp>
+        <p:nvSpPr>
+          <p:cNvPr id="2" name="Title 1">
+            <a:extLst>
+              <a:ext uri="{FF2B5EF4-FFF2-40B4-BE49-F238E27FC236}">
+                <a16:creationId xmlns:a16="http://schemas.microsoft.com/office/drawing/2014/main" id="{8BDD99FF-C910-A0E8-3381-C448E5F1653D}"/>
+              </a:ext>
+            </a:extLst>
+          </p:cNvPr>
+          <p:cNvSpPr>
+            <a:spLocks noGrp="1"/>
+          </p:cNvSpPr>
+          <p:nvPr>
+            <p:ph type="title"/>
+          </p:nvPr>
+        </p:nvSpPr>
+        <p:spPr/>
+        <p:txBody>
+          <a:bodyPr/>
+          <a:lstStyle/>
+          <a:p>
+            <a:r>
+              <a:rPr lang="en-GB" dirty="0" err="1">
+                <a:hlinkClick r:id="rId2"/>
+              </a:rPr>
+              <a:t>InstructGPT</a:t>
+            </a:r>
+            <a:endParaRPr lang="en-GB" dirty="0"/>
+          </a:p>
+        </p:txBody>
+      </p:sp>
+      <p:sp>
+        <p:nvSpPr>
+          <p:cNvPr id="4" name="Slide Number Placeholder 3">
+            <a:extLst>
+              <a:ext uri="{FF2B5EF4-FFF2-40B4-BE49-F238E27FC236}">
+                <a16:creationId xmlns:a16="http://schemas.microsoft.com/office/drawing/2014/main" id="{98FF788B-7FE4-0E3B-1C93-49275F5E6753}"/>
+              </a:ext>
+            </a:extLst>
+          </p:cNvPr>
+          <p:cNvSpPr>
+            <a:spLocks noGrp="1"/>
+          </p:cNvSpPr>
+          <p:nvPr>
+            <p:ph type="sldNum" sz="quarter" idx="12"/>
+          </p:nvPr>
+        </p:nvSpPr>
+        <p:spPr/>
+        <p:txBody>
+          <a:bodyPr/>
+          <a:lstStyle/>
+          <a:p>
+            <a:fld id="{849D05A8-43E9-1C49-8606-50AB68220DEC}" type="slidenum">
+              <a:rPr lang="en-DE" smtClean="0"/>
+              <a:t>22</a:t>
+            </a:fld>
+            <a:endParaRPr lang="en-DE"/>
+          </a:p>
+        </p:txBody>
+      </p:sp>
+      <p:sp>
+        <p:nvSpPr>
+          <p:cNvPr id="5" name="TextBox 4">
+            <a:extLst>
+              <a:ext uri="{FF2B5EF4-FFF2-40B4-BE49-F238E27FC236}">
+                <a16:creationId xmlns:a16="http://schemas.microsoft.com/office/drawing/2014/main" id="{F3F48B22-F5A5-3996-02A4-5527B567641F}"/>
+              </a:ext>
+            </a:extLst>
+          </p:cNvPr>
+          <p:cNvSpPr txBox="1"/>
+          <p:nvPr/>
+        </p:nvSpPr>
+        <p:spPr>
+          <a:xfrm>
+            <a:off x="11277600" y="5178391"/>
+            <a:ext cx="608718" cy="246219"/>
+          </a:xfrm>
+          <a:prstGeom prst="rect">
+            <a:avLst/>
+          </a:prstGeom>
+          <a:noFill/>
+        </p:spPr>
+        <p:txBody>
+          <a:bodyPr wrap="square" rtlCol="0">
+            <a:spAutoFit/>
+          </a:bodyPr>
+          <a:lstStyle/>
+          <a:p>
+            <a:r>
+              <a:rPr lang="de-DE" sz="1000" dirty="0">
+                <a:hlinkClick r:id="rId3"/>
+              </a:rPr>
+              <a:t>source</a:t>
+            </a:r>
+            <a:endParaRPr lang="de-DE" sz="1000" dirty="0"/>
+          </a:p>
+        </p:txBody>
+      </p:sp>
+      <p:pic>
+        <p:nvPicPr>
+          <p:cNvPr id="7" name="Grafik 6" descr="Ein Bild, das Text, Screenshot enthält.&#10;&#10;KI-generierte Inhalte können fehlerhaft sein.">
+            <a:extLst>
+              <a:ext uri="{FF2B5EF4-FFF2-40B4-BE49-F238E27FC236}">
+                <a16:creationId xmlns:a16="http://schemas.microsoft.com/office/drawing/2014/main" id="{51ABF00D-E8BF-27E7-1A48-C092AAB646B2}"/>
+              </a:ext>
+            </a:extLst>
+          </p:cNvPr>
+          <p:cNvPicPr>
+            <a:picLocks noChangeAspect="1"/>
+          </p:cNvPicPr>
+          <p:nvPr/>
+        </p:nvPicPr>
+        <p:blipFill>
+          <a:blip r:embed="rId4"/>
+          <a:stretch>
+            <a:fillRect/>
+          </a:stretch>
+        </p:blipFill>
+        <p:spPr>
+          <a:xfrm>
+            <a:off x="436605" y="1690688"/>
+            <a:ext cx="11449713" cy="3258162"/>
+          </a:xfrm>
+          <a:prstGeom prst="rect">
+            <a:avLst/>
+          </a:prstGeom>
+        </p:spPr>
+      </p:pic>
+      <p:sp>
+        <p:nvSpPr>
+          <p:cNvPr id="9" name="Textfeld 8">
+            <a:extLst>
+              <a:ext uri="{FF2B5EF4-FFF2-40B4-BE49-F238E27FC236}">
+                <a16:creationId xmlns:a16="http://schemas.microsoft.com/office/drawing/2014/main" id="{DFB0CE71-E065-7443-636C-0D3D508B9E73}"/>
+              </a:ext>
+            </a:extLst>
+          </p:cNvPr>
+          <p:cNvSpPr txBox="1"/>
+          <p:nvPr/>
+        </p:nvSpPr>
+        <p:spPr>
+          <a:xfrm>
+            <a:off x="2984938" y="5424610"/>
+            <a:ext cx="6222124" cy="492443"/>
+          </a:xfrm>
+          <a:prstGeom prst="rect">
+            <a:avLst/>
+          </a:prstGeom>
+          <a:noFill/>
+        </p:spPr>
+        <p:txBody>
+          <a:bodyPr wrap="square">
+            <a:spAutoFit/>
+          </a:bodyPr>
+          <a:lstStyle/>
+          <a:p>
+            <a:pPr marL="0" indent="0">
+              <a:buNone/>
+            </a:pPr>
+            <a:r>
+              <a:rPr lang="en-GB" sz="2600" dirty="0"/>
+              <a:t>aligning LLM output with human intention</a:t>
+            </a:r>
+          </a:p>
+        </p:txBody>
+      </p:sp>
+    </p:spTree>
+    <p:extLst>
+      <p:ext uri="{BB962C8B-B14F-4D97-AF65-F5344CB8AC3E}">
+        <p14:creationId xmlns:p14="http://schemas.microsoft.com/office/powerpoint/2010/main" val="2859818903"/>
+      </p:ext>
+    </p:extLst>
+  </p:cSld>
+  <p:clrMapOvr>
+    <a:masterClrMapping/>
+  </p:clrMapOvr>
+</p:sld>
+</file>
+
+<file path=ppt/slides/slide23.xml><?xml version="1.0" encoding="utf-8"?>
+<p:sld xmlns:a="http://schemas.openxmlformats.org/drawingml/2006/main" xmlns:r="http://schemas.openxmlformats.org/officeDocument/2006/relationships" xmlns:p="http://schemas.openxmlformats.org/presentationml/2006/main">
+  <p:cSld>
+    <p:spTree>
+      <p:nvGrpSpPr>
+        <p:cNvPr id="1" name=""/>
+        <p:cNvGrpSpPr/>
+        <p:nvPr/>
+      </p:nvGrpSpPr>
+      <p:grpSpPr>
+        <a:xfrm>
+          <a:off x="0" y="0"/>
+          <a:ext cx="0" cy="0"/>
+          <a:chOff x="0" y="0"/>
+          <a:chExt cx="0" cy="0"/>
+        </a:xfrm>
+      </p:grpSpPr>
+      <p:sp>
+        <p:nvSpPr>
+          <p:cNvPr id="2" name="Titel 1">
+            <a:extLst>
+              <a:ext uri="{FF2B5EF4-FFF2-40B4-BE49-F238E27FC236}">
+                <a16:creationId xmlns:a16="http://schemas.microsoft.com/office/drawing/2014/main" id="{09493DE1-8681-E946-F35C-2A338BAFE2C4}"/>
+              </a:ext>
+            </a:extLst>
+          </p:cNvPr>
+          <p:cNvSpPr>
+            <a:spLocks noGrp="1"/>
+          </p:cNvSpPr>
+          <p:nvPr>
+            <p:ph type="title"/>
+          </p:nvPr>
+        </p:nvSpPr>
+        <p:spPr/>
+        <p:txBody>
+          <a:bodyPr/>
+          <a:lstStyle/>
+          <a:p>
+            <a:endParaRPr lang="de-DE"/>
+          </a:p>
+        </p:txBody>
+      </p:sp>
+      <p:sp>
+        <p:nvSpPr>
+          <p:cNvPr id="3" name="Inhaltsplatzhalter 2">
+            <a:extLst>
+              <a:ext uri="{FF2B5EF4-FFF2-40B4-BE49-F238E27FC236}">
+                <a16:creationId xmlns:a16="http://schemas.microsoft.com/office/drawing/2014/main" id="{84C5182F-76D3-02B3-807F-78D531F2C37B}"/>
+              </a:ext>
+            </a:extLst>
+          </p:cNvPr>
+          <p:cNvSpPr>
+            <a:spLocks noGrp="1"/>
+          </p:cNvSpPr>
+          <p:nvPr>
+            <p:ph idx="1"/>
+          </p:nvPr>
+        </p:nvSpPr>
+        <p:spPr/>
+        <p:txBody>
+          <a:bodyPr/>
+          <a:lstStyle/>
+          <a:p>
+            <a:r>
+              <a:rPr lang="de-DE" dirty="0" err="1"/>
+              <a:t>from</a:t>
+            </a:r>
+            <a:r>
+              <a:rPr lang="de-DE" dirty="0"/>
+              <a:t> GPT-3 </a:t>
+            </a:r>
+            <a:r>
+              <a:rPr lang="de-DE" dirty="0" err="1"/>
+              <a:t>to</a:t>
+            </a:r>
+            <a:r>
+              <a:rPr lang="de-DE" dirty="0"/>
+              <a:t> </a:t>
+            </a:r>
+            <a:r>
+              <a:rPr lang="de-DE" dirty="0" err="1"/>
+              <a:t>InstructGPT</a:t>
+            </a:r>
+            <a:r>
+              <a:rPr lang="de-DE" dirty="0"/>
+              <a:t> and ChatGPT</a:t>
+            </a:r>
+          </a:p>
+        </p:txBody>
+      </p:sp>
+      <p:sp>
+        <p:nvSpPr>
+          <p:cNvPr id="4" name="Foliennummernplatzhalter 3">
+            <a:extLst>
+              <a:ext uri="{FF2B5EF4-FFF2-40B4-BE49-F238E27FC236}">
+                <a16:creationId xmlns:a16="http://schemas.microsoft.com/office/drawing/2014/main" id="{425A7FC5-9ED3-4885-ECCE-73FBD8CB7493}"/>
+              </a:ext>
+            </a:extLst>
+          </p:cNvPr>
+          <p:cNvSpPr>
+            <a:spLocks noGrp="1"/>
+          </p:cNvSpPr>
+          <p:nvPr>
+            <p:ph type="sldNum" sz="quarter" idx="12"/>
+          </p:nvPr>
+        </p:nvSpPr>
+        <p:spPr/>
+        <p:txBody>
+          <a:bodyPr/>
+          <a:lstStyle/>
+          <a:p>
+            <a:fld id="{4055531C-5681-6B44-B2CA-926D7A74B06D}" type="slidenum">
+              <a:rPr lang="de-DE" smtClean="0"/>
+              <a:t>23</a:t>
+            </a:fld>
+            <a:endParaRPr lang="de-DE"/>
+          </a:p>
+        </p:txBody>
+      </p:sp>
+    </p:spTree>
+    <p:extLst>
+      <p:ext uri="{BB962C8B-B14F-4D97-AF65-F5344CB8AC3E}">
+        <p14:creationId xmlns:p14="http://schemas.microsoft.com/office/powerpoint/2010/main" val="3914762839"/>
+      </p:ext>
+    </p:extLst>
+  </p:cSld>
+  <p:clrMapOvr>
+    <a:masterClrMapping/>
+  </p:clrMapOvr>
+</p:sld>
+</file>
+
+<file path=ppt/slides/slide24.xml><?xml version="1.0" encoding="utf-8"?>
+<p:sld xmlns:a="http://schemas.openxmlformats.org/drawingml/2006/main" xmlns:r="http://schemas.openxmlformats.org/officeDocument/2006/relationships" xmlns:p="http://schemas.openxmlformats.org/presentationml/2006/main">
+  <p:cSld>
+    <p:spTree>
+      <p:nvGrpSpPr>
+        <p:cNvPr id="1" name=""/>
+        <p:cNvGrpSpPr/>
+        <p:nvPr/>
+      </p:nvGrpSpPr>
+      <p:grpSpPr>
+        <a:xfrm>
+          <a:off x="0" y="0"/>
+          <a:ext cx="0" cy="0"/>
+          <a:chOff x="0" y="0"/>
+          <a:chExt cx="0" cy="0"/>
+        </a:xfrm>
+      </p:grpSpPr>
+      <p:sp>
+        <p:nvSpPr>
+          <p:cNvPr id="2" name="Titel 1">
+            <a:extLst>
+              <a:ext uri="{FF2B5EF4-FFF2-40B4-BE49-F238E27FC236}">
+                <a16:creationId xmlns:a16="http://schemas.microsoft.com/office/drawing/2014/main" id="{5A1B08B0-5FAB-8E36-9583-086C5FE7FBA2}"/>
+              </a:ext>
+            </a:extLst>
+          </p:cNvPr>
+          <p:cNvSpPr>
+            <a:spLocks noGrp="1"/>
+          </p:cNvSpPr>
+          <p:nvPr>
+            <p:ph type="title"/>
+          </p:nvPr>
+        </p:nvSpPr>
+        <p:spPr/>
+        <p:txBody>
+          <a:bodyPr/>
+          <a:lstStyle/>
+          <a:p>
+            <a:r>
+              <a:rPr lang="de-DE" dirty="0"/>
+              <a:t>Multi-Turn </a:t>
+            </a:r>
+            <a:r>
+              <a:rPr lang="de-DE" dirty="0" err="1"/>
+              <a:t>Dialogue</a:t>
+            </a:r>
+            <a:endParaRPr lang="de-DE" dirty="0"/>
+          </a:p>
+        </p:txBody>
+      </p:sp>
+      <p:sp>
+        <p:nvSpPr>
+          <p:cNvPr id="3" name="Inhaltsplatzhalter 2">
+            <a:extLst>
+              <a:ext uri="{FF2B5EF4-FFF2-40B4-BE49-F238E27FC236}">
+                <a16:creationId xmlns:a16="http://schemas.microsoft.com/office/drawing/2014/main" id="{BFDAE060-03E4-7410-C0A6-AE36D46743C1}"/>
+              </a:ext>
+            </a:extLst>
+          </p:cNvPr>
+          <p:cNvSpPr>
+            <a:spLocks noGrp="1"/>
+          </p:cNvSpPr>
+          <p:nvPr>
+            <p:ph idx="1"/>
+          </p:nvPr>
+        </p:nvSpPr>
+        <p:spPr/>
+        <p:txBody>
+          <a:bodyPr/>
+          <a:lstStyle/>
+          <a:p>
+            <a:r>
+              <a:rPr lang="de-DE" dirty="0" err="1"/>
+              <a:t>Handled</a:t>
+            </a:r>
+            <a:r>
+              <a:rPr lang="de-DE" dirty="0"/>
+              <a:t> </a:t>
+            </a:r>
+            <a:r>
+              <a:rPr lang="de-DE" dirty="0" err="1"/>
+              <a:t>entirely</a:t>
+            </a:r>
+            <a:r>
+              <a:rPr lang="de-DE" dirty="0"/>
+              <a:t> </a:t>
+            </a:r>
+            <a:r>
+              <a:rPr lang="de-DE" dirty="0" err="1"/>
+              <a:t>by</a:t>
+            </a:r>
+            <a:r>
+              <a:rPr lang="de-DE" dirty="0"/>
+              <a:t> </a:t>
+            </a:r>
+            <a:r>
+              <a:rPr lang="de-DE" dirty="0" err="1"/>
+              <a:t>passing</a:t>
+            </a:r>
+            <a:r>
+              <a:rPr lang="de-DE" dirty="0"/>
+              <a:t> </a:t>
+            </a:r>
+            <a:r>
+              <a:rPr lang="de-DE" dirty="0" err="1"/>
+              <a:t>the</a:t>
+            </a:r>
+            <a:r>
+              <a:rPr lang="de-DE" dirty="0"/>
+              <a:t> </a:t>
+            </a:r>
+            <a:r>
+              <a:rPr lang="de-DE" dirty="0" err="1"/>
+              <a:t>conversation</a:t>
+            </a:r>
+            <a:r>
+              <a:rPr lang="de-DE" dirty="0"/>
+              <a:t> </a:t>
+            </a:r>
+            <a:r>
+              <a:rPr lang="de-DE" dirty="0" err="1"/>
+              <a:t>history</a:t>
+            </a:r>
+            <a:r>
+              <a:rPr lang="de-DE" dirty="0"/>
+              <a:t> </a:t>
+            </a:r>
+            <a:r>
+              <a:rPr lang="de-DE" dirty="0" err="1"/>
+              <a:t>as</a:t>
+            </a:r>
+            <a:r>
+              <a:rPr lang="de-DE" dirty="0"/>
+              <a:t> </a:t>
+            </a:r>
+            <a:r>
+              <a:rPr lang="de-DE" dirty="0" err="1"/>
+              <a:t>part</a:t>
+            </a:r>
+            <a:r>
+              <a:rPr lang="de-DE" dirty="0"/>
+              <a:t> </a:t>
+            </a:r>
+            <a:r>
+              <a:rPr lang="de-DE" dirty="0" err="1"/>
+              <a:t>of</a:t>
+            </a:r>
+            <a:r>
+              <a:rPr lang="de-DE" dirty="0"/>
+              <a:t> </a:t>
+            </a:r>
+            <a:r>
+              <a:rPr lang="de-DE" dirty="0" err="1"/>
+              <a:t>the</a:t>
+            </a:r>
+            <a:r>
+              <a:rPr lang="de-DE" dirty="0"/>
+              <a:t> </a:t>
+            </a:r>
+            <a:r>
+              <a:rPr lang="de-DE" dirty="0" err="1"/>
+              <a:t>input</a:t>
+            </a:r>
+            <a:r>
+              <a:rPr lang="de-DE" dirty="0"/>
+              <a:t> </a:t>
+            </a:r>
+            <a:r>
+              <a:rPr lang="de-DE" dirty="0" err="1"/>
+              <a:t>to</a:t>
+            </a:r>
+            <a:r>
+              <a:rPr lang="de-DE" dirty="0"/>
+              <a:t> </a:t>
+            </a:r>
+            <a:r>
+              <a:rPr lang="de-DE" dirty="0" err="1"/>
+              <a:t>the</a:t>
+            </a:r>
+            <a:r>
+              <a:rPr lang="de-DE" dirty="0"/>
+              <a:t> </a:t>
+            </a:r>
+            <a:r>
+              <a:rPr lang="de-DE" dirty="0" err="1"/>
+              <a:t>model</a:t>
+            </a:r>
+            <a:r>
+              <a:rPr lang="de-DE" dirty="0"/>
+              <a:t> at </a:t>
+            </a:r>
+            <a:r>
+              <a:rPr lang="de-DE" dirty="0" err="1"/>
+              <a:t>each</a:t>
+            </a:r>
+            <a:r>
+              <a:rPr lang="de-DE" dirty="0"/>
+              <a:t> </a:t>
+            </a:r>
+            <a:r>
+              <a:rPr lang="de-DE" dirty="0" err="1"/>
+              <a:t>step</a:t>
+            </a:r>
+            <a:r>
+              <a:rPr lang="de-DE" dirty="0"/>
+              <a:t>.</a:t>
+            </a:r>
+          </a:p>
+        </p:txBody>
+      </p:sp>
+      <p:sp>
+        <p:nvSpPr>
+          <p:cNvPr id="4" name="Foliennummernplatzhalter 3">
+            <a:extLst>
+              <a:ext uri="{FF2B5EF4-FFF2-40B4-BE49-F238E27FC236}">
+                <a16:creationId xmlns:a16="http://schemas.microsoft.com/office/drawing/2014/main" id="{4341BFF8-BEC1-70D4-324B-8FD51E0DAC79}"/>
+              </a:ext>
+            </a:extLst>
+          </p:cNvPr>
+          <p:cNvSpPr>
+            <a:spLocks noGrp="1"/>
+          </p:cNvSpPr>
+          <p:nvPr>
+            <p:ph type="sldNum" sz="quarter" idx="12"/>
+          </p:nvPr>
+        </p:nvSpPr>
+        <p:spPr/>
+        <p:txBody>
+          <a:bodyPr/>
+          <a:lstStyle/>
+          <a:p>
+            <a:fld id="{4055531C-5681-6B44-B2CA-926D7A74B06D}" type="slidenum">
+              <a:rPr lang="de-DE" smtClean="0"/>
+              <a:t>24</a:t>
+            </a:fld>
+            <a:endParaRPr lang="de-DE"/>
+          </a:p>
+        </p:txBody>
+      </p:sp>
+    </p:spTree>
+    <p:extLst>
+      <p:ext uri="{BB962C8B-B14F-4D97-AF65-F5344CB8AC3E}">
+        <p14:creationId xmlns:p14="http://schemas.microsoft.com/office/powerpoint/2010/main" val="2345780904"/>
+      </p:ext>
+    </p:extLst>
+  </p:cSld>
+  <p:clrMapOvr>
+    <a:masterClrMapping/>
+  </p:clrMapOvr>
+</p:sld>
+</file>
+
+<file path=ppt/slides/slide25.xml><?xml version="1.0" encoding="utf-8"?>
+<p:sld xmlns:a="http://schemas.openxmlformats.org/drawingml/2006/main" xmlns:r="http://schemas.openxmlformats.org/officeDocument/2006/relationships" xmlns:p="http://schemas.openxmlformats.org/presentationml/2006/main">
+  <p:cSld>
+    <p:spTree>
+      <p:nvGrpSpPr>
+        <p:cNvPr id="1" name=""/>
+        <p:cNvGrpSpPr/>
+        <p:nvPr/>
+      </p:nvGrpSpPr>
+      <p:grpSpPr>
+        <a:xfrm>
+          <a:off x="0" y="0"/>
+          <a:ext cx="0" cy="0"/>
+          <a:chOff x="0" y="0"/>
+          <a:chExt cx="0" cy="0"/>
+        </a:xfrm>
+      </p:grpSpPr>
+      <p:sp>
+        <p:nvSpPr>
+          <p:cNvPr id="2" name="Titel 1">
+            <a:extLst>
+              <a:ext uri="{FF2B5EF4-FFF2-40B4-BE49-F238E27FC236}">
+                <a16:creationId xmlns:a16="http://schemas.microsoft.com/office/drawing/2014/main" id="{26EB045E-1272-3E62-6E68-080CE472E3FB}"/>
+              </a:ext>
+            </a:extLst>
+          </p:cNvPr>
+          <p:cNvSpPr>
+            <a:spLocks noGrp="1"/>
+          </p:cNvSpPr>
+          <p:nvPr>
+            <p:ph type="title"/>
+          </p:nvPr>
+        </p:nvSpPr>
+        <p:spPr/>
+        <p:txBody>
+          <a:bodyPr/>
+          <a:lstStyle/>
+          <a:p>
+            <a:r>
+              <a:rPr lang="de-DE" dirty="0"/>
+              <a:t>Dialog Systems</a:t>
+            </a:r>
+          </a:p>
+        </p:txBody>
+      </p:sp>
+      <p:sp>
+        <p:nvSpPr>
+          <p:cNvPr id="3" name="Inhaltsplatzhalter 2">
+            <a:extLst>
+              <a:ext uri="{FF2B5EF4-FFF2-40B4-BE49-F238E27FC236}">
+                <a16:creationId xmlns:a16="http://schemas.microsoft.com/office/drawing/2014/main" id="{C16BFCD0-FDF6-89AF-2AC1-D92E4EB10467}"/>
+              </a:ext>
+            </a:extLst>
+          </p:cNvPr>
+          <p:cNvSpPr>
+            <a:spLocks noGrp="1"/>
+          </p:cNvSpPr>
+          <p:nvPr>
+            <p:ph idx="1"/>
+          </p:nvPr>
+        </p:nvSpPr>
+        <p:spPr/>
+        <p:txBody>
+          <a:bodyPr/>
+          <a:lstStyle/>
+          <a:p>
+            <a:pPr marL="0" indent="0">
+              <a:buNone/>
+            </a:pPr>
+            <a:r>
+              <a:rPr lang="de-DE" dirty="0"/>
+              <a:t>…</a:t>
+            </a:r>
+          </a:p>
+          <a:p>
+            <a:pPr marL="0" indent="0">
+              <a:buNone/>
+            </a:pPr>
+            <a:endParaRPr lang="de-DE" dirty="0"/>
+          </a:p>
+          <a:p>
+            <a:pPr marL="0" indent="0">
+              <a:buNone/>
+            </a:pPr>
+            <a:r>
+              <a:rPr lang="de-DE" dirty="0" err="1"/>
+              <a:t>with</a:t>
+            </a:r>
+            <a:r>
+              <a:rPr lang="de-DE" dirty="0"/>
+              <a:t> </a:t>
+            </a:r>
+            <a:r>
+              <a:rPr lang="de-DE" dirty="0" err="1"/>
+              <a:t>instruction-tuned</a:t>
+            </a:r>
+            <a:r>
+              <a:rPr lang="de-DE" dirty="0"/>
+              <a:t> and </a:t>
+            </a:r>
+            <a:r>
+              <a:rPr lang="de-DE" dirty="0" err="1"/>
+              <a:t>aligned</a:t>
+            </a:r>
+            <a:r>
+              <a:rPr lang="de-DE" dirty="0"/>
+              <a:t> LLMs: </a:t>
+            </a:r>
+            <a:r>
+              <a:rPr lang="de-DE" dirty="0" err="1"/>
+              <a:t>assistant</a:t>
+            </a:r>
+            <a:r>
+              <a:rPr lang="de-DE" dirty="0"/>
+              <a:t>-style </a:t>
+            </a:r>
+            <a:r>
+              <a:rPr lang="de-DE" dirty="0" err="1"/>
+              <a:t>models</a:t>
+            </a:r>
+            <a:endParaRPr lang="de-DE" dirty="0"/>
+          </a:p>
+        </p:txBody>
+      </p:sp>
+      <p:sp>
+        <p:nvSpPr>
+          <p:cNvPr id="4" name="Foliennummernplatzhalter 3">
+            <a:extLst>
+              <a:ext uri="{FF2B5EF4-FFF2-40B4-BE49-F238E27FC236}">
+                <a16:creationId xmlns:a16="http://schemas.microsoft.com/office/drawing/2014/main" id="{96D7745C-33A3-5E08-9676-31B82A7FED49}"/>
+              </a:ext>
+            </a:extLst>
+          </p:cNvPr>
+          <p:cNvSpPr>
+            <a:spLocks noGrp="1"/>
+          </p:cNvSpPr>
+          <p:nvPr>
+            <p:ph type="sldNum" sz="quarter" idx="12"/>
+          </p:nvPr>
+        </p:nvSpPr>
+        <p:spPr/>
+        <p:txBody>
+          <a:bodyPr/>
+          <a:lstStyle/>
+          <a:p>
+            <a:fld id="{4055531C-5681-6B44-B2CA-926D7A74B06D}" type="slidenum">
+              <a:rPr lang="de-DE" smtClean="0"/>
+              <a:t>25</a:t>
+            </a:fld>
+            <a:endParaRPr lang="de-DE"/>
+          </a:p>
+        </p:txBody>
+      </p:sp>
+    </p:spTree>
+    <p:extLst>
+      <p:ext uri="{BB962C8B-B14F-4D97-AF65-F5344CB8AC3E}">
+        <p14:creationId xmlns:p14="http://schemas.microsoft.com/office/powerpoint/2010/main" val="2682940258"/>
+      </p:ext>
+    </p:extLst>
+  </p:cSld>
+  <p:clrMapOvr>
+    <a:masterClrMapping/>
+  </p:clrMapOvr>
+</p:sld>
+</file>
+
+<file path=ppt/slides/slide26.xml><?xml version="1.0" encoding="utf-8"?>
+<p:sld xmlns:a="http://schemas.openxmlformats.org/drawingml/2006/main" xmlns:r="http://schemas.openxmlformats.org/officeDocument/2006/relationships" xmlns:p="http://schemas.openxmlformats.org/presentationml/2006/main">
+  <p:cSld>
+    <p:spTree>
+      <p:nvGrpSpPr>
+        <p:cNvPr id="1" name=""/>
+        <p:cNvGrpSpPr/>
+        <p:nvPr/>
+      </p:nvGrpSpPr>
+      <p:grpSpPr>
+        <a:xfrm>
+          <a:off x="0" y="0"/>
+          <a:ext cx="0" cy="0"/>
+          <a:chOff x="0" y="0"/>
+          <a:chExt cx="0" cy="0"/>
+        </a:xfrm>
+      </p:grpSpPr>
+      <p:sp>
+        <p:nvSpPr>
+          <p:cNvPr id="2" name="Title 1">
+            <a:extLst>
+              <a:ext uri="{FF2B5EF4-FFF2-40B4-BE49-F238E27FC236}">
+                <a16:creationId xmlns:a16="http://schemas.microsoft.com/office/drawing/2014/main" id="{C69AD07C-8362-D471-3F09-B2FC347557A6}"/>
+              </a:ext>
+            </a:extLst>
+          </p:cNvPr>
+          <p:cNvSpPr>
+            <a:spLocks noGrp="1"/>
+          </p:cNvSpPr>
+          <p:nvPr>
+            <p:ph type="title"/>
+          </p:nvPr>
+        </p:nvSpPr>
+        <p:spPr/>
+        <p:txBody>
+          <a:bodyPr/>
+          <a:lstStyle/>
+          <a:p>
+            <a:r>
+              <a:rPr lang="en-GB" dirty="0"/>
+              <a:t>Parameter-Efficient Finetuning (PEFT)</a:t>
+            </a:r>
+          </a:p>
+        </p:txBody>
+      </p:sp>
+      <p:sp>
+        <p:nvSpPr>
+          <p:cNvPr id="3" name="Content Placeholder 2">
+            <a:extLst>
+              <a:ext uri="{FF2B5EF4-FFF2-40B4-BE49-F238E27FC236}">
+                <a16:creationId xmlns:a16="http://schemas.microsoft.com/office/drawing/2014/main" id="{E9876C3D-25E9-6468-66D7-A1D0E870E374}"/>
+              </a:ext>
+            </a:extLst>
+          </p:cNvPr>
+          <p:cNvSpPr>
+            <a:spLocks noGrp="1"/>
+          </p:cNvSpPr>
+          <p:nvPr>
+            <p:ph idx="1"/>
+          </p:nvPr>
+        </p:nvSpPr>
         <p:spPr>
           <a:xfrm>
             <a:off x="838199" y="1825625"/>
@@ -7521,7 +12325,7 @@
           <a:p>
             <a:fld id="{849D05A8-43E9-1C49-8606-50AB68220DEC}" type="slidenum">
               <a:rPr lang="en-DE" smtClean="0"/>
-              <a:t>10</a:t>
+              <a:t>26</a:t>
             </a:fld>
             <a:endParaRPr lang="en-DE"/>
           </a:p>
@@ -7570,124 +12374,6 @@
 </p:sld>
 </file>
 
-<file path=ppt/slides/slide2.xml><?xml version="1.0" encoding="utf-8"?>
-<p:sld xmlns:a="http://schemas.openxmlformats.org/drawingml/2006/main" xmlns:r="http://schemas.openxmlformats.org/officeDocument/2006/relationships" xmlns:p="http://schemas.openxmlformats.org/presentationml/2006/main">
-  <p:cSld>
-    <p:spTree>
-      <p:nvGrpSpPr>
-        <p:cNvPr id="1" name=""/>
-        <p:cNvGrpSpPr/>
-        <p:nvPr/>
-      </p:nvGrpSpPr>
-      <p:grpSpPr>
-        <a:xfrm>
-          <a:off x="0" y="0"/>
-          <a:ext cx="0" cy="0"/>
-          <a:chOff x="0" y="0"/>
-          <a:chExt cx="0" cy="0"/>
-        </a:xfrm>
-      </p:grpSpPr>
-      <p:sp>
-        <p:nvSpPr>
-          <p:cNvPr id="2" name="Titel 1">
-            <a:extLst>
-              <a:ext uri="{FF2B5EF4-FFF2-40B4-BE49-F238E27FC236}">
-                <a16:creationId xmlns:a16="http://schemas.microsoft.com/office/drawing/2014/main" id="{931DC26F-F544-96F9-A23C-5F55F871FBD9}"/>
-              </a:ext>
-            </a:extLst>
-          </p:cNvPr>
-          <p:cNvSpPr>
-            <a:spLocks noGrp="1"/>
-          </p:cNvSpPr>
-          <p:nvPr>
-            <p:ph type="title"/>
-          </p:nvPr>
-        </p:nvSpPr>
-        <p:spPr/>
-        <p:txBody>
-          <a:bodyPr/>
-          <a:lstStyle/>
-          <a:p>
-            <a:r>
-              <a:rPr lang="de-DE" dirty="0"/>
-              <a:t>Course Contents</a:t>
-            </a:r>
-          </a:p>
-        </p:txBody>
-      </p:sp>
-      <p:graphicFrame>
-        <p:nvGraphicFramePr>
-          <p:cNvPr id="5" name="Inhaltsplatzhalter 2">
-            <a:extLst>
-              <a:ext uri="{FF2B5EF4-FFF2-40B4-BE49-F238E27FC236}">
-                <a16:creationId xmlns:a16="http://schemas.microsoft.com/office/drawing/2014/main" id="{94E61397-BED1-A35E-59D6-1913902B1876}"/>
-              </a:ext>
-            </a:extLst>
-          </p:cNvPr>
-          <p:cNvGraphicFramePr>
-            <a:graphicFrameLocks noGrp="1"/>
-          </p:cNvGraphicFramePr>
-          <p:nvPr>
-            <p:ph idx="1"/>
-            <p:extLst>
-              <p:ext uri="{D42A27DB-BD31-4B8C-83A1-F6EECF244321}">
-                <p14:modId xmlns:p14="http://schemas.microsoft.com/office/powerpoint/2010/main" val="1164696432"/>
-              </p:ext>
-            </p:extLst>
-          </p:nvPr>
-        </p:nvGraphicFramePr>
-        <p:xfrm>
-          <a:off x="838200" y="1825625"/>
-          <a:ext cx="10515600" cy="4351338"/>
-        </p:xfrm>
-        <a:graphic>
-          <a:graphicData uri="http://schemas.openxmlformats.org/drawingml/2006/diagram">
-            <dgm:relIds xmlns:dgm="http://schemas.openxmlformats.org/drawingml/2006/diagram" xmlns:r="http://schemas.openxmlformats.org/officeDocument/2006/relationships" r:dm="rId2" r:lo="rId3" r:qs="rId4" r:cs="rId5"/>
-          </a:graphicData>
-        </a:graphic>
-      </p:graphicFrame>
-      <p:sp>
-        <p:nvSpPr>
-          <p:cNvPr id="3" name="Foliennummernplatzhalter 2">
-            <a:extLst>
-              <a:ext uri="{FF2B5EF4-FFF2-40B4-BE49-F238E27FC236}">
-                <a16:creationId xmlns:a16="http://schemas.microsoft.com/office/drawing/2014/main" id="{AAA6BD21-F227-F385-D9F5-42230CC45670}"/>
-              </a:ext>
-            </a:extLst>
-          </p:cNvPr>
-          <p:cNvSpPr>
-            <a:spLocks noGrp="1"/>
-          </p:cNvSpPr>
-          <p:nvPr>
-            <p:ph type="sldNum" sz="quarter" idx="12"/>
-          </p:nvPr>
-        </p:nvSpPr>
-        <p:spPr/>
-        <p:txBody>
-          <a:bodyPr/>
-          <a:lstStyle/>
-          <a:p>
-            <a:fld id="{4055531C-5681-6B44-B2CA-926D7A74B06D}" type="slidenum">
-              <a:rPr lang="de-DE" smtClean="0"/>
-              <a:t>2</a:t>
-            </a:fld>
-            <a:endParaRPr lang="de-DE"/>
-          </a:p>
-        </p:txBody>
-      </p:sp>
-    </p:spTree>
-    <p:extLst>
-      <p:ext uri="{BB962C8B-B14F-4D97-AF65-F5344CB8AC3E}">
-        <p14:creationId xmlns:p14="http://schemas.microsoft.com/office/powerpoint/2010/main" val="2666028082"/>
-      </p:ext>
-    </p:extLst>
-  </p:cSld>
-  <p:clrMapOvr>
-    <a:masterClrMapping/>
-  </p:clrMapOvr>
-</p:sld>
-</file>
-
 <file path=ppt/slides/slide3.xml><?xml version="1.0" encoding="utf-8"?>
 <p:sld xmlns:a="http://schemas.openxmlformats.org/drawingml/2006/main" xmlns:r="http://schemas.openxmlformats.org/officeDocument/2006/relationships" xmlns:p="http://schemas.openxmlformats.org/presentationml/2006/main">
   <p:cSld>
@@ -7754,6 +12440,21 @@
           <a:bodyPr/>
           <a:lstStyle/>
           <a:p>
+            <a:r>
+              <a:rPr lang="de-DE" dirty="0" err="1"/>
+              <a:t>transfer</a:t>
+            </a:r>
+            <a:r>
+              <a:rPr lang="de-DE" dirty="0"/>
+              <a:t> </a:t>
+            </a:r>
+            <a:r>
+              <a:rPr lang="de-DE" dirty="0" err="1"/>
+              <a:t>learning</a:t>
+            </a:r>
+            <a:endParaRPr lang="de-DE" dirty="0"/>
+          </a:p>
+          <a:p>
             <a:pPr marL="0" indent="0">
               <a:buNone/>
             </a:pPr>
@@ -7762,15 +12463,15 @@
           <a:p>
             <a:r>
               <a:rPr lang="de-DE" dirty="0" err="1"/>
-              <a:t>transfer</a:t>
-            </a:r>
-            <a:r>
-              <a:rPr lang="de-DE" dirty="0"/>
-              <a:t> </a:t>
-            </a:r>
-            <a:r>
-              <a:rPr lang="de-DE" dirty="0" err="1"/>
-              <a:t>learning</a:t>
+              <a:t>text</a:t>
+            </a:r>
+            <a:r>
+              <a:rPr lang="de-DE" dirty="0"/>
+              <a:t> </a:t>
+            </a:r>
+            <a:r>
+              <a:rPr lang="de-DE" dirty="0" err="1"/>
+              <a:t>classification</a:t>
             </a:r>
             <a:endParaRPr lang="de-DE" dirty="0"/>
           </a:p>
@@ -7783,15 +12484,47 @@
           <a:p>
             <a:r>
               <a:rPr lang="de-DE" dirty="0" err="1"/>
-              <a:t>text</a:t>
-            </a:r>
-            <a:r>
-              <a:rPr lang="de-DE" dirty="0"/>
-              <a:t> </a:t>
-            </a:r>
-            <a:r>
-              <a:rPr lang="de-DE" dirty="0" err="1"/>
-              <a:t>classification</a:t>
+              <a:t>instruction</a:t>
+            </a:r>
+            <a:r>
+              <a:rPr lang="de-DE" dirty="0"/>
+              <a:t> </a:t>
+            </a:r>
+            <a:r>
+              <a:rPr lang="de-DE" dirty="0" err="1"/>
+              <a:t>tuning</a:t>
+            </a:r>
+            <a:r>
+              <a:rPr lang="de-DE" dirty="0"/>
+              <a:t>: </a:t>
+            </a:r>
+            <a:r>
+              <a:rPr lang="de-DE" dirty="0" err="1"/>
+              <a:t>supervised</a:t>
+            </a:r>
+            <a:r>
+              <a:rPr lang="de-DE" dirty="0"/>
+              <a:t> </a:t>
+            </a:r>
+            <a:r>
+              <a:rPr lang="de-DE" dirty="0" err="1"/>
+              <a:t>finetuning</a:t>
+            </a:r>
+            <a:r>
+              <a:rPr lang="de-DE" dirty="0"/>
+              <a:t>, </a:t>
+            </a:r>
+            <a:r>
+              <a:rPr lang="de-DE" dirty="0" err="1"/>
+              <a:t>preference</a:t>
+            </a:r>
+            <a:r>
+              <a:rPr lang="de-DE" dirty="0"/>
+              <a:t> </a:t>
+            </a:r>
+            <a:r>
+              <a:rPr lang="de-DE" dirty="0" err="1"/>
+              <a:t>alignment</a:t>
             </a:r>
             <a:endParaRPr lang="de-DE" dirty="0"/>
           </a:p>
@@ -8630,7 +13363,7 @@
           <p:cNvPr id="2" name="Titel 1">
             <a:extLst>
               <a:ext uri="{FF2B5EF4-FFF2-40B4-BE49-F238E27FC236}">
-                <a16:creationId xmlns:a16="http://schemas.microsoft.com/office/drawing/2014/main" id="{F8835DB9-A493-0493-6DC6-1A59F1955546}"/>
+                <a16:creationId xmlns:a16="http://schemas.microsoft.com/office/drawing/2014/main" id="{06E23BCC-EA2F-2E03-E8A6-ACECAA471E84}"/>
               </a:ext>
             </a:extLst>
           </p:cNvPr>
@@ -8646,10 +13379,7 @@
           <a:bodyPr/>
           <a:lstStyle/>
           <a:p>
-            <a:r>
-              <a:rPr lang="de-DE" dirty="0"/>
-              <a:t>Text Classification</a:t>
-            </a:r>
+            <a:endParaRPr lang="de-DE"/>
           </a:p>
         </p:txBody>
       </p:sp>
@@ -8658,7 +13388,7 @@
           <p:cNvPr id="3" name="Inhaltsplatzhalter 2">
             <a:extLst>
               <a:ext uri="{FF2B5EF4-FFF2-40B4-BE49-F238E27FC236}">
-                <a16:creationId xmlns:a16="http://schemas.microsoft.com/office/drawing/2014/main" id="{C8B9C882-7432-CB1C-F348-C72E3D7ABCC1}"/>
+                <a16:creationId xmlns:a16="http://schemas.microsoft.com/office/drawing/2014/main" id="{B75D134A-03B5-8F8A-AB03-A32CFC6CB2F1}"/>
               </a:ext>
             </a:extLst>
           </p:cNvPr>
@@ -8671,40 +13401,142 @@
         </p:nvSpPr>
         <p:spPr/>
         <p:txBody>
-          <a:bodyPr>
-            <a:normAutofit/>
-          </a:bodyPr>
+          <a:bodyPr/>
           <a:lstStyle/>
           <a:p>
             <a:pPr marL="0" indent="0">
               <a:buNone/>
             </a:pPr>
             <a:r>
-              <a:rPr lang="de-DE" dirty="0"/>
-              <a:t>…</a:t>
+              <a:rPr lang="de-DE" b="1" dirty="0"/>
+              <a:t>Classification </a:t>
+            </a:r>
+            <a:r>
+              <a:rPr lang="de-DE" b="1" dirty="0" err="1"/>
+              <a:t>tasks</a:t>
+            </a:r>
+            <a:r>
+              <a:rPr lang="de-DE" dirty="0"/>
+              <a:t> → [CLS] (</a:t>
+            </a:r>
+            <a:r>
+              <a:rPr lang="de-DE" dirty="0" err="1"/>
+              <a:t>or</a:t>
+            </a:r>
+            <a:r>
+              <a:rPr lang="de-DE" dirty="0"/>
+              <a:t> </a:t>
+            </a:r>
+            <a:r>
+              <a:rPr lang="de-DE" dirty="0" err="1"/>
+              <a:t>sometimes</a:t>
+            </a:r>
+            <a:r>
+              <a:rPr lang="de-DE" dirty="0"/>
+              <a:t> </a:t>
+            </a:r>
+            <a:r>
+              <a:rPr lang="de-DE" dirty="0" err="1"/>
+              <a:t>average</a:t>
+            </a:r>
+            <a:r>
+              <a:rPr lang="de-DE" dirty="0"/>
+              <a:t> </a:t>
+            </a:r>
+            <a:r>
+              <a:rPr lang="de-DE" dirty="0" err="1"/>
+              <a:t>pooling</a:t>
+            </a:r>
+            <a:r>
+              <a:rPr lang="de-DE" dirty="0"/>
+              <a:t>).</a:t>
             </a:r>
           </a:p>
           <a:p>
             <a:pPr marL="0" indent="0">
               <a:buNone/>
             </a:pPr>
-            <a:endParaRPr lang="de-DE" dirty="0"/>
+            <a:r>
+              <a:rPr lang="de-DE" b="1" dirty="0"/>
+              <a:t>Token-level </a:t>
+            </a:r>
+            <a:r>
+              <a:rPr lang="de-DE" b="1" dirty="0" err="1"/>
+              <a:t>tasks</a:t>
+            </a:r>
+            <a:r>
+              <a:rPr lang="de-DE" dirty="0"/>
+              <a:t> → </a:t>
+            </a:r>
+            <a:r>
+              <a:rPr lang="de-DE" dirty="0" err="1"/>
+              <a:t>hidden</a:t>
+            </a:r>
+            <a:r>
+              <a:rPr lang="de-DE" dirty="0"/>
+              <a:t> </a:t>
+            </a:r>
+            <a:r>
+              <a:rPr lang="de-DE" dirty="0" err="1"/>
+              <a:t>states</a:t>
+            </a:r>
+            <a:r>
+              <a:rPr lang="de-DE" dirty="0"/>
+              <a:t> </a:t>
+            </a:r>
+            <a:r>
+              <a:rPr lang="de-DE" dirty="0" err="1"/>
+              <a:t>directly</a:t>
+            </a:r>
+            <a:r>
+              <a:rPr lang="de-DE" dirty="0"/>
+              <a:t>.</a:t>
+            </a:r>
           </a:p>
           <a:p>
             <a:pPr marL="0" indent="0">
               <a:buNone/>
             </a:pPr>
             <a:r>
-              <a:rPr lang="en-GB" dirty="0"/>
-              <a:t>exercise: </a:t>
-            </a:r>
-            <a:r>
-              <a:rPr lang="en-GB" dirty="0">
-                <a:hlinkClick r:id="rId2"/>
-              </a:rPr>
-              <a:t>Kaggle Disaster Tweets</a:t>
-            </a:r>
-            <a:endParaRPr lang="en-GB" dirty="0"/>
+              <a:rPr lang="de-DE" b="1" dirty="0"/>
+              <a:t>MLM</a:t>
+            </a:r>
+            <a:r>
+              <a:rPr lang="de-DE" dirty="0"/>
+              <a:t> → </a:t>
+            </a:r>
+            <a:r>
+              <a:rPr lang="de-DE" dirty="0" err="1"/>
+              <a:t>masked</a:t>
+            </a:r>
+            <a:r>
+              <a:rPr lang="de-DE" dirty="0"/>
+              <a:t> </a:t>
+            </a:r>
+            <a:r>
+              <a:rPr lang="de-DE" dirty="0" err="1"/>
+              <a:t>token</a:t>
+            </a:r>
+            <a:r>
+              <a:rPr lang="de-DE" dirty="0"/>
+              <a:t> </a:t>
+            </a:r>
+            <a:r>
+              <a:rPr lang="de-DE" dirty="0" err="1"/>
+              <a:t>embeddings</a:t>
+            </a:r>
+            <a:r>
+              <a:rPr lang="de-DE" dirty="0"/>
+              <a:t> </a:t>
+            </a:r>
+            <a:r>
+              <a:rPr lang="de-DE" dirty="0" err="1"/>
+              <a:t>only</a:t>
+            </a:r>
+            <a:r>
+              <a:rPr lang="de-DE" dirty="0"/>
+              <a:t>.</a:t>
+            </a:r>
           </a:p>
         </p:txBody>
       </p:sp>
@@ -8713,7 +13545,7 @@
           <p:cNvPr id="4" name="Foliennummernplatzhalter 3">
             <a:extLst>
               <a:ext uri="{FF2B5EF4-FFF2-40B4-BE49-F238E27FC236}">
-                <a16:creationId xmlns:a16="http://schemas.microsoft.com/office/drawing/2014/main" id="{BD68B0B8-AEDC-2BFB-161C-7E00CD7BC98C}"/>
+                <a16:creationId xmlns:a16="http://schemas.microsoft.com/office/drawing/2014/main" id="{C37B8CF4-165F-DCF3-1604-8B15312E525F}"/>
               </a:ext>
             </a:extLst>
           </p:cNvPr>
@@ -8740,7 +13572,7 @@
     </p:spTree>
     <p:extLst>
       <p:ext uri="{BB962C8B-B14F-4D97-AF65-F5344CB8AC3E}">
-        <p14:creationId xmlns:p14="http://schemas.microsoft.com/office/powerpoint/2010/main" val="1774381992"/>
+        <p14:creationId xmlns:p14="http://schemas.microsoft.com/office/powerpoint/2010/main" val="2846108880"/>
       </p:ext>
     </p:extLst>
   </p:cSld>
@@ -8772,7 +13604,7 @@
           <p:cNvPr id="2" name="Titel 1">
             <a:extLst>
               <a:ext uri="{FF2B5EF4-FFF2-40B4-BE49-F238E27FC236}">
-                <a16:creationId xmlns:a16="http://schemas.microsoft.com/office/drawing/2014/main" id="{36DF84C9-7C51-3B5E-CEAC-B8DAC520A141}"/>
+                <a16:creationId xmlns:a16="http://schemas.microsoft.com/office/drawing/2014/main" id="{61FF0D77-63F1-825D-6560-C80B0DE3E9FD}"/>
               </a:ext>
             </a:extLst>
           </p:cNvPr>
@@ -8788,15 +13620,7 @@
           <a:bodyPr/>
           <a:lstStyle/>
           <a:p>
-            <a:r>
-              <a:rPr lang="de-DE" dirty="0"/>
-              <a:t>Feature </a:t>
-            </a:r>
-            <a:r>
-              <a:rPr lang="de-DE" dirty="0" err="1"/>
-              <a:t>Extraction</a:t>
-            </a:r>
-            <a:endParaRPr lang="de-DE" dirty="0"/>
+            <a:endParaRPr lang="de-DE"/>
           </a:p>
         </p:txBody>
       </p:sp>
@@ -8805,7 +13629,7 @@
           <p:cNvPr id="3" name="Inhaltsplatzhalter 2">
             <a:extLst>
               <a:ext uri="{FF2B5EF4-FFF2-40B4-BE49-F238E27FC236}">
-                <a16:creationId xmlns:a16="http://schemas.microsoft.com/office/drawing/2014/main" id="{B0397F5D-3B96-44CC-0D86-A08B51D4C434}"/>
+                <a16:creationId xmlns:a16="http://schemas.microsoft.com/office/drawing/2014/main" id="{3B55EF91-9EAF-B878-3441-F9D7A7F93FD9}"/>
               </a:ext>
             </a:extLst>
           </p:cNvPr>
@@ -8816,158 +13640,100 @@
             <p:ph idx="1"/>
           </p:nvPr>
         </p:nvSpPr>
-        <p:spPr>
-          <a:xfrm>
-            <a:off x="838200" y="1825625"/>
-            <a:ext cx="7683059" cy="4351338"/>
-          </a:xfrm>
-        </p:spPr>
+        <p:spPr/>
         <p:txBody>
           <a:bodyPr>
-            <a:normAutofit fontScale="92500"/>
+            <a:normAutofit fontScale="92500" lnSpcReduction="10000"/>
           </a:bodyPr>
           <a:lstStyle/>
-          <a:p>
-            <a:r>
-              <a:rPr lang="de-DE" dirty="0" err="1"/>
-              <a:t>get</a:t>
-            </a:r>
-            <a:r>
-              <a:rPr lang="de-DE" dirty="0"/>
-              <a:t> </a:t>
-            </a:r>
-            <a:r>
-              <a:rPr lang="de-DE" dirty="0" err="1"/>
-              <a:t>pretrained</a:t>
-            </a:r>
-            <a:r>
-              <a:rPr lang="de-DE" dirty="0"/>
-              <a:t> </a:t>
-            </a:r>
-            <a:r>
-              <a:rPr lang="de-DE" dirty="0" err="1"/>
-              <a:t>encoder</a:t>
-            </a:r>
-            <a:r>
-              <a:rPr lang="de-DE" dirty="0"/>
-              <a:t> LLM </a:t>
-            </a:r>
-            <a:r>
-              <a:rPr lang="de-DE" dirty="0" err="1"/>
-              <a:t>as</a:t>
-            </a:r>
-            <a:r>
-              <a:rPr lang="de-DE" dirty="0"/>
-              <a:t> </a:t>
-            </a:r>
-            <a:r>
-              <a:rPr lang="de-DE" dirty="0" err="1"/>
-              <a:t>foundation</a:t>
-            </a:r>
-            <a:r>
-              <a:rPr lang="de-DE" dirty="0"/>
-              <a:t> </a:t>
-            </a:r>
-            <a:r>
-              <a:rPr lang="de-DE" dirty="0" err="1"/>
-              <a:t>model</a:t>
-            </a:r>
-            <a:endParaRPr lang="de-DE" dirty="0"/>
-          </a:p>
           <a:p>
             <a:pPr marL="0" indent="0">
               <a:buNone/>
             </a:pPr>
-            <a:endParaRPr lang="de-DE" dirty="0"/>
-          </a:p>
-          <a:p>
-            <a:r>
-              <a:rPr lang="de-DE" dirty="0" err="1"/>
-              <a:t>remove</a:t>
-            </a:r>
-            <a:r>
-              <a:rPr lang="de-DE" dirty="0"/>
-              <a:t> </a:t>
-            </a:r>
-            <a:r>
-              <a:rPr lang="de-DE" dirty="0" err="1"/>
-              <a:t>classifier</a:t>
-            </a:r>
-            <a:r>
-              <a:rPr lang="de-DE" dirty="0"/>
-              <a:t> </a:t>
-            </a:r>
-            <a:r>
-              <a:rPr lang="de-DE" dirty="0" err="1"/>
-              <a:t>head</a:t>
-            </a:r>
-            <a:r>
-              <a:rPr lang="de-DE" dirty="0"/>
-              <a:t> </a:t>
-            </a:r>
-            <a:r>
-              <a:rPr lang="de-DE" dirty="0" err="1"/>
-              <a:t>from</a:t>
-            </a:r>
-            <a:r>
-              <a:rPr lang="de-DE" dirty="0"/>
-              <a:t> </a:t>
-            </a:r>
-            <a:r>
-              <a:rPr lang="de-DE" dirty="0" err="1"/>
-              <a:t>pretraining</a:t>
-            </a:r>
-            <a:r>
-              <a:rPr lang="de-DE" dirty="0"/>
-              <a:t> (after final </a:t>
-            </a:r>
-            <a:r>
-              <a:rPr lang="de-DE" dirty="0" err="1"/>
-              <a:t>contextual</a:t>
-            </a:r>
-            <a:r>
-              <a:rPr lang="de-DE" dirty="0"/>
-              <a:t> </a:t>
-            </a:r>
-            <a:r>
-              <a:rPr lang="de-DE" dirty="0" err="1"/>
-              <a:t>embeddings</a:t>
-            </a:r>
-            <a:r>
-              <a:rPr lang="de-DE" dirty="0"/>
-              <a:t>)</a:t>
+            <a:r>
+              <a:rPr lang="de-DE" b="1" dirty="0" err="1"/>
+              <a:t>Sequence</a:t>
+            </a:r>
+            <a:r>
+              <a:rPr lang="de-DE" b="1" dirty="0"/>
+              <a:t> </a:t>
+            </a:r>
+            <a:r>
+              <a:rPr lang="de-DE" b="1" dirty="0" err="1"/>
+              <a:t>classification</a:t>
+            </a:r>
+            <a:r>
+              <a:rPr lang="de-DE" b="1" dirty="0"/>
+              <a:t> (</a:t>
+            </a:r>
+            <a:r>
+              <a:rPr lang="de-DE" b="1" dirty="0" err="1"/>
+              <a:t>sentiment</a:t>
+            </a:r>
+            <a:r>
+              <a:rPr lang="de-DE" b="1" dirty="0"/>
+              <a:t>, </a:t>
+            </a:r>
+            <a:r>
+              <a:rPr lang="de-DE" b="1" dirty="0" err="1"/>
+              <a:t>topic</a:t>
+            </a:r>
+            <a:r>
+              <a:rPr lang="de-DE" b="1" dirty="0"/>
+              <a:t>, NLI, etc.)</a:t>
             </a:r>
           </a:p>
           <a:p>
             <a:pPr marL="0" indent="0">
               <a:buNone/>
             </a:pPr>
-            <a:endParaRPr lang="de-DE" dirty="0"/>
-          </a:p>
-          <a:p>
-            <a:r>
-              <a:rPr lang="de-DE" dirty="0"/>
-              <a:t>pass </a:t>
-            </a:r>
-            <a:r>
-              <a:rPr lang="de-DE" dirty="0" err="1"/>
-              <a:t>training</a:t>
-            </a:r>
-            <a:r>
-              <a:rPr lang="de-DE" dirty="0"/>
-              <a:t> </a:t>
-            </a:r>
-            <a:r>
-              <a:rPr lang="de-DE" dirty="0" err="1"/>
-              <a:t>data</a:t>
-            </a:r>
-            <a:r>
-              <a:rPr lang="de-DE" dirty="0"/>
-              <a:t> (</a:t>
-            </a:r>
-            <a:r>
-              <a:rPr lang="de-DE" dirty="0" err="1"/>
-              <a:t>for</a:t>
+            <a:r>
+              <a:rPr lang="de-DE" dirty="0"/>
+              <a:t>A </a:t>
+            </a:r>
+            <a:r>
+              <a:rPr lang="de-DE" dirty="0" err="1"/>
+              <a:t>special</a:t>
+            </a:r>
+            <a:r>
+              <a:rPr lang="de-DE" dirty="0"/>
+              <a:t> </a:t>
+            </a:r>
+            <a:r>
+              <a:rPr lang="de-DE" dirty="0" err="1"/>
+              <a:t>token</a:t>
+            </a:r>
+            <a:r>
+              <a:rPr lang="de-DE" dirty="0"/>
+              <a:t> </a:t>
+            </a:r>
+            <a:r>
+              <a:rPr lang="de-DE" b="1" dirty="0"/>
+              <a:t>[CLS]</a:t>
+            </a:r>
+            <a:r>
+              <a:rPr lang="de-DE" dirty="0"/>
+              <a:t> </a:t>
+            </a:r>
+            <a:r>
+              <a:rPr lang="de-DE" dirty="0" err="1"/>
+              <a:t>is</a:t>
+            </a:r>
+            <a:r>
+              <a:rPr lang="de-DE" dirty="0"/>
+              <a:t> </a:t>
+            </a:r>
+            <a:r>
+              <a:rPr lang="de-DE" dirty="0" err="1"/>
+              <a:t>prepended</a:t>
+            </a:r>
+            <a:r>
+              <a:rPr lang="de-DE" dirty="0"/>
+              <a:t> </a:t>
+            </a:r>
+            <a:r>
+              <a:rPr lang="de-DE" dirty="0" err="1"/>
+              <a:t>to</a:t>
             </a:r>
             <a:r>
               <a:rPr lang="de-DE" dirty="0"/>
@@ -8983,137 +13749,275 @@
             </a:r>
             <a:r>
               <a:rPr lang="de-DE" dirty="0" err="1"/>
-              <a:t>task</a:t>
-            </a:r>
-            <a:r>
-              <a:rPr lang="de-DE" dirty="0"/>
-              <a:t> at </a:t>
-            </a:r>
-            <a:r>
-              <a:rPr lang="de-DE" dirty="0" err="1"/>
-              <a:t>hand</a:t>
-            </a:r>
-            <a:r>
-              <a:rPr lang="de-DE" dirty="0"/>
-              <a:t>) </a:t>
-            </a:r>
-            <a:r>
-              <a:rPr lang="de-DE" dirty="0" err="1"/>
-              <a:t>through</a:t>
-            </a:r>
-            <a:r>
-              <a:rPr lang="de-DE" dirty="0"/>
-              <a:t> </a:t>
-            </a:r>
-            <a:r>
-              <a:rPr lang="de-DE" dirty="0" err="1"/>
-              <a:t>the</a:t>
-            </a:r>
-            <a:r>
-              <a:rPr lang="de-DE" dirty="0"/>
-              <a:t> </a:t>
-            </a:r>
-            <a:r>
-              <a:rPr lang="de-DE" dirty="0" err="1"/>
-              <a:t>model</a:t>
-            </a:r>
-            <a:r>
-              <a:rPr lang="de-DE" dirty="0"/>
-              <a:t> and </a:t>
-            </a:r>
-            <a:r>
-              <a:rPr lang="de-DE" dirty="0" err="1"/>
-              <a:t>use</a:t>
-            </a:r>
-            <a:r>
-              <a:rPr lang="de-DE" dirty="0"/>
-              <a:t> </a:t>
-            </a:r>
-            <a:r>
-              <a:rPr lang="de-DE" dirty="0" err="1"/>
-              <a:t>the</a:t>
-            </a:r>
-            <a:r>
-              <a:rPr lang="de-DE" dirty="0"/>
-              <a:t> [CLS] </a:t>
-            </a:r>
-            <a:r>
-              <a:rPr lang="de-DE" dirty="0" err="1"/>
-              <a:t>token</a:t>
-            </a:r>
-            <a:r>
-              <a:rPr lang="de-DE" dirty="0"/>
-              <a:t> </a:t>
-            </a:r>
-            <a:r>
-              <a:rPr lang="de-DE" dirty="0" err="1"/>
-              <a:t>embedding</a:t>
-            </a:r>
-            <a:r>
-              <a:rPr lang="de-DE" dirty="0"/>
-              <a:t> </a:t>
-            </a:r>
-            <a:r>
-              <a:rPr lang="de-DE" dirty="0" err="1"/>
-              <a:t>as</a:t>
-            </a:r>
-            <a:r>
-              <a:rPr lang="de-DE" dirty="0"/>
-              <a:t> </a:t>
-            </a:r>
-            <a:r>
-              <a:rPr lang="de-DE" dirty="0" err="1"/>
               <a:t>input</a:t>
             </a:r>
             <a:r>
               <a:rPr lang="de-DE" dirty="0"/>
-              <a:t> </a:t>
-            </a:r>
-            <a:r>
-              <a:rPr lang="de-DE" dirty="0" err="1"/>
-              <a:t>for</a:t>
-            </a:r>
-            <a:r>
-              <a:rPr lang="de-DE" dirty="0"/>
-              <a:t> a </a:t>
-            </a:r>
-            <a:r>
-              <a:rPr lang="de-DE" dirty="0" err="1"/>
-              <a:t>small</a:t>
-            </a:r>
-            <a:r>
-              <a:rPr lang="de-DE" dirty="0"/>
-              <a:t>, task-</a:t>
-            </a:r>
-            <a:r>
-              <a:rPr lang="de-DE" dirty="0" err="1"/>
-              <a:t>specific</a:t>
-            </a:r>
-            <a:r>
-              <a:rPr lang="de-DE" dirty="0"/>
-              <a:t> </a:t>
-            </a:r>
-            <a:r>
-              <a:rPr lang="de-DE" dirty="0" err="1"/>
-              <a:t>model</a:t>
-            </a:r>
-            <a:endParaRPr lang="de-DE" dirty="0"/>
+              <a:t>.</a:t>
+            </a:r>
           </a:p>
           <a:p>
             <a:pPr marL="0" indent="0">
               <a:buNone/>
             </a:pPr>
             <a:r>
-              <a:rPr lang="de-DE" dirty="0"/>
-              <a:t>alternative </a:t>
-            </a:r>
-            <a:r>
-              <a:rPr lang="de-DE" dirty="0" err="1"/>
-              <a:t>to</a:t>
-            </a:r>
-            <a:r>
-              <a:rPr lang="de-DE" dirty="0"/>
-              <a:t> [CLS] </a:t>
+              <a:rPr lang="de-DE" dirty="0" err="1"/>
+              <a:t>Its</a:t>
+            </a:r>
+            <a:r>
+              <a:rPr lang="de-DE" dirty="0"/>
+              <a:t> final </a:t>
+            </a:r>
+            <a:r>
+              <a:rPr lang="de-DE" dirty="0" err="1"/>
+              <a:t>hidden</a:t>
+            </a:r>
+            <a:r>
+              <a:rPr lang="de-DE" dirty="0"/>
+              <a:t> </a:t>
+            </a:r>
+            <a:r>
+              <a:rPr lang="de-DE" dirty="0" err="1"/>
+              <a:t>state</a:t>
+            </a:r>
+            <a:r>
+              <a:rPr lang="de-DE" dirty="0"/>
+              <a:t> h_{\</a:t>
+            </a:r>
+            <a:r>
+              <a:rPr lang="de-DE" dirty="0" err="1"/>
+              <a:t>text</a:t>
+            </a:r>
+            <a:r>
+              <a:rPr lang="de-DE" dirty="0"/>
+              <a:t>{[CLS]}} </a:t>
+            </a:r>
+            <a:r>
+              <a:rPr lang="de-DE" dirty="0" err="1"/>
+              <a:t>is</a:t>
+            </a:r>
+            <a:r>
+              <a:rPr lang="de-DE" dirty="0"/>
+              <a:t> </a:t>
+            </a:r>
+            <a:r>
+              <a:rPr lang="de-DE" dirty="0" err="1"/>
+              <a:t>treated</a:t>
+            </a:r>
+            <a:r>
+              <a:rPr lang="de-DE" dirty="0"/>
+              <a:t> </a:t>
+            </a:r>
+            <a:r>
+              <a:rPr lang="de-DE" dirty="0" err="1"/>
+              <a:t>as</a:t>
+            </a:r>
+            <a:r>
+              <a:rPr lang="de-DE" dirty="0"/>
+              <a:t> a </a:t>
+            </a:r>
+            <a:r>
+              <a:rPr lang="de-DE" dirty="0" err="1"/>
+              <a:t>summary</a:t>
+            </a:r>
+            <a:r>
+              <a:rPr lang="de-DE" dirty="0"/>
+              <a:t> </a:t>
+            </a:r>
+            <a:r>
+              <a:rPr lang="de-DE" dirty="0" err="1"/>
+              <a:t>of</a:t>
+            </a:r>
+            <a:r>
+              <a:rPr lang="de-DE" dirty="0"/>
+              <a:t> </a:t>
+            </a:r>
+            <a:r>
+              <a:rPr lang="de-DE" dirty="0" err="1"/>
+              <a:t>the</a:t>
+            </a:r>
+            <a:r>
+              <a:rPr lang="de-DE" dirty="0"/>
+              <a:t> </a:t>
+            </a:r>
+            <a:r>
+              <a:rPr lang="de-DE" dirty="0" err="1"/>
+              <a:t>whole</a:t>
+            </a:r>
+            <a:r>
+              <a:rPr lang="de-DE" dirty="0"/>
+              <a:t> </a:t>
+            </a:r>
+            <a:r>
+              <a:rPr lang="de-DE" dirty="0" err="1"/>
+              <a:t>sequence</a:t>
+            </a:r>
+            <a:r>
+              <a:rPr lang="de-DE" dirty="0"/>
+              <a:t>.</a:t>
+            </a:r>
+          </a:p>
+          <a:p>
+            <a:pPr marL="0" indent="0">
+              <a:buNone/>
+            </a:pPr>
+            <a:r>
+              <a:rPr lang="de-DE" dirty="0" err="1"/>
+              <a:t>That</a:t>
+            </a:r>
+            <a:r>
+              <a:rPr lang="de-DE" dirty="0"/>
+              <a:t> </a:t>
+            </a:r>
+            <a:r>
+              <a:rPr lang="de-DE" dirty="0" err="1"/>
+              <a:t>vector</a:t>
+            </a:r>
+            <a:r>
+              <a:rPr lang="de-DE" dirty="0"/>
+              <a:t> </a:t>
+            </a:r>
+            <a:r>
+              <a:rPr lang="de-DE" dirty="0" err="1"/>
+              <a:t>is</a:t>
+            </a:r>
+            <a:r>
+              <a:rPr lang="de-DE" dirty="0"/>
+              <a:t> </a:t>
+            </a:r>
+            <a:r>
+              <a:rPr lang="de-DE" dirty="0" err="1"/>
+              <a:t>passed</a:t>
+            </a:r>
+            <a:r>
+              <a:rPr lang="de-DE" dirty="0"/>
+              <a:t> </a:t>
+            </a:r>
+            <a:r>
+              <a:rPr lang="de-DE" dirty="0" err="1"/>
+              <a:t>into</a:t>
+            </a:r>
+            <a:r>
+              <a:rPr lang="de-DE" dirty="0"/>
+              <a:t> a linear </a:t>
+            </a:r>
+            <a:r>
+              <a:rPr lang="de-DE" dirty="0" err="1"/>
+              <a:t>classification</a:t>
+            </a:r>
+            <a:r>
+              <a:rPr lang="de-DE" dirty="0"/>
+              <a:t> </a:t>
+            </a:r>
+            <a:r>
+              <a:rPr lang="de-DE" dirty="0" err="1"/>
+              <a:t>head</a:t>
+            </a:r>
+            <a:r>
+              <a:rPr lang="de-DE" dirty="0"/>
+              <a:t> → </a:t>
+            </a:r>
+            <a:r>
+              <a:rPr lang="de-DE" dirty="0" err="1"/>
+              <a:t>logits</a:t>
+            </a:r>
+            <a:r>
+              <a:rPr lang="de-DE" dirty="0"/>
+              <a:t> </a:t>
+            </a:r>
+            <a:r>
+              <a:rPr lang="de-DE" dirty="0" err="1"/>
+              <a:t>over</a:t>
+            </a:r>
+            <a:r>
+              <a:rPr lang="de-DE" dirty="0"/>
+              <a:t> </a:t>
+            </a:r>
+            <a:r>
+              <a:rPr lang="de-DE" dirty="0" err="1"/>
+              <a:t>classes</a:t>
+            </a:r>
+            <a:r>
+              <a:rPr lang="de-DE" dirty="0"/>
+              <a:t>.</a:t>
+            </a:r>
+          </a:p>
+          <a:p>
+            <a:pPr marL="0" indent="0">
+              <a:buNone/>
+            </a:pPr>
+            <a:r>
+              <a:rPr lang="de-DE" b="1" dirty="0" err="1"/>
+              <a:t>default</a:t>
+            </a:r>
+            <a:r>
+              <a:rPr lang="de-DE" b="1" dirty="0"/>
+              <a:t> in BERT-style </a:t>
+            </a:r>
+            <a:r>
+              <a:rPr lang="de-DE" b="1" dirty="0" err="1"/>
+              <a:t>models</a:t>
+            </a:r>
+            <a:endParaRPr lang="de-DE" b="1" dirty="0"/>
+          </a:p>
+          <a:p>
+            <a:pPr marL="0" indent="0">
+              <a:buNone/>
+            </a:pPr>
+            <a:br>
+              <a:rPr lang="de-DE" dirty="0"/>
+            </a:br>
+            <a:r>
+              <a:rPr lang="de-DE" dirty="0"/>
+              <a:t>(</a:t>
+            </a:r>
+            <a:r>
+              <a:rPr lang="de-DE" dirty="0" err="1"/>
+              <a:t>Some</a:t>
+            </a:r>
+            <a:r>
+              <a:rPr lang="de-DE" dirty="0"/>
+              <a:t> </a:t>
+            </a:r>
+            <a:r>
+              <a:rPr lang="de-DE" dirty="0" err="1"/>
+              <a:t>variants</a:t>
+            </a:r>
+            <a:r>
+              <a:rPr lang="de-DE" dirty="0"/>
+              <a:t> </a:t>
+            </a:r>
+            <a:r>
+              <a:rPr lang="de-DE" dirty="0" err="1"/>
+              <a:t>use</a:t>
+            </a:r>
+            <a:r>
+              <a:rPr lang="de-DE" dirty="0"/>
+              <a:t> </a:t>
+            </a:r>
+            <a:r>
+              <a:rPr lang="de-DE" b="1" dirty="0" err="1"/>
+              <a:t>average</a:t>
+            </a:r>
+            <a:r>
+              <a:rPr lang="de-DE" b="1" dirty="0"/>
+              <a:t> </a:t>
+            </a:r>
+            <a:r>
+              <a:rPr lang="de-DE" b="1" dirty="0" err="1"/>
+              <a:t>pooling</a:t>
+            </a:r>
+            <a:r>
+              <a:rPr lang="de-DE" dirty="0"/>
+              <a:t> </a:t>
+            </a:r>
+            <a:r>
+              <a:rPr lang="de-DE" dirty="0" err="1"/>
+              <a:t>over</a:t>
+            </a:r>
+            <a:r>
+              <a:rPr lang="de-DE" dirty="0"/>
+              <a:t> all </a:t>
             </a:r>
             <a:r>
               <a:rPr lang="de-DE" dirty="0" err="1"/>
@@ -9121,82 +14025,67 @@
             </a:r>
             <a:r>
               <a:rPr lang="de-DE" dirty="0"/>
-              <a:t>: </a:t>
-            </a:r>
-            <a:r>
-              <a:rPr lang="de-DE" dirty="0" err="1"/>
-              <a:t>mean</a:t>
-            </a:r>
-            <a:r>
-              <a:rPr lang="de-DE" dirty="0"/>
-              <a:t>/</a:t>
-            </a:r>
-            <a:r>
-              <a:rPr lang="de-DE" dirty="0" err="1"/>
-              <a:t>max</a:t>
-            </a:r>
-            <a:r>
-              <a:rPr lang="de-DE" dirty="0"/>
-              <a:t> </a:t>
-            </a:r>
-            <a:r>
-              <a:rPr lang="de-DE" dirty="0" err="1"/>
-              <a:t>pooling</a:t>
-            </a:r>
-            <a:r>
-              <a:rPr lang="de-DE" dirty="0"/>
-              <a:t> </a:t>
-            </a:r>
-            <a:r>
-              <a:rPr lang="de-DE" dirty="0" err="1"/>
-              <a:t>over</a:t>
-            </a:r>
-            <a:r>
-              <a:rPr lang="de-DE" dirty="0"/>
-              <a:t> final </a:t>
-            </a:r>
-            <a:r>
-              <a:rPr lang="de-DE" dirty="0" err="1"/>
-              <a:t>token</a:t>
-            </a:r>
-            <a:r>
-              <a:rPr lang="de-DE" dirty="0"/>
-              <a:t> </a:t>
-            </a:r>
-            <a:r>
-              <a:rPr lang="de-DE" dirty="0" err="1"/>
-              <a:t>embeddings</a:t>
-            </a:r>
-            <a:r>
-              <a:rPr lang="de-DE" dirty="0"/>
-              <a:t> (e.g., </a:t>
-            </a:r>
-            <a:r>
-              <a:rPr lang="de-DE" dirty="0" err="1"/>
-              <a:t>for</a:t>
-            </a:r>
-            <a:r>
-              <a:rPr lang="de-DE" dirty="0"/>
-              <a:t> </a:t>
-            </a:r>
-            <a:r>
-              <a:rPr lang="de-DE" dirty="0" err="1"/>
-              <a:t>sentence</a:t>
-            </a:r>
-            <a:r>
-              <a:rPr lang="de-DE" dirty="0"/>
-              <a:t> </a:t>
-            </a:r>
-            <a:r>
-              <a:rPr lang="de-DE" dirty="0" err="1"/>
-              <a:t>similarity</a:t>
-            </a:r>
-            <a:r>
-              <a:rPr lang="de-DE" dirty="0"/>
-              <a:t>)</a:t>
-            </a:r>
-          </a:p>
-          <a:p>
+              <a:t> </a:t>
+            </a:r>
+            <a:r>
+              <a:rPr lang="de-DE" dirty="0" err="1"/>
+              <a:t>states</a:t>
+            </a:r>
+            <a:r>
+              <a:rPr lang="de-DE" dirty="0"/>
+              <a:t> </a:t>
+            </a:r>
+            <a:r>
+              <a:rPr lang="de-DE" dirty="0" err="1"/>
+              <a:t>instead</a:t>
+            </a:r>
+            <a:r>
+              <a:rPr lang="de-DE" dirty="0"/>
+              <a:t> </a:t>
+            </a:r>
+            <a:r>
+              <a:rPr lang="de-DE" dirty="0" err="1"/>
+              <a:t>of</a:t>
+            </a:r>
+            <a:r>
+              <a:rPr lang="de-DE" dirty="0"/>
+              <a:t> [CLS], but [CLS] </a:t>
+            </a:r>
+            <a:r>
+              <a:rPr lang="de-DE" dirty="0" err="1"/>
+              <a:t>is</a:t>
+            </a:r>
+            <a:r>
+              <a:rPr lang="de-DE" dirty="0"/>
+              <a:t> </a:t>
+            </a:r>
+            <a:r>
+              <a:rPr lang="de-DE" dirty="0" err="1"/>
+              <a:t>the</a:t>
+            </a:r>
+            <a:r>
+              <a:rPr lang="de-DE" dirty="0"/>
+              <a:t> original/</a:t>
+            </a:r>
+            <a:r>
+              <a:rPr lang="de-DE" dirty="0" err="1"/>
+              <a:t>standard</a:t>
+            </a:r>
+            <a:r>
+              <a:rPr lang="de-DE" dirty="0"/>
+              <a:t> </a:t>
+            </a:r>
+            <a:r>
+              <a:rPr lang="de-DE" dirty="0" err="1"/>
+              <a:t>choice</a:t>
+            </a:r>
+            <a:r>
+              <a:rPr lang="de-DE" dirty="0"/>
+              <a:t>.)</a:t>
+            </a:r>
+            <a:br>
+              <a:rPr lang="de-DE" dirty="0"/>
+            </a:br>
             <a:endParaRPr lang="de-DE" dirty="0"/>
           </a:p>
         </p:txBody>
@@ -9206,7 +14095,7 @@
           <p:cNvPr id="4" name="Foliennummernplatzhalter 3">
             <a:extLst>
               <a:ext uri="{FF2B5EF4-FFF2-40B4-BE49-F238E27FC236}">
-                <a16:creationId xmlns:a16="http://schemas.microsoft.com/office/drawing/2014/main" id="{0BF87474-2FE1-1D25-ABD2-967B5E868E5E}"/>
+                <a16:creationId xmlns:a16="http://schemas.microsoft.com/office/drawing/2014/main" id="{B04A72D0-DDFF-CBDD-9B6B-E819F5AD255C}"/>
               </a:ext>
             </a:extLst>
           </p:cNvPr>
@@ -9230,154 +14119,10 @@
           </a:p>
         </p:txBody>
       </p:sp>
-      <p:sp>
-        <p:nvSpPr>
-          <p:cNvPr id="5" name="TextBox 4">
-            <a:extLst>
-              <a:ext uri="{FF2B5EF4-FFF2-40B4-BE49-F238E27FC236}">
-                <a16:creationId xmlns:a16="http://schemas.microsoft.com/office/drawing/2014/main" id="{E310B2C6-3A5F-9519-04DA-E6239220BB59}"/>
-              </a:ext>
-            </a:extLst>
-          </p:cNvPr>
-          <p:cNvSpPr txBox="1"/>
-          <p:nvPr/>
-        </p:nvSpPr>
-        <p:spPr>
-          <a:xfrm>
-            <a:off x="11529848" y="4800045"/>
-            <a:ext cx="572811" cy="246221"/>
-          </a:xfrm>
-          <a:prstGeom prst="rect">
-            <a:avLst/>
-          </a:prstGeom>
-          <a:noFill/>
-        </p:spPr>
-        <p:txBody>
-          <a:bodyPr wrap="square" rtlCol="0">
-            <a:spAutoFit/>
-          </a:bodyPr>
-          <a:lstStyle/>
-          <a:p>
-            <a:r>
-              <a:rPr lang="de-DE" sz="1000" dirty="0">
-                <a:hlinkClick r:id="rId2"/>
-              </a:rPr>
-              <a:t>source</a:t>
-            </a:r>
-            <a:endParaRPr lang="de-DE" sz="1000" dirty="0"/>
-          </a:p>
-        </p:txBody>
-      </p:sp>
-      <p:pic>
-        <p:nvPicPr>
-          <p:cNvPr id="6" name="Picture 7" descr="A screen shot of a computer&#10;&#10;Description automatically generated">
-            <a:extLst>
-              <a:ext uri="{FF2B5EF4-FFF2-40B4-BE49-F238E27FC236}">
-                <a16:creationId xmlns:a16="http://schemas.microsoft.com/office/drawing/2014/main" id="{3E9F7FDF-48D5-7328-35E3-E99E3D3B4CD7}"/>
-              </a:ext>
-            </a:extLst>
-          </p:cNvPr>
-          <p:cNvPicPr>
-            <a:picLocks noChangeAspect="1"/>
-          </p:cNvPicPr>
-          <p:nvPr/>
-        </p:nvPicPr>
-        <p:blipFill>
-          <a:blip r:embed="rId3"/>
-          <a:stretch>
-            <a:fillRect/>
-          </a:stretch>
-        </p:blipFill>
-        <p:spPr>
-          <a:xfrm>
-            <a:off x="8610600" y="1933274"/>
-            <a:ext cx="3581400" cy="2866770"/>
-          </a:xfrm>
-          <a:prstGeom prst="rect">
-            <a:avLst/>
-          </a:prstGeom>
-        </p:spPr>
-      </p:pic>
-      <p:sp>
-        <p:nvSpPr>
-          <p:cNvPr id="7" name="TextBox 8">
-            <a:extLst>
-              <a:ext uri="{FF2B5EF4-FFF2-40B4-BE49-F238E27FC236}">
-                <a16:creationId xmlns:a16="http://schemas.microsoft.com/office/drawing/2014/main" id="{D4D6E73C-E984-5CF0-54C9-1C7FBF2544C7}"/>
-              </a:ext>
-            </a:extLst>
-          </p:cNvPr>
-          <p:cNvSpPr txBox="1"/>
-          <p:nvPr/>
-        </p:nvSpPr>
-        <p:spPr>
-          <a:xfrm>
-            <a:off x="8958029" y="5042630"/>
-            <a:ext cx="2878371" cy="646331"/>
-          </a:xfrm>
-          <a:prstGeom prst="rect">
-            <a:avLst/>
-          </a:prstGeom>
-          <a:noFill/>
-        </p:spPr>
-        <p:txBody>
-          <a:bodyPr wrap="square" rtlCol="0">
-            <a:spAutoFit/>
-          </a:bodyPr>
-          <a:lstStyle/>
-          <a:p>
-            <a:r>
-              <a:rPr lang="en-GB" dirty="0"/>
-              <a:t>sentence classification via [CLS] token</a:t>
-            </a:r>
-          </a:p>
-        </p:txBody>
-      </p:sp>
-      <p:cxnSp>
-        <p:nvCxnSpPr>
-          <p:cNvPr id="8" name="Straight Arrow Connector 10">
-            <a:extLst>
-              <a:ext uri="{FF2B5EF4-FFF2-40B4-BE49-F238E27FC236}">
-                <a16:creationId xmlns:a16="http://schemas.microsoft.com/office/drawing/2014/main" id="{001A42F3-47EB-3340-CC48-9BE4AC6D2692}"/>
-              </a:ext>
-            </a:extLst>
-          </p:cNvPr>
-          <p:cNvCxnSpPr>
-            <a:cxnSpLocks/>
-          </p:cNvCxnSpPr>
-          <p:nvPr/>
-        </p:nvCxnSpPr>
-        <p:spPr>
-          <a:xfrm flipH="1" flipV="1">
-            <a:off x="8958029" y="4478867"/>
-            <a:ext cx="228304" cy="651933"/>
-          </a:xfrm>
-          <a:prstGeom prst="straightConnector1">
-            <a:avLst/>
-          </a:prstGeom>
-          <a:ln>
-            <a:tailEnd type="triangle"/>
-          </a:ln>
-        </p:spPr>
-        <p:style>
-          <a:lnRef idx="1">
-            <a:schemeClr val="accent1"/>
-          </a:lnRef>
-          <a:fillRef idx="0">
-            <a:schemeClr val="accent1"/>
-          </a:fillRef>
-          <a:effectRef idx="0">
-            <a:schemeClr val="accent1"/>
-          </a:effectRef>
-          <a:fontRef idx="minor">
-            <a:schemeClr val="tx1"/>
-          </a:fontRef>
-        </p:style>
-      </p:cxnSp>
     </p:spTree>
     <p:extLst>
       <p:ext uri="{BB962C8B-B14F-4D97-AF65-F5344CB8AC3E}">
-        <p14:creationId xmlns:p14="http://schemas.microsoft.com/office/powerpoint/2010/main" val="4258369310"/>
+        <p14:creationId xmlns:p14="http://schemas.microsoft.com/office/powerpoint/2010/main" val="1004237482"/>
       </p:ext>
     </p:extLst>
   </p:cSld>
@@ -9406,10 +14151,10 @@
       </p:grpSpPr>
       <p:sp>
         <p:nvSpPr>
-          <p:cNvPr id="4" name="Title 3">
-            <a:extLst>
-              <a:ext uri="{FF2B5EF4-FFF2-40B4-BE49-F238E27FC236}">
-                <a16:creationId xmlns:a16="http://schemas.microsoft.com/office/drawing/2014/main" id="{028E18EF-EC53-ACA5-61E8-A955218138B3}"/>
+          <p:cNvPr id="2" name="Titel 1">
+            <a:extLst>
+              <a:ext uri="{FF2B5EF4-FFF2-40B4-BE49-F238E27FC236}">
+                <a16:creationId xmlns:a16="http://schemas.microsoft.com/office/drawing/2014/main" id="{AC8D2A51-B38D-9C57-1ABF-8D603A1E5500}"/>
               </a:ext>
             </a:extLst>
           </p:cNvPr>
@@ -9425,19 +14170,16 @@
           <a:bodyPr/>
           <a:lstStyle/>
           <a:p>
-            <a:r>
-              <a:rPr lang="en-GB" dirty="0"/>
-              <a:t>Finetuning</a:t>
-            </a:r>
-          </a:p>
-        </p:txBody>
-      </p:sp>
-      <p:sp>
-        <p:nvSpPr>
-          <p:cNvPr id="3" name="Content Placeholder 2">
-            <a:extLst>
-              <a:ext uri="{FF2B5EF4-FFF2-40B4-BE49-F238E27FC236}">
-                <a16:creationId xmlns:a16="http://schemas.microsoft.com/office/drawing/2014/main" id="{FF7F4B16-9855-AFD2-D174-7FE315330462}"/>
+            <a:endParaRPr lang="de-DE"/>
+          </a:p>
+        </p:txBody>
+      </p:sp>
+      <p:sp>
+        <p:nvSpPr>
+          <p:cNvPr id="3" name="Inhaltsplatzhalter 2">
+            <a:extLst>
+              <a:ext uri="{FF2B5EF4-FFF2-40B4-BE49-F238E27FC236}">
+                <a16:creationId xmlns:a16="http://schemas.microsoft.com/office/drawing/2014/main" id="{DFC6E1E0-93F3-C0C8-C345-1BD1F5C25C12}"/>
               </a:ext>
             </a:extLst>
           </p:cNvPr>
@@ -9448,150 +14190,226 @@
             <p:ph idx="1"/>
           </p:nvPr>
         </p:nvSpPr>
-        <p:spPr>
-          <a:xfrm>
-            <a:off x="838200" y="1825625"/>
-            <a:ext cx="5219637" cy="4530725"/>
-          </a:xfrm>
-        </p:spPr>
-        <p:txBody>
-          <a:bodyPr>
-            <a:normAutofit/>
-          </a:bodyPr>
+        <p:spPr/>
+        <p:txBody>
+          <a:bodyPr/>
           <a:lstStyle/>
-          <a:p>
-            <a:r>
-              <a:rPr lang="de-DE" dirty="0" err="1"/>
-              <a:t>get</a:t>
-            </a:r>
-            <a:r>
-              <a:rPr lang="de-DE" dirty="0"/>
-              <a:t> </a:t>
-            </a:r>
-            <a:r>
-              <a:rPr lang="de-DE" dirty="0" err="1"/>
-              <a:t>pretrained</a:t>
-            </a:r>
-            <a:r>
-              <a:rPr lang="de-DE" dirty="0"/>
-              <a:t> </a:t>
-            </a:r>
-            <a:r>
-              <a:rPr lang="de-DE" dirty="0" err="1"/>
-              <a:t>encoder</a:t>
-            </a:r>
-            <a:r>
-              <a:rPr lang="de-DE" dirty="0"/>
-              <a:t> LLM as </a:t>
-            </a:r>
-            <a:r>
-              <a:rPr lang="de-DE" dirty="0" err="1"/>
-              <a:t>foundation</a:t>
-            </a:r>
-            <a:r>
-              <a:rPr lang="de-DE" dirty="0"/>
-              <a:t> </a:t>
-            </a:r>
-            <a:r>
-              <a:rPr lang="de-DE" dirty="0" err="1"/>
-              <a:t>model</a:t>
-            </a:r>
-            <a:endParaRPr lang="de-DE" dirty="0"/>
-          </a:p>
           <a:p>
             <a:pPr marL="0" indent="0">
               <a:buNone/>
             </a:pPr>
-            <a:endParaRPr lang="de-DE" dirty="0"/>
-          </a:p>
-          <a:p>
-            <a:r>
-              <a:rPr lang="de-DE" dirty="0" err="1"/>
-              <a:t>replace</a:t>
-            </a:r>
-            <a:r>
-              <a:rPr lang="de-DE" dirty="0"/>
-              <a:t> </a:t>
-            </a:r>
-            <a:r>
-              <a:rPr lang="de-DE" dirty="0" err="1"/>
-              <a:t>classifier</a:t>
-            </a:r>
-            <a:r>
-              <a:rPr lang="de-DE" dirty="0"/>
-              <a:t> </a:t>
-            </a:r>
-            <a:r>
-              <a:rPr lang="de-DE" dirty="0" err="1"/>
-              <a:t>head</a:t>
-            </a:r>
-            <a:r>
-              <a:rPr lang="de-DE" dirty="0"/>
-              <a:t> </a:t>
-            </a:r>
-            <a:r>
-              <a:rPr lang="de-DE" dirty="0" err="1"/>
-              <a:t>from</a:t>
-            </a:r>
-            <a:r>
-              <a:rPr lang="de-DE" dirty="0"/>
-              <a:t> </a:t>
-            </a:r>
-            <a:r>
-              <a:rPr lang="de-DE" dirty="0" err="1"/>
-              <a:t>pretraining</a:t>
-            </a:r>
-            <a:r>
-              <a:rPr lang="de-DE" dirty="0"/>
-              <a:t> </a:t>
-            </a:r>
-            <a:r>
-              <a:rPr lang="de-DE" dirty="0" err="1"/>
-              <a:t>with</a:t>
-            </a:r>
-            <a:r>
-              <a:rPr lang="de-DE" dirty="0"/>
-              <a:t> task-</a:t>
-            </a:r>
-            <a:r>
-              <a:rPr lang="de-DE" dirty="0" err="1"/>
-              <a:t>specific</a:t>
-            </a:r>
-            <a:r>
-              <a:rPr lang="de-DE" dirty="0"/>
-              <a:t> </a:t>
-            </a:r>
-            <a:r>
-              <a:rPr lang="de-DE" dirty="0" err="1"/>
-              <a:t>head</a:t>
-            </a:r>
-            <a:endParaRPr lang="de-DE" dirty="0"/>
+            <a:r>
+              <a:rPr lang="de-DE" b="1" dirty="0"/>
+              <a:t>Token </a:t>
+            </a:r>
+            <a:r>
+              <a:rPr lang="de-DE" b="1" dirty="0" err="1"/>
+              <a:t>classification</a:t>
+            </a:r>
+            <a:r>
+              <a:rPr lang="de-DE" b="1" dirty="0"/>
+              <a:t> (NER, POS </a:t>
+            </a:r>
+            <a:r>
+              <a:rPr lang="de-DE" b="1" dirty="0" err="1"/>
+              <a:t>tagging</a:t>
+            </a:r>
+            <a:r>
+              <a:rPr lang="de-DE" b="1" dirty="0"/>
+              <a:t>, etc.)</a:t>
+            </a:r>
           </a:p>
           <a:p>
             <a:pPr marL="0" indent="0">
               <a:buNone/>
             </a:pPr>
-            <a:endParaRPr lang="en-GB" dirty="0"/>
-          </a:p>
-          <a:p>
-            <a:r>
-              <a:rPr lang="de-DE" dirty="0"/>
-              <a:t>continue (starting with weights after pretraining) training with data for task at </a:t>
-            </a:r>
-            <a:r>
-              <a:rPr lang="de-DE" dirty="0" err="1"/>
-              <a:t>hand</a:t>
-            </a:r>
-            <a:endParaRPr lang="de-DE" dirty="0"/>
-          </a:p>
-        </p:txBody>
-      </p:sp>
-      <p:sp>
-        <p:nvSpPr>
-          <p:cNvPr id="2" name="Slide Number Placeholder 1">
-            <a:extLst>
-              <a:ext uri="{FF2B5EF4-FFF2-40B4-BE49-F238E27FC236}">
-                <a16:creationId xmlns:a16="http://schemas.microsoft.com/office/drawing/2014/main" id="{E455EA56-7CB1-7041-F3BA-0AEA9E42E1D7}"/>
+            <a:r>
+              <a:rPr lang="de-DE" dirty="0" err="1"/>
+              <a:t>Each</a:t>
+            </a:r>
+            <a:r>
+              <a:rPr lang="de-DE" dirty="0"/>
+              <a:t> </a:t>
+            </a:r>
+            <a:r>
+              <a:rPr lang="de-DE" dirty="0" err="1"/>
+              <a:t>token’s</a:t>
+            </a:r>
+            <a:r>
+              <a:rPr lang="de-DE" dirty="0"/>
+              <a:t> </a:t>
+            </a:r>
+            <a:r>
+              <a:rPr lang="de-DE" dirty="0" err="1"/>
+              <a:t>hidden</a:t>
+            </a:r>
+            <a:r>
+              <a:rPr lang="de-DE" dirty="0"/>
+              <a:t> </a:t>
+            </a:r>
+            <a:r>
+              <a:rPr lang="de-DE" dirty="0" err="1"/>
+              <a:t>state</a:t>
+            </a:r>
+            <a:r>
+              <a:rPr lang="de-DE" dirty="0"/>
+              <a:t> </a:t>
+            </a:r>
+            <a:r>
+              <a:rPr lang="de-DE" dirty="0" err="1"/>
+              <a:t>is</a:t>
+            </a:r>
+            <a:r>
+              <a:rPr lang="de-DE" dirty="0"/>
+              <a:t> </a:t>
+            </a:r>
+            <a:r>
+              <a:rPr lang="de-DE" dirty="0" err="1"/>
+              <a:t>projected</a:t>
+            </a:r>
+            <a:r>
+              <a:rPr lang="de-DE" dirty="0"/>
+              <a:t> </a:t>
+            </a:r>
+            <a:r>
+              <a:rPr lang="de-DE" b="1" dirty="0" err="1"/>
+              <a:t>independently</a:t>
+            </a:r>
+            <a:r>
+              <a:rPr lang="de-DE" dirty="0"/>
+              <a:t> </a:t>
+            </a:r>
+            <a:r>
+              <a:rPr lang="de-DE" dirty="0" err="1"/>
+              <a:t>into</a:t>
+            </a:r>
+            <a:r>
+              <a:rPr lang="de-DE" dirty="0"/>
+              <a:t> </a:t>
+            </a:r>
+            <a:r>
+              <a:rPr lang="de-DE" dirty="0" err="1"/>
+              <a:t>logits</a:t>
+            </a:r>
+            <a:r>
+              <a:rPr lang="de-DE" dirty="0"/>
+              <a:t> (</a:t>
+            </a:r>
+            <a:r>
+              <a:rPr lang="de-DE" dirty="0" err="1"/>
+              <a:t>usually</a:t>
+            </a:r>
+            <a:r>
+              <a:rPr lang="de-DE" dirty="0"/>
+              <a:t> </a:t>
+            </a:r>
+            <a:r>
+              <a:rPr lang="de-DE" dirty="0" err="1"/>
+              <a:t>over</a:t>
+            </a:r>
+            <a:r>
+              <a:rPr lang="de-DE" dirty="0"/>
+              <a:t> </a:t>
+            </a:r>
+            <a:r>
+              <a:rPr lang="de-DE" dirty="0" err="1"/>
+              <a:t>entity</a:t>
+            </a:r>
+            <a:r>
+              <a:rPr lang="de-DE" dirty="0"/>
+              <a:t> </a:t>
+            </a:r>
+            <a:r>
+              <a:rPr lang="de-DE" dirty="0" err="1"/>
+              <a:t>labels</a:t>
+            </a:r>
+            <a:r>
+              <a:rPr lang="de-DE" dirty="0"/>
+              <a:t>).</a:t>
+            </a:r>
+          </a:p>
+          <a:p>
+            <a:pPr marL="0" indent="0">
+              <a:buNone/>
+            </a:pPr>
+            <a:r>
+              <a:rPr lang="de-DE" dirty="0" err="1"/>
+              <a:t>No</a:t>
+            </a:r>
+            <a:r>
+              <a:rPr lang="de-DE" dirty="0"/>
+              <a:t> </a:t>
+            </a:r>
+            <a:r>
+              <a:rPr lang="de-DE" dirty="0" err="1"/>
+              <a:t>pooling</a:t>
+            </a:r>
+            <a:r>
+              <a:rPr lang="de-DE" dirty="0"/>
+              <a:t>, </a:t>
+            </a:r>
+            <a:r>
+              <a:rPr lang="de-DE" dirty="0" err="1"/>
+              <a:t>because</a:t>
+            </a:r>
+            <a:r>
+              <a:rPr lang="de-DE" dirty="0"/>
+              <a:t> </a:t>
+            </a:r>
+            <a:r>
+              <a:rPr lang="de-DE" dirty="0" err="1"/>
+              <a:t>you</a:t>
+            </a:r>
+            <a:r>
+              <a:rPr lang="de-DE" dirty="0"/>
+              <a:t> </a:t>
+            </a:r>
+            <a:r>
+              <a:rPr lang="de-DE" dirty="0" err="1"/>
+              <a:t>need</a:t>
+            </a:r>
+            <a:r>
+              <a:rPr lang="de-DE" dirty="0"/>
+              <a:t> per-token </a:t>
+            </a:r>
+            <a:r>
+              <a:rPr lang="de-DE" dirty="0" err="1"/>
+              <a:t>predictions</a:t>
+            </a:r>
+            <a:r>
+              <a:rPr lang="de-DE" dirty="0"/>
+              <a:t>.</a:t>
+            </a:r>
+          </a:p>
+          <a:p>
+            <a:pPr marL="0" indent="0">
+              <a:buNone/>
+            </a:pPr>
+            <a:r>
+              <a:rPr lang="de-DE" dirty="0" err="1"/>
+              <a:t>logits_i</a:t>
+            </a:r>
+            <a:r>
+              <a:rPr lang="de-DE" dirty="0"/>
+              <a:t> = </a:t>
+            </a:r>
+            <a:r>
+              <a:rPr lang="de-DE" dirty="0" err="1"/>
+              <a:t>h_i</a:t>
+            </a:r>
+            <a:r>
+              <a:rPr lang="de-DE" dirty="0"/>
+              <a:t> W + b</a:t>
+            </a:r>
+          </a:p>
+        </p:txBody>
+      </p:sp>
+      <p:sp>
+        <p:nvSpPr>
+          <p:cNvPr id="4" name="Foliennummernplatzhalter 3">
+            <a:extLst>
+              <a:ext uri="{FF2B5EF4-FFF2-40B4-BE49-F238E27FC236}">
+                <a16:creationId xmlns:a16="http://schemas.microsoft.com/office/drawing/2014/main" id="{1F870D76-8BA8-B35C-291C-27A5AEB557B8}"/>
               </a:ext>
             </a:extLst>
           </p:cNvPr>
@@ -9607,187 +14425,18 @@
           <a:bodyPr/>
           <a:lstStyle/>
           <a:p>
-            <a:fld id="{3D4C94FE-FF23-4504-88E9-14D481113291}" type="slidenum">
-              <a:rPr lang="en-GB" smtClean="0"/>
+            <a:fld id="{4055531C-5681-6B44-B2CA-926D7A74B06D}" type="slidenum">
+              <a:rPr lang="de-DE" smtClean="0"/>
               <a:t>8</a:t>
             </a:fld>
-            <a:endParaRPr lang="en-GB"/>
-          </a:p>
-        </p:txBody>
-      </p:sp>
-      <p:pic>
-        <p:nvPicPr>
-          <p:cNvPr id="5" name="44F0CE3B-0B30-475E-9AB0-8A52FDC60368" descr="Two-types-of-fine-tuning-techniques-using-pretrained-model-trained-on-ImageNet-The-first.png">
-            <a:extLst>
-              <a:ext uri="{FF2B5EF4-FFF2-40B4-BE49-F238E27FC236}">
-                <a16:creationId xmlns:a16="http://schemas.microsoft.com/office/drawing/2014/main" id="{41955F9F-8537-8F49-68AF-A52D399B0B1D}"/>
-              </a:ext>
-            </a:extLst>
-          </p:cNvPr>
-          <p:cNvPicPr>
-            <a:picLocks noChangeAspect="1" noChangeArrowheads="1"/>
-          </p:cNvPicPr>
-          <p:nvPr/>
-        </p:nvPicPr>
-        <p:blipFill>
-          <a:blip r:embed="rId2">
-            <a:extLst>
-              <a:ext uri="{28A0092B-C50C-407E-A947-70E740481C1C}">
-                <a14:useLocalDpi xmlns:a14="http://schemas.microsoft.com/office/drawing/2010/main" val="0"/>
-              </a:ext>
-            </a:extLst>
-          </a:blip>
-          <a:srcRect/>
-          <a:stretch>
-            <a:fillRect/>
-          </a:stretch>
-        </p:blipFill>
-        <p:spPr bwMode="auto">
-          <a:xfrm>
-            <a:off x="6278098" y="1117410"/>
-            <a:ext cx="5829368" cy="5308358"/>
-          </a:xfrm>
-          <a:prstGeom prst="rect">
-            <a:avLst/>
-          </a:prstGeom>
-          <a:noFill/>
-          <a:ln>
-            <a:noFill/>
-          </a:ln>
-          <a:extLst>
-            <a:ext uri="{909E8E84-426E-40DD-AFC4-6F175D3DCCD1}">
-              <a14:hiddenFill xmlns:a14="http://schemas.microsoft.com/office/drawing/2010/main">
-                <a:solidFill>
-                  <a:srgbClr val="FFFFFF"/>
-                </a:solidFill>
-              </a14:hiddenFill>
-            </a:ext>
-            <a:ext uri="{91240B29-F687-4F45-9708-019B960494DF}">
-              <a14:hiddenLine xmlns:a14="http://schemas.microsoft.com/office/drawing/2010/main" w="9525">
-                <a:solidFill>
-                  <a:srgbClr val="000000"/>
-                </a:solidFill>
-                <a:miter lim="800000"/>
-                <a:headEnd/>
-                <a:tailEnd/>
-              </a14:hiddenLine>
-            </a:ext>
-          </a:extLst>
-        </p:spPr>
-      </p:pic>
-      <p:sp>
-        <p:nvSpPr>
-          <p:cNvPr id="6" name="TextBox 5">
-            <a:extLst>
-              <a:ext uri="{FF2B5EF4-FFF2-40B4-BE49-F238E27FC236}">
-                <a16:creationId xmlns:a16="http://schemas.microsoft.com/office/drawing/2014/main" id="{2FEDA80F-387A-F82C-BB62-44CC7DCEF2FD}"/>
-              </a:ext>
-            </a:extLst>
-          </p:cNvPr>
-          <p:cNvSpPr txBox="1"/>
-          <p:nvPr/>
-        </p:nvSpPr>
-        <p:spPr>
-          <a:xfrm>
-            <a:off x="7230529" y="6538912"/>
-            <a:ext cx="532518" cy="246221"/>
-          </a:xfrm>
-          <a:prstGeom prst="rect">
-            <a:avLst/>
-          </a:prstGeom>
-          <a:noFill/>
-        </p:spPr>
-        <p:txBody>
-          <a:bodyPr wrap="none" rtlCol="0">
-            <a:spAutoFit/>
-          </a:bodyPr>
-          <a:lstStyle/>
-          <a:p>
-            <a:r>
-              <a:rPr lang="de-DE" sz="1000" dirty="0">
-                <a:hlinkClick r:id="rId3"/>
-              </a:rPr>
-              <a:t>source</a:t>
-            </a:r>
-            <a:endParaRPr lang="de-DE" sz="1000" dirty="0"/>
-          </a:p>
-        </p:txBody>
-      </p:sp>
-      <p:sp>
-        <p:nvSpPr>
-          <p:cNvPr id="7" name="TextBox 6">
-            <a:extLst>
-              <a:ext uri="{FF2B5EF4-FFF2-40B4-BE49-F238E27FC236}">
-                <a16:creationId xmlns:a16="http://schemas.microsoft.com/office/drawing/2014/main" id="{8E527FE3-CED6-2943-D4A9-D8312B6F38C1}"/>
-              </a:ext>
-            </a:extLst>
-          </p:cNvPr>
-          <p:cNvSpPr txBox="1"/>
-          <p:nvPr/>
-        </p:nvSpPr>
-        <p:spPr>
-          <a:xfrm>
-            <a:off x="6944578" y="291397"/>
-            <a:ext cx="5162888" cy="769441"/>
-          </a:xfrm>
-          <a:prstGeom prst="rect">
-            <a:avLst/>
-          </a:prstGeom>
-          <a:noFill/>
-        </p:spPr>
-        <p:txBody>
-          <a:bodyPr wrap="none" rtlCol="0">
-            <a:spAutoFit/>
-          </a:bodyPr>
-          <a:lstStyle/>
-          <a:p>
-            <a:r>
-              <a:rPr lang="de-DE" sz="2200" dirty="0"/>
-              <a:t>options: finetune all weights or just </a:t>
-            </a:r>
-            <a:r>
-              <a:rPr lang="de-DE" sz="2200" dirty="0" err="1"/>
-              <a:t>some</a:t>
-            </a:r>
-            <a:endParaRPr lang="de-DE" sz="2200" dirty="0"/>
-          </a:p>
-          <a:p>
-            <a:r>
-              <a:rPr lang="de-DE" sz="2200" dirty="0"/>
-              <a:t>(</a:t>
-            </a:r>
-            <a:r>
-              <a:rPr lang="de-DE" sz="2200" dirty="0" err="1"/>
-              <a:t>image</a:t>
-            </a:r>
-            <a:r>
-              <a:rPr lang="de-DE" sz="2200" dirty="0"/>
-              <a:t> </a:t>
-            </a:r>
-            <a:r>
-              <a:rPr lang="de-DE" sz="2200" dirty="0" err="1"/>
-              <a:t>classfication</a:t>
-            </a:r>
-            <a:r>
-              <a:rPr lang="de-DE" sz="2200" dirty="0"/>
-              <a:t> </a:t>
-            </a:r>
-            <a:r>
-              <a:rPr lang="de-DE" sz="2200" dirty="0" err="1"/>
-              <a:t>example</a:t>
-            </a:r>
-            <a:r>
-              <a:rPr lang="de-DE" sz="2200" dirty="0"/>
-              <a:t>)</a:t>
-            </a:r>
-            <a:endParaRPr lang="en-GB" sz="2200" dirty="0"/>
+            <a:endParaRPr lang="de-DE"/>
           </a:p>
         </p:txBody>
       </p:sp>
     </p:spTree>
     <p:extLst>
       <p:ext uri="{BB962C8B-B14F-4D97-AF65-F5344CB8AC3E}">
-        <p14:creationId xmlns:p14="http://schemas.microsoft.com/office/powerpoint/2010/main" val="880903615"/>
+        <p14:creationId xmlns:p14="http://schemas.microsoft.com/office/powerpoint/2010/main" val="1781625330"/>
       </p:ext>
     </p:extLst>
   </p:cSld>
@@ -9816,10 +14465,10 @@
       </p:grpSpPr>
       <p:sp>
         <p:nvSpPr>
-          <p:cNvPr id="2" name="Title 1">
-            <a:extLst>
-              <a:ext uri="{FF2B5EF4-FFF2-40B4-BE49-F238E27FC236}">
-                <a16:creationId xmlns:a16="http://schemas.microsoft.com/office/drawing/2014/main" id="{3EC70418-8F83-3C9E-7A93-DF61EC41A1E3}"/>
+          <p:cNvPr id="2" name="Titel 1">
+            <a:extLst>
+              <a:ext uri="{FF2B5EF4-FFF2-40B4-BE49-F238E27FC236}">
+                <a16:creationId xmlns:a16="http://schemas.microsoft.com/office/drawing/2014/main" id="{B17F9850-863B-4A7C-99A5-A8ED55900FF3}"/>
               </a:ext>
             </a:extLst>
           </p:cNvPr>
@@ -9835,19 +14484,16 @@
           <a:bodyPr/>
           <a:lstStyle/>
           <a:p>
-            <a:r>
-              <a:rPr lang="en-GB" dirty="0"/>
-              <a:t>Finetuning Scenarios</a:t>
-            </a:r>
-          </a:p>
-        </p:txBody>
-      </p:sp>
-      <p:sp>
-        <p:nvSpPr>
-          <p:cNvPr id="3" name="Content Placeholder 2">
-            <a:extLst>
-              <a:ext uri="{FF2B5EF4-FFF2-40B4-BE49-F238E27FC236}">
-                <a16:creationId xmlns:a16="http://schemas.microsoft.com/office/drawing/2014/main" id="{6CAFF65F-2B24-83B6-1383-8EC4F9454843}"/>
+            <a:endParaRPr lang="de-DE"/>
+          </a:p>
+        </p:txBody>
+      </p:sp>
+      <p:sp>
+        <p:nvSpPr>
+          <p:cNvPr id="3" name="Inhaltsplatzhalter 2">
+            <a:extLst>
+              <a:ext uri="{FF2B5EF4-FFF2-40B4-BE49-F238E27FC236}">
+                <a16:creationId xmlns:a16="http://schemas.microsoft.com/office/drawing/2014/main" id="{827E124F-2FF1-163C-3201-2FF90B52D75F}"/>
               </a:ext>
             </a:extLst>
           </p:cNvPr>
@@ -9860,147 +14506,224 @@
         </p:nvSpPr>
         <p:spPr/>
         <p:txBody>
-          <a:bodyPr>
-            <a:noAutofit/>
-          </a:bodyPr>
+          <a:bodyPr/>
           <a:lstStyle/>
           <a:p>
             <a:pPr marL="0" indent="0">
               <a:buNone/>
             </a:pPr>
             <a:r>
-              <a:rPr lang="de-DE" sz="2400" dirty="0"/>
-              <a:t>finetuning gives better adjustment to new task than feature extraction (important if new task differs a lot from pretraining task)</a:t>
-            </a:r>
+              <a:rPr lang="de-DE" b="1" dirty="0" err="1"/>
+              <a:t>Sentence</a:t>
+            </a:r>
+            <a:r>
+              <a:rPr lang="de-DE" b="1" dirty="0"/>
+              <a:t> </a:t>
+            </a:r>
+            <a:r>
+              <a:rPr lang="de-DE" b="1" dirty="0" err="1"/>
+              <a:t>similarity</a:t>
+            </a:r>
+            <a:r>
+              <a:rPr lang="de-DE" b="1" dirty="0"/>
+              <a:t> / </a:t>
+            </a:r>
+            <a:r>
+              <a:rPr lang="de-DE" b="1" dirty="0" err="1"/>
+              <a:t>retrieval</a:t>
+            </a:r>
+            <a:endParaRPr lang="de-DE" b="1" dirty="0"/>
           </a:p>
           <a:p>
             <a:pPr marL="0" indent="0">
               <a:buNone/>
             </a:pPr>
             <a:r>
-              <a:rPr lang="en-GB" sz="2400" dirty="0">
-                <a:sym typeface="Wingdings" panose="05000000000000000000" pitchFamily="2" charset="2"/>
-              </a:rPr>
-              <a:t> coming along with </a:t>
-            </a:r>
-            <a:r>
-              <a:rPr lang="en-GB" sz="2400" dirty="0"/>
-              <a:t>danger of overfitting</a:t>
+              <a:rPr lang="de-DE" dirty="0" err="1"/>
+              <a:t>Sometimes</a:t>
+            </a:r>
+            <a:r>
+              <a:rPr lang="de-DE" dirty="0"/>
+              <a:t> </a:t>
+            </a:r>
+            <a:r>
+              <a:rPr lang="de-DE" dirty="0" err="1"/>
+              <a:t>average</a:t>
+            </a:r>
+            <a:r>
+              <a:rPr lang="de-DE" dirty="0"/>
+              <a:t> </a:t>
+            </a:r>
+            <a:r>
+              <a:rPr lang="de-DE" dirty="0" err="1"/>
+              <a:t>pooling</a:t>
+            </a:r>
+            <a:r>
+              <a:rPr lang="de-DE" dirty="0"/>
+              <a:t> (</a:t>
+            </a:r>
+            <a:r>
+              <a:rPr lang="de-DE" dirty="0" err="1"/>
+              <a:t>mean</a:t>
+            </a:r>
+            <a:r>
+              <a:rPr lang="de-DE" dirty="0"/>
+              <a:t> </a:t>
+            </a:r>
+            <a:r>
+              <a:rPr lang="de-DE" dirty="0" err="1"/>
+              <a:t>of</a:t>
+            </a:r>
+            <a:r>
+              <a:rPr lang="de-DE" dirty="0"/>
+              <a:t> all </a:t>
+            </a:r>
+            <a:r>
+              <a:rPr lang="de-DE" dirty="0" err="1"/>
+              <a:t>hidden</a:t>
+            </a:r>
+            <a:r>
+              <a:rPr lang="de-DE" dirty="0"/>
+              <a:t> </a:t>
+            </a:r>
+            <a:r>
+              <a:rPr lang="de-DE" dirty="0" err="1"/>
+              <a:t>states</a:t>
+            </a:r>
+            <a:r>
+              <a:rPr lang="de-DE" dirty="0"/>
+              <a:t>) </a:t>
+            </a:r>
+            <a:r>
+              <a:rPr lang="de-DE" dirty="0" err="1"/>
+              <a:t>is</a:t>
+            </a:r>
+            <a:r>
+              <a:rPr lang="de-DE" dirty="0"/>
+              <a:t> </a:t>
+            </a:r>
+            <a:r>
+              <a:rPr lang="de-DE" dirty="0" err="1"/>
+              <a:t>used</a:t>
+            </a:r>
+            <a:r>
+              <a:rPr lang="de-DE" dirty="0"/>
+              <a:t> </a:t>
+            </a:r>
+            <a:r>
+              <a:rPr lang="de-DE" dirty="0" err="1"/>
+              <a:t>instead</a:t>
+            </a:r>
+            <a:r>
+              <a:rPr lang="de-DE" dirty="0"/>
+              <a:t> </a:t>
+            </a:r>
+            <a:r>
+              <a:rPr lang="de-DE" dirty="0" err="1"/>
+              <a:t>of</a:t>
+            </a:r>
+            <a:r>
+              <a:rPr lang="de-DE" dirty="0"/>
+              <a:t> [CLS], </a:t>
+            </a:r>
+            <a:r>
+              <a:rPr lang="de-DE" dirty="0" err="1"/>
+              <a:t>because</a:t>
+            </a:r>
+            <a:r>
+              <a:rPr lang="de-DE" dirty="0"/>
+              <a:t> </a:t>
+            </a:r>
+            <a:r>
+              <a:rPr lang="de-DE" dirty="0" err="1"/>
+              <a:t>it</a:t>
+            </a:r>
+            <a:r>
+              <a:rPr lang="de-DE" dirty="0"/>
+              <a:t> </a:t>
+            </a:r>
+            <a:r>
+              <a:rPr lang="de-DE" dirty="0" err="1"/>
+              <a:t>gives</a:t>
+            </a:r>
+            <a:r>
+              <a:rPr lang="de-DE" dirty="0"/>
+              <a:t> a smoother </a:t>
+            </a:r>
+            <a:r>
+              <a:rPr lang="de-DE" dirty="0" err="1"/>
+              <a:t>representation</a:t>
+            </a:r>
+            <a:r>
+              <a:rPr lang="de-DE" dirty="0"/>
+              <a:t> </a:t>
+            </a:r>
+            <a:r>
+              <a:rPr lang="de-DE" dirty="0" err="1"/>
+              <a:t>for</a:t>
+            </a:r>
+            <a:r>
+              <a:rPr lang="de-DE" dirty="0"/>
+              <a:t> </a:t>
+            </a:r>
+            <a:r>
+              <a:rPr lang="de-DE" dirty="0" err="1"/>
+              <a:t>embeddings</a:t>
+            </a:r>
+            <a:r>
+              <a:rPr lang="de-DE" dirty="0"/>
+              <a:t>.</a:t>
             </a:r>
           </a:p>
           <a:p>
             <a:pPr marL="0" indent="0">
               <a:buNone/>
             </a:pPr>
-            <a:endParaRPr lang="en-GB" sz="2400" dirty="0"/>
-          </a:p>
-          <a:p>
-            <a:pPr marL="0" indent="0">
-              <a:buNone/>
-            </a:pPr>
-            <a:r>
-              <a:rPr lang="en-GB" sz="2400" dirty="0"/>
-              <a:t>features more generic in early layers (</a:t>
-            </a:r>
-            <a:r>
-              <a:rPr lang="de-DE" sz="2400" dirty="0"/>
-              <a:t>e.g., </a:t>
-            </a:r>
-            <a:r>
-              <a:rPr lang="de-DE" sz="2400" dirty="0" err="1"/>
-              <a:t>token</a:t>
-            </a:r>
-            <a:r>
-              <a:rPr lang="de-DE" sz="2400" dirty="0"/>
-              <a:t> </a:t>
-            </a:r>
-            <a:r>
-              <a:rPr lang="de-DE" sz="2400" dirty="0" err="1"/>
-              <a:t>structure</a:t>
-            </a:r>
-            <a:r>
-              <a:rPr lang="de-DE" sz="2400" dirty="0"/>
-              <a:t>, </a:t>
-            </a:r>
-            <a:r>
-              <a:rPr lang="de-DE" sz="2400" dirty="0" err="1"/>
-              <a:t>syntax</a:t>
-            </a:r>
-            <a:r>
-              <a:rPr lang="de-DE" sz="2400" dirty="0"/>
-              <a:t>, </a:t>
-            </a:r>
-            <a:r>
-              <a:rPr lang="de-DE" sz="2400" dirty="0" err="1"/>
-              <a:t>part-of-speech</a:t>
-            </a:r>
-            <a:r>
-              <a:rPr lang="en-GB" sz="2400" dirty="0"/>
-              <a:t>) and more specific to the pretraining data in later layers (</a:t>
-            </a:r>
-            <a:r>
-              <a:rPr lang="de-DE" sz="2400" dirty="0"/>
-              <a:t>e.g., </a:t>
-            </a:r>
-            <a:r>
-              <a:rPr lang="de-DE" sz="2400" dirty="0" err="1"/>
-              <a:t>word</a:t>
-            </a:r>
-            <a:r>
-              <a:rPr lang="de-DE" sz="2400" dirty="0"/>
-              <a:t> sense, </a:t>
-            </a:r>
-            <a:r>
-              <a:rPr lang="de-DE" sz="2400" dirty="0" err="1"/>
-              <a:t>entity</a:t>
-            </a:r>
-            <a:r>
-              <a:rPr lang="de-DE" sz="2400" dirty="0"/>
-              <a:t> </a:t>
-            </a:r>
-            <a:r>
-              <a:rPr lang="de-DE" sz="2400" dirty="0" err="1"/>
-              <a:t>linking</a:t>
-            </a:r>
-            <a:r>
-              <a:rPr lang="en-GB" sz="2400" dirty="0"/>
-              <a:t>)</a:t>
-            </a:r>
-          </a:p>
-          <a:p>
-            <a:pPr marL="0" indent="0">
-              <a:buNone/>
-            </a:pPr>
-            <a:r>
-              <a:rPr lang="en-GB" sz="2400" dirty="0">
-                <a:sym typeface="Wingdings" panose="05000000000000000000" pitchFamily="2" charset="2"/>
-              </a:rPr>
-              <a:t> for small finetuning data sets, typically keep weights of early layers fixed to avoid overfitting</a:t>
-            </a:r>
-          </a:p>
-          <a:p>
-            <a:pPr marL="0" indent="0">
-              <a:buNone/>
-            </a:pPr>
-            <a:endParaRPr lang="en-GB" sz="2400" dirty="0"/>
-          </a:p>
-          <a:p>
-            <a:pPr marL="0" indent="0">
-              <a:buNone/>
-            </a:pPr>
-            <a:r>
-              <a:rPr lang="en-GB" sz="2400" dirty="0"/>
-              <a:t>for large finetuning data sets (less danger of overfitting), finetuning all layers can be beneficial</a:t>
-            </a:r>
-          </a:p>
-        </p:txBody>
-      </p:sp>
-      <p:sp>
-        <p:nvSpPr>
-          <p:cNvPr id="4" name="Slide Number Placeholder 3">
-            <a:extLst>
-              <a:ext uri="{FF2B5EF4-FFF2-40B4-BE49-F238E27FC236}">
-                <a16:creationId xmlns:a16="http://schemas.microsoft.com/office/drawing/2014/main" id="{61A47A66-9C27-B5A5-879C-001B250652C9}"/>
+            <a:r>
+              <a:rPr lang="de-DE" dirty="0" err="1"/>
+              <a:t>That’s</a:t>
+            </a:r>
+            <a:r>
+              <a:rPr lang="de-DE" dirty="0"/>
+              <a:t> </a:t>
+            </a:r>
+            <a:r>
+              <a:rPr lang="de-DE" dirty="0" err="1"/>
+              <a:t>what</a:t>
+            </a:r>
+            <a:r>
+              <a:rPr lang="de-DE" dirty="0"/>
+              <a:t> </a:t>
+            </a:r>
+            <a:r>
+              <a:rPr lang="de-DE" b="1" dirty="0" err="1"/>
+              <a:t>Sentence</a:t>
+            </a:r>
+            <a:r>
+              <a:rPr lang="de-DE" b="1" dirty="0"/>
+              <a:t>-BERT (SBERT)</a:t>
+            </a:r>
+            <a:r>
+              <a:rPr lang="de-DE" dirty="0"/>
+              <a:t> </a:t>
+            </a:r>
+            <a:r>
+              <a:rPr lang="de-DE" dirty="0" err="1"/>
+              <a:t>does</a:t>
+            </a:r>
+            <a:r>
+              <a:rPr lang="de-DE" dirty="0"/>
+              <a:t>.</a:t>
+            </a:r>
+          </a:p>
+        </p:txBody>
+      </p:sp>
+      <p:sp>
+        <p:nvSpPr>
+          <p:cNvPr id="4" name="Foliennummernplatzhalter 3">
+            <a:extLst>
+              <a:ext uri="{FF2B5EF4-FFF2-40B4-BE49-F238E27FC236}">
+                <a16:creationId xmlns:a16="http://schemas.microsoft.com/office/drawing/2014/main" id="{F3FA2F52-7FFF-92B0-F7A7-623ED745F3E6}"/>
               </a:ext>
             </a:extLst>
           </p:cNvPr>
@@ -10016,18 +14739,18 @@
           <a:bodyPr/>
           <a:lstStyle/>
           <a:p>
-            <a:fld id="{3D4C94FE-FF23-4504-88E9-14D481113291}" type="slidenum">
-              <a:rPr lang="en-GB" smtClean="0"/>
+            <a:fld id="{4055531C-5681-6B44-B2CA-926D7A74B06D}" type="slidenum">
+              <a:rPr lang="de-DE" smtClean="0"/>
               <a:t>9</a:t>
             </a:fld>
-            <a:endParaRPr lang="en-GB"/>
+            <a:endParaRPr lang="de-DE"/>
           </a:p>
         </p:txBody>
       </p:sp>
     </p:spTree>
     <p:extLst>
       <p:ext uri="{BB962C8B-B14F-4D97-AF65-F5344CB8AC3E}">
-        <p14:creationId xmlns:p14="http://schemas.microsoft.com/office/powerpoint/2010/main" val="2407320420"/>
+        <p14:creationId xmlns:p14="http://schemas.microsoft.com/office/powerpoint/2010/main" val="2476222795"/>
       </p:ext>
     </p:extLst>
   </p:cSld>

--- a/slides/5_finetuning.pptx
+++ b/slides/5_finetuning.pptx
@@ -5,35 +5,36 @@
     <p:sldMasterId id="2147483648" r:id="rId1"/>
   </p:sldMasterIdLst>
   <p:notesMasterIdLst>
-    <p:notesMasterId r:id="rId28"/>
+    <p:notesMasterId r:id="rId29"/>
   </p:notesMasterIdLst>
   <p:sldIdLst>
     <p:sldId id="256" r:id="rId2"/>
     <p:sldId id="792" r:id="rId3"/>
     <p:sldId id="790" r:id="rId4"/>
-    <p:sldId id="811" r:id="rId5"/>
-    <p:sldId id="754" r:id="rId6"/>
-    <p:sldId id="832" r:id="rId7"/>
-    <p:sldId id="816" r:id="rId8"/>
-    <p:sldId id="834" r:id="rId9"/>
-    <p:sldId id="833" r:id="rId10"/>
-    <p:sldId id="815" r:id="rId11"/>
-    <p:sldId id="814" r:id="rId12"/>
-    <p:sldId id="804" r:id="rId13"/>
-    <p:sldId id="812" r:id="rId14"/>
-    <p:sldId id="736" r:id="rId15"/>
-    <p:sldId id="766" r:id="rId16"/>
-    <p:sldId id="280" r:id="rId17"/>
-    <p:sldId id="828" r:id="rId18"/>
-    <p:sldId id="810" r:id="rId19"/>
-    <p:sldId id="829" r:id="rId20"/>
-    <p:sldId id="827" r:id="rId21"/>
-    <p:sldId id="830" r:id="rId22"/>
-    <p:sldId id="800" r:id="rId23"/>
-    <p:sldId id="819" r:id="rId24"/>
-    <p:sldId id="821" r:id="rId25"/>
-    <p:sldId id="831" r:id="rId26"/>
-    <p:sldId id="333" r:id="rId27"/>
+    <p:sldId id="754" r:id="rId5"/>
+    <p:sldId id="832" r:id="rId6"/>
+    <p:sldId id="816" r:id="rId7"/>
+    <p:sldId id="834" r:id="rId8"/>
+    <p:sldId id="833" r:id="rId9"/>
+    <p:sldId id="815" r:id="rId10"/>
+    <p:sldId id="814" r:id="rId11"/>
+    <p:sldId id="804" r:id="rId12"/>
+    <p:sldId id="812" r:id="rId13"/>
+    <p:sldId id="736" r:id="rId14"/>
+    <p:sldId id="766" r:id="rId15"/>
+    <p:sldId id="280" r:id="rId16"/>
+    <p:sldId id="828" r:id="rId17"/>
+    <p:sldId id="810" r:id="rId18"/>
+    <p:sldId id="829" r:id="rId19"/>
+    <p:sldId id="827" r:id="rId20"/>
+    <p:sldId id="830" r:id="rId21"/>
+    <p:sldId id="800" r:id="rId22"/>
+    <p:sldId id="819" r:id="rId23"/>
+    <p:sldId id="821" r:id="rId24"/>
+    <p:sldId id="831" r:id="rId25"/>
+    <p:sldId id="333" r:id="rId26"/>
+    <p:sldId id="837" r:id="rId27"/>
+    <p:sldId id="835" r:id="rId28"/>
   </p:sldIdLst>
   <p:sldSz cx="12192000" cy="6858000"/>
   <p:notesSz cx="6858000" cy="9144000"/>
@@ -3705,7 +3706,7 @@
           <a:p>
             <a:fld id="{17938448-F949-A340-94CF-EFC7FB146DC3}" type="datetimeFigureOut">
               <a:rPr lang="de-DE" smtClean="0"/>
-              <a:t>12.09.25</a:t>
+              <a:t>15.09.25</a:t>
             </a:fld>
             <a:endParaRPr lang="de-DE"/>
           </a:p>
@@ -4119,7 +4120,7 @@
           <a:p>
             <a:fld id="{E5C7ACC2-601D-4B49-AF12-AE7E0A409668}" type="datetime1">
               <a:rPr lang="de-DE" smtClean="0"/>
-              <a:t>12.09.25</a:t>
+              <a:t>15.09.25</a:t>
             </a:fld>
             <a:endParaRPr lang="de-DE"/>
           </a:p>
@@ -4317,7 +4318,7 @@
           <a:p>
             <a:fld id="{B1E06029-94C2-D041-AE64-8D99E258F8A3}" type="datetime1">
               <a:rPr lang="de-DE" smtClean="0"/>
-              <a:t>12.09.25</a:t>
+              <a:t>15.09.25</a:t>
             </a:fld>
             <a:endParaRPr lang="de-DE"/>
           </a:p>
@@ -4525,7 +4526,7 @@
           <a:p>
             <a:fld id="{68EC3790-B7B2-CE44-8ABE-1653D553799B}" type="datetime1">
               <a:rPr lang="de-DE" smtClean="0"/>
-              <a:t>12.09.25</a:t>
+              <a:t>15.09.25</a:t>
             </a:fld>
             <a:endParaRPr lang="de-DE"/>
           </a:p>
@@ -4723,7 +4724,7 @@
           <a:p>
             <a:fld id="{BC54D07D-C13F-4E4C-B9AC-279F2B3CA927}" type="datetime1">
               <a:rPr lang="de-DE" smtClean="0"/>
-              <a:t>12.09.25</a:t>
+              <a:t>15.09.25</a:t>
             </a:fld>
             <a:endParaRPr lang="de-DE"/>
           </a:p>
@@ -4998,7 +4999,7 @@
           <a:p>
             <a:fld id="{E5E61780-2A28-3749-A212-7540F54B9465}" type="datetime1">
               <a:rPr lang="de-DE" smtClean="0"/>
-              <a:t>12.09.25</a:t>
+              <a:t>15.09.25</a:t>
             </a:fld>
             <a:endParaRPr lang="de-DE"/>
           </a:p>
@@ -5263,7 +5264,7 @@
           <a:p>
             <a:fld id="{A8E8D020-F608-DA44-840A-F653D7B34645}" type="datetime1">
               <a:rPr lang="de-DE" smtClean="0"/>
-              <a:t>12.09.25</a:t>
+              <a:t>15.09.25</a:t>
             </a:fld>
             <a:endParaRPr lang="de-DE"/>
           </a:p>
@@ -5675,7 +5676,7 @@
           <a:p>
             <a:fld id="{4E584096-D809-3C4A-B49B-20A875EFDFE8}" type="datetime1">
               <a:rPr lang="de-DE" smtClean="0"/>
-              <a:t>12.09.25</a:t>
+              <a:t>15.09.25</a:t>
             </a:fld>
             <a:endParaRPr lang="de-DE"/>
           </a:p>
@@ -5816,7 +5817,7 @@
           <a:p>
             <a:fld id="{88338CED-7C3B-D243-A7A7-180C1477BFE9}" type="datetime1">
               <a:rPr lang="de-DE" smtClean="0"/>
-              <a:t>12.09.25</a:t>
+              <a:t>15.09.25</a:t>
             </a:fld>
             <a:endParaRPr lang="de-DE"/>
           </a:p>
@@ -5929,7 +5930,7 @@
           <a:p>
             <a:fld id="{38293341-36E1-684C-B37A-E1CF770EFEDF}" type="datetime1">
               <a:rPr lang="de-DE" smtClean="0"/>
-              <a:t>12.09.25</a:t>
+              <a:t>15.09.25</a:t>
             </a:fld>
             <a:endParaRPr lang="de-DE"/>
           </a:p>
@@ -6240,7 +6241,7 @@
           <a:p>
             <a:fld id="{6700489F-99E0-0B4E-AC85-0F547BC7C4E9}" type="datetime1">
               <a:rPr lang="de-DE" smtClean="0"/>
-              <a:t>12.09.25</a:t>
+              <a:t>15.09.25</a:t>
             </a:fld>
             <a:endParaRPr lang="de-DE"/>
           </a:p>
@@ -6528,7 +6529,7 @@
           <a:p>
             <a:fld id="{92068F7F-BE24-2A45-927E-12FDF36DDAB4}" type="datetime1">
               <a:rPr lang="de-DE" smtClean="0"/>
-              <a:t>12.09.25</a:t>
+              <a:t>15.09.25</a:t>
             </a:fld>
             <a:endParaRPr lang="de-DE"/>
           </a:p>
@@ -6769,7 +6770,7 @@
           <a:p>
             <a:fld id="{7E62EDA1-0F0F-7343-82D4-3054E662EA0E}" type="datetime1">
               <a:rPr lang="de-DE" smtClean="0"/>
-              <a:t>12.09.25</a:t>
+              <a:t>15.09.25</a:t>
             </a:fld>
             <a:endParaRPr lang="de-DE"/>
           </a:p>
@@ -7278,7 +7279,7 @@
           <p:cNvPr id="2" name="Titel 1">
             <a:extLst>
               <a:ext uri="{FF2B5EF4-FFF2-40B4-BE49-F238E27FC236}">
-                <a16:creationId xmlns:a16="http://schemas.microsoft.com/office/drawing/2014/main" id="{2893F29B-BD86-3EF8-10C3-E57EA752C0F3}"/>
+                <a16:creationId xmlns:a16="http://schemas.microsoft.com/office/drawing/2014/main" id="{47377014-5C9A-61F9-AEB0-5422FFC74E48}"/>
               </a:ext>
             </a:extLst>
           </p:cNvPr>
@@ -7294,7 +7295,15 @@
           <a:bodyPr/>
           <a:lstStyle/>
           <a:p>
-            <a:endParaRPr lang="de-DE"/>
+            <a:r>
+              <a:rPr lang="de-DE" dirty="0"/>
+              <a:t>BERT </a:t>
+            </a:r>
+            <a:r>
+              <a:rPr lang="de-DE" dirty="0" err="1"/>
+              <a:t>Variants</a:t>
+            </a:r>
+            <a:endParaRPr lang="de-DE" dirty="0"/>
           </a:p>
         </p:txBody>
       </p:sp>
@@ -7303,7 +7312,7 @@
           <p:cNvPr id="3" name="Inhaltsplatzhalter 2">
             <a:extLst>
               <a:ext uri="{FF2B5EF4-FFF2-40B4-BE49-F238E27FC236}">
-                <a16:creationId xmlns:a16="http://schemas.microsoft.com/office/drawing/2014/main" id="{EF684A05-346A-6203-E269-C1F6CFBE41A3}"/>
+                <a16:creationId xmlns:a16="http://schemas.microsoft.com/office/drawing/2014/main" id="{E32E57AC-9AEC-A942-0A0F-644BB5F978B9}"/>
               </a:ext>
             </a:extLst>
           </p:cNvPr>
@@ -7317,7 +7326,7 @@
         <p:spPr/>
         <p:txBody>
           <a:bodyPr>
-            <a:normAutofit fontScale="55000" lnSpcReduction="20000"/>
+            <a:normAutofit/>
           </a:bodyPr>
           <a:lstStyle/>
           <a:p>
@@ -7325,717 +7334,557 @@
               <a:buNone/>
             </a:pPr>
             <a:r>
-              <a:rPr lang="en-GB" dirty="0"/>
-              <a:t>but uses a combination (average pooling or [CLS] token) of the hidden states of every token for projection to vector of logits</a:t>
-            </a:r>
+              <a:rPr lang="de-DE" sz="2400" dirty="0">
+                <a:hlinkClick r:id="rId2"/>
+              </a:rPr>
+              <a:t>RoBERTa</a:t>
+            </a:r>
+            <a:r>
+              <a:rPr lang="de-DE" sz="2400" b="1" dirty="0"/>
+              <a:t>: </a:t>
+            </a:r>
+            <a:r>
+              <a:rPr lang="de-DE" sz="2400" dirty="0" err="1"/>
+              <a:t>improved</a:t>
+            </a:r>
+            <a:r>
+              <a:rPr lang="de-DE" sz="2400" dirty="0"/>
+              <a:t> </a:t>
+            </a:r>
+            <a:r>
+              <a:rPr lang="de-DE" sz="2400" dirty="0" err="1"/>
+              <a:t>performance</a:t>
+            </a:r>
+            <a:endParaRPr lang="de-DE" sz="2400" dirty="0"/>
+          </a:p>
+          <a:p>
+            <a:r>
+              <a:rPr lang="de-DE" sz="1800" dirty="0" err="1"/>
+              <a:t>removed</a:t>
+            </a:r>
+            <a:r>
+              <a:rPr lang="de-DE" sz="1800" dirty="0"/>
+              <a:t> </a:t>
+            </a:r>
+            <a:r>
+              <a:rPr lang="de-DE" sz="1800" dirty="0" err="1"/>
+              <a:t>next</a:t>
+            </a:r>
+            <a:r>
+              <a:rPr lang="de-DE" sz="1800" dirty="0"/>
+              <a:t> </a:t>
+            </a:r>
+            <a:r>
+              <a:rPr lang="de-DE" sz="1800" dirty="0" err="1"/>
+              <a:t>sentence</a:t>
+            </a:r>
+            <a:r>
+              <a:rPr lang="de-DE" sz="1800" dirty="0"/>
+              <a:t> </a:t>
+            </a:r>
+            <a:r>
+              <a:rPr lang="de-DE" sz="1800" dirty="0" err="1"/>
+              <a:t>prediction</a:t>
+            </a:r>
+            <a:r>
+              <a:rPr lang="de-DE" sz="1800" dirty="0"/>
+              <a:t> </a:t>
+            </a:r>
+            <a:r>
+              <a:rPr lang="de-DE" sz="1800" dirty="0" err="1"/>
+              <a:t>as</a:t>
+            </a:r>
+            <a:r>
+              <a:rPr lang="de-DE" sz="1800" dirty="0"/>
+              <a:t> </a:t>
+            </a:r>
+            <a:r>
+              <a:rPr lang="de-DE" sz="1800" dirty="0" err="1"/>
+              <a:t>pretraining</a:t>
+            </a:r>
+            <a:r>
+              <a:rPr lang="de-DE" sz="1800" dirty="0"/>
+              <a:t> </a:t>
+            </a:r>
+            <a:r>
+              <a:rPr lang="de-DE" sz="1800" dirty="0" err="1"/>
+              <a:t>objective</a:t>
+            </a:r>
+            <a:r>
+              <a:rPr lang="de-DE" sz="1800" dirty="0"/>
+              <a:t> and …</a:t>
+            </a:r>
+          </a:p>
+          <a:p>
+            <a:r>
+              <a:rPr lang="de-DE" sz="1800" dirty="0"/>
+              <a:t>~</a:t>
+            </a:r>
+            <a:r>
+              <a:rPr lang="de-DE" sz="1800" dirty="0" err="1"/>
+              <a:t>ten</a:t>
+            </a:r>
+            <a:r>
+              <a:rPr lang="de-DE" sz="1800" dirty="0"/>
+              <a:t> </a:t>
+            </a:r>
+            <a:r>
+              <a:rPr lang="de-DE" sz="1800" dirty="0" err="1"/>
+              <a:t>times</a:t>
+            </a:r>
+            <a:r>
+              <a:rPr lang="de-DE" sz="1800" dirty="0"/>
+              <a:t> </a:t>
+            </a:r>
+            <a:r>
+              <a:rPr lang="de-DE" sz="1800" dirty="0" err="1"/>
+              <a:t>more</a:t>
+            </a:r>
+            <a:r>
+              <a:rPr lang="de-DE" sz="1800" dirty="0"/>
+              <a:t> </a:t>
+            </a:r>
+            <a:r>
+              <a:rPr lang="de-DE" sz="1800" dirty="0" err="1"/>
+              <a:t>training</a:t>
+            </a:r>
+            <a:r>
+              <a:rPr lang="de-DE" sz="1800" dirty="0"/>
+              <a:t> </a:t>
+            </a:r>
+            <a:r>
+              <a:rPr lang="de-DE" sz="1800" dirty="0" err="1"/>
+              <a:t>data</a:t>
+            </a:r>
+            <a:r>
+              <a:rPr lang="de-DE" sz="1800" dirty="0"/>
+              <a:t>, </a:t>
+            </a:r>
+            <a:r>
+              <a:rPr lang="de-DE" sz="1800" dirty="0" err="1"/>
+              <a:t>longer</a:t>
+            </a:r>
+            <a:r>
+              <a:rPr lang="de-DE" sz="1800" dirty="0"/>
+              <a:t> </a:t>
+            </a:r>
+            <a:r>
+              <a:rPr lang="de-DE" sz="1800" dirty="0" err="1"/>
+              <a:t>training</a:t>
+            </a:r>
+            <a:r>
+              <a:rPr lang="de-DE" sz="1800" dirty="0"/>
+              <a:t>, larger </a:t>
+            </a:r>
+            <a:r>
+              <a:rPr lang="de-DE" sz="1800" dirty="0" err="1"/>
+              <a:t>batches</a:t>
+            </a:r>
+            <a:r>
+              <a:rPr lang="de-DE" sz="1800" dirty="0"/>
+              <a:t>, </a:t>
+            </a:r>
+            <a:r>
+              <a:rPr lang="de-DE" sz="1800" dirty="0" err="1"/>
+              <a:t>longer</a:t>
+            </a:r>
+            <a:r>
+              <a:rPr lang="de-DE" sz="1800" dirty="0"/>
+              <a:t> </a:t>
+            </a:r>
+            <a:r>
+              <a:rPr lang="de-DE" sz="1800" dirty="0" err="1"/>
+              <a:t>sequences</a:t>
+            </a:r>
+            <a:endParaRPr lang="de-DE" sz="1800" dirty="0"/>
+          </a:p>
+          <a:p>
+            <a:r>
+              <a:rPr lang="de-DE" sz="1800" dirty="0" err="1"/>
+              <a:t>dynamic</a:t>
+            </a:r>
+            <a:r>
+              <a:rPr lang="de-DE" sz="1800" dirty="0"/>
+              <a:t> </a:t>
+            </a:r>
+            <a:r>
+              <a:rPr lang="de-DE" sz="1800" dirty="0" err="1"/>
+              <a:t>masking</a:t>
+            </a:r>
+            <a:r>
+              <a:rPr lang="de-DE" sz="1800" dirty="0"/>
+              <a:t>: </a:t>
+            </a:r>
+            <a:r>
+              <a:rPr lang="de-DE" sz="1800" dirty="0" err="1"/>
+              <a:t>instead</a:t>
+            </a:r>
+            <a:r>
+              <a:rPr lang="de-DE" sz="1800" dirty="0"/>
+              <a:t> </a:t>
+            </a:r>
+            <a:r>
+              <a:rPr lang="de-DE" sz="1800" dirty="0" err="1"/>
+              <a:t>of</a:t>
+            </a:r>
+            <a:r>
+              <a:rPr lang="de-DE" sz="1800" dirty="0"/>
+              <a:t> </a:t>
+            </a:r>
+            <a:r>
+              <a:rPr lang="de-DE" sz="1800" dirty="0" err="1"/>
+              <a:t>fixed</a:t>
+            </a:r>
+            <a:r>
+              <a:rPr lang="de-DE" sz="1800" dirty="0"/>
+              <a:t> </a:t>
+            </a:r>
+            <a:r>
+              <a:rPr lang="de-DE" sz="1800" dirty="0" err="1"/>
+              <a:t>masked</a:t>
+            </a:r>
+            <a:r>
+              <a:rPr lang="de-DE" sz="1800" dirty="0"/>
+              <a:t> </a:t>
+            </a:r>
+            <a:r>
+              <a:rPr lang="de-DE" sz="1800" dirty="0" err="1"/>
+              <a:t>tokens</a:t>
+            </a:r>
+            <a:r>
+              <a:rPr lang="de-DE" sz="1800" dirty="0"/>
+              <a:t> </a:t>
+            </a:r>
+            <a:r>
+              <a:rPr lang="de-DE" sz="1800" dirty="0" err="1"/>
+              <a:t>for</a:t>
+            </a:r>
+            <a:r>
+              <a:rPr lang="de-DE" sz="1800" dirty="0"/>
+              <a:t> </a:t>
+            </a:r>
+            <a:r>
+              <a:rPr lang="de-DE" sz="1800" dirty="0" err="1"/>
+              <a:t>each</a:t>
+            </a:r>
+            <a:r>
+              <a:rPr lang="de-DE" sz="1800" dirty="0"/>
+              <a:t> </a:t>
+            </a:r>
+            <a:r>
+              <a:rPr lang="de-DE" sz="1800" dirty="0" err="1"/>
+              <a:t>sequence</a:t>
+            </a:r>
+            <a:r>
+              <a:rPr lang="de-DE" sz="1800" dirty="0"/>
+              <a:t>, </a:t>
+            </a:r>
+            <a:r>
+              <a:rPr lang="de-DE" sz="1800" dirty="0" err="1"/>
+              <a:t>masks</a:t>
+            </a:r>
+            <a:r>
+              <a:rPr lang="de-DE" sz="1800" dirty="0"/>
+              <a:t> </a:t>
+            </a:r>
+            <a:r>
+              <a:rPr lang="de-DE" sz="1800" dirty="0" err="1"/>
+              <a:t>change</a:t>
+            </a:r>
+            <a:r>
+              <a:rPr lang="de-DE" sz="1800" dirty="0"/>
+              <a:t> </a:t>
+            </a:r>
+            <a:r>
+              <a:rPr lang="de-DE" sz="1800" dirty="0" err="1"/>
+              <a:t>each</a:t>
+            </a:r>
+            <a:r>
+              <a:rPr lang="de-DE" sz="1800" dirty="0"/>
+              <a:t> </a:t>
+            </a:r>
+            <a:r>
+              <a:rPr lang="de-DE" sz="1800" dirty="0" err="1"/>
+              <a:t>epoch</a:t>
+            </a:r>
+            <a:endParaRPr lang="de-DE" sz="1800" dirty="0"/>
           </a:p>
           <a:p>
             <a:pPr marL="0" indent="0">
               <a:buNone/>
             </a:pPr>
-            <a:endParaRPr lang="de-DE" dirty="0">
-              <a:hlinkClick r:id="rId2"/>
-            </a:endParaRPr>
+            <a:endParaRPr lang="de-DE" sz="2400" dirty="0"/>
           </a:p>
           <a:p>
             <a:pPr marL="0" indent="0">
               <a:buNone/>
             </a:pPr>
             <a:r>
-              <a:rPr lang="en-DE">
-                <a:hlinkClick r:id="rId2"/>
+              <a:rPr lang="de-DE" sz="2400" dirty="0" err="1">
+                <a:hlinkClick r:id="rId3"/>
               </a:rPr>
-              <a:t>BERT</a:t>
-            </a:r>
-            <a:r>
-              <a:rPr lang="de-DE" dirty="0"/>
-              <a:t> (</a:t>
-            </a:r>
-            <a:r>
-              <a:rPr lang="de-DE" dirty="0" err="1"/>
-              <a:t>uses</a:t>
-            </a:r>
-            <a:r>
-              <a:rPr lang="de-DE" dirty="0"/>
-              <a:t> </a:t>
-            </a:r>
-            <a:r>
-              <a:rPr lang="en-GB" dirty="0"/>
-              <a:t>next-sentence prediction as additional pretraining objective</a:t>
-            </a:r>
-            <a:r>
-              <a:rPr lang="de-DE" dirty="0"/>
-              <a:t>)</a:t>
-            </a:r>
-          </a:p>
-          <a:p>
-            <a:pPr marL="0" indent="0">
-              <a:buNone/>
-            </a:pPr>
-            <a:endParaRPr lang="de-DE" dirty="0"/>
-          </a:p>
-          <a:p>
-            <a:r>
-              <a:rPr lang="de-DE" dirty="0" err="1"/>
-              <a:t>For</a:t>
-            </a:r>
-            <a:r>
-              <a:rPr lang="de-DE" dirty="0"/>
-              <a:t> </a:t>
-            </a:r>
-            <a:r>
-              <a:rPr lang="de-DE" dirty="0" err="1"/>
-              <a:t>each</a:t>
-            </a:r>
-            <a:r>
-              <a:rPr lang="de-DE" dirty="0"/>
-              <a:t> </a:t>
-            </a:r>
-            <a:r>
-              <a:rPr lang="de-DE" dirty="0" err="1"/>
-              <a:t>token</a:t>
-            </a:r>
-            <a:r>
-              <a:rPr lang="de-DE" dirty="0"/>
-              <a:t> </a:t>
-            </a:r>
-            <a:r>
-              <a:rPr lang="de-DE" dirty="0" err="1"/>
-              <a:t>selected</a:t>
-            </a:r>
-            <a:r>
-              <a:rPr lang="de-DE" dirty="0"/>
-              <a:t> </a:t>
-            </a:r>
-            <a:r>
-              <a:rPr lang="de-DE" dirty="0" err="1"/>
-              <a:t>for</a:t>
-            </a:r>
-            <a:r>
-              <a:rPr lang="de-DE" dirty="0"/>
-              <a:t> </a:t>
-            </a:r>
-            <a:r>
-              <a:rPr lang="de-DE" dirty="0" err="1"/>
-              <a:t>masking</a:t>
-            </a:r>
-            <a:r>
-              <a:rPr lang="de-DE" dirty="0"/>
-              <a:t> (15% </a:t>
-            </a:r>
-            <a:r>
-              <a:rPr lang="de-DE" dirty="0" err="1"/>
+              <a:t>DistilBERT</a:t>
+            </a:r>
+            <a:r>
+              <a:rPr lang="de-DE" sz="2400" dirty="0"/>
+              <a:t>: </a:t>
+            </a:r>
+            <a:r>
+              <a:rPr lang="de-DE" sz="2400" dirty="0" err="1"/>
+              <a:t>much</a:t>
+            </a:r>
+            <a:r>
+              <a:rPr lang="de-DE" sz="2400" dirty="0"/>
+              <a:t> </a:t>
+            </a:r>
+            <a:r>
+              <a:rPr lang="de-DE" sz="2400" dirty="0" err="1"/>
+              <a:t>lighter</a:t>
+            </a:r>
+            <a:r>
+              <a:rPr lang="de-DE" sz="2400" dirty="0"/>
+              <a:t> and </a:t>
+            </a:r>
+            <a:r>
+              <a:rPr lang="de-DE" sz="2400" dirty="0" err="1"/>
+              <a:t>faster</a:t>
+            </a:r>
+            <a:r>
+              <a:rPr lang="de-DE" sz="2400" dirty="0"/>
+              <a:t>, </a:t>
+            </a:r>
+            <a:r>
+              <a:rPr lang="de-DE" sz="2400" dirty="0" err="1"/>
+              <a:t>retaining</a:t>
+            </a:r>
+            <a:r>
+              <a:rPr lang="de-DE" sz="2400" dirty="0"/>
+              <a:t> ~95% </a:t>
+            </a:r>
+            <a:r>
+              <a:rPr lang="de-DE" sz="2400" dirty="0" err="1"/>
               <a:t>of</a:t>
             </a:r>
             <a:r>
-              <a:rPr lang="de-DE" dirty="0"/>
-              <a:t> all </a:t>
-            </a:r>
-            <a:r>
-              <a:rPr lang="de-DE" dirty="0" err="1"/>
-              <a:t>tokens</a:t>
-            </a:r>
-            <a:r>
-              <a:rPr lang="de-DE" dirty="0"/>
-              <a:t>):</a:t>
-            </a:r>
-          </a:p>
-          <a:p>
-            <a:r>
-              <a:rPr lang="de-DE" b="1" dirty="0"/>
-              <a:t>80% </a:t>
-            </a:r>
-            <a:r>
-              <a:rPr lang="de-DE" b="1" dirty="0" err="1"/>
-              <a:t>of</a:t>
-            </a:r>
-            <a:r>
-              <a:rPr lang="de-DE" b="1" dirty="0"/>
-              <a:t> </a:t>
-            </a:r>
-            <a:r>
-              <a:rPr lang="de-DE" b="1" dirty="0" err="1"/>
+              <a:rPr lang="de-DE" sz="2400" dirty="0"/>
+              <a:t> </a:t>
+            </a:r>
+            <a:r>
+              <a:rPr lang="de-DE" sz="2400" dirty="0" err="1"/>
+              <a:t>BERT’s</a:t>
+            </a:r>
+            <a:r>
+              <a:rPr lang="de-DE" sz="2400" dirty="0"/>
+              <a:t> </a:t>
+            </a:r>
+            <a:r>
+              <a:rPr lang="de-DE" sz="2400" dirty="0" err="1"/>
+              <a:t>performance</a:t>
+            </a:r>
+            <a:endParaRPr lang="de-DE" sz="2400" dirty="0"/>
+          </a:p>
+          <a:p>
+            <a:r>
+              <a:rPr lang="de-DE" sz="1800" dirty="0"/>
+              <a:t>a </a:t>
+            </a:r>
+            <a:r>
+              <a:rPr lang="de-DE" sz="1800" dirty="0" err="1"/>
+              <a:t>smaller</a:t>
+            </a:r>
+            <a:r>
+              <a:rPr lang="de-DE" sz="1800" dirty="0"/>
+              <a:t> “</a:t>
+            </a:r>
+            <a:r>
+              <a:rPr lang="de-DE" sz="1800" dirty="0" err="1"/>
+              <a:t>student</a:t>
+            </a:r>
+            <a:r>
+              <a:rPr lang="de-DE" sz="1800" dirty="0"/>
+              <a:t>” </a:t>
+            </a:r>
+            <a:r>
+              <a:rPr lang="de-DE" sz="1800" dirty="0" err="1"/>
+              <a:t>model</a:t>
+            </a:r>
+            <a:r>
+              <a:rPr lang="de-DE" sz="1800" dirty="0"/>
+              <a:t> </a:t>
+            </a:r>
+            <a:r>
+              <a:rPr lang="de-DE" sz="1800" dirty="0" err="1"/>
+              <a:t>is</a:t>
+            </a:r>
+            <a:r>
+              <a:rPr lang="de-DE" sz="1800" dirty="0"/>
+              <a:t> </a:t>
+            </a:r>
+            <a:r>
+              <a:rPr lang="de-DE" sz="1800" dirty="0" err="1"/>
+              <a:t>trained</a:t>
+            </a:r>
+            <a:r>
+              <a:rPr lang="de-DE" sz="1800" dirty="0"/>
+              <a:t> </a:t>
+            </a:r>
+            <a:r>
+              <a:rPr lang="de-DE" sz="1800" dirty="0" err="1"/>
+              <a:t>to</a:t>
+            </a:r>
+            <a:r>
+              <a:rPr lang="de-DE" sz="1800" dirty="0"/>
+              <a:t> </a:t>
+            </a:r>
+            <a:r>
+              <a:rPr lang="de-DE" sz="1800" dirty="0" err="1"/>
+              <a:t>mimic</a:t>
+            </a:r>
+            <a:r>
+              <a:rPr lang="de-DE" sz="1800" dirty="0"/>
+              <a:t> </a:t>
+            </a:r>
+            <a:r>
+              <a:rPr lang="de-DE" sz="1800" dirty="0" err="1"/>
+              <a:t>BERT’s</a:t>
+            </a:r>
+            <a:r>
+              <a:rPr lang="de-DE" sz="1800" dirty="0"/>
+              <a:t> </a:t>
+            </a:r>
+            <a:r>
+              <a:rPr lang="de-DE" sz="1800" dirty="0" err="1"/>
+              <a:t>predictions</a:t>
+            </a:r>
+            <a:endParaRPr lang="de-DE" sz="1800" dirty="0"/>
+          </a:p>
+          <a:p>
+            <a:r>
+              <a:rPr lang="de-DE" sz="1800" dirty="0"/>
+              <a:t>40% </a:t>
+            </a:r>
+            <a:r>
+              <a:rPr lang="de-DE" sz="1800" dirty="0" err="1"/>
+              <a:t>fewer</a:t>
+            </a:r>
+            <a:r>
+              <a:rPr lang="de-DE" sz="1800" dirty="0"/>
+              <a:t> </a:t>
+            </a:r>
+            <a:r>
+              <a:rPr lang="de-DE" sz="1800" dirty="0" err="1"/>
+              <a:t>parameters</a:t>
+            </a:r>
+            <a:r>
+              <a:rPr lang="de-DE" sz="1800" dirty="0"/>
+              <a:t> </a:t>
+            </a:r>
+            <a:r>
+              <a:rPr lang="de-DE" sz="1800" dirty="0" err="1"/>
+              <a:t>than</a:t>
+            </a:r>
+            <a:r>
+              <a:rPr lang="de-DE" sz="1800" dirty="0"/>
+              <a:t> BERT, 60% </a:t>
+            </a:r>
+            <a:r>
+              <a:rPr lang="de-DE" sz="1800" dirty="0" err="1"/>
+              <a:t>faster</a:t>
+            </a:r>
+            <a:r>
+              <a:rPr lang="de-DE" sz="1800" dirty="0"/>
+              <a:t> </a:t>
+            </a:r>
+            <a:r>
+              <a:rPr lang="de-DE" sz="1800" dirty="0" err="1"/>
+              <a:t>inference</a:t>
+            </a:r>
+            <a:r>
+              <a:rPr lang="de-DE" sz="1800" dirty="0"/>
+              <a:t>, </a:t>
+            </a:r>
+            <a:r>
+              <a:rPr lang="de-DE" sz="1800" dirty="0" err="1"/>
+              <a:t>using</a:t>
+            </a:r>
+            <a:r>
+              <a:rPr lang="de-DE" sz="1800" dirty="0"/>
+              <a:t> half </a:t>
+            </a:r>
+            <a:r>
+              <a:rPr lang="de-DE" sz="1800" dirty="0" err="1"/>
               <a:t>the</a:t>
             </a:r>
             <a:r>
-              <a:rPr lang="de-DE" b="1" dirty="0"/>
-              <a:t> time</a:t>
-            </a:r>
-            <a:r>
-              <a:rPr lang="de-DE" dirty="0"/>
-              <a:t> → </a:t>
-            </a:r>
-            <a:r>
-              <a:rPr lang="de-DE" dirty="0" err="1"/>
-              <a:t>Replace</a:t>
-            </a:r>
-            <a:r>
-              <a:rPr lang="de-DE" dirty="0"/>
-              <a:t> </a:t>
-            </a:r>
-            <a:r>
-              <a:rPr lang="de-DE" dirty="0" err="1"/>
-              <a:t>it</a:t>
-            </a:r>
-            <a:r>
-              <a:rPr lang="de-DE" dirty="0"/>
-              <a:t> </a:t>
-            </a:r>
-            <a:r>
-              <a:rPr lang="de-DE" dirty="0" err="1"/>
-              <a:t>with</a:t>
-            </a:r>
-            <a:r>
-              <a:rPr lang="de-DE" dirty="0"/>
-              <a:t> [MASK].</a:t>
-            </a:r>
-          </a:p>
-          <a:p>
-            <a:r>
-              <a:rPr lang="de-DE" dirty="0" err="1"/>
-              <a:t>Example</a:t>
-            </a:r>
-            <a:r>
-              <a:rPr lang="de-DE" dirty="0"/>
-              <a:t>: "</a:t>
-            </a:r>
-            <a:r>
-              <a:rPr lang="de-DE" dirty="0" err="1"/>
-              <a:t>the</a:t>
-            </a:r>
-            <a:r>
-              <a:rPr lang="de-DE" dirty="0"/>
-              <a:t> </a:t>
-            </a:r>
-            <a:r>
-              <a:rPr lang="de-DE" dirty="0" err="1"/>
-              <a:t>cat</a:t>
-            </a:r>
-            <a:r>
-              <a:rPr lang="de-DE" dirty="0"/>
-              <a:t> </a:t>
-            </a:r>
-            <a:r>
-              <a:rPr lang="de-DE" dirty="0" err="1"/>
-              <a:t>sat</a:t>
-            </a:r>
-            <a:r>
-              <a:rPr lang="de-DE" dirty="0"/>
-              <a:t>" → "</a:t>
-            </a:r>
-            <a:r>
-              <a:rPr lang="de-DE" dirty="0" err="1"/>
-              <a:t>the</a:t>
-            </a:r>
-            <a:r>
-              <a:rPr lang="de-DE" dirty="0"/>
-              <a:t> [MASK] </a:t>
-            </a:r>
-            <a:r>
-              <a:rPr lang="de-DE" dirty="0" err="1"/>
-              <a:t>sat</a:t>
-            </a:r>
-            <a:r>
-              <a:rPr lang="de-DE" dirty="0"/>
-              <a:t>".</a:t>
-            </a:r>
-          </a:p>
-          <a:p>
-            <a:r>
-              <a:rPr lang="de-DE" dirty="0"/>
-              <a:t>The </a:t>
-            </a:r>
-            <a:r>
-              <a:rPr lang="de-DE" dirty="0" err="1"/>
-              <a:t>embedding</a:t>
-            </a:r>
-            <a:r>
-              <a:rPr lang="de-DE" dirty="0"/>
-              <a:t> </a:t>
-            </a:r>
-            <a:r>
-              <a:rPr lang="de-DE" dirty="0" err="1"/>
-              <a:t>is</a:t>
-            </a:r>
-            <a:r>
-              <a:rPr lang="de-DE" dirty="0"/>
-              <a:t> </a:t>
-            </a:r>
-            <a:r>
-              <a:rPr lang="de-DE" dirty="0" err="1"/>
-              <a:t>the</a:t>
-            </a:r>
-            <a:r>
-              <a:rPr lang="de-DE" dirty="0"/>
-              <a:t> </a:t>
-            </a:r>
-            <a:r>
-              <a:rPr lang="de-DE" dirty="0" err="1"/>
-              <a:t>learned</a:t>
-            </a:r>
-            <a:r>
-              <a:rPr lang="de-DE" dirty="0"/>
-              <a:t> </a:t>
-            </a:r>
-            <a:r>
-              <a:rPr lang="de-DE" dirty="0" err="1"/>
-              <a:t>embedding</a:t>
-            </a:r>
-            <a:r>
-              <a:rPr lang="de-DE" dirty="0"/>
-              <a:t> </a:t>
-            </a:r>
-            <a:r>
-              <a:rPr lang="de-DE" dirty="0" err="1"/>
-              <a:t>vector</a:t>
-            </a:r>
-            <a:r>
-              <a:rPr lang="de-DE" dirty="0"/>
-              <a:t> </a:t>
-            </a:r>
-            <a:r>
-              <a:rPr lang="de-DE" dirty="0" err="1"/>
-              <a:t>for</a:t>
-            </a:r>
-            <a:r>
-              <a:rPr lang="de-DE" dirty="0"/>
-              <a:t> </a:t>
-            </a:r>
-            <a:r>
-              <a:rPr lang="de-DE" dirty="0" err="1"/>
-              <a:t>the</a:t>
-            </a:r>
-            <a:r>
-              <a:rPr lang="de-DE" dirty="0"/>
-              <a:t> [MASK] </a:t>
-            </a:r>
-            <a:r>
-              <a:rPr lang="de-DE" dirty="0" err="1"/>
-              <a:t>token</a:t>
-            </a:r>
-            <a:r>
-              <a:rPr lang="de-DE" dirty="0"/>
-              <a:t> (just like </a:t>
-            </a:r>
-            <a:r>
-              <a:rPr lang="de-DE" dirty="0" err="1"/>
-              <a:t>any</a:t>
-            </a:r>
-            <a:r>
-              <a:rPr lang="de-DE" dirty="0"/>
-              <a:t> </a:t>
-            </a:r>
-            <a:r>
-              <a:rPr lang="de-DE" dirty="0" err="1"/>
-              <a:t>other</a:t>
-            </a:r>
-            <a:r>
-              <a:rPr lang="de-DE" dirty="0"/>
-              <a:t> </a:t>
-            </a:r>
-            <a:r>
-              <a:rPr lang="de-DE" dirty="0" err="1"/>
-              <a:t>token</a:t>
-            </a:r>
-            <a:r>
-              <a:rPr lang="de-DE" dirty="0"/>
-              <a:t>).</a:t>
-            </a:r>
-          </a:p>
-          <a:p>
-            <a:r>
-              <a:rPr lang="de-DE" b="1" dirty="0"/>
-              <a:t>10% </a:t>
-            </a:r>
-            <a:r>
-              <a:rPr lang="de-DE" b="1" dirty="0" err="1"/>
-              <a:t>of</a:t>
-            </a:r>
-            <a:r>
-              <a:rPr lang="de-DE" b="1" dirty="0"/>
-              <a:t> </a:t>
-            </a:r>
-            <a:r>
-              <a:rPr lang="de-DE" b="1" dirty="0" err="1"/>
-              <a:t>the</a:t>
-            </a:r>
-            <a:r>
-              <a:rPr lang="de-DE" b="1" dirty="0"/>
-              <a:t> time</a:t>
-            </a:r>
-            <a:r>
-              <a:rPr lang="de-DE" dirty="0"/>
-              <a:t> → </a:t>
-            </a:r>
-            <a:r>
-              <a:rPr lang="de-DE" dirty="0" err="1"/>
-              <a:t>Replace</a:t>
-            </a:r>
-            <a:r>
-              <a:rPr lang="de-DE" dirty="0"/>
-              <a:t> </a:t>
-            </a:r>
-            <a:r>
-              <a:rPr lang="de-DE" dirty="0" err="1"/>
-              <a:t>it</a:t>
-            </a:r>
-            <a:r>
-              <a:rPr lang="de-DE" dirty="0"/>
-              <a:t> </a:t>
-            </a:r>
-            <a:r>
-              <a:rPr lang="de-DE" dirty="0" err="1"/>
-              <a:t>with</a:t>
-            </a:r>
-            <a:r>
-              <a:rPr lang="de-DE" dirty="0"/>
-              <a:t> a </a:t>
-            </a:r>
-            <a:r>
-              <a:rPr lang="de-DE" b="1" dirty="0" err="1"/>
-              <a:t>random</a:t>
-            </a:r>
-            <a:r>
-              <a:rPr lang="de-DE" b="1" dirty="0"/>
-              <a:t> </a:t>
-            </a:r>
-            <a:r>
-              <a:rPr lang="de-DE" b="1" dirty="0" err="1"/>
-              <a:t>token</a:t>
-            </a:r>
-            <a:r>
-              <a:rPr lang="de-DE" dirty="0"/>
-              <a:t> </a:t>
-            </a:r>
-            <a:r>
-              <a:rPr lang="de-DE" dirty="0" err="1"/>
-              <a:t>from</a:t>
-            </a:r>
-            <a:r>
-              <a:rPr lang="de-DE" dirty="0"/>
-              <a:t> </a:t>
-            </a:r>
-            <a:r>
-              <a:rPr lang="de-DE" dirty="0" err="1"/>
-              <a:t>the</a:t>
-            </a:r>
-            <a:r>
-              <a:rPr lang="de-DE" dirty="0"/>
-              <a:t> </a:t>
-            </a:r>
-            <a:r>
-              <a:rPr lang="de-DE" dirty="0" err="1"/>
-              <a:t>vocabulary</a:t>
-            </a:r>
-            <a:r>
-              <a:rPr lang="de-DE" dirty="0"/>
-              <a:t>.</a:t>
-            </a:r>
-          </a:p>
-          <a:p>
-            <a:r>
-              <a:rPr lang="de-DE" dirty="0" err="1"/>
-              <a:t>Prevents</a:t>
-            </a:r>
-            <a:r>
-              <a:rPr lang="de-DE" dirty="0"/>
-              <a:t> </a:t>
-            </a:r>
-            <a:r>
-              <a:rPr lang="de-DE" dirty="0" err="1"/>
-              <a:t>the</a:t>
-            </a:r>
-            <a:r>
-              <a:rPr lang="de-DE" dirty="0"/>
-              <a:t> </a:t>
-            </a:r>
-            <a:r>
-              <a:rPr lang="de-DE" dirty="0" err="1"/>
-              <a:t>model</a:t>
-            </a:r>
-            <a:r>
-              <a:rPr lang="de-DE" dirty="0"/>
-              <a:t> </a:t>
-            </a:r>
-            <a:r>
-              <a:rPr lang="de-DE" dirty="0" err="1"/>
-              <a:t>from</a:t>
-            </a:r>
-            <a:r>
-              <a:rPr lang="de-DE" dirty="0"/>
-              <a:t> </a:t>
-            </a:r>
-            <a:r>
-              <a:rPr lang="de-DE" dirty="0" err="1"/>
-              <a:t>overfitting</a:t>
-            </a:r>
-            <a:r>
-              <a:rPr lang="de-DE" dirty="0"/>
-              <a:t> </a:t>
-            </a:r>
-            <a:r>
-              <a:rPr lang="de-DE" dirty="0" err="1"/>
-              <a:t>to</a:t>
-            </a:r>
-            <a:r>
-              <a:rPr lang="de-DE" dirty="0"/>
-              <a:t> </a:t>
-            </a:r>
-            <a:r>
-              <a:rPr lang="de-DE" dirty="0" err="1"/>
-              <a:t>always</a:t>
-            </a:r>
-            <a:r>
-              <a:rPr lang="de-DE" dirty="0"/>
-              <a:t> </a:t>
-            </a:r>
-            <a:r>
-              <a:rPr lang="de-DE" dirty="0" err="1"/>
-              <a:t>associating</a:t>
-            </a:r>
-            <a:r>
-              <a:rPr lang="de-DE" dirty="0"/>
-              <a:t> [MASK] </a:t>
-            </a:r>
-            <a:r>
-              <a:rPr lang="de-DE" dirty="0" err="1"/>
-              <a:t>with</a:t>
-            </a:r>
-            <a:r>
-              <a:rPr lang="de-DE" dirty="0"/>
-              <a:t> </a:t>
-            </a:r>
-            <a:r>
-              <a:rPr lang="de-DE" dirty="0" err="1"/>
+              <a:rPr lang="de-DE" sz="1800" dirty="0"/>
+              <a:t> </a:t>
+            </a:r>
+            <a:r>
+              <a:rPr lang="de-DE" sz="1800" dirty="0" err="1"/>
+              <a:t>memory</a:t>
+            </a:r>
+            <a:endParaRPr lang="de-DE" sz="1800" dirty="0"/>
+          </a:p>
+          <a:p>
+            <a:r>
+              <a:rPr lang="de-DE" sz="1800" dirty="0"/>
+              <a:t>… also </a:t>
+            </a:r>
+            <a:r>
+              <a:rPr lang="de-DE" sz="1800" dirty="0" err="1"/>
+              <a:t>removed</a:t>
+            </a:r>
+            <a:r>
+              <a:rPr lang="de-DE" sz="1800" dirty="0"/>
+              <a:t> </a:t>
+            </a:r>
+            <a:r>
+              <a:rPr lang="de-DE" sz="1800" dirty="0" err="1"/>
+              <a:t>next</a:t>
+            </a:r>
+            <a:r>
+              <a:rPr lang="de-DE" sz="1800" dirty="0"/>
+              <a:t> </a:t>
+            </a:r>
+            <a:r>
+              <a:rPr lang="de-DE" sz="1800" dirty="0" err="1"/>
+              <a:t>sentence</a:t>
+            </a:r>
+            <a:r>
+              <a:rPr lang="de-DE" sz="1800" dirty="0"/>
+              <a:t> </a:t>
+            </a:r>
+            <a:r>
+              <a:rPr lang="de-DE" sz="1800" dirty="0" err="1"/>
               <a:t>prediction</a:t>
             </a:r>
             <a:r>
-              <a:rPr lang="de-DE" dirty="0"/>
-              <a:t>.</a:t>
-            </a:r>
-          </a:p>
-          <a:p>
-            <a:r>
-              <a:rPr lang="de-DE" b="1" dirty="0"/>
-              <a:t>10% </a:t>
-            </a:r>
-            <a:r>
-              <a:rPr lang="de-DE" b="1" dirty="0" err="1"/>
-              <a:t>of</a:t>
-            </a:r>
-            <a:r>
-              <a:rPr lang="de-DE" b="1" dirty="0"/>
-              <a:t> </a:t>
-            </a:r>
-            <a:r>
-              <a:rPr lang="de-DE" b="1" dirty="0" err="1"/>
-              <a:t>the</a:t>
-            </a:r>
-            <a:r>
-              <a:rPr lang="de-DE" b="1" dirty="0"/>
-              <a:t> time</a:t>
-            </a:r>
-            <a:r>
-              <a:rPr lang="de-DE" dirty="0"/>
-              <a:t> → </a:t>
-            </a:r>
-            <a:r>
-              <a:rPr lang="de-DE" dirty="0" err="1"/>
-              <a:t>Leave</a:t>
-            </a:r>
-            <a:r>
-              <a:rPr lang="de-DE" dirty="0"/>
-              <a:t> </a:t>
-            </a:r>
-            <a:r>
-              <a:rPr lang="de-DE" dirty="0" err="1"/>
-              <a:t>it</a:t>
-            </a:r>
-            <a:r>
-              <a:rPr lang="de-DE" dirty="0"/>
-              <a:t> </a:t>
-            </a:r>
-            <a:r>
-              <a:rPr lang="de-DE" b="1" dirty="0" err="1"/>
-              <a:t>unchanged</a:t>
-            </a:r>
-            <a:r>
-              <a:rPr lang="de-DE" dirty="0"/>
-              <a:t>.</a:t>
-            </a:r>
-          </a:p>
-          <a:p>
-            <a:r>
-              <a:rPr lang="de-DE" dirty="0"/>
-              <a:t>Forces </a:t>
-            </a:r>
-            <a:r>
-              <a:rPr lang="de-DE" dirty="0" err="1"/>
-              <a:t>the</a:t>
-            </a:r>
-            <a:r>
-              <a:rPr lang="de-DE" dirty="0"/>
-              <a:t> </a:t>
-            </a:r>
-            <a:r>
-              <a:rPr lang="de-DE" dirty="0" err="1"/>
-              <a:t>model</a:t>
-            </a:r>
-            <a:r>
-              <a:rPr lang="de-DE" dirty="0"/>
-              <a:t> </a:t>
-            </a:r>
-            <a:r>
-              <a:rPr lang="de-DE" dirty="0" err="1"/>
-              <a:t>to</a:t>
-            </a:r>
-            <a:r>
-              <a:rPr lang="de-DE" dirty="0"/>
-              <a:t> </a:t>
-            </a:r>
-            <a:r>
-              <a:rPr lang="de-DE" dirty="0" err="1"/>
-              <a:t>sometimes</a:t>
-            </a:r>
-            <a:r>
-              <a:rPr lang="de-DE" dirty="0"/>
-              <a:t> </a:t>
-            </a:r>
-            <a:r>
-              <a:rPr lang="de-DE" dirty="0" err="1"/>
-              <a:t>predict</a:t>
-            </a:r>
-            <a:r>
-              <a:rPr lang="de-DE" dirty="0"/>
-              <a:t> </a:t>
-            </a:r>
-            <a:r>
-              <a:rPr lang="de-DE" dirty="0" err="1"/>
-              <a:t>without</a:t>
-            </a:r>
-            <a:r>
-              <a:rPr lang="de-DE" dirty="0"/>
-              <a:t> </a:t>
-            </a:r>
-            <a:r>
-              <a:rPr lang="de-DE" dirty="0" err="1"/>
-              <a:t>seeing</a:t>
-            </a:r>
-            <a:r>
-              <a:rPr lang="de-DE" dirty="0"/>
-              <a:t> an explicit [MASK].</a:t>
-            </a:r>
-          </a:p>
-          <a:p>
-            <a:pPr marL="0" indent="0">
-              <a:buNone/>
-            </a:pPr>
-            <a:br>
-              <a:rPr lang="de-DE" dirty="0"/>
-            </a:br>
-            <a:r>
-              <a:rPr lang="de-DE" dirty="0" err="1"/>
-              <a:t>Regardless</a:t>
-            </a:r>
-            <a:r>
-              <a:rPr lang="de-DE" dirty="0"/>
-              <a:t> </a:t>
-            </a:r>
-            <a:r>
-              <a:rPr lang="de-DE" dirty="0" err="1"/>
-              <a:t>of</a:t>
-            </a:r>
-            <a:r>
-              <a:rPr lang="de-DE" dirty="0"/>
-              <a:t> </a:t>
-            </a:r>
-            <a:r>
-              <a:rPr lang="de-DE" dirty="0" err="1"/>
-              <a:t>which</a:t>
-            </a:r>
-            <a:r>
-              <a:rPr lang="de-DE" dirty="0"/>
-              <a:t> </a:t>
-            </a:r>
-            <a:r>
-              <a:rPr lang="de-DE" dirty="0" err="1"/>
-              <a:t>replacement</a:t>
-            </a:r>
-            <a:r>
-              <a:rPr lang="de-DE" dirty="0"/>
-              <a:t> </a:t>
-            </a:r>
-            <a:r>
-              <a:rPr lang="de-DE" dirty="0" err="1"/>
-              <a:t>is</a:t>
-            </a:r>
-            <a:r>
-              <a:rPr lang="de-DE" dirty="0"/>
-              <a:t> </a:t>
-            </a:r>
-            <a:r>
-              <a:rPr lang="de-DE" dirty="0" err="1"/>
-              <a:t>used</a:t>
-            </a:r>
-            <a:r>
-              <a:rPr lang="de-DE" dirty="0"/>
-              <a:t>, </a:t>
-            </a:r>
-            <a:r>
-              <a:rPr lang="de-DE" dirty="0" err="1"/>
-              <a:t>the</a:t>
-            </a:r>
-            <a:r>
-              <a:rPr lang="de-DE" dirty="0"/>
-              <a:t> </a:t>
-            </a:r>
-            <a:r>
-              <a:rPr lang="de-DE" b="1" dirty="0" err="1"/>
-              <a:t>loss</a:t>
-            </a:r>
-            <a:r>
-              <a:rPr lang="de-DE" b="1" dirty="0"/>
-              <a:t> </a:t>
-            </a:r>
-            <a:r>
-              <a:rPr lang="de-DE" b="1" dirty="0" err="1"/>
-              <a:t>is</a:t>
-            </a:r>
-            <a:r>
-              <a:rPr lang="de-DE" b="1" dirty="0"/>
-              <a:t> still </a:t>
-            </a:r>
-            <a:r>
-              <a:rPr lang="de-DE" b="1" dirty="0" err="1"/>
-              <a:t>computed</a:t>
-            </a:r>
-            <a:r>
-              <a:rPr lang="de-DE" b="1" dirty="0"/>
-              <a:t> </a:t>
-            </a:r>
-            <a:r>
-              <a:rPr lang="de-DE" b="1" dirty="0" err="1"/>
-              <a:t>against</a:t>
-            </a:r>
-            <a:r>
-              <a:rPr lang="de-DE" b="1" dirty="0"/>
-              <a:t> </a:t>
-            </a:r>
-            <a:r>
-              <a:rPr lang="de-DE" b="1" dirty="0" err="1"/>
-              <a:t>the</a:t>
-            </a:r>
-            <a:r>
-              <a:rPr lang="de-DE" b="1" dirty="0"/>
-              <a:t> original </a:t>
-            </a:r>
-            <a:r>
-              <a:rPr lang="de-DE" b="1" dirty="0" err="1"/>
-              <a:t>token</a:t>
-            </a:r>
-            <a:r>
-              <a:rPr lang="de-DE" dirty="0"/>
-              <a:t>.</a:t>
+              <a:rPr lang="de-DE" sz="1800" dirty="0"/>
+              <a:t> </a:t>
+            </a:r>
+            <a:r>
+              <a:rPr lang="de-DE" sz="1800" dirty="0" err="1"/>
+              <a:t>as</a:t>
+            </a:r>
+            <a:r>
+              <a:rPr lang="de-DE" sz="1800" dirty="0"/>
+              <a:t> </a:t>
+            </a:r>
+            <a:r>
+              <a:rPr lang="de-DE" sz="1800" dirty="0" err="1"/>
+              <a:t>pretraining</a:t>
+            </a:r>
+            <a:r>
+              <a:rPr lang="de-DE" sz="1800" dirty="0"/>
+              <a:t> </a:t>
+            </a:r>
+            <a:r>
+              <a:rPr lang="de-DE" sz="1800" dirty="0" err="1"/>
+              <a:t>objective</a:t>
+            </a:r>
+            <a:r>
+              <a:rPr lang="de-DE" sz="1800" dirty="0"/>
+              <a:t> …</a:t>
             </a:r>
           </a:p>
         </p:txBody>
@@ -8045,7 +7894,7 @@
           <p:cNvPr id="4" name="Foliennummernplatzhalter 3">
             <a:extLst>
               <a:ext uri="{FF2B5EF4-FFF2-40B4-BE49-F238E27FC236}">
-                <a16:creationId xmlns:a16="http://schemas.microsoft.com/office/drawing/2014/main" id="{98A71D12-1308-5AA4-28A9-50891017FA54}"/>
+                <a16:creationId xmlns:a16="http://schemas.microsoft.com/office/drawing/2014/main" id="{6C9E7DDC-F9E4-F124-BF7B-7A2E77B7C25C}"/>
               </a:ext>
             </a:extLst>
           </p:cNvPr>
@@ -8061,18 +7910,18 @@
           <a:bodyPr/>
           <a:lstStyle/>
           <a:p>
-            <a:fld id="{4055531C-5681-6B44-B2CA-926D7A74B06D}" type="slidenum">
-              <a:rPr lang="de-DE" smtClean="0"/>
+            <a:fld id="{3D4C94FE-FF23-4504-88E9-14D481113291}" type="slidenum">
+              <a:rPr lang="en-GB" smtClean="0"/>
               <a:t>10</a:t>
             </a:fld>
-            <a:endParaRPr lang="de-DE"/>
+            <a:endParaRPr lang="en-GB"/>
           </a:p>
         </p:txBody>
       </p:sp>
     </p:spTree>
     <p:extLst>
       <p:ext uri="{BB962C8B-B14F-4D97-AF65-F5344CB8AC3E}">
-        <p14:creationId xmlns:p14="http://schemas.microsoft.com/office/powerpoint/2010/main" val="209083973"/>
+        <p14:creationId xmlns:p14="http://schemas.microsoft.com/office/powerpoint/2010/main" val="3675046636"/>
       </p:ext>
     </p:extLst>
   </p:cSld>
@@ -8104,7 +7953,7 @@
           <p:cNvPr id="2" name="Titel 1">
             <a:extLst>
               <a:ext uri="{FF2B5EF4-FFF2-40B4-BE49-F238E27FC236}">
-                <a16:creationId xmlns:a16="http://schemas.microsoft.com/office/drawing/2014/main" id="{47377014-5C9A-61F9-AEB0-5422FFC74E48}"/>
+                <a16:creationId xmlns:a16="http://schemas.microsoft.com/office/drawing/2014/main" id="{F8835DB9-A493-0493-6DC6-1A59F1955546}"/>
               </a:ext>
             </a:extLst>
           </p:cNvPr>
@@ -8122,13 +7971,8 @@
           <a:p>
             <a:r>
               <a:rPr lang="de-DE" dirty="0"/>
-              <a:t>BERT </a:t>
-            </a:r>
-            <a:r>
-              <a:rPr lang="de-DE" dirty="0" err="1"/>
-              <a:t>Variants</a:t>
-            </a:r>
-            <a:endParaRPr lang="de-DE" dirty="0"/>
+              <a:t>Text Classification</a:t>
+            </a:r>
           </a:p>
         </p:txBody>
       </p:sp>
@@ -8137,7 +7981,7 @@
           <p:cNvPr id="3" name="Inhaltsplatzhalter 2">
             <a:extLst>
               <a:ext uri="{FF2B5EF4-FFF2-40B4-BE49-F238E27FC236}">
-                <a16:creationId xmlns:a16="http://schemas.microsoft.com/office/drawing/2014/main" id="{E32E57AC-9AEC-A942-0A0F-644BB5F978B9}"/>
+                <a16:creationId xmlns:a16="http://schemas.microsoft.com/office/drawing/2014/main" id="{C8B9C882-7432-CB1C-F348-C72E3D7ABCC1}"/>
               </a:ext>
             </a:extLst>
           </p:cNvPr>
@@ -8159,558 +8003,31 @@
               <a:buNone/>
             </a:pPr>
             <a:r>
-              <a:rPr lang="de-DE" sz="2400" dirty="0">
-                <a:hlinkClick r:id="rId2"/>
-              </a:rPr>
-              <a:t>RoBERTa</a:t>
-            </a:r>
-            <a:r>
-              <a:rPr lang="de-DE" sz="2400" b="1" dirty="0"/>
-              <a:t>: </a:t>
-            </a:r>
-            <a:r>
-              <a:rPr lang="de-DE" sz="2400" dirty="0" err="1"/>
-              <a:t>improved</a:t>
-            </a:r>
-            <a:r>
-              <a:rPr lang="de-DE" sz="2400" dirty="0"/>
-              <a:t> </a:t>
-            </a:r>
-            <a:r>
-              <a:rPr lang="de-DE" sz="2400" dirty="0" err="1"/>
-              <a:t>performance</a:t>
-            </a:r>
-            <a:endParaRPr lang="de-DE" sz="2400" dirty="0"/>
-          </a:p>
-          <a:p>
-            <a:r>
-              <a:rPr lang="de-DE" sz="1800" dirty="0" err="1"/>
-              <a:t>removed</a:t>
-            </a:r>
-            <a:r>
-              <a:rPr lang="de-DE" sz="1800" dirty="0"/>
-              <a:t> </a:t>
-            </a:r>
-            <a:r>
-              <a:rPr lang="de-DE" sz="1800" dirty="0" err="1"/>
-              <a:t>next</a:t>
-            </a:r>
-            <a:r>
-              <a:rPr lang="de-DE" sz="1800" dirty="0"/>
-              <a:t> </a:t>
-            </a:r>
-            <a:r>
-              <a:rPr lang="de-DE" sz="1800" dirty="0" err="1"/>
-              <a:t>sentence</a:t>
-            </a:r>
-            <a:r>
-              <a:rPr lang="de-DE" sz="1800" dirty="0"/>
-              <a:t> </a:t>
-            </a:r>
-            <a:r>
-              <a:rPr lang="de-DE" sz="1800" dirty="0" err="1"/>
-              <a:t>prediction</a:t>
-            </a:r>
-            <a:r>
-              <a:rPr lang="de-DE" sz="1800" dirty="0"/>
-              <a:t> </a:t>
-            </a:r>
-            <a:r>
-              <a:rPr lang="de-DE" sz="1800" dirty="0" err="1"/>
-              <a:t>as</a:t>
-            </a:r>
-            <a:r>
-              <a:rPr lang="de-DE" sz="1800" dirty="0"/>
-              <a:t> </a:t>
-            </a:r>
-            <a:r>
-              <a:rPr lang="de-DE" sz="1800" dirty="0" err="1"/>
-              <a:t>pretraining</a:t>
-            </a:r>
-            <a:r>
-              <a:rPr lang="de-DE" sz="1800" dirty="0"/>
-              <a:t> </a:t>
-            </a:r>
-            <a:r>
-              <a:rPr lang="de-DE" sz="1800" dirty="0" err="1"/>
-              <a:t>objective</a:t>
-            </a:r>
-            <a:r>
-              <a:rPr lang="de-DE" sz="1800" dirty="0"/>
-              <a:t> and …</a:t>
-            </a:r>
-          </a:p>
-          <a:p>
-            <a:r>
-              <a:rPr lang="de-DE" sz="1800" dirty="0"/>
-              <a:t>~</a:t>
-            </a:r>
-            <a:r>
-              <a:rPr lang="de-DE" sz="1800" dirty="0" err="1"/>
-              <a:t>ten</a:t>
-            </a:r>
-            <a:r>
-              <a:rPr lang="de-DE" sz="1800" dirty="0"/>
-              <a:t> </a:t>
-            </a:r>
-            <a:r>
-              <a:rPr lang="de-DE" sz="1800" dirty="0" err="1"/>
-              <a:t>times</a:t>
-            </a:r>
-            <a:r>
-              <a:rPr lang="de-DE" sz="1800" dirty="0"/>
-              <a:t> </a:t>
-            </a:r>
-            <a:r>
-              <a:rPr lang="de-DE" sz="1800" dirty="0" err="1"/>
-              <a:t>more</a:t>
-            </a:r>
-            <a:r>
-              <a:rPr lang="de-DE" sz="1800" dirty="0"/>
-              <a:t> </a:t>
-            </a:r>
-            <a:r>
-              <a:rPr lang="de-DE" sz="1800" dirty="0" err="1"/>
-              <a:t>training</a:t>
-            </a:r>
-            <a:r>
-              <a:rPr lang="de-DE" sz="1800" dirty="0"/>
-              <a:t> </a:t>
-            </a:r>
-            <a:r>
-              <a:rPr lang="de-DE" sz="1800" dirty="0" err="1"/>
-              <a:t>data</a:t>
-            </a:r>
-            <a:r>
-              <a:rPr lang="de-DE" sz="1800" dirty="0"/>
-              <a:t>, </a:t>
-            </a:r>
-            <a:r>
-              <a:rPr lang="de-DE" sz="1800" dirty="0" err="1"/>
-              <a:t>longer</a:t>
-            </a:r>
-            <a:r>
-              <a:rPr lang="de-DE" sz="1800" dirty="0"/>
-              <a:t> </a:t>
-            </a:r>
-            <a:r>
-              <a:rPr lang="de-DE" sz="1800" dirty="0" err="1"/>
-              <a:t>training</a:t>
-            </a:r>
-            <a:r>
-              <a:rPr lang="de-DE" sz="1800" dirty="0"/>
-              <a:t>, larger </a:t>
-            </a:r>
-            <a:r>
-              <a:rPr lang="de-DE" sz="1800" dirty="0" err="1"/>
-              <a:t>batches</a:t>
-            </a:r>
-            <a:r>
-              <a:rPr lang="de-DE" sz="1800" dirty="0"/>
-              <a:t>, </a:t>
-            </a:r>
-            <a:r>
-              <a:rPr lang="de-DE" sz="1800" dirty="0" err="1"/>
-              <a:t>longer</a:t>
-            </a:r>
-            <a:r>
-              <a:rPr lang="de-DE" sz="1800" dirty="0"/>
-              <a:t> </a:t>
-            </a:r>
-            <a:r>
-              <a:rPr lang="de-DE" sz="1800" dirty="0" err="1"/>
-              <a:t>sequences</a:t>
-            </a:r>
-            <a:endParaRPr lang="de-DE" sz="1800" dirty="0"/>
-          </a:p>
-          <a:p>
-            <a:r>
-              <a:rPr lang="de-DE" sz="1800" dirty="0" err="1"/>
-              <a:t>dynamic</a:t>
-            </a:r>
-            <a:r>
-              <a:rPr lang="de-DE" sz="1800" dirty="0"/>
-              <a:t> </a:t>
-            </a:r>
-            <a:r>
-              <a:rPr lang="de-DE" sz="1800" dirty="0" err="1"/>
-              <a:t>masking</a:t>
-            </a:r>
-            <a:r>
-              <a:rPr lang="de-DE" sz="1800" dirty="0"/>
-              <a:t>: </a:t>
-            </a:r>
-            <a:r>
-              <a:rPr lang="de-DE" sz="1800" dirty="0" err="1"/>
-              <a:t>instead</a:t>
-            </a:r>
-            <a:r>
-              <a:rPr lang="de-DE" sz="1800" dirty="0"/>
-              <a:t> </a:t>
-            </a:r>
-            <a:r>
-              <a:rPr lang="de-DE" sz="1800" dirty="0" err="1"/>
-              <a:t>of</a:t>
-            </a:r>
-            <a:r>
-              <a:rPr lang="de-DE" sz="1800" dirty="0"/>
-              <a:t> </a:t>
-            </a:r>
-            <a:r>
-              <a:rPr lang="de-DE" sz="1800" dirty="0" err="1"/>
-              <a:t>fixed</a:t>
-            </a:r>
-            <a:r>
-              <a:rPr lang="de-DE" sz="1800" dirty="0"/>
-              <a:t> </a:t>
-            </a:r>
-            <a:r>
-              <a:rPr lang="de-DE" sz="1800" dirty="0" err="1"/>
-              <a:t>masked</a:t>
-            </a:r>
-            <a:r>
-              <a:rPr lang="de-DE" sz="1800" dirty="0"/>
-              <a:t> </a:t>
-            </a:r>
-            <a:r>
-              <a:rPr lang="de-DE" sz="1800" dirty="0" err="1"/>
-              <a:t>tokens</a:t>
-            </a:r>
-            <a:r>
-              <a:rPr lang="de-DE" sz="1800" dirty="0"/>
-              <a:t> </a:t>
-            </a:r>
-            <a:r>
-              <a:rPr lang="de-DE" sz="1800" dirty="0" err="1"/>
-              <a:t>for</a:t>
-            </a:r>
-            <a:r>
-              <a:rPr lang="de-DE" sz="1800" dirty="0"/>
-              <a:t> </a:t>
-            </a:r>
-            <a:r>
-              <a:rPr lang="de-DE" sz="1800" dirty="0" err="1"/>
-              <a:t>each</a:t>
-            </a:r>
-            <a:r>
-              <a:rPr lang="de-DE" sz="1800" dirty="0"/>
-              <a:t> </a:t>
-            </a:r>
-            <a:r>
-              <a:rPr lang="de-DE" sz="1800" dirty="0" err="1"/>
-              <a:t>sequence</a:t>
-            </a:r>
-            <a:r>
-              <a:rPr lang="de-DE" sz="1800" dirty="0"/>
-              <a:t>, </a:t>
-            </a:r>
-            <a:r>
-              <a:rPr lang="de-DE" sz="1800" dirty="0" err="1"/>
-              <a:t>masks</a:t>
-            </a:r>
-            <a:r>
-              <a:rPr lang="de-DE" sz="1800" dirty="0"/>
-              <a:t> </a:t>
-            </a:r>
-            <a:r>
-              <a:rPr lang="de-DE" sz="1800" dirty="0" err="1"/>
-              <a:t>change</a:t>
-            </a:r>
-            <a:r>
-              <a:rPr lang="de-DE" sz="1800" dirty="0"/>
-              <a:t> </a:t>
-            </a:r>
-            <a:r>
-              <a:rPr lang="de-DE" sz="1800" dirty="0" err="1"/>
-              <a:t>each</a:t>
-            </a:r>
-            <a:r>
-              <a:rPr lang="de-DE" sz="1800" dirty="0"/>
-              <a:t> </a:t>
-            </a:r>
-            <a:r>
-              <a:rPr lang="de-DE" sz="1800" dirty="0" err="1"/>
-              <a:t>epoch</a:t>
-            </a:r>
-            <a:endParaRPr lang="de-DE" sz="1800" dirty="0"/>
+              <a:rPr lang="de-DE" dirty="0"/>
+              <a:t>…</a:t>
+            </a:r>
           </a:p>
           <a:p>
             <a:pPr marL="0" indent="0">
               <a:buNone/>
             </a:pPr>
-            <a:endParaRPr lang="de-DE" sz="2400" dirty="0"/>
+            <a:endParaRPr lang="de-DE" dirty="0"/>
           </a:p>
           <a:p>
             <a:pPr marL="0" indent="0">
               <a:buNone/>
             </a:pPr>
             <a:r>
-              <a:rPr lang="de-DE" sz="2400" dirty="0" err="1">
-                <a:hlinkClick r:id="rId3"/>
+              <a:rPr lang="en-GB" dirty="0"/>
+              <a:t>exercise: </a:t>
+            </a:r>
+            <a:r>
+              <a:rPr lang="en-GB" dirty="0">
+                <a:hlinkClick r:id="rId2"/>
               </a:rPr>
-              <a:t>DistilBERT</a:t>
-            </a:r>
-            <a:r>
-              <a:rPr lang="de-DE" sz="2400" dirty="0"/>
-              <a:t>: </a:t>
-            </a:r>
-            <a:r>
-              <a:rPr lang="de-DE" sz="2400" dirty="0" err="1"/>
-              <a:t>much</a:t>
-            </a:r>
-            <a:r>
-              <a:rPr lang="de-DE" sz="2400" dirty="0"/>
-              <a:t> </a:t>
-            </a:r>
-            <a:r>
-              <a:rPr lang="de-DE" sz="2400" dirty="0" err="1"/>
-              <a:t>lighter</a:t>
-            </a:r>
-            <a:r>
-              <a:rPr lang="de-DE" sz="2400" dirty="0"/>
-              <a:t> and </a:t>
-            </a:r>
-            <a:r>
-              <a:rPr lang="de-DE" sz="2400" dirty="0" err="1"/>
-              <a:t>faster</a:t>
-            </a:r>
-            <a:r>
-              <a:rPr lang="de-DE" sz="2400" dirty="0"/>
-              <a:t>, </a:t>
-            </a:r>
-            <a:r>
-              <a:rPr lang="de-DE" sz="2400" dirty="0" err="1"/>
-              <a:t>retaining</a:t>
-            </a:r>
-            <a:r>
-              <a:rPr lang="de-DE" sz="2400" dirty="0"/>
-              <a:t> ~95% </a:t>
-            </a:r>
-            <a:r>
-              <a:rPr lang="de-DE" sz="2400" dirty="0" err="1"/>
-              <a:t>of</a:t>
-            </a:r>
-            <a:r>
-              <a:rPr lang="de-DE" sz="2400" dirty="0"/>
-              <a:t> </a:t>
-            </a:r>
-            <a:r>
-              <a:rPr lang="de-DE" sz="2400" dirty="0" err="1"/>
-              <a:t>BERT’s</a:t>
-            </a:r>
-            <a:r>
-              <a:rPr lang="de-DE" sz="2400" dirty="0"/>
-              <a:t> </a:t>
-            </a:r>
-            <a:r>
-              <a:rPr lang="de-DE" sz="2400" dirty="0" err="1"/>
-              <a:t>performance</a:t>
-            </a:r>
-            <a:endParaRPr lang="de-DE" sz="2400" dirty="0"/>
-          </a:p>
-          <a:p>
-            <a:r>
-              <a:rPr lang="de-DE" sz="1800" dirty="0"/>
-              <a:t>a </a:t>
-            </a:r>
-            <a:r>
-              <a:rPr lang="de-DE" sz="1800" dirty="0" err="1"/>
-              <a:t>smaller</a:t>
-            </a:r>
-            <a:r>
-              <a:rPr lang="de-DE" sz="1800" dirty="0"/>
-              <a:t> “</a:t>
-            </a:r>
-            <a:r>
-              <a:rPr lang="de-DE" sz="1800" dirty="0" err="1"/>
-              <a:t>student</a:t>
-            </a:r>
-            <a:r>
-              <a:rPr lang="de-DE" sz="1800" dirty="0"/>
-              <a:t>” </a:t>
-            </a:r>
-            <a:r>
-              <a:rPr lang="de-DE" sz="1800" dirty="0" err="1"/>
-              <a:t>model</a:t>
-            </a:r>
-            <a:r>
-              <a:rPr lang="de-DE" sz="1800" dirty="0"/>
-              <a:t> </a:t>
-            </a:r>
-            <a:r>
-              <a:rPr lang="de-DE" sz="1800" dirty="0" err="1"/>
-              <a:t>is</a:t>
-            </a:r>
-            <a:r>
-              <a:rPr lang="de-DE" sz="1800" dirty="0"/>
-              <a:t> </a:t>
-            </a:r>
-            <a:r>
-              <a:rPr lang="de-DE" sz="1800" dirty="0" err="1"/>
-              <a:t>trained</a:t>
-            </a:r>
-            <a:r>
-              <a:rPr lang="de-DE" sz="1800" dirty="0"/>
-              <a:t> </a:t>
-            </a:r>
-            <a:r>
-              <a:rPr lang="de-DE" sz="1800" dirty="0" err="1"/>
-              <a:t>to</a:t>
-            </a:r>
-            <a:r>
-              <a:rPr lang="de-DE" sz="1800" dirty="0"/>
-              <a:t> </a:t>
-            </a:r>
-            <a:r>
-              <a:rPr lang="de-DE" sz="1800" dirty="0" err="1"/>
-              <a:t>mimic</a:t>
-            </a:r>
-            <a:r>
-              <a:rPr lang="de-DE" sz="1800" dirty="0"/>
-              <a:t> </a:t>
-            </a:r>
-            <a:r>
-              <a:rPr lang="de-DE" sz="1800" dirty="0" err="1"/>
-              <a:t>BERT’s</a:t>
-            </a:r>
-            <a:r>
-              <a:rPr lang="de-DE" sz="1800" dirty="0"/>
-              <a:t> </a:t>
-            </a:r>
-            <a:r>
-              <a:rPr lang="de-DE" sz="1800" dirty="0" err="1"/>
-              <a:t>predictions</a:t>
-            </a:r>
-            <a:endParaRPr lang="de-DE" sz="1800" dirty="0"/>
-          </a:p>
-          <a:p>
-            <a:r>
-              <a:rPr lang="de-DE" sz="1800" dirty="0"/>
-              <a:t>40% </a:t>
-            </a:r>
-            <a:r>
-              <a:rPr lang="de-DE" sz="1800" dirty="0" err="1"/>
-              <a:t>fewer</a:t>
-            </a:r>
-            <a:r>
-              <a:rPr lang="de-DE" sz="1800" dirty="0"/>
-              <a:t> </a:t>
-            </a:r>
-            <a:r>
-              <a:rPr lang="de-DE" sz="1800" dirty="0" err="1"/>
-              <a:t>parameters</a:t>
-            </a:r>
-            <a:r>
-              <a:rPr lang="de-DE" sz="1800" dirty="0"/>
-              <a:t> </a:t>
-            </a:r>
-            <a:r>
-              <a:rPr lang="de-DE" sz="1800" dirty="0" err="1"/>
-              <a:t>than</a:t>
-            </a:r>
-            <a:r>
-              <a:rPr lang="de-DE" sz="1800" dirty="0"/>
-              <a:t> BERT, 60% </a:t>
-            </a:r>
-            <a:r>
-              <a:rPr lang="de-DE" sz="1800" dirty="0" err="1"/>
-              <a:t>faster</a:t>
-            </a:r>
-            <a:r>
-              <a:rPr lang="de-DE" sz="1800" dirty="0"/>
-              <a:t> </a:t>
-            </a:r>
-            <a:r>
-              <a:rPr lang="de-DE" sz="1800" dirty="0" err="1"/>
-              <a:t>inference</a:t>
-            </a:r>
-            <a:r>
-              <a:rPr lang="de-DE" sz="1800" dirty="0"/>
-              <a:t>, </a:t>
-            </a:r>
-            <a:r>
-              <a:rPr lang="de-DE" sz="1800" dirty="0" err="1"/>
-              <a:t>using</a:t>
-            </a:r>
-            <a:r>
-              <a:rPr lang="de-DE" sz="1800" dirty="0"/>
-              <a:t> half </a:t>
-            </a:r>
-            <a:r>
-              <a:rPr lang="de-DE" sz="1800" dirty="0" err="1"/>
-              <a:t>the</a:t>
-            </a:r>
-            <a:r>
-              <a:rPr lang="de-DE" sz="1800" dirty="0"/>
-              <a:t> </a:t>
-            </a:r>
-            <a:r>
-              <a:rPr lang="de-DE" sz="1800" dirty="0" err="1"/>
-              <a:t>memory</a:t>
-            </a:r>
-            <a:endParaRPr lang="de-DE" sz="1800" dirty="0"/>
-          </a:p>
-          <a:p>
-            <a:r>
-              <a:rPr lang="de-DE" sz="1800" dirty="0"/>
-              <a:t>… also </a:t>
-            </a:r>
-            <a:r>
-              <a:rPr lang="de-DE" sz="1800" dirty="0" err="1"/>
-              <a:t>removed</a:t>
-            </a:r>
-            <a:r>
-              <a:rPr lang="de-DE" sz="1800" dirty="0"/>
-              <a:t> </a:t>
-            </a:r>
-            <a:r>
-              <a:rPr lang="de-DE" sz="1800" dirty="0" err="1"/>
-              <a:t>next</a:t>
-            </a:r>
-            <a:r>
-              <a:rPr lang="de-DE" sz="1800" dirty="0"/>
-              <a:t> </a:t>
-            </a:r>
-            <a:r>
-              <a:rPr lang="de-DE" sz="1800" dirty="0" err="1"/>
-              <a:t>sentence</a:t>
-            </a:r>
-            <a:r>
-              <a:rPr lang="de-DE" sz="1800" dirty="0"/>
-              <a:t> </a:t>
-            </a:r>
-            <a:r>
-              <a:rPr lang="de-DE" sz="1800" dirty="0" err="1"/>
-              <a:t>prediction</a:t>
-            </a:r>
-            <a:r>
-              <a:rPr lang="de-DE" sz="1800" dirty="0"/>
-              <a:t> </a:t>
-            </a:r>
-            <a:r>
-              <a:rPr lang="de-DE" sz="1800" dirty="0" err="1"/>
-              <a:t>as</a:t>
-            </a:r>
-            <a:r>
-              <a:rPr lang="de-DE" sz="1800" dirty="0"/>
-              <a:t> </a:t>
-            </a:r>
-            <a:r>
-              <a:rPr lang="de-DE" sz="1800" dirty="0" err="1"/>
-              <a:t>pretraining</a:t>
-            </a:r>
-            <a:r>
-              <a:rPr lang="de-DE" sz="1800" dirty="0"/>
-              <a:t> </a:t>
-            </a:r>
-            <a:r>
-              <a:rPr lang="de-DE" sz="1800" dirty="0" err="1"/>
-              <a:t>objective</a:t>
-            </a:r>
-            <a:r>
-              <a:rPr lang="de-DE" sz="1800" dirty="0"/>
-              <a:t> …</a:t>
-            </a:r>
+              <a:t>Kaggle Disaster Tweets</a:t>
+            </a:r>
+            <a:endParaRPr lang="en-GB" dirty="0"/>
           </a:p>
         </p:txBody>
       </p:sp>
@@ -8719,7 +8036,7 @@
           <p:cNvPr id="4" name="Foliennummernplatzhalter 3">
             <a:extLst>
               <a:ext uri="{FF2B5EF4-FFF2-40B4-BE49-F238E27FC236}">
-                <a16:creationId xmlns:a16="http://schemas.microsoft.com/office/drawing/2014/main" id="{6C9E7DDC-F9E4-F124-BF7B-7A2E77B7C25C}"/>
+                <a16:creationId xmlns:a16="http://schemas.microsoft.com/office/drawing/2014/main" id="{BD68B0B8-AEDC-2BFB-161C-7E00CD7BC98C}"/>
               </a:ext>
             </a:extLst>
           </p:cNvPr>
@@ -8735,151 +8052,9 @@
           <a:bodyPr/>
           <a:lstStyle/>
           <a:p>
-            <a:fld id="{3D4C94FE-FF23-4504-88E9-14D481113291}" type="slidenum">
-              <a:rPr lang="en-GB" smtClean="0"/>
-              <a:t>11</a:t>
-            </a:fld>
-            <a:endParaRPr lang="en-GB"/>
-          </a:p>
-        </p:txBody>
-      </p:sp>
-    </p:spTree>
-    <p:extLst>
-      <p:ext uri="{BB962C8B-B14F-4D97-AF65-F5344CB8AC3E}">
-        <p14:creationId xmlns:p14="http://schemas.microsoft.com/office/powerpoint/2010/main" val="3675046636"/>
-      </p:ext>
-    </p:extLst>
-  </p:cSld>
-  <p:clrMapOvr>
-    <a:masterClrMapping/>
-  </p:clrMapOvr>
-</p:sld>
-</file>
-
-<file path=ppt/slides/slide12.xml><?xml version="1.0" encoding="utf-8"?>
-<p:sld xmlns:a="http://schemas.openxmlformats.org/drawingml/2006/main" xmlns:r="http://schemas.openxmlformats.org/officeDocument/2006/relationships" xmlns:p="http://schemas.openxmlformats.org/presentationml/2006/main">
-  <p:cSld>
-    <p:spTree>
-      <p:nvGrpSpPr>
-        <p:cNvPr id="1" name=""/>
-        <p:cNvGrpSpPr/>
-        <p:nvPr/>
-      </p:nvGrpSpPr>
-      <p:grpSpPr>
-        <a:xfrm>
-          <a:off x="0" y="0"/>
-          <a:ext cx="0" cy="0"/>
-          <a:chOff x="0" y="0"/>
-          <a:chExt cx="0" cy="0"/>
-        </a:xfrm>
-      </p:grpSpPr>
-      <p:sp>
-        <p:nvSpPr>
-          <p:cNvPr id="2" name="Titel 1">
-            <a:extLst>
-              <a:ext uri="{FF2B5EF4-FFF2-40B4-BE49-F238E27FC236}">
-                <a16:creationId xmlns:a16="http://schemas.microsoft.com/office/drawing/2014/main" id="{F8835DB9-A493-0493-6DC6-1A59F1955546}"/>
-              </a:ext>
-            </a:extLst>
-          </p:cNvPr>
-          <p:cNvSpPr>
-            <a:spLocks noGrp="1"/>
-          </p:cNvSpPr>
-          <p:nvPr>
-            <p:ph type="title"/>
-          </p:nvPr>
-        </p:nvSpPr>
-        <p:spPr/>
-        <p:txBody>
-          <a:bodyPr/>
-          <a:lstStyle/>
-          <a:p>
-            <a:r>
-              <a:rPr lang="de-DE" dirty="0"/>
-              <a:t>Text Classification</a:t>
-            </a:r>
-          </a:p>
-        </p:txBody>
-      </p:sp>
-      <p:sp>
-        <p:nvSpPr>
-          <p:cNvPr id="3" name="Inhaltsplatzhalter 2">
-            <a:extLst>
-              <a:ext uri="{FF2B5EF4-FFF2-40B4-BE49-F238E27FC236}">
-                <a16:creationId xmlns:a16="http://schemas.microsoft.com/office/drawing/2014/main" id="{C8B9C882-7432-CB1C-F348-C72E3D7ABCC1}"/>
-              </a:ext>
-            </a:extLst>
-          </p:cNvPr>
-          <p:cNvSpPr>
-            <a:spLocks noGrp="1"/>
-          </p:cNvSpPr>
-          <p:nvPr>
-            <p:ph idx="1"/>
-          </p:nvPr>
-        </p:nvSpPr>
-        <p:spPr/>
-        <p:txBody>
-          <a:bodyPr>
-            <a:normAutofit/>
-          </a:bodyPr>
-          <a:lstStyle/>
-          <a:p>
-            <a:pPr marL="0" indent="0">
-              <a:buNone/>
-            </a:pPr>
-            <a:r>
-              <a:rPr lang="de-DE" dirty="0"/>
-              <a:t>…</a:t>
-            </a:r>
-          </a:p>
-          <a:p>
-            <a:pPr marL="0" indent="0">
-              <a:buNone/>
-            </a:pPr>
-            <a:endParaRPr lang="de-DE" dirty="0"/>
-          </a:p>
-          <a:p>
-            <a:pPr marL="0" indent="0">
-              <a:buNone/>
-            </a:pPr>
-            <a:r>
-              <a:rPr lang="en-GB" dirty="0"/>
-              <a:t>exercise: </a:t>
-            </a:r>
-            <a:r>
-              <a:rPr lang="en-GB" dirty="0">
-                <a:hlinkClick r:id="rId2"/>
-              </a:rPr>
-              <a:t>Kaggle Disaster Tweets</a:t>
-            </a:r>
-            <a:endParaRPr lang="en-GB" dirty="0"/>
-          </a:p>
-        </p:txBody>
-      </p:sp>
-      <p:sp>
-        <p:nvSpPr>
-          <p:cNvPr id="4" name="Foliennummernplatzhalter 3">
-            <a:extLst>
-              <a:ext uri="{FF2B5EF4-FFF2-40B4-BE49-F238E27FC236}">
-                <a16:creationId xmlns:a16="http://schemas.microsoft.com/office/drawing/2014/main" id="{BD68B0B8-AEDC-2BFB-161C-7E00CD7BC98C}"/>
-              </a:ext>
-            </a:extLst>
-          </p:cNvPr>
-          <p:cNvSpPr>
-            <a:spLocks noGrp="1"/>
-          </p:cNvSpPr>
-          <p:nvPr>
-            <p:ph type="sldNum" sz="quarter" idx="12"/>
-          </p:nvPr>
-        </p:nvSpPr>
-        <p:spPr/>
-        <p:txBody>
-          <a:bodyPr/>
-          <a:lstStyle/>
-          <a:p>
             <a:fld id="{4055531C-5681-6B44-B2CA-926D7A74B06D}" type="slidenum">
               <a:rPr lang="de-DE" smtClean="0"/>
-              <a:t>12</a:t>
+              <a:t>11</a:t>
             </a:fld>
             <a:endParaRPr lang="de-DE"/>
           </a:p>
@@ -9042,7 +8217,7 @@
 </p:sld>
 </file>
 
-<file path=ppt/slides/slide13.xml><?xml version="1.0" encoding="utf-8"?>
+<file path=ppt/slides/slide12.xml><?xml version="1.0" encoding="utf-8"?>
 <p:sld xmlns:a="http://schemas.openxmlformats.org/drawingml/2006/main" xmlns:r="http://schemas.openxmlformats.org/officeDocument/2006/relationships" xmlns:p="http://schemas.openxmlformats.org/presentationml/2006/main">
   <p:cSld>
     <p:spTree>
@@ -9516,7 +8691,7 @@
           <a:p>
             <a:fld id="{4055531C-5681-6B44-B2CA-926D7A74B06D}" type="slidenum">
               <a:rPr lang="de-DE" smtClean="0"/>
-              <a:t>13</a:t>
+              <a:t>12</a:t>
             </a:fld>
             <a:endParaRPr lang="de-DE"/>
           </a:p>
@@ -9679,7 +8854,7 @@
 </p:sld>
 </file>
 
-<file path=ppt/slides/slide14.xml><?xml version="1.0" encoding="utf-8"?>
+<file path=ppt/slides/slide13.xml><?xml version="1.0" encoding="utf-8"?>
 <p:sld xmlns:a="http://schemas.openxmlformats.org/drawingml/2006/main" xmlns:r="http://schemas.openxmlformats.org/officeDocument/2006/relationships" xmlns:p="http://schemas.openxmlformats.org/presentationml/2006/main">
   <p:cSld>
     <p:spTree>
@@ -9901,7 +9076,7 @@
           <a:p>
             <a:fld id="{3D4C94FE-FF23-4504-88E9-14D481113291}" type="slidenum">
               <a:rPr lang="en-GB" smtClean="0"/>
-              <a:t>14</a:t>
+              <a:t>13</a:t>
             </a:fld>
             <a:endParaRPr lang="en-GB"/>
           </a:p>
@@ -10089,6 +9264,246 @@
 </p:sld>
 </file>
 
+<file path=ppt/slides/slide14.xml><?xml version="1.0" encoding="utf-8"?>
+<p:sld xmlns:a="http://schemas.openxmlformats.org/drawingml/2006/main" xmlns:r="http://schemas.openxmlformats.org/officeDocument/2006/relationships" xmlns:p="http://schemas.openxmlformats.org/presentationml/2006/main">
+  <p:cSld>
+    <p:spTree>
+      <p:nvGrpSpPr>
+        <p:cNvPr id="1" name=""/>
+        <p:cNvGrpSpPr/>
+        <p:nvPr/>
+      </p:nvGrpSpPr>
+      <p:grpSpPr>
+        <a:xfrm>
+          <a:off x="0" y="0"/>
+          <a:ext cx="0" cy="0"/>
+          <a:chOff x="0" y="0"/>
+          <a:chExt cx="0" cy="0"/>
+        </a:xfrm>
+      </p:grpSpPr>
+      <p:sp>
+        <p:nvSpPr>
+          <p:cNvPr id="2" name="Title 1">
+            <a:extLst>
+              <a:ext uri="{FF2B5EF4-FFF2-40B4-BE49-F238E27FC236}">
+                <a16:creationId xmlns:a16="http://schemas.microsoft.com/office/drawing/2014/main" id="{3EC70418-8F83-3C9E-7A93-DF61EC41A1E3}"/>
+              </a:ext>
+            </a:extLst>
+          </p:cNvPr>
+          <p:cNvSpPr>
+            <a:spLocks noGrp="1"/>
+          </p:cNvSpPr>
+          <p:nvPr>
+            <p:ph type="title"/>
+          </p:nvPr>
+        </p:nvSpPr>
+        <p:spPr/>
+        <p:txBody>
+          <a:bodyPr/>
+          <a:lstStyle/>
+          <a:p>
+            <a:r>
+              <a:rPr lang="en-GB" dirty="0"/>
+              <a:t>Finetuning Scenarios</a:t>
+            </a:r>
+          </a:p>
+        </p:txBody>
+      </p:sp>
+      <p:sp>
+        <p:nvSpPr>
+          <p:cNvPr id="3" name="Content Placeholder 2">
+            <a:extLst>
+              <a:ext uri="{FF2B5EF4-FFF2-40B4-BE49-F238E27FC236}">
+                <a16:creationId xmlns:a16="http://schemas.microsoft.com/office/drawing/2014/main" id="{6CAFF65F-2B24-83B6-1383-8EC4F9454843}"/>
+              </a:ext>
+            </a:extLst>
+          </p:cNvPr>
+          <p:cNvSpPr>
+            <a:spLocks noGrp="1"/>
+          </p:cNvSpPr>
+          <p:nvPr>
+            <p:ph idx="1"/>
+          </p:nvPr>
+        </p:nvSpPr>
+        <p:spPr/>
+        <p:txBody>
+          <a:bodyPr>
+            <a:noAutofit/>
+          </a:bodyPr>
+          <a:lstStyle/>
+          <a:p>
+            <a:pPr marL="0" indent="0">
+              <a:buNone/>
+            </a:pPr>
+            <a:r>
+              <a:rPr lang="de-DE" sz="2400" dirty="0"/>
+              <a:t>finetuning gives better adjustment to new task than feature extraction (important if new task differs a lot from pretraining task)</a:t>
+            </a:r>
+          </a:p>
+          <a:p>
+            <a:pPr marL="0" indent="0">
+              <a:buNone/>
+            </a:pPr>
+            <a:r>
+              <a:rPr lang="en-GB" sz="2400" dirty="0">
+                <a:sym typeface="Wingdings" panose="05000000000000000000" pitchFamily="2" charset="2"/>
+              </a:rPr>
+              <a:t> coming along with </a:t>
+            </a:r>
+            <a:r>
+              <a:rPr lang="en-GB" sz="2400" dirty="0"/>
+              <a:t>danger of overfitting</a:t>
+            </a:r>
+          </a:p>
+          <a:p>
+            <a:pPr marL="0" indent="0">
+              <a:buNone/>
+            </a:pPr>
+            <a:endParaRPr lang="en-GB" sz="2400" dirty="0"/>
+          </a:p>
+          <a:p>
+            <a:pPr marL="0" indent="0">
+              <a:buNone/>
+            </a:pPr>
+            <a:r>
+              <a:rPr lang="en-GB" sz="2400" dirty="0"/>
+              <a:t>features more generic in early layers (</a:t>
+            </a:r>
+            <a:r>
+              <a:rPr lang="de-DE" sz="2400" dirty="0"/>
+              <a:t>e.g., </a:t>
+            </a:r>
+            <a:r>
+              <a:rPr lang="de-DE" sz="2400" dirty="0" err="1"/>
+              <a:t>token</a:t>
+            </a:r>
+            <a:r>
+              <a:rPr lang="de-DE" sz="2400" dirty="0"/>
+              <a:t> </a:t>
+            </a:r>
+            <a:r>
+              <a:rPr lang="de-DE" sz="2400" dirty="0" err="1"/>
+              <a:t>structure</a:t>
+            </a:r>
+            <a:r>
+              <a:rPr lang="de-DE" sz="2400" dirty="0"/>
+              <a:t>, </a:t>
+            </a:r>
+            <a:r>
+              <a:rPr lang="de-DE" sz="2400" dirty="0" err="1"/>
+              <a:t>syntax</a:t>
+            </a:r>
+            <a:r>
+              <a:rPr lang="de-DE" sz="2400" dirty="0"/>
+              <a:t>, </a:t>
+            </a:r>
+            <a:r>
+              <a:rPr lang="de-DE" sz="2400" dirty="0" err="1"/>
+              <a:t>part-of-speech</a:t>
+            </a:r>
+            <a:r>
+              <a:rPr lang="en-GB" sz="2400" dirty="0"/>
+              <a:t>) and more specific to the pretraining data in later layers (</a:t>
+            </a:r>
+            <a:r>
+              <a:rPr lang="de-DE" sz="2400" dirty="0"/>
+              <a:t>e.g., </a:t>
+            </a:r>
+            <a:r>
+              <a:rPr lang="de-DE" sz="2400" dirty="0" err="1"/>
+              <a:t>word</a:t>
+            </a:r>
+            <a:r>
+              <a:rPr lang="de-DE" sz="2400" dirty="0"/>
+              <a:t> sense, </a:t>
+            </a:r>
+            <a:r>
+              <a:rPr lang="de-DE" sz="2400" dirty="0" err="1"/>
+              <a:t>entity</a:t>
+            </a:r>
+            <a:r>
+              <a:rPr lang="de-DE" sz="2400" dirty="0"/>
+              <a:t> </a:t>
+            </a:r>
+            <a:r>
+              <a:rPr lang="de-DE" sz="2400" dirty="0" err="1"/>
+              <a:t>linking</a:t>
+            </a:r>
+            <a:r>
+              <a:rPr lang="en-GB" sz="2400" dirty="0"/>
+              <a:t>)</a:t>
+            </a:r>
+          </a:p>
+          <a:p>
+            <a:pPr marL="0" indent="0">
+              <a:buNone/>
+            </a:pPr>
+            <a:r>
+              <a:rPr lang="en-GB" sz="2400" dirty="0">
+                <a:sym typeface="Wingdings" panose="05000000000000000000" pitchFamily="2" charset="2"/>
+              </a:rPr>
+              <a:t> for small finetuning data sets, typically keep weights of early layers fixed to avoid overfitting</a:t>
+            </a:r>
+          </a:p>
+          <a:p>
+            <a:pPr marL="0" indent="0">
+              <a:buNone/>
+            </a:pPr>
+            <a:endParaRPr lang="en-GB" sz="2400" dirty="0"/>
+          </a:p>
+          <a:p>
+            <a:pPr marL="0" indent="0">
+              <a:buNone/>
+            </a:pPr>
+            <a:r>
+              <a:rPr lang="en-GB" sz="2400" dirty="0"/>
+              <a:t>for large finetuning data sets (less danger of overfitting), finetuning all layers can be beneficial</a:t>
+            </a:r>
+          </a:p>
+        </p:txBody>
+      </p:sp>
+      <p:sp>
+        <p:nvSpPr>
+          <p:cNvPr id="4" name="Slide Number Placeholder 3">
+            <a:extLst>
+              <a:ext uri="{FF2B5EF4-FFF2-40B4-BE49-F238E27FC236}">
+                <a16:creationId xmlns:a16="http://schemas.microsoft.com/office/drawing/2014/main" id="{61A47A66-9C27-B5A5-879C-001B250652C9}"/>
+              </a:ext>
+            </a:extLst>
+          </p:cNvPr>
+          <p:cNvSpPr>
+            <a:spLocks noGrp="1"/>
+          </p:cNvSpPr>
+          <p:nvPr>
+            <p:ph type="sldNum" sz="quarter" idx="12"/>
+          </p:nvPr>
+        </p:nvSpPr>
+        <p:spPr/>
+        <p:txBody>
+          <a:bodyPr/>
+          <a:lstStyle/>
+          <a:p>
+            <a:fld id="{3D4C94FE-FF23-4504-88E9-14D481113291}" type="slidenum">
+              <a:rPr lang="en-GB" smtClean="0"/>
+              <a:t>14</a:t>
+            </a:fld>
+            <a:endParaRPr lang="en-GB"/>
+          </a:p>
+        </p:txBody>
+      </p:sp>
+    </p:spTree>
+    <p:extLst>
+      <p:ext uri="{BB962C8B-B14F-4D97-AF65-F5344CB8AC3E}">
+        <p14:creationId xmlns:p14="http://schemas.microsoft.com/office/powerpoint/2010/main" val="2407320420"/>
+      </p:ext>
+    </p:extLst>
+  </p:cSld>
+  <p:clrMapOvr>
+    <a:masterClrMapping/>
+  </p:clrMapOvr>
+</p:sld>
+</file>
+
 <file path=ppt/slides/slide15.xml><?xml version="1.0" encoding="utf-8"?>
 <p:sld xmlns:a="http://schemas.openxmlformats.org/drawingml/2006/main" xmlns:r="http://schemas.openxmlformats.org/officeDocument/2006/relationships" xmlns:p="http://schemas.openxmlformats.org/presentationml/2006/main">
   <p:cSld>
@@ -10111,7 +9526,7 @@
           <p:cNvPr id="2" name="Title 1">
             <a:extLst>
               <a:ext uri="{FF2B5EF4-FFF2-40B4-BE49-F238E27FC236}">
-                <a16:creationId xmlns:a16="http://schemas.microsoft.com/office/drawing/2014/main" id="{3EC70418-8F83-3C9E-7A93-DF61EC41A1E3}"/>
+                <a16:creationId xmlns:a16="http://schemas.microsoft.com/office/drawing/2014/main" id="{B3CEFB21-2CCA-564A-D312-3A4B41E5AAE8}"/>
               </a:ext>
             </a:extLst>
           </p:cNvPr>
@@ -10128,18 +9543,120 @@
           <a:lstStyle/>
           <a:p>
             <a:r>
-              <a:rPr lang="en-GB" dirty="0"/>
-              <a:t>Finetuning Scenarios</a:t>
-            </a:r>
-          </a:p>
-        </p:txBody>
-      </p:sp>
-      <p:sp>
-        <p:nvSpPr>
-          <p:cNvPr id="3" name="Content Placeholder 2">
-            <a:extLst>
-              <a:ext uri="{FF2B5EF4-FFF2-40B4-BE49-F238E27FC236}">
-                <a16:creationId xmlns:a16="http://schemas.microsoft.com/office/drawing/2014/main" id="{6CAFF65F-2B24-83B6-1383-8EC4F9454843}"/>
+              <a:rPr lang="de-DE" dirty="0" err="1"/>
+              <a:t>Why</a:t>
+            </a:r>
+            <a:r>
+              <a:rPr lang="de-DE" dirty="0"/>
+              <a:t> Finetuning? </a:t>
+            </a:r>
+            <a:endParaRPr lang="en-DE" dirty="0"/>
+          </a:p>
+        </p:txBody>
+      </p:sp>
+      <p:sp>
+        <p:nvSpPr>
+          <p:cNvPr id="4" name="Slide Number Placeholder 3">
+            <a:extLst>
+              <a:ext uri="{FF2B5EF4-FFF2-40B4-BE49-F238E27FC236}">
+                <a16:creationId xmlns:a16="http://schemas.microsoft.com/office/drawing/2014/main" id="{FDB15F20-2568-EEBA-AF76-03A86D63DFE2}"/>
+              </a:ext>
+            </a:extLst>
+          </p:cNvPr>
+          <p:cNvSpPr>
+            <a:spLocks noGrp="1"/>
+          </p:cNvSpPr>
+          <p:nvPr>
+            <p:ph type="sldNum" sz="quarter" idx="12"/>
+          </p:nvPr>
+        </p:nvSpPr>
+        <p:spPr/>
+        <p:txBody>
+          <a:bodyPr/>
+          <a:lstStyle/>
+          <a:p>
+            <a:fld id="{849D05A8-43E9-1C49-8606-50AB68220DEC}" type="slidenum">
+              <a:rPr lang="en-DE" smtClean="0"/>
+              <a:t>15</a:t>
+            </a:fld>
+            <a:endParaRPr lang="en-DE"/>
+          </a:p>
+        </p:txBody>
+      </p:sp>
+      <p:pic>
+        <p:nvPicPr>
+          <p:cNvPr id="7" name="Picture 6">
+            <a:extLst>
+              <a:ext uri="{FF2B5EF4-FFF2-40B4-BE49-F238E27FC236}">
+                <a16:creationId xmlns:a16="http://schemas.microsoft.com/office/drawing/2014/main" id="{18758AB1-B3B0-0616-5CEB-865CA618E6D8}"/>
+              </a:ext>
+            </a:extLst>
+          </p:cNvPr>
+          <p:cNvPicPr>
+            <a:picLocks noChangeAspect="1"/>
+          </p:cNvPicPr>
+          <p:nvPr/>
+        </p:nvPicPr>
+        <p:blipFill>
+          <a:blip r:embed="rId2"/>
+          <a:stretch>
+            <a:fillRect/>
+          </a:stretch>
+        </p:blipFill>
+        <p:spPr>
+          <a:xfrm>
+            <a:off x="2613454" y="4100715"/>
+            <a:ext cx="6965091" cy="2261627"/>
+          </a:xfrm>
+          <a:prstGeom prst="rect">
+            <a:avLst/>
+          </a:prstGeom>
+        </p:spPr>
+      </p:pic>
+      <p:sp>
+        <p:nvSpPr>
+          <p:cNvPr id="8" name="TextBox 7">
+            <a:extLst>
+              <a:ext uri="{FF2B5EF4-FFF2-40B4-BE49-F238E27FC236}">
+                <a16:creationId xmlns:a16="http://schemas.microsoft.com/office/drawing/2014/main" id="{CCBF6A85-5F13-3267-7016-A5B242B7FF98}"/>
+              </a:ext>
+            </a:extLst>
+          </p:cNvPr>
+          <p:cNvSpPr txBox="1"/>
+          <p:nvPr/>
+        </p:nvSpPr>
+        <p:spPr>
+          <a:xfrm>
+            <a:off x="6302826" y="6356350"/>
+            <a:ext cx="644512" cy="246221"/>
+          </a:xfrm>
+          <a:prstGeom prst="rect">
+            <a:avLst/>
+          </a:prstGeom>
+          <a:noFill/>
+        </p:spPr>
+        <p:txBody>
+          <a:bodyPr wrap="square" rtlCol="0">
+            <a:spAutoFit/>
+          </a:bodyPr>
+          <a:lstStyle/>
+          <a:p>
+            <a:r>
+              <a:rPr lang="de-DE" sz="1000" dirty="0">
+                <a:hlinkClick r:id="rId3"/>
+              </a:rPr>
+              <a:t>source</a:t>
+            </a:r>
+            <a:endParaRPr lang="de-DE" sz="1000" dirty="0"/>
+          </a:p>
+        </p:txBody>
+      </p:sp>
+      <p:sp>
+        <p:nvSpPr>
+          <p:cNvPr id="9" name="Inhaltsplatzhalter 8">
+            <a:extLst>
+              <a:ext uri="{FF2B5EF4-FFF2-40B4-BE49-F238E27FC236}">
+                <a16:creationId xmlns:a16="http://schemas.microsoft.com/office/drawing/2014/main" id="{26BAE1A0-1615-EE5C-7E82-5B0C212C8B02}"/>
               </a:ext>
             </a:extLst>
           </p:cNvPr>
@@ -10152,174 +9669,182 @@
         </p:nvSpPr>
         <p:spPr/>
         <p:txBody>
-          <a:bodyPr>
-            <a:noAutofit/>
-          </a:bodyPr>
+          <a:bodyPr/>
           <a:lstStyle/>
           <a:p>
             <a:pPr marL="0" indent="0">
               <a:buNone/>
             </a:pPr>
             <a:r>
-              <a:rPr lang="de-DE" sz="2400" dirty="0"/>
-              <a:t>finetuning gives better adjustment to new task than feature extraction (important if new task differs a lot from pretraining task)</a:t>
+              <a:rPr lang="de-DE" dirty="0" err="1"/>
+              <a:t>make</a:t>
+            </a:r>
+            <a:r>
+              <a:rPr lang="de-DE" dirty="0"/>
+              <a:t> </a:t>
+            </a:r>
+            <a:r>
+              <a:rPr lang="de-DE" dirty="0" err="1"/>
+              <a:t>use</a:t>
+            </a:r>
+            <a:r>
+              <a:rPr lang="de-DE" dirty="0"/>
+              <a:t> </a:t>
+            </a:r>
+            <a:r>
+              <a:rPr lang="de-DE" dirty="0" err="1"/>
+              <a:t>of</a:t>
+            </a:r>
+            <a:r>
+              <a:rPr lang="de-DE" dirty="0"/>
+              <a:t> </a:t>
+            </a:r>
+            <a:r>
+              <a:rPr lang="de-DE" dirty="0" err="1"/>
+              <a:t>your</a:t>
+            </a:r>
+            <a:r>
+              <a:rPr lang="de-DE" dirty="0"/>
+              <a:t> own </a:t>
+            </a:r>
+            <a:r>
+              <a:rPr lang="de-DE" dirty="0" err="1"/>
+              <a:t>data</a:t>
+            </a:r>
+            <a:r>
+              <a:rPr lang="de-DE" dirty="0"/>
+              <a:t> (domain-</a:t>
+            </a:r>
+            <a:r>
+              <a:rPr lang="de-DE" dirty="0" err="1"/>
+              <a:t>specific</a:t>
+            </a:r>
+            <a:r>
+              <a:rPr lang="de-DE" dirty="0"/>
+              <a:t>, high-quality)</a:t>
             </a:r>
           </a:p>
           <a:p>
             <a:pPr marL="0" indent="0">
               <a:buNone/>
             </a:pPr>
-            <a:r>
-              <a:rPr lang="en-GB" sz="2400" dirty="0">
-                <a:sym typeface="Wingdings" panose="05000000000000000000" pitchFamily="2" charset="2"/>
-              </a:rPr>
-              <a:t> coming along with </a:t>
-            </a:r>
-            <a:r>
-              <a:rPr lang="en-GB" sz="2400" dirty="0"/>
-              <a:t>danger of overfitting</a:t>
-            </a:r>
+            <a:endParaRPr lang="de-DE" dirty="0"/>
           </a:p>
           <a:p>
             <a:pPr marL="0" indent="0">
               <a:buNone/>
             </a:pPr>
-            <a:endParaRPr lang="en-GB" sz="2400" dirty="0"/>
-          </a:p>
-          <a:p>
-            <a:pPr marL="0" indent="0">
-              <a:buNone/>
-            </a:pPr>
-            <a:r>
-              <a:rPr lang="en-GB" sz="2400" dirty="0"/>
-              <a:t>features more generic in early layers (</a:t>
-            </a:r>
-            <a:r>
-              <a:rPr lang="de-DE" sz="2400" dirty="0"/>
-              <a:t>e.g., </a:t>
-            </a:r>
-            <a:r>
-              <a:rPr lang="de-DE" sz="2400" dirty="0" err="1"/>
-              <a:t>token</a:t>
-            </a:r>
-            <a:r>
-              <a:rPr lang="de-DE" sz="2400" dirty="0"/>
-              <a:t> </a:t>
-            </a:r>
-            <a:r>
-              <a:rPr lang="de-DE" sz="2400" dirty="0" err="1"/>
-              <a:t>structure</a:t>
-            </a:r>
-            <a:r>
-              <a:rPr lang="de-DE" sz="2400" dirty="0"/>
-              <a:t>, </a:t>
-            </a:r>
-            <a:r>
-              <a:rPr lang="de-DE" sz="2400" dirty="0" err="1"/>
-              <a:t>syntax</a:t>
-            </a:r>
-            <a:r>
-              <a:rPr lang="de-DE" sz="2400" dirty="0"/>
-              <a:t>, </a:t>
-            </a:r>
-            <a:r>
-              <a:rPr lang="de-DE" sz="2400" dirty="0" err="1"/>
-              <a:t>part-of-speech</a:t>
-            </a:r>
-            <a:r>
-              <a:rPr lang="en-GB" sz="2400" dirty="0"/>
-              <a:t>) and more specific to the pretraining data in later layers (</a:t>
-            </a:r>
-            <a:r>
-              <a:rPr lang="de-DE" sz="2400" dirty="0"/>
-              <a:t>e.g., </a:t>
-            </a:r>
-            <a:r>
-              <a:rPr lang="de-DE" sz="2400" dirty="0" err="1"/>
-              <a:t>word</a:t>
-            </a:r>
-            <a:r>
-              <a:rPr lang="de-DE" sz="2400" dirty="0"/>
-              <a:t> sense, </a:t>
-            </a:r>
-            <a:r>
-              <a:rPr lang="de-DE" sz="2400" dirty="0" err="1"/>
-              <a:t>entity</a:t>
-            </a:r>
-            <a:r>
-              <a:rPr lang="de-DE" sz="2400" dirty="0"/>
-              <a:t> </a:t>
-            </a:r>
-            <a:r>
-              <a:rPr lang="de-DE" sz="2400" dirty="0" err="1"/>
-              <a:t>linking</a:t>
-            </a:r>
-            <a:r>
-              <a:rPr lang="en-GB" sz="2400" dirty="0"/>
+            <a:r>
+              <a:rPr lang="de-DE" dirty="0" err="1"/>
+              <a:t>instruction</a:t>
+            </a:r>
+            <a:r>
+              <a:rPr lang="de-DE" dirty="0"/>
+              <a:t> </a:t>
+            </a:r>
+            <a:r>
+              <a:rPr lang="de-DE" dirty="0" err="1"/>
+              <a:t>tuning</a:t>
+            </a:r>
+            <a:r>
+              <a:rPr lang="de-DE" dirty="0"/>
+              <a:t> </a:t>
+            </a:r>
+            <a:r>
+              <a:rPr lang="de-DE" dirty="0" err="1"/>
+              <a:t>typically</a:t>
+            </a:r>
+            <a:r>
+              <a:rPr lang="de-DE" dirty="0"/>
+              <a:t> </a:t>
+            </a:r>
+            <a:r>
+              <a:rPr lang="de-DE" dirty="0" err="1"/>
+              <a:t>for</a:t>
+            </a:r>
+            <a:r>
+              <a:rPr lang="de-DE" dirty="0"/>
+              <a:t> </a:t>
+            </a:r>
+            <a:r>
+              <a:rPr lang="de-DE" dirty="0" err="1"/>
+              <a:t>more</a:t>
+            </a:r>
+            <a:r>
+              <a:rPr lang="de-DE" dirty="0"/>
+              <a:t> </a:t>
+            </a:r>
+            <a:r>
+              <a:rPr lang="de-DE" dirty="0" err="1"/>
+              <a:t>generic</a:t>
+            </a:r>
+            <a:r>
+              <a:rPr lang="de-DE" dirty="0"/>
+              <a:t> expert, like </a:t>
+            </a:r>
+            <a:r>
+              <a:rPr lang="de-DE" dirty="0" err="1"/>
+              <a:t>coding</a:t>
+            </a:r>
+            <a:r>
+              <a:rPr lang="de-DE" dirty="0"/>
+              <a:t> (but </a:t>
+            </a:r>
+            <a:r>
+              <a:rPr lang="de-DE" dirty="0" err="1"/>
+              <a:t>can</a:t>
+            </a:r>
+            <a:r>
+              <a:rPr lang="de-DE" dirty="0"/>
+              <a:t> also </a:t>
+            </a:r>
+            <a:r>
+              <a:rPr lang="de-DE" dirty="0" err="1"/>
+              <a:t>be</a:t>
+            </a:r>
+            <a:r>
+              <a:rPr lang="de-DE" dirty="0"/>
+              <a:t> a </a:t>
+            </a:r>
+            <a:r>
+              <a:rPr lang="de-DE" dirty="0" err="1"/>
+              <a:t>more</a:t>
+            </a:r>
+            <a:r>
+              <a:rPr lang="de-DE" dirty="0"/>
+              <a:t> </a:t>
+            </a:r>
+            <a:r>
+              <a:rPr lang="de-DE" dirty="0" err="1"/>
+              <a:t>specific</a:t>
+            </a:r>
+            <a:r>
+              <a:rPr lang="de-DE" dirty="0"/>
+              <a:t> </a:t>
+            </a:r>
+            <a:r>
+              <a:rPr lang="de-DE" dirty="0" err="1"/>
+              <a:t>thing</a:t>
+            </a:r>
+            <a:r>
+              <a:rPr lang="de-DE" dirty="0"/>
+              <a:t> on private </a:t>
+            </a:r>
+            <a:r>
+              <a:rPr lang="de-DE" dirty="0" err="1"/>
+              <a:t>data</a:t>
+            </a:r>
+            <a:r>
+              <a:rPr lang="de-DE" dirty="0"/>
               <a:t>)</a:t>
             </a:r>
-          </a:p>
-          <a:p>
-            <a:pPr marL="0" indent="0">
-              <a:buNone/>
-            </a:pPr>
-            <a:r>
-              <a:rPr lang="en-GB" sz="2400" dirty="0">
-                <a:sym typeface="Wingdings" panose="05000000000000000000" pitchFamily="2" charset="2"/>
-              </a:rPr>
-              <a:t> for small finetuning data sets, typically keep weights of early layers fixed to avoid overfitting</a:t>
-            </a:r>
-          </a:p>
-          <a:p>
-            <a:pPr marL="0" indent="0">
-              <a:buNone/>
-            </a:pPr>
-            <a:endParaRPr lang="en-GB" sz="2400" dirty="0"/>
-          </a:p>
-          <a:p>
-            <a:pPr marL="0" indent="0">
-              <a:buNone/>
-            </a:pPr>
-            <a:r>
-              <a:rPr lang="en-GB" sz="2400" dirty="0"/>
-              <a:t>for large finetuning data sets (less danger of overfitting), finetuning all layers can be beneficial</a:t>
-            </a:r>
-          </a:p>
-        </p:txBody>
-      </p:sp>
-      <p:sp>
-        <p:nvSpPr>
-          <p:cNvPr id="4" name="Slide Number Placeholder 3">
-            <a:extLst>
-              <a:ext uri="{FF2B5EF4-FFF2-40B4-BE49-F238E27FC236}">
-                <a16:creationId xmlns:a16="http://schemas.microsoft.com/office/drawing/2014/main" id="{61A47A66-9C27-B5A5-879C-001B250652C9}"/>
-              </a:ext>
-            </a:extLst>
-          </p:cNvPr>
-          <p:cNvSpPr>
-            <a:spLocks noGrp="1"/>
-          </p:cNvSpPr>
-          <p:nvPr>
-            <p:ph type="sldNum" sz="quarter" idx="12"/>
-          </p:nvPr>
-        </p:nvSpPr>
-        <p:spPr/>
-        <p:txBody>
-          <a:bodyPr/>
-          <a:lstStyle/>
-          <a:p>
-            <a:fld id="{3D4C94FE-FF23-4504-88E9-14D481113291}" type="slidenum">
-              <a:rPr lang="en-GB" smtClean="0"/>
-              <a:t>15</a:t>
-            </a:fld>
-            <a:endParaRPr lang="en-GB"/>
           </a:p>
         </p:txBody>
       </p:sp>
     </p:spTree>
     <p:extLst>
       <p:ext uri="{BB962C8B-B14F-4D97-AF65-F5344CB8AC3E}">
-        <p14:creationId xmlns:p14="http://schemas.microsoft.com/office/powerpoint/2010/main" val="2407320420"/>
+        <p14:creationId xmlns:p14="http://schemas.microsoft.com/office/powerpoint/2010/main" val="3433214716"/>
       </p:ext>
     </p:extLst>
   </p:cSld>
@@ -10348,10 +9873,10 @@
       </p:grpSpPr>
       <p:sp>
         <p:nvSpPr>
-          <p:cNvPr id="2" name="Title 1">
-            <a:extLst>
-              <a:ext uri="{FF2B5EF4-FFF2-40B4-BE49-F238E27FC236}">
-                <a16:creationId xmlns:a16="http://schemas.microsoft.com/office/drawing/2014/main" id="{B3CEFB21-2CCA-564A-D312-3A4B41E5AAE8}"/>
+          <p:cNvPr id="5" name="Titel 4">
+            <a:extLst>
+              <a:ext uri="{FF2B5EF4-FFF2-40B4-BE49-F238E27FC236}">
+                <a16:creationId xmlns:a16="http://schemas.microsoft.com/office/drawing/2014/main" id="{4ED462E1-7391-FF3F-8ADF-6D5135CCE104}"/>
               </a:ext>
             </a:extLst>
           </p:cNvPr>
@@ -10367,24 +9892,16 @@
           <a:bodyPr/>
           <a:lstStyle/>
           <a:p>
-            <a:r>
-              <a:rPr lang="de-DE" dirty="0" err="1"/>
-              <a:t>Why</a:t>
-            </a:r>
-            <a:r>
-              <a:rPr lang="de-DE" dirty="0"/>
-              <a:t> Finetuning? </a:t>
-            </a:r>
-            <a:endParaRPr lang="en-DE" dirty="0"/>
-          </a:p>
-        </p:txBody>
-      </p:sp>
-      <p:sp>
-        <p:nvSpPr>
-          <p:cNvPr id="4" name="Slide Number Placeholder 3">
-            <a:extLst>
-              <a:ext uri="{FF2B5EF4-FFF2-40B4-BE49-F238E27FC236}">
-                <a16:creationId xmlns:a16="http://schemas.microsoft.com/office/drawing/2014/main" id="{FDB15F20-2568-EEBA-AF76-03A86D63DFE2}"/>
+            <a:endParaRPr lang="de-DE"/>
+          </a:p>
+        </p:txBody>
+      </p:sp>
+      <p:sp>
+        <p:nvSpPr>
+          <p:cNvPr id="4" name="Foliennummernplatzhalter 3">
+            <a:extLst>
+              <a:ext uri="{FF2B5EF4-FFF2-40B4-BE49-F238E27FC236}">
+                <a16:creationId xmlns:a16="http://schemas.microsoft.com/office/drawing/2014/main" id="{7B347D77-2736-E668-977C-E7F81439B1C6}"/>
               </a:ext>
             </a:extLst>
           </p:cNvPr>
@@ -10400,351 +9917,9 @@
           <a:bodyPr/>
           <a:lstStyle/>
           <a:p>
-            <a:fld id="{849D05A8-43E9-1C49-8606-50AB68220DEC}" type="slidenum">
-              <a:rPr lang="en-DE" smtClean="0"/>
-              <a:t>16</a:t>
-            </a:fld>
-            <a:endParaRPr lang="en-DE"/>
-          </a:p>
-        </p:txBody>
-      </p:sp>
-      <p:pic>
-        <p:nvPicPr>
-          <p:cNvPr id="7" name="Picture 6">
-            <a:extLst>
-              <a:ext uri="{FF2B5EF4-FFF2-40B4-BE49-F238E27FC236}">
-                <a16:creationId xmlns:a16="http://schemas.microsoft.com/office/drawing/2014/main" id="{18758AB1-B3B0-0616-5CEB-865CA618E6D8}"/>
-              </a:ext>
-            </a:extLst>
-          </p:cNvPr>
-          <p:cNvPicPr>
-            <a:picLocks noChangeAspect="1"/>
-          </p:cNvPicPr>
-          <p:nvPr/>
-        </p:nvPicPr>
-        <p:blipFill>
-          <a:blip r:embed="rId2"/>
-          <a:stretch>
-            <a:fillRect/>
-          </a:stretch>
-        </p:blipFill>
-        <p:spPr>
-          <a:xfrm>
-            <a:off x="2613454" y="4100715"/>
-            <a:ext cx="6965091" cy="2261627"/>
-          </a:xfrm>
-          <a:prstGeom prst="rect">
-            <a:avLst/>
-          </a:prstGeom>
-        </p:spPr>
-      </p:pic>
-      <p:sp>
-        <p:nvSpPr>
-          <p:cNvPr id="8" name="TextBox 7">
-            <a:extLst>
-              <a:ext uri="{FF2B5EF4-FFF2-40B4-BE49-F238E27FC236}">
-                <a16:creationId xmlns:a16="http://schemas.microsoft.com/office/drawing/2014/main" id="{CCBF6A85-5F13-3267-7016-A5B242B7FF98}"/>
-              </a:ext>
-            </a:extLst>
-          </p:cNvPr>
-          <p:cNvSpPr txBox="1"/>
-          <p:nvPr/>
-        </p:nvSpPr>
-        <p:spPr>
-          <a:xfrm>
-            <a:off x="6302826" y="6356350"/>
-            <a:ext cx="644512" cy="246221"/>
-          </a:xfrm>
-          <a:prstGeom prst="rect">
-            <a:avLst/>
-          </a:prstGeom>
-          <a:noFill/>
-        </p:spPr>
-        <p:txBody>
-          <a:bodyPr wrap="square" rtlCol="0">
-            <a:spAutoFit/>
-          </a:bodyPr>
-          <a:lstStyle/>
-          <a:p>
-            <a:r>
-              <a:rPr lang="de-DE" sz="1000" dirty="0">
-                <a:hlinkClick r:id="rId3"/>
-              </a:rPr>
-              <a:t>source</a:t>
-            </a:r>
-            <a:endParaRPr lang="de-DE" sz="1000" dirty="0"/>
-          </a:p>
-        </p:txBody>
-      </p:sp>
-      <p:sp>
-        <p:nvSpPr>
-          <p:cNvPr id="9" name="Inhaltsplatzhalter 8">
-            <a:extLst>
-              <a:ext uri="{FF2B5EF4-FFF2-40B4-BE49-F238E27FC236}">
-                <a16:creationId xmlns:a16="http://schemas.microsoft.com/office/drawing/2014/main" id="{26BAE1A0-1615-EE5C-7E82-5B0C212C8B02}"/>
-              </a:ext>
-            </a:extLst>
-          </p:cNvPr>
-          <p:cNvSpPr>
-            <a:spLocks noGrp="1"/>
-          </p:cNvSpPr>
-          <p:nvPr>
-            <p:ph idx="1"/>
-          </p:nvPr>
-        </p:nvSpPr>
-        <p:spPr/>
-        <p:txBody>
-          <a:bodyPr/>
-          <a:lstStyle/>
-          <a:p>
-            <a:pPr marL="0" indent="0">
-              <a:buNone/>
-            </a:pPr>
-            <a:r>
-              <a:rPr lang="de-DE" dirty="0" err="1"/>
-              <a:t>make</a:t>
-            </a:r>
-            <a:r>
-              <a:rPr lang="de-DE" dirty="0"/>
-              <a:t> </a:t>
-            </a:r>
-            <a:r>
-              <a:rPr lang="de-DE" dirty="0" err="1"/>
-              <a:t>use</a:t>
-            </a:r>
-            <a:r>
-              <a:rPr lang="de-DE" dirty="0"/>
-              <a:t> </a:t>
-            </a:r>
-            <a:r>
-              <a:rPr lang="de-DE" dirty="0" err="1"/>
-              <a:t>of</a:t>
-            </a:r>
-            <a:r>
-              <a:rPr lang="de-DE" dirty="0"/>
-              <a:t> </a:t>
-            </a:r>
-            <a:r>
-              <a:rPr lang="de-DE" dirty="0" err="1"/>
-              <a:t>your</a:t>
-            </a:r>
-            <a:r>
-              <a:rPr lang="de-DE" dirty="0"/>
-              <a:t> own </a:t>
-            </a:r>
-            <a:r>
-              <a:rPr lang="de-DE" dirty="0" err="1"/>
-              <a:t>data</a:t>
-            </a:r>
-            <a:r>
-              <a:rPr lang="de-DE" dirty="0"/>
-              <a:t> (domain-</a:t>
-            </a:r>
-            <a:r>
-              <a:rPr lang="de-DE" dirty="0" err="1"/>
-              <a:t>specific</a:t>
-            </a:r>
-            <a:r>
-              <a:rPr lang="de-DE" dirty="0"/>
-              <a:t>, high-quality)</a:t>
-            </a:r>
-          </a:p>
-          <a:p>
-            <a:pPr marL="0" indent="0">
-              <a:buNone/>
-            </a:pPr>
-            <a:endParaRPr lang="de-DE" dirty="0"/>
-          </a:p>
-          <a:p>
-            <a:pPr marL="0" indent="0">
-              <a:buNone/>
-            </a:pPr>
-            <a:r>
-              <a:rPr lang="de-DE" dirty="0" err="1"/>
-              <a:t>instruction</a:t>
-            </a:r>
-            <a:r>
-              <a:rPr lang="de-DE" dirty="0"/>
-              <a:t> </a:t>
-            </a:r>
-            <a:r>
-              <a:rPr lang="de-DE" dirty="0" err="1"/>
-              <a:t>tuning</a:t>
-            </a:r>
-            <a:r>
-              <a:rPr lang="de-DE" dirty="0"/>
-              <a:t> </a:t>
-            </a:r>
-            <a:r>
-              <a:rPr lang="de-DE" dirty="0" err="1"/>
-              <a:t>typically</a:t>
-            </a:r>
-            <a:r>
-              <a:rPr lang="de-DE" dirty="0"/>
-              <a:t> </a:t>
-            </a:r>
-            <a:r>
-              <a:rPr lang="de-DE" dirty="0" err="1"/>
-              <a:t>for</a:t>
-            </a:r>
-            <a:r>
-              <a:rPr lang="de-DE" dirty="0"/>
-              <a:t> </a:t>
-            </a:r>
-            <a:r>
-              <a:rPr lang="de-DE" dirty="0" err="1"/>
-              <a:t>more</a:t>
-            </a:r>
-            <a:r>
-              <a:rPr lang="de-DE" dirty="0"/>
-              <a:t> </a:t>
-            </a:r>
-            <a:r>
-              <a:rPr lang="de-DE" dirty="0" err="1"/>
-              <a:t>generic</a:t>
-            </a:r>
-            <a:r>
-              <a:rPr lang="de-DE" dirty="0"/>
-              <a:t> expert, like </a:t>
-            </a:r>
-            <a:r>
-              <a:rPr lang="de-DE" dirty="0" err="1"/>
-              <a:t>coding</a:t>
-            </a:r>
-            <a:r>
-              <a:rPr lang="de-DE" dirty="0"/>
-              <a:t> (but </a:t>
-            </a:r>
-            <a:r>
-              <a:rPr lang="de-DE" dirty="0" err="1"/>
-              <a:t>can</a:t>
-            </a:r>
-            <a:r>
-              <a:rPr lang="de-DE" dirty="0"/>
-              <a:t> also </a:t>
-            </a:r>
-            <a:r>
-              <a:rPr lang="de-DE" dirty="0" err="1"/>
-              <a:t>be</a:t>
-            </a:r>
-            <a:r>
-              <a:rPr lang="de-DE" dirty="0"/>
-              <a:t> a </a:t>
-            </a:r>
-            <a:r>
-              <a:rPr lang="de-DE" dirty="0" err="1"/>
-              <a:t>more</a:t>
-            </a:r>
-            <a:r>
-              <a:rPr lang="de-DE" dirty="0"/>
-              <a:t> </a:t>
-            </a:r>
-            <a:r>
-              <a:rPr lang="de-DE" dirty="0" err="1"/>
-              <a:t>specific</a:t>
-            </a:r>
-            <a:r>
-              <a:rPr lang="de-DE" dirty="0"/>
-              <a:t> </a:t>
-            </a:r>
-            <a:r>
-              <a:rPr lang="de-DE" dirty="0" err="1"/>
-              <a:t>thing</a:t>
-            </a:r>
-            <a:r>
-              <a:rPr lang="de-DE" dirty="0"/>
-              <a:t> on private </a:t>
-            </a:r>
-            <a:r>
-              <a:rPr lang="de-DE" dirty="0" err="1"/>
-              <a:t>data</a:t>
-            </a:r>
-            <a:r>
-              <a:rPr lang="de-DE" dirty="0"/>
-              <a:t>)</a:t>
-            </a:r>
-          </a:p>
-        </p:txBody>
-      </p:sp>
-    </p:spTree>
-    <p:extLst>
-      <p:ext uri="{BB962C8B-B14F-4D97-AF65-F5344CB8AC3E}">
-        <p14:creationId xmlns:p14="http://schemas.microsoft.com/office/powerpoint/2010/main" val="3433214716"/>
-      </p:ext>
-    </p:extLst>
-  </p:cSld>
-  <p:clrMapOvr>
-    <a:masterClrMapping/>
-  </p:clrMapOvr>
-</p:sld>
-</file>
-
-<file path=ppt/slides/slide17.xml><?xml version="1.0" encoding="utf-8"?>
-<p:sld xmlns:a="http://schemas.openxmlformats.org/drawingml/2006/main" xmlns:r="http://schemas.openxmlformats.org/officeDocument/2006/relationships" xmlns:p="http://schemas.openxmlformats.org/presentationml/2006/main">
-  <p:cSld>
-    <p:spTree>
-      <p:nvGrpSpPr>
-        <p:cNvPr id="1" name=""/>
-        <p:cNvGrpSpPr/>
-        <p:nvPr/>
-      </p:nvGrpSpPr>
-      <p:grpSpPr>
-        <a:xfrm>
-          <a:off x="0" y="0"/>
-          <a:ext cx="0" cy="0"/>
-          <a:chOff x="0" y="0"/>
-          <a:chExt cx="0" cy="0"/>
-        </a:xfrm>
-      </p:grpSpPr>
-      <p:sp>
-        <p:nvSpPr>
-          <p:cNvPr id="5" name="Titel 4">
-            <a:extLst>
-              <a:ext uri="{FF2B5EF4-FFF2-40B4-BE49-F238E27FC236}">
-                <a16:creationId xmlns:a16="http://schemas.microsoft.com/office/drawing/2014/main" id="{4ED462E1-7391-FF3F-8ADF-6D5135CCE104}"/>
-              </a:ext>
-            </a:extLst>
-          </p:cNvPr>
-          <p:cNvSpPr>
-            <a:spLocks noGrp="1"/>
-          </p:cNvSpPr>
-          <p:nvPr>
-            <p:ph type="title"/>
-          </p:nvPr>
-        </p:nvSpPr>
-        <p:spPr/>
-        <p:txBody>
-          <a:bodyPr/>
-          <a:lstStyle/>
-          <a:p>
-            <a:endParaRPr lang="de-DE"/>
-          </a:p>
-        </p:txBody>
-      </p:sp>
-      <p:sp>
-        <p:nvSpPr>
-          <p:cNvPr id="4" name="Foliennummernplatzhalter 3">
-            <a:extLst>
-              <a:ext uri="{FF2B5EF4-FFF2-40B4-BE49-F238E27FC236}">
-                <a16:creationId xmlns:a16="http://schemas.microsoft.com/office/drawing/2014/main" id="{7B347D77-2736-E668-977C-E7F81439B1C6}"/>
-              </a:ext>
-            </a:extLst>
-          </p:cNvPr>
-          <p:cNvSpPr>
-            <a:spLocks noGrp="1"/>
-          </p:cNvSpPr>
-          <p:nvPr>
-            <p:ph type="sldNum" sz="quarter" idx="12"/>
-          </p:nvPr>
-        </p:nvSpPr>
-        <p:spPr/>
-        <p:txBody>
-          <a:bodyPr/>
-          <a:lstStyle/>
-          <a:p>
             <a:fld id="{4055531C-5681-6B44-B2CA-926D7A74B06D}" type="slidenum">
               <a:rPr lang="de-DE" smtClean="0"/>
-              <a:t>17</a:t>
+              <a:t>16</a:t>
             </a:fld>
             <a:endParaRPr lang="de-DE"/>
           </a:p>
@@ -10793,6 +9968,148 @@
 </p:sld>
 </file>
 
+<file path=ppt/slides/slide17.xml><?xml version="1.0" encoding="utf-8"?>
+<p:sld xmlns:a="http://schemas.openxmlformats.org/drawingml/2006/main" xmlns:r="http://schemas.openxmlformats.org/officeDocument/2006/relationships" xmlns:p="http://schemas.openxmlformats.org/presentationml/2006/main">
+  <p:cSld>
+    <p:spTree>
+      <p:nvGrpSpPr>
+        <p:cNvPr id="1" name=""/>
+        <p:cNvGrpSpPr/>
+        <p:nvPr/>
+      </p:nvGrpSpPr>
+      <p:grpSpPr>
+        <a:xfrm>
+          <a:off x="0" y="0"/>
+          <a:ext cx="0" cy="0"/>
+          <a:chOff x="0" y="0"/>
+          <a:chExt cx="0" cy="0"/>
+        </a:xfrm>
+      </p:grpSpPr>
+      <p:sp>
+        <p:nvSpPr>
+          <p:cNvPr id="2" name="Titel 1">
+            <a:extLst>
+              <a:ext uri="{FF2B5EF4-FFF2-40B4-BE49-F238E27FC236}">
+                <a16:creationId xmlns:a16="http://schemas.microsoft.com/office/drawing/2014/main" id="{E8DCEE70-38C0-6533-2AC9-319D23948A94}"/>
+              </a:ext>
+            </a:extLst>
+          </p:cNvPr>
+          <p:cNvSpPr>
+            <a:spLocks noGrp="1"/>
+          </p:cNvSpPr>
+          <p:nvPr>
+            <p:ph type="title"/>
+          </p:nvPr>
+        </p:nvSpPr>
+        <p:spPr/>
+        <p:txBody>
+          <a:bodyPr/>
+          <a:lstStyle/>
+          <a:p>
+            <a:r>
+              <a:rPr lang="de-DE" dirty="0" err="1"/>
+              <a:t>Instruction</a:t>
+            </a:r>
+            <a:r>
+              <a:rPr lang="de-DE" dirty="0"/>
+              <a:t> Tuning</a:t>
+            </a:r>
+          </a:p>
+        </p:txBody>
+      </p:sp>
+      <p:sp>
+        <p:nvSpPr>
+          <p:cNvPr id="3" name="Inhaltsplatzhalter 2">
+            <a:extLst>
+              <a:ext uri="{FF2B5EF4-FFF2-40B4-BE49-F238E27FC236}">
+                <a16:creationId xmlns:a16="http://schemas.microsoft.com/office/drawing/2014/main" id="{6058E5BD-E8C1-3A42-10A3-CBE78B1726A4}"/>
+              </a:ext>
+            </a:extLst>
+          </p:cNvPr>
+          <p:cNvSpPr>
+            <a:spLocks noGrp="1"/>
+          </p:cNvSpPr>
+          <p:nvPr>
+            <p:ph idx="1"/>
+          </p:nvPr>
+        </p:nvSpPr>
+        <p:spPr/>
+        <p:txBody>
+          <a:bodyPr/>
+          <a:lstStyle/>
+          <a:p>
+            <a:r>
+              <a:rPr lang="de-DE" dirty="0"/>
+              <a:t>…</a:t>
+            </a:r>
+          </a:p>
+          <a:p>
+            <a:r>
+              <a:rPr lang="en-GB" dirty="0"/>
+              <a:t>supervised fine-tuning (</a:t>
+            </a:r>
+            <a:r>
+              <a:rPr lang="en-GB" dirty="0">
+                <a:hlinkClick r:id="rId2"/>
+              </a:rPr>
+              <a:t>SFT</a:t>
+            </a:r>
+            <a:r>
+              <a:rPr lang="en-GB" dirty="0"/>
+              <a:t>)</a:t>
+            </a:r>
+          </a:p>
+          <a:p>
+            <a:r>
+              <a:rPr lang="en-GB" dirty="0"/>
+              <a:t>(e.g., formatting)</a:t>
+            </a:r>
+            <a:endParaRPr lang="de-DE" dirty="0"/>
+          </a:p>
+        </p:txBody>
+      </p:sp>
+      <p:sp>
+        <p:nvSpPr>
+          <p:cNvPr id="4" name="Foliennummernplatzhalter 3">
+            <a:extLst>
+              <a:ext uri="{FF2B5EF4-FFF2-40B4-BE49-F238E27FC236}">
+                <a16:creationId xmlns:a16="http://schemas.microsoft.com/office/drawing/2014/main" id="{97D7E70E-8F09-7DCF-2E5A-5879BF103E88}"/>
+              </a:ext>
+            </a:extLst>
+          </p:cNvPr>
+          <p:cNvSpPr>
+            <a:spLocks noGrp="1"/>
+          </p:cNvSpPr>
+          <p:nvPr>
+            <p:ph type="sldNum" sz="quarter" idx="12"/>
+          </p:nvPr>
+        </p:nvSpPr>
+        <p:spPr/>
+        <p:txBody>
+          <a:bodyPr/>
+          <a:lstStyle/>
+          <a:p>
+            <a:fld id="{4055531C-5681-6B44-B2CA-926D7A74B06D}" type="slidenum">
+              <a:rPr lang="de-DE" smtClean="0"/>
+              <a:t>17</a:t>
+            </a:fld>
+            <a:endParaRPr lang="de-DE"/>
+          </a:p>
+        </p:txBody>
+      </p:sp>
+    </p:spTree>
+    <p:extLst>
+      <p:ext uri="{BB962C8B-B14F-4D97-AF65-F5344CB8AC3E}">
+        <p14:creationId xmlns:p14="http://schemas.microsoft.com/office/powerpoint/2010/main" val="3009532390"/>
+      </p:ext>
+    </p:extLst>
+  </p:cSld>
+  <p:clrMapOvr>
+    <a:masterClrMapping/>
+  </p:clrMapOvr>
+</p:sld>
+</file>
+
 <file path=ppt/slides/slide18.xml><?xml version="1.0" encoding="utf-8"?>
 <p:sld xmlns:a="http://schemas.openxmlformats.org/drawingml/2006/main" xmlns:r="http://schemas.openxmlformats.org/officeDocument/2006/relationships" xmlns:p="http://schemas.openxmlformats.org/presentationml/2006/main">
   <p:cSld>
@@ -10815,7 +10132,7 @@
           <p:cNvPr id="2" name="Titel 1">
             <a:extLst>
               <a:ext uri="{FF2B5EF4-FFF2-40B4-BE49-F238E27FC236}">
-                <a16:creationId xmlns:a16="http://schemas.microsoft.com/office/drawing/2014/main" id="{E8DCEE70-38C0-6533-2AC9-319D23948A94}"/>
+                <a16:creationId xmlns:a16="http://schemas.microsoft.com/office/drawing/2014/main" id="{66694547-5151-D7D3-A925-23192933D4D6}"/>
               </a:ext>
             </a:extLst>
           </p:cNvPr>
@@ -10832,13 +10149,14 @@
           <a:lstStyle/>
           <a:p>
             <a:r>
-              <a:rPr lang="de-DE" dirty="0" err="1"/>
-              <a:t>Instruction</a:t>
-            </a:r>
-            <a:r>
-              <a:rPr lang="de-DE" dirty="0"/>
-              <a:t> Tuning</a:t>
-            </a:r>
+              <a:rPr lang="de-DE" dirty="0"/>
+              <a:t>Use Case: Question </a:t>
+            </a:r>
+            <a:r>
+              <a:rPr lang="de-DE" dirty="0" err="1"/>
+              <a:t>Answering</a:t>
+            </a:r>
+            <a:endParaRPr lang="de-DE" dirty="0"/>
           </a:p>
         </p:txBody>
       </p:sp>
@@ -10847,7 +10165,7 @@
           <p:cNvPr id="3" name="Inhaltsplatzhalter 2">
             <a:extLst>
               <a:ext uri="{FF2B5EF4-FFF2-40B4-BE49-F238E27FC236}">
-                <a16:creationId xmlns:a16="http://schemas.microsoft.com/office/drawing/2014/main" id="{6058E5BD-E8C1-3A42-10A3-CBE78B1726A4}"/>
+                <a16:creationId xmlns:a16="http://schemas.microsoft.com/office/drawing/2014/main" id="{16ECF3B4-00CD-08EC-E43D-808D6F92E4C7}"/>
               </a:ext>
             </a:extLst>
           </p:cNvPr>
@@ -10863,33 +10181,7 @@
           <a:bodyPr/>
           <a:lstStyle/>
           <a:p>
-            <a:r>
-              <a:rPr lang="de-DE" dirty="0"/>
-              <a:t>…</a:t>
-            </a:r>
-          </a:p>
-          <a:p>
-            <a:r>
-              <a:rPr lang="en-GB" dirty="0"/>
-              <a:t>supervised fine-tuning (</a:t>
-            </a:r>
-            <a:r>
-              <a:rPr lang="en-GB" dirty="0">
-                <a:hlinkClick r:id="rId2"/>
-              </a:rPr>
-              <a:t>SFT</a:t>
-            </a:r>
-            <a:r>
-              <a:rPr lang="en-GB" dirty="0"/>
-              <a:t>)</a:t>
-            </a:r>
-          </a:p>
-          <a:p>
-            <a:r>
-              <a:rPr lang="en-GB" dirty="0"/>
-              <a:t>(e.g., formatting)</a:t>
-            </a:r>
-            <a:endParaRPr lang="de-DE" dirty="0"/>
+            <a:endParaRPr lang="de-DE"/>
           </a:p>
         </p:txBody>
       </p:sp>
@@ -10898,7 +10190,7 @@
           <p:cNvPr id="4" name="Foliennummernplatzhalter 3">
             <a:extLst>
               <a:ext uri="{FF2B5EF4-FFF2-40B4-BE49-F238E27FC236}">
-                <a16:creationId xmlns:a16="http://schemas.microsoft.com/office/drawing/2014/main" id="{97D7E70E-8F09-7DCF-2E5A-5879BF103E88}"/>
+                <a16:creationId xmlns:a16="http://schemas.microsoft.com/office/drawing/2014/main" id="{FF4B0235-81C4-B185-7A07-065F0D4471A3}"/>
               </a:ext>
             </a:extLst>
           </p:cNvPr>
@@ -10925,7 +10217,7 @@
     </p:spTree>
     <p:extLst>
       <p:ext uri="{BB962C8B-B14F-4D97-AF65-F5344CB8AC3E}">
-        <p14:creationId xmlns:p14="http://schemas.microsoft.com/office/powerpoint/2010/main" val="3009532390"/>
+        <p14:creationId xmlns:p14="http://schemas.microsoft.com/office/powerpoint/2010/main" val="687081360"/>
       </p:ext>
     </p:extLst>
   </p:cSld>
@@ -10954,10 +10246,10 @@
       </p:grpSpPr>
       <p:sp>
         <p:nvSpPr>
-          <p:cNvPr id="2" name="Titel 1">
-            <a:extLst>
-              <a:ext uri="{FF2B5EF4-FFF2-40B4-BE49-F238E27FC236}">
-                <a16:creationId xmlns:a16="http://schemas.microsoft.com/office/drawing/2014/main" id="{66694547-5151-D7D3-A925-23192933D4D6}"/>
+          <p:cNvPr id="3" name="Titel 2">
+            <a:extLst>
+              <a:ext uri="{FF2B5EF4-FFF2-40B4-BE49-F238E27FC236}">
+                <a16:creationId xmlns:a16="http://schemas.microsoft.com/office/drawing/2014/main" id="{4B6824DA-8B74-F684-F880-FDAAE5FC687C}"/>
               </a:ext>
             </a:extLst>
           </p:cNvPr>
@@ -10975,22 +10267,17 @@
           <a:p>
             <a:r>
               <a:rPr lang="de-DE" dirty="0"/>
-              <a:t>Use Case: Question </a:t>
-            </a:r>
-            <a:r>
-              <a:rPr lang="de-DE" dirty="0" err="1"/>
-              <a:t>Answering</a:t>
-            </a:r>
-            <a:endParaRPr lang="de-DE" dirty="0"/>
-          </a:p>
-        </p:txBody>
-      </p:sp>
-      <p:sp>
-        <p:nvSpPr>
-          <p:cNvPr id="3" name="Inhaltsplatzhalter 2">
-            <a:extLst>
-              <a:ext uri="{FF2B5EF4-FFF2-40B4-BE49-F238E27FC236}">
-                <a16:creationId xmlns:a16="http://schemas.microsoft.com/office/drawing/2014/main" id="{16ECF3B4-00CD-08EC-E43D-808D6F92E4C7}"/>
+              <a:t>Vibe Coding</a:t>
+            </a:r>
+          </a:p>
+        </p:txBody>
+      </p:sp>
+      <p:sp>
+        <p:nvSpPr>
+          <p:cNvPr id="4" name="Inhaltsplatzhalter 3">
+            <a:extLst>
+              <a:ext uri="{FF2B5EF4-FFF2-40B4-BE49-F238E27FC236}">
+                <a16:creationId xmlns:a16="http://schemas.microsoft.com/office/drawing/2014/main" id="{6F9C158D-A2EE-2A3F-360F-3F48C1631E96}"/>
               </a:ext>
             </a:extLst>
           </p:cNvPr>
@@ -11012,10 +10299,10 @@
       </p:sp>
       <p:sp>
         <p:nvSpPr>
-          <p:cNvPr id="4" name="Foliennummernplatzhalter 3">
-            <a:extLst>
-              <a:ext uri="{FF2B5EF4-FFF2-40B4-BE49-F238E27FC236}">
-                <a16:creationId xmlns:a16="http://schemas.microsoft.com/office/drawing/2014/main" id="{FF4B0235-81C4-B185-7A07-065F0D4471A3}"/>
+          <p:cNvPr id="2" name="Foliennummernplatzhalter 1">
+            <a:extLst>
+              <a:ext uri="{FF2B5EF4-FFF2-40B4-BE49-F238E27FC236}">
+                <a16:creationId xmlns:a16="http://schemas.microsoft.com/office/drawing/2014/main" id="{2FCD1A9F-76D0-3A1D-0524-21380D475A5C}"/>
               </a:ext>
             </a:extLst>
           </p:cNvPr>
@@ -11042,7 +10329,7 @@
     </p:spTree>
     <p:extLst>
       <p:ext uri="{BB962C8B-B14F-4D97-AF65-F5344CB8AC3E}">
-        <p14:creationId xmlns:p14="http://schemas.microsoft.com/office/powerpoint/2010/main" val="687081360"/>
+        <p14:creationId xmlns:p14="http://schemas.microsoft.com/office/powerpoint/2010/main" val="2476970652"/>
       </p:ext>
     </p:extLst>
   </p:cSld>
@@ -11187,12 +10474,42 @@
           <a:chExt cx="0" cy="0"/>
         </a:xfrm>
       </p:grpSpPr>
-      <p:sp>
-        <p:nvSpPr>
-          <p:cNvPr id="3" name="Titel 2">
-            <a:extLst>
-              <a:ext uri="{FF2B5EF4-FFF2-40B4-BE49-F238E27FC236}">
-                <a16:creationId xmlns:a16="http://schemas.microsoft.com/office/drawing/2014/main" id="{4B6824DA-8B74-F684-F880-FDAAE5FC687C}"/>
+      <p:pic>
+        <p:nvPicPr>
+          <p:cNvPr id="5" name="Grafik 4" descr="Ein Bild, das Text, Diagramm, Reihe, Screenshot enthält.&#10;&#10;KI-generierte Inhalte können fehlerhaft sein.">
+            <a:extLst>
+              <a:ext uri="{FF2B5EF4-FFF2-40B4-BE49-F238E27FC236}">
+                <a16:creationId xmlns:a16="http://schemas.microsoft.com/office/drawing/2014/main" id="{96747100-59AE-6262-89EF-8C7470AFFDAD}"/>
+              </a:ext>
+            </a:extLst>
+          </p:cNvPr>
+          <p:cNvPicPr>
+            <a:picLocks noChangeAspect="1"/>
+          </p:cNvPicPr>
+          <p:nvPr/>
+        </p:nvPicPr>
+        <p:blipFill>
+          <a:blip r:embed="rId2"/>
+          <a:stretch>
+            <a:fillRect/>
+          </a:stretch>
+        </p:blipFill>
+        <p:spPr>
+          <a:xfrm>
+            <a:off x="838200" y="3334977"/>
+            <a:ext cx="10515600" cy="3298525"/>
+          </a:xfrm>
+          <a:prstGeom prst="rect">
+            <a:avLst/>
+          </a:prstGeom>
+        </p:spPr>
+      </p:pic>
+      <p:sp>
+        <p:nvSpPr>
+          <p:cNvPr id="2" name="Titel 1">
+            <a:extLst>
+              <a:ext uri="{FF2B5EF4-FFF2-40B4-BE49-F238E27FC236}">
+                <a16:creationId xmlns:a16="http://schemas.microsoft.com/office/drawing/2014/main" id="{A2D747F7-B5C9-14F0-BC67-84479A070FE6}"/>
               </a:ext>
             </a:extLst>
           </p:cNvPr>
@@ -11210,17 +10527,17 @@
           <a:p>
             <a:r>
               <a:rPr lang="de-DE" dirty="0"/>
-              <a:t>Vibe Coding</a:t>
-            </a:r>
-          </a:p>
-        </p:txBody>
-      </p:sp>
-      <p:sp>
-        <p:nvSpPr>
-          <p:cNvPr id="4" name="Inhaltsplatzhalter 3">
-            <a:extLst>
-              <a:ext uri="{FF2B5EF4-FFF2-40B4-BE49-F238E27FC236}">
-                <a16:creationId xmlns:a16="http://schemas.microsoft.com/office/drawing/2014/main" id="{6F9C158D-A2EE-2A3F-360F-3F48C1631E96}"/>
+              <a:t>Alignment</a:t>
+            </a:r>
+          </a:p>
+        </p:txBody>
+      </p:sp>
+      <p:sp>
+        <p:nvSpPr>
+          <p:cNvPr id="3" name="Inhaltsplatzhalter 2">
+            <a:extLst>
+              <a:ext uri="{FF2B5EF4-FFF2-40B4-BE49-F238E27FC236}">
+                <a16:creationId xmlns:a16="http://schemas.microsoft.com/office/drawing/2014/main" id="{FDF9E407-E7CD-CEC9-08A9-C9287C7FD409}"/>
               </a:ext>
             </a:extLst>
           </p:cNvPr>
@@ -11236,16 +10553,58 @@
           <a:bodyPr/>
           <a:lstStyle/>
           <a:p>
-            <a:endParaRPr lang="de-DE"/>
-          </a:p>
-        </p:txBody>
-      </p:sp>
-      <p:sp>
-        <p:nvSpPr>
-          <p:cNvPr id="2" name="Foliennummernplatzhalter 1">
-            <a:extLst>
-              <a:ext uri="{FF2B5EF4-FFF2-40B4-BE49-F238E27FC236}">
-                <a16:creationId xmlns:a16="http://schemas.microsoft.com/office/drawing/2014/main" id="{2FCD1A9F-76D0-3A1D-0524-21380D475A5C}"/>
+            <a:r>
+              <a:rPr lang="de-DE" dirty="0"/>
+              <a:t>…</a:t>
+            </a:r>
+          </a:p>
+          <a:p>
+            <a:r>
+              <a:rPr lang="en-GB" dirty="0"/>
+              <a:t>reinforcement learning from human feedback (</a:t>
+            </a:r>
+            <a:r>
+              <a:rPr lang="en-GB" dirty="0">
+                <a:hlinkClick r:id="rId3"/>
+              </a:rPr>
+              <a:t>RLHF</a:t>
+            </a:r>
+            <a:r>
+              <a:rPr lang="en-GB" dirty="0"/>
+              <a:t>)</a:t>
+            </a:r>
+          </a:p>
+          <a:p>
+            <a:r>
+              <a:rPr lang="en-GB" dirty="0"/>
+              <a:t>alternatives: </a:t>
+            </a:r>
+            <a:r>
+              <a:rPr lang="en-GB" dirty="0">
+                <a:hlinkClick r:id="rId4"/>
+              </a:rPr>
+              <a:t>DPO</a:t>
+            </a:r>
+            <a:r>
+              <a:rPr lang="en-GB" dirty="0"/>
+              <a:t>, </a:t>
+            </a:r>
+            <a:r>
+              <a:rPr lang="en-GB" dirty="0">
+                <a:hlinkClick r:id="rId5"/>
+              </a:rPr>
+              <a:t>ORPO</a:t>
+            </a:r>
+            <a:endParaRPr lang="en-GB" dirty="0"/>
+          </a:p>
+        </p:txBody>
+      </p:sp>
+      <p:sp>
+        <p:nvSpPr>
+          <p:cNvPr id="4" name="Foliennummernplatzhalter 3">
+            <a:extLst>
+              <a:ext uri="{FF2B5EF4-FFF2-40B4-BE49-F238E27FC236}">
+                <a16:creationId xmlns:a16="http://schemas.microsoft.com/office/drawing/2014/main" id="{EAE107DF-A4FD-7351-4A7D-0434F1EAC98D}"/>
               </a:ext>
             </a:extLst>
           </p:cNvPr>
@@ -11272,7 +10631,7 @@
     </p:spTree>
     <p:extLst>
       <p:ext uri="{BB962C8B-B14F-4D97-AF65-F5344CB8AC3E}">
-        <p14:creationId xmlns:p14="http://schemas.microsoft.com/office/powerpoint/2010/main" val="2476970652"/>
+        <p14:creationId xmlns:p14="http://schemas.microsoft.com/office/powerpoint/2010/main" val="1126874156"/>
       </p:ext>
     </p:extLst>
   </p:cSld>
@@ -11299,12 +10658,110 @@
           <a:chExt cx="0" cy="0"/>
         </a:xfrm>
       </p:grpSpPr>
+      <p:sp>
+        <p:nvSpPr>
+          <p:cNvPr id="2" name="Title 1">
+            <a:extLst>
+              <a:ext uri="{FF2B5EF4-FFF2-40B4-BE49-F238E27FC236}">
+                <a16:creationId xmlns:a16="http://schemas.microsoft.com/office/drawing/2014/main" id="{8BDD99FF-C910-A0E8-3381-C448E5F1653D}"/>
+              </a:ext>
+            </a:extLst>
+          </p:cNvPr>
+          <p:cNvSpPr>
+            <a:spLocks noGrp="1"/>
+          </p:cNvSpPr>
+          <p:nvPr>
+            <p:ph type="title"/>
+          </p:nvPr>
+        </p:nvSpPr>
+        <p:spPr/>
+        <p:txBody>
+          <a:bodyPr/>
+          <a:lstStyle/>
+          <a:p>
+            <a:r>
+              <a:rPr lang="en-GB" dirty="0" err="1">
+                <a:hlinkClick r:id="rId2"/>
+              </a:rPr>
+              <a:t>InstructGPT</a:t>
+            </a:r>
+            <a:endParaRPr lang="en-GB" dirty="0"/>
+          </a:p>
+        </p:txBody>
+      </p:sp>
+      <p:sp>
+        <p:nvSpPr>
+          <p:cNvPr id="4" name="Slide Number Placeholder 3">
+            <a:extLst>
+              <a:ext uri="{FF2B5EF4-FFF2-40B4-BE49-F238E27FC236}">
+                <a16:creationId xmlns:a16="http://schemas.microsoft.com/office/drawing/2014/main" id="{98FF788B-7FE4-0E3B-1C93-49275F5E6753}"/>
+              </a:ext>
+            </a:extLst>
+          </p:cNvPr>
+          <p:cNvSpPr>
+            <a:spLocks noGrp="1"/>
+          </p:cNvSpPr>
+          <p:nvPr>
+            <p:ph type="sldNum" sz="quarter" idx="12"/>
+          </p:nvPr>
+        </p:nvSpPr>
+        <p:spPr/>
+        <p:txBody>
+          <a:bodyPr/>
+          <a:lstStyle/>
+          <a:p>
+            <a:fld id="{849D05A8-43E9-1C49-8606-50AB68220DEC}" type="slidenum">
+              <a:rPr lang="en-DE" smtClean="0"/>
+              <a:t>21</a:t>
+            </a:fld>
+            <a:endParaRPr lang="en-DE"/>
+          </a:p>
+        </p:txBody>
+      </p:sp>
+      <p:sp>
+        <p:nvSpPr>
+          <p:cNvPr id="5" name="TextBox 4">
+            <a:extLst>
+              <a:ext uri="{FF2B5EF4-FFF2-40B4-BE49-F238E27FC236}">
+                <a16:creationId xmlns:a16="http://schemas.microsoft.com/office/drawing/2014/main" id="{F3F48B22-F5A5-3996-02A4-5527B567641F}"/>
+              </a:ext>
+            </a:extLst>
+          </p:cNvPr>
+          <p:cNvSpPr txBox="1"/>
+          <p:nvPr/>
+        </p:nvSpPr>
+        <p:spPr>
+          <a:xfrm>
+            <a:off x="11277600" y="5178391"/>
+            <a:ext cx="608718" cy="246219"/>
+          </a:xfrm>
+          <a:prstGeom prst="rect">
+            <a:avLst/>
+          </a:prstGeom>
+          <a:noFill/>
+        </p:spPr>
+        <p:txBody>
+          <a:bodyPr wrap="square" rtlCol="0">
+            <a:spAutoFit/>
+          </a:bodyPr>
+          <a:lstStyle/>
+          <a:p>
+            <a:r>
+              <a:rPr lang="de-DE" sz="1000" dirty="0">
+                <a:hlinkClick r:id="rId3"/>
+              </a:rPr>
+              <a:t>source</a:t>
+            </a:r>
+            <a:endParaRPr lang="de-DE" sz="1000" dirty="0"/>
+          </a:p>
+        </p:txBody>
+      </p:sp>
       <p:pic>
         <p:nvPicPr>
-          <p:cNvPr id="5" name="Grafik 4" descr="Ein Bild, das Text, Diagramm, Reihe, Screenshot enthält.&#10;&#10;KI-generierte Inhalte können fehlerhaft sein.">
-            <a:extLst>
-              <a:ext uri="{FF2B5EF4-FFF2-40B4-BE49-F238E27FC236}">
-                <a16:creationId xmlns:a16="http://schemas.microsoft.com/office/drawing/2014/main" id="{96747100-59AE-6262-89EF-8C7470AFFDAD}"/>
+          <p:cNvPr id="7" name="Grafik 6" descr="Ein Bild, das Text, Screenshot enthält.&#10;&#10;KI-generierte Inhalte können fehlerhaft sein.">
+            <a:extLst>
+              <a:ext uri="{FF2B5EF4-FFF2-40B4-BE49-F238E27FC236}">
+                <a16:creationId xmlns:a16="http://schemas.microsoft.com/office/drawing/2014/main" id="{51ABF00D-E8BF-27E7-1A48-C092AAB646B2}"/>
               </a:ext>
             </a:extLst>
           </p:cNvPr>
@@ -11314,15 +10771,15 @@
           <p:nvPr/>
         </p:nvPicPr>
         <p:blipFill>
-          <a:blip r:embed="rId2"/>
+          <a:blip r:embed="rId4"/>
           <a:stretch>
             <a:fillRect/>
           </a:stretch>
         </p:blipFill>
         <p:spPr>
           <a:xfrm>
-            <a:off x="838200" y="3334977"/>
-            <a:ext cx="10515600" cy="3298525"/>
+            <a:off x="436605" y="1690688"/>
+            <a:ext cx="11449713" cy="3258162"/>
           </a:xfrm>
           <a:prstGeom prst="rect">
             <a:avLst/>
@@ -11331,132 +10788,46 @@
       </p:pic>
       <p:sp>
         <p:nvSpPr>
-          <p:cNvPr id="2" name="Titel 1">
-            <a:extLst>
-              <a:ext uri="{FF2B5EF4-FFF2-40B4-BE49-F238E27FC236}">
-                <a16:creationId xmlns:a16="http://schemas.microsoft.com/office/drawing/2014/main" id="{A2D747F7-B5C9-14F0-BC67-84479A070FE6}"/>
-              </a:ext>
-            </a:extLst>
-          </p:cNvPr>
-          <p:cNvSpPr>
-            <a:spLocks noGrp="1"/>
-          </p:cNvSpPr>
-          <p:nvPr>
-            <p:ph type="title"/>
-          </p:nvPr>
-        </p:nvSpPr>
-        <p:spPr/>
-        <p:txBody>
-          <a:bodyPr/>
+          <p:cNvPr id="9" name="Textfeld 8">
+            <a:extLst>
+              <a:ext uri="{FF2B5EF4-FFF2-40B4-BE49-F238E27FC236}">
+                <a16:creationId xmlns:a16="http://schemas.microsoft.com/office/drawing/2014/main" id="{DFB0CE71-E065-7443-636C-0D3D508B9E73}"/>
+              </a:ext>
+            </a:extLst>
+          </p:cNvPr>
+          <p:cNvSpPr txBox="1"/>
+          <p:nvPr/>
+        </p:nvSpPr>
+        <p:spPr>
+          <a:xfrm>
+            <a:off x="2984938" y="5424610"/>
+            <a:ext cx="6222124" cy="492443"/>
+          </a:xfrm>
+          <a:prstGeom prst="rect">
+            <a:avLst/>
+          </a:prstGeom>
+          <a:noFill/>
+        </p:spPr>
+        <p:txBody>
+          <a:bodyPr wrap="square">
+            <a:spAutoFit/>
+          </a:bodyPr>
           <a:lstStyle/>
           <a:p>
-            <a:r>
-              <a:rPr lang="de-DE" dirty="0"/>
-              <a:t>Alignment</a:t>
-            </a:r>
-          </a:p>
-        </p:txBody>
-      </p:sp>
-      <p:sp>
-        <p:nvSpPr>
-          <p:cNvPr id="3" name="Inhaltsplatzhalter 2">
-            <a:extLst>
-              <a:ext uri="{FF2B5EF4-FFF2-40B4-BE49-F238E27FC236}">
-                <a16:creationId xmlns:a16="http://schemas.microsoft.com/office/drawing/2014/main" id="{FDF9E407-E7CD-CEC9-08A9-C9287C7FD409}"/>
-              </a:ext>
-            </a:extLst>
-          </p:cNvPr>
-          <p:cNvSpPr>
-            <a:spLocks noGrp="1"/>
-          </p:cNvSpPr>
-          <p:nvPr>
-            <p:ph idx="1"/>
-          </p:nvPr>
-        </p:nvSpPr>
-        <p:spPr/>
-        <p:txBody>
-          <a:bodyPr/>
-          <a:lstStyle/>
-          <a:p>
-            <a:r>
-              <a:rPr lang="de-DE" dirty="0"/>
-              <a:t>…</a:t>
-            </a:r>
-          </a:p>
-          <a:p>
-            <a:r>
-              <a:rPr lang="en-GB" dirty="0"/>
-              <a:t>reinforcement learning from human feedback (</a:t>
-            </a:r>
-            <a:r>
-              <a:rPr lang="en-GB" dirty="0">
-                <a:hlinkClick r:id="rId3"/>
-              </a:rPr>
-              <a:t>RLHF</a:t>
-            </a:r>
-            <a:r>
-              <a:rPr lang="en-GB" dirty="0"/>
-              <a:t>)</a:t>
-            </a:r>
-          </a:p>
-          <a:p>
-            <a:r>
-              <a:rPr lang="en-GB" dirty="0"/>
-              <a:t>alternatives: </a:t>
-            </a:r>
-            <a:r>
-              <a:rPr lang="en-GB" dirty="0">
-                <a:hlinkClick r:id="rId4"/>
-              </a:rPr>
-              <a:t>DPO</a:t>
-            </a:r>
-            <a:r>
-              <a:rPr lang="en-GB" dirty="0"/>
-              <a:t>, </a:t>
-            </a:r>
-            <a:r>
-              <a:rPr lang="en-GB" dirty="0">
-                <a:hlinkClick r:id="rId5"/>
-              </a:rPr>
-              <a:t>ORPO</a:t>
-            </a:r>
-            <a:endParaRPr lang="en-GB" dirty="0"/>
-          </a:p>
-        </p:txBody>
-      </p:sp>
-      <p:sp>
-        <p:nvSpPr>
-          <p:cNvPr id="4" name="Foliennummernplatzhalter 3">
-            <a:extLst>
-              <a:ext uri="{FF2B5EF4-FFF2-40B4-BE49-F238E27FC236}">
-                <a16:creationId xmlns:a16="http://schemas.microsoft.com/office/drawing/2014/main" id="{EAE107DF-A4FD-7351-4A7D-0434F1EAC98D}"/>
-              </a:ext>
-            </a:extLst>
-          </p:cNvPr>
-          <p:cNvSpPr>
-            <a:spLocks noGrp="1"/>
-          </p:cNvSpPr>
-          <p:nvPr>
-            <p:ph type="sldNum" sz="quarter" idx="12"/>
-          </p:nvPr>
-        </p:nvSpPr>
-        <p:spPr/>
-        <p:txBody>
-          <a:bodyPr/>
-          <a:lstStyle/>
-          <a:p>
-            <a:fld id="{4055531C-5681-6B44-B2CA-926D7A74B06D}" type="slidenum">
-              <a:rPr lang="de-DE" smtClean="0"/>
-              <a:t>21</a:t>
-            </a:fld>
-            <a:endParaRPr lang="de-DE"/>
+            <a:pPr marL="0" indent="0">
+              <a:buNone/>
+            </a:pPr>
+            <a:r>
+              <a:rPr lang="en-GB" sz="2600" dirty="0"/>
+              <a:t>aligning LLM output with human intention</a:t>
+            </a:r>
           </a:p>
         </p:txBody>
       </p:sp>
     </p:spTree>
     <p:extLst>
       <p:ext uri="{BB962C8B-B14F-4D97-AF65-F5344CB8AC3E}">
-        <p14:creationId xmlns:p14="http://schemas.microsoft.com/office/powerpoint/2010/main" val="1126874156"/>
+        <p14:creationId xmlns:p14="http://schemas.microsoft.com/office/powerpoint/2010/main" val="2859818903"/>
       </p:ext>
     </p:extLst>
   </p:cSld>
@@ -11485,10 +10856,10 @@
       </p:grpSpPr>
       <p:sp>
         <p:nvSpPr>
-          <p:cNvPr id="2" name="Title 1">
-            <a:extLst>
-              <a:ext uri="{FF2B5EF4-FFF2-40B4-BE49-F238E27FC236}">
-                <a16:creationId xmlns:a16="http://schemas.microsoft.com/office/drawing/2014/main" id="{8BDD99FF-C910-A0E8-3381-C448E5F1653D}"/>
+          <p:cNvPr id="2" name="Titel 1">
+            <a:extLst>
+              <a:ext uri="{FF2B5EF4-FFF2-40B4-BE49-F238E27FC236}">
+                <a16:creationId xmlns:a16="http://schemas.microsoft.com/office/drawing/2014/main" id="{09493DE1-8681-E946-F35C-2A338BAFE2C4}"/>
               </a:ext>
             </a:extLst>
           </p:cNvPr>
@@ -11504,22 +10875,64 @@
           <a:bodyPr/>
           <a:lstStyle/>
           <a:p>
-            <a:r>
-              <a:rPr lang="en-GB" dirty="0" err="1">
-                <a:hlinkClick r:id="rId2"/>
-              </a:rPr>
+            <a:endParaRPr lang="de-DE"/>
+          </a:p>
+        </p:txBody>
+      </p:sp>
+      <p:sp>
+        <p:nvSpPr>
+          <p:cNvPr id="3" name="Inhaltsplatzhalter 2">
+            <a:extLst>
+              <a:ext uri="{FF2B5EF4-FFF2-40B4-BE49-F238E27FC236}">
+                <a16:creationId xmlns:a16="http://schemas.microsoft.com/office/drawing/2014/main" id="{84C5182F-76D3-02B3-807F-78D531F2C37B}"/>
+              </a:ext>
+            </a:extLst>
+          </p:cNvPr>
+          <p:cNvSpPr>
+            <a:spLocks noGrp="1"/>
+          </p:cNvSpPr>
+          <p:nvPr>
+            <p:ph idx="1"/>
+          </p:nvPr>
+        </p:nvSpPr>
+        <p:spPr/>
+        <p:txBody>
+          <a:bodyPr/>
+          <a:lstStyle/>
+          <a:p>
+            <a:r>
+              <a:rPr lang="de-DE" dirty="0" err="1"/>
+              <a:t>from</a:t>
+            </a:r>
+            <a:r>
+              <a:rPr lang="de-DE" dirty="0"/>
+              <a:t> GPT-3 </a:t>
+            </a:r>
+            <a:r>
+              <a:rPr lang="de-DE" dirty="0" err="1"/>
+              <a:t>to</a:t>
+            </a:r>
+            <a:r>
+              <a:rPr lang="de-DE" dirty="0"/>
+              <a:t> </a:t>
+            </a:r>
+            <a:r>
+              <a:rPr lang="de-DE" dirty="0" err="1"/>
               <a:t>InstructGPT</a:t>
             </a:r>
-            <a:endParaRPr lang="en-GB" dirty="0"/>
-          </a:p>
-        </p:txBody>
-      </p:sp>
-      <p:sp>
-        <p:nvSpPr>
-          <p:cNvPr id="4" name="Slide Number Placeholder 3">
-            <a:extLst>
-              <a:ext uri="{FF2B5EF4-FFF2-40B4-BE49-F238E27FC236}">
-                <a16:creationId xmlns:a16="http://schemas.microsoft.com/office/drawing/2014/main" id="{98FF788B-7FE4-0E3B-1C93-49275F5E6753}"/>
+            <a:r>
+              <a:rPr lang="de-DE" dirty="0"/>
+              <a:t> and ChatGPT</a:t>
+            </a:r>
+          </a:p>
+        </p:txBody>
+      </p:sp>
+      <p:sp>
+        <p:nvSpPr>
+          <p:cNvPr id="4" name="Foliennummernplatzhalter 3">
+            <a:extLst>
+              <a:ext uri="{FF2B5EF4-FFF2-40B4-BE49-F238E27FC236}">
+                <a16:creationId xmlns:a16="http://schemas.microsoft.com/office/drawing/2014/main" id="{425A7FC5-9ED3-4885-ECCE-73FBD8CB7493}"/>
               </a:ext>
             </a:extLst>
           </p:cNvPr>
@@ -11535,124 +10948,18 @@
           <a:bodyPr/>
           <a:lstStyle/>
           <a:p>
-            <a:fld id="{849D05A8-43E9-1C49-8606-50AB68220DEC}" type="slidenum">
-              <a:rPr lang="en-DE" smtClean="0"/>
+            <a:fld id="{4055531C-5681-6B44-B2CA-926D7A74B06D}" type="slidenum">
+              <a:rPr lang="de-DE" smtClean="0"/>
               <a:t>22</a:t>
             </a:fld>
-            <a:endParaRPr lang="en-DE"/>
-          </a:p>
-        </p:txBody>
-      </p:sp>
-      <p:sp>
-        <p:nvSpPr>
-          <p:cNvPr id="5" name="TextBox 4">
-            <a:extLst>
-              <a:ext uri="{FF2B5EF4-FFF2-40B4-BE49-F238E27FC236}">
-                <a16:creationId xmlns:a16="http://schemas.microsoft.com/office/drawing/2014/main" id="{F3F48B22-F5A5-3996-02A4-5527B567641F}"/>
-              </a:ext>
-            </a:extLst>
-          </p:cNvPr>
-          <p:cNvSpPr txBox="1"/>
-          <p:nvPr/>
-        </p:nvSpPr>
-        <p:spPr>
-          <a:xfrm>
-            <a:off x="11277600" y="5178391"/>
-            <a:ext cx="608718" cy="246219"/>
-          </a:xfrm>
-          <a:prstGeom prst="rect">
-            <a:avLst/>
-          </a:prstGeom>
-          <a:noFill/>
-        </p:spPr>
-        <p:txBody>
-          <a:bodyPr wrap="square" rtlCol="0">
-            <a:spAutoFit/>
-          </a:bodyPr>
-          <a:lstStyle/>
-          <a:p>
-            <a:r>
-              <a:rPr lang="de-DE" sz="1000" dirty="0">
-                <a:hlinkClick r:id="rId3"/>
-              </a:rPr>
-              <a:t>source</a:t>
-            </a:r>
-            <a:endParaRPr lang="de-DE" sz="1000" dirty="0"/>
-          </a:p>
-        </p:txBody>
-      </p:sp>
-      <p:pic>
-        <p:nvPicPr>
-          <p:cNvPr id="7" name="Grafik 6" descr="Ein Bild, das Text, Screenshot enthält.&#10;&#10;KI-generierte Inhalte können fehlerhaft sein.">
-            <a:extLst>
-              <a:ext uri="{FF2B5EF4-FFF2-40B4-BE49-F238E27FC236}">
-                <a16:creationId xmlns:a16="http://schemas.microsoft.com/office/drawing/2014/main" id="{51ABF00D-E8BF-27E7-1A48-C092AAB646B2}"/>
-              </a:ext>
-            </a:extLst>
-          </p:cNvPr>
-          <p:cNvPicPr>
-            <a:picLocks noChangeAspect="1"/>
-          </p:cNvPicPr>
-          <p:nvPr/>
-        </p:nvPicPr>
-        <p:blipFill>
-          <a:blip r:embed="rId4"/>
-          <a:stretch>
-            <a:fillRect/>
-          </a:stretch>
-        </p:blipFill>
-        <p:spPr>
-          <a:xfrm>
-            <a:off x="436605" y="1690688"/>
-            <a:ext cx="11449713" cy="3258162"/>
-          </a:xfrm>
-          <a:prstGeom prst="rect">
-            <a:avLst/>
-          </a:prstGeom>
-        </p:spPr>
-      </p:pic>
-      <p:sp>
-        <p:nvSpPr>
-          <p:cNvPr id="9" name="Textfeld 8">
-            <a:extLst>
-              <a:ext uri="{FF2B5EF4-FFF2-40B4-BE49-F238E27FC236}">
-                <a16:creationId xmlns:a16="http://schemas.microsoft.com/office/drawing/2014/main" id="{DFB0CE71-E065-7443-636C-0D3D508B9E73}"/>
-              </a:ext>
-            </a:extLst>
-          </p:cNvPr>
-          <p:cNvSpPr txBox="1"/>
-          <p:nvPr/>
-        </p:nvSpPr>
-        <p:spPr>
-          <a:xfrm>
-            <a:off x="2984938" y="5424610"/>
-            <a:ext cx="6222124" cy="492443"/>
-          </a:xfrm>
-          <a:prstGeom prst="rect">
-            <a:avLst/>
-          </a:prstGeom>
-          <a:noFill/>
-        </p:spPr>
-        <p:txBody>
-          <a:bodyPr wrap="square">
-            <a:spAutoFit/>
-          </a:bodyPr>
-          <a:lstStyle/>
-          <a:p>
-            <a:pPr marL="0" indent="0">
-              <a:buNone/>
-            </a:pPr>
-            <a:r>
-              <a:rPr lang="en-GB" sz="2600" dirty="0"/>
-              <a:t>aligning LLM output with human intention</a:t>
-            </a:r>
+            <a:endParaRPr lang="de-DE"/>
           </a:p>
         </p:txBody>
       </p:sp>
     </p:spTree>
     <p:extLst>
       <p:ext uri="{BB962C8B-B14F-4D97-AF65-F5344CB8AC3E}">
-        <p14:creationId xmlns:p14="http://schemas.microsoft.com/office/powerpoint/2010/main" val="2859818903"/>
+        <p14:creationId xmlns:p14="http://schemas.microsoft.com/office/powerpoint/2010/main" val="3914762839"/>
       </p:ext>
     </p:extLst>
   </p:cSld>
@@ -11684,7 +10991,7 @@
           <p:cNvPr id="2" name="Titel 1">
             <a:extLst>
               <a:ext uri="{FF2B5EF4-FFF2-40B4-BE49-F238E27FC236}">
-                <a16:creationId xmlns:a16="http://schemas.microsoft.com/office/drawing/2014/main" id="{09493DE1-8681-E946-F35C-2A338BAFE2C4}"/>
+                <a16:creationId xmlns:a16="http://schemas.microsoft.com/office/drawing/2014/main" id="{5A1B08B0-5FAB-8E36-9583-086C5FE7FBA2}"/>
               </a:ext>
             </a:extLst>
           </p:cNvPr>
@@ -11700,7 +11007,15 @@
           <a:bodyPr/>
           <a:lstStyle/>
           <a:p>
-            <a:endParaRPr lang="de-DE"/>
+            <a:r>
+              <a:rPr lang="de-DE" dirty="0"/>
+              <a:t>Multi-Turn </a:t>
+            </a:r>
+            <a:r>
+              <a:rPr lang="de-DE" dirty="0" err="1"/>
+              <a:t>Dialogue</a:t>
+            </a:r>
+            <a:endParaRPr lang="de-DE" dirty="0"/>
           </a:p>
         </p:txBody>
       </p:sp>
@@ -11709,7 +11024,7 @@
           <p:cNvPr id="3" name="Inhaltsplatzhalter 2">
             <a:extLst>
               <a:ext uri="{FF2B5EF4-FFF2-40B4-BE49-F238E27FC236}">
-                <a16:creationId xmlns:a16="http://schemas.microsoft.com/office/drawing/2014/main" id="{84C5182F-76D3-02B3-807F-78D531F2C37B}"/>
+                <a16:creationId xmlns:a16="http://schemas.microsoft.com/office/drawing/2014/main" id="{BFDAE060-03E4-7410-C0A6-AE36D46743C1}"/>
               </a:ext>
             </a:extLst>
           </p:cNvPr>
@@ -11727,11 +11042,99 @@
           <a:p>
             <a:r>
               <a:rPr lang="de-DE" dirty="0" err="1"/>
-              <a:t>from</a:t>
-            </a:r>
-            <a:r>
-              <a:rPr lang="de-DE" dirty="0"/>
-              <a:t> GPT-3 </a:t>
+              <a:t>Handled</a:t>
+            </a:r>
+            <a:r>
+              <a:rPr lang="de-DE" dirty="0"/>
+              <a:t> </a:t>
+            </a:r>
+            <a:r>
+              <a:rPr lang="de-DE" dirty="0" err="1"/>
+              <a:t>entirely</a:t>
+            </a:r>
+            <a:r>
+              <a:rPr lang="de-DE" dirty="0"/>
+              <a:t> </a:t>
+            </a:r>
+            <a:r>
+              <a:rPr lang="de-DE" dirty="0" err="1"/>
+              <a:t>by</a:t>
+            </a:r>
+            <a:r>
+              <a:rPr lang="de-DE" dirty="0"/>
+              <a:t> </a:t>
+            </a:r>
+            <a:r>
+              <a:rPr lang="de-DE" dirty="0" err="1"/>
+              <a:t>passing</a:t>
+            </a:r>
+            <a:r>
+              <a:rPr lang="de-DE" dirty="0"/>
+              <a:t> </a:t>
+            </a:r>
+            <a:r>
+              <a:rPr lang="de-DE" dirty="0" err="1"/>
+              <a:t>the</a:t>
+            </a:r>
+            <a:r>
+              <a:rPr lang="de-DE" dirty="0"/>
+              <a:t> </a:t>
+            </a:r>
+            <a:r>
+              <a:rPr lang="de-DE" dirty="0" err="1"/>
+              <a:t>conversation</a:t>
+            </a:r>
+            <a:r>
+              <a:rPr lang="de-DE" dirty="0"/>
+              <a:t> </a:t>
+            </a:r>
+            <a:r>
+              <a:rPr lang="de-DE" dirty="0" err="1"/>
+              <a:t>history</a:t>
+            </a:r>
+            <a:r>
+              <a:rPr lang="de-DE" dirty="0"/>
+              <a:t> </a:t>
+            </a:r>
+            <a:r>
+              <a:rPr lang="de-DE" dirty="0" err="1"/>
+              <a:t>as</a:t>
+            </a:r>
+            <a:r>
+              <a:rPr lang="de-DE" dirty="0"/>
+              <a:t> </a:t>
+            </a:r>
+            <a:r>
+              <a:rPr lang="de-DE" dirty="0" err="1"/>
+              <a:t>part</a:t>
+            </a:r>
+            <a:r>
+              <a:rPr lang="de-DE" dirty="0"/>
+              <a:t> </a:t>
+            </a:r>
+            <a:r>
+              <a:rPr lang="de-DE" dirty="0" err="1"/>
+              <a:t>of</a:t>
+            </a:r>
+            <a:r>
+              <a:rPr lang="de-DE" dirty="0"/>
+              <a:t> </a:t>
+            </a:r>
+            <a:r>
+              <a:rPr lang="de-DE" dirty="0" err="1"/>
+              <a:t>the</a:t>
+            </a:r>
+            <a:r>
+              <a:rPr lang="de-DE" dirty="0"/>
+              <a:t> </a:t>
+            </a:r>
+            <a:r>
+              <a:rPr lang="de-DE" dirty="0" err="1"/>
+              <a:t>input</a:t>
+            </a:r>
+            <a:r>
+              <a:rPr lang="de-DE" dirty="0"/>
+              <a:t> </a:t>
             </a:r>
             <a:r>
               <a:rPr lang="de-DE" dirty="0" err="1"/>
@@ -11743,11 +11146,35 @@
             </a:r>
             <a:r>
               <a:rPr lang="de-DE" dirty="0" err="1"/>
-              <a:t>InstructGPT</a:t>
-            </a:r>
-            <a:r>
-              <a:rPr lang="de-DE" dirty="0"/>
-              <a:t> and ChatGPT</a:t>
+              <a:t>the</a:t>
+            </a:r>
+            <a:r>
+              <a:rPr lang="de-DE" dirty="0"/>
+              <a:t> </a:t>
+            </a:r>
+            <a:r>
+              <a:rPr lang="de-DE" dirty="0" err="1"/>
+              <a:t>model</a:t>
+            </a:r>
+            <a:r>
+              <a:rPr lang="de-DE" dirty="0"/>
+              <a:t> at </a:t>
+            </a:r>
+            <a:r>
+              <a:rPr lang="de-DE" dirty="0" err="1"/>
+              <a:t>each</a:t>
+            </a:r>
+            <a:r>
+              <a:rPr lang="de-DE" dirty="0"/>
+              <a:t> </a:t>
+            </a:r>
+            <a:r>
+              <a:rPr lang="de-DE" dirty="0" err="1"/>
+              <a:t>step</a:t>
+            </a:r>
+            <a:r>
+              <a:rPr lang="de-DE" dirty="0"/>
+              <a:t>.</a:t>
             </a:r>
           </a:p>
         </p:txBody>
@@ -11757,7 +11184,7 @@
           <p:cNvPr id="4" name="Foliennummernplatzhalter 3">
             <a:extLst>
               <a:ext uri="{FF2B5EF4-FFF2-40B4-BE49-F238E27FC236}">
-                <a16:creationId xmlns:a16="http://schemas.microsoft.com/office/drawing/2014/main" id="{425A7FC5-9ED3-4885-ECCE-73FBD8CB7493}"/>
+                <a16:creationId xmlns:a16="http://schemas.microsoft.com/office/drawing/2014/main" id="{4341BFF8-BEC1-70D4-324B-8FD51E0DAC79}"/>
               </a:ext>
             </a:extLst>
           </p:cNvPr>
@@ -11784,7 +11211,7 @@
     </p:spTree>
     <p:extLst>
       <p:ext uri="{BB962C8B-B14F-4D97-AF65-F5344CB8AC3E}">
-        <p14:creationId xmlns:p14="http://schemas.microsoft.com/office/powerpoint/2010/main" val="3914762839"/>
+        <p14:creationId xmlns:p14="http://schemas.microsoft.com/office/powerpoint/2010/main" val="2345780904"/>
       </p:ext>
     </p:extLst>
   </p:cSld>
@@ -11816,7 +11243,7 @@
           <p:cNvPr id="2" name="Titel 1">
             <a:extLst>
               <a:ext uri="{FF2B5EF4-FFF2-40B4-BE49-F238E27FC236}">
-                <a16:creationId xmlns:a16="http://schemas.microsoft.com/office/drawing/2014/main" id="{5A1B08B0-5FAB-8E36-9583-086C5FE7FBA2}"/>
+                <a16:creationId xmlns:a16="http://schemas.microsoft.com/office/drawing/2014/main" id="{26EB045E-1272-3E62-6E68-080CE472E3FB}"/>
               </a:ext>
             </a:extLst>
           </p:cNvPr>
@@ -11834,13 +11261,8 @@
           <a:p>
             <a:r>
               <a:rPr lang="de-DE" dirty="0"/>
-              <a:t>Multi-Turn </a:t>
-            </a:r>
-            <a:r>
-              <a:rPr lang="de-DE" dirty="0" err="1"/>
-              <a:t>Dialogue</a:t>
-            </a:r>
-            <a:endParaRPr lang="de-DE" dirty="0"/>
+              <a:t>Dialog Systems</a:t>
+            </a:r>
           </a:p>
         </p:txBody>
       </p:sp>
@@ -11849,7 +11271,7 @@
           <p:cNvPr id="3" name="Inhaltsplatzhalter 2">
             <a:extLst>
               <a:ext uri="{FF2B5EF4-FFF2-40B4-BE49-F238E27FC236}">
-                <a16:creationId xmlns:a16="http://schemas.microsoft.com/office/drawing/2014/main" id="{BFDAE060-03E4-7410-C0A6-AE36D46743C1}"/>
+                <a16:creationId xmlns:a16="http://schemas.microsoft.com/office/drawing/2014/main" id="{C16BFCD0-FDF6-89AF-2AC1-D92E4EB10467}"/>
               </a:ext>
             </a:extLst>
           </p:cNvPr>
@@ -11865,142 +11287,61 @@
           <a:bodyPr/>
           <a:lstStyle/>
           <a:p>
-            <a:r>
-              <a:rPr lang="de-DE" dirty="0" err="1"/>
-              <a:t>Handled</a:t>
-            </a:r>
-            <a:r>
-              <a:rPr lang="de-DE" dirty="0"/>
-              <a:t> </a:t>
-            </a:r>
-            <a:r>
-              <a:rPr lang="de-DE" dirty="0" err="1"/>
-              <a:t>entirely</a:t>
-            </a:r>
-            <a:r>
-              <a:rPr lang="de-DE" dirty="0"/>
-              <a:t> </a:t>
-            </a:r>
-            <a:r>
-              <a:rPr lang="de-DE" dirty="0" err="1"/>
-              <a:t>by</a:t>
-            </a:r>
-            <a:r>
-              <a:rPr lang="de-DE" dirty="0"/>
-              <a:t> </a:t>
-            </a:r>
-            <a:r>
-              <a:rPr lang="de-DE" dirty="0" err="1"/>
-              <a:t>passing</a:t>
-            </a:r>
-            <a:r>
-              <a:rPr lang="de-DE" dirty="0"/>
-              <a:t> </a:t>
-            </a:r>
-            <a:r>
-              <a:rPr lang="de-DE" dirty="0" err="1"/>
-              <a:t>the</a:t>
-            </a:r>
-            <a:r>
-              <a:rPr lang="de-DE" dirty="0"/>
-              <a:t> </a:t>
-            </a:r>
-            <a:r>
-              <a:rPr lang="de-DE" dirty="0" err="1"/>
-              <a:t>conversation</a:t>
-            </a:r>
-            <a:r>
-              <a:rPr lang="de-DE" dirty="0"/>
-              <a:t> </a:t>
-            </a:r>
-            <a:r>
-              <a:rPr lang="de-DE" dirty="0" err="1"/>
-              <a:t>history</a:t>
-            </a:r>
-            <a:r>
-              <a:rPr lang="de-DE" dirty="0"/>
-              <a:t> </a:t>
-            </a:r>
-            <a:r>
-              <a:rPr lang="de-DE" dirty="0" err="1"/>
-              <a:t>as</a:t>
-            </a:r>
-            <a:r>
-              <a:rPr lang="de-DE" dirty="0"/>
-              <a:t> </a:t>
-            </a:r>
-            <a:r>
-              <a:rPr lang="de-DE" dirty="0" err="1"/>
-              <a:t>part</a:t>
-            </a:r>
-            <a:r>
-              <a:rPr lang="de-DE" dirty="0"/>
-              <a:t> </a:t>
-            </a:r>
-            <a:r>
-              <a:rPr lang="de-DE" dirty="0" err="1"/>
-              <a:t>of</a:t>
-            </a:r>
-            <a:r>
-              <a:rPr lang="de-DE" dirty="0"/>
-              <a:t> </a:t>
-            </a:r>
-            <a:r>
-              <a:rPr lang="de-DE" dirty="0" err="1"/>
-              <a:t>the</a:t>
-            </a:r>
-            <a:r>
-              <a:rPr lang="de-DE" dirty="0"/>
-              <a:t> </a:t>
-            </a:r>
-            <a:r>
-              <a:rPr lang="de-DE" dirty="0" err="1"/>
-              <a:t>input</a:t>
-            </a:r>
-            <a:r>
-              <a:rPr lang="de-DE" dirty="0"/>
-              <a:t> </a:t>
-            </a:r>
-            <a:r>
-              <a:rPr lang="de-DE" dirty="0" err="1"/>
-              <a:t>to</a:t>
-            </a:r>
-            <a:r>
-              <a:rPr lang="de-DE" dirty="0"/>
-              <a:t> </a:t>
-            </a:r>
-            <a:r>
-              <a:rPr lang="de-DE" dirty="0" err="1"/>
-              <a:t>the</a:t>
-            </a:r>
-            <a:r>
-              <a:rPr lang="de-DE" dirty="0"/>
-              <a:t> </a:t>
-            </a:r>
-            <a:r>
-              <a:rPr lang="de-DE" dirty="0" err="1"/>
-              <a:t>model</a:t>
-            </a:r>
-            <a:r>
-              <a:rPr lang="de-DE" dirty="0"/>
-              <a:t> at </a:t>
-            </a:r>
-            <a:r>
-              <a:rPr lang="de-DE" dirty="0" err="1"/>
-              <a:t>each</a:t>
-            </a:r>
-            <a:r>
-              <a:rPr lang="de-DE" dirty="0"/>
-              <a:t> </a:t>
-            </a:r>
-            <a:r>
-              <a:rPr lang="de-DE" dirty="0" err="1"/>
-              <a:t>step</a:t>
-            </a:r>
-            <a:r>
-              <a:rPr lang="de-DE" dirty="0"/>
-              <a:t>.</a:t>
-            </a:r>
+            <a:pPr marL="0" indent="0">
+              <a:buNone/>
+            </a:pPr>
+            <a:r>
+              <a:rPr lang="de-DE" dirty="0"/>
+              <a:t>…</a:t>
+            </a:r>
+          </a:p>
+          <a:p>
+            <a:pPr marL="0" indent="0">
+              <a:buNone/>
+            </a:pPr>
+            <a:endParaRPr lang="de-DE" dirty="0"/>
+          </a:p>
+          <a:p>
+            <a:pPr marL="0" indent="0">
+              <a:buNone/>
+            </a:pPr>
+            <a:r>
+              <a:rPr lang="de-DE" dirty="0" err="1"/>
+              <a:t>with</a:t>
+            </a:r>
+            <a:r>
+              <a:rPr lang="de-DE" dirty="0"/>
+              <a:t> </a:t>
+            </a:r>
+            <a:r>
+              <a:rPr lang="de-DE" dirty="0" err="1"/>
+              <a:t>instruction-tuned</a:t>
+            </a:r>
+            <a:r>
+              <a:rPr lang="de-DE" dirty="0"/>
+              <a:t> and </a:t>
+            </a:r>
+            <a:r>
+              <a:rPr lang="de-DE" dirty="0" err="1"/>
+              <a:t>aligned</a:t>
+            </a:r>
+            <a:r>
+              <a:rPr lang="de-DE" dirty="0"/>
+              <a:t> LLMs: </a:t>
+            </a:r>
+            <a:r>
+              <a:rPr lang="de-DE" dirty="0" err="1"/>
+              <a:t>assistant</a:t>
+            </a:r>
+            <a:r>
+              <a:rPr lang="de-DE" dirty="0"/>
+              <a:t>-style </a:t>
+            </a:r>
+            <a:r>
+              <a:rPr lang="de-DE" dirty="0" err="1"/>
+              <a:t>models</a:t>
+            </a:r>
+            <a:endParaRPr lang="de-DE" dirty="0"/>
           </a:p>
         </p:txBody>
       </p:sp>
@@ -12009,7 +11350,7 @@
           <p:cNvPr id="4" name="Foliennummernplatzhalter 3">
             <a:extLst>
               <a:ext uri="{FF2B5EF4-FFF2-40B4-BE49-F238E27FC236}">
-                <a16:creationId xmlns:a16="http://schemas.microsoft.com/office/drawing/2014/main" id="{4341BFF8-BEC1-70D4-324B-8FD51E0DAC79}"/>
+                <a16:creationId xmlns:a16="http://schemas.microsoft.com/office/drawing/2014/main" id="{96D7745C-33A3-5E08-9676-31B82A7FED49}"/>
               </a:ext>
             </a:extLst>
           </p:cNvPr>
@@ -12036,7 +11377,7 @@
     </p:spTree>
     <p:extLst>
       <p:ext uri="{BB962C8B-B14F-4D97-AF65-F5344CB8AC3E}">
-        <p14:creationId xmlns:p14="http://schemas.microsoft.com/office/powerpoint/2010/main" val="2345780904"/>
+        <p14:creationId xmlns:p14="http://schemas.microsoft.com/office/powerpoint/2010/main" val="2682940258"/>
       </p:ext>
     </p:extLst>
   </p:cSld>
@@ -12065,10 +11406,10 @@
       </p:grpSpPr>
       <p:sp>
         <p:nvSpPr>
-          <p:cNvPr id="2" name="Titel 1">
-            <a:extLst>
-              <a:ext uri="{FF2B5EF4-FFF2-40B4-BE49-F238E27FC236}">
-                <a16:creationId xmlns:a16="http://schemas.microsoft.com/office/drawing/2014/main" id="{26EB045E-1272-3E62-6E68-080CE472E3FB}"/>
+          <p:cNvPr id="2" name="Title 1">
+            <a:extLst>
+              <a:ext uri="{FF2B5EF4-FFF2-40B4-BE49-F238E27FC236}">
+                <a16:creationId xmlns:a16="http://schemas.microsoft.com/office/drawing/2014/main" id="{C69AD07C-8362-D471-3F09-B2FC347557A6}"/>
               </a:ext>
             </a:extLst>
           </p:cNvPr>
@@ -12085,18 +11426,18 @@
           <a:lstStyle/>
           <a:p>
             <a:r>
-              <a:rPr lang="de-DE" dirty="0"/>
-              <a:t>Dialog Systems</a:t>
-            </a:r>
-          </a:p>
-        </p:txBody>
-      </p:sp>
-      <p:sp>
-        <p:nvSpPr>
-          <p:cNvPr id="3" name="Inhaltsplatzhalter 2">
-            <a:extLst>
-              <a:ext uri="{FF2B5EF4-FFF2-40B4-BE49-F238E27FC236}">
-                <a16:creationId xmlns:a16="http://schemas.microsoft.com/office/drawing/2014/main" id="{C16BFCD0-FDF6-89AF-2AC1-D92E4EB10467}"/>
+              <a:rPr lang="en-GB" dirty="0"/>
+              <a:t>Parameter-Efficient Finetuning (PEFT)</a:t>
+            </a:r>
+          </a:p>
+        </p:txBody>
+      </p:sp>
+      <p:sp>
+        <p:nvSpPr>
+          <p:cNvPr id="3" name="Content Placeholder 2">
+            <a:extLst>
+              <a:ext uri="{FF2B5EF4-FFF2-40B4-BE49-F238E27FC236}">
+                <a16:creationId xmlns:a16="http://schemas.microsoft.com/office/drawing/2014/main" id="{E9876C3D-25E9-6468-66D7-A1D0E870E374}"/>
               </a:ext>
             </a:extLst>
           </p:cNvPr>
@@ -12107,75 +11448,41 @@
             <p:ph idx="1"/>
           </p:nvPr>
         </p:nvSpPr>
-        <p:spPr/>
-        <p:txBody>
-          <a:bodyPr/>
+        <p:spPr>
+          <a:xfrm>
+            <a:off x="838199" y="1825625"/>
+            <a:ext cx="8009239" cy="4431242"/>
+          </a:xfrm>
+        </p:spPr>
+        <p:txBody>
+          <a:bodyPr>
+            <a:normAutofit/>
+          </a:bodyPr>
           <a:lstStyle/>
           <a:p>
             <a:pPr marL="0" indent="0">
               <a:buNone/>
             </a:pPr>
             <a:r>
-              <a:rPr lang="de-DE" dirty="0"/>
-              <a:t>…</a:t>
-            </a:r>
-          </a:p>
-          <a:p>
-            <a:pPr marL="0" indent="0">
-              <a:buNone/>
-            </a:pPr>
-            <a:endParaRPr lang="de-DE" dirty="0"/>
-          </a:p>
-          <a:p>
-            <a:pPr marL="0" indent="0">
-              <a:buNone/>
-            </a:pPr>
-            <a:r>
-              <a:rPr lang="de-DE" dirty="0" err="1"/>
-              <a:t>with</a:t>
-            </a:r>
-            <a:r>
-              <a:rPr lang="de-DE" dirty="0"/>
-              <a:t> </a:t>
-            </a:r>
-            <a:r>
-              <a:rPr lang="de-DE" dirty="0" err="1"/>
-              <a:t>instruction-tuned</a:t>
-            </a:r>
-            <a:r>
-              <a:rPr lang="de-DE" dirty="0"/>
-              <a:t> and </a:t>
-            </a:r>
-            <a:r>
-              <a:rPr lang="de-DE" dirty="0" err="1"/>
-              <a:t>aligned</a:t>
-            </a:r>
-            <a:r>
-              <a:rPr lang="de-DE" dirty="0"/>
-              <a:t> LLMs: </a:t>
-            </a:r>
-            <a:r>
-              <a:rPr lang="de-DE" dirty="0" err="1"/>
-              <a:t>assistant</a:t>
-            </a:r>
-            <a:r>
-              <a:rPr lang="de-DE" dirty="0"/>
-              <a:t>-style </a:t>
-            </a:r>
-            <a:r>
-              <a:rPr lang="de-DE" dirty="0" err="1"/>
-              <a:t>models</a:t>
-            </a:r>
-            <a:endParaRPr lang="de-DE" dirty="0"/>
-          </a:p>
-        </p:txBody>
-      </p:sp>
-      <p:sp>
-        <p:nvSpPr>
-          <p:cNvPr id="4" name="Foliennummernplatzhalter 3">
-            <a:extLst>
-              <a:ext uri="{FF2B5EF4-FFF2-40B4-BE49-F238E27FC236}">
-                <a16:creationId xmlns:a16="http://schemas.microsoft.com/office/drawing/2014/main" id="{96D7745C-33A3-5E08-9676-31B82A7FED49}"/>
+              <a:rPr lang="en-GB" dirty="0"/>
+              <a:t>… </a:t>
+            </a:r>
+            <a:r>
+              <a:rPr lang="en-GB" dirty="0">
+                <a:hlinkClick r:id="rId2"/>
+              </a:rPr>
+              <a:t>LoRA</a:t>
+            </a:r>
+            <a:endParaRPr lang="en-GB" dirty="0"/>
+          </a:p>
+        </p:txBody>
+      </p:sp>
+      <p:sp>
+        <p:nvSpPr>
+          <p:cNvPr id="4" name="Slide Number Placeholder 3">
+            <a:extLst>
+              <a:ext uri="{FF2B5EF4-FFF2-40B4-BE49-F238E27FC236}">
+                <a16:creationId xmlns:a16="http://schemas.microsoft.com/office/drawing/2014/main" id="{12E4E765-465F-5DF8-7C82-EFF8EB0E6447}"/>
               </a:ext>
             </a:extLst>
           </p:cNvPr>
@@ -12191,141 +11498,9 @@
           <a:bodyPr/>
           <a:lstStyle/>
           <a:p>
-            <a:fld id="{4055531C-5681-6B44-B2CA-926D7A74B06D}" type="slidenum">
-              <a:rPr lang="de-DE" smtClean="0"/>
-              <a:t>25</a:t>
-            </a:fld>
-            <a:endParaRPr lang="de-DE"/>
-          </a:p>
-        </p:txBody>
-      </p:sp>
-    </p:spTree>
-    <p:extLst>
-      <p:ext uri="{BB962C8B-B14F-4D97-AF65-F5344CB8AC3E}">
-        <p14:creationId xmlns:p14="http://schemas.microsoft.com/office/powerpoint/2010/main" val="2682940258"/>
-      </p:ext>
-    </p:extLst>
-  </p:cSld>
-  <p:clrMapOvr>
-    <a:masterClrMapping/>
-  </p:clrMapOvr>
-</p:sld>
-</file>
-
-<file path=ppt/slides/slide26.xml><?xml version="1.0" encoding="utf-8"?>
-<p:sld xmlns:a="http://schemas.openxmlformats.org/drawingml/2006/main" xmlns:r="http://schemas.openxmlformats.org/officeDocument/2006/relationships" xmlns:p="http://schemas.openxmlformats.org/presentationml/2006/main">
-  <p:cSld>
-    <p:spTree>
-      <p:nvGrpSpPr>
-        <p:cNvPr id="1" name=""/>
-        <p:cNvGrpSpPr/>
-        <p:nvPr/>
-      </p:nvGrpSpPr>
-      <p:grpSpPr>
-        <a:xfrm>
-          <a:off x="0" y="0"/>
-          <a:ext cx="0" cy="0"/>
-          <a:chOff x="0" y="0"/>
-          <a:chExt cx="0" cy="0"/>
-        </a:xfrm>
-      </p:grpSpPr>
-      <p:sp>
-        <p:nvSpPr>
-          <p:cNvPr id="2" name="Title 1">
-            <a:extLst>
-              <a:ext uri="{FF2B5EF4-FFF2-40B4-BE49-F238E27FC236}">
-                <a16:creationId xmlns:a16="http://schemas.microsoft.com/office/drawing/2014/main" id="{C69AD07C-8362-D471-3F09-B2FC347557A6}"/>
-              </a:ext>
-            </a:extLst>
-          </p:cNvPr>
-          <p:cNvSpPr>
-            <a:spLocks noGrp="1"/>
-          </p:cNvSpPr>
-          <p:nvPr>
-            <p:ph type="title"/>
-          </p:nvPr>
-        </p:nvSpPr>
-        <p:spPr/>
-        <p:txBody>
-          <a:bodyPr/>
-          <a:lstStyle/>
-          <a:p>
-            <a:r>
-              <a:rPr lang="en-GB" dirty="0"/>
-              <a:t>Parameter-Efficient Finetuning (PEFT)</a:t>
-            </a:r>
-          </a:p>
-        </p:txBody>
-      </p:sp>
-      <p:sp>
-        <p:nvSpPr>
-          <p:cNvPr id="3" name="Content Placeholder 2">
-            <a:extLst>
-              <a:ext uri="{FF2B5EF4-FFF2-40B4-BE49-F238E27FC236}">
-                <a16:creationId xmlns:a16="http://schemas.microsoft.com/office/drawing/2014/main" id="{E9876C3D-25E9-6468-66D7-A1D0E870E374}"/>
-              </a:ext>
-            </a:extLst>
-          </p:cNvPr>
-          <p:cNvSpPr>
-            <a:spLocks noGrp="1"/>
-          </p:cNvSpPr>
-          <p:nvPr>
-            <p:ph idx="1"/>
-          </p:nvPr>
-        </p:nvSpPr>
-        <p:spPr>
-          <a:xfrm>
-            <a:off x="838199" y="1825625"/>
-            <a:ext cx="8009239" cy="4431242"/>
-          </a:xfrm>
-        </p:spPr>
-        <p:txBody>
-          <a:bodyPr>
-            <a:normAutofit/>
-          </a:bodyPr>
-          <a:lstStyle/>
-          <a:p>
-            <a:pPr marL="0" indent="0">
-              <a:buNone/>
-            </a:pPr>
-            <a:r>
-              <a:rPr lang="en-GB" dirty="0"/>
-              <a:t>… </a:t>
-            </a:r>
-            <a:r>
-              <a:rPr lang="en-GB" dirty="0">
-                <a:hlinkClick r:id="rId2"/>
-              </a:rPr>
-              <a:t>LoRA</a:t>
-            </a:r>
-            <a:endParaRPr lang="en-GB" dirty="0"/>
-          </a:p>
-        </p:txBody>
-      </p:sp>
-      <p:sp>
-        <p:nvSpPr>
-          <p:cNvPr id="4" name="Slide Number Placeholder 3">
-            <a:extLst>
-              <a:ext uri="{FF2B5EF4-FFF2-40B4-BE49-F238E27FC236}">
-                <a16:creationId xmlns:a16="http://schemas.microsoft.com/office/drawing/2014/main" id="{12E4E765-465F-5DF8-7C82-EFF8EB0E6447}"/>
-              </a:ext>
-            </a:extLst>
-          </p:cNvPr>
-          <p:cNvSpPr>
-            <a:spLocks noGrp="1"/>
-          </p:cNvSpPr>
-          <p:nvPr>
-            <p:ph type="sldNum" sz="quarter" idx="12"/>
-          </p:nvPr>
-        </p:nvSpPr>
-        <p:spPr/>
-        <p:txBody>
-          <a:bodyPr/>
-          <a:lstStyle/>
-          <a:p>
             <a:fld id="{849D05A8-43E9-1C49-8606-50AB68220DEC}" type="slidenum">
               <a:rPr lang="en-DE" smtClean="0"/>
-              <a:t>26</a:t>
+              <a:t>25</a:t>
             </a:fld>
             <a:endParaRPr lang="en-DE"/>
           </a:p>
@@ -12374,6 +11549,760 @@
 </p:sld>
 </file>
 
+<file path=ppt/slides/slide26.xml><?xml version="1.0" encoding="utf-8"?>
+<p:sld xmlns:a="http://schemas.openxmlformats.org/drawingml/2006/main" xmlns:r="http://schemas.openxmlformats.org/officeDocument/2006/relationships" xmlns:p="http://schemas.openxmlformats.org/presentationml/2006/main">
+  <p:cSld>
+    <p:spTree>
+      <p:nvGrpSpPr>
+        <p:cNvPr id="1" name=""/>
+        <p:cNvGrpSpPr/>
+        <p:nvPr/>
+      </p:nvGrpSpPr>
+      <p:grpSpPr>
+        <a:xfrm>
+          <a:off x="0" y="0"/>
+          <a:ext cx="0" cy="0"/>
+          <a:chOff x="0" y="0"/>
+          <a:chExt cx="0" cy="0"/>
+        </a:xfrm>
+      </p:grpSpPr>
+      <p:sp>
+        <p:nvSpPr>
+          <p:cNvPr id="2" name="Titel 1">
+            <a:extLst>
+              <a:ext uri="{FF2B5EF4-FFF2-40B4-BE49-F238E27FC236}">
+                <a16:creationId xmlns:a16="http://schemas.microsoft.com/office/drawing/2014/main" id="{B644D5EC-B5AA-E834-EBB8-678B95596DB8}"/>
+              </a:ext>
+            </a:extLst>
+          </p:cNvPr>
+          <p:cNvSpPr>
+            <a:spLocks noGrp="1"/>
+          </p:cNvSpPr>
+          <p:nvPr>
+            <p:ph type="title"/>
+          </p:nvPr>
+        </p:nvSpPr>
+        <p:spPr/>
+        <p:txBody>
+          <a:bodyPr/>
+          <a:lstStyle/>
+          <a:p>
+            <a:endParaRPr lang="de-DE"/>
+          </a:p>
+        </p:txBody>
+      </p:sp>
+      <p:sp>
+        <p:nvSpPr>
+          <p:cNvPr id="3" name="Inhaltsplatzhalter 2">
+            <a:extLst>
+              <a:ext uri="{FF2B5EF4-FFF2-40B4-BE49-F238E27FC236}">
+                <a16:creationId xmlns:a16="http://schemas.microsoft.com/office/drawing/2014/main" id="{4B87694A-0859-8A10-3458-6B8052C23052}"/>
+              </a:ext>
+            </a:extLst>
+          </p:cNvPr>
+          <p:cNvSpPr>
+            <a:spLocks noGrp="1"/>
+          </p:cNvSpPr>
+          <p:nvPr>
+            <p:ph idx="1"/>
+          </p:nvPr>
+        </p:nvSpPr>
+        <p:spPr/>
+        <p:txBody>
+          <a:bodyPr/>
+          <a:lstStyle/>
+          <a:p>
+            <a:pPr marL="0" indent="0">
+              <a:buNone/>
+            </a:pPr>
+            <a:r>
+              <a:rPr lang="de-DE" dirty="0"/>
+              <a:t>…</a:t>
+            </a:r>
+          </a:p>
+          <a:p>
+            <a:pPr marL="0" indent="0">
+              <a:buNone/>
+            </a:pPr>
+            <a:endParaRPr lang="de-DE" dirty="0"/>
+          </a:p>
+          <a:p>
+            <a:pPr marL="0" indent="0">
+              <a:buNone/>
+            </a:pPr>
+            <a:r>
+              <a:rPr lang="de-DE" dirty="0" err="1">
+                <a:hlinkClick r:id="rId2"/>
+              </a:rPr>
+              <a:t>Build</a:t>
+            </a:r>
+            <a:r>
+              <a:rPr lang="de-DE" dirty="0">
+                <a:hlinkClick r:id="rId2"/>
+              </a:rPr>
+              <a:t> a Large Language Model (</a:t>
+            </a:r>
+            <a:r>
+              <a:rPr lang="de-DE" dirty="0" err="1">
+                <a:hlinkClick r:id="rId2"/>
+              </a:rPr>
+              <a:t>From</a:t>
+            </a:r>
+            <a:r>
+              <a:rPr lang="de-DE" dirty="0">
+                <a:hlinkClick r:id="rId2"/>
+              </a:rPr>
+              <a:t> Scratch)</a:t>
+            </a:r>
+            <a:endParaRPr lang="de-DE" dirty="0"/>
+          </a:p>
+        </p:txBody>
+      </p:sp>
+      <p:sp>
+        <p:nvSpPr>
+          <p:cNvPr id="4" name="Foliennummernplatzhalter 3">
+            <a:extLst>
+              <a:ext uri="{FF2B5EF4-FFF2-40B4-BE49-F238E27FC236}">
+                <a16:creationId xmlns:a16="http://schemas.microsoft.com/office/drawing/2014/main" id="{F51A0954-1AA4-E4D1-74D2-588420CC4BB1}"/>
+              </a:ext>
+            </a:extLst>
+          </p:cNvPr>
+          <p:cNvSpPr>
+            <a:spLocks noGrp="1"/>
+          </p:cNvSpPr>
+          <p:nvPr>
+            <p:ph type="sldNum" sz="quarter" idx="12"/>
+          </p:nvPr>
+        </p:nvSpPr>
+        <p:spPr/>
+        <p:txBody>
+          <a:bodyPr/>
+          <a:lstStyle/>
+          <a:p>
+            <a:fld id="{4055531C-5681-6B44-B2CA-926D7A74B06D}" type="slidenum">
+              <a:rPr lang="de-DE" smtClean="0"/>
+              <a:t>26</a:t>
+            </a:fld>
+            <a:endParaRPr lang="de-DE"/>
+          </a:p>
+        </p:txBody>
+      </p:sp>
+    </p:spTree>
+    <p:extLst>
+      <p:ext uri="{BB962C8B-B14F-4D97-AF65-F5344CB8AC3E}">
+        <p14:creationId xmlns:p14="http://schemas.microsoft.com/office/powerpoint/2010/main" val="973004014"/>
+      </p:ext>
+    </p:extLst>
+  </p:cSld>
+  <p:clrMapOvr>
+    <a:masterClrMapping/>
+  </p:clrMapOvr>
+</p:sld>
+</file>
+
+<file path=ppt/slides/slide27.xml><?xml version="1.0" encoding="utf-8"?>
+<p:sld xmlns:a="http://schemas.openxmlformats.org/drawingml/2006/main" xmlns:r="http://schemas.openxmlformats.org/officeDocument/2006/relationships" xmlns:p="http://schemas.openxmlformats.org/presentationml/2006/main">
+  <p:cSld>
+    <p:spTree>
+      <p:nvGrpSpPr>
+        <p:cNvPr id="1" name=""/>
+        <p:cNvGrpSpPr/>
+        <p:nvPr/>
+      </p:nvGrpSpPr>
+      <p:grpSpPr>
+        <a:xfrm>
+          <a:off x="0" y="0"/>
+          <a:ext cx="0" cy="0"/>
+          <a:chOff x="0" y="0"/>
+          <a:chExt cx="0" cy="0"/>
+        </a:xfrm>
+      </p:grpSpPr>
+      <p:sp>
+        <p:nvSpPr>
+          <p:cNvPr id="16" name="Abgerundetes Rechteck 15">
+            <a:extLst>
+              <a:ext uri="{FF2B5EF4-FFF2-40B4-BE49-F238E27FC236}">
+                <a16:creationId xmlns:a16="http://schemas.microsoft.com/office/drawing/2014/main" id="{C2CF71D3-F9F6-B398-513E-188910BE90BC}"/>
+              </a:ext>
+            </a:extLst>
+          </p:cNvPr>
+          <p:cNvSpPr/>
+          <p:nvPr/>
+        </p:nvSpPr>
+        <p:spPr>
+          <a:xfrm>
+            <a:off x="838198" y="1742480"/>
+            <a:ext cx="10210802" cy="682236"/>
+          </a:xfrm>
+          <a:prstGeom prst="roundRect">
+            <a:avLst/>
+          </a:prstGeom>
+          <a:solidFill>
+            <a:schemeClr val="bg2"/>
+          </a:solidFill>
+        </p:spPr>
+        <p:style>
+          <a:lnRef idx="2">
+            <a:schemeClr val="accent1">
+              <a:shade val="15000"/>
+            </a:schemeClr>
+          </a:lnRef>
+          <a:fillRef idx="1">
+            <a:schemeClr val="accent1"/>
+          </a:fillRef>
+          <a:effectRef idx="0">
+            <a:schemeClr val="accent1"/>
+          </a:effectRef>
+          <a:fontRef idx="minor">
+            <a:schemeClr val="lt1"/>
+          </a:fontRef>
+        </p:style>
+        <p:txBody>
+          <a:bodyPr rtlCol="0" anchor="ctr"/>
+          <a:lstStyle/>
+          <a:p>
+            <a:pPr algn="ctr"/>
+            <a:endParaRPr lang="de-DE"/>
+          </a:p>
+        </p:txBody>
+      </p:sp>
+      <p:sp>
+        <p:nvSpPr>
+          <p:cNvPr id="15" name="Abgerundetes Rechteck 14">
+            <a:extLst>
+              <a:ext uri="{FF2B5EF4-FFF2-40B4-BE49-F238E27FC236}">
+                <a16:creationId xmlns:a16="http://schemas.microsoft.com/office/drawing/2014/main" id="{D1D2C1B1-5072-3473-0849-846900EBB4BA}"/>
+              </a:ext>
+            </a:extLst>
+          </p:cNvPr>
+          <p:cNvSpPr/>
+          <p:nvPr/>
+        </p:nvSpPr>
+        <p:spPr>
+          <a:xfrm>
+            <a:off x="838198" y="2853230"/>
+            <a:ext cx="10210802" cy="1605565"/>
+          </a:xfrm>
+          <a:prstGeom prst="roundRect">
+            <a:avLst/>
+          </a:prstGeom>
+          <a:solidFill>
+            <a:schemeClr val="bg2"/>
+          </a:solidFill>
+        </p:spPr>
+        <p:style>
+          <a:lnRef idx="2">
+            <a:schemeClr val="accent1">
+              <a:shade val="15000"/>
+            </a:schemeClr>
+          </a:lnRef>
+          <a:fillRef idx="1">
+            <a:schemeClr val="accent1"/>
+          </a:fillRef>
+          <a:effectRef idx="0">
+            <a:schemeClr val="accent1"/>
+          </a:effectRef>
+          <a:fontRef idx="minor">
+            <a:schemeClr val="lt1"/>
+          </a:fontRef>
+        </p:style>
+        <p:txBody>
+          <a:bodyPr rtlCol="0" anchor="ctr"/>
+          <a:lstStyle/>
+          <a:p>
+            <a:pPr algn="ctr"/>
+            <a:endParaRPr lang="de-DE"/>
+          </a:p>
+        </p:txBody>
+      </p:sp>
+      <p:sp>
+        <p:nvSpPr>
+          <p:cNvPr id="8" name="Abgerundetes Rechteck 7">
+            <a:extLst>
+              <a:ext uri="{FF2B5EF4-FFF2-40B4-BE49-F238E27FC236}">
+                <a16:creationId xmlns:a16="http://schemas.microsoft.com/office/drawing/2014/main" id="{64A12374-ACEF-7777-B3C5-6F49491F5D56}"/>
+              </a:ext>
+            </a:extLst>
+          </p:cNvPr>
+          <p:cNvSpPr/>
+          <p:nvPr/>
+        </p:nvSpPr>
+        <p:spPr>
+          <a:xfrm>
+            <a:off x="838198" y="4887309"/>
+            <a:ext cx="10210802" cy="1605565"/>
+          </a:xfrm>
+          <a:prstGeom prst="roundRect">
+            <a:avLst/>
+          </a:prstGeom>
+          <a:solidFill>
+            <a:schemeClr val="bg2"/>
+          </a:solidFill>
+        </p:spPr>
+        <p:style>
+          <a:lnRef idx="2">
+            <a:schemeClr val="accent1">
+              <a:shade val="15000"/>
+            </a:schemeClr>
+          </a:lnRef>
+          <a:fillRef idx="1">
+            <a:schemeClr val="accent1"/>
+          </a:fillRef>
+          <a:effectRef idx="0">
+            <a:schemeClr val="accent1"/>
+          </a:effectRef>
+          <a:fontRef idx="minor">
+            <a:schemeClr val="lt1"/>
+          </a:fontRef>
+        </p:style>
+        <p:txBody>
+          <a:bodyPr rtlCol="0" anchor="ctr"/>
+          <a:lstStyle/>
+          <a:p>
+            <a:pPr algn="ctr"/>
+            <a:endParaRPr lang="de-DE"/>
+          </a:p>
+        </p:txBody>
+      </p:sp>
+      <p:sp>
+        <p:nvSpPr>
+          <p:cNvPr id="6" name="Title 5">
+            <a:extLst>
+              <a:ext uri="{FF2B5EF4-FFF2-40B4-BE49-F238E27FC236}">
+                <a16:creationId xmlns:a16="http://schemas.microsoft.com/office/drawing/2014/main" id="{A6D4E78A-896B-C79A-E2FE-5D9193754C31}"/>
+              </a:ext>
+            </a:extLst>
+          </p:cNvPr>
+          <p:cNvSpPr>
+            <a:spLocks noGrp="1"/>
+          </p:cNvSpPr>
+          <p:nvPr>
+            <p:ph type="title"/>
+          </p:nvPr>
+        </p:nvSpPr>
+        <p:spPr/>
+        <p:txBody>
+          <a:bodyPr/>
+          <a:lstStyle/>
+          <a:p>
+            <a:r>
+              <a:rPr lang="en-GB" dirty="0"/>
+              <a:t>Modern Language Models in a Nutshell</a:t>
+            </a:r>
+          </a:p>
+        </p:txBody>
+      </p:sp>
+      <p:sp>
+        <p:nvSpPr>
+          <p:cNvPr id="7" name="Content Placeholder 6">
+            <a:extLst>
+              <a:ext uri="{FF2B5EF4-FFF2-40B4-BE49-F238E27FC236}">
+                <a16:creationId xmlns:a16="http://schemas.microsoft.com/office/drawing/2014/main" id="{E908D6CC-B86F-1636-6F85-AB0B7A2A316F}"/>
+              </a:ext>
+            </a:extLst>
+          </p:cNvPr>
+          <p:cNvSpPr>
+            <a:spLocks noGrp="1"/>
+          </p:cNvSpPr>
+          <p:nvPr>
+            <p:ph idx="1"/>
+          </p:nvPr>
+        </p:nvSpPr>
+        <p:spPr/>
+        <p:txBody>
+          <a:bodyPr>
+            <a:normAutofit/>
+          </a:bodyPr>
+          <a:lstStyle/>
+          <a:p>
+            <a:pPr marL="0" indent="0">
+              <a:buNone/>
+            </a:pPr>
+            <a:r>
+              <a:rPr lang="en-GB" b="1" dirty="0"/>
+              <a:t>tokenization</a:t>
+            </a:r>
+            <a:r>
+              <a:rPr lang="en-GB" dirty="0"/>
+              <a:t>: split text into chunks</a:t>
+            </a:r>
+          </a:p>
+          <a:p>
+            <a:pPr marL="0" indent="0">
+              <a:buNone/>
+            </a:pPr>
+            <a:endParaRPr lang="en-GB" dirty="0"/>
+          </a:p>
+          <a:p>
+            <a:pPr marL="0" indent="0">
+              <a:buNone/>
+            </a:pPr>
+            <a:r>
+              <a:rPr lang="en-GB" b="1" dirty="0"/>
+              <a:t>pretraining</a:t>
+            </a:r>
+            <a:r>
+              <a:rPr lang="en-GB" dirty="0"/>
+              <a:t>: self-supervised, next- or masked-token prediction</a:t>
+            </a:r>
+          </a:p>
+          <a:p>
+            <a:r>
+              <a:rPr lang="en-GB" sz="1800" dirty="0"/>
+              <a:t>vector embeddings from tokens (semantic meaning)</a:t>
+            </a:r>
+            <a:endParaRPr lang="en-GB" sz="1800" dirty="0">
+              <a:sym typeface="Wingdings" pitchFamily="2" charset="2"/>
+            </a:endParaRPr>
+          </a:p>
+          <a:p>
+            <a:r>
+              <a:rPr lang="en-GB" sz="1800" dirty="0"/>
+              <a:t>add positional encoding (attention permutation-invariant)</a:t>
+            </a:r>
+          </a:p>
+          <a:p>
+            <a:r>
+              <a:rPr lang="en-GB" sz="1800" dirty="0"/>
+              <a:t>attention mechanism (transformer) </a:t>
+            </a:r>
+            <a:r>
+              <a:rPr lang="en-GB" sz="1800" dirty="0">
+                <a:sym typeface="Wingdings" pitchFamily="2" charset="2"/>
+              </a:rPr>
+              <a:t></a:t>
+            </a:r>
+            <a:r>
+              <a:rPr lang="en-GB" sz="1800" dirty="0"/>
+              <a:t> contextual embeddings</a:t>
+            </a:r>
+          </a:p>
+          <a:p>
+            <a:pPr marL="0" indent="0">
+              <a:buNone/>
+            </a:pPr>
+            <a:endParaRPr lang="en-GB" dirty="0"/>
+          </a:p>
+          <a:p>
+            <a:pPr marL="0" indent="0">
+              <a:buNone/>
+            </a:pPr>
+            <a:r>
+              <a:rPr lang="en-GB" b="1" dirty="0"/>
+              <a:t>finetuning</a:t>
+            </a:r>
+            <a:r>
+              <a:rPr lang="en-GB" dirty="0"/>
+              <a:t>: specialization</a:t>
+            </a:r>
+          </a:p>
+        </p:txBody>
+      </p:sp>
+      <p:sp>
+        <p:nvSpPr>
+          <p:cNvPr id="5" name="Slide Number Placeholder 4">
+            <a:extLst>
+              <a:ext uri="{FF2B5EF4-FFF2-40B4-BE49-F238E27FC236}">
+                <a16:creationId xmlns:a16="http://schemas.microsoft.com/office/drawing/2014/main" id="{4E568FCF-2CF1-B3CF-F33E-FD3F880A8519}"/>
+              </a:ext>
+            </a:extLst>
+          </p:cNvPr>
+          <p:cNvSpPr>
+            <a:spLocks noGrp="1"/>
+          </p:cNvSpPr>
+          <p:nvPr>
+            <p:ph type="sldNum" sz="quarter" idx="12"/>
+          </p:nvPr>
+        </p:nvSpPr>
+        <p:spPr/>
+        <p:txBody>
+          <a:bodyPr/>
+          <a:lstStyle/>
+          <a:p>
+            <a:fld id="{849D05A8-43E9-1C49-8606-50AB68220DEC}" type="slidenum">
+              <a:rPr lang="en-DE" smtClean="0"/>
+              <a:t>27</a:t>
+            </a:fld>
+            <a:endParaRPr lang="en-DE"/>
+          </a:p>
+        </p:txBody>
+      </p:sp>
+      <p:sp>
+        <p:nvSpPr>
+          <p:cNvPr id="13" name="Textfeld 12">
+            <a:extLst>
+              <a:ext uri="{FF2B5EF4-FFF2-40B4-BE49-F238E27FC236}">
+                <a16:creationId xmlns:a16="http://schemas.microsoft.com/office/drawing/2014/main" id="{462D4140-AC0F-1879-1992-0E7A9644CA76}"/>
+              </a:ext>
+            </a:extLst>
+          </p:cNvPr>
+          <p:cNvSpPr txBox="1"/>
+          <p:nvPr/>
+        </p:nvSpPr>
+        <p:spPr>
+          <a:xfrm>
+            <a:off x="6095999" y="5486399"/>
+            <a:ext cx="5257801" cy="923330"/>
+          </a:xfrm>
+          <a:prstGeom prst="rect">
+            <a:avLst/>
+          </a:prstGeom>
+          <a:noFill/>
+        </p:spPr>
+        <p:txBody>
+          <a:bodyPr wrap="square" rtlCol="0">
+            <a:spAutoFit/>
+          </a:bodyPr>
+          <a:lstStyle/>
+          <a:p>
+            <a:pPr marL="285750" indent="-285750">
+              <a:buFont typeface="Arial" panose="020B0604020202020204" pitchFamily="34" charset="0"/>
+              <a:buChar char="•"/>
+            </a:pPr>
+            <a:r>
+              <a:rPr lang="de-DE" dirty="0" err="1"/>
+              <a:t>assistant</a:t>
+            </a:r>
+            <a:r>
+              <a:rPr lang="de-DE" dirty="0"/>
+              <a:t>/</a:t>
+            </a:r>
+            <a:r>
+              <a:rPr lang="de-DE" dirty="0" err="1"/>
+              <a:t>chatbot</a:t>
+            </a:r>
+            <a:r>
+              <a:rPr lang="de-DE" dirty="0"/>
+              <a:t> (</a:t>
+            </a:r>
+            <a:r>
+              <a:rPr lang="de-DE" dirty="0" err="1"/>
+              <a:t>multipurpose</a:t>
+            </a:r>
+            <a:r>
+              <a:rPr lang="de-DE" dirty="0"/>
+              <a:t>)</a:t>
+            </a:r>
+          </a:p>
+          <a:p>
+            <a:pPr marL="285750" indent="-285750">
+              <a:buFont typeface="Arial" panose="020B0604020202020204" pitchFamily="34" charset="0"/>
+              <a:buChar char="•"/>
+            </a:pPr>
+            <a:r>
+              <a:rPr lang="de-DE" dirty="0" err="1"/>
+              <a:t>instruction</a:t>
+            </a:r>
+            <a:r>
+              <a:rPr lang="de-DE" dirty="0"/>
+              <a:t> </a:t>
+            </a:r>
+            <a:r>
+              <a:rPr lang="de-DE" dirty="0" err="1"/>
+              <a:t>tuning</a:t>
+            </a:r>
+            <a:r>
+              <a:rPr lang="de-DE" dirty="0"/>
+              <a:t> (</a:t>
+            </a:r>
+            <a:r>
+              <a:rPr lang="de-DE" dirty="0" err="1"/>
+              <a:t>decoder-only</a:t>
+            </a:r>
+            <a:r>
+              <a:rPr lang="de-DE" dirty="0"/>
+              <a:t> </a:t>
+            </a:r>
+            <a:r>
+              <a:rPr lang="de-DE" dirty="0" err="1"/>
+              <a:t>transformer</a:t>
+            </a:r>
+            <a:r>
+              <a:rPr lang="de-DE" dirty="0"/>
+              <a:t>), </a:t>
+            </a:r>
+            <a:r>
+              <a:rPr lang="de-DE" dirty="0" err="1"/>
+              <a:t>potentially</a:t>
+            </a:r>
+            <a:r>
+              <a:rPr lang="de-DE" dirty="0"/>
+              <a:t> </a:t>
+            </a:r>
+            <a:r>
+              <a:rPr lang="de-DE" dirty="0" err="1"/>
+              <a:t>followed</a:t>
+            </a:r>
+            <a:r>
+              <a:rPr lang="de-DE" dirty="0"/>
+              <a:t> </a:t>
+            </a:r>
+            <a:r>
+              <a:rPr lang="de-DE" dirty="0" err="1"/>
+              <a:t>by</a:t>
+            </a:r>
+            <a:r>
+              <a:rPr lang="de-DE" dirty="0"/>
+              <a:t> </a:t>
+            </a:r>
+            <a:r>
+              <a:rPr lang="de-DE" dirty="0" err="1"/>
+              <a:t>alignment</a:t>
+            </a:r>
+            <a:endParaRPr lang="de-DE" dirty="0"/>
+          </a:p>
+        </p:txBody>
+      </p:sp>
+      <p:sp>
+        <p:nvSpPr>
+          <p:cNvPr id="14" name="Textfeld 13">
+            <a:extLst>
+              <a:ext uri="{FF2B5EF4-FFF2-40B4-BE49-F238E27FC236}">
+                <a16:creationId xmlns:a16="http://schemas.microsoft.com/office/drawing/2014/main" id="{0ABA88E0-558D-4BEA-50DB-887EA4201B2E}"/>
+              </a:ext>
+            </a:extLst>
+          </p:cNvPr>
+          <p:cNvSpPr txBox="1"/>
+          <p:nvPr/>
+        </p:nvSpPr>
+        <p:spPr>
+          <a:xfrm>
+            <a:off x="838200" y="5486399"/>
+            <a:ext cx="5257799" cy="923330"/>
+          </a:xfrm>
+          <a:prstGeom prst="rect">
+            <a:avLst/>
+          </a:prstGeom>
+          <a:noFill/>
+        </p:spPr>
+        <p:txBody>
+          <a:bodyPr wrap="square" rtlCol="0">
+            <a:spAutoFit/>
+          </a:bodyPr>
+          <a:lstStyle/>
+          <a:p>
+            <a:pPr marL="285750" indent="-285750">
+              <a:buFont typeface="Arial" panose="020B0604020202020204" pitchFamily="34" charset="0"/>
+              <a:buChar char="•"/>
+            </a:pPr>
+            <a:r>
+              <a:rPr lang="de-DE" dirty="0" err="1"/>
+              <a:t>classification</a:t>
+            </a:r>
+            <a:r>
+              <a:rPr lang="de-DE" dirty="0"/>
+              <a:t> </a:t>
+            </a:r>
+            <a:r>
+              <a:rPr lang="de-DE" dirty="0" err="1"/>
+              <a:t>model</a:t>
+            </a:r>
+            <a:r>
+              <a:rPr lang="de-DE" dirty="0"/>
+              <a:t> (</a:t>
+            </a:r>
+            <a:r>
+              <a:rPr lang="de-DE" dirty="0" err="1"/>
+              <a:t>specific</a:t>
+            </a:r>
+            <a:r>
+              <a:rPr lang="de-DE" dirty="0"/>
+              <a:t> </a:t>
+            </a:r>
+            <a:r>
+              <a:rPr lang="de-DE" dirty="0" err="1"/>
+              <a:t>task</a:t>
+            </a:r>
+            <a:r>
+              <a:rPr lang="de-DE" dirty="0"/>
+              <a:t>)</a:t>
+            </a:r>
+          </a:p>
+          <a:p>
+            <a:pPr marL="285750" indent="-285750">
+              <a:buFont typeface="Arial" panose="020B0604020202020204" pitchFamily="34" charset="0"/>
+              <a:buChar char="•"/>
+            </a:pPr>
+            <a:r>
+              <a:rPr lang="de-DE" dirty="0" err="1"/>
+              <a:t>finetuning</a:t>
+            </a:r>
+            <a:r>
+              <a:rPr lang="de-DE" dirty="0"/>
+              <a:t> on </a:t>
+            </a:r>
+            <a:r>
+              <a:rPr lang="de-DE" dirty="0" err="1"/>
+              <a:t>labeled</a:t>
+            </a:r>
+            <a:r>
+              <a:rPr lang="de-DE" dirty="0"/>
+              <a:t> </a:t>
+            </a:r>
+            <a:r>
+              <a:rPr lang="de-DE" dirty="0" err="1"/>
+              <a:t>data</a:t>
+            </a:r>
+            <a:r>
+              <a:rPr lang="de-DE" dirty="0"/>
+              <a:t> </a:t>
+            </a:r>
+            <a:r>
+              <a:rPr lang="de-DE" dirty="0" err="1"/>
+              <a:t>set</a:t>
+            </a:r>
+            <a:r>
+              <a:rPr lang="de-DE" dirty="0"/>
+              <a:t> (</a:t>
+            </a:r>
+            <a:r>
+              <a:rPr lang="de-DE" dirty="0" err="1"/>
+              <a:t>often</a:t>
+            </a:r>
+            <a:r>
+              <a:rPr lang="de-DE" dirty="0"/>
+              <a:t> </a:t>
+            </a:r>
+            <a:r>
+              <a:rPr lang="de-DE" dirty="0" err="1"/>
+              <a:t>using</a:t>
+            </a:r>
+            <a:r>
+              <a:rPr lang="de-DE" dirty="0"/>
+              <a:t> </a:t>
+            </a:r>
+            <a:r>
+              <a:rPr lang="de-DE" dirty="0" err="1"/>
+              <a:t>encoder-only</a:t>
+            </a:r>
+            <a:r>
+              <a:rPr lang="de-DE" dirty="0"/>
+              <a:t> </a:t>
+            </a:r>
+            <a:r>
+              <a:rPr lang="de-DE" dirty="0" err="1"/>
+              <a:t>transformer</a:t>
+            </a:r>
+            <a:r>
+              <a:rPr lang="de-DE" dirty="0"/>
+              <a:t>)</a:t>
+            </a:r>
+          </a:p>
+        </p:txBody>
+      </p:sp>
+    </p:spTree>
+    <p:extLst>
+      <p:ext uri="{BB962C8B-B14F-4D97-AF65-F5344CB8AC3E}">
+        <p14:creationId xmlns:p14="http://schemas.microsoft.com/office/powerpoint/2010/main" val="106762038"/>
+      </p:ext>
+    </p:extLst>
+  </p:cSld>
+  <p:clrMapOvr>
+    <a:masterClrMapping/>
+  </p:clrMapOvr>
+</p:sld>
+</file>
+
 <file path=ppt/slides/slide3.xml><?xml version="1.0" encoding="utf-8"?>
 <p:sld xmlns:a="http://schemas.openxmlformats.org/drawingml/2006/main" xmlns:r="http://schemas.openxmlformats.org/officeDocument/2006/relationships" xmlns:p="http://schemas.openxmlformats.org/presentationml/2006/main">
   <p:cSld>
@@ -12612,157 +12541,10 @@
       </p:grpSpPr>
       <p:sp>
         <p:nvSpPr>
-          <p:cNvPr id="8" name="Abgerundetes Rechteck 7">
-            <a:extLst>
-              <a:ext uri="{FF2B5EF4-FFF2-40B4-BE49-F238E27FC236}">
-                <a16:creationId xmlns:a16="http://schemas.microsoft.com/office/drawing/2014/main" id="{64A12374-ACEF-7777-B3C5-6F49491F5D56}"/>
-              </a:ext>
-            </a:extLst>
-          </p:cNvPr>
-          <p:cNvSpPr/>
-          <p:nvPr/>
-        </p:nvSpPr>
-        <p:spPr>
-          <a:xfrm>
-            <a:off x="745942" y="4719145"/>
-            <a:ext cx="10515601" cy="1198178"/>
-          </a:xfrm>
-          <a:prstGeom prst="roundRect">
-            <a:avLst/>
-          </a:prstGeom>
-          <a:solidFill>
-            <a:schemeClr val="bg2"/>
-          </a:solidFill>
-        </p:spPr>
-        <p:style>
-          <a:lnRef idx="2">
-            <a:schemeClr val="accent1">
-              <a:shade val="15000"/>
-            </a:schemeClr>
-          </a:lnRef>
-          <a:fillRef idx="1">
-            <a:schemeClr val="accent1"/>
-          </a:fillRef>
-          <a:effectRef idx="0">
-            <a:schemeClr val="accent1"/>
-          </a:effectRef>
-          <a:fontRef idx="minor">
-            <a:schemeClr val="lt1"/>
-          </a:fontRef>
-        </p:style>
-        <p:txBody>
-          <a:bodyPr rtlCol="0" anchor="ctr"/>
-          <a:lstStyle/>
-          <a:p>
-            <a:pPr algn="ctr"/>
-            <a:endParaRPr lang="de-DE"/>
-          </a:p>
-        </p:txBody>
-      </p:sp>
-      <p:sp>
-        <p:nvSpPr>
-          <p:cNvPr id="4" name="Abgerundetes Rechteck 3">
-            <a:extLst>
-              <a:ext uri="{FF2B5EF4-FFF2-40B4-BE49-F238E27FC236}">
-                <a16:creationId xmlns:a16="http://schemas.microsoft.com/office/drawing/2014/main" id="{9D95965F-A1BA-CDDF-A468-03E138217116}"/>
-              </a:ext>
-            </a:extLst>
-          </p:cNvPr>
-          <p:cNvSpPr/>
-          <p:nvPr/>
-        </p:nvSpPr>
-        <p:spPr>
-          <a:xfrm>
-            <a:off x="745942" y="2543504"/>
-            <a:ext cx="10515601" cy="1786758"/>
-          </a:xfrm>
-          <a:prstGeom prst="roundRect">
-            <a:avLst/>
-          </a:prstGeom>
-          <a:solidFill>
-            <a:schemeClr val="bg2"/>
-          </a:solidFill>
-        </p:spPr>
-        <p:style>
-          <a:lnRef idx="2">
-            <a:schemeClr val="accent1">
-              <a:shade val="15000"/>
-            </a:schemeClr>
-          </a:lnRef>
-          <a:fillRef idx="1">
-            <a:schemeClr val="accent1"/>
-          </a:fillRef>
-          <a:effectRef idx="0">
-            <a:schemeClr val="accent1"/>
-          </a:effectRef>
-          <a:fontRef idx="minor">
-            <a:schemeClr val="lt1"/>
-          </a:fontRef>
-        </p:style>
-        <p:txBody>
-          <a:bodyPr rtlCol="0" anchor="ctr"/>
-          <a:lstStyle/>
-          <a:p>
-            <a:pPr algn="ctr"/>
-            <a:endParaRPr lang="de-DE"/>
-          </a:p>
-        </p:txBody>
-      </p:sp>
-      <p:sp>
-        <p:nvSpPr>
-          <p:cNvPr id="2" name="Abgerundetes Rechteck 1">
-            <a:extLst>
-              <a:ext uri="{FF2B5EF4-FFF2-40B4-BE49-F238E27FC236}">
-                <a16:creationId xmlns:a16="http://schemas.microsoft.com/office/drawing/2014/main" id="{2A945196-42B4-0694-0FE2-DC64A74C1330}"/>
-              </a:ext>
-            </a:extLst>
-          </p:cNvPr>
-          <p:cNvSpPr/>
-          <p:nvPr/>
-        </p:nvSpPr>
-        <p:spPr>
-          <a:xfrm>
-            <a:off x="745943" y="1759389"/>
-            <a:ext cx="10515601" cy="395232"/>
-          </a:xfrm>
-          <a:prstGeom prst="roundRect">
-            <a:avLst/>
-          </a:prstGeom>
-          <a:solidFill>
-            <a:schemeClr val="bg2"/>
-          </a:solidFill>
-        </p:spPr>
-        <p:style>
-          <a:lnRef idx="2">
-            <a:schemeClr val="accent1">
-              <a:shade val="15000"/>
-            </a:schemeClr>
-          </a:lnRef>
-          <a:fillRef idx="1">
-            <a:schemeClr val="accent1"/>
-          </a:fillRef>
-          <a:effectRef idx="0">
-            <a:schemeClr val="accent1"/>
-          </a:effectRef>
-          <a:fontRef idx="minor">
-            <a:schemeClr val="lt1"/>
-          </a:fontRef>
-        </p:style>
-        <p:txBody>
-          <a:bodyPr rtlCol="0" anchor="ctr"/>
-          <a:lstStyle/>
-          <a:p>
-            <a:pPr algn="ctr"/>
-            <a:endParaRPr lang="de-DE"/>
-          </a:p>
-        </p:txBody>
-      </p:sp>
-      <p:sp>
-        <p:nvSpPr>
-          <p:cNvPr id="6" name="Title 5">
-            <a:extLst>
-              <a:ext uri="{FF2B5EF4-FFF2-40B4-BE49-F238E27FC236}">
-                <a16:creationId xmlns:a16="http://schemas.microsoft.com/office/drawing/2014/main" id="{A6D4E78A-896B-C79A-E2FE-5D9193754C31}"/>
+          <p:cNvPr id="5" name="Title 4">
+            <a:extLst>
+              <a:ext uri="{FF2B5EF4-FFF2-40B4-BE49-F238E27FC236}">
+                <a16:creationId xmlns:a16="http://schemas.microsoft.com/office/drawing/2014/main" id="{3EF7C251-E411-67C1-497C-2BFFEBC05F2B}"/>
               </a:ext>
             </a:extLst>
           </p:cNvPr>
@@ -12779,18 +12561,35 @@
           <a:lstStyle/>
           <a:p>
             <a:r>
-              <a:rPr lang="en-GB" dirty="0"/>
-              <a:t>Modern Language Models in a Nutshell</a:t>
-            </a:r>
-          </a:p>
-        </p:txBody>
-      </p:sp>
-      <p:sp>
-        <p:nvSpPr>
-          <p:cNvPr id="7" name="Content Placeholder 6">
-            <a:extLst>
-              <a:ext uri="{FF2B5EF4-FFF2-40B4-BE49-F238E27FC236}">
-                <a16:creationId xmlns:a16="http://schemas.microsoft.com/office/drawing/2014/main" id="{E908D6CC-B86F-1636-6F85-AB0B7A2A316F}"/>
+              <a:rPr lang="de-DE" dirty="0"/>
+              <a:t>Transfer Learning </a:t>
+            </a:r>
+            <a:r>
+              <a:rPr lang="de-DE" dirty="0" err="1"/>
+              <a:t>from</a:t>
+            </a:r>
+            <a:r>
+              <a:rPr lang="de-DE" dirty="0"/>
+              <a:t> </a:t>
+            </a:r>
+            <a:r>
+              <a:rPr lang="de-DE" dirty="0" err="1"/>
+              <a:t>Foundation</a:t>
+            </a:r>
+            <a:r>
+              <a:rPr lang="de-DE" dirty="0"/>
+              <a:t> Models</a:t>
+            </a:r>
+            <a:endParaRPr lang="en-GB" dirty="0"/>
+          </a:p>
+        </p:txBody>
+      </p:sp>
+      <p:sp>
+        <p:nvSpPr>
+          <p:cNvPr id="6" name="Content Placeholder 5">
+            <a:extLst>
+              <a:ext uri="{FF2B5EF4-FFF2-40B4-BE49-F238E27FC236}">
+                <a16:creationId xmlns:a16="http://schemas.microsoft.com/office/drawing/2014/main" id="{194FF263-6A7E-63B8-37B4-8152AC6DF7EF}"/>
               </a:ext>
             </a:extLst>
           </p:cNvPr>
@@ -12803,21 +12602,24 @@
         </p:nvSpPr>
         <p:spPr/>
         <p:txBody>
-          <a:bodyPr>
-            <a:normAutofit fontScale="85000" lnSpcReduction="20000"/>
-          </a:bodyPr>
+          <a:bodyPr/>
           <a:lstStyle/>
           <a:p>
             <a:pPr marL="0" indent="0">
               <a:buNone/>
             </a:pPr>
             <a:r>
-              <a:rPr lang="en-GB" b="1" dirty="0"/>
-              <a:t>tokenization</a:t>
-            </a:r>
-            <a:r>
               <a:rPr lang="en-GB" dirty="0"/>
-              <a:t> (split text into chunks)</a:t>
+              <a:t>idea:</a:t>
+            </a:r>
+          </a:p>
+          <a:p>
+            <a:pPr marL="0" indent="0">
+              <a:buNone/>
+            </a:pPr>
+            <a:r>
+              <a:rPr lang="en-GB" dirty="0"/>
+              <a:t>pretrain a big model (called foundation model) on a broad data set, and then use these learnings for subsequent trainings on specific (typically narrow) data by means of feature extraction or finetuning</a:t>
             </a:r>
           </a:p>
           <a:p>
@@ -12831,161 +12633,20 @@
               <a:buNone/>
             </a:pPr>
             <a:r>
-              <a:rPr lang="en-GB" b="1" dirty="0"/>
-              <a:t>pretraining</a:t>
-            </a:r>
-            <a:r>
-              <a:rPr lang="en-GB" dirty="0"/>
-              <a:t> of transformer (next- or masked-token prediction, self-supervised)</a:t>
-            </a:r>
-          </a:p>
-          <a:p>
-            <a:r>
-              <a:rPr lang="en-GB" dirty="0"/>
-              <a:t>vector embeddings from tokens (semantic meaning)</a:t>
-            </a:r>
-            <a:endParaRPr lang="en-GB" dirty="0">
-              <a:sym typeface="Wingdings" pitchFamily="2" charset="2"/>
-            </a:endParaRPr>
-          </a:p>
-          <a:p>
-            <a:r>
-              <a:rPr lang="en-GB" dirty="0"/>
-              <a:t>add positional encoding to embeddings (use order of sequence, as attention is permutation-invariant)</a:t>
-            </a:r>
-          </a:p>
-          <a:p>
-            <a:r>
-              <a:rPr lang="en-GB" dirty="0"/>
-              <a:t>attention mechanism </a:t>
-            </a:r>
-            <a:r>
               <a:rPr lang="en-GB" dirty="0">
                 <a:sym typeface="Wingdings" pitchFamily="2" charset="2"/>
               </a:rPr>
-              <a:t></a:t>
-            </a:r>
-            <a:r>
-              <a:rPr lang="en-GB" dirty="0"/>
-              <a:t> contextual embeddings</a:t>
-            </a:r>
-          </a:p>
-          <a:p>
-            <a:pPr marL="0" indent="0">
-              <a:buNone/>
-            </a:pPr>
-            <a:endParaRPr lang="en-GB" dirty="0"/>
-          </a:p>
-          <a:p>
-            <a:pPr marL="0" indent="0">
-              <a:buNone/>
-            </a:pPr>
-            <a:r>
-              <a:rPr lang="en-GB" b="1" dirty="0"/>
-              <a:t>finetuning</a:t>
-            </a:r>
-            <a:r>
-              <a:rPr lang="en-GB" dirty="0"/>
-              <a:t> (specialization)</a:t>
-            </a:r>
-          </a:p>
-          <a:p>
-            <a:r>
-              <a:rPr lang="de-DE" dirty="0" err="1"/>
-              <a:t>for</a:t>
-            </a:r>
-            <a:r>
-              <a:rPr lang="de-DE" dirty="0"/>
-              <a:t> </a:t>
-            </a:r>
-            <a:r>
-              <a:rPr lang="de-DE" dirty="0" err="1"/>
-              <a:t>specific</a:t>
-            </a:r>
-            <a:r>
-              <a:rPr lang="de-DE" dirty="0"/>
-              <a:t> </a:t>
-            </a:r>
-            <a:r>
-              <a:rPr lang="de-DE" dirty="0" err="1"/>
-              <a:t>task</a:t>
-            </a:r>
-            <a:r>
-              <a:rPr lang="de-DE" dirty="0"/>
-              <a:t> (</a:t>
-            </a:r>
-            <a:r>
-              <a:rPr lang="de-DE" dirty="0" err="1"/>
-              <a:t>encoder</a:t>
-            </a:r>
-            <a:r>
-              <a:rPr lang="de-DE" dirty="0"/>
-              <a:t> LLM)</a:t>
-            </a:r>
-          </a:p>
-          <a:p>
-            <a:r>
-              <a:rPr lang="de-DE" dirty="0" err="1"/>
-              <a:t>instruction</a:t>
-            </a:r>
-            <a:r>
-              <a:rPr lang="de-DE" dirty="0"/>
-              <a:t> </a:t>
-            </a:r>
-            <a:r>
-              <a:rPr lang="de-DE" dirty="0" err="1"/>
-              <a:t>tuning</a:t>
-            </a:r>
-            <a:r>
-              <a:rPr lang="de-DE" dirty="0"/>
-              <a:t> (</a:t>
-            </a:r>
-            <a:r>
-              <a:rPr lang="de-DE" dirty="0" err="1"/>
-              <a:t>decoder</a:t>
-            </a:r>
-            <a:r>
-              <a:rPr lang="de-DE" dirty="0"/>
-              <a:t> LLM), </a:t>
-            </a:r>
-            <a:r>
-              <a:rPr lang="de-DE" dirty="0" err="1"/>
-              <a:t>potentially</a:t>
-            </a:r>
-            <a:r>
-              <a:rPr lang="de-DE" dirty="0"/>
-              <a:t> </a:t>
-            </a:r>
-            <a:r>
-              <a:rPr lang="de-DE" dirty="0" err="1"/>
-              <a:t>followed</a:t>
-            </a:r>
-            <a:r>
-              <a:rPr lang="de-DE" dirty="0"/>
-              <a:t> </a:t>
-            </a:r>
-            <a:r>
-              <a:rPr lang="de-DE" dirty="0" err="1"/>
-              <a:t>by</a:t>
-            </a:r>
-            <a:r>
-              <a:rPr lang="de-DE" dirty="0"/>
-              <a:t> </a:t>
-            </a:r>
-            <a:r>
-              <a:rPr lang="de-DE" dirty="0" err="1"/>
-              <a:t>alignment</a:t>
-            </a:r>
-            <a:endParaRPr lang="de-DE" dirty="0"/>
-          </a:p>
-        </p:txBody>
-      </p:sp>
-      <p:sp>
-        <p:nvSpPr>
-          <p:cNvPr id="5" name="Slide Number Placeholder 4">
-            <a:extLst>
-              <a:ext uri="{FF2B5EF4-FFF2-40B4-BE49-F238E27FC236}">
-                <a16:creationId xmlns:a16="http://schemas.microsoft.com/office/drawing/2014/main" id="{4E568FCF-2CF1-B3CF-F33E-FD3F880A8519}"/>
+              <a:t> here: self-supervised, internet-scale pretraining of models like BERT or GPT</a:t>
+            </a:r>
+          </a:p>
+        </p:txBody>
+      </p:sp>
+      <p:sp>
+        <p:nvSpPr>
+          <p:cNvPr id="4" name="Slide Number Placeholder 3">
+            <a:extLst>
+              <a:ext uri="{FF2B5EF4-FFF2-40B4-BE49-F238E27FC236}">
+                <a16:creationId xmlns:a16="http://schemas.microsoft.com/office/drawing/2014/main" id="{4F0B5BE9-331D-0505-FC7E-005F6B05B627}"/>
               </a:ext>
             </a:extLst>
           </p:cNvPr>
@@ -13001,20 +12662,20 @@
           <a:bodyPr/>
           <a:lstStyle/>
           <a:p>
-            <a:fld id="{849D05A8-43E9-1C49-8606-50AB68220DEC}" type="slidenum">
-              <a:rPr lang="en-DE" smtClean="0"/>
+            <a:fld id="{3D4C94FE-FF23-4504-88E9-14D481113291}" type="slidenum">
+              <a:rPr lang="en-GB" smtClean="0"/>
               <a:t>4</a:t>
             </a:fld>
-            <a:endParaRPr lang="en-DE"/>
-          </a:p>
-        </p:txBody>
-      </p:sp>
-      <p:sp>
-        <p:nvSpPr>
-          <p:cNvPr id="3" name="Textfeld 2">
-            <a:extLst>
-              <a:ext uri="{FF2B5EF4-FFF2-40B4-BE49-F238E27FC236}">
-                <a16:creationId xmlns:a16="http://schemas.microsoft.com/office/drawing/2014/main" id="{FA5C59CD-A8C5-4A51-66B1-AC6DAA4DC971}"/>
+            <a:endParaRPr lang="en-GB"/>
+          </a:p>
+        </p:txBody>
+      </p:sp>
+      <p:sp>
+        <p:nvSpPr>
+          <p:cNvPr id="2" name="TextBox 4">
+            <a:extLst>
+              <a:ext uri="{FF2B5EF4-FFF2-40B4-BE49-F238E27FC236}">
+                <a16:creationId xmlns:a16="http://schemas.microsoft.com/office/drawing/2014/main" id="{F66358C6-7FB2-EACB-408F-55037CA86FF9}"/>
               </a:ext>
             </a:extLst>
           </p:cNvPr>
@@ -13023,108 +12684,42 @@
         </p:nvSpPr>
         <p:spPr>
           <a:xfrm>
-            <a:off x="9982200" y="4349813"/>
-            <a:ext cx="1005403" cy="369332"/>
+            <a:off x="2799205" y="5988734"/>
+            <a:ext cx="6593589" cy="646331"/>
           </a:xfrm>
           <a:prstGeom prst="rect">
             <a:avLst/>
           </a:prstGeom>
           <a:noFill/>
+          <a:ln>
+            <a:solidFill>
+              <a:schemeClr val="tx1"/>
+            </a:solidFill>
+          </a:ln>
         </p:spPr>
         <p:txBody>
-          <a:bodyPr wrap="none" rtlCol="0">
+          <a:bodyPr wrap="square" rtlCol="0">
             <a:spAutoFit/>
           </a:bodyPr>
           <a:lstStyle/>
           <a:p>
             <a:r>
-              <a:rPr lang="de-DE" dirty="0" err="1">
-                <a:solidFill>
-                  <a:schemeClr val="bg2">
-                    <a:lumMod val="50000"/>
-                  </a:schemeClr>
-                </a:solidFill>
-              </a:rPr>
-              <a:t>this</a:t>
-            </a:r>
-            <a:r>
-              <a:rPr lang="de-DE" dirty="0">
-                <a:solidFill>
-                  <a:schemeClr val="bg2">
-                    <a:lumMod val="50000"/>
-                  </a:schemeClr>
-                </a:solidFill>
-              </a:rPr>
-              <a:t> </a:t>
-            </a:r>
-            <a:r>
-              <a:rPr lang="de-DE" dirty="0" err="1">
-                <a:solidFill>
-                  <a:schemeClr val="bg2">
-                    <a:lumMod val="50000"/>
-                  </a:schemeClr>
-                </a:solidFill>
-              </a:rPr>
-              <a:t>part</a:t>
-            </a:r>
-            <a:endParaRPr lang="de-DE" dirty="0">
-              <a:solidFill>
-                <a:schemeClr val="bg2">
-                  <a:lumMod val="50000"/>
-                </a:schemeClr>
-              </a:solidFill>
-            </a:endParaRPr>
-          </a:p>
-        </p:txBody>
-      </p:sp>
-      <p:cxnSp>
-        <p:nvCxnSpPr>
-          <p:cNvPr id="11" name="Gerade Verbindung mit Pfeil 10">
-            <a:extLst>
-              <a:ext uri="{FF2B5EF4-FFF2-40B4-BE49-F238E27FC236}">
-                <a16:creationId xmlns:a16="http://schemas.microsoft.com/office/drawing/2014/main" id="{B154CDE4-FDAC-8004-8509-EDFA9015AA8D}"/>
-              </a:ext>
-            </a:extLst>
-          </p:cNvPr>
-          <p:cNvCxnSpPr/>
-          <p:nvPr/>
-        </p:nvCxnSpPr>
-        <p:spPr>
-          <a:xfrm flipH="1">
-            <a:off x="5213131" y="4540469"/>
-            <a:ext cx="4769069" cy="704193"/>
-          </a:xfrm>
-          <a:prstGeom prst="straightConnector1">
-            <a:avLst/>
-          </a:prstGeom>
-          <a:ln>
-            <a:solidFill>
-              <a:schemeClr val="bg2">
-                <a:lumMod val="75000"/>
-              </a:schemeClr>
-            </a:solidFill>
-            <a:tailEnd type="triangle"/>
-          </a:ln>
-        </p:spPr>
-        <p:style>
-          <a:lnRef idx="2">
-            <a:schemeClr val="dk1"/>
-          </a:lnRef>
-          <a:fillRef idx="0">
-            <a:schemeClr val="dk1"/>
-          </a:fillRef>
-          <a:effectRef idx="1">
-            <a:schemeClr val="dk1"/>
-          </a:effectRef>
-          <a:fontRef idx="minor">
-            <a:schemeClr val="tx1"/>
-          </a:fontRef>
-        </p:style>
-      </p:cxnSp>
+              <a:rPr lang="en-GB" dirty="0"/>
+              <a:t>works well for homogenous, unstructured data (e.g., text, images)</a:t>
+            </a:r>
+          </a:p>
+          <a:p>
+            <a:r>
+              <a:rPr lang="en-GB" dirty="0"/>
+              <a:t>but very difficult for heterogenous, structured/tabular data</a:t>
+            </a:r>
+          </a:p>
+        </p:txBody>
+      </p:sp>
     </p:spTree>
     <p:extLst>
       <p:ext uri="{BB962C8B-B14F-4D97-AF65-F5344CB8AC3E}">
-        <p14:creationId xmlns:p14="http://schemas.microsoft.com/office/powerpoint/2010/main" val="269024656"/>
+        <p14:creationId xmlns:p14="http://schemas.microsoft.com/office/powerpoint/2010/main" val="2733141780"/>
       </p:ext>
     </p:extLst>
   </p:cSld>
@@ -13153,10 +12748,10 @@
       </p:grpSpPr>
       <p:sp>
         <p:nvSpPr>
-          <p:cNvPr id="5" name="Title 4">
-            <a:extLst>
-              <a:ext uri="{FF2B5EF4-FFF2-40B4-BE49-F238E27FC236}">
-                <a16:creationId xmlns:a16="http://schemas.microsoft.com/office/drawing/2014/main" id="{3EF7C251-E411-67C1-497C-2BFFEBC05F2B}"/>
+          <p:cNvPr id="2" name="Titel 1">
+            <a:extLst>
+              <a:ext uri="{FF2B5EF4-FFF2-40B4-BE49-F238E27FC236}">
+                <a16:creationId xmlns:a16="http://schemas.microsoft.com/office/drawing/2014/main" id="{06E23BCC-EA2F-2E03-E8A6-ACECAA471E84}"/>
               </a:ext>
             </a:extLst>
           </p:cNvPr>
@@ -13172,36 +12767,16 @@
           <a:bodyPr/>
           <a:lstStyle/>
           <a:p>
-            <a:r>
-              <a:rPr lang="de-DE" dirty="0"/>
-              <a:t>Transfer Learning </a:t>
-            </a:r>
-            <a:r>
-              <a:rPr lang="de-DE" dirty="0" err="1"/>
-              <a:t>from</a:t>
-            </a:r>
-            <a:r>
-              <a:rPr lang="de-DE" dirty="0"/>
-              <a:t> </a:t>
-            </a:r>
-            <a:r>
-              <a:rPr lang="de-DE" dirty="0" err="1"/>
-              <a:t>Foundation</a:t>
-            </a:r>
-            <a:r>
-              <a:rPr lang="de-DE" dirty="0"/>
-              <a:t> Models</a:t>
-            </a:r>
-            <a:endParaRPr lang="en-GB" dirty="0"/>
-          </a:p>
-        </p:txBody>
-      </p:sp>
-      <p:sp>
-        <p:nvSpPr>
-          <p:cNvPr id="6" name="Content Placeholder 5">
-            <a:extLst>
-              <a:ext uri="{FF2B5EF4-FFF2-40B4-BE49-F238E27FC236}">
-                <a16:creationId xmlns:a16="http://schemas.microsoft.com/office/drawing/2014/main" id="{194FF263-6A7E-63B8-37B4-8152AC6DF7EF}"/>
+            <a:endParaRPr lang="de-DE"/>
+          </a:p>
+        </p:txBody>
+      </p:sp>
+      <p:sp>
+        <p:nvSpPr>
+          <p:cNvPr id="3" name="Inhaltsplatzhalter 2">
+            <a:extLst>
+              <a:ext uri="{FF2B5EF4-FFF2-40B4-BE49-F238E27FC236}">
+                <a16:creationId xmlns:a16="http://schemas.microsoft.com/office/drawing/2014/main" id="{B75D134A-03B5-8F8A-AB03-A32CFC6CB2F1}"/>
               </a:ext>
             </a:extLst>
           </p:cNvPr>
@@ -13221,8 +12796,48 @@
               <a:buNone/>
             </a:pPr>
             <a:r>
-              <a:rPr lang="en-GB" dirty="0"/>
-              <a:t>idea:</a:t>
+              <a:rPr lang="de-DE" b="1" dirty="0"/>
+              <a:t>Classification </a:t>
+            </a:r>
+            <a:r>
+              <a:rPr lang="de-DE" b="1" dirty="0" err="1"/>
+              <a:t>tasks</a:t>
+            </a:r>
+            <a:r>
+              <a:rPr lang="de-DE" dirty="0"/>
+              <a:t> → [CLS] (</a:t>
+            </a:r>
+            <a:r>
+              <a:rPr lang="de-DE" dirty="0" err="1"/>
+              <a:t>or</a:t>
+            </a:r>
+            <a:r>
+              <a:rPr lang="de-DE" dirty="0"/>
+              <a:t> </a:t>
+            </a:r>
+            <a:r>
+              <a:rPr lang="de-DE" dirty="0" err="1"/>
+              <a:t>sometimes</a:t>
+            </a:r>
+            <a:r>
+              <a:rPr lang="de-DE" dirty="0"/>
+              <a:t> </a:t>
+            </a:r>
+            <a:r>
+              <a:rPr lang="de-DE" dirty="0" err="1"/>
+              <a:t>average</a:t>
+            </a:r>
+            <a:r>
+              <a:rPr lang="de-DE" dirty="0"/>
+              <a:t> </a:t>
+            </a:r>
+            <a:r>
+              <a:rPr lang="de-DE" dirty="0" err="1"/>
+              <a:t>pooling</a:t>
+            </a:r>
+            <a:r>
+              <a:rPr lang="de-DE" dirty="0"/>
+              <a:t>).</a:t>
             </a:r>
           </a:p>
           <a:p>
@@ -13230,35 +12845,95 @@
               <a:buNone/>
             </a:pPr>
             <a:r>
-              <a:rPr lang="en-GB" dirty="0"/>
-              <a:t>pretrain a big model (called foundation model) on a broad data set, and then use these learnings for subsequent trainings on specific (typically narrow) data by means of feature extraction or finetuning</a:t>
+              <a:rPr lang="de-DE" b="1" dirty="0"/>
+              <a:t>Token-level </a:t>
+            </a:r>
+            <a:r>
+              <a:rPr lang="de-DE" b="1" dirty="0" err="1"/>
+              <a:t>tasks</a:t>
+            </a:r>
+            <a:r>
+              <a:rPr lang="de-DE" dirty="0"/>
+              <a:t> → </a:t>
+            </a:r>
+            <a:r>
+              <a:rPr lang="de-DE" dirty="0" err="1"/>
+              <a:t>hidden</a:t>
+            </a:r>
+            <a:r>
+              <a:rPr lang="de-DE" dirty="0"/>
+              <a:t> </a:t>
+            </a:r>
+            <a:r>
+              <a:rPr lang="de-DE" dirty="0" err="1"/>
+              <a:t>states</a:t>
+            </a:r>
+            <a:r>
+              <a:rPr lang="de-DE" dirty="0"/>
+              <a:t> </a:t>
+            </a:r>
+            <a:r>
+              <a:rPr lang="de-DE" dirty="0" err="1"/>
+              <a:t>directly</a:t>
+            </a:r>
+            <a:r>
+              <a:rPr lang="de-DE" dirty="0"/>
+              <a:t>.</a:t>
             </a:r>
           </a:p>
           <a:p>
             <a:pPr marL="0" indent="0">
               <a:buNone/>
             </a:pPr>
-            <a:endParaRPr lang="en-GB" dirty="0"/>
-          </a:p>
-          <a:p>
-            <a:pPr marL="0" indent="0">
-              <a:buNone/>
-            </a:pPr>
-            <a:r>
-              <a:rPr lang="en-GB" dirty="0">
-                <a:sym typeface="Wingdings" pitchFamily="2" charset="2"/>
-              </a:rPr>
-              <a:t> here: self-supervised, internet-scale pretraining of models like BERT or GPT</a:t>
-            </a:r>
-          </a:p>
-        </p:txBody>
-      </p:sp>
-      <p:sp>
-        <p:nvSpPr>
-          <p:cNvPr id="4" name="Slide Number Placeholder 3">
-            <a:extLst>
-              <a:ext uri="{FF2B5EF4-FFF2-40B4-BE49-F238E27FC236}">
-                <a16:creationId xmlns:a16="http://schemas.microsoft.com/office/drawing/2014/main" id="{4F0B5BE9-331D-0505-FC7E-005F6B05B627}"/>
+            <a:r>
+              <a:rPr lang="de-DE" b="1" dirty="0"/>
+              <a:t>MLM</a:t>
+            </a:r>
+            <a:r>
+              <a:rPr lang="de-DE" dirty="0"/>
+              <a:t> → </a:t>
+            </a:r>
+            <a:r>
+              <a:rPr lang="de-DE" dirty="0" err="1"/>
+              <a:t>masked</a:t>
+            </a:r>
+            <a:r>
+              <a:rPr lang="de-DE" dirty="0"/>
+              <a:t> </a:t>
+            </a:r>
+            <a:r>
+              <a:rPr lang="de-DE" dirty="0" err="1"/>
+              <a:t>token</a:t>
+            </a:r>
+            <a:r>
+              <a:rPr lang="de-DE" dirty="0"/>
+              <a:t> </a:t>
+            </a:r>
+            <a:r>
+              <a:rPr lang="de-DE" dirty="0" err="1"/>
+              <a:t>embeddings</a:t>
+            </a:r>
+            <a:r>
+              <a:rPr lang="de-DE" dirty="0"/>
+              <a:t> </a:t>
+            </a:r>
+            <a:r>
+              <a:rPr lang="de-DE" dirty="0" err="1"/>
+              <a:t>only</a:t>
+            </a:r>
+            <a:r>
+              <a:rPr lang="de-DE" dirty="0"/>
+              <a:t>.</a:t>
+            </a:r>
+          </a:p>
+        </p:txBody>
+      </p:sp>
+      <p:sp>
+        <p:nvSpPr>
+          <p:cNvPr id="4" name="Foliennummernplatzhalter 3">
+            <a:extLst>
+              <a:ext uri="{FF2B5EF4-FFF2-40B4-BE49-F238E27FC236}">
+                <a16:creationId xmlns:a16="http://schemas.microsoft.com/office/drawing/2014/main" id="{C37B8CF4-165F-DCF3-1604-8B15312E525F}"/>
               </a:ext>
             </a:extLst>
           </p:cNvPr>
@@ -13274,64 +12949,18 @@
           <a:bodyPr/>
           <a:lstStyle/>
           <a:p>
-            <a:fld id="{3D4C94FE-FF23-4504-88E9-14D481113291}" type="slidenum">
-              <a:rPr lang="en-GB" smtClean="0"/>
+            <a:fld id="{4055531C-5681-6B44-B2CA-926D7A74B06D}" type="slidenum">
+              <a:rPr lang="de-DE" smtClean="0"/>
               <a:t>5</a:t>
             </a:fld>
-            <a:endParaRPr lang="en-GB"/>
-          </a:p>
-        </p:txBody>
-      </p:sp>
-      <p:sp>
-        <p:nvSpPr>
-          <p:cNvPr id="2" name="TextBox 4">
-            <a:extLst>
-              <a:ext uri="{FF2B5EF4-FFF2-40B4-BE49-F238E27FC236}">
-                <a16:creationId xmlns:a16="http://schemas.microsoft.com/office/drawing/2014/main" id="{F66358C6-7FB2-EACB-408F-55037CA86FF9}"/>
-              </a:ext>
-            </a:extLst>
-          </p:cNvPr>
-          <p:cNvSpPr txBox="1"/>
-          <p:nvPr/>
-        </p:nvSpPr>
-        <p:spPr>
-          <a:xfrm>
-            <a:off x="2799205" y="5988734"/>
-            <a:ext cx="6593589" cy="646331"/>
-          </a:xfrm>
-          <a:prstGeom prst="rect">
-            <a:avLst/>
-          </a:prstGeom>
-          <a:noFill/>
-          <a:ln>
-            <a:solidFill>
-              <a:schemeClr val="tx1"/>
-            </a:solidFill>
-          </a:ln>
-        </p:spPr>
-        <p:txBody>
-          <a:bodyPr wrap="square" rtlCol="0">
-            <a:spAutoFit/>
-          </a:bodyPr>
-          <a:lstStyle/>
-          <a:p>
-            <a:r>
-              <a:rPr lang="en-GB" dirty="0"/>
-              <a:t>works well for homogenous, unstructured data (e.g., text, images)</a:t>
-            </a:r>
-          </a:p>
-          <a:p>
-            <a:r>
-              <a:rPr lang="en-GB" dirty="0"/>
-              <a:t>but very difficult for heterogenous, structured/tabular data</a:t>
-            </a:r>
+            <a:endParaRPr lang="de-DE"/>
           </a:p>
         </p:txBody>
       </p:sp>
     </p:spTree>
     <p:extLst>
       <p:ext uri="{BB962C8B-B14F-4D97-AF65-F5344CB8AC3E}">
-        <p14:creationId xmlns:p14="http://schemas.microsoft.com/office/powerpoint/2010/main" val="2733141780"/>
+        <p14:creationId xmlns:p14="http://schemas.microsoft.com/office/powerpoint/2010/main" val="2846108880"/>
       </p:ext>
     </p:extLst>
   </p:cSld>
@@ -13363,7 +12992,7 @@
           <p:cNvPr id="2" name="Titel 1">
             <a:extLst>
               <a:ext uri="{FF2B5EF4-FFF2-40B4-BE49-F238E27FC236}">
-                <a16:creationId xmlns:a16="http://schemas.microsoft.com/office/drawing/2014/main" id="{06E23BCC-EA2F-2E03-E8A6-ACECAA471E84}"/>
+                <a16:creationId xmlns:a16="http://schemas.microsoft.com/office/drawing/2014/main" id="{61FF0D77-63F1-825D-6560-C80B0DE3E9FD}"/>
               </a:ext>
             </a:extLst>
           </p:cNvPr>
@@ -13388,7 +13017,7 @@
           <p:cNvPr id="3" name="Inhaltsplatzhalter 2">
             <a:extLst>
               <a:ext uri="{FF2B5EF4-FFF2-40B4-BE49-F238E27FC236}">
-                <a16:creationId xmlns:a16="http://schemas.microsoft.com/office/drawing/2014/main" id="{B75D134A-03B5-8F8A-AB03-A32CFC6CB2F1}"/>
+                <a16:creationId xmlns:a16="http://schemas.microsoft.com/office/drawing/2014/main" id="{3B55EF91-9EAF-B878-3441-F9D7A7F93FD9}"/>
               </a:ext>
             </a:extLst>
           </p:cNvPr>
@@ -13401,55 +13030,45 @@
         </p:nvSpPr>
         <p:spPr/>
         <p:txBody>
-          <a:bodyPr/>
+          <a:bodyPr>
+            <a:normAutofit lnSpcReduction="10000"/>
+          </a:bodyPr>
           <a:lstStyle/>
           <a:p>
             <a:pPr marL="0" indent="0">
               <a:buNone/>
             </a:pPr>
             <a:r>
+              <a:rPr lang="de-DE" b="1" dirty="0" err="1"/>
+              <a:t>Sequence</a:t>
+            </a:r>
+            <a:r>
               <a:rPr lang="de-DE" b="1" dirty="0"/>
-              <a:t>Classification </a:t>
+              <a:t> </a:t>
             </a:r>
             <a:r>
               <a:rPr lang="de-DE" b="1" dirty="0" err="1"/>
-              <a:t>tasks</a:t>
-            </a:r>
-            <a:r>
-              <a:rPr lang="de-DE" dirty="0"/>
-              <a:t> → [CLS] (</a:t>
-            </a:r>
-            <a:r>
-              <a:rPr lang="de-DE" dirty="0" err="1"/>
-              <a:t>or</a:t>
-            </a:r>
-            <a:r>
-              <a:rPr lang="de-DE" dirty="0"/>
-              <a:t> </a:t>
-            </a:r>
-            <a:r>
-              <a:rPr lang="de-DE" dirty="0" err="1"/>
-              <a:t>sometimes</a:t>
-            </a:r>
-            <a:r>
-              <a:rPr lang="de-DE" dirty="0"/>
-              <a:t> </a:t>
-            </a:r>
-            <a:r>
-              <a:rPr lang="de-DE" dirty="0" err="1"/>
-              <a:t>average</a:t>
-            </a:r>
-            <a:r>
-              <a:rPr lang="de-DE" dirty="0"/>
-              <a:t> </a:t>
-            </a:r>
-            <a:r>
-              <a:rPr lang="de-DE" dirty="0" err="1"/>
-              <a:t>pooling</a:t>
-            </a:r>
-            <a:r>
-              <a:rPr lang="de-DE" dirty="0"/>
-              <a:t>).</a:t>
+              <a:t>classification</a:t>
+            </a:r>
+            <a:r>
+              <a:rPr lang="de-DE" b="1" dirty="0"/>
+              <a:t> (</a:t>
+            </a:r>
+            <a:r>
+              <a:rPr lang="de-DE" b="1" dirty="0" err="1"/>
+              <a:t>sentiment</a:t>
+            </a:r>
+            <a:r>
+              <a:rPr lang="de-DE" b="1" dirty="0"/>
+              <a:t>, </a:t>
+            </a:r>
+            <a:r>
+              <a:rPr lang="de-DE" b="1" dirty="0" err="1"/>
+              <a:t>topic</a:t>
+            </a:r>
+            <a:r>
+              <a:rPr lang="de-DE" b="1" dirty="0"/>
+              <a:t>, NLI, etc.)</a:t>
             </a:r>
           </a:p>
           <a:p>
@@ -13457,36 +13076,68 @@
               <a:buNone/>
             </a:pPr>
             <a:r>
+              <a:rPr lang="de-DE" dirty="0"/>
+              <a:t>A </a:t>
+            </a:r>
+            <a:r>
+              <a:rPr lang="de-DE" dirty="0" err="1"/>
+              <a:t>special</a:t>
+            </a:r>
+            <a:r>
+              <a:rPr lang="de-DE" dirty="0"/>
+              <a:t> </a:t>
+            </a:r>
+            <a:r>
+              <a:rPr lang="de-DE" dirty="0" err="1"/>
+              <a:t>token</a:t>
+            </a:r>
+            <a:r>
+              <a:rPr lang="de-DE" dirty="0"/>
+              <a:t> </a:t>
+            </a:r>
+            <a:r>
               <a:rPr lang="de-DE" b="1" dirty="0"/>
-              <a:t>Token-level </a:t>
-            </a:r>
-            <a:r>
-              <a:rPr lang="de-DE" b="1" dirty="0" err="1"/>
-              <a:t>tasks</a:t>
-            </a:r>
-            <a:r>
-              <a:rPr lang="de-DE" dirty="0"/>
-              <a:t> → </a:t>
-            </a:r>
-            <a:r>
-              <a:rPr lang="de-DE" dirty="0" err="1"/>
-              <a:t>hidden</a:t>
-            </a:r>
-            <a:r>
-              <a:rPr lang="de-DE" dirty="0"/>
-              <a:t> </a:t>
-            </a:r>
-            <a:r>
-              <a:rPr lang="de-DE" dirty="0" err="1"/>
-              <a:t>states</a:t>
-            </a:r>
-            <a:r>
-              <a:rPr lang="de-DE" dirty="0"/>
-              <a:t> </a:t>
-            </a:r>
-            <a:r>
-              <a:rPr lang="de-DE" dirty="0" err="1"/>
-              <a:t>directly</a:t>
+              <a:t>[CLS]</a:t>
+            </a:r>
+            <a:r>
+              <a:rPr lang="de-DE" dirty="0"/>
+              <a:t> </a:t>
+            </a:r>
+            <a:r>
+              <a:rPr lang="de-DE" dirty="0" err="1"/>
+              <a:t>is</a:t>
+            </a:r>
+            <a:r>
+              <a:rPr lang="de-DE" dirty="0"/>
+              <a:t> </a:t>
+            </a:r>
+            <a:r>
+              <a:rPr lang="de-DE" dirty="0" err="1"/>
+              <a:t>prepended</a:t>
+            </a:r>
+            <a:r>
+              <a:rPr lang="de-DE" dirty="0"/>
+              <a:t> </a:t>
+            </a:r>
+            <a:r>
+              <a:rPr lang="de-DE" dirty="0" err="1"/>
+              <a:t>to</a:t>
+            </a:r>
+            <a:r>
+              <a:rPr lang="de-DE" dirty="0"/>
+              <a:t> </a:t>
+            </a:r>
+            <a:r>
+              <a:rPr lang="de-DE" dirty="0" err="1"/>
+              <a:t>the</a:t>
+            </a:r>
+            <a:r>
+              <a:rPr lang="de-DE" dirty="0"/>
+              <a:t> </a:t>
+            </a:r>
+            <a:r>
+              <a:rPr lang="de-DE" dirty="0" err="1"/>
+              <a:t>input</a:t>
             </a:r>
             <a:r>
               <a:rPr lang="de-DE" dirty="0"/>
@@ -13498,20 +13149,255 @@
               <a:buNone/>
             </a:pPr>
             <a:r>
+              <a:rPr lang="de-DE" dirty="0" err="1"/>
+              <a:t>Its</a:t>
+            </a:r>
+            <a:r>
+              <a:rPr lang="de-DE" dirty="0"/>
+              <a:t> final </a:t>
+            </a:r>
+            <a:r>
+              <a:rPr lang="de-DE" dirty="0" err="1"/>
+              <a:t>hidden</a:t>
+            </a:r>
+            <a:r>
+              <a:rPr lang="de-DE" dirty="0"/>
+              <a:t> </a:t>
+            </a:r>
+            <a:r>
+              <a:rPr lang="de-DE" dirty="0" err="1"/>
+              <a:t>state</a:t>
+            </a:r>
+            <a:r>
+              <a:rPr lang="de-DE" dirty="0"/>
+              <a:t> h_[CLS] </a:t>
+            </a:r>
+            <a:r>
+              <a:rPr lang="de-DE" dirty="0" err="1"/>
+              <a:t>is</a:t>
+            </a:r>
+            <a:r>
+              <a:rPr lang="de-DE" dirty="0"/>
+              <a:t> </a:t>
+            </a:r>
+            <a:r>
+              <a:rPr lang="de-DE" dirty="0" err="1"/>
+              <a:t>treated</a:t>
+            </a:r>
+            <a:r>
+              <a:rPr lang="de-DE" dirty="0"/>
+              <a:t> </a:t>
+            </a:r>
+            <a:r>
+              <a:rPr lang="de-DE" dirty="0" err="1"/>
+              <a:t>as</a:t>
+            </a:r>
+            <a:r>
+              <a:rPr lang="de-DE" dirty="0"/>
+              <a:t> a </a:t>
+            </a:r>
+            <a:r>
+              <a:rPr lang="de-DE" dirty="0" err="1"/>
+              <a:t>summary</a:t>
+            </a:r>
+            <a:r>
+              <a:rPr lang="de-DE" dirty="0"/>
+              <a:t> </a:t>
+            </a:r>
+            <a:r>
+              <a:rPr lang="de-DE" dirty="0" err="1"/>
+              <a:t>of</a:t>
+            </a:r>
+            <a:r>
+              <a:rPr lang="de-DE" dirty="0"/>
+              <a:t> </a:t>
+            </a:r>
+            <a:r>
+              <a:rPr lang="de-DE" dirty="0" err="1"/>
+              <a:t>the</a:t>
+            </a:r>
+            <a:r>
+              <a:rPr lang="de-DE" dirty="0"/>
+              <a:t> </a:t>
+            </a:r>
+            <a:r>
+              <a:rPr lang="de-DE" dirty="0" err="1"/>
+              <a:t>whole</a:t>
+            </a:r>
+            <a:r>
+              <a:rPr lang="de-DE" dirty="0"/>
+              <a:t> </a:t>
+            </a:r>
+            <a:r>
+              <a:rPr lang="de-DE" dirty="0" err="1"/>
+              <a:t>sequence</a:t>
+            </a:r>
+            <a:r>
+              <a:rPr lang="de-DE" dirty="0"/>
+              <a:t>.</a:t>
+            </a:r>
+          </a:p>
+          <a:p>
+            <a:pPr marL="0" indent="0">
+              <a:buNone/>
+            </a:pPr>
+            <a:r>
+              <a:rPr lang="de-DE" dirty="0" err="1"/>
+              <a:t>That</a:t>
+            </a:r>
+            <a:r>
+              <a:rPr lang="de-DE" dirty="0"/>
+              <a:t> </a:t>
+            </a:r>
+            <a:r>
+              <a:rPr lang="de-DE" dirty="0" err="1"/>
+              <a:t>vector</a:t>
+            </a:r>
+            <a:r>
+              <a:rPr lang="de-DE" dirty="0"/>
+              <a:t> </a:t>
+            </a:r>
+            <a:r>
+              <a:rPr lang="de-DE" dirty="0" err="1"/>
+              <a:t>is</a:t>
+            </a:r>
+            <a:r>
+              <a:rPr lang="de-DE" dirty="0"/>
+              <a:t> </a:t>
+            </a:r>
+            <a:r>
+              <a:rPr lang="de-DE" dirty="0" err="1"/>
+              <a:t>passed</a:t>
+            </a:r>
+            <a:r>
+              <a:rPr lang="de-DE" dirty="0"/>
+              <a:t> </a:t>
+            </a:r>
+            <a:r>
+              <a:rPr lang="de-DE" dirty="0" err="1"/>
+              <a:t>into</a:t>
+            </a:r>
+            <a:r>
+              <a:rPr lang="de-DE" dirty="0"/>
+              <a:t> a linear </a:t>
+            </a:r>
+            <a:r>
+              <a:rPr lang="de-DE" dirty="0" err="1"/>
+              <a:t>classification</a:t>
+            </a:r>
+            <a:r>
+              <a:rPr lang="de-DE" dirty="0"/>
+              <a:t> </a:t>
+            </a:r>
+            <a:r>
+              <a:rPr lang="de-DE" dirty="0" err="1"/>
+              <a:t>head</a:t>
+            </a:r>
+            <a:r>
+              <a:rPr lang="de-DE" dirty="0"/>
+              <a:t> → </a:t>
+            </a:r>
+            <a:r>
+              <a:rPr lang="de-DE" dirty="0" err="1"/>
+              <a:t>logits</a:t>
+            </a:r>
+            <a:r>
+              <a:rPr lang="de-DE" dirty="0"/>
+              <a:t> </a:t>
+            </a:r>
+            <a:r>
+              <a:rPr lang="de-DE" dirty="0" err="1"/>
+              <a:t>over</a:t>
+            </a:r>
+            <a:r>
+              <a:rPr lang="de-DE" dirty="0"/>
+              <a:t> </a:t>
+            </a:r>
+            <a:r>
+              <a:rPr lang="de-DE" dirty="0" err="1"/>
+              <a:t>classes</a:t>
+            </a:r>
+            <a:r>
+              <a:rPr lang="de-DE" dirty="0"/>
+              <a:t>.</a:t>
+            </a:r>
+          </a:p>
+          <a:p>
+            <a:pPr marL="0" indent="0">
+              <a:buNone/>
+            </a:pPr>
+            <a:r>
+              <a:rPr lang="de-DE" b="1" dirty="0" err="1"/>
+              <a:t>default</a:t>
+            </a:r>
+            <a:r>
               <a:rPr lang="de-DE" b="1" dirty="0"/>
-              <a:t>MLM</a:t>
-            </a:r>
-            <a:r>
-              <a:rPr lang="de-DE" dirty="0"/>
-              <a:t> → </a:t>
-            </a:r>
-            <a:r>
-              <a:rPr lang="de-DE" dirty="0" err="1"/>
-              <a:t>masked</a:t>
-            </a:r>
-            <a:r>
-              <a:rPr lang="de-DE" dirty="0"/>
-              <a:t> </a:t>
+              <a:t> in BERT-style </a:t>
+            </a:r>
+            <a:r>
+              <a:rPr lang="de-DE" b="1" dirty="0" err="1"/>
+              <a:t>models</a:t>
+            </a:r>
+            <a:endParaRPr lang="de-DE" b="1" dirty="0"/>
+          </a:p>
+          <a:p>
+            <a:pPr marL="0" indent="0">
+              <a:buNone/>
+            </a:pPr>
+            <a:br>
+              <a:rPr lang="de-DE" dirty="0"/>
+            </a:br>
+            <a:r>
+              <a:rPr lang="de-DE" dirty="0"/>
+              <a:t>(</a:t>
+            </a:r>
+            <a:r>
+              <a:rPr lang="de-DE" dirty="0" err="1"/>
+              <a:t>Some</a:t>
+            </a:r>
+            <a:r>
+              <a:rPr lang="de-DE" dirty="0"/>
+              <a:t> </a:t>
+            </a:r>
+            <a:r>
+              <a:rPr lang="de-DE" dirty="0" err="1"/>
+              <a:t>variants</a:t>
+            </a:r>
+            <a:r>
+              <a:rPr lang="de-DE" dirty="0"/>
+              <a:t> </a:t>
+            </a:r>
+            <a:r>
+              <a:rPr lang="de-DE" dirty="0" err="1"/>
+              <a:t>use</a:t>
+            </a:r>
+            <a:r>
+              <a:rPr lang="de-DE" dirty="0"/>
+              <a:t> </a:t>
+            </a:r>
+            <a:r>
+              <a:rPr lang="de-DE" b="1" dirty="0" err="1"/>
+              <a:t>average</a:t>
+            </a:r>
+            <a:r>
+              <a:rPr lang="de-DE" b="1" dirty="0"/>
+              <a:t> </a:t>
+            </a:r>
+            <a:r>
+              <a:rPr lang="de-DE" b="1" dirty="0" err="1"/>
+              <a:t>pooling</a:t>
+            </a:r>
+            <a:r>
+              <a:rPr lang="de-DE" dirty="0"/>
+              <a:t> </a:t>
+            </a:r>
+            <a:r>
+              <a:rPr lang="de-DE" dirty="0" err="1"/>
+              <a:t>over</a:t>
+            </a:r>
+            <a:r>
+              <a:rPr lang="de-DE" dirty="0"/>
+              <a:t> all </a:t>
             </a:r>
             <a:r>
               <a:rPr lang="de-DE" dirty="0" err="1"/>
@@ -13523,19 +13409,59 @@
             </a:r>
             <a:r>
               <a:rPr lang="de-DE" dirty="0" err="1"/>
-              <a:t>embeddings</a:t>
-            </a:r>
-            <a:r>
-              <a:rPr lang="de-DE" dirty="0"/>
-              <a:t> </a:t>
-            </a:r>
-            <a:r>
-              <a:rPr lang="de-DE" dirty="0" err="1"/>
-              <a:t>only</a:t>
-            </a:r>
-            <a:r>
-              <a:rPr lang="de-DE" dirty="0"/>
-              <a:t>.</a:t>
+              <a:t>states</a:t>
+            </a:r>
+            <a:r>
+              <a:rPr lang="de-DE" dirty="0"/>
+              <a:t> </a:t>
+            </a:r>
+            <a:r>
+              <a:rPr lang="de-DE" dirty="0" err="1"/>
+              <a:t>instead</a:t>
+            </a:r>
+            <a:r>
+              <a:rPr lang="de-DE" dirty="0"/>
+              <a:t> </a:t>
+            </a:r>
+            <a:r>
+              <a:rPr lang="de-DE" dirty="0" err="1"/>
+              <a:t>of</a:t>
+            </a:r>
+            <a:r>
+              <a:rPr lang="de-DE" dirty="0"/>
+              <a:t> [CLS], but [CLS] </a:t>
+            </a:r>
+            <a:r>
+              <a:rPr lang="de-DE" dirty="0" err="1"/>
+              <a:t>is</a:t>
+            </a:r>
+            <a:r>
+              <a:rPr lang="de-DE" dirty="0"/>
+              <a:t> </a:t>
+            </a:r>
+            <a:r>
+              <a:rPr lang="de-DE" dirty="0" err="1"/>
+              <a:t>the</a:t>
+            </a:r>
+            <a:r>
+              <a:rPr lang="de-DE" dirty="0"/>
+              <a:t> original/</a:t>
+            </a:r>
+            <a:r>
+              <a:rPr lang="de-DE" dirty="0" err="1"/>
+              <a:t>standard</a:t>
+            </a:r>
+            <a:r>
+              <a:rPr lang="de-DE" dirty="0"/>
+              <a:t> </a:t>
+            </a:r>
+            <a:r>
+              <a:rPr lang="de-DE" dirty="0" err="1"/>
+              <a:t>choice</a:t>
+            </a:r>
+            <a:r>
+              <a:rPr lang="de-DE" dirty="0"/>
+              <a:t>.)</a:t>
             </a:r>
           </a:p>
         </p:txBody>
@@ -13545,7 +13471,7 @@
           <p:cNvPr id="4" name="Foliennummernplatzhalter 3">
             <a:extLst>
               <a:ext uri="{FF2B5EF4-FFF2-40B4-BE49-F238E27FC236}">
-                <a16:creationId xmlns:a16="http://schemas.microsoft.com/office/drawing/2014/main" id="{C37B8CF4-165F-DCF3-1604-8B15312E525F}"/>
+                <a16:creationId xmlns:a16="http://schemas.microsoft.com/office/drawing/2014/main" id="{B04A72D0-DDFF-CBDD-9B6B-E819F5AD255C}"/>
               </a:ext>
             </a:extLst>
           </p:cNvPr>
@@ -13572,7 +13498,7 @@
     </p:spTree>
     <p:extLst>
       <p:ext uri="{BB962C8B-B14F-4D97-AF65-F5344CB8AC3E}">
-        <p14:creationId xmlns:p14="http://schemas.microsoft.com/office/powerpoint/2010/main" val="2846108880"/>
+        <p14:creationId xmlns:p14="http://schemas.microsoft.com/office/powerpoint/2010/main" val="1004237482"/>
       </p:ext>
     </p:extLst>
   </p:cSld>
@@ -13604,7 +13530,7 @@
           <p:cNvPr id="2" name="Titel 1">
             <a:extLst>
               <a:ext uri="{FF2B5EF4-FFF2-40B4-BE49-F238E27FC236}">
-                <a16:creationId xmlns:a16="http://schemas.microsoft.com/office/drawing/2014/main" id="{61FF0D77-63F1-825D-6560-C80B0DE3E9FD}"/>
+                <a16:creationId xmlns:a16="http://schemas.microsoft.com/office/drawing/2014/main" id="{AC8D2A51-B38D-9C57-1ABF-8D603A1E5500}"/>
               </a:ext>
             </a:extLst>
           </p:cNvPr>
@@ -13629,7 +13555,7 @@
           <p:cNvPr id="3" name="Inhaltsplatzhalter 2">
             <a:extLst>
               <a:ext uri="{FF2B5EF4-FFF2-40B4-BE49-F238E27FC236}">
-                <a16:creationId xmlns:a16="http://schemas.microsoft.com/office/drawing/2014/main" id="{3B55EF91-9EAF-B878-3441-F9D7A7F93FD9}"/>
+                <a16:creationId xmlns:a16="http://schemas.microsoft.com/office/drawing/2014/main" id="{DFC6E1E0-93F3-C0C8-C345-1BD1F5C25C12}"/>
               </a:ext>
             </a:extLst>
           </p:cNvPr>
@@ -13642,21 +13568,15 @@
         </p:nvSpPr>
         <p:spPr/>
         <p:txBody>
-          <a:bodyPr>
-            <a:normAutofit fontScale="92500" lnSpcReduction="10000"/>
-          </a:bodyPr>
+          <a:bodyPr/>
           <a:lstStyle/>
           <a:p>
             <a:pPr marL="0" indent="0">
               <a:buNone/>
             </a:pPr>
             <a:r>
-              <a:rPr lang="de-DE" b="1" dirty="0" err="1"/>
-              <a:t>Sequence</a:t>
-            </a:r>
-            <a:r>
               <a:rPr lang="de-DE" b="1" dirty="0"/>
-              <a:t> </a:t>
+              <a:t>Token </a:t>
             </a:r>
             <a:r>
               <a:rPr lang="de-DE" b="1" dirty="0" err="1"/>
@@ -13664,23 +13584,15 @@
             </a:r>
             <a:r>
               <a:rPr lang="de-DE" b="1" dirty="0"/>
-              <a:t> (</a:t>
+              <a:t> (NER, POS </a:t>
             </a:r>
             <a:r>
               <a:rPr lang="de-DE" b="1" dirty="0" err="1"/>
-              <a:t>sentiment</a:t>
+              <a:t>tagging</a:t>
             </a:r>
             <a:r>
               <a:rPr lang="de-DE" b="1" dirty="0"/>
-              <a:t>, </a:t>
-            </a:r>
-            <a:r>
-              <a:rPr lang="de-DE" b="1" dirty="0" err="1"/>
-              <a:t>topic</a:t>
-            </a:r>
-            <a:r>
-              <a:rPr lang="de-DE" b="1" dirty="0"/>
-              <a:t>, NLI, etc.)</a:t>
+              <a:t>, etc.)</a:t>
             </a:r>
           </a:p>
           <a:p>
@@ -13688,28 +13600,32 @@
               <a:buNone/>
             </a:pPr>
             <a:r>
-              <a:rPr lang="de-DE" dirty="0"/>
-              <a:t>A </a:t>
-            </a:r>
-            <a:r>
-              <a:rPr lang="de-DE" dirty="0" err="1"/>
-              <a:t>special</a:t>
-            </a:r>
-            <a:r>
-              <a:rPr lang="de-DE" dirty="0"/>
-              <a:t> </a:t>
-            </a:r>
-            <a:r>
-              <a:rPr lang="de-DE" dirty="0" err="1"/>
-              <a:t>token</a:t>
-            </a:r>
-            <a:r>
-              <a:rPr lang="de-DE" dirty="0"/>
-              <a:t> </a:t>
-            </a:r>
-            <a:r>
-              <a:rPr lang="de-DE" b="1" dirty="0"/>
-              <a:t>[CLS]</a:t>
+              <a:rPr lang="de-DE" dirty="0" err="1"/>
+              <a:t>Each</a:t>
+            </a:r>
+            <a:r>
+              <a:rPr lang="de-DE" dirty="0"/>
+              <a:t> </a:t>
+            </a:r>
+            <a:r>
+              <a:rPr lang="de-DE" dirty="0" err="1"/>
+              <a:t>token’s</a:t>
+            </a:r>
+            <a:r>
+              <a:rPr lang="de-DE" dirty="0"/>
+              <a:t> </a:t>
+            </a:r>
+            <a:r>
+              <a:rPr lang="de-DE" dirty="0" err="1"/>
+              <a:t>hidden</a:t>
+            </a:r>
+            <a:r>
+              <a:rPr lang="de-DE" dirty="0"/>
+              <a:t> </a:t>
+            </a:r>
+            <a:r>
+              <a:rPr lang="de-DE" dirty="0" err="1"/>
+              <a:t>state</a:t>
             </a:r>
             <a:r>
               <a:rPr lang="de-DE" dirty="0"/>
@@ -13725,35 +13641,67 @@
             </a:r>
             <a:r>
               <a:rPr lang="de-DE" dirty="0" err="1"/>
-              <a:t>prepended</a:t>
-            </a:r>
-            <a:r>
-              <a:rPr lang="de-DE" dirty="0"/>
-              <a:t> </a:t>
-            </a:r>
-            <a:r>
-              <a:rPr lang="de-DE" dirty="0" err="1"/>
-              <a:t>to</a:t>
-            </a:r>
-            <a:r>
-              <a:rPr lang="de-DE" dirty="0"/>
-              <a:t> </a:t>
-            </a:r>
-            <a:r>
-              <a:rPr lang="de-DE" dirty="0" err="1"/>
-              <a:t>the</a:t>
-            </a:r>
-            <a:r>
-              <a:rPr lang="de-DE" dirty="0"/>
-              <a:t> </a:t>
-            </a:r>
-            <a:r>
-              <a:rPr lang="de-DE" dirty="0" err="1"/>
-              <a:t>input</a:t>
-            </a:r>
-            <a:r>
-              <a:rPr lang="de-DE" dirty="0"/>
-              <a:t>.</a:t>
+              <a:t>projected</a:t>
+            </a:r>
+            <a:r>
+              <a:rPr lang="de-DE" dirty="0"/>
+              <a:t> </a:t>
+            </a:r>
+            <a:r>
+              <a:rPr lang="de-DE" b="1" dirty="0" err="1"/>
+              <a:t>independently</a:t>
+            </a:r>
+            <a:r>
+              <a:rPr lang="de-DE" dirty="0"/>
+              <a:t> </a:t>
+            </a:r>
+            <a:r>
+              <a:rPr lang="de-DE" dirty="0" err="1"/>
+              <a:t>into</a:t>
+            </a:r>
+            <a:r>
+              <a:rPr lang="de-DE" dirty="0"/>
+              <a:t> </a:t>
+            </a:r>
+            <a:r>
+              <a:rPr lang="de-DE" dirty="0" err="1"/>
+              <a:t>logits</a:t>
+            </a:r>
+            <a:r>
+              <a:rPr lang="de-DE" dirty="0"/>
+              <a:t> (</a:t>
+            </a:r>
+            <a:r>
+              <a:rPr lang="de-DE" dirty="0" err="1"/>
+              <a:t>usually</a:t>
+            </a:r>
+            <a:r>
+              <a:rPr lang="de-DE" dirty="0"/>
+              <a:t> </a:t>
+            </a:r>
+            <a:r>
+              <a:rPr lang="de-DE" dirty="0" err="1"/>
+              <a:t>over</a:t>
+            </a:r>
+            <a:r>
+              <a:rPr lang="de-DE" dirty="0"/>
+              <a:t> </a:t>
+            </a:r>
+            <a:r>
+              <a:rPr lang="de-DE" dirty="0" err="1"/>
+              <a:t>entity</a:t>
+            </a:r>
+            <a:r>
+              <a:rPr lang="de-DE" dirty="0"/>
+              <a:t> </a:t>
+            </a:r>
+            <a:r>
+              <a:rPr lang="de-DE" dirty="0" err="1"/>
+              <a:t>labels</a:t>
+            </a:r>
+            <a:r>
+              <a:rPr lang="de-DE" dirty="0"/>
+              <a:t>).</a:t>
             </a:r>
           </a:p>
           <a:p>
@@ -13762,95 +13710,47 @@
             </a:pPr>
             <a:r>
               <a:rPr lang="de-DE" dirty="0" err="1"/>
-              <a:t>Its</a:t>
-            </a:r>
-            <a:r>
-              <a:rPr lang="de-DE" dirty="0"/>
-              <a:t> final </a:t>
-            </a:r>
-            <a:r>
-              <a:rPr lang="de-DE" dirty="0" err="1"/>
-              <a:t>hidden</a:t>
-            </a:r>
-            <a:r>
-              <a:rPr lang="de-DE" dirty="0"/>
-              <a:t> </a:t>
-            </a:r>
-            <a:r>
-              <a:rPr lang="de-DE" dirty="0" err="1"/>
-              <a:t>state</a:t>
-            </a:r>
-            <a:r>
-              <a:rPr lang="de-DE" dirty="0"/>
-              <a:t> h_{\</a:t>
-            </a:r>
-            <a:r>
-              <a:rPr lang="de-DE" dirty="0" err="1"/>
-              <a:t>text</a:t>
-            </a:r>
-            <a:r>
-              <a:rPr lang="de-DE" dirty="0"/>
-              <a:t>{[CLS]}} </a:t>
-            </a:r>
-            <a:r>
-              <a:rPr lang="de-DE" dirty="0" err="1"/>
-              <a:t>is</a:t>
-            </a:r>
-            <a:r>
-              <a:rPr lang="de-DE" dirty="0"/>
-              <a:t> </a:t>
-            </a:r>
-            <a:r>
-              <a:rPr lang="de-DE" dirty="0" err="1"/>
-              <a:t>treated</a:t>
-            </a:r>
-            <a:r>
-              <a:rPr lang="de-DE" dirty="0"/>
-              <a:t> </a:t>
-            </a:r>
-            <a:r>
-              <a:rPr lang="de-DE" dirty="0" err="1"/>
-              <a:t>as</a:t>
-            </a:r>
-            <a:r>
-              <a:rPr lang="de-DE" dirty="0"/>
-              <a:t> a </a:t>
-            </a:r>
-            <a:r>
-              <a:rPr lang="de-DE" dirty="0" err="1"/>
-              <a:t>summary</a:t>
-            </a:r>
-            <a:r>
-              <a:rPr lang="de-DE" dirty="0"/>
-              <a:t> </a:t>
-            </a:r>
-            <a:r>
-              <a:rPr lang="de-DE" dirty="0" err="1"/>
-              <a:t>of</a:t>
-            </a:r>
-            <a:r>
-              <a:rPr lang="de-DE" dirty="0"/>
-              <a:t> </a:t>
-            </a:r>
-            <a:r>
-              <a:rPr lang="de-DE" dirty="0" err="1"/>
-              <a:t>the</a:t>
-            </a:r>
-            <a:r>
-              <a:rPr lang="de-DE" dirty="0"/>
-              <a:t> </a:t>
-            </a:r>
-            <a:r>
-              <a:rPr lang="de-DE" dirty="0" err="1"/>
-              <a:t>whole</a:t>
-            </a:r>
-            <a:r>
-              <a:rPr lang="de-DE" dirty="0"/>
-              <a:t> </a:t>
-            </a:r>
-            <a:r>
-              <a:rPr lang="de-DE" dirty="0" err="1"/>
-              <a:t>sequence</a:t>
+              <a:t>No</a:t>
+            </a:r>
+            <a:r>
+              <a:rPr lang="de-DE" dirty="0"/>
+              <a:t> </a:t>
+            </a:r>
+            <a:r>
+              <a:rPr lang="de-DE" dirty="0" err="1"/>
+              <a:t>pooling</a:t>
+            </a:r>
+            <a:r>
+              <a:rPr lang="de-DE" dirty="0"/>
+              <a:t>, </a:t>
+            </a:r>
+            <a:r>
+              <a:rPr lang="de-DE" dirty="0" err="1"/>
+              <a:t>because</a:t>
+            </a:r>
+            <a:r>
+              <a:rPr lang="de-DE" dirty="0"/>
+              <a:t> </a:t>
+            </a:r>
+            <a:r>
+              <a:rPr lang="de-DE" dirty="0" err="1"/>
+              <a:t>you</a:t>
+            </a:r>
+            <a:r>
+              <a:rPr lang="de-DE" dirty="0"/>
+              <a:t> </a:t>
+            </a:r>
+            <a:r>
+              <a:rPr lang="de-DE" dirty="0" err="1"/>
+              <a:t>need</a:t>
+            </a:r>
+            <a:r>
+              <a:rPr lang="de-DE" dirty="0"/>
+              <a:t> per-token </a:t>
+            </a:r>
+            <a:r>
+              <a:rPr lang="de-DE" dirty="0" err="1"/>
+              <a:t>predictions</a:t>
             </a:r>
             <a:r>
               <a:rPr lang="de-DE" dirty="0"/>
@@ -13863,230 +13763,20 @@
             </a:pPr>
             <a:r>
               <a:rPr lang="de-DE" dirty="0" err="1"/>
-              <a:t>That</a:t>
-            </a:r>
-            <a:r>
-              <a:rPr lang="de-DE" dirty="0"/>
-              <a:t> </a:t>
-            </a:r>
-            <a:r>
-              <a:rPr lang="de-DE" dirty="0" err="1"/>
-              <a:t>vector</a:t>
-            </a:r>
-            <a:r>
-              <a:rPr lang="de-DE" dirty="0"/>
-              <a:t> </a:t>
-            </a:r>
-            <a:r>
-              <a:rPr lang="de-DE" dirty="0" err="1"/>
-              <a:t>is</a:t>
-            </a:r>
-            <a:r>
-              <a:rPr lang="de-DE" dirty="0"/>
-              <a:t> </a:t>
-            </a:r>
-            <a:r>
-              <a:rPr lang="de-DE" dirty="0" err="1"/>
-              <a:t>passed</a:t>
-            </a:r>
-            <a:r>
-              <a:rPr lang="de-DE" dirty="0"/>
-              <a:t> </a:t>
-            </a:r>
-            <a:r>
-              <a:rPr lang="de-DE" dirty="0" err="1"/>
-              <a:t>into</a:t>
-            </a:r>
-            <a:r>
-              <a:rPr lang="de-DE" dirty="0"/>
-              <a:t> a linear </a:t>
-            </a:r>
-            <a:r>
-              <a:rPr lang="de-DE" dirty="0" err="1"/>
-              <a:t>classification</a:t>
-            </a:r>
-            <a:r>
-              <a:rPr lang="de-DE" dirty="0"/>
-              <a:t> </a:t>
-            </a:r>
-            <a:r>
-              <a:rPr lang="de-DE" dirty="0" err="1"/>
-              <a:t>head</a:t>
-            </a:r>
-            <a:r>
-              <a:rPr lang="de-DE" dirty="0"/>
-              <a:t> → </a:t>
-            </a:r>
-            <a:r>
-              <a:rPr lang="de-DE" dirty="0" err="1"/>
-              <a:t>logits</a:t>
-            </a:r>
-            <a:r>
-              <a:rPr lang="de-DE" dirty="0"/>
-              <a:t> </a:t>
-            </a:r>
-            <a:r>
-              <a:rPr lang="de-DE" dirty="0" err="1"/>
-              <a:t>over</a:t>
-            </a:r>
-            <a:r>
-              <a:rPr lang="de-DE" dirty="0"/>
-              <a:t> </a:t>
-            </a:r>
-            <a:r>
-              <a:rPr lang="de-DE" dirty="0" err="1"/>
-              <a:t>classes</a:t>
-            </a:r>
-            <a:r>
-              <a:rPr lang="de-DE" dirty="0"/>
-              <a:t>.</a:t>
-            </a:r>
-          </a:p>
-          <a:p>
-            <a:pPr marL="0" indent="0">
-              <a:buNone/>
-            </a:pPr>
-            <a:r>
-              <a:rPr lang="de-DE" b="1" dirty="0" err="1"/>
-              <a:t>default</a:t>
-            </a:r>
-            <a:r>
-              <a:rPr lang="de-DE" b="1" dirty="0"/>
-              <a:t> in BERT-style </a:t>
-            </a:r>
-            <a:r>
-              <a:rPr lang="de-DE" b="1" dirty="0" err="1"/>
-              <a:t>models</a:t>
-            </a:r>
-            <a:endParaRPr lang="de-DE" b="1" dirty="0"/>
-          </a:p>
-          <a:p>
-            <a:pPr marL="0" indent="0">
-              <a:buNone/>
-            </a:pPr>
-            <a:br>
-              <a:rPr lang="de-DE" dirty="0"/>
-            </a:br>
-            <a:r>
-              <a:rPr lang="de-DE" dirty="0"/>
-              <a:t>(</a:t>
-            </a:r>
-            <a:r>
-              <a:rPr lang="de-DE" dirty="0" err="1"/>
-              <a:t>Some</a:t>
-            </a:r>
-            <a:r>
-              <a:rPr lang="de-DE" dirty="0"/>
-              <a:t> </a:t>
-            </a:r>
-            <a:r>
-              <a:rPr lang="de-DE" dirty="0" err="1"/>
-              <a:t>variants</a:t>
-            </a:r>
-            <a:r>
-              <a:rPr lang="de-DE" dirty="0"/>
-              <a:t> </a:t>
-            </a:r>
-            <a:r>
-              <a:rPr lang="de-DE" dirty="0" err="1"/>
-              <a:t>use</a:t>
-            </a:r>
-            <a:r>
-              <a:rPr lang="de-DE" dirty="0"/>
-              <a:t> </a:t>
-            </a:r>
-            <a:r>
-              <a:rPr lang="de-DE" b="1" dirty="0" err="1"/>
-              <a:t>average</a:t>
-            </a:r>
-            <a:r>
-              <a:rPr lang="de-DE" b="1" dirty="0"/>
-              <a:t> </a:t>
-            </a:r>
-            <a:r>
-              <a:rPr lang="de-DE" b="1" dirty="0" err="1"/>
-              <a:t>pooling</a:t>
-            </a:r>
-            <a:r>
-              <a:rPr lang="de-DE" dirty="0"/>
-              <a:t> </a:t>
-            </a:r>
-            <a:r>
-              <a:rPr lang="de-DE" dirty="0" err="1"/>
-              <a:t>over</a:t>
-            </a:r>
-            <a:r>
-              <a:rPr lang="de-DE" dirty="0"/>
-              <a:t> all </a:t>
-            </a:r>
-            <a:r>
-              <a:rPr lang="de-DE" dirty="0" err="1"/>
-              <a:t>token</a:t>
-            </a:r>
-            <a:r>
-              <a:rPr lang="de-DE" dirty="0"/>
-              <a:t> </a:t>
-            </a:r>
-            <a:r>
-              <a:rPr lang="de-DE" dirty="0" err="1"/>
-              <a:t>states</a:t>
-            </a:r>
-            <a:r>
-              <a:rPr lang="de-DE" dirty="0"/>
-              <a:t> </a:t>
-            </a:r>
-            <a:r>
-              <a:rPr lang="de-DE" dirty="0" err="1"/>
-              <a:t>instead</a:t>
-            </a:r>
-            <a:r>
-              <a:rPr lang="de-DE" dirty="0"/>
-              <a:t> </a:t>
-            </a:r>
-            <a:r>
-              <a:rPr lang="de-DE" dirty="0" err="1"/>
-              <a:t>of</a:t>
-            </a:r>
-            <a:r>
-              <a:rPr lang="de-DE" dirty="0"/>
-              <a:t> [CLS], but [CLS] </a:t>
-            </a:r>
-            <a:r>
-              <a:rPr lang="de-DE" dirty="0" err="1"/>
-              <a:t>is</a:t>
-            </a:r>
-            <a:r>
-              <a:rPr lang="de-DE" dirty="0"/>
-              <a:t> </a:t>
-            </a:r>
-            <a:r>
-              <a:rPr lang="de-DE" dirty="0" err="1"/>
-              <a:t>the</a:t>
-            </a:r>
-            <a:r>
-              <a:rPr lang="de-DE" dirty="0"/>
-              <a:t> original/</a:t>
-            </a:r>
-            <a:r>
-              <a:rPr lang="de-DE" dirty="0" err="1"/>
-              <a:t>standard</a:t>
-            </a:r>
-            <a:r>
-              <a:rPr lang="de-DE" dirty="0"/>
-              <a:t> </a:t>
-            </a:r>
-            <a:r>
-              <a:rPr lang="de-DE" dirty="0" err="1"/>
-              <a:t>choice</a:t>
-            </a:r>
-            <a:r>
-              <a:rPr lang="de-DE" dirty="0"/>
-              <a:t>.)</a:t>
-            </a:r>
-            <a:br>
-              <a:rPr lang="de-DE" dirty="0"/>
-            </a:br>
-            <a:endParaRPr lang="de-DE" dirty="0"/>
+              <a:t>logits_i</a:t>
+            </a:r>
+            <a:r>
+              <a:rPr lang="de-DE" dirty="0"/>
+              <a:t> = </a:t>
+            </a:r>
+            <a:r>
+              <a:rPr lang="de-DE" dirty="0" err="1"/>
+              <a:t>h_i</a:t>
+            </a:r>
+            <a:r>
+              <a:rPr lang="de-DE" dirty="0"/>
+              <a:t> W + b</a:t>
+            </a:r>
           </a:p>
         </p:txBody>
       </p:sp>
@@ -14095,7 +13785,7 @@
           <p:cNvPr id="4" name="Foliennummernplatzhalter 3">
             <a:extLst>
               <a:ext uri="{FF2B5EF4-FFF2-40B4-BE49-F238E27FC236}">
-                <a16:creationId xmlns:a16="http://schemas.microsoft.com/office/drawing/2014/main" id="{B04A72D0-DDFF-CBDD-9B6B-E819F5AD255C}"/>
+                <a16:creationId xmlns:a16="http://schemas.microsoft.com/office/drawing/2014/main" id="{1F870D76-8BA8-B35C-291C-27A5AEB557B8}"/>
               </a:ext>
             </a:extLst>
           </p:cNvPr>
@@ -14122,7 +13812,7 @@
     </p:spTree>
     <p:extLst>
       <p:ext uri="{BB962C8B-B14F-4D97-AF65-F5344CB8AC3E}">
-        <p14:creationId xmlns:p14="http://schemas.microsoft.com/office/powerpoint/2010/main" val="1004237482"/>
+        <p14:creationId xmlns:p14="http://schemas.microsoft.com/office/powerpoint/2010/main" val="1781625330"/>
       </p:ext>
     </p:extLst>
   </p:cSld>
@@ -14154,7 +13844,7 @@
           <p:cNvPr id="2" name="Titel 1">
             <a:extLst>
               <a:ext uri="{FF2B5EF4-FFF2-40B4-BE49-F238E27FC236}">
-                <a16:creationId xmlns:a16="http://schemas.microsoft.com/office/drawing/2014/main" id="{AC8D2A51-B38D-9C57-1ABF-8D603A1E5500}"/>
+                <a16:creationId xmlns:a16="http://schemas.microsoft.com/office/drawing/2014/main" id="{B17F9850-863B-4A7C-99A5-A8ED55900FF3}"/>
               </a:ext>
             </a:extLst>
           </p:cNvPr>
@@ -14179,7 +13869,7 @@
           <p:cNvPr id="3" name="Inhaltsplatzhalter 2">
             <a:extLst>
               <a:ext uri="{FF2B5EF4-FFF2-40B4-BE49-F238E27FC236}">
-                <a16:creationId xmlns:a16="http://schemas.microsoft.com/office/drawing/2014/main" id="{DFC6E1E0-93F3-C0C8-C345-1BD1F5C25C12}"/>
+                <a16:creationId xmlns:a16="http://schemas.microsoft.com/office/drawing/2014/main" id="{827E124F-2FF1-163C-3201-2FF90B52D75F}"/>
               </a:ext>
             </a:extLst>
           </p:cNvPr>
@@ -14199,25 +13889,26 @@
               <a:buNone/>
             </a:pPr>
             <a:r>
+              <a:rPr lang="de-DE" b="1" dirty="0" err="1"/>
+              <a:t>Sentence</a:t>
+            </a:r>
+            <a:r>
               <a:rPr lang="de-DE" b="1" dirty="0"/>
-              <a:t>Token </a:t>
+              <a:t> </a:t>
             </a:r>
             <a:r>
               <a:rPr lang="de-DE" b="1" dirty="0" err="1"/>
-              <a:t>classification</a:t>
+              <a:t>similarity</a:t>
             </a:r>
             <a:r>
               <a:rPr lang="de-DE" b="1" dirty="0"/>
-              <a:t> (NER, POS </a:t>
+              <a:t> / </a:t>
             </a:r>
             <a:r>
               <a:rPr lang="de-DE" b="1" dirty="0" err="1"/>
-              <a:t>tagging</a:t>
-            </a:r>
-            <a:r>
-              <a:rPr lang="de-DE" b="1" dirty="0"/>
-              <a:t>, etc.)</a:t>
-            </a:r>
+              <a:t>retrieval</a:t>
+            </a:r>
+            <a:endParaRPr lang="de-DE" b="1" dirty="0"/>
           </a:p>
           <a:p>
             <a:pPr marL="0" indent="0">
@@ -14225,19 +13916,43 @@
             </a:pPr>
             <a:r>
               <a:rPr lang="de-DE" dirty="0" err="1"/>
-              <a:t>Each</a:t>
-            </a:r>
-            <a:r>
-              <a:rPr lang="de-DE" dirty="0"/>
-              <a:t> </a:t>
-            </a:r>
-            <a:r>
-              <a:rPr lang="de-DE" dirty="0" err="1"/>
-              <a:t>token’s</a:t>
-            </a:r>
-            <a:r>
-              <a:rPr lang="de-DE" dirty="0"/>
-              <a:t> </a:t>
+              <a:t>Sometimes</a:t>
+            </a:r>
+            <a:r>
+              <a:rPr lang="de-DE" dirty="0"/>
+              <a:t> </a:t>
+            </a:r>
+            <a:r>
+              <a:rPr lang="de-DE" dirty="0" err="1"/>
+              <a:t>average</a:t>
+            </a:r>
+            <a:r>
+              <a:rPr lang="de-DE" dirty="0"/>
+              <a:t> </a:t>
+            </a:r>
+            <a:r>
+              <a:rPr lang="de-DE" dirty="0" err="1"/>
+              <a:t>pooling</a:t>
+            </a:r>
+            <a:r>
+              <a:rPr lang="de-DE" dirty="0"/>
+              <a:t> (</a:t>
+            </a:r>
+            <a:r>
+              <a:rPr lang="de-DE" dirty="0" err="1"/>
+              <a:t>mean</a:t>
+            </a:r>
+            <a:r>
+              <a:rPr lang="de-DE" dirty="0"/>
+              <a:t> </a:t>
+            </a:r>
+            <a:r>
+              <a:rPr lang="de-DE" dirty="0" err="1"/>
+              <a:t>of</a:t>
+            </a:r>
+            <a:r>
+              <a:rPr lang="de-DE" dirty="0"/>
+              <a:t> all </a:t>
             </a:r>
             <a:r>
               <a:rPr lang="de-DE" dirty="0" err="1"/>
@@ -14249,11 +13964,11 @@
             </a:r>
             <a:r>
               <a:rPr lang="de-DE" dirty="0" err="1"/>
-              <a:t>state</a:t>
-            </a:r>
-            <a:r>
-              <a:rPr lang="de-DE" dirty="0"/>
-              <a:t> </a:t>
+              <a:t>states</a:t>
+            </a:r>
+            <a:r>
+              <a:rPr lang="de-DE" dirty="0"/>
+              <a:t>) </a:t>
             </a:r>
             <a:r>
               <a:rPr lang="de-DE" dirty="0" err="1"/>
@@ -14265,67 +13980,75 @@
             </a:r>
             <a:r>
               <a:rPr lang="de-DE" dirty="0" err="1"/>
-              <a:t>projected</a:t>
-            </a:r>
-            <a:r>
-              <a:rPr lang="de-DE" dirty="0"/>
-              <a:t> </a:t>
-            </a:r>
-            <a:r>
-              <a:rPr lang="de-DE" b="1" dirty="0" err="1"/>
-              <a:t>independently</a:t>
-            </a:r>
-            <a:r>
-              <a:rPr lang="de-DE" dirty="0"/>
-              <a:t> </a:t>
-            </a:r>
-            <a:r>
-              <a:rPr lang="de-DE" dirty="0" err="1"/>
-              <a:t>into</a:t>
-            </a:r>
-            <a:r>
-              <a:rPr lang="de-DE" dirty="0"/>
-              <a:t> </a:t>
-            </a:r>
-            <a:r>
-              <a:rPr lang="de-DE" dirty="0" err="1"/>
-              <a:t>logits</a:t>
-            </a:r>
-            <a:r>
-              <a:rPr lang="de-DE" dirty="0"/>
-              <a:t> (</a:t>
-            </a:r>
-            <a:r>
-              <a:rPr lang="de-DE" dirty="0" err="1"/>
-              <a:t>usually</a:t>
-            </a:r>
-            <a:r>
-              <a:rPr lang="de-DE" dirty="0"/>
-              <a:t> </a:t>
-            </a:r>
-            <a:r>
-              <a:rPr lang="de-DE" dirty="0" err="1"/>
-              <a:t>over</a:t>
-            </a:r>
-            <a:r>
-              <a:rPr lang="de-DE" dirty="0"/>
-              <a:t> </a:t>
-            </a:r>
-            <a:r>
-              <a:rPr lang="de-DE" dirty="0" err="1"/>
-              <a:t>entity</a:t>
-            </a:r>
-            <a:r>
-              <a:rPr lang="de-DE" dirty="0"/>
-              <a:t> </a:t>
-            </a:r>
-            <a:r>
-              <a:rPr lang="de-DE" dirty="0" err="1"/>
-              <a:t>labels</a:t>
-            </a:r>
-            <a:r>
-              <a:rPr lang="de-DE" dirty="0"/>
-              <a:t>).</a:t>
+              <a:t>used</a:t>
+            </a:r>
+            <a:r>
+              <a:rPr lang="de-DE" dirty="0"/>
+              <a:t> </a:t>
+            </a:r>
+            <a:r>
+              <a:rPr lang="de-DE" dirty="0" err="1"/>
+              <a:t>instead</a:t>
+            </a:r>
+            <a:r>
+              <a:rPr lang="de-DE" dirty="0"/>
+              <a:t> </a:t>
+            </a:r>
+            <a:r>
+              <a:rPr lang="de-DE" dirty="0" err="1"/>
+              <a:t>of</a:t>
+            </a:r>
+            <a:r>
+              <a:rPr lang="de-DE" dirty="0"/>
+              <a:t> [CLS], </a:t>
+            </a:r>
+            <a:r>
+              <a:rPr lang="de-DE" dirty="0" err="1"/>
+              <a:t>because</a:t>
+            </a:r>
+            <a:r>
+              <a:rPr lang="de-DE" dirty="0"/>
+              <a:t> </a:t>
+            </a:r>
+            <a:r>
+              <a:rPr lang="de-DE" dirty="0" err="1"/>
+              <a:t>it</a:t>
+            </a:r>
+            <a:r>
+              <a:rPr lang="de-DE" dirty="0"/>
+              <a:t> </a:t>
+            </a:r>
+            <a:r>
+              <a:rPr lang="de-DE" dirty="0" err="1"/>
+              <a:t>gives</a:t>
+            </a:r>
+            <a:r>
+              <a:rPr lang="de-DE" dirty="0"/>
+              <a:t> a smoother </a:t>
+            </a:r>
+            <a:r>
+              <a:rPr lang="de-DE" dirty="0" err="1"/>
+              <a:t>representation</a:t>
+            </a:r>
+            <a:r>
+              <a:rPr lang="de-DE" dirty="0"/>
+              <a:t> </a:t>
+            </a:r>
+            <a:r>
+              <a:rPr lang="de-DE" dirty="0" err="1"/>
+              <a:t>for</a:t>
+            </a:r>
+            <a:r>
+              <a:rPr lang="de-DE" dirty="0"/>
+              <a:t> </a:t>
+            </a:r>
+            <a:r>
+              <a:rPr lang="de-DE" dirty="0" err="1"/>
+              <a:t>embeddings</a:t>
+            </a:r>
+            <a:r>
+              <a:rPr lang="de-DE" dirty="0"/>
+              <a:t>.</a:t>
             </a:r>
           </a:p>
           <a:p>
@@ -14334,74 +14057,41 @@
             </a:pPr>
             <a:r>
               <a:rPr lang="de-DE" dirty="0" err="1"/>
-              <a:t>No</a:t>
-            </a:r>
-            <a:r>
-              <a:rPr lang="de-DE" dirty="0"/>
-              <a:t> </a:t>
-            </a:r>
-            <a:r>
-              <a:rPr lang="de-DE" dirty="0" err="1"/>
-              <a:t>pooling</a:t>
-            </a:r>
-            <a:r>
-              <a:rPr lang="de-DE" dirty="0"/>
-              <a:t>, </a:t>
-            </a:r>
-            <a:r>
-              <a:rPr lang="de-DE" dirty="0" err="1"/>
-              <a:t>because</a:t>
-            </a:r>
-            <a:r>
-              <a:rPr lang="de-DE" dirty="0"/>
-              <a:t> </a:t>
-            </a:r>
-            <a:r>
-              <a:rPr lang="de-DE" dirty="0" err="1"/>
-              <a:t>you</a:t>
-            </a:r>
-            <a:r>
-              <a:rPr lang="de-DE" dirty="0"/>
-              <a:t> </a:t>
-            </a:r>
-            <a:r>
-              <a:rPr lang="de-DE" dirty="0" err="1"/>
-              <a:t>need</a:t>
-            </a:r>
-            <a:r>
-              <a:rPr lang="de-DE" dirty="0"/>
-              <a:t> per-token </a:t>
-            </a:r>
-            <a:r>
-              <a:rPr lang="de-DE" dirty="0" err="1"/>
-              <a:t>predictions</a:t>
+              <a:t>That’s</a:t>
+            </a:r>
+            <a:r>
+              <a:rPr lang="de-DE" dirty="0"/>
+              <a:t> </a:t>
+            </a:r>
+            <a:r>
+              <a:rPr lang="de-DE" dirty="0" err="1"/>
+              <a:t>what</a:t>
+            </a:r>
+            <a:r>
+              <a:rPr lang="de-DE" dirty="0"/>
+              <a:t> </a:t>
+            </a:r>
+            <a:r>
+              <a:rPr lang="de-DE" b="1" dirty="0" err="1"/>
+              <a:t>Sentence</a:t>
+            </a:r>
+            <a:r>
+              <a:rPr lang="de-DE" b="1" dirty="0"/>
+              <a:t>-BERT (SBERT)</a:t>
+            </a:r>
+            <a:r>
+              <a:rPr lang="de-DE" dirty="0"/>
+              <a:t> </a:t>
+            </a:r>
+            <a:r>
+              <a:rPr lang="de-DE" dirty="0" err="1"/>
+              <a:t>does</a:t>
             </a:r>
             <a:r>
               <a:rPr lang="de-DE" dirty="0"/>
               <a:t>.</a:t>
             </a:r>
           </a:p>
-          <a:p>
-            <a:pPr marL="0" indent="0">
-              <a:buNone/>
-            </a:pPr>
-            <a:r>
-              <a:rPr lang="de-DE" dirty="0" err="1"/>
-              <a:t>logits_i</a:t>
-            </a:r>
-            <a:r>
-              <a:rPr lang="de-DE" dirty="0"/>
-              <a:t> = </a:t>
-            </a:r>
-            <a:r>
-              <a:rPr lang="de-DE" dirty="0" err="1"/>
-              <a:t>h_i</a:t>
-            </a:r>
-            <a:r>
-              <a:rPr lang="de-DE" dirty="0"/>
-              <a:t> W + b</a:t>
-            </a:r>
-          </a:p>
         </p:txBody>
       </p:sp>
       <p:sp>
@@ -14409,7 +14099,7 @@
           <p:cNvPr id="4" name="Foliennummernplatzhalter 3">
             <a:extLst>
               <a:ext uri="{FF2B5EF4-FFF2-40B4-BE49-F238E27FC236}">
-                <a16:creationId xmlns:a16="http://schemas.microsoft.com/office/drawing/2014/main" id="{1F870D76-8BA8-B35C-291C-27A5AEB557B8}"/>
+                <a16:creationId xmlns:a16="http://schemas.microsoft.com/office/drawing/2014/main" id="{F3FA2F52-7FFF-92B0-F7A7-623ED745F3E6}"/>
               </a:ext>
             </a:extLst>
           </p:cNvPr>
@@ -14436,7 +14126,7 @@
     </p:spTree>
     <p:extLst>
       <p:ext uri="{BB962C8B-B14F-4D97-AF65-F5344CB8AC3E}">
-        <p14:creationId xmlns:p14="http://schemas.microsoft.com/office/powerpoint/2010/main" val="1781625330"/>
+        <p14:creationId xmlns:p14="http://schemas.microsoft.com/office/powerpoint/2010/main" val="2476222795"/>
       </p:ext>
     </p:extLst>
   </p:cSld>
@@ -14468,7 +14158,7 @@
           <p:cNvPr id="2" name="Titel 1">
             <a:extLst>
               <a:ext uri="{FF2B5EF4-FFF2-40B4-BE49-F238E27FC236}">
-                <a16:creationId xmlns:a16="http://schemas.microsoft.com/office/drawing/2014/main" id="{B17F9850-863B-4A7C-99A5-A8ED55900FF3}"/>
+                <a16:creationId xmlns:a16="http://schemas.microsoft.com/office/drawing/2014/main" id="{2893F29B-BD86-3EF8-10C3-E57EA752C0F3}"/>
               </a:ext>
             </a:extLst>
           </p:cNvPr>
@@ -14493,7 +14183,7 @@
           <p:cNvPr id="3" name="Inhaltsplatzhalter 2">
             <a:extLst>
               <a:ext uri="{FF2B5EF4-FFF2-40B4-BE49-F238E27FC236}">
-                <a16:creationId xmlns:a16="http://schemas.microsoft.com/office/drawing/2014/main" id="{827E124F-2FF1-163C-3201-2FF90B52D75F}"/>
+                <a16:creationId xmlns:a16="http://schemas.microsoft.com/office/drawing/2014/main" id="{EF684A05-346A-6203-E269-C1F6CFBE41A3}"/>
               </a:ext>
             </a:extLst>
           </p:cNvPr>
@@ -14506,216 +14196,728 @@
         </p:nvSpPr>
         <p:spPr/>
         <p:txBody>
-          <a:bodyPr/>
+          <a:bodyPr>
+            <a:normAutofit fontScale="55000" lnSpcReduction="20000"/>
+          </a:bodyPr>
           <a:lstStyle/>
           <a:p>
             <a:pPr marL="0" indent="0">
               <a:buNone/>
             </a:pPr>
             <a:r>
-              <a:rPr lang="de-DE" b="1" dirty="0" err="1"/>
-              <a:t>Sentence</a:t>
-            </a:r>
-            <a:r>
-              <a:rPr lang="de-DE" b="1" dirty="0"/>
-              <a:t> </a:t>
-            </a:r>
-            <a:r>
-              <a:rPr lang="de-DE" b="1" dirty="0" err="1"/>
-              <a:t>similarity</a:t>
-            </a:r>
-            <a:r>
-              <a:rPr lang="de-DE" b="1" dirty="0"/>
-              <a:t> / </a:t>
-            </a:r>
-            <a:r>
-              <a:rPr lang="de-DE" b="1" dirty="0" err="1"/>
-              <a:t>retrieval</a:t>
-            </a:r>
-            <a:endParaRPr lang="de-DE" b="1" dirty="0"/>
+              <a:rPr lang="en-GB" dirty="0"/>
+              <a:t>but uses a combination (average pooling or [CLS] token) of the hidden states of every token for projection to vector of logits</a:t>
+            </a:r>
           </a:p>
           <a:p>
             <a:pPr marL="0" indent="0">
               <a:buNone/>
             </a:pPr>
-            <a:r>
-              <a:rPr lang="de-DE" dirty="0" err="1"/>
-              <a:t>Sometimes</a:t>
-            </a:r>
-            <a:r>
-              <a:rPr lang="de-DE" dirty="0"/>
-              <a:t> </a:t>
-            </a:r>
-            <a:r>
-              <a:rPr lang="de-DE" dirty="0" err="1"/>
-              <a:t>average</a:t>
-            </a:r>
-            <a:r>
-              <a:rPr lang="de-DE" dirty="0"/>
-              <a:t> </a:t>
-            </a:r>
-            <a:r>
-              <a:rPr lang="de-DE" dirty="0" err="1"/>
-              <a:t>pooling</a:t>
-            </a:r>
-            <a:r>
-              <a:rPr lang="de-DE" dirty="0"/>
-              <a:t> (</a:t>
-            </a:r>
-            <a:r>
-              <a:rPr lang="de-DE" dirty="0" err="1"/>
-              <a:t>mean</a:t>
-            </a:r>
-            <a:r>
-              <a:rPr lang="de-DE" dirty="0"/>
-              <a:t> </a:t>
-            </a:r>
-            <a:r>
-              <a:rPr lang="de-DE" dirty="0" err="1"/>
-              <a:t>of</a:t>
-            </a:r>
-            <a:r>
-              <a:rPr lang="de-DE" dirty="0"/>
-              <a:t> all </a:t>
-            </a:r>
-            <a:r>
-              <a:rPr lang="de-DE" dirty="0" err="1"/>
-              <a:t>hidden</a:t>
-            </a:r>
-            <a:r>
-              <a:rPr lang="de-DE" dirty="0"/>
-              <a:t> </a:t>
-            </a:r>
-            <a:r>
-              <a:rPr lang="de-DE" dirty="0" err="1"/>
-              <a:t>states</a:t>
-            </a:r>
-            <a:r>
-              <a:rPr lang="de-DE" dirty="0"/>
-              <a:t>) </a:t>
-            </a:r>
-            <a:r>
-              <a:rPr lang="de-DE" dirty="0" err="1"/>
-              <a:t>is</a:t>
-            </a:r>
-            <a:r>
-              <a:rPr lang="de-DE" dirty="0"/>
-              <a:t> </a:t>
-            </a:r>
-            <a:r>
-              <a:rPr lang="de-DE" dirty="0" err="1"/>
-              <a:t>used</a:t>
-            </a:r>
-            <a:r>
-              <a:rPr lang="de-DE" dirty="0"/>
-              <a:t> </a:t>
-            </a:r>
-            <a:r>
-              <a:rPr lang="de-DE" dirty="0" err="1"/>
-              <a:t>instead</a:t>
-            </a:r>
-            <a:r>
-              <a:rPr lang="de-DE" dirty="0"/>
-              <a:t> </a:t>
-            </a:r>
-            <a:r>
-              <a:rPr lang="de-DE" dirty="0" err="1"/>
-              <a:t>of</a:t>
-            </a:r>
-            <a:r>
-              <a:rPr lang="de-DE" dirty="0"/>
-              <a:t> [CLS], </a:t>
-            </a:r>
-            <a:r>
-              <a:rPr lang="de-DE" dirty="0" err="1"/>
-              <a:t>because</a:t>
-            </a:r>
-            <a:r>
-              <a:rPr lang="de-DE" dirty="0"/>
-              <a:t> </a:t>
-            </a:r>
-            <a:r>
-              <a:rPr lang="de-DE" dirty="0" err="1"/>
-              <a:t>it</a:t>
-            </a:r>
-            <a:r>
-              <a:rPr lang="de-DE" dirty="0"/>
-              <a:t> </a:t>
-            </a:r>
-            <a:r>
-              <a:rPr lang="de-DE" dirty="0" err="1"/>
-              <a:t>gives</a:t>
-            </a:r>
-            <a:r>
-              <a:rPr lang="de-DE" dirty="0"/>
-              <a:t> a smoother </a:t>
-            </a:r>
-            <a:r>
-              <a:rPr lang="de-DE" dirty="0" err="1"/>
-              <a:t>representation</a:t>
-            </a:r>
-            <a:r>
-              <a:rPr lang="de-DE" dirty="0"/>
-              <a:t> </a:t>
-            </a:r>
-            <a:r>
-              <a:rPr lang="de-DE" dirty="0" err="1"/>
-              <a:t>for</a:t>
-            </a:r>
-            <a:r>
-              <a:rPr lang="de-DE" dirty="0"/>
-              <a:t> </a:t>
-            </a:r>
-            <a:r>
-              <a:rPr lang="de-DE" dirty="0" err="1"/>
-              <a:t>embeddings</a:t>
-            </a:r>
-            <a:r>
-              <a:rPr lang="de-DE" dirty="0"/>
-              <a:t>.</a:t>
-            </a:r>
+            <a:endParaRPr lang="de-DE" dirty="0">
+              <a:hlinkClick r:id="rId2"/>
+            </a:endParaRPr>
           </a:p>
           <a:p>
             <a:pPr marL="0" indent="0">
               <a:buNone/>
             </a:pPr>
             <a:r>
-              <a:rPr lang="de-DE" dirty="0" err="1"/>
-              <a:t>That’s</a:t>
-            </a:r>
-            <a:r>
-              <a:rPr lang="de-DE" dirty="0"/>
-              <a:t> </a:t>
-            </a:r>
-            <a:r>
-              <a:rPr lang="de-DE" dirty="0" err="1"/>
-              <a:t>what</a:t>
-            </a:r>
-            <a:r>
-              <a:rPr lang="de-DE" dirty="0"/>
-              <a:t> </a:t>
+              <a:rPr lang="en-DE">
+                <a:hlinkClick r:id="rId2"/>
+              </a:rPr>
+              <a:t>BERT</a:t>
+            </a:r>
+            <a:r>
+              <a:rPr lang="de-DE" dirty="0"/>
+              <a:t> (</a:t>
+            </a:r>
+            <a:r>
+              <a:rPr lang="de-DE" dirty="0" err="1"/>
+              <a:t>uses</a:t>
+            </a:r>
+            <a:r>
+              <a:rPr lang="de-DE" dirty="0"/>
+              <a:t> </a:t>
+            </a:r>
+            <a:r>
+              <a:rPr lang="en-GB" dirty="0"/>
+              <a:t>next-sentence prediction as additional pretraining objective</a:t>
+            </a:r>
+            <a:r>
+              <a:rPr lang="de-DE" dirty="0"/>
+              <a:t>)</a:t>
+            </a:r>
+          </a:p>
+          <a:p>
+            <a:pPr marL="0" indent="0">
+              <a:buNone/>
+            </a:pPr>
+            <a:endParaRPr lang="de-DE" dirty="0"/>
+          </a:p>
+          <a:p>
+            <a:r>
+              <a:rPr lang="de-DE" dirty="0" err="1"/>
+              <a:t>For</a:t>
+            </a:r>
+            <a:r>
+              <a:rPr lang="de-DE" dirty="0"/>
+              <a:t> </a:t>
+            </a:r>
+            <a:r>
+              <a:rPr lang="de-DE" dirty="0" err="1"/>
+              <a:t>each</a:t>
+            </a:r>
+            <a:r>
+              <a:rPr lang="de-DE" dirty="0"/>
+              <a:t> </a:t>
+            </a:r>
+            <a:r>
+              <a:rPr lang="de-DE" dirty="0" err="1"/>
+              <a:t>token</a:t>
+            </a:r>
+            <a:r>
+              <a:rPr lang="de-DE" dirty="0"/>
+              <a:t> </a:t>
+            </a:r>
+            <a:r>
+              <a:rPr lang="de-DE" dirty="0" err="1"/>
+              <a:t>selected</a:t>
+            </a:r>
+            <a:r>
+              <a:rPr lang="de-DE" dirty="0"/>
+              <a:t> </a:t>
+            </a:r>
+            <a:r>
+              <a:rPr lang="de-DE" dirty="0" err="1"/>
+              <a:t>for</a:t>
+            </a:r>
+            <a:r>
+              <a:rPr lang="de-DE" dirty="0"/>
+              <a:t> </a:t>
+            </a:r>
+            <a:r>
+              <a:rPr lang="de-DE" dirty="0" err="1"/>
+              <a:t>masking</a:t>
+            </a:r>
+            <a:r>
+              <a:rPr lang="de-DE" dirty="0"/>
+              <a:t> (15% </a:t>
+            </a:r>
+            <a:r>
+              <a:rPr lang="de-DE" dirty="0" err="1"/>
+              <a:t>of</a:t>
+            </a:r>
+            <a:r>
+              <a:rPr lang="de-DE" dirty="0"/>
+              <a:t> all </a:t>
+            </a:r>
+            <a:r>
+              <a:rPr lang="de-DE" dirty="0" err="1"/>
+              <a:t>tokens</a:t>
+            </a:r>
+            <a:r>
+              <a:rPr lang="de-DE" dirty="0"/>
+              <a:t>):</a:t>
+            </a:r>
+          </a:p>
+          <a:p>
+            <a:r>
+              <a:rPr lang="de-DE" b="1" dirty="0"/>
+              <a:t>80% </a:t>
             </a:r>
             <a:r>
               <a:rPr lang="de-DE" b="1" dirty="0" err="1"/>
-              <a:t>Sentence</a:t>
+              <a:t>of</a:t>
             </a:r>
             <a:r>
               <a:rPr lang="de-DE" b="1" dirty="0"/>
-              <a:t>-BERT (SBERT)</a:t>
-            </a:r>
-            <a:r>
-              <a:rPr lang="de-DE" dirty="0"/>
-              <a:t> </a:t>
-            </a:r>
-            <a:r>
-              <a:rPr lang="de-DE" dirty="0" err="1"/>
-              <a:t>does</a:t>
+              <a:t> </a:t>
+            </a:r>
+            <a:r>
+              <a:rPr lang="de-DE" b="1" dirty="0" err="1"/>
+              <a:t>the</a:t>
+            </a:r>
+            <a:r>
+              <a:rPr lang="de-DE" b="1" dirty="0"/>
+              <a:t> time</a:t>
+            </a:r>
+            <a:r>
+              <a:rPr lang="de-DE" dirty="0"/>
+              <a:t> → </a:t>
+            </a:r>
+            <a:r>
+              <a:rPr lang="de-DE" dirty="0" err="1"/>
+              <a:t>Replace</a:t>
+            </a:r>
+            <a:r>
+              <a:rPr lang="de-DE" dirty="0"/>
+              <a:t> </a:t>
+            </a:r>
+            <a:r>
+              <a:rPr lang="de-DE" dirty="0" err="1"/>
+              <a:t>it</a:t>
+            </a:r>
+            <a:r>
+              <a:rPr lang="de-DE" dirty="0"/>
+              <a:t> </a:t>
+            </a:r>
+            <a:r>
+              <a:rPr lang="de-DE" dirty="0" err="1"/>
+              <a:t>with</a:t>
+            </a:r>
+            <a:r>
+              <a:rPr lang="de-DE" dirty="0"/>
+              <a:t> [MASK].</a:t>
+            </a:r>
+          </a:p>
+          <a:p>
+            <a:r>
+              <a:rPr lang="de-DE" dirty="0" err="1"/>
+              <a:t>Example</a:t>
+            </a:r>
+            <a:r>
+              <a:rPr lang="de-DE" dirty="0"/>
+              <a:t>: "</a:t>
+            </a:r>
+            <a:r>
+              <a:rPr lang="de-DE" dirty="0" err="1"/>
+              <a:t>the</a:t>
+            </a:r>
+            <a:r>
+              <a:rPr lang="de-DE" dirty="0"/>
+              <a:t> </a:t>
+            </a:r>
+            <a:r>
+              <a:rPr lang="de-DE" dirty="0" err="1"/>
+              <a:t>cat</a:t>
+            </a:r>
+            <a:r>
+              <a:rPr lang="de-DE" dirty="0"/>
+              <a:t> </a:t>
+            </a:r>
+            <a:r>
+              <a:rPr lang="de-DE" dirty="0" err="1"/>
+              <a:t>sat</a:t>
+            </a:r>
+            <a:r>
+              <a:rPr lang="de-DE" dirty="0"/>
+              <a:t>" → "</a:t>
+            </a:r>
+            <a:r>
+              <a:rPr lang="de-DE" dirty="0" err="1"/>
+              <a:t>the</a:t>
+            </a:r>
+            <a:r>
+              <a:rPr lang="de-DE" dirty="0"/>
+              <a:t> [MASK] </a:t>
+            </a:r>
+            <a:r>
+              <a:rPr lang="de-DE" dirty="0" err="1"/>
+              <a:t>sat</a:t>
+            </a:r>
+            <a:r>
+              <a:rPr lang="de-DE" dirty="0"/>
+              <a:t>".</a:t>
+            </a:r>
+          </a:p>
+          <a:p>
+            <a:r>
+              <a:rPr lang="de-DE" dirty="0"/>
+              <a:t>The </a:t>
+            </a:r>
+            <a:r>
+              <a:rPr lang="de-DE" dirty="0" err="1"/>
+              <a:t>embedding</a:t>
+            </a:r>
+            <a:r>
+              <a:rPr lang="de-DE" dirty="0"/>
+              <a:t> </a:t>
+            </a:r>
+            <a:r>
+              <a:rPr lang="de-DE" dirty="0" err="1"/>
+              <a:t>is</a:t>
+            </a:r>
+            <a:r>
+              <a:rPr lang="de-DE" dirty="0"/>
+              <a:t> </a:t>
+            </a:r>
+            <a:r>
+              <a:rPr lang="de-DE" dirty="0" err="1"/>
+              <a:t>the</a:t>
+            </a:r>
+            <a:r>
+              <a:rPr lang="de-DE" dirty="0"/>
+              <a:t> </a:t>
+            </a:r>
+            <a:r>
+              <a:rPr lang="de-DE" dirty="0" err="1"/>
+              <a:t>learned</a:t>
+            </a:r>
+            <a:r>
+              <a:rPr lang="de-DE" dirty="0"/>
+              <a:t> </a:t>
+            </a:r>
+            <a:r>
+              <a:rPr lang="de-DE" dirty="0" err="1"/>
+              <a:t>embedding</a:t>
+            </a:r>
+            <a:r>
+              <a:rPr lang="de-DE" dirty="0"/>
+              <a:t> </a:t>
+            </a:r>
+            <a:r>
+              <a:rPr lang="de-DE" dirty="0" err="1"/>
+              <a:t>vector</a:t>
+            </a:r>
+            <a:r>
+              <a:rPr lang="de-DE" dirty="0"/>
+              <a:t> </a:t>
+            </a:r>
+            <a:r>
+              <a:rPr lang="de-DE" dirty="0" err="1"/>
+              <a:t>for</a:t>
+            </a:r>
+            <a:r>
+              <a:rPr lang="de-DE" dirty="0"/>
+              <a:t> </a:t>
+            </a:r>
+            <a:r>
+              <a:rPr lang="de-DE" dirty="0" err="1"/>
+              <a:t>the</a:t>
+            </a:r>
+            <a:r>
+              <a:rPr lang="de-DE" dirty="0"/>
+              <a:t> [MASK] </a:t>
+            </a:r>
+            <a:r>
+              <a:rPr lang="de-DE" dirty="0" err="1"/>
+              <a:t>token</a:t>
+            </a:r>
+            <a:r>
+              <a:rPr lang="de-DE" dirty="0"/>
+              <a:t> (just like </a:t>
+            </a:r>
+            <a:r>
+              <a:rPr lang="de-DE" dirty="0" err="1"/>
+              <a:t>any</a:t>
+            </a:r>
+            <a:r>
+              <a:rPr lang="de-DE" dirty="0"/>
+              <a:t> </a:t>
+            </a:r>
+            <a:r>
+              <a:rPr lang="de-DE" dirty="0" err="1"/>
+              <a:t>other</a:t>
+            </a:r>
+            <a:r>
+              <a:rPr lang="de-DE" dirty="0"/>
+              <a:t> </a:t>
+            </a:r>
+            <a:r>
+              <a:rPr lang="de-DE" dirty="0" err="1"/>
+              <a:t>token</a:t>
+            </a:r>
+            <a:r>
+              <a:rPr lang="de-DE" dirty="0"/>
+              <a:t>).</a:t>
+            </a:r>
+          </a:p>
+          <a:p>
+            <a:r>
+              <a:rPr lang="de-DE" b="1" dirty="0"/>
+              <a:t>10% </a:t>
+            </a:r>
+            <a:r>
+              <a:rPr lang="de-DE" b="1" dirty="0" err="1"/>
+              <a:t>of</a:t>
+            </a:r>
+            <a:r>
+              <a:rPr lang="de-DE" b="1" dirty="0"/>
+              <a:t> </a:t>
+            </a:r>
+            <a:r>
+              <a:rPr lang="de-DE" b="1" dirty="0" err="1"/>
+              <a:t>the</a:t>
+            </a:r>
+            <a:r>
+              <a:rPr lang="de-DE" b="1" dirty="0"/>
+              <a:t> time</a:t>
+            </a:r>
+            <a:r>
+              <a:rPr lang="de-DE" dirty="0"/>
+              <a:t> → </a:t>
+            </a:r>
+            <a:r>
+              <a:rPr lang="de-DE" dirty="0" err="1"/>
+              <a:t>Replace</a:t>
+            </a:r>
+            <a:r>
+              <a:rPr lang="de-DE" dirty="0"/>
+              <a:t> </a:t>
+            </a:r>
+            <a:r>
+              <a:rPr lang="de-DE" dirty="0" err="1"/>
+              <a:t>it</a:t>
+            </a:r>
+            <a:r>
+              <a:rPr lang="de-DE" dirty="0"/>
+              <a:t> </a:t>
+            </a:r>
+            <a:r>
+              <a:rPr lang="de-DE" dirty="0" err="1"/>
+              <a:t>with</a:t>
+            </a:r>
+            <a:r>
+              <a:rPr lang="de-DE" dirty="0"/>
+              <a:t> a </a:t>
+            </a:r>
+            <a:r>
+              <a:rPr lang="de-DE" b="1" dirty="0" err="1"/>
+              <a:t>random</a:t>
+            </a:r>
+            <a:r>
+              <a:rPr lang="de-DE" b="1" dirty="0"/>
+              <a:t> </a:t>
+            </a:r>
+            <a:r>
+              <a:rPr lang="de-DE" b="1" dirty="0" err="1"/>
+              <a:t>token</a:t>
+            </a:r>
+            <a:r>
+              <a:rPr lang="de-DE" dirty="0"/>
+              <a:t> </a:t>
+            </a:r>
+            <a:r>
+              <a:rPr lang="de-DE" dirty="0" err="1"/>
+              <a:t>from</a:t>
+            </a:r>
+            <a:r>
+              <a:rPr lang="de-DE" dirty="0"/>
+              <a:t> </a:t>
+            </a:r>
+            <a:r>
+              <a:rPr lang="de-DE" dirty="0" err="1"/>
+              <a:t>the</a:t>
+            </a:r>
+            <a:r>
+              <a:rPr lang="de-DE" dirty="0"/>
+              <a:t> </a:t>
+            </a:r>
+            <a:r>
+              <a:rPr lang="de-DE" dirty="0" err="1"/>
+              <a:t>vocabulary</a:t>
             </a:r>
             <a:r>
               <a:rPr lang="de-DE" dirty="0"/>
               <a:t>.</a:t>
             </a:r>
           </a:p>
+          <a:p>
+            <a:r>
+              <a:rPr lang="de-DE" dirty="0" err="1"/>
+              <a:t>Prevents</a:t>
+            </a:r>
+            <a:r>
+              <a:rPr lang="de-DE" dirty="0"/>
+              <a:t> </a:t>
+            </a:r>
+            <a:r>
+              <a:rPr lang="de-DE" dirty="0" err="1"/>
+              <a:t>the</a:t>
+            </a:r>
+            <a:r>
+              <a:rPr lang="de-DE" dirty="0"/>
+              <a:t> </a:t>
+            </a:r>
+            <a:r>
+              <a:rPr lang="de-DE" dirty="0" err="1"/>
+              <a:t>model</a:t>
+            </a:r>
+            <a:r>
+              <a:rPr lang="de-DE" dirty="0"/>
+              <a:t> </a:t>
+            </a:r>
+            <a:r>
+              <a:rPr lang="de-DE" dirty="0" err="1"/>
+              <a:t>from</a:t>
+            </a:r>
+            <a:r>
+              <a:rPr lang="de-DE" dirty="0"/>
+              <a:t> </a:t>
+            </a:r>
+            <a:r>
+              <a:rPr lang="de-DE" dirty="0" err="1"/>
+              <a:t>overfitting</a:t>
+            </a:r>
+            <a:r>
+              <a:rPr lang="de-DE" dirty="0"/>
+              <a:t> </a:t>
+            </a:r>
+            <a:r>
+              <a:rPr lang="de-DE" dirty="0" err="1"/>
+              <a:t>to</a:t>
+            </a:r>
+            <a:r>
+              <a:rPr lang="de-DE" dirty="0"/>
+              <a:t> </a:t>
+            </a:r>
+            <a:r>
+              <a:rPr lang="de-DE" dirty="0" err="1"/>
+              <a:t>always</a:t>
+            </a:r>
+            <a:r>
+              <a:rPr lang="de-DE" dirty="0"/>
+              <a:t> </a:t>
+            </a:r>
+            <a:r>
+              <a:rPr lang="de-DE" dirty="0" err="1"/>
+              <a:t>associating</a:t>
+            </a:r>
+            <a:r>
+              <a:rPr lang="de-DE" dirty="0"/>
+              <a:t> [MASK] </a:t>
+            </a:r>
+            <a:r>
+              <a:rPr lang="de-DE" dirty="0" err="1"/>
+              <a:t>with</a:t>
+            </a:r>
+            <a:r>
+              <a:rPr lang="de-DE" dirty="0"/>
+              <a:t> </a:t>
+            </a:r>
+            <a:r>
+              <a:rPr lang="de-DE" dirty="0" err="1"/>
+              <a:t>prediction</a:t>
+            </a:r>
+            <a:r>
+              <a:rPr lang="de-DE" dirty="0"/>
+              <a:t>.</a:t>
+            </a:r>
+          </a:p>
+          <a:p>
+            <a:r>
+              <a:rPr lang="de-DE" b="1" dirty="0"/>
+              <a:t>10% </a:t>
+            </a:r>
+            <a:r>
+              <a:rPr lang="de-DE" b="1" dirty="0" err="1"/>
+              <a:t>of</a:t>
+            </a:r>
+            <a:r>
+              <a:rPr lang="de-DE" b="1" dirty="0"/>
+              <a:t> </a:t>
+            </a:r>
+            <a:r>
+              <a:rPr lang="de-DE" b="1" dirty="0" err="1"/>
+              <a:t>the</a:t>
+            </a:r>
+            <a:r>
+              <a:rPr lang="de-DE" b="1" dirty="0"/>
+              <a:t> time</a:t>
+            </a:r>
+            <a:r>
+              <a:rPr lang="de-DE" dirty="0"/>
+              <a:t> → </a:t>
+            </a:r>
+            <a:r>
+              <a:rPr lang="de-DE" dirty="0" err="1"/>
+              <a:t>Leave</a:t>
+            </a:r>
+            <a:r>
+              <a:rPr lang="de-DE" dirty="0"/>
+              <a:t> </a:t>
+            </a:r>
+            <a:r>
+              <a:rPr lang="de-DE" dirty="0" err="1"/>
+              <a:t>it</a:t>
+            </a:r>
+            <a:r>
+              <a:rPr lang="de-DE" dirty="0"/>
+              <a:t> </a:t>
+            </a:r>
+            <a:r>
+              <a:rPr lang="de-DE" b="1" dirty="0" err="1"/>
+              <a:t>unchanged</a:t>
+            </a:r>
+            <a:r>
+              <a:rPr lang="de-DE" dirty="0"/>
+              <a:t>.</a:t>
+            </a:r>
+          </a:p>
+          <a:p>
+            <a:r>
+              <a:rPr lang="de-DE" dirty="0"/>
+              <a:t>Forces </a:t>
+            </a:r>
+            <a:r>
+              <a:rPr lang="de-DE" dirty="0" err="1"/>
+              <a:t>the</a:t>
+            </a:r>
+            <a:r>
+              <a:rPr lang="de-DE" dirty="0"/>
+              <a:t> </a:t>
+            </a:r>
+            <a:r>
+              <a:rPr lang="de-DE" dirty="0" err="1"/>
+              <a:t>model</a:t>
+            </a:r>
+            <a:r>
+              <a:rPr lang="de-DE" dirty="0"/>
+              <a:t> </a:t>
+            </a:r>
+            <a:r>
+              <a:rPr lang="de-DE" dirty="0" err="1"/>
+              <a:t>to</a:t>
+            </a:r>
+            <a:r>
+              <a:rPr lang="de-DE" dirty="0"/>
+              <a:t> </a:t>
+            </a:r>
+            <a:r>
+              <a:rPr lang="de-DE" dirty="0" err="1"/>
+              <a:t>sometimes</a:t>
+            </a:r>
+            <a:r>
+              <a:rPr lang="de-DE" dirty="0"/>
+              <a:t> </a:t>
+            </a:r>
+            <a:r>
+              <a:rPr lang="de-DE" dirty="0" err="1"/>
+              <a:t>predict</a:t>
+            </a:r>
+            <a:r>
+              <a:rPr lang="de-DE" dirty="0"/>
+              <a:t> </a:t>
+            </a:r>
+            <a:r>
+              <a:rPr lang="de-DE" dirty="0" err="1"/>
+              <a:t>without</a:t>
+            </a:r>
+            <a:r>
+              <a:rPr lang="de-DE" dirty="0"/>
+              <a:t> </a:t>
+            </a:r>
+            <a:r>
+              <a:rPr lang="de-DE" dirty="0" err="1"/>
+              <a:t>seeing</a:t>
+            </a:r>
+            <a:r>
+              <a:rPr lang="de-DE" dirty="0"/>
+              <a:t> an explicit [MASK].</a:t>
+            </a:r>
+          </a:p>
+          <a:p>
+            <a:pPr marL="0" indent="0">
+              <a:buNone/>
+            </a:pPr>
+            <a:br>
+              <a:rPr lang="de-DE" dirty="0"/>
+            </a:br>
+            <a:r>
+              <a:rPr lang="de-DE" dirty="0" err="1"/>
+              <a:t>Regardless</a:t>
+            </a:r>
+            <a:r>
+              <a:rPr lang="de-DE" dirty="0"/>
+              <a:t> </a:t>
+            </a:r>
+            <a:r>
+              <a:rPr lang="de-DE" dirty="0" err="1"/>
+              <a:t>of</a:t>
+            </a:r>
+            <a:r>
+              <a:rPr lang="de-DE" dirty="0"/>
+              <a:t> </a:t>
+            </a:r>
+            <a:r>
+              <a:rPr lang="de-DE" dirty="0" err="1"/>
+              <a:t>which</a:t>
+            </a:r>
+            <a:r>
+              <a:rPr lang="de-DE" dirty="0"/>
+              <a:t> </a:t>
+            </a:r>
+            <a:r>
+              <a:rPr lang="de-DE" dirty="0" err="1"/>
+              <a:t>replacement</a:t>
+            </a:r>
+            <a:r>
+              <a:rPr lang="de-DE" dirty="0"/>
+              <a:t> </a:t>
+            </a:r>
+            <a:r>
+              <a:rPr lang="de-DE" dirty="0" err="1"/>
+              <a:t>is</a:t>
+            </a:r>
+            <a:r>
+              <a:rPr lang="de-DE" dirty="0"/>
+              <a:t> </a:t>
+            </a:r>
+            <a:r>
+              <a:rPr lang="de-DE" dirty="0" err="1"/>
+              <a:t>used</a:t>
+            </a:r>
+            <a:r>
+              <a:rPr lang="de-DE" dirty="0"/>
+              <a:t>, </a:t>
+            </a:r>
+            <a:r>
+              <a:rPr lang="de-DE" dirty="0" err="1"/>
+              <a:t>the</a:t>
+            </a:r>
+            <a:r>
+              <a:rPr lang="de-DE" dirty="0"/>
+              <a:t> </a:t>
+            </a:r>
+            <a:r>
+              <a:rPr lang="de-DE" b="1" dirty="0" err="1"/>
+              <a:t>loss</a:t>
+            </a:r>
+            <a:r>
+              <a:rPr lang="de-DE" b="1" dirty="0"/>
+              <a:t> </a:t>
+            </a:r>
+            <a:r>
+              <a:rPr lang="de-DE" b="1" dirty="0" err="1"/>
+              <a:t>is</a:t>
+            </a:r>
+            <a:r>
+              <a:rPr lang="de-DE" b="1" dirty="0"/>
+              <a:t> still </a:t>
+            </a:r>
+            <a:r>
+              <a:rPr lang="de-DE" b="1" dirty="0" err="1"/>
+              <a:t>computed</a:t>
+            </a:r>
+            <a:r>
+              <a:rPr lang="de-DE" b="1" dirty="0"/>
+              <a:t> </a:t>
+            </a:r>
+            <a:r>
+              <a:rPr lang="de-DE" b="1" dirty="0" err="1"/>
+              <a:t>against</a:t>
+            </a:r>
+            <a:r>
+              <a:rPr lang="de-DE" b="1" dirty="0"/>
+              <a:t> </a:t>
+            </a:r>
+            <a:r>
+              <a:rPr lang="de-DE" b="1" dirty="0" err="1"/>
+              <a:t>the</a:t>
+            </a:r>
+            <a:r>
+              <a:rPr lang="de-DE" b="1" dirty="0"/>
+              <a:t> original </a:t>
+            </a:r>
+            <a:r>
+              <a:rPr lang="de-DE" b="1" dirty="0" err="1"/>
+              <a:t>token</a:t>
+            </a:r>
+            <a:r>
+              <a:rPr lang="de-DE" dirty="0"/>
+              <a:t>.</a:t>
+            </a:r>
+          </a:p>
         </p:txBody>
       </p:sp>
       <p:sp>
@@ -14723,7 +14925,7 @@
           <p:cNvPr id="4" name="Foliennummernplatzhalter 3">
             <a:extLst>
               <a:ext uri="{FF2B5EF4-FFF2-40B4-BE49-F238E27FC236}">
-                <a16:creationId xmlns:a16="http://schemas.microsoft.com/office/drawing/2014/main" id="{F3FA2F52-7FFF-92B0-F7A7-623ED745F3E6}"/>
+                <a16:creationId xmlns:a16="http://schemas.microsoft.com/office/drawing/2014/main" id="{98A71D12-1308-5AA4-28A9-50891017FA54}"/>
               </a:ext>
             </a:extLst>
           </p:cNvPr>
@@ -14750,7 +14952,7 @@
     </p:spTree>
     <p:extLst>
       <p:ext uri="{BB962C8B-B14F-4D97-AF65-F5344CB8AC3E}">
-        <p14:creationId xmlns:p14="http://schemas.microsoft.com/office/powerpoint/2010/main" val="2476222795"/>
+        <p14:creationId xmlns:p14="http://schemas.microsoft.com/office/powerpoint/2010/main" val="209083973"/>
       </p:ext>
     </p:extLst>
   </p:cSld>

--- a/slides/5_finetuning.pptx
+++ b/slides/5_finetuning.pptx
@@ -3706,7 +3706,7 @@
           <a:p>
             <a:fld id="{17938448-F949-A340-94CF-EFC7FB146DC3}" type="datetimeFigureOut">
               <a:rPr lang="de-DE" smtClean="0"/>
-              <a:t>15.09.25</a:t>
+              <a:t>16.09.25</a:t>
             </a:fld>
             <a:endParaRPr lang="de-DE"/>
           </a:p>
@@ -4120,7 +4120,7 @@
           <a:p>
             <a:fld id="{E5C7ACC2-601D-4B49-AF12-AE7E0A409668}" type="datetime1">
               <a:rPr lang="de-DE" smtClean="0"/>
-              <a:t>15.09.25</a:t>
+              <a:t>16.09.25</a:t>
             </a:fld>
             <a:endParaRPr lang="de-DE"/>
           </a:p>
@@ -4318,7 +4318,7 @@
           <a:p>
             <a:fld id="{B1E06029-94C2-D041-AE64-8D99E258F8A3}" type="datetime1">
               <a:rPr lang="de-DE" smtClean="0"/>
-              <a:t>15.09.25</a:t>
+              <a:t>16.09.25</a:t>
             </a:fld>
             <a:endParaRPr lang="de-DE"/>
           </a:p>
@@ -4526,7 +4526,7 @@
           <a:p>
             <a:fld id="{68EC3790-B7B2-CE44-8ABE-1653D553799B}" type="datetime1">
               <a:rPr lang="de-DE" smtClean="0"/>
-              <a:t>15.09.25</a:t>
+              <a:t>16.09.25</a:t>
             </a:fld>
             <a:endParaRPr lang="de-DE"/>
           </a:p>
@@ -4724,7 +4724,7 @@
           <a:p>
             <a:fld id="{BC54D07D-C13F-4E4C-B9AC-279F2B3CA927}" type="datetime1">
               <a:rPr lang="de-DE" smtClean="0"/>
-              <a:t>15.09.25</a:t>
+              <a:t>16.09.25</a:t>
             </a:fld>
             <a:endParaRPr lang="de-DE"/>
           </a:p>
@@ -4999,7 +4999,7 @@
           <a:p>
             <a:fld id="{E5E61780-2A28-3749-A212-7540F54B9465}" type="datetime1">
               <a:rPr lang="de-DE" smtClean="0"/>
-              <a:t>15.09.25</a:t>
+              <a:t>16.09.25</a:t>
             </a:fld>
             <a:endParaRPr lang="de-DE"/>
           </a:p>
@@ -5264,7 +5264,7 @@
           <a:p>
             <a:fld id="{A8E8D020-F608-DA44-840A-F653D7B34645}" type="datetime1">
               <a:rPr lang="de-DE" smtClean="0"/>
-              <a:t>15.09.25</a:t>
+              <a:t>16.09.25</a:t>
             </a:fld>
             <a:endParaRPr lang="de-DE"/>
           </a:p>
@@ -5676,7 +5676,7 @@
           <a:p>
             <a:fld id="{4E584096-D809-3C4A-B49B-20A875EFDFE8}" type="datetime1">
               <a:rPr lang="de-DE" smtClean="0"/>
-              <a:t>15.09.25</a:t>
+              <a:t>16.09.25</a:t>
             </a:fld>
             <a:endParaRPr lang="de-DE"/>
           </a:p>
@@ -5817,7 +5817,7 @@
           <a:p>
             <a:fld id="{88338CED-7C3B-D243-A7A7-180C1477BFE9}" type="datetime1">
               <a:rPr lang="de-DE" smtClean="0"/>
-              <a:t>15.09.25</a:t>
+              <a:t>16.09.25</a:t>
             </a:fld>
             <a:endParaRPr lang="de-DE"/>
           </a:p>
@@ -5930,7 +5930,7 @@
           <a:p>
             <a:fld id="{38293341-36E1-684C-B37A-E1CF770EFEDF}" type="datetime1">
               <a:rPr lang="de-DE" smtClean="0"/>
-              <a:t>15.09.25</a:t>
+              <a:t>16.09.25</a:t>
             </a:fld>
             <a:endParaRPr lang="de-DE"/>
           </a:p>
@@ -6241,7 +6241,7 @@
           <a:p>
             <a:fld id="{6700489F-99E0-0B4E-AC85-0F547BC7C4E9}" type="datetime1">
               <a:rPr lang="de-DE" smtClean="0"/>
-              <a:t>15.09.25</a:t>
+              <a:t>16.09.25</a:t>
             </a:fld>
             <a:endParaRPr lang="de-DE"/>
           </a:p>
@@ -6529,7 +6529,7 @@
           <a:p>
             <a:fld id="{92068F7F-BE24-2A45-927E-12FDF36DDAB4}" type="datetime1">
               <a:rPr lang="de-DE" smtClean="0"/>
-              <a:t>15.09.25</a:t>
+              <a:t>16.09.25</a:t>
             </a:fld>
             <a:endParaRPr lang="de-DE"/>
           </a:p>
@@ -6770,7 +6770,7 @@
           <a:p>
             <a:fld id="{7E62EDA1-0F0F-7343-82D4-3054E662EA0E}" type="datetime1">
               <a:rPr lang="de-DE" smtClean="0"/>
-              <a:t>15.09.25</a:t>
+              <a:t>16.09.25</a:t>
             </a:fld>
             <a:endParaRPr lang="de-DE"/>
           </a:p>
@@ -12366,7 +12366,9 @@
         </p:nvSpPr>
         <p:spPr/>
         <p:txBody>
-          <a:bodyPr/>
+          <a:bodyPr>
+            <a:normAutofit lnSpcReduction="10000"/>
+          </a:bodyPr>
           <a:lstStyle/>
           <a:p>
             <a:r>
@@ -12423,38 +12425,6 @@
               <a:rPr lang="de-DE" dirty="0" err="1"/>
               <a:t>tuning</a:t>
             </a:r>
-            <a:r>
-              <a:rPr lang="de-DE" dirty="0"/>
-              <a:t>: </a:t>
-            </a:r>
-            <a:r>
-              <a:rPr lang="de-DE" dirty="0" err="1"/>
-              <a:t>supervised</a:t>
-            </a:r>
-            <a:r>
-              <a:rPr lang="de-DE" dirty="0"/>
-              <a:t> </a:t>
-            </a:r>
-            <a:r>
-              <a:rPr lang="de-DE" dirty="0" err="1"/>
-              <a:t>finetuning</a:t>
-            </a:r>
-            <a:r>
-              <a:rPr lang="de-DE" dirty="0"/>
-              <a:t>, </a:t>
-            </a:r>
-            <a:r>
-              <a:rPr lang="de-DE" dirty="0" err="1"/>
-              <a:t>preference</a:t>
-            </a:r>
-            <a:r>
-              <a:rPr lang="de-DE" dirty="0"/>
-              <a:t> </a:t>
-            </a:r>
-            <a:r>
-              <a:rPr lang="de-DE" dirty="0" err="1"/>
-              <a:t>alignment</a:t>
-            </a:r>
             <a:endParaRPr lang="de-DE" dirty="0"/>
           </a:p>
           <a:p>
@@ -12464,6 +12434,31 @@
             <a:endParaRPr lang="de-DE" dirty="0"/>
           </a:p>
           <a:p>
+            <a:r>
+              <a:rPr lang="de-DE" dirty="0" err="1"/>
+              <a:t>preference</a:t>
+            </a:r>
+            <a:r>
+              <a:rPr lang="de-DE" dirty="0"/>
+              <a:t> </a:t>
+            </a:r>
+            <a:r>
+              <a:rPr lang="de-DE" dirty="0" err="1"/>
+              <a:t>alignment</a:t>
+            </a:r>
+            <a:endParaRPr lang="de-DE" dirty="0"/>
+          </a:p>
+          <a:p>
+            <a:pPr marL="0" indent="0">
+              <a:buNone/>
+            </a:pPr>
+            <a:endParaRPr lang="de-DE" dirty="0"/>
+          </a:p>
+          <a:p>
+            <a:r>
+              <a:rPr lang="de-DE" dirty="0"/>
+              <a:t>parameter-</a:t>
+            </a:r>
             <a:r>
               <a:rPr lang="de-DE" dirty="0" err="1"/>
               <a:t>efficient</a:t>

--- a/slides/5_finetuning.pptx
+++ b/slides/5_finetuning.pptx
@@ -5,28 +5,28 @@
     <p:sldMasterId id="2147483648" r:id="rId1"/>
   </p:sldMasterIdLst>
   <p:notesMasterIdLst>
-    <p:notesMasterId r:id="rId29"/>
+    <p:notesMasterId r:id="rId30"/>
   </p:notesMasterIdLst>
   <p:sldIdLst>
     <p:sldId id="256" r:id="rId2"/>
     <p:sldId id="792" r:id="rId3"/>
     <p:sldId id="790" r:id="rId4"/>
-    <p:sldId id="754" r:id="rId5"/>
-    <p:sldId id="832" r:id="rId6"/>
-    <p:sldId id="816" r:id="rId7"/>
-    <p:sldId id="834" r:id="rId8"/>
-    <p:sldId id="833" r:id="rId9"/>
-    <p:sldId id="815" r:id="rId10"/>
-    <p:sldId id="814" r:id="rId11"/>
-    <p:sldId id="804" r:id="rId12"/>
-    <p:sldId id="812" r:id="rId13"/>
-    <p:sldId id="736" r:id="rId14"/>
-    <p:sldId id="766" r:id="rId15"/>
-    <p:sldId id="280" r:id="rId16"/>
-    <p:sldId id="828" r:id="rId17"/>
-    <p:sldId id="810" r:id="rId18"/>
-    <p:sldId id="829" r:id="rId19"/>
-    <p:sldId id="827" r:id="rId20"/>
+    <p:sldId id="835" r:id="rId5"/>
+    <p:sldId id="754" r:id="rId6"/>
+    <p:sldId id="832" r:id="rId7"/>
+    <p:sldId id="816" r:id="rId8"/>
+    <p:sldId id="834" r:id="rId9"/>
+    <p:sldId id="833" r:id="rId10"/>
+    <p:sldId id="815" r:id="rId11"/>
+    <p:sldId id="814" r:id="rId12"/>
+    <p:sldId id="804" r:id="rId13"/>
+    <p:sldId id="812" r:id="rId14"/>
+    <p:sldId id="736" r:id="rId15"/>
+    <p:sldId id="766" r:id="rId16"/>
+    <p:sldId id="280" r:id="rId17"/>
+    <p:sldId id="828" r:id="rId18"/>
+    <p:sldId id="810" r:id="rId19"/>
+    <p:sldId id="829" r:id="rId20"/>
     <p:sldId id="830" r:id="rId21"/>
     <p:sldId id="800" r:id="rId22"/>
     <p:sldId id="819" r:id="rId23"/>
@@ -34,7 +34,8 @@
     <p:sldId id="831" r:id="rId25"/>
     <p:sldId id="333" r:id="rId26"/>
     <p:sldId id="837" r:id="rId27"/>
-    <p:sldId id="835" r:id="rId28"/>
+    <p:sldId id="840" r:id="rId28"/>
+    <p:sldId id="839" r:id="rId29"/>
   </p:sldIdLst>
   <p:sldSz cx="12192000" cy="6858000"/>
   <p:notesSz cx="6858000" cy="9144000"/>
@@ -3706,7 +3707,7 @@
           <a:p>
             <a:fld id="{17938448-F949-A340-94CF-EFC7FB146DC3}" type="datetimeFigureOut">
               <a:rPr lang="de-DE" smtClean="0"/>
-              <a:t>16.09.25</a:t>
+              <a:t>17.09.25</a:t>
             </a:fld>
             <a:endParaRPr lang="de-DE"/>
           </a:p>
@@ -4120,7 +4121,7 @@
           <a:p>
             <a:fld id="{E5C7ACC2-601D-4B49-AF12-AE7E0A409668}" type="datetime1">
               <a:rPr lang="de-DE" smtClean="0"/>
-              <a:t>16.09.25</a:t>
+              <a:t>17.09.25</a:t>
             </a:fld>
             <a:endParaRPr lang="de-DE"/>
           </a:p>
@@ -4318,7 +4319,7 @@
           <a:p>
             <a:fld id="{B1E06029-94C2-D041-AE64-8D99E258F8A3}" type="datetime1">
               <a:rPr lang="de-DE" smtClean="0"/>
-              <a:t>16.09.25</a:t>
+              <a:t>17.09.25</a:t>
             </a:fld>
             <a:endParaRPr lang="de-DE"/>
           </a:p>
@@ -4526,7 +4527,7 @@
           <a:p>
             <a:fld id="{68EC3790-B7B2-CE44-8ABE-1653D553799B}" type="datetime1">
               <a:rPr lang="de-DE" smtClean="0"/>
-              <a:t>16.09.25</a:t>
+              <a:t>17.09.25</a:t>
             </a:fld>
             <a:endParaRPr lang="de-DE"/>
           </a:p>
@@ -4724,7 +4725,7 @@
           <a:p>
             <a:fld id="{BC54D07D-C13F-4E4C-B9AC-279F2B3CA927}" type="datetime1">
               <a:rPr lang="de-DE" smtClean="0"/>
-              <a:t>16.09.25</a:t>
+              <a:t>17.09.25</a:t>
             </a:fld>
             <a:endParaRPr lang="de-DE"/>
           </a:p>
@@ -4999,7 +5000,7 @@
           <a:p>
             <a:fld id="{E5E61780-2A28-3749-A212-7540F54B9465}" type="datetime1">
               <a:rPr lang="de-DE" smtClean="0"/>
-              <a:t>16.09.25</a:t>
+              <a:t>17.09.25</a:t>
             </a:fld>
             <a:endParaRPr lang="de-DE"/>
           </a:p>
@@ -5264,7 +5265,7 @@
           <a:p>
             <a:fld id="{A8E8D020-F608-DA44-840A-F653D7B34645}" type="datetime1">
               <a:rPr lang="de-DE" smtClean="0"/>
-              <a:t>16.09.25</a:t>
+              <a:t>17.09.25</a:t>
             </a:fld>
             <a:endParaRPr lang="de-DE"/>
           </a:p>
@@ -5676,7 +5677,7 @@
           <a:p>
             <a:fld id="{4E584096-D809-3C4A-B49B-20A875EFDFE8}" type="datetime1">
               <a:rPr lang="de-DE" smtClean="0"/>
-              <a:t>16.09.25</a:t>
+              <a:t>17.09.25</a:t>
             </a:fld>
             <a:endParaRPr lang="de-DE"/>
           </a:p>
@@ -5817,7 +5818,7 @@
           <a:p>
             <a:fld id="{88338CED-7C3B-D243-A7A7-180C1477BFE9}" type="datetime1">
               <a:rPr lang="de-DE" smtClean="0"/>
-              <a:t>16.09.25</a:t>
+              <a:t>17.09.25</a:t>
             </a:fld>
             <a:endParaRPr lang="de-DE"/>
           </a:p>
@@ -5930,7 +5931,7 @@
           <a:p>
             <a:fld id="{38293341-36E1-684C-B37A-E1CF770EFEDF}" type="datetime1">
               <a:rPr lang="de-DE" smtClean="0"/>
-              <a:t>16.09.25</a:t>
+              <a:t>17.09.25</a:t>
             </a:fld>
             <a:endParaRPr lang="de-DE"/>
           </a:p>
@@ -6241,7 +6242,7 @@
           <a:p>
             <a:fld id="{6700489F-99E0-0B4E-AC85-0F547BC7C4E9}" type="datetime1">
               <a:rPr lang="de-DE" smtClean="0"/>
-              <a:t>16.09.25</a:t>
+              <a:t>17.09.25</a:t>
             </a:fld>
             <a:endParaRPr lang="de-DE"/>
           </a:p>
@@ -6529,7 +6530,7 @@
           <a:p>
             <a:fld id="{92068F7F-BE24-2A45-927E-12FDF36DDAB4}" type="datetime1">
               <a:rPr lang="de-DE" smtClean="0"/>
-              <a:t>16.09.25</a:t>
+              <a:t>17.09.25</a:t>
             </a:fld>
             <a:endParaRPr lang="de-DE"/>
           </a:p>
@@ -6770,7 +6771,7 @@
           <a:p>
             <a:fld id="{7E62EDA1-0F0F-7343-82D4-3054E662EA0E}" type="datetime1">
               <a:rPr lang="de-DE" smtClean="0"/>
-              <a:t>16.09.25</a:t>
+              <a:t>17.09.25</a:t>
             </a:fld>
             <a:endParaRPr lang="de-DE"/>
           </a:p>
@@ -7279,7 +7280,7 @@
           <p:cNvPr id="2" name="Titel 1">
             <a:extLst>
               <a:ext uri="{FF2B5EF4-FFF2-40B4-BE49-F238E27FC236}">
-                <a16:creationId xmlns:a16="http://schemas.microsoft.com/office/drawing/2014/main" id="{47377014-5C9A-61F9-AEB0-5422FFC74E48}"/>
+                <a16:creationId xmlns:a16="http://schemas.microsoft.com/office/drawing/2014/main" id="{2893F29B-BD86-3EF8-10C3-E57EA752C0F3}"/>
               </a:ext>
             </a:extLst>
           </p:cNvPr>
@@ -7295,15 +7296,7 @@
           <a:bodyPr/>
           <a:lstStyle/>
           <a:p>
-            <a:r>
-              <a:rPr lang="de-DE" dirty="0"/>
-              <a:t>BERT </a:t>
-            </a:r>
-            <a:r>
-              <a:rPr lang="de-DE" dirty="0" err="1"/>
-              <a:t>Variants</a:t>
-            </a:r>
-            <a:endParaRPr lang="de-DE" dirty="0"/>
+            <a:endParaRPr lang="de-DE"/>
           </a:p>
         </p:txBody>
       </p:sp>
@@ -7312,7 +7305,7 @@
           <p:cNvPr id="3" name="Inhaltsplatzhalter 2">
             <a:extLst>
               <a:ext uri="{FF2B5EF4-FFF2-40B4-BE49-F238E27FC236}">
-                <a16:creationId xmlns:a16="http://schemas.microsoft.com/office/drawing/2014/main" id="{E32E57AC-9AEC-A942-0A0F-644BB5F978B9}"/>
+                <a16:creationId xmlns:a16="http://schemas.microsoft.com/office/drawing/2014/main" id="{EF684A05-346A-6203-E269-C1F6CFBE41A3}"/>
               </a:ext>
             </a:extLst>
           </p:cNvPr>
@@ -7326,7 +7319,7 @@
         <p:spPr/>
         <p:txBody>
           <a:bodyPr>
-            <a:normAutofit/>
+            <a:normAutofit fontScale="55000" lnSpcReduction="20000"/>
           </a:bodyPr>
           <a:lstStyle/>
           <a:p>
@@ -7334,557 +7327,717 @@
               <a:buNone/>
             </a:pPr>
             <a:r>
-              <a:rPr lang="de-DE" sz="2400" dirty="0">
-                <a:hlinkClick r:id="rId2"/>
-              </a:rPr>
-              <a:t>RoBERTa</a:t>
-            </a:r>
-            <a:r>
-              <a:rPr lang="de-DE" sz="2400" b="1" dirty="0"/>
-              <a:t>: </a:t>
-            </a:r>
-            <a:r>
-              <a:rPr lang="de-DE" sz="2400" dirty="0" err="1"/>
-              <a:t>improved</a:t>
-            </a:r>
-            <a:r>
-              <a:rPr lang="de-DE" sz="2400" dirty="0"/>
-              <a:t> </a:t>
-            </a:r>
-            <a:r>
-              <a:rPr lang="de-DE" sz="2400" dirty="0" err="1"/>
-              <a:t>performance</a:t>
-            </a:r>
-            <a:endParaRPr lang="de-DE" sz="2400" dirty="0"/>
-          </a:p>
-          <a:p>
-            <a:r>
-              <a:rPr lang="de-DE" sz="1800" dirty="0" err="1"/>
-              <a:t>removed</a:t>
-            </a:r>
-            <a:r>
-              <a:rPr lang="de-DE" sz="1800" dirty="0"/>
-              <a:t> </a:t>
-            </a:r>
-            <a:r>
-              <a:rPr lang="de-DE" sz="1800" dirty="0" err="1"/>
-              <a:t>next</a:t>
-            </a:r>
-            <a:r>
-              <a:rPr lang="de-DE" sz="1800" dirty="0"/>
-              <a:t> </a:t>
-            </a:r>
-            <a:r>
-              <a:rPr lang="de-DE" sz="1800" dirty="0" err="1"/>
-              <a:t>sentence</a:t>
-            </a:r>
-            <a:r>
-              <a:rPr lang="de-DE" sz="1800" dirty="0"/>
-              <a:t> </a:t>
-            </a:r>
-            <a:r>
-              <a:rPr lang="de-DE" sz="1800" dirty="0" err="1"/>
-              <a:t>prediction</a:t>
-            </a:r>
-            <a:r>
-              <a:rPr lang="de-DE" sz="1800" dirty="0"/>
-              <a:t> </a:t>
-            </a:r>
-            <a:r>
-              <a:rPr lang="de-DE" sz="1800" dirty="0" err="1"/>
-              <a:t>as</a:t>
-            </a:r>
-            <a:r>
-              <a:rPr lang="de-DE" sz="1800" dirty="0"/>
-              <a:t> </a:t>
-            </a:r>
-            <a:r>
-              <a:rPr lang="de-DE" sz="1800" dirty="0" err="1"/>
-              <a:t>pretraining</a:t>
-            </a:r>
-            <a:r>
-              <a:rPr lang="de-DE" sz="1800" dirty="0"/>
-              <a:t> </a:t>
-            </a:r>
-            <a:r>
-              <a:rPr lang="de-DE" sz="1800" dirty="0" err="1"/>
-              <a:t>objective</a:t>
-            </a:r>
-            <a:r>
-              <a:rPr lang="de-DE" sz="1800" dirty="0"/>
-              <a:t> and …</a:t>
-            </a:r>
-          </a:p>
-          <a:p>
-            <a:r>
-              <a:rPr lang="de-DE" sz="1800" dirty="0"/>
-              <a:t>~</a:t>
-            </a:r>
-            <a:r>
-              <a:rPr lang="de-DE" sz="1800" dirty="0" err="1"/>
-              <a:t>ten</a:t>
-            </a:r>
-            <a:r>
-              <a:rPr lang="de-DE" sz="1800" dirty="0"/>
-              <a:t> </a:t>
-            </a:r>
-            <a:r>
-              <a:rPr lang="de-DE" sz="1800" dirty="0" err="1"/>
-              <a:t>times</a:t>
-            </a:r>
-            <a:r>
-              <a:rPr lang="de-DE" sz="1800" dirty="0"/>
-              <a:t> </a:t>
-            </a:r>
-            <a:r>
-              <a:rPr lang="de-DE" sz="1800" dirty="0" err="1"/>
-              <a:t>more</a:t>
-            </a:r>
-            <a:r>
-              <a:rPr lang="de-DE" sz="1800" dirty="0"/>
-              <a:t> </a:t>
-            </a:r>
-            <a:r>
-              <a:rPr lang="de-DE" sz="1800" dirty="0" err="1"/>
-              <a:t>training</a:t>
-            </a:r>
-            <a:r>
-              <a:rPr lang="de-DE" sz="1800" dirty="0"/>
-              <a:t> </a:t>
-            </a:r>
-            <a:r>
-              <a:rPr lang="de-DE" sz="1800" dirty="0" err="1"/>
-              <a:t>data</a:t>
-            </a:r>
-            <a:r>
-              <a:rPr lang="de-DE" sz="1800" dirty="0"/>
-              <a:t>, </a:t>
-            </a:r>
-            <a:r>
-              <a:rPr lang="de-DE" sz="1800" dirty="0" err="1"/>
-              <a:t>longer</a:t>
-            </a:r>
-            <a:r>
-              <a:rPr lang="de-DE" sz="1800" dirty="0"/>
-              <a:t> </a:t>
-            </a:r>
-            <a:r>
-              <a:rPr lang="de-DE" sz="1800" dirty="0" err="1"/>
-              <a:t>training</a:t>
-            </a:r>
-            <a:r>
-              <a:rPr lang="de-DE" sz="1800" dirty="0"/>
-              <a:t>, larger </a:t>
-            </a:r>
-            <a:r>
-              <a:rPr lang="de-DE" sz="1800" dirty="0" err="1"/>
-              <a:t>batches</a:t>
-            </a:r>
-            <a:r>
-              <a:rPr lang="de-DE" sz="1800" dirty="0"/>
-              <a:t>, </a:t>
-            </a:r>
-            <a:r>
-              <a:rPr lang="de-DE" sz="1800" dirty="0" err="1"/>
-              <a:t>longer</a:t>
-            </a:r>
-            <a:r>
-              <a:rPr lang="de-DE" sz="1800" dirty="0"/>
-              <a:t> </a:t>
-            </a:r>
-            <a:r>
-              <a:rPr lang="de-DE" sz="1800" dirty="0" err="1"/>
-              <a:t>sequences</a:t>
-            </a:r>
-            <a:endParaRPr lang="de-DE" sz="1800" dirty="0"/>
-          </a:p>
-          <a:p>
-            <a:r>
-              <a:rPr lang="de-DE" sz="1800" dirty="0" err="1"/>
-              <a:t>dynamic</a:t>
-            </a:r>
-            <a:r>
-              <a:rPr lang="de-DE" sz="1800" dirty="0"/>
-              <a:t> </a:t>
-            </a:r>
-            <a:r>
-              <a:rPr lang="de-DE" sz="1800" dirty="0" err="1"/>
-              <a:t>masking</a:t>
-            </a:r>
-            <a:r>
-              <a:rPr lang="de-DE" sz="1800" dirty="0"/>
-              <a:t>: </a:t>
-            </a:r>
-            <a:r>
-              <a:rPr lang="de-DE" sz="1800" dirty="0" err="1"/>
-              <a:t>instead</a:t>
-            </a:r>
-            <a:r>
-              <a:rPr lang="de-DE" sz="1800" dirty="0"/>
-              <a:t> </a:t>
-            </a:r>
-            <a:r>
-              <a:rPr lang="de-DE" sz="1800" dirty="0" err="1"/>
-              <a:t>of</a:t>
-            </a:r>
-            <a:r>
-              <a:rPr lang="de-DE" sz="1800" dirty="0"/>
-              <a:t> </a:t>
-            </a:r>
-            <a:r>
-              <a:rPr lang="de-DE" sz="1800" dirty="0" err="1"/>
-              <a:t>fixed</a:t>
-            </a:r>
-            <a:r>
-              <a:rPr lang="de-DE" sz="1800" dirty="0"/>
-              <a:t> </a:t>
-            </a:r>
-            <a:r>
-              <a:rPr lang="de-DE" sz="1800" dirty="0" err="1"/>
-              <a:t>masked</a:t>
-            </a:r>
-            <a:r>
-              <a:rPr lang="de-DE" sz="1800" dirty="0"/>
-              <a:t> </a:t>
-            </a:r>
-            <a:r>
-              <a:rPr lang="de-DE" sz="1800" dirty="0" err="1"/>
-              <a:t>tokens</a:t>
-            </a:r>
-            <a:r>
-              <a:rPr lang="de-DE" sz="1800" dirty="0"/>
-              <a:t> </a:t>
-            </a:r>
-            <a:r>
-              <a:rPr lang="de-DE" sz="1800" dirty="0" err="1"/>
-              <a:t>for</a:t>
-            </a:r>
-            <a:r>
-              <a:rPr lang="de-DE" sz="1800" dirty="0"/>
-              <a:t> </a:t>
-            </a:r>
-            <a:r>
-              <a:rPr lang="de-DE" sz="1800" dirty="0" err="1"/>
-              <a:t>each</a:t>
-            </a:r>
-            <a:r>
-              <a:rPr lang="de-DE" sz="1800" dirty="0"/>
-              <a:t> </a:t>
-            </a:r>
-            <a:r>
-              <a:rPr lang="de-DE" sz="1800" dirty="0" err="1"/>
-              <a:t>sequence</a:t>
-            </a:r>
-            <a:r>
-              <a:rPr lang="de-DE" sz="1800" dirty="0"/>
-              <a:t>, </a:t>
-            </a:r>
-            <a:r>
-              <a:rPr lang="de-DE" sz="1800" dirty="0" err="1"/>
-              <a:t>masks</a:t>
-            </a:r>
-            <a:r>
-              <a:rPr lang="de-DE" sz="1800" dirty="0"/>
-              <a:t> </a:t>
-            </a:r>
-            <a:r>
-              <a:rPr lang="de-DE" sz="1800" dirty="0" err="1"/>
-              <a:t>change</a:t>
-            </a:r>
-            <a:r>
-              <a:rPr lang="de-DE" sz="1800" dirty="0"/>
-              <a:t> </a:t>
-            </a:r>
-            <a:r>
-              <a:rPr lang="de-DE" sz="1800" dirty="0" err="1"/>
-              <a:t>each</a:t>
-            </a:r>
-            <a:r>
-              <a:rPr lang="de-DE" sz="1800" dirty="0"/>
-              <a:t> </a:t>
-            </a:r>
-            <a:r>
-              <a:rPr lang="de-DE" sz="1800" dirty="0" err="1"/>
-              <a:t>epoch</a:t>
-            </a:r>
-            <a:endParaRPr lang="de-DE" sz="1800" dirty="0"/>
+              <a:rPr lang="en-GB" dirty="0"/>
+              <a:t>but uses a combination (average pooling or [CLS] token) of the hidden states of every token for projection to vector of logits</a:t>
+            </a:r>
           </a:p>
           <a:p>
             <a:pPr marL="0" indent="0">
               <a:buNone/>
             </a:pPr>
-            <a:endParaRPr lang="de-DE" sz="2400" dirty="0"/>
+            <a:endParaRPr lang="de-DE" dirty="0">
+              <a:hlinkClick r:id="rId2"/>
+            </a:endParaRPr>
           </a:p>
           <a:p>
             <a:pPr marL="0" indent="0">
               <a:buNone/>
             </a:pPr>
             <a:r>
-              <a:rPr lang="de-DE" sz="2400" dirty="0" err="1">
-                <a:hlinkClick r:id="rId3"/>
+              <a:rPr lang="en-DE">
+                <a:hlinkClick r:id="rId2"/>
               </a:rPr>
-              <a:t>DistilBERT</a:t>
-            </a:r>
-            <a:r>
-              <a:rPr lang="de-DE" sz="2400" dirty="0"/>
-              <a:t>: </a:t>
-            </a:r>
-            <a:r>
-              <a:rPr lang="de-DE" sz="2400" dirty="0" err="1"/>
-              <a:t>much</a:t>
-            </a:r>
-            <a:r>
-              <a:rPr lang="de-DE" sz="2400" dirty="0"/>
-              <a:t> </a:t>
-            </a:r>
-            <a:r>
-              <a:rPr lang="de-DE" sz="2400" dirty="0" err="1"/>
-              <a:t>lighter</a:t>
-            </a:r>
-            <a:r>
-              <a:rPr lang="de-DE" sz="2400" dirty="0"/>
-              <a:t> and </a:t>
-            </a:r>
-            <a:r>
-              <a:rPr lang="de-DE" sz="2400" dirty="0" err="1"/>
-              <a:t>faster</a:t>
-            </a:r>
-            <a:r>
-              <a:rPr lang="de-DE" sz="2400" dirty="0"/>
+              <a:t>BERT</a:t>
+            </a:r>
+            <a:r>
+              <a:rPr lang="de-DE" dirty="0"/>
+              <a:t> (</a:t>
+            </a:r>
+            <a:r>
+              <a:rPr lang="de-DE" dirty="0" err="1"/>
+              <a:t>uses</a:t>
+            </a:r>
+            <a:r>
+              <a:rPr lang="de-DE" dirty="0"/>
+              <a:t> </a:t>
+            </a:r>
+            <a:r>
+              <a:rPr lang="en-GB" dirty="0"/>
+              <a:t>next-sentence prediction as additional pretraining objective</a:t>
+            </a:r>
+            <a:r>
+              <a:rPr lang="de-DE" dirty="0"/>
+              <a:t>)</a:t>
+            </a:r>
+          </a:p>
+          <a:p>
+            <a:pPr marL="0" indent="0">
+              <a:buNone/>
+            </a:pPr>
+            <a:endParaRPr lang="de-DE" dirty="0"/>
+          </a:p>
+          <a:p>
+            <a:r>
+              <a:rPr lang="de-DE" dirty="0" err="1"/>
+              <a:t>For</a:t>
+            </a:r>
+            <a:r>
+              <a:rPr lang="de-DE" dirty="0"/>
+              <a:t> </a:t>
+            </a:r>
+            <a:r>
+              <a:rPr lang="de-DE" dirty="0" err="1"/>
+              <a:t>each</a:t>
+            </a:r>
+            <a:r>
+              <a:rPr lang="de-DE" dirty="0"/>
+              <a:t> </a:t>
+            </a:r>
+            <a:r>
+              <a:rPr lang="de-DE" dirty="0" err="1"/>
+              <a:t>token</a:t>
+            </a:r>
+            <a:r>
+              <a:rPr lang="de-DE" dirty="0"/>
+              <a:t> </a:t>
+            </a:r>
+            <a:r>
+              <a:rPr lang="de-DE" dirty="0" err="1"/>
+              <a:t>selected</a:t>
+            </a:r>
+            <a:r>
+              <a:rPr lang="de-DE" dirty="0"/>
+              <a:t> </a:t>
+            </a:r>
+            <a:r>
+              <a:rPr lang="de-DE" dirty="0" err="1"/>
+              <a:t>for</a:t>
+            </a:r>
+            <a:r>
+              <a:rPr lang="de-DE" dirty="0"/>
+              <a:t> </a:t>
+            </a:r>
+            <a:r>
+              <a:rPr lang="de-DE" dirty="0" err="1"/>
+              <a:t>masking</a:t>
+            </a:r>
+            <a:r>
+              <a:rPr lang="de-DE" dirty="0"/>
+              <a:t> (15% </a:t>
+            </a:r>
+            <a:r>
+              <a:rPr lang="de-DE" dirty="0" err="1"/>
+              <a:t>of</a:t>
+            </a:r>
+            <a:r>
+              <a:rPr lang="de-DE" dirty="0"/>
+              <a:t> all </a:t>
+            </a:r>
+            <a:r>
+              <a:rPr lang="de-DE" dirty="0" err="1"/>
+              <a:t>tokens</a:t>
+            </a:r>
+            <a:r>
+              <a:rPr lang="de-DE" dirty="0"/>
+              <a:t>):</a:t>
+            </a:r>
+          </a:p>
+          <a:p>
+            <a:r>
+              <a:rPr lang="de-DE" b="1" dirty="0"/>
+              <a:t>80% </a:t>
+            </a:r>
+            <a:r>
+              <a:rPr lang="de-DE" b="1" dirty="0" err="1"/>
+              <a:t>of</a:t>
+            </a:r>
+            <a:r>
+              <a:rPr lang="de-DE" b="1" dirty="0"/>
+              <a:t> </a:t>
+            </a:r>
+            <a:r>
+              <a:rPr lang="de-DE" b="1" dirty="0" err="1"/>
+              <a:t>the</a:t>
+            </a:r>
+            <a:r>
+              <a:rPr lang="de-DE" b="1" dirty="0"/>
+              <a:t> time</a:t>
+            </a:r>
+            <a:r>
+              <a:rPr lang="de-DE" dirty="0"/>
+              <a:t> → </a:t>
+            </a:r>
+            <a:r>
+              <a:rPr lang="de-DE" dirty="0" err="1"/>
+              <a:t>Replace</a:t>
+            </a:r>
+            <a:r>
+              <a:rPr lang="de-DE" dirty="0"/>
+              <a:t> </a:t>
+            </a:r>
+            <a:r>
+              <a:rPr lang="de-DE" dirty="0" err="1"/>
+              <a:t>it</a:t>
+            </a:r>
+            <a:r>
+              <a:rPr lang="de-DE" dirty="0"/>
+              <a:t> </a:t>
+            </a:r>
+            <a:r>
+              <a:rPr lang="de-DE" dirty="0" err="1"/>
+              <a:t>with</a:t>
+            </a:r>
+            <a:r>
+              <a:rPr lang="de-DE" dirty="0"/>
+              <a:t> [MASK].</a:t>
+            </a:r>
+          </a:p>
+          <a:p>
+            <a:r>
+              <a:rPr lang="de-DE" dirty="0" err="1"/>
+              <a:t>Example</a:t>
+            </a:r>
+            <a:r>
+              <a:rPr lang="de-DE" dirty="0"/>
+              <a:t>: "</a:t>
+            </a:r>
+            <a:r>
+              <a:rPr lang="de-DE" dirty="0" err="1"/>
+              <a:t>the</a:t>
+            </a:r>
+            <a:r>
+              <a:rPr lang="de-DE" dirty="0"/>
+              <a:t> </a:t>
+            </a:r>
+            <a:r>
+              <a:rPr lang="de-DE" dirty="0" err="1"/>
+              <a:t>cat</a:t>
+            </a:r>
+            <a:r>
+              <a:rPr lang="de-DE" dirty="0"/>
+              <a:t> </a:t>
+            </a:r>
+            <a:r>
+              <a:rPr lang="de-DE" dirty="0" err="1"/>
+              <a:t>sat</a:t>
+            </a:r>
+            <a:r>
+              <a:rPr lang="de-DE" dirty="0"/>
+              <a:t>" → "</a:t>
+            </a:r>
+            <a:r>
+              <a:rPr lang="de-DE" dirty="0" err="1"/>
+              <a:t>the</a:t>
+            </a:r>
+            <a:r>
+              <a:rPr lang="de-DE" dirty="0"/>
+              <a:t> [MASK] </a:t>
+            </a:r>
+            <a:r>
+              <a:rPr lang="de-DE" dirty="0" err="1"/>
+              <a:t>sat</a:t>
+            </a:r>
+            <a:r>
+              <a:rPr lang="de-DE" dirty="0"/>
+              <a:t>".</a:t>
+            </a:r>
+          </a:p>
+          <a:p>
+            <a:r>
+              <a:rPr lang="de-DE" dirty="0"/>
+              <a:t>The </a:t>
+            </a:r>
+            <a:r>
+              <a:rPr lang="de-DE" dirty="0" err="1"/>
+              <a:t>embedding</a:t>
+            </a:r>
+            <a:r>
+              <a:rPr lang="de-DE" dirty="0"/>
+              <a:t> </a:t>
+            </a:r>
+            <a:r>
+              <a:rPr lang="de-DE" dirty="0" err="1"/>
+              <a:t>is</a:t>
+            </a:r>
+            <a:r>
+              <a:rPr lang="de-DE" dirty="0"/>
+              <a:t> </a:t>
+            </a:r>
+            <a:r>
+              <a:rPr lang="de-DE" dirty="0" err="1"/>
+              <a:t>the</a:t>
+            </a:r>
+            <a:r>
+              <a:rPr lang="de-DE" dirty="0"/>
+              <a:t> </a:t>
+            </a:r>
+            <a:r>
+              <a:rPr lang="de-DE" dirty="0" err="1"/>
+              <a:t>learned</a:t>
+            </a:r>
+            <a:r>
+              <a:rPr lang="de-DE" dirty="0"/>
+              <a:t> </a:t>
+            </a:r>
+            <a:r>
+              <a:rPr lang="de-DE" dirty="0" err="1"/>
+              <a:t>embedding</a:t>
+            </a:r>
+            <a:r>
+              <a:rPr lang="de-DE" dirty="0"/>
+              <a:t> </a:t>
+            </a:r>
+            <a:r>
+              <a:rPr lang="de-DE" dirty="0" err="1"/>
+              <a:t>vector</a:t>
+            </a:r>
+            <a:r>
+              <a:rPr lang="de-DE" dirty="0"/>
+              <a:t> </a:t>
+            </a:r>
+            <a:r>
+              <a:rPr lang="de-DE" dirty="0" err="1"/>
+              <a:t>for</a:t>
+            </a:r>
+            <a:r>
+              <a:rPr lang="de-DE" dirty="0"/>
+              <a:t> </a:t>
+            </a:r>
+            <a:r>
+              <a:rPr lang="de-DE" dirty="0" err="1"/>
+              <a:t>the</a:t>
+            </a:r>
+            <a:r>
+              <a:rPr lang="de-DE" dirty="0"/>
+              <a:t> [MASK] </a:t>
+            </a:r>
+            <a:r>
+              <a:rPr lang="de-DE" dirty="0" err="1"/>
+              <a:t>token</a:t>
+            </a:r>
+            <a:r>
+              <a:rPr lang="de-DE" dirty="0"/>
+              <a:t> (just like </a:t>
+            </a:r>
+            <a:r>
+              <a:rPr lang="de-DE" dirty="0" err="1"/>
+              <a:t>any</a:t>
+            </a:r>
+            <a:r>
+              <a:rPr lang="de-DE" dirty="0"/>
+              <a:t> </a:t>
+            </a:r>
+            <a:r>
+              <a:rPr lang="de-DE" dirty="0" err="1"/>
+              <a:t>other</a:t>
+            </a:r>
+            <a:r>
+              <a:rPr lang="de-DE" dirty="0"/>
+              <a:t> </a:t>
+            </a:r>
+            <a:r>
+              <a:rPr lang="de-DE" dirty="0" err="1"/>
+              <a:t>token</a:t>
+            </a:r>
+            <a:r>
+              <a:rPr lang="de-DE" dirty="0"/>
+              <a:t>).</a:t>
+            </a:r>
+          </a:p>
+          <a:p>
+            <a:r>
+              <a:rPr lang="de-DE" b="1" dirty="0"/>
+              <a:t>10% </a:t>
+            </a:r>
+            <a:r>
+              <a:rPr lang="de-DE" b="1" dirty="0" err="1"/>
+              <a:t>of</a:t>
+            </a:r>
+            <a:r>
+              <a:rPr lang="de-DE" b="1" dirty="0"/>
+              <a:t> </a:t>
+            </a:r>
+            <a:r>
+              <a:rPr lang="de-DE" b="1" dirty="0" err="1"/>
+              <a:t>the</a:t>
+            </a:r>
+            <a:r>
+              <a:rPr lang="de-DE" b="1" dirty="0"/>
+              <a:t> time</a:t>
+            </a:r>
+            <a:r>
+              <a:rPr lang="de-DE" dirty="0"/>
+              <a:t> → </a:t>
+            </a:r>
+            <a:r>
+              <a:rPr lang="de-DE" dirty="0" err="1"/>
+              <a:t>Replace</a:t>
+            </a:r>
+            <a:r>
+              <a:rPr lang="de-DE" dirty="0"/>
+              <a:t> </a:t>
+            </a:r>
+            <a:r>
+              <a:rPr lang="de-DE" dirty="0" err="1"/>
+              <a:t>it</a:t>
+            </a:r>
+            <a:r>
+              <a:rPr lang="de-DE" dirty="0"/>
+              <a:t> </a:t>
+            </a:r>
+            <a:r>
+              <a:rPr lang="de-DE" dirty="0" err="1"/>
+              <a:t>with</a:t>
+            </a:r>
+            <a:r>
+              <a:rPr lang="de-DE" dirty="0"/>
+              <a:t> a </a:t>
+            </a:r>
+            <a:r>
+              <a:rPr lang="de-DE" b="1" dirty="0" err="1"/>
+              <a:t>random</a:t>
+            </a:r>
+            <a:r>
+              <a:rPr lang="de-DE" b="1" dirty="0"/>
+              <a:t> </a:t>
+            </a:r>
+            <a:r>
+              <a:rPr lang="de-DE" b="1" dirty="0" err="1"/>
+              <a:t>token</a:t>
+            </a:r>
+            <a:r>
+              <a:rPr lang="de-DE" dirty="0"/>
+              <a:t> </a:t>
+            </a:r>
+            <a:r>
+              <a:rPr lang="de-DE" dirty="0" err="1"/>
+              <a:t>from</a:t>
+            </a:r>
+            <a:r>
+              <a:rPr lang="de-DE" dirty="0"/>
+              <a:t> </a:t>
+            </a:r>
+            <a:r>
+              <a:rPr lang="de-DE" dirty="0" err="1"/>
+              <a:t>the</a:t>
+            </a:r>
+            <a:r>
+              <a:rPr lang="de-DE" dirty="0"/>
+              <a:t> </a:t>
+            </a:r>
+            <a:r>
+              <a:rPr lang="de-DE" dirty="0" err="1"/>
+              <a:t>vocabulary</a:t>
+            </a:r>
+            <a:r>
+              <a:rPr lang="de-DE" dirty="0"/>
+              <a:t>.</a:t>
+            </a:r>
+          </a:p>
+          <a:p>
+            <a:r>
+              <a:rPr lang="de-DE" dirty="0" err="1"/>
+              <a:t>Prevents</a:t>
+            </a:r>
+            <a:r>
+              <a:rPr lang="de-DE" dirty="0"/>
+              <a:t> </a:t>
+            </a:r>
+            <a:r>
+              <a:rPr lang="de-DE" dirty="0" err="1"/>
+              <a:t>the</a:t>
+            </a:r>
+            <a:r>
+              <a:rPr lang="de-DE" dirty="0"/>
+              <a:t> </a:t>
+            </a:r>
+            <a:r>
+              <a:rPr lang="de-DE" dirty="0" err="1"/>
+              <a:t>model</a:t>
+            </a:r>
+            <a:r>
+              <a:rPr lang="de-DE" dirty="0"/>
+              <a:t> </a:t>
+            </a:r>
+            <a:r>
+              <a:rPr lang="de-DE" dirty="0" err="1"/>
+              <a:t>from</a:t>
+            </a:r>
+            <a:r>
+              <a:rPr lang="de-DE" dirty="0"/>
+              <a:t> </a:t>
+            </a:r>
+            <a:r>
+              <a:rPr lang="de-DE" dirty="0" err="1"/>
+              <a:t>overfitting</a:t>
+            </a:r>
+            <a:r>
+              <a:rPr lang="de-DE" dirty="0"/>
+              <a:t> </a:t>
+            </a:r>
+            <a:r>
+              <a:rPr lang="de-DE" dirty="0" err="1"/>
+              <a:t>to</a:t>
+            </a:r>
+            <a:r>
+              <a:rPr lang="de-DE" dirty="0"/>
+              <a:t> </a:t>
+            </a:r>
+            <a:r>
+              <a:rPr lang="de-DE" dirty="0" err="1"/>
+              <a:t>always</a:t>
+            </a:r>
+            <a:r>
+              <a:rPr lang="de-DE" dirty="0"/>
+              <a:t> </a:t>
+            </a:r>
+            <a:r>
+              <a:rPr lang="de-DE" dirty="0" err="1"/>
+              <a:t>associating</a:t>
+            </a:r>
+            <a:r>
+              <a:rPr lang="de-DE" dirty="0"/>
+              <a:t> [MASK] </a:t>
+            </a:r>
+            <a:r>
+              <a:rPr lang="de-DE" dirty="0" err="1"/>
+              <a:t>with</a:t>
+            </a:r>
+            <a:r>
+              <a:rPr lang="de-DE" dirty="0"/>
+              <a:t> </a:t>
+            </a:r>
+            <a:r>
+              <a:rPr lang="de-DE" dirty="0" err="1"/>
+              <a:t>prediction</a:t>
+            </a:r>
+            <a:r>
+              <a:rPr lang="de-DE" dirty="0"/>
+              <a:t>.</a:t>
+            </a:r>
+          </a:p>
+          <a:p>
+            <a:r>
+              <a:rPr lang="de-DE" b="1" dirty="0"/>
+              <a:t>10% </a:t>
+            </a:r>
+            <a:r>
+              <a:rPr lang="de-DE" b="1" dirty="0" err="1"/>
+              <a:t>of</a:t>
+            </a:r>
+            <a:r>
+              <a:rPr lang="de-DE" b="1" dirty="0"/>
+              <a:t> </a:t>
+            </a:r>
+            <a:r>
+              <a:rPr lang="de-DE" b="1" dirty="0" err="1"/>
+              <a:t>the</a:t>
+            </a:r>
+            <a:r>
+              <a:rPr lang="de-DE" b="1" dirty="0"/>
+              <a:t> time</a:t>
+            </a:r>
+            <a:r>
+              <a:rPr lang="de-DE" dirty="0"/>
+              <a:t> → </a:t>
+            </a:r>
+            <a:r>
+              <a:rPr lang="de-DE" dirty="0" err="1"/>
+              <a:t>Leave</a:t>
+            </a:r>
+            <a:r>
+              <a:rPr lang="de-DE" dirty="0"/>
+              <a:t> </a:t>
+            </a:r>
+            <a:r>
+              <a:rPr lang="de-DE" dirty="0" err="1"/>
+              <a:t>it</a:t>
+            </a:r>
+            <a:r>
+              <a:rPr lang="de-DE" dirty="0"/>
+              <a:t> </a:t>
+            </a:r>
+            <a:r>
+              <a:rPr lang="de-DE" b="1" dirty="0" err="1"/>
+              <a:t>unchanged</a:t>
+            </a:r>
+            <a:r>
+              <a:rPr lang="de-DE" dirty="0"/>
+              <a:t>.</a:t>
+            </a:r>
+          </a:p>
+          <a:p>
+            <a:r>
+              <a:rPr lang="de-DE" dirty="0"/>
+              <a:t>Forces </a:t>
+            </a:r>
+            <a:r>
+              <a:rPr lang="de-DE" dirty="0" err="1"/>
+              <a:t>the</a:t>
+            </a:r>
+            <a:r>
+              <a:rPr lang="de-DE" dirty="0"/>
+              <a:t> </a:t>
+            </a:r>
+            <a:r>
+              <a:rPr lang="de-DE" dirty="0" err="1"/>
+              <a:t>model</a:t>
+            </a:r>
+            <a:r>
+              <a:rPr lang="de-DE" dirty="0"/>
+              <a:t> </a:t>
+            </a:r>
+            <a:r>
+              <a:rPr lang="de-DE" dirty="0" err="1"/>
+              <a:t>to</a:t>
+            </a:r>
+            <a:r>
+              <a:rPr lang="de-DE" dirty="0"/>
+              <a:t> </a:t>
+            </a:r>
+            <a:r>
+              <a:rPr lang="de-DE" dirty="0" err="1"/>
+              <a:t>sometimes</a:t>
+            </a:r>
+            <a:r>
+              <a:rPr lang="de-DE" dirty="0"/>
+              <a:t> </a:t>
+            </a:r>
+            <a:r>
+              <a:rPr lang="de-DE" dirty="0" err="1"/>
+              <a:t>predict</a:t>
+            </a:r>
+            <a:r>
+              <a:rPr lang="de-DE" dirty="0"/>
+              <a:t> </a:t>
+            </a:r>
+            <a:r>
+              <a:rPr lang="de-DE" dirty="0" err="1"/>
+              <a:t>without</a:t>
+            </a:r>
+            <a:r>
+              <a:rPr lang="de-DE" dirty="0"/>
+              <a:t> </a:t>
+            </a:r>
+            <a:r>
+              <a:rPr lang="de-DE" dirty="0" err="1"/>
+              <a:t>seeing</a:t>
+            </a:r>
+            <a:r>
+              <a:rPr lang="de-DE" dirty="0"/>
+              <a:t> an explicit [MASK].</a:t>
+            </a:r>
+          </a:p>
+          <a:p>
+            <a:pPr marL="0" indent="0">
+              <a:buNone/>
+            </a:pPr>
+            <a:br>
+              <a:rPr lang="de-DE" dirty="0"/>
+            </a:br>
+            <a:r>
+              <a:rPr lang="de-DE" dirty="0" err="1"/>
+              <a:t>Regardless</a:t>
+            </a:r>
+            <a:r>
+              <a:rPr lang="de-DE" dirty="0"/>
+              <a:t> </a:t>
+            </a:r>
+            <a:r>
+              <a:rPr lang="de-DE" dirty="0" err="1"/>
+              <a:t>of</a:t>
+            </a:r>
+            <a:r>
+              <a:rPr lang="de-DE" dirty="0"/>
+              <a:t> </a:t>
+            </a:r>
+            <a:r>
+              <a:rPr lang="de-DE" dirty="0" err="1"/>
+              <a:t>which</a:t>
+            </a:r>
+            <a:r>
+              <a:rPr lang="de-DE" dirty="0"/>
+              <a:t> </a:t>
+            </a:r>
+            <a:r>
+              <a:rPr lang="de-DE" dirty="0" err="1"/>
+              <a:t>replacement</a:t>
+            </a:r>
+            <a:r>
+              <a:rPr lang="de-DE" dirty="0"/>
+              <a:t> </a:t>
+            </a:r>
+            <a:r>
+              <a:rPr lang="de-DE" dirty="0" err="1"/>
+              <a:t>is</a:t>
+            </a:r>
+            <a:r>
+              <a:rPr lang="de-DE" dirty="0"/>
+              <a:t> </a:t>
+            </a:r>
+            <a:r>
+              <a:rPr lang="de-DE" dirty="0" err="1"/>
+              <a:t>used</a:t>
+            </a:r>
+            <a:r>
+              <a:rPr lang="de-DE" dirty="0"/>
               <a:t>, </a:t>
             </a:r>
             <a:r>
-              <a:rPr lang="de-DE" sz="2400" dirty="0" err="1"/>
-              <a:t>retaining</a:t>
-            </a:r>
-            <a:r>
-              <a:rPr lang="de-DE" sz="2400" dirty="0"/>
-              <a:t> ~95% </a:t>
-            </a:r>
-            <a:r>
-              <a:rPr lang="de-DE" sz="2400" dirty="0" err="1"/>
-              <a:t>of</a:t>
-            </a:r>
-            <a:r>
-              <a:rPr lang="de-DE" sz="2400" dirty="0"/>
-              <a:t> </a:t>
-            </a:r>
-            <a:r>
-              <a:rPr lang="de-DE" sz="2400" dirty="0" err="1"/>
-              <a:t>BERT’s</a:t>
-            </a:r>
-            <a:r>
-              <a:rPr lang="de-DE" sz="2400" dirty="0"/>
-              <a:t> </a:t>
-            </a:r>
-            <a:r>
-              <a:rPr lang="de-DE" sz="2400" dirty="0" err="1"/>
-              <a:t>performance</a:t>
-            </a:r>
-            <a:endParaRPr lang="de-DE" sz="2400" dirty="0"/>
-          </a:p>
-          <a:p>
-            <a:r>
-              <a:rPr lang="de-DE" sz="1800" dirty="0"/>
-              <a:t>a </a:t>
-            </a:r>
-            <a:r>
-              <a:rPr lang="de-DE" sz="1800" dirty="0" err="1"/>
-              <a:t>smaller</a:t>
-            </a:r>
-            <a:r>
-              <a:rPr lang="de-DE" sz="1800" dirty="0"/>
-              <a:t> “</a:t>
-            </a:r>
-            <a:r>
-              <a:rPr lang="de-DE" sz="1800" dirty="0" err="1"/>
-              <a:t>student</a:t>
-            </a:r>
-            <a:r>
-              <a:rPr lang="de-DE" sz="1800" dirty="0"/>
-              <a:t>” </a:t>
-            </a:r>
-            <a:r>
-              <a:rPr lang="de-DE" sz="1800" dirty="0" err="1"/>
-              <a:t>model</a:t>
-            </a:r>
-            <a:r>
-              <a:rPr lang="de-DE" sz="1800" dirty="0"/>
-              <a:t> </a:t>
-            </a:r>
-            <a:r>
-              <a:rPr lang="de-DE" sz="1800" dirty="0" err="1"/>
+              <a:rPr lang="de-DE" dirty="0" err="1"/>
+              <a:t>the</a:t>
+            </a:r>
+            <a:r>
+              <a:rPr lang="de-DE" dirty="0"/>
+              <a:t> </a:t>
+            </a:r>
+            <a:r>
+              <a:rPr lang="de-DE" b="1" dirty="0" err="1"/>
+              <a:t>loss</a:t>
+            </a:r>
+            <a:r>
+              <a:rPr lang="de-DE" b="1" dirty="0"/>
+              <a:t> </a:t>
+            </a:r>
+            <a:r>
+              <a:rPr lang="de-DE" b="1" dirty="0" err="1"/>
               <a:t>is</a:t>
             </a:r>
             <a:r>
-              <a:rPr lang="de-DE" sz="1800" dirty="0"/>
-              <a:t> </a:t>
-            </a:r>
-            <a:r>
-              <a:rPr lang="de-DE" sz="1800" dirty="0" err="1"/>
-              <a:t>trained</a:t>
-            </a:r>
-            <a:r>
-              <a:rPr lang="de-DE" sz="1800" dirty="0"/>
-              <a:t> </a:t>
-            </a:r>
-            <a:r>
-              <a:rPr lang="de-DE" sz="1800" dirty="0" err="1"/>
-              <a:t>to</a:t>
-            </a:r>
-            <a:r>
-              <a:rPr lang="de-DE" sz="1800" dirty="0"/>
-              <a:t> </a:t>
-            </a:r>
-            <a:r>
-              <a:rPr lang="de-DE" sz="1800" dirty="0" err="1"/>
-              <a:t>mimic</a:t>
-            </a:r>
-            <a:r>
-              <a:rPr lang="de-DE" sz="1800" dirty="0"/>
-              <a:t> </a:t>
-            </a:r>
-            <a:r>
-              <a:rPr lang="de-DE" sz="1800" dirty="0" err="1"/>
-              <a:t>BERT’s</a:t>
-            </a:r>
-            <a:r>
-              <a:rPr lang="de-DE" sz="1800" dirty="0"/>
-              <a:t> </a:t>
-            </a:r>
-            <a:r>
-              <a:rPr lang="de-DE" sz="1800" dirty="0" err="1"/>
-              <a:t>predictions</a:t>
-            </a:r>
-            <a:endParaRPr lang="de-DE" sz="1800" dirty="0"/>
-          </a:p>
-          <a:p>
-            <a:r>
-              <a:rPr lang="de-DE" sz="1800" dirty="0"/>
-              <a:t>40% </a:t>
-            </a:r>
-            <a:r>
-              <a:rPr lang="de-DE" sz="1800" dirty="0" err="1"/>
-              <a:t>fewer</a:t>
-            </a:r>
-            <a:r>
-              <a:rPr lang="de-DE" sz="1800" dirty="0"/>
-              <a:t> </a:t>
-            </a:r>
-            <a:r>
-              <a:rPr lang="de-DE" sz="1800" dirty="0" err="1"/>
-              <a:t>parameters</a:t>
-            </a:r>
-            <a:r>
-              <a:rPr lang="de-DE" sz="1800" dirty="0"/>
-              <a:t> </a:t>
-            </a:r>
-            <a:r>
-              <a:rPr lang="de-DE" sz="1800" dirty="0" err="1"/>
-              <a:t>than</a:t>
-            </a:r>
-            <a:r>
-              <a:rPr lang="de-DE" sz="1800" dirty="0"/>
-              <a:t> BERT, 60% </a:t>
-            </a:r>
-            <a:r>
-              <a:rPr lang="de-DE" sz="1800" dirty="0" err="1"/>
-              <a:t>faster</a:t>
-            </a:r>
-            <a:r>
-              <a:rPr lang="de-DE" sz="1800" dirty="0"/>
-              <a:t> </a:t>
-            </a:r>
-            <a:r>
-              <a:rPr lang="de-DE" sz="1800" dirty="0" err="1"/>
-              <a:t>inference</a:t>
-            </a:r>
-            <a:r>
-              <a:rPr lang="de-DE" sz="1800" dirty="0"/>
-              <a:t>, </a:t>
-            </a:r>
-            <a:r>
-              <a:rPr lang="de-DE" sz="1800" dirty="0" err="1"/>
-              <a:t>using</a:t>
-            </a:r>
-            <a:r>
-              <a:rPr lang="de-DE" sz="1800" dirty="0"/>
-              <a:t> half </a:t>
-            </a:r>
-            <a:r>
-              <a:rPr lang="de-DE" sz="1800" dirty="0" err="1"/>
+              <a:rPr lang="de-DE" b="1" dirty="0"/>
+              <a:t> still </a:t>
+            </a:r>
+            <a:r>
+              <a:rPr lang="de-DE" b="1" dirty="0" err="1"/>
+              <a:t>computed</a:t>
+            </a:r>
+            <a:r>
+              <a:rPr lang="de-DE" b="1" dirty="0"/>
+              <a:t> </a:t>
+            </a:r>
+            <a:r>
+              <a:rPr lang="de-DE" b="1" dirty="0" err="1"/>
+              <a:t>against</a:t>
+            </a:r>
+            <a:r>
+              <a:rPr lang="de-DE" b="1" dirty="0"/>
+              <a:t> </a:t>
+            </a:r>
+            <a:r>
+              <a:rPr lang="de-DE" b="1" dirty="0" err="1"/>
               <a:t>the</a:t>
             </a:r>
             <a:r>
-              <a:rPr lang="de-DE" sz="1800" dirty="0"/>
-              <a:t> </a:t>
-            </a:r>
-            <a:r>
-              <a:rPr lang="de-DE" sz="1800" dirty="0" err="1"/>
-              <a:t>memory</a:t>
-            </a:r>
-            <a:endParaRPr lang="de-DE" sz="1800" dirty="0"/>
-          </a:p>
-          <a:p>
-            <a:r>
-              <a:rPr lang="de-DE" sz="1800" dirty="0"/>
-              <a:t>… also </a:t>
-            </a:r>
-            <a:r>
-              <a:rPr lang="de-DE" sz="1800" dirty="0" err="1"/>
-              <a:t>removed</a:t>
-            </a:r>
-            <a:r>
-              <a:rPr lang="de-DE" sz="1800" dirty="0"/>
-              <a:t> </a:t>
-            </a:r>
-            <a:r>
-              <a:rPr lang="de-DE" sz="1800" dirty="0" err="1"/>
-              <a:t>next</a:t>
-            </a:r>
-            <a:r>
-              <a:rPr lang="de-DE" sz="1800" dirty="0"/>
-              <a:t> </a:t>
-            </a:r>
-            <a:r>
-              <a:rPr lang="de-DE" sz="1800" dirty="0" err="1"/>
-              <a:t>sentence</a:t>
-            </a:r>
-            <a:r>
-              <a:rPr lang="de-DE" sz="1800" dirty="0"/>
-              <a:t> </a:t>
-            </a:r>
-            <a:r>
-              <a:rPr lang="de-DE" sz="1800" dirty="0" err="1"/>
-              <a:t>prediction</a:t>
-            </a:r>
-            <a:r>
-              <a:rPr lang="de-DE" sz="1800" dirty="0"/>
-              <a:t> </a:t>
-            </a:r>
-            <a:r>
-              <a:rPr lang="de-DE" sz="1800" dirty="0" err="1"/>
-              <a:t>as</a:t>
-            </a:r>
-            <a:r>
-              <a:rPr lang="de-DE" sz="1800" dirty="0"/>
-              <a:t> </a:t>
-            </a:r>
-            <a:r>
-              <a:rPr lang="de-DE" sz="1800" dirty="0" err="1"/>
-              <a:t>pretraining</a:t>
-            </a:r>
-            <a:r>
-              <a:rPr lang="de-DE" sz="1800" dirty="0"/>
-              <a:t> </a:t>
-            </a:r>
-            <a:r>
-              <a:rPr lang="de-DE" sz="1800" dirty="0" err="1"/>
-              <a:t>objective</a:t>
-            </a:r>
-            <a:r>
-              <a:rPr lang="de-DE" sz="1800" dirty="0"/>
-              <a:t> …</a:t>
+              <a:rPr lang="de-DE" b="1" dirty="0"/>
+              <a:t> original </a:t>
+            </a:r>
+            <a:r>
+              <a:rPr lang="de-DE" b="1" dirty="0" err="1"/>
+              <a:t>token</a:t>
+            </a:r>
+            <a:r>
+              <a:rPr lang="de-DE" dirty="0"/>
+              <a:t>.</a:t>
             </a:r>
           </a:p>
         </p:txBody>
@@ -7894,7 +8047,7 @@
           <p:cNvPr id="4" name="Foliennummernplatzhalter 3">
             <a:extLst>
               <a:ext uri="{FF2B5EF4-FFF2-40B4-BE49-F238E27FC236}">
-                <a16:creationId xmlns:a16="http://schemas.microsoft.com/office/drawing/2014/main" id="{6C9E7DDC-F9E4-F124-BF7B-7A2E77B7C25C}"/>
+                <a16:creationId xmlns:a16="http://schemas.microsoft.com/office/drawing/2014/main" id="{98A71D12-1308-5AA4-28A9-50891017FA54}"/>
               </a:ext>
             </a:extLst>
           </p:cNvPr>
@@ -7910,18 +8063,18 @@
           <a:bodyPr/>
           <a:lstStyle/>
           <a:p>
-            <a:fld id="{3D4C94FE-FF23-4504-88E9-14D481113291}" type="slidenum">
-              <a:rPr lang="en-GB" smtClean="0"/>
+            <a:fld id="{4055531C-5681-6B44-B2CA-926D7A74B06D}" type="slidenum">
+              <a:rPr lang="de-DE" smtClean="0"/>
               <a:t>10</a:t>
             </a:fld>
-            <a:endParaRPr lang="en-GB"/>
+            <a:endParaRPr lang="de-DE"/>
           </a:p>
         </p:txBody>
       </p:sp>
     </p:spTree>
     <p:extLst>
       <p:ext uri="{BB962C8B-B14F-4D97-AF65-F5344CB8AC3E}">
-        <p14:creationId xmlns:p14="http://schemas.microsoft.com/office/powerpoint/2010/main" val="3675046636"/>
+        <p14:creationId xmlns:p14="http://schemas.microsoft.com/office/powerpoint/2010/main" val="209083973"/>
       </p:ext>
     </p:extLst>
   </p:cSld>
@@ -7953,7 +8106,7 @@
           <p:cNvPr id="2" name="Titel 1">
             <a:extLst>
               <a:ext uri="{FF2B5EF4-FFF2-40B4-BE49-F238E27FC236}">
-                <a16:creationId xmlns:a16="http://schemas.microsoft.com/office/drawing/2014/main" id="{F8835DB9-A493-0493-6DC6-1A59F1955546}"/>
+                <a16:creationId xmlns:a16="http://schemas.microsoft.com/office/drawing/2014/main" id="{47377014-5C9A-61F9-AEB0-5422FFC74E48}"/>
               </a:ext>
             </a:extLst>
           </p:cNvPr>
@@ -7971,8 +8124,13 @@
           <a:p>
             <a:r>
               <a:rPr lang="de-DE" dirty="0"/>
-              <a:t>Text Classification</a:t>
-            </a:r>
+              <a:t>BERT </a:t>
+            </a:r>
+            <a:r>
+              <a:rPr lang="de-DE" dirty="0" err="1"/>
+              <a:t>Variants</a:t>
+            </a:r>
+            <a:endParaRPr lang="de-DE" dirty="0"/>
           </a:p>
         </p:txBody>
       </p:sp>
@@ -7981,7 +8139,7 @@
           <p:cNvPr id="3" name="Inhaltsplatzhalter 2">
             <a:extLst>
               <a:ext uri="{FF2B5EF4-FFF2-40B4-BE49-F238E27FC236}">
-                <a16:creationId xmlns:a16="http://schemas.microsoft.com/office/drawing/2014/main" id="{C8B9C882-7432-CB1C-F348-C72E3D7ABCC1}"/>
+                <a16:creationId xmlns:a16="http://schemas.microsoft.com/office/drawing/2014/main" id="{E32E57AC-9AEC-A942-0A0F-644BB5F978B9}"/>
               </a:ext>
             </a:extLst>
           </p:cNvPr>
@@ -8003,31 +8161,558 @@
               <a:buNone/>
             </a:pPr>
             <a:r>
-              <a:rPr lang="de-DE" dirty="0"/>
-              <a:t>…</a:t>
-            </a:r>
+              <a:rPr lang="de-DE" sz="2400" dirty="0">
+                <a:hlinkClick r:id="rId2"/>
+              </a:rPr>
+              <a:t>RoBERTa</a:t>
+            </a:r>
+            <a:r>
+              <a:rPr lang="de-DE" sz="2400" b="1" dirty="0"/>
+              <a:t>: </a:t>
+            </a:r>
+            <a:r>
+              <a:rPr lang="de-DE" sz="2400" dirty="0" err="1"/>
+              <a:t>improved</a:t>
+            </a:r>
+            <a:r>
+              <a:rPr lang="de-DE" sz="2400" dirty="0"/>
+              <a:t> </a:t>
+            </a:r>
+            <a:r>
+              <a:rPr lang="de-DE" sz="2400" dirty="0" err="1"/>
+              <a:t>performance</a:t>
+            </a:r>
+            <a:endParaRPr lang="de-DE" sz="2400" dirty="0"/>
+          </a:p>
+          <a:p>
+            <a:r>
+              <a:rPr lang="de-DE" sz="1800" dirty="0" err="1"/>
+              <a:t>removed</a:t>
+            </a:r>
+            <a:r>
+              <a:rPr lang="de-DE" sz="1800" dirty="0"/>
+              <a:t> </a:t>
+            </a:r>
+            <a:r>
+              <a:rPr lang="de-DE" sz="1800" dirty="0" err="1"/>
+              <a:t>next</a:t>
+            </a:r>
+            <a:r>
+              <a:rPr lang="de-DE" sz="1800" dirty="0"/>
+              <a:t> </a:t>
+            </a:r>
+            <a:r>
+              <a:rPr lang="de-DE" sz="1800" dirty="0" err="1"/>
+              <a:t>sentence</a:t>
+            </a:r>
+            <a:r>
+              <a:rPr lang="de-DE" sz="1800" dirty="0"/>
+              <a:t> </a:t>
+            </a:r>
+            <a:r>
+              <a:rPr lang="de-DE" sz="1800" dirty="0" err="1"/>
+              <a:t>prediction</a:t>
+            </a:r>
+            <a:r>
+              <a:rPr lang="de-DE" sz="1800" dirty="0"/>
+              <a:t> </a:t>
+            </a:r>
+            <a:r>
+              <a:rPr lang="de-DE" sz="1800" dirty="0" err="1"/>
+              <a:t>as</a:t>
+            </a:r>
+            <a:r>
+              <a:rPr lang="de-DE" sz="1800" dirty="0"/>
+              <a:t> </a:t>
+            </a:r>
+            <a:r>
+              <a:rPr lang="de-DE" sz="1800" dirty="0" err="1"/>
+              <a:t>pretraining</a:t>
+            </a:r>
+            <a:r>
+              <a:rPr lang="de-DE" sz="1800" dirty="0"/>
+              <a:t> </a:t>
+            </a:r>
+            <a:r>
+              <a:rPr lang="de-DE" sz="1800" dirty="0" err="1"/>
+              <a:t>objective</a:t>
+            </a:r>
+            <a:r>
+              <a:rPr lang="de-DE" sz="1800" dirty="0"/>
+              <a:t> and …</a:t>
+            </a:r>
+          </a:p>
+          <a:p>
+            <a:r>
+              <a:rPr lang="de-DE" sz="1800" dirty="0"/>
+              <a:t>~</a:t>
+            </a:r>
+            <a:r>
+              <a:rPr lang="de-DE" sz="1800" dirty="0" err="1"/>
+              <a:t>ten</a:t>
+            </a:r>
+            <a:r>
+              <a:rPr lang="de-DE" sz="1800" dirty="0"/>
+              <a:t> </a:t>
+            </a:r>
+            <a:r>
+              <a:rPr lang="de-DE" sz="1800" dirty="0" err="1"/>
+              <a:t>times</a:t>
+            </a:r>
+            <a:r>
+              <a:rPr lang="de-DE" sz="1800" dirty="0"/>
+              <a:t> </a:t>
+            </a:r>
+            <a:r>
+              <a:rPr lang="de-DE" sz="1800" dirty="0" err="1"/>
+              <a:t>more</a:t>
+            </a:r>
+            <a:r>
+              <a:rPr lang="de-DE" sz="1800" dirty="0"/>
+              <a:t> </a:t>
+            </a:r>
+            <a:r>
+              <a:rPr lang="de-DE" sz="1800" dirty="0" err="1"/>
+              <a:t>training</a:t>
+            </a:r>
+            <a:r>
+              <a:rPr lang="de-DE" sz="1800" dirty="0"/>
+              <a:t> </a:t>
+            </a:r>
+            <a:r>
+              <a:rPr lang="de-DE" sz="1800" dirty="0" err="1"/>
+              <a:t>data</a:t>
+            </a:r>
+            <a:r>
+              <a:rPr lang="de-DE" sz="1800" dirty="0"/>
+              <a:t>, </a:t>
+            </a:r>
+            <a:r>
+              <a:rPr lang="de-DE" sz="1800" dirty="0" err="1"/>
+              <a:t>longer</a:t>
+            </a:r>
+            <a:r>
+              <a:rPr lang="de-DE" sz="1800" dirty="0"/>
+              <a:t> </a:t>
+            </a:r>
+            <a:r>
+              <a:rPr lang="de-DE" sz="1800" dirty="0" err="1"/>
+              <a:t>training</a:t>
+            </a:r>
+            <a:r>
+              <a:rPr lang="de-DE" sz="1800" dirty="0"/>
+              <a:t>, larger </a:t>
+            </a:r>
+            <a:r>
+              <a:rPr lang="de-DE" sz="1800" dirty="0" err="1"/>
+              <a:t>batches</a:t>
+            </a:r>
+            <a:r>
+              <a:rPr lang="de-DE" sz="1800" dirty="0"/>
+              <a:t>, </a:t>
+            </a:r>
+            <a:r>
+              <a:rPr lang="de-DE" sz="1800" dirty="0" err="1"/>
+              <a:t>longer</a:t>
+            </a:r>
+            <a:r>
+              <a:rPr lang="de-DE" sz="1800" dirty="0"/>
+              <a:t> </a:t>
+            </a:r>
+            <a:r>
+              <a:rPr lang="de-DE" sz="1800" dirty="0" err="1"/>
+              <a:t>sequences</a:t>
+            </a:r>
+            <a:endParaRPr lang="de-DE" sz="1800" dirty="0"/>
+          </a:p>
+          <a:p>
+            <a:r>
+              <a:rPr lang="de-DE" sz="1800" dirty="0" err="1"/>
+              <a:t>dynamic</a:t>
+            </a:r>
+            <a:r>
+              <a:rPr lang="de-DE" sz="1800" dirty="0"/>
+              <a:t> </a:t>
+            </a:r>
+            <a:r>
+              <a:rPr lang="de-DE" sz="1800" dirty="0" err="1"/>
+              <a:t>masking</a:t>
+            </a:r>
+            <a:r>
+              <a:rPr lang="de-DE" sz="1800" dirty="0"/>
+              <a:t>: </a:t>
+            </a:r>
+            <a:r>
+              <a:rPr lang="de-DE" sz="1800" dirty="0" err="1"/>
+              <a:t>instead</a:t>
+            </a:r>
+            <a:r>
+              <a:rPr lang="de-DE" sz="1800" dirty="0"/>
+              <a:t> </a:t>
+            </a:r>
+            <a:r>
+              <a:rPr lang="de-DE" sz="1800" dirty="0" err="1"/>
+              <a:t>of</a:t>
+            </a:r>
+            <a:r>
+              <a:rPr lang="de-DE" sz="1800" dirty="0"/>
+              <a:t> </a:t>
+            </a:r>
+            <a:r>
+              <a:rPr lang="de-DE" sz="1800" dirty="0" err="1"/>
+              <a:t>fixed</a:t>
+            </a:r>
+            <a:r>
+              <a:rPr lang="de-DE" sz="1800" dirty="0"/>
+              <a:t> </a:t>
+            </a:r>
+            <a:r>
+              <a:rPr lang="de-DE" sz="1800" dirty="0" err="1"/>
+              <a:t>masked</a:t>
+            </a:r>
+            <a:r>
+              <a:rPr lang="de-DE" sz="1800" dirty="0"/>
+              <a:t> </a:t>
+            </a:r>
+            <a:r>
+              <a:rPr lang="de-DE" sz="1800" dirty="0" err="1"/>
+              <a:t>tokens</a:t>
+            </a:r>
+            <a:r>
+              <a:rPr lang="de-DE" sz="1800" dirty="0"/>
+              <a:t> </a:t>
+            </a:r>
+            <a:r>
+              <a:rPr lang="de-DE" sz="1800" dirty="0" err="1"/>
+              <a:t>for</a:t>
+            </a:r>
+            <a:r>
+              <a:rPr lang="de-DE" sz="1800" dirty="0"/>
+              <a:t> </a:t>
+            </a:r>
+            <a:r>
+              <a:rPr lang="de-DE" sz="1800" dirty="0" err="1"/>
+              <a:t>each</a:t>
+            </a:r>
+            <a:r>
+              <a:rPr lang="de-DE" sz="1800" dirty="0"/>
+              <a:t> </a:t>
+            </a:r>
+            <a:r>
+              <a:rPr lang="de-DE" sz="1800" dirty="0" err="1"/>
+              <a:t>sequence</a:t>
+            </a:r>
+            <a:r>
+              <a:rPr lang="de-DE" sz="1800" dirty="0"/>
+              <a:t>, </a:t>
+            </a:r>
+            <a:r>
+              <a:rPr lang="de-DE" sz="1800" dirty="0" err="1"/>
+              <a:t>masks</a:t>
+            </a:r>
+            <a:r>
+              <a:rPr lang="de-DE" sz="1800" dirty="0"/>
+              <a:t> </a:t>
+            </a:r>
+            <a:r>
+              <a:rPr lang="de-DE" sz="1800" dirty="0" err="1"/>
+              <a:t>change</a:t>
+            </a:r>
+            <a:r>
+              <a:rPr lang="de-DE" sz="1800" dirty="0"/>
+              <a:t> </a:t>
+            </a:r>
+            <a:r>
+              <a:rPr lang="de-DE" sz="1800" dirty="0" err="1"/>
+              <a:t>each</a:t>
+            </a:r>
+            <a:r>
+              <a:rPr lang="de-DE" sz="1800" dirty="0"/>
+              <a:t> </a:t>
+            </a:r>
+            <a:r>
+              <a:rPr lang="de-DE" sz="1800" dirty="0" err="1"/>
+              <a:t>epoch</a:t>
+            </a:r>
+            <a:endParaRPr lang="de-DE" sz="1800" dirty="0"/>
           </a:p>
           <a:p>
             <a:pPr marL="0" indent="0">
               <a:buNone/>
             </a:pPr>
-            <a:endParaRPr lang="de-DE" dirty="0"/>
+            <a:endParaRPr lang="de-DE" sz="2400" dirty="0"/>
           </a:p>
           <a:p>
             <a:pPr marL="0" indent="0">
               <a:buNone/>
             </a:pPr>
             <a:r>
-              <a:rPr lang="en-GB" dirty="0"/>
-              <a:t>exercise: </a:t>
-            </a:r>
-            <a:r>
-              <a:rPr lang="en-GB" dirty="0">
-                <a:hlinkClick r:id="rId2"/>
+              <a:rPr lang="de-DE" sz="2400" dirty="0" err="1">
+                <a:hlinkClick r:id="rId3"/>
               </a:rPr>
-              <a:t>Kaggle Disaster Tweets</a:t>
-            </a:r>
-            <a:endParaRPr lang="en-GB" dirty="0"/>
+              <a:t>DistilBERT</a:t>
+            </a:r>
+            <a:r>
+              <a:rPr lang="de-DE" sz="2400" dirty="0"/>
+              <a:t>: </a:t>
+            </a:r>
+            <a:r>
+              <a:rPr lang="de-DE" sz="2400" dirty="0" err="1"/>
+              <a:t>much</a:t>
+            </a:r>
+            <a:r>
+              <a:rPr lang="de-DE" sz="2400" dirty="0"/>
+              <a:t> </a:t>
+            </a:r>
+            <a:r>
+              <a:rPr lang="de-DE" sz="2400" dirty="0" err="1"/>
+              <a:t>lighter</a:t>
+            </a:r>
+            <a:r>
+              <a:rPr lang="de-DE" sz="2400" dirty="0"/>
+              <a:t> and </a:t>
+            </a:r>
+            <a:r>
+              <a:rPr lang="de-DE" sz="2400" dirty="0" err="1"/>
+              <a:t>faster</a:t>
+            </a:r>
+            <a:r>
+              <a:rPr lang="de-DE" sz="2400" dirty="0"/>
+              <a:t>, </a:t>
+            </a:r>
+            <a:r>
+              <a:rPr lang="de-DE" sz="2400" dirty="0" err="1"/>
+              <a:t>retaining</a:t>
+            </a:r>
+            <a:r>
+              <a:rPr lang="de-DE" sz="2400" dirty="0"/>
+              <a:t> ~95% </a:t>
+            </a:r>
+            <a:r>
+              <a:rPr lang="de-DE" sz="2400" dirty="0" err="1"/>
+              <a:t>of</a:t>
+            </a:r>
+            <a:r>
+              <a:rPr lang="de-DE" sz="2400" dirty="0"/>
+              <a:t> </a:t>
+            </a:r>
+            <a:r>
+              <a:rPr lang="de-DE" sz="2400" dirty="0" err="1"/>
+              <a:t>BERT’s</a:t>
+            </a:r>
+            <a:r>
+              <a:rPr lang="de-DE" sz="2400" dirty="0"/>
+              <a:t> </a:t>
+            </a:r>
+            <a:r>
+              <a:rPr lang="de-DE" sz="2400" dirty="0" err="1"/>
+              <a:t>performance</a:t>
+            </a:r>
+            <a:endParaRPr lang="de-DE" sz="2400" dirty="0"/>
+          </a:p>
+          <a:p>
+            <a:r>
+              <a:rPr lang="de-DE" sz="1800" dirty="0"/>
+              <a:t>a </a:t>
+            </a:r>
+            <a:r>
+              <a:rPr lang="de-DE" sz="1800" dirty="0" err="1"/>
+              <a:t>smaller</a:t>
+            </a:r>
+            <a:r>
+              <a:rPr lang="de-DE" sz="1800" dirty="0"/>
+              <a:t> “</a:t>
+            </a:r>
+            <a:r>
+              <a:rPr lang="de-DE" sz="1800" dirty="0" err="1"/>
+              <a:t>student</a:t>
+            </a:r>
+            <a:r>
+              <a:rPr lang="de-DE" sz="1800" dirty="0"/>
+              <a:t>” </a:t>
+            </a:r>
+            <a:r>
+              <a:rPr lang="de-DE" sz="1800" dirty="0" err="1"/>
+              <a:t>model</a:t>
+            </a:r>
+            <a:r>
+              <a:rPr lang="de-DE" sz="1800" dirty="0"/>
+              <a:t> </a:t>
+            </a:r>
+            <a:r>
+              <a:rPr lang="de-DE" sz="1800" dirty="0" err="1"/>
+              <a:t>is</a:t>
+            </a:r>
+            <a:r>
+              <a:rPr lang="de-DE" sz="1800" dirty="0"/>
+              <a:t> </a:t>
+            </a:r>
+            <a:r>
+              <a:rPr lang="de-DE" sz="1800" dirty="0" err="1"/>
+              <a:t>trained</a:t>
+            </a:r>
+            <a:r>
+              <a:rPr lang="de-DE" sz="1800" dirty="0"/>
+              <a:t> </a:t>
+            </a:r>
+            <a:r>
+              <a:rPr lang="de-DE" sz="1800" dirty="0" err="1"/>
+              <a:t>to</a:t>
+            </a:r>
+            <a:r>
+              <a:rPr lang="de-DE" sz="1800" dirty="0"/>
+              <a:t> </a:t>
+            </a:r>
+            <a:r>
+              <a:rPr lang="de-DE" sz="1800" dirty="0" err="1"/>
+              <a:t>mimic</a:t>
+            </a:r>
+            <a:r>
+              <a:rPr lang="de-DE" sz="1800" dirty="0"/>
+              <a:t> </a:t>
+            </a:r>
+            <a:r>
+              <a:rPr lang="de-DE" sz="1800" dirty="0" err="1"/>
+              <a:t>BERT’s</a:t>
+            </a:r>
+            <a:r>
+              <a:rPr lang="de-DE" sz="1800" dirty="0"/>
+              <a:t> </a:t>
+            </a:r>
+            <a:r>
+              <a:rPr lang="de-DE" sz="1800" dirty="0" err="1"/>
+              <a:t>predictions</a:t>
+            </a:r>
+            <a:endParaRPr lang="de-DE" sz="1800" dirty="0"/>
+          </a:p>
+          <a:p>
+            <a:r>
+              <a:rPr lang="de-DE" sz="1800" dirty="0"/>
+              <a:t>40% </a:t>
+            </a:r>
+            <a:r>
+              <a:rPr lang="de-DE" sz="1800" dirty="0" err="1"/>
+              <a:t>fewer</a:t>
+            </a:r>
+            <a:r>
+              <a:rPr lang="de-DE" sz="1800" dirty="0"/>
+              <a:t> </a:t>
+            </a:r>
+            <a:r>
+              <a:rPr lang="de-DE" sz="1800" dirty="0" err="1"/>
+              <a:t>parameters</a:t>
+            </a:r>
+            <a:r>
+              <a:rPr lang="de-DE" sz="1800" dirty="0"/>
+              <a:t> </a:t>
+            </a:r>
+            <a:r>
+              <a:rPr lang="de-DE" sz="1800" dirty="0" err="1"/>
+              <a:t>than</a:t>
+            </a:r>
+            <a:r>
+              <a:rPr lang="de-DE" sz="1800" dirty="0"/>
+              <a:t> BERT, 60% </a:t>
+            </a:r>
+            <a:r>
+              <a:rPr lang="de-DE" sz="1800" dirty="0" err="1"/>
+              <a:t>faster</a:t>
+            </a:r>
+            <a:r>
+              <a:rPr lang="de-DE" sz="1800" dirty="0"/>
+              <a:t> </a:t>
+            </a:r>
+            <a:r>
+              <a:rPr lang="de-DE" sz="1800" dirty="0" err="1"/>
+              <a:t>inference</a:t>
+            </a:r>
+            <a:r>
+              <a:rPr lang="de-DE" sz="1800" dirty="0"/>
+              <a:t>, </a:t>
+            </a:r>
+            <a:r>
+              <a:rPr lang="de-DE" sz="1800" dirty="0" err="1"/>
+              <a:t>using</a:t>
+            </a:r>
+            <a:r>
+              <a:rPr lang="de-DE" sz="1800" dirty="0"/>
+              <a:t> half </a:t>
+            </a:r>
+            <a:r>
+              <a:rPr lang="de-DE" sz="1800" dirty="0" err="1"/>
+              <a:t>the</a:t>
+            </a:r>
+            <a:r>
+              <a:rPr lang="de-DE" sz="1800" dirty="0"/>
+              <a:t> </a:t>
+            </a:r>
+            <a:r>
+              <a:rPr lang="de-DE" sz="1800" dirty="0" err="1"/>
+              <a:t>memory</a:t>
+            </a:r>
+            <a:endParaRPr lang="de-DE" sz="1800" dirty="0"/>
+          </a:p>
+          <a:p>
+            <a:r>
+              <a:rPr lang="de-DE" sz="1800" dirty="0"/>
+              <a:t>… also </a:t>
+            </a:r>
+            <a:r>
+              <a:rPr lang="de-DE" sz="1800" dirty="0" err="1"/>
+              <a:t>removed</a:t>
+            </a:r>
+            <a:r>
+              <a:rPr lang="de-DE" sz="1800" dirty="0"/>
+              <a:t> </a:t>
+            </a:r>
+            <a:r>
+              <a:rPr lang="de-DE" sz="1800" dirty="0" err="1"/>
+              <a:t>next</a:t>
+            </a:r>
+            <a:r>
+              <a:rPr lang="de-DE" sz="1800" dirty="0"/>
+              <a:t> </a:t>
+            </a:r>
+            <a:r>
+              <a:rPr lang="de-DE" sz="1800" dirty="0" err="1"/>
+              <a:t>sentence</a:t>
+            </a:r>
+            <a:r>
+              <a:rPr lang="de-DE" sz="1800" dirty="0"/>
+              <a:t> </a:t>
+            </a:r>
+            <a:r>
+              <a:rPr lang="de-DE" sz="1800" dirty="0" err="1"/>
+              <a:t>prediction</a:t>
+            </a:r>
+            <a:r>
+              <a:rPr lang="de-DE" sz="1800" dirty="0"/>
+              <a:t> </a:t>
+            </a:r>
+            <a:r>
+              <a:rPr lang="de-DE" sz="1800" dirty="0" err="1"/>
+              <a:t>as</a:t>
+            </a:r>
+            <a:r>
+              <a:rPr lang="de-DE" sz="1800" dirty="0"/>
+              <a:t> </a:t>
+            </a:r>
+            <a:r>
+              <a:rPr lang="de-DE" sz="1800" dirty="0" err="1"/>
+              <a:t>pretraining</a:t>
+            </a:r>
+            <a:r>
+              <a:rPr lang="de-DE" sz="1800" dirty="0"/>
+              <a:t> </a:t>
+            </a:r>
+            <a:r>
+              <a:rPr lang="de-DE" sz="1800" dirty="0" err="1"/>
+              <a:t>objective</a:t>
+            </a:r>
+            <a:r>
+              <a:rPr lang="de-DE" sz="1800" dirty="0"/>
+              <a:t> …</a:t>
+            </a:r>
           </a:p>
         </p:txBody>
       </p:sp>
@@ -8036,7 +8721,7 @@
           <p:cNvPr id="4" name="Foliennummernplatzhalter 3">
             <a:extLst>
               <a:ext uri="{FF2B5EF4-FFF2-40B4-BE49-F238E27FC236}">
-                <a16:creationId xmlns:a16="http://schemas.microsoft.com/office/drawing/2014/main" id="{BD68B0B8-AEDC-2BFB-161C-7E00CD7BC98C}"/>
+                <a16:creationId xmlns:a16="http://schemas.microsoft.com/office/drawing/2014/main" id="{6C9E7DDC-F9E4-F124-BF7B-7A2E77B7C25C}"/>
               </a:ext>
             </a:extLst>
           </p:cNvPr>
@@ -8052,9 +8737,151 @@
           <a:bodyPr/>
           <a:lstStyle/>
           <a:p>
+            <a:fld id="{3D4C94FE-FF23-4504-88E9-14D481113291}" type="slidenum">
+              <a:rPr lang="en-GB" smtClean="0"/>
+              <a:t>11</a:t>
+            </a:fld>
+            <a:endParaRPr lang="en-GB"/>
+          </a:p>
+        </p:txBody>
+      </p:sp>
+    </p:spTree>
+    <p:extLst>
+      <p:ext uri="{BB962C8B-B14F-4D97-AF65-F5344CB8AC3E}">
+        <p14:creationId xmlns:p14="http://schemas.microsoft.com/office/powerpoint/2010/main" val="3675046636"/>
+      </p:ext>
+    </p:extLst>
+  </p:cSld>
+  <p:clrMapOvr>
+    <a:masterClrMapping/>
+  </p:clrMapOvr>
+</p:sld>
+</file>
+
+<file path=ppt/slides/slide12.xml><?xml version="1.0" encoding="utf-8"?>
+<p:sld xmlns:a="http://schemas.openxmlformats.org/drawingml/2006/main" xmlns:r="http://schemas.openxmlformats.org/officeDocument/2006/relationships" xmlns:p="http://schemas.openxmlformats.org/presentationml/2006/main">
+  <p:cSld>
+    <p:spTree>
+      <p:nvGrpSpPr>
+        <p:cNvPr id="1" name=""/>
+        <p:cNvGrpSpPr/>
+        <p:nvPr/>
+      </p:nvGrpSpPr>
+      <p:grpSpPr>
+        <a:xfrm>
+          <a:off x="0" y="0"/>
+          <a:ext cx="0" cy="0"/>
+          <a:chOff x="0" y="0"/>
+          <a:chExt cx="0" cy="0"/>
+        </a:xfrm>
+      </p:grpSpPr>
+      <p:sp>
+        <p:nvSpPr>
+          <p:cNvPr id="2" name="Titel 1">
+            <a:extLst>
+              <a:ext uri="{FF2B5EF4-FFF2-40B4-BE49-F238E27FC236}">
+                <a16:creationId xmlns:a16="http://schemas.microsoft.com/office/drawing/2014/main" id="{F8835DB9-A493-0493-6DC6-1A59F1955546}"/>
+              </a:ext>
+            </a:extLst>
+          </p:cNvPr>
+          <p:cNvSpPr>
+            <a:spLocks noGrp="1"/>
+          </p:cNvSpPr>
+          <p:nvPr>
+            <p:ph type="title"/>
+          </p:nvPr>
+        </p:nvSpPr>
+        <p:spPr/>
+        <p:txBody>
+          <a:bodyPr/>
+          <a:lstStyle/>
+          <a:p>
+            <a:r>
+              <a:rPr lang="de-DE" dirty="0"/>
+              <a:t>Text Classification</a:t>
+            </a:r>
+          </a:p>
+        </p:txBody>
+      </p:sp>
+      <p:sp>
+        <p:nvSpPr>
+          <p:cNvPr id="3" name="Inhaltsplatzhalter 2">
+            <a:extLst>
+              <a:ext uri="{FF2B5EF4-FFF2-40B4-BE49-F238E27FC236}">
+                <a16:creationId xmlns:a16="http://schemas.microsoft.com/office/drawing/2014/main" id="{C8B9C882-7432-CB1C-F348-C72E3D7ABCC1}"/>
+              </a:ext>
+            </a:extLst>
+          </p:cNvPr>
+          <p:cNvSpPr>
+            <a:spLocks noGrp="1"/>
+          </p:cNvSpPr>
+          <p:nvPr>
+            <p:ph idx="1"/>
+          </p:nvPr>
+        </p:nvSpPr>
+        <p:spPr/>
+        <p:txBody>
+          <a:bodyPr>
+            <a:normAutofit/>
+          </a:bodyPr>
+          <a:lstStyle/>
+          <a:p>
+            <a:pPr marL="0" indent="0">
+              <a:buNone/>
+            </a:pPr>
+            <a:r>
+              <a:rPr lang="de-DE" dirty="0"/>
+              <a:t>…</a:t>
+            </a:r>
+          </a:p>
+          <a:p>
+            <a:pPr marL="0" indent="0">
+              <a:buNone/>
+            </a:pPr>
+            <a:endParaRPr lang="de-DE" dirty="0"/>
+          </a:p>
+          <a:p>
+            <a:pPr marL="0" indent="0">
+              <a:buNone/>
+            </a:pPr>
+            <a:r>
+              <a:rPr lang="en-GB" dirty="0"/>
+              <a:t>exercise: </a:t>
+            </a:r>
+            <a:r>
+              <a:rPr lang="en-GB" dirty="0">
+                <a:hlinkClick r:id="rId2"/>
+              </a:rPr>
+              <a:t>Kaggle Disaster Tweets</a:t>
+            </a:r>
+            <a:endParaRPr lang="en-GB" dirty="0"/>
+          </a:p>
+        </p:txBody>
+      </p:sp>
+      <p:sp>
+        <p:nvSpPr>
+          <p:cNvPr id="4" name="Foliennummernplatzhalter 3">
+            <a:extLst>
+              <a:ext uri="{FF2B5EF4-FFF2-40B4-BE49-F238E27FC236}">
+                <a16:creationId xmlns:a16="http://schemas.microsoft.com/office/drawing/2014/main" id="{BD68B0B8-AEDC-2BFB-161C-7E00CD7BC98C}"/>
+              </a:ext>
+            </a:extLst>
+          </p:cNvPr>
+          <p:cNvSpPr>
+            <a:spLocks noGrp="1"/>
+          </p:cNvSpPr>
+          <p:nvPr>
+            <p:ph type="sldNum" sz="quarter" idx="12"/>
+          </p:nvPr>
+        </p:nvSpPr>
+        <p:spPr/>
+        <p:txBody>
+          <a:bodyPr/>
+          <a:lstStyle/>
+          <a:p>
             <a:fld id="{4055531C-5681-6B44-B2CA-926D7A74B06D}" type="slidenum">
               <a:rPr lang="de-DE" smtClean="0"/>
-              <a:t>11</a:t>
+              <a:t>12</a:t>
             </a:fld>
             <a:endParaRPr lang="de-DE"/>
           </a:p>
@@ -8217,7 +9044,7 @@
 </p:sld>
 </file>
 
-<file path=ppt/slides/slide12.xml><?xml version="1.0" encoding="utf-8"?>
+<file path=ppt/slides/slide13.xml><?xml version="1.0" encoding="utf-8"?>
 <p:sld xmlns:a="http://schemas.openxmlformats.org/drawingml/2006/main" xmlns:r="http://schemas.openxmlformats.org/officeDocument/2006/relationships" xmlns:p="http://schemas.openxmlformats.org/presentationml/2006/main">
   <p:cSld>
     <p:spTree>
@@ -8691,7 +9518,7 @@
           <a:p>
             <a:fld id="{4055531C-5681-6B44-B2CA-926D7A74B06D}" type="slidenum">
               <a:rPr lang="de-DE" smtClean="0"/>
-              <a:t>12</a:t>
+              <a:t>13</a:t>
             </a:fld>
             <a:endParaRPr lang="de-DE"/>
           </a:p>
@@ -8854,7 +9681,7 @@
 </p:sld>
 </file>
 
-<file path=ppt/slides/slide13.xml><?xml version="1.0" encoding="utf-8"?>
+<file path=ppt/slides/slide14.xml><?xml version="1.0" encoding="utf-8"?>
 <p:sld xmlns:a="http://schemas.openxmlformats.org/drawingml/2006/main" xmlns:r="http://schemas.openxmlformats.org/officeDocument/2006/relationships" xmlns:p="http://schemas.openxmlformats.org/presentationml/2006/main">
   <p:cSld>
     <p:spTree>
@@ -9076,7 +9903,7 @@
           <a:p>
             <a:fld id="{3D4C94FE-FF23-4504-88E9-14D481113291}" type="slidenum">
               <a:rPr lang="en-GB" smtClean="0"/>
-              <a:t>13</a:t>
+              <a:t>14</a:t>
             </a:fld>
             <a:endParaRPr lang="en-GB"/>
           </a:p>
@@ -9264,246 +10091,6 @@
 </p:sld>
 </file>
 
-<file path=ppt/slides/slide14.xml><?xml version="1.0" encoding="utf-8"?>
-<p:sld xmlns:a="http://schemas.openxmlformats.org/drawingml/2006/main" xmlns:r="http://schemas.openxmlformats.org/officeDocument/2006/relationships" xmlns:p="http://schemas.openxmlformats.org/presentationml/2006/main">
-  <p:cSld>
-    <p:spTree>
-      <p:nvGrpSpPr>
-        <p:cNvPr id="1" name=""/>
-        <p:cNvGrpSpPr/>
-        <p:nvPr/>
-      </p:nvGrpSpPr>
-      <p:grpSpPr>
-        <a:xfrm>
-          <a:off x="0" y="0"/>
-          <a:ext cx="0" cy="0"/>
-          <a:chOff x="0" y="0"/>
-          <a:chExt cx="0" cy="0"/>
-        </a:xfrm>
-      </p:grpSpPr>
-      <p:sp>
-        <p:nvSpPr>
-          <p:cNvPr id="2" name="Title 1">
-            <a:extLst>
-              <a:ext uri="{FF2B5EF4-FFF2-40B4-BE49-F238E27FC236}">
-                <a16:creationId xmlns:a16="http://schemas.microsoft.com/office/drawing/2014/main" id="{3EC70418-8F83-3C9E-7A93-DF61EC41A1E3}"/>
-              </a:ext>
-            </a:extLst>
-          </p:cNvPr>
-          <p:cNvSpPr>
-            <a:spLocks noGrp="1"/>
-          </p:cNvSpPr>
-          <p:nvPr>
-            <p:ph type="title"/>
-          </p:nvPr>
-        </p:nvSpPr>
-        <p:spPr/>
-        <p:txBody>
-          <a:bodyPr/>
-          <a:lstStyle/>
-          <a:p>
-            <a:r>
-              <a:rPr lang="en-GB" dirty="0"/>
-              <a:t>Finetuning Scenarios</a:t>
-            </a:r>
-          </a:p>
-        </p:txBody>
-      </p:sp>
-      <p:sp>
-        <p:nvSpPr>
-          <p:cNvPr id="3" name="Content Placeholder 2">
-            <a:extLst>
-              <a:ext uri="{FF2B5EF4-FFF2-40B4-BE49-F238E27FC236}">
-                <a16:creationId xmlns:a16="http://schemas.microsoft.com/office/drawing/2014/main" id="{6CAFF65F-2B24-83B6-1383-8EC4F9454843}"/>
-              </a:ext>
-            </a:extLst>
-          </p:cNvPr>
-          <p:cNvSpPr>
-            <a:spLocks noGrp="1"/>
-          </p:cNvSpPr>
-          <p:nvPr>
-            <p:ph idx="1"/>
-          </p:nvPr>
-        </p:nvSpPr>
-        <p:spPr/>
-        <p:txBody>
-          <a:bodyPr>
-            <a:noAutofit/>
-          </a:bodyPr>
-          <a:lstStyle/>
-          <a:p>
-            <a:pPr marL="0" indent="0">
-              <a:buNone/>
-            </a:pPr>
-            <a:r>
-              <a:rPr lang="de-DE" sz="2400" dirty="0"/>
-              <a:t>finetuning gives better adjustment to new task than feature extraction (important if new task differs a lot from pretraining task)</a:t>
-            </a:r>
-          </a:p>
-          <a:p>
-            <a:pPr marL="0" indent="0">
-              <a:buNone/>
-            </a:pPr>
-            <a:r>
-              <a:rPr lang="en-GB" sz="2400" dirty="0">
-                <a:sym typeface="Wingdings" panose="05000000000000000000" pitchFamily="2" charset="2"/>
-              </a:rPr>
-              <a:t> coming along with </a:t>
-            </a:r>
-            <a:r>
-              <a:rPr lang="en-GB" sz="2400" dirty="0"/>
-              <a:t>danger of overfitting</a:t>
-            </a:r>
-          </a:p>
-          <a:p>
-            <a:pPr marL="0" indent="0">
-              <a:buNone/>
-            </a:pPr>
-            <a:endParaRPr lang="en-GB" sz="2400" dirty="0"/>
-          </a:p>
-          <a:p>
-            <a:pPr marL="0" indent="0">
-              <a:buNone/>
-            </a:pPr>
-            <a:r>
-              <a:rPr lang="en-GB" sz="2400" dirty="0"/>
-              <a:t>features more generic in early layers (</a:t>
-            </a:r>
-            <a:r>
-              <a:rPr lang="de-DE" sz="2400" dirty="0"/>
-              <a:t>e.g., </a:t>
-            </a:r>
-            <a:r>
-              <a:rPr lang="de-DE" sz="2400" dirty="0" err="1"/>
-              <a:t>token</a:t>
-            </a:r>
-            <a:r>
-              <a:rPr lang="de-DE" sz="2400" dirty="0"/>
-              <a:t> </a:t>
-            </a:r>
-            <a:r>
-              <a:rPr lang="de-DE" sz="2400" dirty="0" err="1"/>
-              <a:t>structure</a:t>
-            </a:r>
-            <a:r>
-              <a:rPr lang="de-DE" sz="2400" dirty="0"/>
-              <a:t>, </a:t>
-            </a:r>
-            <a:r>
-              <a:rPr lang="de-DE" sz="2400" dirty="0" err="1"/>
-              <a:t>syntax</a:t>
-            </a:r>
-            <a:r>
-              <a:rPr lang="de-DE" sz="2400" dirty="0"/>
-              <a:t>, </a:t>
-            </a:r>
-            <a:r>
-              <a:rPr lang="de-DE" sz="2400" dirty="0" err="1"/>
-              <a:t>part-of-speech</a:t>
-            </a:r>
-            <a:r>
-              <a:rPr lang="en-GB" sz="2400" dirty="0"/>
-              <a:t>) and more specific to the pretraining data in later layers (</a:t>
-            </a:r>
-            <a:r>
-              <a:rPr lang="de-DE" sz="2400" dirty="0"/>
-              <a:t>e.g., </a:t>
-            </a:r>
-            <a:r>
-              <a:rPr lang="de-DE" sz="2400" dirty="0" err="1"/>
-              <a:t>word</a:t>
-            </a:r>
-            <a:r>
-              <a:rPr lang="de-DE" sz="2400" dirty="0"/>
-              <a:t> sense, </a:t>
-            </a:r>
-            <a:r>
-              <a:rPr lang="de-DE" sz="2400" dirty="0" err="1"/>
-              <a:t>entity</a:t>
-            </a:r>
-            <a:r>
-              <a:rPr lang="de-DE" sz="2400" dirty="0"/>
-              <a:t> </a:t>
-            </a:r>
-            <a:r>
-              <a:rPr lang="de-DE" sz="2400" dirty="0" err="1"/>
-              <a:t>linking</a:t>
-            </a:r>
-            <a:r>
-              <a:rPr lang="en-GB" sz="2400" dirty="0"/>
-              <a:t>)</a:t>
-            </a:r>
-          </a:p>
-          <a:p>
-            <a:pPr marL="0" indent="0">
-              <a:buNone/>
-            </a:pPr>
-            <a:r>
-              <a:rPr lang="en-GB" sz="2400" dirty="0">
-                <a:sym typeface="Wingdings" panose="05000000000000000000" pitchFamily="2" charset="2"/>
-              </a:rPr>
-              <a:t> for small finetuning data sets, typically keep weights of early layers fixed to avoid overfitting</a:t>
-            </a:r>
-          </a:p>
-          <a:p>
-            <a:pPr marL="0" indent="0">
-              <a:buNone/>
-            </a:pPr>
-            <a:endParaRPr lang="en-GB" sz="2400" dirty="0"/>
-          </a:p>
-          <a:p>
-            <a:pPr marL="0" indent="0">
-              <a:buNone/>
-            </a:pPr>
-            <a:r>
-              <a:rPr lang="en-GB" sz="2400" dirty="0"/>
-              <a:t>for large finetuning data sets (less danger of overfitting), finetuning all layers can be beneficial</a:t>
-            </a:r>
-          </a:p>
-        </p:txBody>
-      </p:sp>
-      <p:sp>
-        <p:nvSpPr>
-          <p:cNvPr id="4" name="Slide Number Placeholder 3">
-            <a:extLst>
-              <a:ext uri="{FF2B5EF4-FFF2-40B4-BE49-F238E27FC236}">
-                <a16:creationId xmlns:a16="http://schemas.microsoft.com/office/drawing/2014/main" id="{61A47A66-9C27-B5A5-879C-001B250652C9}"/>
-              </a:ext>
-            </a:extLst>
-          </p:cNvPr>
-          <p:cNvSpPr>
-            <a:spLocks noGrp="1"/>
-          </p:cNvSpPr>
-          <p:nvPr>
-            <p:ph type="sldNum" sz="quarter" idx="12"/>
-          </p:nvPr>
-        </p:nvSpPr>
-        <p:spPr/>
-        <p:txBody>
-          <a:bodyPr/>
-          <a:lstStyle/>
-          <a:p>
-            <a:fld id="{3D4C94FE-FF23-4504-88E9-14D481113291}" type="slidenum">
-              <a:rPr lang="en-GB" smtClean="0"/>
-              <a:t>14</a:t>
-            </a:fld>
-            <a:endParaRPr lang="en-GB"/>
-          </a:p>
-        </p:txBody>
-      </p:sp>
-    </p:spTree>
-    <p:extLst>
-      <p:ext uri="{BB962C8B-B14F-4D97-AF65-F5344CB8AC3E}">
-        <p14:creationId xmlns:p14="http://schemas.microsoft.com/office/powerpoint/2010/main" val="2407320420"/>
-      </p:ext>
-    </p:extLst>
-  </p:cSld>
-  <p:clrMapOvr>
-    <a:masterClrMapping/>
-  </p:clrMapOvr>
-</p:sld>
-</file>
-
 <file path=ppt/slides/slide15.xml><?xml version="1.0" encoding="utf-8"?>
 <p:sld xmlns:a="http://schemas.openxmlformats.org/drawingml/2006/main" xmlns:r="http://schemas.openxmlformats.org/officeDocument/2006/relationships" xmlns:p="http://schemas.openxmlformats.org/presentationml/2006/main">
   <p:cSld>
@@ -9526,7 +10113,7 @@
           <p:cNvPr id="2" name="Title 1">
             <a:extLst>
               <a:ext uri="{FF2B5EF4-FFF2-40B4-BE49-F238E27FC236}">
-                <a16:creationId xmlns:a16="http://schemas.microsoft.com/office/drawing/2014/main" id="{B3CEFB21-2CCA-564A-D312-3A4B41E5AAE8}"/>
+                <a16:creationId xmlns:a16="http://schemas.microsoft.com/office/drawing/2014/main" id="{3EC70418-8F83-3C9E-7A93-DF61EC41A1E3}"/>
               </a:ext>
             </a:extLst>
           </p:cNvPr>
@@ -9543,14 +10130,162 @@
           <a:lstStyle/>
           <a:p>
             <a:r>
-              <a:rPr lang="de-DE" dirty="0" err="1"/>
-              <a:t>Why</a:t>
-            </a:r>
-            <a:r>
-              <a:rPr lang="de-DE" dirty="0"/>
-              <a:t> Finetuning? </a:t>
-            </a:r>
-            <a:endParaRPr lang="en-DE" dirty="0"/>
+              <a:rPr lang="en-GB" dirty="0"/>
+              <a:t>Finetuning Scenarios</a:t>
+            </a:r>
+          </a:p>
+        </p:txBody>
+      </p:sp>
+      <p:sp>
+        <p:nvSpPr>
+          <p:cNvPr id="3" name="Content Placeholder 2">
+            <a:extLst>
+              <a:ext uri="{FF2B5EF4-FFF2-40B4-BE49-F238E27FC236}">
+                <a16:creationId xmlns:a16="http://schemas.microsoft.com/office/drawing/2014/main" id="{6CAFF65F-2B24-83B6-1383-8EC4F9454843}"/>
+              </a:ext>
+            </a:extLst>
+          </p:cNvPr>
+          <p:cNvSpPr>
+            <a:spLocks noGrp="1"/>
+          </p:cNvSpPr>
+          <p:nvPr>
+            <p:ph idx="1"/>
+          </p:nvPr>
+        </p:nvSpPr>
+        <p:spPr/>
+        <p:txBody>
+          <a:bodyPr>
+            <a:noAutofit/>
+          </a:bodyPr>
+          <a:lstStyle/>
+          <a:p>
+            <a:pPr marL="0" indent="0">
+              <a:buNone/>
+            </a:pPr>
+            <a:r>
+              <a:rPr lang="de-DE" sz="2400" dirty="0"/>
+              <a:t>finetuning gives better adjustment to new task than feature extraction (important if new task differs a lot from pretraining task)</a:t>
+            </a:r>
+          </a:p>
+          <a:p>
+            <a:pPr marL="0" indent="0">
+              <a:buNone/>
+            </a:pPr>
+            <a:r>
+              <a:rPr lang="en-GB" sz="2400" dirty="0">
+                <a:sym typeface="Wingdings" panose="05000000000000000000" pitchFamily="2" charset="2"/>
+              </a:rPr>
+              <a:t> coming along with </a:t>
+            </a:r>
+            <a:r>
+              <a:rPr lang="en-GB" sz="2400" dirty="0"/>
+              <a:t>danger of overfitting</a:t>
+            </a:r>
+          </a:p>
+          <a:p>
+            <a:pPr marL="0" indent="0">
+              <a:buNone/>
+            </a:pPr>
+            <a:endParaRPr lang="en-GB" sz="2400" dirty="0"/>
+          </a:p>
+          <a:p>
+            <a:pPr marL="0" indent="0">
+              <a:buNone/>
+            </a:pPr>
+            <a:r>
+              <a:rPr lang="en-GB" sz="2400" dirty="0"/>
+              <a:t>features more generic in early layers (</a:t>
+            </a:r>
+            <a:r>
+              <a:rPr lang="de-DE" sz="2400" dirty="0"/>
+              <a:t>e.g., </a:t>
+            </a:r>
+            <a:r>
+              <a:rPr lang="de-DE" sz="2400" dirty="0" err="1"/>
+              <a:t>token</a:t>
+            </a:r>
+            <a:r>
+              <a:rPr lang="de-DE" sz="2400" dirty="0"/>
+              <a:t> </a:t>
+            </a:r>
+            <a:r>
+              <a:rPr lang="de-DE" sz="2400" dirty="0" err="1"/>
+              <a:t>structure</a:t>
+            </a:r>
+            <a:r>
+              <a:rPr lang="de-DE" sz="2400" dirty="0"/>
+              <a:t>, </a:t>
+            </a:r>
+            <a:r>
+              <a:rPr lang="de-DE" sz="2400" dirty="0" err="1"/>
+              <a:t>syntax</a:t>
+            </a:r>
+            <a:r>
+              <a:rPr lang="de-DE" sz="2400" dirty="0"/>
+              <a:t>, </a:t>
+            </a:r>
+            <a:r>
+              <a:rPr lang="de-DE" sz="2400" dirty="0" err="1"/>
+              <a:t>part-of-speech</a:t>
+            </a:r>
+            <a:r>
+              <a:rPr lang="en-GB" sz="2400" dirty="0"/>
+              <a:t>) and more specific to the pretraining data in later layers (</a:t>
+            </a:r>
+            <a:r>
+              <a:rPr lang="de-DE" sz="2400" dirty="0"/>
+              <a:t>e.g., </a:t>
+            </a:r>
+            <a:r>
+              <a:rPr lang="de-DE" sz="2400" dirty="0" err="1"/>
+              <a:t>word</a:t>
+            </a:r>
+            <a:r>
+              <a:rPr lang="de-DE" sz="2400" dirty="0"/>
+              <a:t> sense, </a:t>
+            </a:r>
+            <a:r>
+              <a:rPr lang="de-DE" sz="2400" dirty="0" err="1"/>
+              <a:t>entity</a:t>
+            </a:r>
+            <a:r>
+              <a:rPr lang="de-DE" sz="2400" dirty="0"/>
+              <a:t> </a:t>
+            </a:r>
+            <a:r>
+              <a:rPr lang="de-DE" sz="2400" dirty="0" err="1"/>
+              <a:t>linking</a:t>
+            </a:r>
+            <a:r>
+              <a:rPr lang="en-GB" sz="2400" dirty="0"/>
+              <a:t>)</a:t>
+            </a:r>
+          </a:p>
+          <a:p>
+            <a:pPr marL="0" indent="0">
+              <a:buNone/>
+            </a:pPr>
+            <a:r>
+              <a:rPr lang="en-GB" sz="2400" dirty="0">
+                <a:sym typeface="Wingdings" panose="05000000000000000000" pitchFamily="2" charset="2"/>
+              </a:rPr>
+              <a:t> for small finetuning data sets, typically keep weights of early layers fixed to avoid overfitting</a:t>
+            </a:r>
+          </a:p>
+          <a:p>
+            <a:pPr marL="0" indent="0">
+              <a:buNone/>
+            </a:pPr>
+            <a:endParaRPr lang="en-GB" sz="2400" dirty="0"/>
+          </a:p>
+          <a:p>
+            <a:pPr marL="0" indent="0">
+              <a:buNone/>
+            </a:pPr>
+            <a:r>
+              <a:rPr lang="en-GB" sz="2400" dirty="0"/>
+              <a:t>for large finetuning data sets (less danger of overfitting), finetuning all layers can be beneficial</a:t>
+            </a:r>
           </a:p>
         </p:txBody>
       </p:sp>
@@ -9559,7 +10294,7 @@
           <p:cNvPr id="4" name="Slide Number Placeholder 3">
             <a:extLst>
               <a:ext uri="{FF2B5EF4-FFF2-40B4-BE49-F238E27FC236}">
-                <a16:creationId xmlns:a16="http://schemas.microsoft.com/office/drawing/2014/main" id="{FDB15F20-2568-EEBA-AF76-03A86D63DFE2}"/>
+                <a16:creationId xmlns:a16="http://schemas.microsoft.com/office/drawing/2014/main" id="{61A47A66-9C27-B5A5-879C-001B250652C9}"/>
               </a:ext>
             </a:extLst>
           </p:cNvPr>
@@ -9575,276 +10310,18 @@
           <a:bodyPr/>
           <a:lstStyle/>
           <a:p>
-            <a:fld id="{849D05A8-43E9-1C49-8606-50AB68220DEC}" type="slidenum">
-              <a:rPr lang="en-DE" smtClean="0"/>
+            <a:fld id="{3D4C94FE-FF23-4504-88E9-14D481113291}" type="slidenum">
+              <a:rPr lang="en-GB" smtClean="0"/>
               <a:t>15</a:t>
             </a:fld>
-            <a:endParaRPr lang="en-DE"/>
-          </a:p>
-        </p:txBody>
-      </p:sp>
-      <p:pic>
-        <p:nvPicPr>
-          <p:cNvPr id="7" name="Picture 6">
-            <a:extLst>
-              <a:ext uri="{FF2B5EF4-FFF2-40B4-BE49-F238E27FC236}">
-                <a16:creationId xmlns:a16="http://schemas.microsoft.com/office/drawing/2014/main" id="{18758AB1-B3B0-0616-5CEB-865CA618E6D8}"/>
-              </a:ext>
-            </a:extLst>
-          </p:cNvPr>
-          <p:cNvPicPr>
-            <a:picLocks noChangeAspect="1"/>
-          </p:cNvPicPr>
-          <p:nvPr/>
-        </p:nvPicPr>
-        <p:blipFill>
-          <a:blip r:embed="rId2"/>
-          <a:stretch>
-            <a:fillRect/>
-          </a:stretch>
-        </p:blipFill>
-        <p:spPr>
-          <a:xfrm>
-            <a:off x="2613454" y="4100715"/>
-            <a:ext cx="6965091" cy="2261627"/>
-          </a:xfrm>
-          <a:prstGeom prst="rect">
-            <a:avLst/>
-          </a:prstGeom>
-        </p:spPr>
-      </p:pic>
-      <p:sp>
-        <p:nvSpPr>
-          <p:cNvPr id="8" name="TextBox 7">
-            <a:extLst>
-              <a:ext uri="{FF2B5EF4-FFF2-40B4-BE49-F238E27FC236}">
-                <a16:creationId xmlns:a16="http://schemas.microsoft.com/office/drawing/2014/main" id="{CCBF6A85-5F13-3267-7016-A5B242B7FF98}"/>
-              </a:ext>
-            </a:extLst>
-          </p:cNvPr>
-          <p:cNvSpPr txBox="1"/>
-          <p:nvPr/>
-        </p:nvSpPr>
-        <p:spPr>
-          <a:xfrm>
-            <a:off x="6302826" y="6356350"/>
-            <a:ext cx="644512" cy="246221"/>
-          </a:xfrm>
-          <a:prstGeom prst="rect">
-            <a:avLst/>
-          </a:prstGeom>
-          <a:noFill/>
-        </p:spPr>
-        <p:txBody>
-          <a:bodyPr wrap="square" rtlCol="0">
-            <a:spAutoFit/>
-          </a:bodyPr>
-          <a:lstStyle/>
-          <a:p>
-            <a:r>
-              <a:rPr lang="de-DE" sz="1000" dirty="0">
-                <a:hlinkClick r:id="rId3"/>
-              </a:rPr>
-              <a:t>source</a:t>
-            </a:r>
-            <a:endParaRPr lang="de-DE" sz="1000" dirty="0"/>
-          </a:p>
-        </p:txBody>
-      </p:sp>
-      <p:sp>
-        <p:nvSpPr>
-          <p:cNvPr id="9" name="Inhaltsplatzhalter 8">
-            <a:extLst>
-              <a:ext uri="{FF2B5EF4-FFF2-40B4-BE49-F238E27FC236}">
-                <a16:creationId xmlns:a16="http://schemas.microsoft.com/office/drawing/2014/main" id="{26BAE1A0-1615-EE5C-7E82-5B0C212C8B02}"/>
-              </a:ext>
-            </a:extLst>
-          </p:cNvPr>
-          <p:cNvSpPr>
-            <a:spLocks noGrp="1"/>
-          </p:cNvSpPr>
-          <p:nvPr>
-            <p:ph idx="1"/>
-          </p:nvPr>
-        </p:nvSpPr>
-        <p:spPr/>
-        <p:txBody>
-          <a:bodyPr/>
-          <a:lstStyle/>
-          <a:p>
-            <a:pPr marL="0" indent="0">
-              <a:buNone/>
-            </a:pPr>
-            <a:r>
-              <a:rPr lang="de-DE" dirty="0" err="1"/>
-              <a:t>make</a:t>
-            </a:r>
-            <a:r>
-              <a:rPr lang="de-DE" dirty="0"/>
-              <a:t> </a:t>
-            </a:r>
-            <a:r>
-              <a:rPr lang="de-DE" dirty="0" err="1"/>
-              <a:t>use</a:t>
-            </a:r>
-            <a:r>
-              <a:rPr lang="de-DE" dirty="0"/>
-              <a:t> </a:t>
-            </a:r>
-            <a:r>
-              <a:rPr lang="de-DE" dirty="0" err="1"/>
-              <a:t>of</a:t>
-            </a:r>
-            <a:r>
-              <a:rPr lang="de-DE" dirty="0"/>
-              <a:t> </a:t>
-            </a:r>
-            <a:r>
-              <a:rPr lang="de-DE" dirty="0" err="1"/>
-              <a:t>your</a:t>
-            </a:r>
-            <a:r>
-              <a:rPr lang="de-DE" dirty="0"/>
-              <a:t> own </a:t>
-            </a:r>
-            <a:r>
-              <a:rPr lang="de-DE" dirty="0" err="1"/>
-              <a:t>data</a:t>
-            </a:r>
-            <a:r>
-              <a:rPr lang="de-DE" dirty="0"/>
-              <a:t> (domain-</a:t>
-            </a:r>
-            <a:r>
-              <a:rPr lang="de-DE" dirty="0" err="1"/>
-              <a:t>specific</a:t>
-            </a:r>
-            <a:r>
-              <a:rPr lang="de-DE" dirty="0"/>
-              <a:t>, high-quality)</a:t>
-            </a:r>
-          </a:p>
-          <a:p>
-            <a:pPr marL="0" indent="0">
-              <a:buNone/>
-            </a:pPr>
-            <a:endParaRPr lang="de-DE" dirty="0"/>
-          </a:p>
-          <a:p>
-            <a:pPr marL="0" indent="0">
-              <a:buNone/>
-            </a:pPr>
-            <a:r>
-              <a:rPr lang="de-DE" dirty="0" err="1"/>
-              <a:t>instruction</a:t>
-            </a:r>
-            <a:r>
-              <a:rPr lang="de-DE" dirty="0"/>
-              <a:t> </a:t>
-            </a:r>
-            <a:r>
-              <a:rPr lang="de-DE" dirty="0" err="1"/>
-              <a:t>tuning</a:t>
-            </a:r>
-            <a:r>
-              <a:rPr lang="de-DE" dirty="0"/>
-              <a:t> </a:t>
-            </a:r>
-            <a:r>
-              <a:rPr lang="de-DE" dirty="0" err="1"/>
-              <a:t>typically</a:t>
-            </a:r>
-            <a:r>
-              <a:rPr lang="de-DE" dirty="0"/>
-              <a:t> </a:t>
-            </a:r>
-            <a:r>
-              <a:rPr lang="de-DE" dirty="0" err="1"/>
-              <a:t>for</a:t>
-            </a:r>
-            <a:r>
-              <a:rPr lang="de-DE" dirty="0"/>
-              <a:t> </a:t>
-            </a:r>
-            <a:r>
-              <a:rPr lang="de-DE" dirty="0" err="1"/>
-              <a:t>more</a:t>
-            </a:r>
-            <a:r>
-              <a:rPr lang="de-DE" dirty="0"/>
-              <a:t> </a:t>
-            </a:r>
-            <a:r>
-              <a:rPr lang="de-DE" dirty="0" err="1"/>
-              <a:t>generic</a:t>
-            </a:r>
-            <a:r>
-              <a:rPr lang="de-DE" dirty="0"/>
-              <a:t> expert, like </a:t>
-            </a:r>
-            <a:r>
-              <a:rPr lang="de-DE" dirty="0" err="1"/>
-              <a:t>coding</a:t>
-            </a:r>
-            <a:r>
-              <a:rPr lang="de-DE" dirty="0"/>
-              <a:t> (but </a:t>
-            </a:r>
-            <a:r>
-              <a:rPr lang="de-DE" dirty="0" err="1"/>
-              <a:t>can</a:t>
-            </a:r>
-            <a:r>
-              <a:rPr lang="de-DE" dirty="0"/>
-              <a:t> also </a:t>
-            </a:r>
-            <a:r>
-              <a:rPr lang="de-DE" dirty="0" err="1"/>
-              <a:t>be</a:t>
-            </a:r>
-            <a:r>
-              <a:rPr lang="de-DE" dirty="0"/>
-              <a:t> a </a:t>
-            </a:r>
-            <a:r>
-              <a:rPr lang="de-DE" dirty="0" err="1"/>
-              <a:t>more</a:t>
-            </a:r>
-            <a:r>
-              <a:rPr lang="de-DE" dirty="0"/>
-              <a:t> </a:t>
-            </a:r>
-            <a:r>
-              <a:rPr lang="de-DE" dirty="0" err="1"/>
-              <a:t>specific</a:t>
-            </a:r>
-            <a:r>
-              <a:rPr lang="de-DE" dirty="0"/>
-              <a:t> </a:t>
-            </a:r>
-            <a:r>
-              <a:rPr lang="de-DE" dirty="0" err="1"/>
-              <a:t>thing</a:t>
-            </a:r>
-            <a:r>
-              <a:rPr lang="de-DE" dirty="0"/>
-              <a:t> on private </a:t>
-            </a:r>
-            <a:r>
-              <a:rPr lang="de-DE" dirty="0" err="1"/>
-              <a:t>data</a:t>
-            </a:r>
-            <a:r>
-              <a:rPr lang="de-DE" dirty="0"/>
-              <a:t>)</a:t>
-            </a:r>
+            <a:endParaRPr lang="en-GB"/>
           </a:p>
         </p:txBody>
       </p:sp>
     </p:spTree>
     <p:extLst>
       <p:ext uri="{BB962C8B-B14F-4D97-AF65-F5344CB8AC3E}">
-        <p14:creationId xmlns:p14="http://schemas.microsoft.com/office/powerpoint/2010/main" val="3433214716"/>
+        <p14:creationId xmlns:p14="http://schemas.microsoft.com/office/powerpoint/2010/main" val="2407320420"/>
       </p:ext>
     </p:extLst>
   </p:cSld>
@@ -9873,10 +10350,10 @@
       </p:grpSpPr>
       <p:sp>
         <p:nvSpPr>
-          <p:cNvPr id="5" name="Titel 4">
-            <a:extLst>
-              <a:ext uri="{FF2B5EF4-FFF2-40B4-BE49-F238E27FC236}">
-                <a16:creationId xmlns:a16="http://schemas.microsoft.com/office/drawing/2014/main" id="{4ED462E1-7391-FF3F-8ADF-6D5135CCE104}"/>
+          <p:cNvPr id="2" name="Title 1">
+            <a:extLst>
+              <a:ext uri="{FF2B5EF4-FFF2-40B4-BE49-F238E27FC236}">
+                <a16:creationId xmlns:a16="http://schemas.microsoft.com/office/drawing/2014/main" id="{B3CEFB21-2CCA-564A-D312-3A4B41E5AAE8}"/>
               </a:ext>
             </a:extLst>
           </p:cNvPr>
@@ -9892,16 +10369,24 @@
           <a:bodyPr/>
           <a:lstStyle/>
           <a:p>
-            <a:endParaRPr lang="de-DE"/>
-          </a:p>
-        </p:txBody>
-      </p:sp>
-      <p:sp>
-        <p:nvSpPr>
-          <p:cNvPr id="4" name="Foliennummernplatzhalter 3">
-            <a:extLst>
-              <a:ext uri="{FF2B5EF4-FFF2-40B4-BE49-F238E27FC236}">
-                <a16:creationId xmlns:a16="http://schemas.microsoft.com/office/drawing/2014/main" id="{7B347D77-2736-E668-977C-E7F81439B1C6}"/>
+            <a:r>
+              <a:rPr lang="de-DE" dirty="0" err="1"/>
+              <a:t>Why</a:t>
+            </a:r>
+            <a:r>
+              <a:rPr lang="de-DE" dirty="0"/>
+              <a:t> Finetuning? </a:t>
+            </a:r>
+            <a:endParaRPr lang="en-DE" dirty="0"/>
+          </a:p>
+        </p:txBody>
+      </p:sp>
+      <p:sp>
+        <p:nvSpPr>
+          <p:cNvPr id="4" name="Slide Number Placeholder 3">
+            <a:extLst>
+              <a:ext uri="{FF2B5EF4-FFF2-40B4-BE49-F238E27FC236}">
+                <a16:creationId xmlns:a16="http://schemas.microsoft.com/office/drawing/2014/main" id="{FDB15F20-2568-EEBA-AF76-03A86D63DFE2}"/>
               </a:ext>
             </a:extLst>
           </p:cNvPr>
@@ -9917,9 +10402,351 @@
           <a:bodyPr/>
           <a:lstStyle/>
           <a:p>
+            <a:fld id="{849D05A8-43E9-1C49-8606-50AB68220DEC}" type="slidenum">
+              <a:rPr lang="en-DE" smtClean="0"/>
+              <a:t>16</a:t>
+            </a:fld>
+            <a:endParaRPr lang="en-DE"/>
+          </a:p>
+        </p:txBody>
+      </p:sp>
+      <p:pic>
+        <p:nvPicPr>
+          <p:cNvPr id="7" name="Picture 6">
+            <a:extLst>
+              <a:ext uri="{FF2B5EF4-FFF2-40B4-BE49-F238E27FC236}">
+                <a16:creationId xmlns:a16="http://schemas.microsoft.com/office/drawing/2014/main" id="{18758AB1-B3B0-0616-5CEB-865CA618E6D8}"/>
+              </a:ext>
+            </a:extLst>
+          </p:cNvPr>
+          <p:cNvPicPr>
+            <a:picLocks noChangeAspect="1"/>
+          </p:cNvPicPr>
+          <p:nvPr/>
+        </p:nvPicPr>
+        <p:blipFill>
+          <a:blip r:embed="rId2"/>
+          <a:stretch>
+            <a:fillRect/>
+          </a:stretch>
+        </p:blipFill>
+        <p:spPr>
+          <a:xfrm>
+            <a:off x="2613454" y="4100715"/>
+            <a:ext cx="6965091" cy="2261627"/>
+          </a:xfrm>
+          <a:prstGeom prst="rect">
+            <a:avLst/>
+          </a:prstGeom>
+        </p:spPr>
+      </p:pic>
+      <p:sp>
+        <p:nvSpPr>
+          <p:cNvPr id="8" name="TextBox 7">
+            <a:extLst>
+              <a:ext uri="{FF2B5EF4-FFF2-40B4-BE49-F238E27FC236}">
+                <a16:creationId xmlns:a16="http://schemas.microsoft.com/office/drawing/2014/main" id="{CCBF6A85-5F13-3267-7016-A5B242B7FF98}"/>
+              </a:ext>
+            </a:extLst>
+          </p:cNvPr>
+          <p:cNvSpPr txBox="1"/>
+          <p:nvPr/>
+        </p:nvSpPr>
+        <p:spPr>
+          <a:xfrm>
+            <a:off x="6302826" y="6356350"/>
+            <a:ext cx="644512" cy="246221"/>
+          </a:xfrm>
+          <a:prstGeom prst="rect">
+            <a:avLst/>
+          </a:prstGeom>
+          <a:noFill/>
+        </p:spPr>
+        <p:txBody>
+          <a:bodyPr wrap="square" rtlCol="0">
+            <a:spAutoFit/>
+          </a:bodyPr>
+          <a:lstStyle/>
+          <a:p>
+            <a:r>
+              <a:rPr lang="de-DE" sz="1000" dirty="0">
+                <a:hlinkClick r:id="rId3"/>
+              </a:rPr>
+              <a:t>source</a:t>
+            </a:r>
+            <a:endParaRPr lang="de-DE" sz="1000" dirty="0"/>
+          </a:p>
+        </p:txBody>
+      </p:sp>
+      <p:sp>
+        <p:nvSpPr>
+          <p:cNvPr id="9" name="Inhaltsplatzhalter 8">
+            <a:extLst>
+              <a:ext uri="{FF2B5EF4-FFF2-40B4-BE49-F238E27FC236}">
+                <a16:creationId xmlns:a16="http://schemas.microsoft.com/office/drawing/2014/main" id="{26BAE1A0-1615-EE5C-7E82-5B0C212C8B02}"/>
+              </a:ext>
+            </a:extLst>
+          </p:cNvPr>
+          <p:cNvSpPr>
+            <a:spLocks noGrp="1"/>
+          </p:cNvSpPr>
+          <p:nvPr>
+            <p:ph idx="1"/>
+          </p:nvPr>
+        </p:nvSpPr>
+        <p:spPr/>
+        <p:txBody>
+          <a:bodyPr/>
+          <a:lstStyle/>
+          <a:p>
+            <a:pPr marL="0" indent="0">
+              <a:buNone/>
+            </a:pPr>
+            <a:r>
+              <a:rPr lang="de-DE" dirty="0" err="1"/>
+              <a:t>make</a:t>
+            </a:r>
+            <a:r>
+              <a:rPr lang="de-DE" dirty="0"/>
+              <a:t> </a:t>
+            </a:r>
+            <a:r>
+              <a:rPr lang="de-DE" dirty="0" err="1"/>
+              <a:t>use</a:t>
+            </a:r>
+            <a:r>
+              <a:rPr lang="de-DE" dirty="0"/>
+              <a:t> </a:t>
+            </a:r>
+            <a:r>
+              <a:rPr lang="de-DE" dirty="0" err="1"/>
+              <a:t>of</a:t>
+            </a:r>
+            <a:r>
+              <a:rPr lang="de-DE" dirty="0"/>
+              <a:t> </a:t>
+            </a:r>
+            <a:r>
+              <a:rPr lang="de-DE" dirty="0" err="1"/>
+              <a:t>your</a:t>
+            </a:r>
+            <a:r>
+              <a:rPr lang="de-DE" dirty="0"/>
+              <a:t> own </a:t>
+            </a:r>
+            <a:r>
+              <a:rPr lang="de-DE" dirty="0" err="1"/>
+              <a:t>data</a:t>
+            </a:r>
+            <a:r>
+              <a:rPr lang="de-DE" dirty="0"/>
+              <a:t> (domain-</a:t>
+            </a:r>
+            <a:r>
+              <a:rPr lang="de-DE" dirty="0" err="1"/>
+              <a:t>specific</a:t>
+            </a:r>
+            <a:r>
+              <a:rPr lang="de-DE" dirty="0"/>
+              <a:t>, high-quality)</a:t>
+            </a:r>
+          </a:p>
+          <a:p>
+            <a:pPr marL="0" indent="0">
+              <a:buNone/>
+            </a:pPr>
+            <a:endParaRPr lang="de-DE" dirty="0"/>
+          </a:p>
+          <a:p>
+            <a:pPr marL="0" indent="0">
+              <a:buNone/>
+            </a:pPr>
+            <a:r>
+              <a:rPr lang="de-DE" dirty="0" err="1"/>
+              <a:t>instruction</a:t>
+            </a:r>
+            <a:r>
+              <a:rPr lang="de-DE" dirty="0"/>
+              <a:t> </a:t>
+            </a:r>
+            <a:r>
+              <a:rPr lang="de-DE" dirty="0" err="1"/>
+              <a:t>tuning</a:t>
+            </a:r>
+            <a:r>
+              <a:rPr lang="de-DE" dirty="0"/>
+              <a:t> </a:t>
+            </a:r>
+            <a:r>
+              <a:rPr lang="de-DE" dirty="0" err="1"/>
+              <a:t>typically</a:t>
+            </a:r>
+            <a:r>
+              <a:rPr lang="de-DE" dirty="0"/>
+              <a:t> </a:t>
+            </a:r>
+            <a:r>
+              <a:rPr lang="de-DE" dirty="0" err="1"/>
+              <a:t>for</a:t>
+            </a:r>
+            <a:r>
+              <a:rPr lang="de-DE" dirty="0"/>
+              <a:t> </a:t>
+            </a:r>
+            <a:r>
+              <a:rPr lang="de-DE" dirty="0" err="1"/>
+              <a:t>more</a:t>
+            </a:r>
+            <a:r>
+              <a:rPr lang="de-DE" dirty="0"/>
+              <a:t> </a:t>
+            </a:r>
+            <a:r>
+              <a:rPr lang="de-DE" dirty="0" err="1"/>
+              <a:t>generic</a:t>
+            </a:r>
+            <a:r>
+              <a:rPr lang="de-DE" dirty="0"/>
+              <a:t> expert, like </a:t>
+            </a:r>
+            <a:r>
+              <a:rPr lang="de-DE" dirty="0" err="1"/>
+              <a:t>coding</a:t>
+            </a:r>
+            <a:r>
+              <a:rPr lang="de-DE" dirty="0"/>
+              <a:t> (but </a:t>
+            </a:r>
+            <a:r>
+              <a:rPr lang="de-DE" dirty="0" err="1"/>
+              <a:t>can</a:t>
+            </a:r>
+            <a:r>
+              <a:rPr lang="de-DE" dirty="0"/>
+              <a:t> also </a:t>
+            </a:r>
+            <a:r>
+              <a:rPr lang="de-DE" dirty="0" err="1"/>
+              <a:t>be</a:t>
+            </a:r>
+            <a:r>
+              <a:rPr lang="de-DE" dirty="0"/>
+              <a:t> a </a:t>
+            </a:r>
+            <a:r>
+              <a:rPr lang="de-DE" dirty="0" err="1"/>
+              <a:t>more</a:t>
+            </a:r>
+            <a:r>
+              <a:rPr lang="de-DE" dirty="0"/>
+              <a:t> </a:t>
+            </a:r>
+            <a:r>
+              <a:rPr lang="de-DE" dirty="0" err="1"/>
+              <a:t>specific</a:t>
+            </a:r>
+            <a:r>
+              <a:rPr lang="de-DE" dirty="0"/>
+              <a:t> </a:t>
+            </a:r>
+            <a:r>
+              <a:rPr lang="de-DE" dirty="0" err="1"/>
+              <a:t>thing</a:t>
+            </a:r>
+            <a:r>
+              <a:rPr lang="de-DE" dirty="0"/>
+              <a:t> on private </a:t>
+            </a:r>
+            <a:r>
+              <a:rPr lang="de-DE" dirty="0" err="1"/>
+              <a:t>data</a:t>
+            </a:r>
+            <a:r>
+              <a:rPr lang="de-DE" dirty="0"/>
+              <a:t>)</a:t>
+            </a:r>
+          </a:p>
+        </p:txBody>
+      </p:sp>
+    </p:spTree>
+    <p:extLst>
+      <p:ext uri="{BB962C8B-B14F-4D97-AF65-F5344CB8AC3E}">
+        <p14:creationId xmlns:p14="http://schemas.microsoft.com/office/powerpoint/2010/main" val="3433214716"/>
+      </p:ext>
+    </p:extLst>
+  </p:cSld>
+  <p:clrMapOvr>
+    <a:masterClrMapping/>
+  </p:clrMapOvr>
+</p:sld>
+</file>
+
+<file path=ppt/slides/slide17.xml><?xml version="1.0" encoding="utf-8"?>
+<p:sld xmlns:a="http://schemas.openxmlformats.org/drawingml/2006/main" xmlns:r="http://schemas.openxmlformats.org/officeDocument/2006/relationships" xmlns:p="http://schemas.openxmlformats.org/presentationml/2006/main">
+  <p:cSld>
+    <p:spTree>
+      <p:nvGrpSpPr>
+        <p:cNvPr id="1" name=""/>
+        <p:cNvGrpSpPr/>
+        <p:nvPr/>
+      </p:nvGrpSpPr>
+      <p:grpSpPr>
+        <a:xfrm>
+          <a:off x="0" y="0"/>
+          <a:ext cx="0" cy="0"/>
+          <a:chOff x="0" y="0"/>
+          <a:chExt cx="0" cy="0"/>
+        </a:xfrm>
+      </p:grpSpPr>
+      <p:sp>
+        <p:nvSpPr>
+          <p:cNvPr id="5" name="Titel 4">
+            <a:extLst>
+              <a:ext uri="{FF2B5EF4-FFF2-40B4-BE49-F238E27FC236}">
+                <a16:creationId xmlns:a16="http://schemas.microsoft.com/office/drawing/2014/main" id="{4ED462E1-7391-FF3F-8ADF-6D5135CCE104}"/>
+              </a:ext>
+            </a:extLst>
+          </p:cNvPr>
+          <p:cNvSpPr>
+            <a:spLocks noGrp="1"/>
+          </p:cNvSpPr>
+          <p:nvPr>
+            <p:ph type="title"/>
+          </p:nvPr>
+        </p:nvSpPr>
+        <p:spPr/>
+        <p:txBody>
+          <a:bodyPr/>
+          <a:lstStyle/>
+          <a:p>
+            <a:endParaRPr lang="de-DE"/>
+          </a:p>
+        </p:txBody>
+      </p:sp>
+      <p:sp>
+        <p:nvSpPr>
+          <p:cNvPr id="4" name="Foliennummernplatzhalter 3">
+            <a:extLst>
+              <a:ext uri="{FF2B5EF4-FFF2-40B4-BE49-F238E27FC236}">
+                <a16:creationId xmlns:a16="http://schemas.microsoft.com/office/drawing/2014/main" id="{7B347D77-2736-E668-977C-E7F81439B1C6}"/>
+              </a:ext>
+            </a:extLst>
+          </p:cNvPr>
+          <p:cNvSpPr>
+            <a:spLocks noGrp="1"/>
+          </p:cNvSpPr>
+          <p:nvPr>
+            <p:ph type="sldNum" sz="quarter" idx="12"/>
+          </p:nvPr>
+        </p:nvSpPr>
+        <p:spPr/>
+        <p:txBody>
+          <a:bodyPr/>
+          <a:lstStyle/>
+          <a:p>
             <a:fld id="{4055531C-5681-6B44-B2CA-926D7A74B06D}" type="slidenum">
               <a:rPr lang="de-DE" smtClean="0"/>
-              <a:t>16</a:t>
+              <a:t>17</a:t>
             </a:fld>
             <a:endParaRPr lang="de-DE"/>
           </a:p>
@@ -9968,148 +10795,6 @@
 </p:sld>
 </file>
 
-<file path=ppt/slides/slide17.xml><?xml version="1.0" encoding="utf-8"?>
-<p:sld xmlns:a="http://schemas.openxmlformats.org/drawingml/2006/main" xmlns:r="http://schemas.openxmlformats.org/officeDocument/2006/relationships" xmlns:p="http://schemas.openxmlformats.org/presentationml/2006/main">
-  <p:cSld>
-    <p:spTree>
-      <p:nvGrpSpPr>
-        <p:cNvPr id="1" name=""/>
-        <p:cNvGrpSpPr/>
-        <p:nvPr/>
-      </p:nvGrpSpPr>
-      <p:grpSpPr>
-        <a:xfrm>
-          <a:off x="0" y="0"/>
-          <a:ext cx="0" cy="0"/>
-          <a:chOff x="0" y="0"/>
-          <a:chExt cx="0" cy="0"/>
-        </a:xfrm>
-      </p:grpSpPr>
-      <p:sp>
-        <p:nvSpPr>
-          <p:cNvPr id="2" name="Titel 1">
-            <a:extLst>
-              <a:ext uri="{FF2B5EF4-FFF2-40B4-BE49-F238E27FC236}">
-                <a16:creationId xmlns:a16="http://schemas.microsoft.com/office/drawing/2014/main" id="{E8DCEE70-38C0-6533-2AC9-319D23948A94}"/>
-              </a:ext>
-            </a:extLst>
-          </p:cNvPr>
-          <p:cNvSpPr>
-            <a:spLocks noGrp="1"/>
-          </p:cNvSpPr>
-          <p:nvPr>
-            <p:ph type="title"/>
-          </p:nvPr>
-        </p:nvSpPr>
-        <p:spPr/>
-        <p:txBody>
-          <a:bodyPr/>
-          <a:lstStyle/>
-          <a:p>
-            <a:r>
-              <a:rPr lang="de-DE" dirty="0" err="1"/>
-              <a:t>Instruction</a:t>
-            </a:r>
-            <a:r>
-              <a:rPr lang="de-DE" dirty="0"/>
-              <a:t> Tuning</a:t>
-            </a:r>
-          </a:p>
-        </p:txBody>
-      </p:sp>
-      <p:sp>
-        <p:nvSpPr>
-          <p:cNvPr id="3" name="Inhaltsplatzhalter 2">
-            <a:extLst>
-              <a:ext uri="{FF2B5EF4-FFF2-40B4-BE49-F238E27FC236}">
-                <a16:creationId xmlns:a16="http://schemas.microsoft.com/office/drawing/2014/main" id="{6058E5BD-E8C1-3A42-10A3-CBE78B1726A4}"/>
-              </a:ext>
-            </a:extLst>
-          </p:cNvPr>
-          <p:cNvSpPr>
-            <a:spLocks noGrp="1"/>
-          </p:cNvSpPr>
-          <p:nvPr>
-            <p:ph idx="1"/>
-          </p:nvPr>
-        </p:nvSpPr>
-        <p:spPr/>
-        <p:txBody>
-          <a:bodyPr/>
-          <a:lstStyle/>
-          <a:p>
-            <a:r>
-              <a:rPr lang="de-DE" dirty="0"/>
-              <a:t>…</a:t>
-            </a:r>
-          </a:p>
-          <a:p>
-            <a:r>
-              <a:rPr lang="en-GB" dirty="0"/>
-              <a:t>supervised fine-tuning (</a:t>
-            </a:r>
-            <a:r>
-              <a:rPr lang="en-GB" dirty="0">
-                <a:hlinkClick r:id="rId2"/>
-              </a:rPr>
-              <a:t>SFT</a:t>
-            </a:r>
-            <a:r>
-              <a:rPr lang="en-GB" dirty="0"/>
-              <a:t>)</a:t>
-            </a:r>
-          </a:p>
-          <a:p>
-            <a:r>
-              <a:rPr lang="en-GB" dirty="0"/>
-              <a:t>(e.g., formatting)</a:t>
-            </a:r>
-            <a:endParaRPr lang="de-DE" dirty="0"/>
-          </a:p>
-        </p:txBody>
-      </p:sp>
-      <p:sp>
-        <p:nvSpPr>
-          <p:cNvPr id="4" name="Foliennummernplatzhalter 3">
-            <a:extLst>
-              <a:ext uri="{FF2B5EF4-FFF2-40B4-BE49-F238E27FC236}">
-                <a16:creationId xmlns:a16="http://schemas.microsoft.com/office/drawing/2014/main" id="{97D7E70E-8F09-7DCF-2E5A-5879BF103E88}"/>
-              </a:ext>
-            </a:extLst>
-          </p:cNvPr>
-          <p:cNvSpPr>
-            <a:spLocks noGrp="1"/>
-          </p:cNvSpPr>
-          <p:nvPr>
-            <p:ph type="sldNum" sz="quarter" idx="12"/>
-          </p:nvPr>
-        </p:nvSpPr>
-        <p:spPr/>
-        <p:txBody>
-          <a:bodyPr/>
-          <a:lstStyle/>
-          <a:p>
-            <a:fld id="{4055531C-5681-6B44-B2CA-926D7A74B06D}" type="slidenum">
-              <a:rPr lang="de-DE" smtClean="0"/>
-              <a:t>17</a:t>
-            </a:fld>
-            <a:endParaRPr lang="de-DE"/>
-          </a:p>
-        </p:txBody>
-      </p:sp>
-    </p:spTree>
-    <p:extLst>
-      <p:ext uri="{BB962C8B-B14F-4D97-AF65-F5344CB8AC3E}">
-        <p14:creationId xmlns:p14="http://schemas.microsoft.com/office/powerpoint/2010/main" val="3009532390"/>
-      </p:ext>
-    </p:extLst>
-  </p:cSld>
-  <p:clrMapOvr>
-    <a:masterClrMapping/>
-  </p:clrMapOvr>
-</p:sld>
-</file>
-
 <file path=ppt/slides/slide18.xml><?xml version="1.0" encoding="utf-8"?>
 <p:sld xmlns:a="http://schemas.openxmlformats.org/drawingml/2006/main" xmlns:r="http://schemas.openxmlformats.org/officeDocument/2006/relationships" xmlns:p="http://schemas.openxmlformats.org/presentationml/2006/main">
   <p:cSld>
@@ -10132,7 +10817,7 @@
           <p:cNvPr id="2" name="Titel 1">
             <a:extLst>
               <a:ext uri="{FF2B5EF4-FFF2-40B4-BE49-F238E27FC236}">
-                <a16:creationId xmlns:a16="http://schemas.microsoft.com/office/drawing/2014/main" id="{66694547-5151-D7D3-A925-23192933D4D6}"/>
+                <a16:creationId xmlns:a16="http://schemas.microsoft.com/office/drawing/2014/main" id="{E8DCEE70-38C0-6533-2AC9-319D23948A94}"/>
               </a:ext>
             </a:extLst>
           </p:cNvPr>
@@ -10149,14 +10834,13 @@
           <a:lstStyle/>
           <a:p>
             <a:r>
-              <a:rPr lang="de-DE" dirty="0"/>
-              <a:t>Use Case: Question </a:t>
-            </a:r>
-            <a:r>
-              <a:rPr lang="de-DE" dirty="0" err="1"/>
-              <a:t>Answering</a:t>
-            </a:r>
-            <a:endParaRPr lang="de-DE" dirty="0"/>
+              <a:rPr lang="de-DE" dirty="0" err="1"/>
+              <a:t>Instruction</a:t>
+            </a:r>
+            <a:r>
+              <a:rPr lang="de-DE" dirty="0"/>
+              <a:t> Tuning</a:t>
+            </a:r>
           </a:p>
         </p:txBody>
       </p:sp>
@@ -10165,7 +10849,7 @@
           <p:cNvPr id="3" name="Inhaltsplatzhalter 2">
             <a:extLst>
               <a:ext uri="{FF2B5EF4-FFF2-40B4-BE49-F238E27FC236}">
-                <a16:creationId xmlns:a16="http://schemas.microsoft.com/office/drawing/2014/main" id="{16ECF3B4-00CD-08EC-E43D-808D6F92E4C7}"/>
+                <a16:creationId xmlns:a16="http://schemas.microsoft.com/office/drawing/2014/main" id="{6058E5BD-E8C1-3A42-10A3-CBE78B1726A4}"/>
               </a:ext>
             </a:extLst>
           </p:cNvPr>
@@ -10181,7 +10865,33 @@
           <a:bodyPr/>
           <a:lstStyle/>
           <a:p>
-            <a:endParaRPr lang="de-DE"/>
+            <a:r>
+              <a:rPr lang="de-DE" dirty="0"/>
+              <a:t>…</a:t>
+            </a:r>
+          </a:p>
+          <a:p>
+            <a:r>
+              <a:rPr lang="en-GB" dirty="0"/>
+              <a:t>supervised fine-tuning (</a:t>
+            </a:r>
+            <a:r>
+              <a:rPr lang="en-GB" dirty="0">
+                <a:hlinkClick r:id="rId2"/>
+              </a:rPr>
+              <a:t>SFT</a:t>
+            </a:r>
+            <a:r>
+              <a:rPr lang="en-GB" dirty="0"/>
+              <a:t>)</a:t>
+            </a:r>
+          </a:p>
+          <a:p>
+            <a:r>
+              <a:rPr lang="en-GB" dirty="0"/>
+              <a:t>(e.g., formatting)</a:t>
+            </a:r>
+            <a:endParaRPr lang="de-DE" dirty="0"/>
           </a:p>
         </p:txBody>
       </p:sp>
@@ -10190,7 +10900,7 @@
           <p:cNvPr id="4" name="Foliennummernplatzhalter 3">
             <a:extLst>
               <a:ext uri="{FF2B5EF4-FFF2-40B4-BE49-F238E27FC236}">
-                <a16:creationId xmlns:a16="http://schemas.microsoft.com/office/drawing/2014/main" id="{FF4B0235-81C4-B185-7A07-065F0D4471A3}"/>
+                <a16:creationId xmlns:a16="http://schemas.microsoft.com/office/drawing/2014/main" id="{97D7E70E-8F09-7DCF-2E5A-5879BF103E88}"/>
               </a:ext>
             </a:extLst>
           </p:cNvPr>
@@ -10217,7 +10927,7 @@
     </p:spTree>
     <p:extLst>
       <p:ext uri="{BB962C8B-B14F-4D97-AF65-F5344CB8AC3E}">
-        <p14:creationId xmlns:p14="http://schemas.microsoft.com/office/powerpoint/2010/main" val="687081360"/>
+        <p14:creationId xmlns:p14="http://schemas.microsoft.com/office/powerpoint/2010/main" val="3009532390"/>
       </p:ext>
     </p:extLst>
   </p:cSld>
@@ -10246,10 +10956,10 @@
       </p:grpSpPr>
       <p:sp>
         <p:nvSpPr>
-          <p:cNvPr id="3" name="Titel 2">
-            <a:extLst>
-              <a:ext uri="{FF2B5EF4-FFF2-40B4-BE49-F238E27FC236}">
-                <a16:creationId xmlns:a16="http://schemas.microsoft.com/office/drawing/2014/main" id="{4B6824DA-8B74-F684-F880-FDAAE5FC687C}"/>
+          <p:cNvPr id="2" name="Titel 1">
+            <a:extLst>
+              <a:ext uri="{FF2B5EF4-FFF2-40B4-BE49-F238E27FC236}">
+                <a16:creationId xmlns:a16="http://schemas.microsoft.com/office/drawing/2014/main" id="{66694547-5151-D7D3-A925-23192933D4D6}"/>
               </a:ext>
             </a:extLst>
           </p:cNvPr>
@@ -10267,17 +10977,22 @@
           <a:p>
             <a:r>
               <a:rPr lang="de-DE" dirty="0"/>
-              <a:t>Vibe Coding</a:t>
-            </a:r>
-          </a:p>
-        </p:txBody>
-      </p:sp>
-      <p:sp>
-        <p:nvSpPr>
-          <p:cNvPr id="4" name="Inhaltsplatzhalter 3">
-            <a:extLst>
-              <a:ext uri="{FF2B5EF4-FFF2-40B4-BE49-F238E27FC236}">
-                <a16:creationId xmlns:a16="http://schemas.microsoft.com/office/drawing/2014/main" id="{6F9C158D-A2EE-2A3F-360F-3F48C1631E96}"/>
+              <a:t>Use Case: Question </a:t>
+            </a:r>
+            <a:r>
+              <a:rPr lang="de-DE" dirty="0" err="1"/>
+              <a:t>Answering</a:t>
+            </a:r>
+            <a:endParaRPr lang="de-DE" dirty="0"/>
+          </a:p>
+        </p:txBody>
+      </p:sp>
+      <p:sp>
+        <p:nvSpPr>
+          <p:cNvPr id="3" name="Inhaltsplatzhalter 2">
+            <a:extLst>
+              <a:ext uri="{FF2B5EF4-FFF2-40B4-BE49-F238E27FC236}">
+                <a16:creationId xmlns:a16="http://schemas.microsoft.com/office/drawing/2014/main" id="{16ECF3B4-00CD-08EC-E43D-808D6F92E4C7}"/>
               </a:ext>
             </a:extLst>
           </p:cNvPr>
@@ -10299,10 +11014,10 @@
       </p:sp>
       <p:sp>
         <p:nvSpPr>
-          <p:cNvPr id="2" name="Foliennummernplatzhalter 1">
-            <a:extLst>
-              <a:ext uri="{FF2B5EF4-FFF2-40B4-BE49-F238E27FC236}">
-                <a16:creationId xmlns:a16="http://schemas.microsoft.com/office/drawing/2014/main" id="{2FCD1A9F-76D0-3A1D-0524-21380D475A5C}"/>
+          <p:cNvPr id="4" name="Foliennummernplatzhalter 3">
+            <a:extLst>
+              <a:ext uri="{FF2B5EF4-FFF2-40B4-BE49-F238E27FC236}">
+                <a16:creationId xmlns:a16="http://schemas.microsoft.com/office/drawing/2014/main" id="{FF4B0235-81C4-B185-7A07-065F0D4471A3}"/>
               </a:ext>
             </a:extLst>
           </p:cNvPr>
@@ -10329,7 +11044,7 @@
     </p:spTree>
     <p:extLst>
       <p:ext uri="{BB962C8B-B14F-4D97-AF65-F5344CB8AC3E}">
-        <p14:creationId xmlns:p14="http://schemas.microsoft.com/office/powerpoint/2010/main" val="2476970652"/>
+        <p14:creationId xmlns:p14="http://schemas.microsoft.com/office/powerpoint/2010/main" val="687081360"/>
       </p:ext>
     </p:extLst>
   </p:cSld>
@@ -11719,157 +12434,99 @@
       </p:grpSpPr>
       <p:sp>
         <p:nvSpPr>
-          <p:cNvPr id="16" name="Abgerundetes Rechteck 15">
-            <a:extLst>
-              <a:ext uri="{FF2B5EF4-FFF2-40B4-BE49-F238E27FC236}">
-                <a16:creationId xmlns:a16="http://schemas.microsoft.com/office/drawing/2014/main" id="{C2CF71D3-F9F6-B398-513E-188910BE90BC}"/>
-              </a:ext>
-            </a:extLst>
-          </p:cNvPr>
-          <p:cNvSpPr/>
+          <p:cNvPr id="4" name="Foliennummernplatzhalter 3">
+            <a:extLst>
+              <a:ext uri="{FF2B5EF4-FFF2-40B4-BE49-F238E27FC236}">
+                <a16:creationId xmlns:a16="http://schemas.microsoft.com/office/drawing/2014/main" id="{F8399663-9922-19FF-0C11-ACBEFDAAA30F}"/>
+              </a:ext>
+            </a:extLst>
+          </p:cNvPr>
+          <p:cNvSpPr>
+            <a:spLocks noGrp="1"/>
+          </p:cNvSpPr>
+          <p:nvPr>
+            <p:ph type="sldNum" sz="quarter" idx="12"/>
+          </p:nvPr>
+        </p:nvSpPr>
+        <p:spPr/>
+        <p:txBody>
+          <a:bodyPr/>
+          <a:lstStyle/>
+          <a:p>
+            <a:fld id="{4055531C-5681-6B44-B2CA-926D7A74B06D}" type="slidenum">
+              <a:rPr lang="de-DE" smtClean="0"/>
+              <a:t>27</a:t>
+            </a:fld>
+            <a:endParaRPr lang="de-DE"/>
+          </a:p>
+        </p:txBody>
+      </p:sp>
+      <p:pic>
+        <p:nvPicPr>
+          <p:cNvPr id="6" name="Grafik 5">
+            <a:extLst>
+              <a:ext uri="{FF2B5EF4-FFF2-40B4-BE49-F238E27FC236}">
+                <a16:creationId xmlns:a16="http://schemas.microsoft.com/office/drawing/2014/main" id="{A567973F-4CA1-AD37-154D-E291AE0C5F4B}"/>
+              </a:ext>
+            </a:extLst>
+          </p:cNvPr>
+          <p:cNvPicPr>
+            <a:picLocks noChangeAspect="1"/>
+          </p:cNvPicPr>
           <p:nvPr/>
-        </p:nvSpPr>
+        </p:nvPicPr>
+        <p:blipFill>
+          <a:blip r:embed="rId2"/>
+          <a:stretch>
+            <a:fillRect/>
+          </a:stretch>
+        </p:blipFill>
         <p:spPr>
           <a:xfrm>
-            <a:off x="838198" y="1742480"/>
-            <a:ext cx="10210802" cy="682236"/>
+            <a:off x="1837214" y="68262"/>
+            <a:ext cx="8517571" cy="6721475"/>
           </a:xfrm>
-          <a:prstGeom prst="roundRect">
+          <a:prstGeom prst="rect">
             <a:avLst/>
           </a:prstGeom>
-          <a:solidFill>
-            <a:schemeClr val="bg2"/>
-          </a:solidFill>
         </p:spPr>
-        <p:style>
-          <a:lnRef idx="2">
-            <a:schemeClr val="accent1">
-              <a:shade val="15000"/>
-            </a:schemeClr>
-          </a:lnRef>
-          <a:fillRef idx="1">
-            <a:schemeClr val="accent1"/>
-          </a:fillRef>
-          <a:effectRef idx="0">
-            <a:schemeClr val="accent1"/>
-          </a:effectRef>
-          <a:fontRef idx="minor">
-            <a:schemeClr val="lt1"/>
-          </a:fontRef>
-        </p:style>
-        <p:txBody>
-          <a:bodyPr rtlCol="0" anchor="ctr"/>
-          <a:lstStyle/>
-          <a:p>
-            <a:pPr algn="ctr"/>
-            <a:endParaRPr lang="de-DE"/>
-          </a:p>
-        </p:txBody>
-      </p:sp>
-      <p:sp>
-        <p:nvSpPr>
-          <p:cNvPr id="15" name="Abgerundetes Rechteck 14">
-            <a:extLst>
-              <a:ext uri="{FF2B5EF4-FFF2-40B4-BE49-F238E27FC236}">
-                <a16:creationId xmlns:a16="http://schemas.microsoft.com/office/drawing/2014/main" id="{D1D2C1B1-5072-3473-0849-846900EBB4BA}"/>
-              </a:ext>
-            </a:extLst>
-          </p:cNvPr>
-          <p:cNvSpPr/>
-          <p:nvPr/>
-        </p:nvSpPr>
-        <p:spPr>
-          <a:xfrm>
-            <a:off x="838198" y="2853230"/>
-            <a:ext cx="10210802" cy="1605565"/>
-          </a:xfrm>
-          <a:prstGeom prst="roundRect">
-            <a:avLst/>
-          </a:prstGeom>
-          <a:solidFill>
-            <a:schemeClr val="bg2"/>
-          </a:solidFill>
-        </p:spPr>
-        <p:style>
-          <a:lnRef idx="2">
-            <a:schemeClr val="accent1">
-              <a:shade val="15000"/>
-            </a:schemeClr>
-          </a:lnRef>
-          <a:fillRef idx="1">
-            <a:schemeClr val="accent1"/>
-          </a:fillRef>
-          <a:effectRef idx="0">
-            <a:schemeClr val="accent1"/>
-          </a:effectRef>
-          <a:fontRef idx="minor">
-            <a:schemeClr val="lt1"/>
-          </a:fontRef>
-        </p:style>
-        <p:txBody>
-          <a:bodyPr rtlCol="0" anchor="ctr"/>
-          <a:lstStyle/>
-          <a:p>
-            <a:pPr algn="ctr"/>
-            <a:endParaRPr lang="de-DE"/>
-          </a:p>
-        </p:txBody>
-      </p:sp>
-      <p:sp>
-        <p:nvSpPr>
-          <p:cNvPr id="8" name="Abgerundetes Rechteck 7">
-            <a:extLst>
-              <a:ext uri="{FF2B5EF4-FFF2-40B4-BE49-F238E27FC236}">
-                <a16:creationId xmlns:a16="http://schemas.microsoft.com/office/drawing/2014/main" id="{64A12374-ACEF-7777-B3C5-6F49491F5D56}"/>
-              </a:ext>
-            </a:extLst>
-          </p:cNvPr>
-          <p:cNvSpPr/>
-          <p:nvPr/>
-        </p:nvSpPr>
-        <p:spPr>
-          <a:xfrm>
-            <a:off x="838198" y="4887309"/>
-            <a:ext cx="10210802" cy="1605565"/>
-          </a:xfrm>
-          <a:prstGeom prst="roundRect">
-            <a:avLst/>
-          </a:prstGeom>
-          <a:solidFill>
-            <a:schemeClr val="bg2"/>
-          </a:solidFill>
-        </p:spPr>
-        <p:style>
-          <a:lnRef idx="2">
-            <a:schemeClr val="accent1">
-              <a:shade val="15000"/>
-            </a:schemeClr>
-          </a:lnRef>
-          <a:fillRef idx="1">
-            <a:schemeClr val="accent1"/>
-          </a:fillRef>
-          <a:effectRef idx="0">
-            <a:schemeClr val="accent1"/>
-          </a:effectRef>
-          <a:fontRef idx="minor">
-            <a:schemeClr val="lt1"/>
-          </a:fontRef>
-        </p:style>
-        <p:txBody>
-          <a:bodyPr rtlCol="0" anchor="ctr"/>
-          <a:lstStyle/>
-          <a:p>
-            <a:pPr algn="ctr"/>
-            <a:endParaRPr lang="de-DE"/>
-          </a:p>
-        </p:txBody>
-      </p:sp>
-      <p:sp>
-        <p:nvSpPr>
-          <p:cNvPr id="6" name="Title 5">
-            <a:extLst>
-              <a:ext uri="{FF2B5EF4-FFF2-40B4-BE49-F238E27FC236}">
-                <a16:creationId xmlns:a16="http://schemas.microsoft.com/office/drawing/2014/main" id="{A6D4E78A-896B-C79A-E2FE-5D9193754C31}"/>
+      </p:pic>
+    </p:spTree>
+    <p:extLst>
+      <p:ext uri="{BB962C8B-B14F-4D97-AF65-F5344CB8AC3E}">
+        <p14:creationId xmlns:p14="http://schemas.microsoft.com/office/powerpoint/2010/main" val="3605194877"/>
+      </p:ext>
+    </p:extLst>
+  </p:cSld>
+  <p:clrMapOvr>
+    <a:masterClrMapping/>
+  </p:clrMapOvr>
+</p:sld>
+</file>
+
+<file path=ppt/slides/slide28.xml><?xml version="1.0" encoding="utf-8"?>
+<p:sld xmlns:a="http://schemas.openxmlformats.org/drawingml/2006/main" xmlns:r="http://schemas.openxmlformats.org/officeDocument/2006/relationships" xmlns:p="http://schemas.openxmlformats.org/presentationml/2006/main">
+  <p:cSld>
+    <p:spTree>
+      <p:nvGrpSpPr>
+        <p:cNvPr id="1" name=""/>
+        <p:cNvGrpSpPr/>
+        <p:nvPr/>
+      </p:nvGrpSpPr>
+      <p:grpSpPr>
+        <a:xfrm>
+          <a:off x="0" y="0"/>
+          <a:ext cx="0" cy="0"/>
+          <a:chOff x="0" y="0"/>
+          <a:chExt cx="0" cy="0"/>
+        </a:xfrm>
+      </p:grpSpPr>
+      <p:sp>
+        <p:nvSpPr>
+          <p:cNvPr id="2" name="Titel 1">
+            <a:extLst>
+              <a:ext uri="{FF2B5EF4-FFF2-40B4-BE49-F238E27FC236}">
+                <a16:creationId xmlns:a16="http://schemas.microsoft.com/office/drawing/2014/main" id="{20EF1E6E-F30A-7F8D-50CD-E883ED2259DD}"/>
               </a:ext>
             </a:extLst>
           </p:cNvPr>
@@ -11886,18 +12543,23 @@
           <a:lstStyle/>
           <a:p>
             <a:r>
-              <a:rPr lang="en-GB" dirty="0"/>
-              <a:t>Modern Language Models in a Nutshell</a:t>
-            </a:r>
-          </a:p>
-        </p:txBody>
-      </p:sp>
-      <p:sp>
-        <p:nvSpPr>
-          <p:cNvPr id="7" name="Content Placeholder 6">
-            <a:extLst>
-              <a:ext uri="{FF2B5EF4-FFF2-40B4-BE49-F238E27FC236}">
-                <a16:creationId xmlns:a16="http://schemas.microsoft.com/office/drawing/2014/main" id="{E908D6CC-B86F-1636-6F85-AB0B7A2A316F}"/>
+              <a:rPr lang="de-DE" dirty="0"/>
+              <a:t>Next: </a:t>
+            </a:r>
+            <a:r>
+              <a:rPr lang="de-DE" dirty="0" err="1"/>
+              <a:t>Agents</a:t>
+            </a:r>
+            <a:endParaRPr lang="de-DE" dirty="0"/>
+          </a:p>
+        </p:txBody>
+      </p:sp>
+      <p:sp>
+        <p:nvSpPr>
+          <p:cNvPr id="3" name="Inhaltsplatzhalter 2">
+            <a:extLst>
+              <a:ext uri="{FF2B5EF4-FFF2-40B4-BE49-F238E27FC236}">
+                <a16:creationId xmlns:a16="http://schemas.microsoft.com/office/drawing/2014/main" id="{AA51F7B0-46FA-7E09-1BEB-4B91C37A0215}"/>
               </a:ext>
             </a:extLst>
           </p:cNvPr>
@@ -11910,100 +12572,31 @@
         </p:nvSpPr>
         <p:spPr/>
         <p:txBody>
-          <a:bodyPr>
-            <a:normAutofit/>
-          </a:bodyPr>
+          <a:bodyPr/>
           <a:lstStyle/>
           <a:p>
             <a:pPr marL="0" indent="0">
               <a:buNone/>
             </a:pPr>
-            <a:r>
-              <a:rPr lang="en-GB" b="1" dirty="0"/>
-              <a:t>tokenization</a:t>
-            </a:r>
-            <a:r>
-              <a:rPr lang="en-GB" dirty="0"/>
-              <a:t>: split text into chunks</a:t>
-            </a:r>
+            <a:endParaRPr lang="de-DE" dirty="0"/>
           </a:p>
           <a:p>
             <a:pPr marL="0" indent="0">
               <a:buNone/>
             </a:pPr>
-            <a:endParaRPr lang="en-GB" dirty="0"/>
-          </a:p>
-          <a:p>
-            <a:pPr marL="0" indent="0">
-              <a:buNone/>
-            </a:pPr>
-            <a:r>
-              <a:rPr lang="en-GB" b="1" dirty="0"/>
-              <a:t>pretraining</a:t>
-            </a:r>
-            <a:r>
-              <a:rPr lang="en-GB" dirty="0"/>
-              <a:t>: self-supervised, next- or masked-token prediction</a:t>
-            </a:r>
-          </a:p>
-          <a:p>
-            <a:r>
-              <a:rPr lang="en-GB" sz="1800" dirty="0"/>
-              <a:t>vector embeddings from tokens (semantic meaning)</a:t>
-            </a:r>
-            <a:endParaRPr lang="en-GB" sz="1800" dirty="0">
-              <a:sym typeface="Wingdings" pitchFamily="2" charset="2"/>
-            </a:endParaRPr>
-          </a:p>
-          <a:p>
-            <a:r>
-              <a:rPr lang="en-GB" sz="1800" dirty="0"/>
-              <a:t>add positional encoding (attention permutation-invariant)</a:t>
-            </a:r>
-          </a:p>
-          <a:p>
-            <a:r>
-              <a:rPr lang="en-GB" sz="1800" dirty="0"/>
-              <a:t>attention mechanism (transformer) </a:t>
-            </a:r>
-            <a:r>
-              <a:rPr lang="en-GB" sz="1800" dirty="0">
-                <a:sym typeface="Wingdings" pitchFamily="2" charset="2"/>
-              </a:rPr>
-              <a:t></a:t>
-            </a:r>
-            <a:r>
-              <a:rPr lang="en-GB" sz="1800" dirty="0"/>
-              <a:t> contextual embeddings</a:t>
-            </a:r>
-          </a:p>
-          <a:p>
-            <a:pPr marL="0" indent="0">
-              <a:buNone/>
-            </a:pPr>
-            <a:endParaRPr lang="en-GB" dirty="0"/>
-          </a:p>
-          <a:p>
-            <a:pPr marL="0" indent="0">
-              <a:buNone/>
-            </a:pPr>
-            <a:r>
-              <a:rPr lang="en-GB" b="1" dirty="0"/>
-              <a:t>finetuning</a:t>
-            </a:r>
-            <a:r>
-              <a:rPr lang="en-GB" dirty="0"/>
-              <a:t>: specialization</a:t>
-            </a:r>
-          </a:p>
-        </p:txBody>
-      </p:sp>
-      <p:sp>
-        <p:nvSpPr>
-          <p:cNvPr id="5" name="Slide Number Placeholder 4">
-            <a:extLst>
-              <a:ext uri="{FF2B5EF4-FFF2-40B4-BE49-F238E27FC236}">
-                <a16:creationId xmlns:a16="http://schemas.microsoft.com/office/drawing/2014/main" id="{4E568FCF-2CF1-B3CF-F33E-FD3F880A8519}"/>
+            <a:r>
+              <a:rPr lang="de-DE" dirty="0"/>
+              <a:t>…</a:t>
+            </a:r>
+          </a:p>
+        </p:txBody>
+      </p:sp>
+      <p:sp>
+        <p:nvSpPr>
+          <p:cNvPr id="4" name="Foliennummernplatzhalter 3">
+            <a:extLst>
+              <a:ext uri="{FF2B5EF4-FFF2-40B4-BE49-F238E27FC236}">
+                <a16:creationId xmlns:a16="http://schemas.microsoft.com/office/drawing/2014/main" id="{DCED79EF-B4D0-08EC-3556-26AD11F2166E}"/>
               </a:ext>
             </a:extLst>
           </p:cNvPr>
@@ -12019,281 +12612,18 @@
           <a:bodyPr/>
           <a:lstStyle/>
           <a:p>
-            <a:fld id="{849D05A8-43E9-1C49-8606-50AB68220DEC}" type="slidenum">
-              <a:rPr lang="en-DE" smtClean="0"/>
-              <a:t>27</a:t>
+            <a:fld id="{3D4C94FE-FF23-4504-88E9-14D481113291}" type="slidenum">
+              <a:rPr lang="en-GB" smtClean="0"/>
+              <a:t>28</a:t>
             </a:fld>
-            <a:endParaRPr lang="en-DE"/>
-          </a:p>
-        </p:txBody>
-      </p:sp>
-      <p:sp>
-        <p:nvSpPr>
-          <p:cNvPr id="13" name="Textfeld 12">
-            <a:extLst>
-              <a:ext uri="{FF2B5EF4-FFF2-40B4-BE49-F238E27FC236}">
-                <a16:creationId xmlns:a16="http://schemas.microsoft.com/office/drawing/2014/main" id="{462D4140-AC0F-1879-1992-0E7A9644CA76}"/>
-              </a:ext>
-            </a:extLst>
-          </p:cNvPr>
-          <p:cNvSpPr txBox="1"/>
-          <p:nvPr/>
-        </p:nvSpPr>
-        <p:spPr>
-          <a:xfrm>
-            <a:off x="6095999" y="5486399"/>
-            <a:ext cx="5257801" cy="923330"/>
-          </a:xfrm>
-          <a:prstGeom prst="rect">
-            <a:avLst/>
-          </a:prstGeom>
-          <a:noFill/>
-        </p:spPr>
-        <p:txBody>
-          <a:bodyPr wrap="square" rtlCol="0">
-            <a:spAutoFit/>
-          </a:bodyPr>
-          <a:lstStyle/>
-          <a:p>
-            <a:pPr marL="285750" indent="-285750">
-              <a:buFont typeface="Arial" panose="020B0604020202020204" pitchFamily="34" charset="0"/>
-              <a:buChar char="•"/>
-            </a:pPr>
-            <a:r>
-              <a:rPr lang="de-DE" dirty="0" err="1"/>
-              <a:t>assistant</a:t>
-            </a:r>
-            <a:r>
-              <a:rPr lang="de-DE" dirty="0"/>
-              <a:t>/</a:t>
-            </a:r>
-            <a:r>
-              <a:rPr lang="de-DE" dirty="0" err="1"/>
-              <a:t>chatbot</a:t>
-            </a:r>
-            <a:r>
-              <a:rPr lang="de-DE" dirty="0"/>
-              <a:t> (</a:t>
-            </a:r>
-            <a:r>
-              <a:rPr lang="de-DE" dirty="0" err="1"/>
-              <a:t>multipurpose</a:t>
-            </a:r>
-            <a:r>
-              <a:rPr lang="de-DE" dirty="0"/>
-              <a:t>)</a:t>
-            </a:r>
-          </a:p>
-          <a:p>
-            <a:pPr marL="285750" indent="-285750">
-              <a:buFont typeface="Arial" panose="020B0604020202020204" pitchFamily="34" charset="0"/>
-              <a:buChar char="•"/>
-            </a:pPr>
-            <a:r>
-              <a:rPr lang="de-DE" dirty="0" err="1"/>
-              <a:t>instruction</a:t>
-            </a:r>
-            <a:r>
-              <a:rPr lang="de-DE" dirty="0"/>
-              <a:t> </a:t>
-            </a:r>
-            <a:r>
-              <a:rPr lang="de-DE" dirty="0" err="1"/>
-              <a:t>tuning</a:t>
-            </a:r>
-            <a:r>
-              <a:rPr lang="de-DE" dirty="0"/>
-              <a:t> (</a:t>
-            </a:r>
-            <a:r>
-              <a:rPr lang="de-DE" dirty="0" err="1"/>
-              <a:t>decoder-only</a:t>
-            </a:r>
-            <a:r>
-              <a:rPr lang="de-DE" dirty="0"/>
-              <a:t> </a:t>
-            </a:r>
-            <a:r>
-              <a:rPr lang="de-DE" dirty="0" err="1"/>
-              <a:t>transformer</a:t>
-            </a:r>
-            <a:r>
-              <a:rPr lang="de-DE" dirty="0"/>
-              <a:t>), </a:t>
-            </a:r>
-            <a:r>
-              <a:rPr lang="de-DE" dirty="0" err="1"/>
-              <a:t>potentially</a:t>
-            </a:r>
-            <a:r>
-              <a:rPr lang="de-DE" dirty="0"/>
-              <a:t> </a:t>
-            </a:r>
-            <a:r>
-              <a:rPr lang="de-DE" dirty="0" err="1"/>
-              <a:t>followed</a:t>
-            </a:r>
-            <a:r>
-              <a:rPr lang="de-DE" dirty="0"/>
-              <a:t> </a:t>
-            </a:r>
-            <a:r>
-              <a:rPr lang="de-DE" dirty="0" err="1"/>
-              <a:t>by</a:t>
-            </a:r>
-            <a:r>
-              <a:rPr lang="de-DE" dirty="0"/>
-              <a:t> </a:t>
-            </a:r>
-            <a:r>
-              <a:rPr lang="de-DE" dirty="0" err="1"/>
-              <a:t>alignment</a:t>
-            </a:r>
-            <a:endParaRPr lang="de-DE" dirty="0"/>
-          </a:p>
-        </p:txBody>
-      </p:sp>
-      <p:sp>
-        <p:nvSpPr>
-          <p:cNvPr id="14" name="Textfeld 13">
-            <a:extLst>
-              <a:ext uri="{FF2B5EF4-FFF2-40B4-BE49-F238E27FC236}">
-                <a16:creationId xmlns:a16="http://schemas.microsoft.com/office/drawing/2014/main" id="{0ABA88E0-558D-4BEA-50DB-887EA4201B2E}"/>
-              </a:ext>
-            </a:extLst>
-          </p:cNvPr>
-          <p:cNvSpPr txBox="1"/>
-          <p:nvPr/>
-        </p:nvSpPr>
-        <p:spPr>
-          <a:xfrm>
-            <a:off x="838200" y="5486399"/>
-            <a:ext cx="5257799" cy="923330"/>
-          </a:xfrm>
-          <a:prstGeom prst="rect">
-            <a:avLst/>
-          </a:prstGeom>
-          <a:noFill/>
-        </p:spPr>
-        <p:txBody>
-          <a:bodyPr wrap="square" rtlCol="0">
-            <a:spAutoFit/>
-          </a:bodyPr>
-          <a:lstStyle/>
-          <a:p>
-            <a:pPr marL="285750" indent="-285750">
-              <a:buFont typeface="Arial" panose="020B0604020202020204" pitchFamily="34" charset="0"/>
-              <a:buChar char="•"/>
-            </a:pPr>
-            <a:r>
-              <a:rPr lang="de-DE" dirty="0" err="1"/>
-              <a:t>classification</a:t>
-            </a:r>
-            <a:r>
-              <a:rPr lang="de-DE" dirty="0"/>
-              <a:t> </a:t>
-            </a:r>
-            <a:r>
-              <a:rPr lang="de-DE" dirty="0" err="1"/>
-              <a:t>model</a:t>
-            </a:r>
-            <a:r>
-              <a:rPr lang="de-DE" dirty="0"/>
-              <a:t> (</a:t>
-            </a:r>
-            <a:r>
-              <a:rPr lang="de-DE" dirty="0" err="1"/>
-              <a:t>specific</a:t>
-            </a:r>
-            <a:r>
-              <a:rPr lang="de-DE" dirty="0"/>
-              <a:t> </a:t>
-            </a:r>
-            <a:r>
-              <a:rPr lang="de-DE" dirty="0" err="1"/>
-              <a:t>task</a:t>
-            </a:r>
-            <a:r>
-              <a:rPr lang="de-DE" dirty="0"/>
-              <a:t>)</a:t>
-            </a:r>
-          </a:p>
-          <a:p>
-            <a:pPr marL="285750" indent="-285750">
-              <a:buFont typeface="Arial" panose="020B0604020202020204" pitchFamily="34" charset="0"/>
-              <a:buChar char="•"/>
-            </a:pPr>
-            <a:r>
-              <a:rPr lang="de-DE" dirty="0" err="1"/>
-              <a:t>finetuning</a:t>
-            </a:r>
-            <a:r>
-              <a:rPr lang="de-DE" dirty="0"/>
-              <a:t> on </a:t>
-            </a:r>
-            <a:r>
-              <a:rPr lang="de-DE" dirty="0" err="1"/>
-              <a:t>labeled</a:t>
-            </a:r>
-            <a:r>
-              <a:rPr lang="de-DE" dirty="0"/>
-              <a:t> </a:t>
-            </a:r>
-            <a:r>
-              <a:rPr lang="de-DE" dirty="0" err="1"/>
-              <a:t>data</a:t>
-            </a:r>
-            <a:r>
-              <a:rPr lang="de-DE" dirty="0"/>
-              <a:t> </a:t>
-            </a:r>
-            <a:r>
-              <a:rPr lang="de-DE" dirty="0" err="1"/>
-              <a:t>set</a:t>
-            </a:r>
-            <a:r>
-              <a:rPr lang="de-DE" dirty="0"/>
-              <a:t> (</a:t>
-            </a:r>
-            <a:r>
-              <a:rPr lang="de-DE" dirty="0" err="1"/>
-              <a:t>often</a:t>
-            </a:r>
-            <a:r>
-              <a:rPr lang="de-DE" dirty="0"/>
-              <a:t> </a:t>
-            </a:r>
-            <a:r>
-              <a:rPr lang="de-DE" dirty="0" err="1"/>
-              <a:t>using</a:t>
-            </a:r>
-            <a:r>
-              <a:rPr lang="de-DE" dirty="0"/>
-              <a:t> </a:t>
-            </a:r>
-            <a:r>
-              <a:rPr lang="de-DE" dirty="0" err="1"/>
-              <a:t>encoder-only</a:t>
-            </a:r>
-            <a:r>
-              <a:rPr lang="de-DE" dirty="0"/>
-              <a:t> </a:t>
-            </a:r>
-            <a:r>
-              <a:rPr lang="de-DE" dirty="0" err="1"/>
-              <a:t>transformer</a:t>
-            </a:r>
-            <a:r>
-              <a:rPr lang="de-DE" dirty="0"/>
-              <a:t>)</a:t>
-            </a:r>
+            <a:endParaRPr lang="en-GB"/>
           </a:p>
         </p:txBody>
       </p:sp>
     </p:spTree>
     <p:extLst>
       <p:ext uri="{BB962C8B-B14F-4D97-AF65-F5344CB8AC3E}">
-        <p14:creationId xmlns:p14="http://schemas.microsoft.com/office/powerpoint/2010/main" val="106762038"/>
+        <p14:creationId xmlns:p14="http://schemas.microsoft.com/office/powerpoint/2010/main" val="2350334961"/>
       </p:ext>
     </p:extLst>
   </p:cSld>
@@ -12536,10 +12866,157 @@
       </p:grpSpPr>
       <p:sp>
         <p:nvSpPr>
-          <p:cNvPr id="5" name="Title 4">
-            <a:extLst>
-              <a:ext uri="{FF2B5EF4-FFF2-40B4-BE49-F238E27FC236}">
-                <a16:creationId xmlns:a16="http://schemas.microsoft.com/office/drawing/2014/main" id="{3EF7C251-E411-67C1-497C-2BFFEBC05F2B}"/>
+          <p:cNvPr id="16" name="Abgerundetes Rechteck 15">
+            <a:extLst>
+              <a:ext uri="{FF2B5EF4-FFF2-40B4-BE49-F238E27FC236}">
+                <a16:creationId xmlns:a16="http://schemas.microsoft.com/office/drawing/2014/main" id="{C2CF71D3-F9F6-B398-513E-188910BE90BC}"/>
+              </a:ext>
+            </a:extLst>
+          </p:cNvPr>
+          <p:cNvSpPr/>
+          <p:nvPr/>
+        </p:nvSpPr>
+        <p:spPr>
+          <a:xfrm>
+            <a:off x="838198" y="1742480"/>
+            <a:ext cx="10210802" cy="682236"/>
+          </a:xfrm>
+          <a:prstGeom prst="roundRect">
+            <a:avLst/>
+          </a:prstGeom>
+          <a:solidFill>
+            <a:schemeClr val="bg2"/>
+          </a:solidFill>
+        </p:spPr>
+        <p:style>
+          <a:lnRef idx="2">
+            <a:schemeClr val="accent1">
+              <a:shade val="15000"/>
+            </a:schemeClr>
+          </a:lnRef>
+          <a:fillRef idx="1">
+            <a:schemeClr val="accent1"/>
+          </a:fillRef>
+          <a:effectRef idx="0">
+            <a:schemeClr val="accent1"/>
+          </a:effectRef>
+          <a:fontRef idx="minor">
+            <a:schemeClr val="lt1"/>
+          </a:fontRef>
+        </p:style>
+        <p:txBody>
+          <a:bodyPr rtlCol="0" anchor="ctr"/>
+          <a:lstStyle/>
+          <a:p>
+            <a:pPr algn="ctr"/>
+            <a:endParaRPr lang="de-DE"/>
+          </a:p>
+        </p:txBody>
+      </p:sp>
+      <p:sp>
+        <p:nvSpPr>
+          <p:cNvPr id="15" name="Abgerundetes Rechteck 14">
+            <a:extLst>
+              <a:ext uri="{FF2B5EF4-FFF2-40B4-BE49-F238E27FC236}">
+                <a16:creationId xmlns:a16="http://schemas.microsoft.com/office/drawing/2014/main" id="{D1D2C1B1-5072-3473-0849-846900EBB4BA}"/>
+              </a:ext>
+            </a:extLst>
+          </p:cNvPr>
+          <p:cNvSpPr/>
+          <p:nvPr/>
+        </p:nvSpPr>
+        <p:spPr>
+          <a:xfrm>
+            <a:off x="838198" y="2853230"/>
+            <a:ext cx="10210802" cy="1605565"/>
+          </a:xfrm>
+          <a:prstGeom prst="roundRect">
+            <a:avLst/>
+          </a:prstGeom>
+          <a:solidFill>
+            <a:schemeClr val="bg2"/>
+          </a:solidFill>
+        </p:spPr>
+        <p:style>
+          <a:lnRef idx="2">
+            <a:schemeClr val="accent1">
+              <a:shade val="15000"/>
+            </a:schemeClr>
+          </a:lnRef>
+          <a:fillRef idx="1">
+            <a:schemeClr val="accent1"/>
+          </a:fillRef>
+          <a:effectRef idx="0">
+            <a:schemeClr val="accent1"/>
+          </a:effectRef>
+          <a:fontRef idx="minor">
+            <a:schemeClr val="lt1"/>
+          </a:fontRef>
+        </p:style>
+        <p:txBody>
+          <a:bodyPr rtlCol="0" anchor="ctr"/>
+          <a:lstStyle/>
+          <a:p>
+            <a:pPr algn="ctr"/>
+            <a:endParaRPr lang="de-DE"/>
+          </a:p>
+        </p:txBody>
+      </p:sp>
+      <p:sp>
+        <p:nvSpPr>
+          <p:cNvPr id="8" name="Abgerundetes Rechteck 7">
+            <a:extLst>
+              <a:ext uri="{FF2B5EF4-FFF2-40B4-BE49-F238E27FC236}">
+                <a16:creationId xmlns:a16="http://schemas.microsoft.com/office/drawing/2014/main" id="{64A12374-ACEF-7777-B3C5-6F49491F5D56}"/>
+              </a:ext>
+            </a:extLst>
+          </p:cNvPr>
+          <p:cNvSpPr/>
+          <p:nvPr/>
+        </p:nvSpPr>
+        <p:spPr>
+          <a:xfrm>
+            <a:off x="838198" y="4887309"/>
+            <a:ext cx="10210802" cy="1605565"/>
+          </a:xfrm>
+          <a:prstGeom prst="roundRect">
+            <a:avLst/>
+          </a:prstGeom>
+          <a:solidFill>
+            <a:schemeClr val="bg2"/>
+          </a:solidFill>
+        </p:spPr>
+        <p:style>
+          <a:lnRef idx="2">
+            <a:schemeClr val="accent1">
+              <a:shade val="15000"/>
+            </a:schemeClr>
+          </a:lnRef>
+          <a:fillRef idx="1">
+            <a:schemeClr val="accent1"/>
+          </a:fillRef>
+          <a:effectRef idx="0">
+            <a:schemeClr val="accent1"/>
+          </a:effectRef>
+          <a:fontRef idx="minor">
+            <a:schemeClr val="lt1"/>
+          </a:fontRef>
+        </p:style>
+        <p:txBody>
+          <a:bodyPr rtlCol="0" anchor="ctr"/>
+          <a:lstStyle/>
+          <a:p>
+            <a:pPr algn="ctr"/>
+            <a:endParaRPr lang="de-DE"/>
+          </a:p>
+        </p:txBody>
+      </p:sp>
+      <p:sp>
+        <p:nvSpPr>
+          <p:cNvPr id="6" name="Title 5">
+            <a:extLst>
+              <a:ext uri="{FF2B5EF4-FFF2-40B4-BE49-F238E27FC236}">
+                <a16:creationId xmlns:a16="http://schemas.microsoft.com/office/drawing/2014/main" id="{A6D4E78A-896B-C79A-E2FE-5D9193754C31}"/>
               </a:ext>
             </a:extLst>
           </p:cNvPr>
@@ -12556,35 +13033,18 @@
           <a:lstStyle/>
           <a:p>
             <a:r>
-              <a:rPr lang="de-DE" dirty="0"/>
-              <a:t>Transfer Learning </a:t>
-            </a:r>
-            <a:r>
-              <a:rPr lang="de-DE" dirty="0" err="1"/>
-              <a:t>from</a:t>
-            </a:r>
-            <a:r>
-              <a:rPr lang="de-DE" dirty="0"/>
-              <a:t> </a:t>
-            </a:r>
-            <a:r>
-              <a:rPr lang="de-DE" dirty="0" err="1"/>
-              <a:t>Foundation</a:t>
-            </a:r>
-            <a:r>
-              <a:rPr lang="de-DE" dirty="0"/>
-              <a:t> Models</a:t>
-            </a:r>
-            <a:endParaRPr lang="en-GB" dirty="0"/>
-          </a:p>
-        </p:txBody>
-      </p:sp>
-      <p:sp>
-        <p:nvSpPr>
-          <p:cNvPr id="6" name="Content Placeholder 5">
-            <a:extLst>
-              <a:ext uri="{FF2B5EF4-FFF2-40B4-BE49-F238E27FC236}">
-                <a16:creationId xmlns:a16="http://schemas.microsoft.com/office/drawing/2014/main" id="{194FF263-6A7E-63B8-37B4-8152AC6DF7EF}"/>
+              <a:rPr lang="en-GB" dirty="0"/>
+              <a:t>Modern Language Models in a Nutshell</a:t>
+            </a:r>
+          </a:p>
+        </p:txBody>
+      </p:sp>
+      <p:sp>
+        <p:nvSpPr>
+          <p:cNvPr id="7" name="Content Placeholder 6">
+            <a:extLst>
+              <a:ext uri="{FF2B5EF4-FFF2-40B4-BE49-F238E27FC236}">
+                <a16:creationId xmlns:a16="http://schemas.microsoft.com/office/drawing/2014/main" id="{E908D6CC-B86F-1636-6F85-AB0B7A2A316F}"/>
               </a:ext>
             </a:extLst>
           </p:cNvPr>
@@ -12597,24 +13057,21 @@
         </p:nvSpPr>
         <p:spPr/>
         <p:txBody>
-          <a:bodyPr/>
+          <a:bodyPr>
+            <a:normAutofit/>
+          </a:bodyPr>
           <a:lstStyle/>
           <a:p>
             <a:pPr marL="0" indent="0">
               <a:buNone/>
             </a:pPr>
             <a:r>
+              <a:rPr lang="en-GB" b="1" dirty="0"/>
+              <a:t>tokenization</a:t>
+            </a:r>
+            <a:r>
               <a:rPr lang="en-GB" dirty="0"/>
-              <a:t>idea:</a:t>
-            </a:r>
-          </a:p>
-          <a:p>
-            <a:pPr marL="0" indent="0">
-              <a:buNone/>
-            </a:pPr>
-            <a:r>
-              <a:rPr lang="en-GB" dirty="0"/>
-              <a:t>pretrain a big model (called foundation model) on a broad data set, and then use these learnings for subsequent trainings on specific (typically narrow) data by means of feature extraction or finetuning</a:t>
+              <a:t>: split text into chunks</a:t>
             </a:r>
           </a:p>
           <a:p>
@@ -12628,20 +13085,72 @@
               <a:buNone/>
             </a:pPr>
             <a:r>
-              <a:rPr lang="en-GB" dirty="0">
+              <a:rPr lang="en-GB" b="1" dirty="0"/>
+              <a:t>pretraining</a:t>
+            </a:r>
+            <a:r>
+              <a:rPr lang="en-GB" dirty="0"/>
+              <a:t>: self-supervised, next- or masked-token prediction</a:t>
+            </a:r>
+          </a:p>
+          <a:p>
+            <a:r>
+              <a:rPr lang="en-GB" sz="1800" dirty="0"/>
+              <a:t>vector embeddings from tokens (semantic meaning)</a:t>
+            </a:r>
+            <a:endParaRPr lang="en-GB" sz="1800" dirty="0">
+              <a:sym typeface="Wingdings" pitchFamily="2" charset="2"/>
+            </a:endParaRPr>
+          </a:p>
+          <a:p>
+            <a:r>
+              <a:rPr lang="en-GB" sz="1800" dirty="0"/>
+              <a:t>add positional encoding (attention permutation-invariant)</a:t>
+            </a:r>
+          </a:p>
+          <a:p>
+            <a:r>
+              <a:rPr lang="en-GB" sz="1800" dirty="0"/>
+              <a:t>attention mechanism (transformer) </a:t>
+            </a:r>
+            <a:r>
+              <a:rPr lang="en-GB" sz="1800" dirty="0">
                 <a:sym typeface="Wingdings" pitchFamily="2" charset="2"/>
               </a:rPr>
-              <a:t> here: self-supervised, internet-scale pretraining of models like BERT or GPT</a:t>
-            </a:r>
-          </a:p>
-        </p:txBody>
-      </p:sp>
-      <p:sp>
-        <p:nvSpPr>
-          <p:cNvPr id="4" name="Slide Number Placeholder 3">
-            <a:extLst>
-              <a:ext uri="{FF2B5EF4-FFF2-40B4-BE49-F238E27FC236}">
-                <a16:creationId xmlns:a16="http://schemas.microsoft.com/office/drawing/2014/main" id="{4F0B5BE9-331D-0505-FC7E-005F6B05B627}"/>
+              <a:t></a:t>
+            </a:r>
+            <a:r>
+              <a:rPr lang="en-GB" sz="1800" dirty="0"/>
+              <a:t> contextual embeddings</a:t>
+            </a:r>
+          </a:p>
+          <a:p>
+            <a:pPr marL="0" indent="0">
+              <a:buNone/>
+            </a:pPr>
+            <a:endParaRPr lang="en-GB" dirty="0"/>
+          </a:p>
+          <a:p>
+            <a:pPr marL="0" indent="0">
+              <a:buNone/>
+            </a:pPr>
+            <a:r>
+              <a:rPr lang="en-GB" b="1" dirty="0"/>
+              <a:t>finetuning</a:t>
+            </a:r>
+            <a:r>
+              <a:rPr lang="en-GB" dirty="0"/>
+              <a:t>: specialization</a:t>
+            </a:r>
+          </a:p>
+        </p:txBody>
+      </p:sp>
+      <p:sp>
+        <p:nvSpPr>
+          <p:cNvPr id="5" name="Slide Number Placeholder 4">
+            <a:extLst>
+              <a:ext uri="{FF2B5EF4-FFF2-40B4-BE49-F238E27FC236}">
+                <a16:creationId xmlns:a16="http://schemas.microsoft.com/office/drawing/2014/main" id="{4E568FCF-2CF1-B3CF-F33E-FD3F880A8519}"/>
               </a:ext>
             </a:extLst>
           </p:cNvPr>
@@ -12657,20 +13166,20 @@
           <a:bodyPr/>
           <a:lstStyle/>
           <a:p>
-            <a:fld id="{3D4C94FE-FF23-4504-88E9-14D481113291}" type="slidenum">
-              <a:rPr lang="en-GB" smtClean="0"/>
+            <a:fld id="{849D05A8-43E9-1C49-8606-50AB68220DEC}" type="slidenum">
+              <a:rPr lang="en-DE" smtClean="0"/>
               <a:t>4</a:t>
             </a:fld>
-            <a:endParaRPr lang="en-GB"/>
-          </a:p>
-        </p:txBody>
-      </p:sp>
-      <p:sp>
-        <p:nvSpPr>
-          <p:cNvPr id="2" name="TextBox 4">
-            <a:extLst>
-              <a:ext uri="{FF2B5EF4-FFF2-40B4-BE49-F238E27FC236}">
-                <a16:creationId xmlns:a16="http://schemas.microsoft.com/office/drawing/2014/main" id="{F66358C6-7FB2-EACB-408F-55037CA86FF9}"/>
+            <a:endParaRPr lang="en-DE"/>
+          </a:p>
+        </p:txBody>
+      </p:sp>
+      <p:sp>
+        <p:nvSpPr>
+          <p:cNvPr id="13" name="Textfeld 12">
+            <a:extLst>
+              <a:ext uri="{FF2B5EF4-FFF2-40B4-BE49-F238E27FC236}">
+                <a16:creationId xmlns:a16="http://schemas.microsoft.com/office/drawing/2014/main" id="{462D4140-AC0F-1879-1992-0E7A9644CA76}"/>
               </a:ext>
             </a:extLst>
           </p:cNvPr>
@@ -12679,18 +13188,13 @@
         </p:nvSpPr>
         <p:spPr>
           <a:xfrm>
-            <a:off x="2799205" y="5988734"/>
-            <a:ext cx="6593589" cy="646331"/>
+            <a:off x="6095999" y="5486399"/>
+            <a:ext cx="5257801" cy="923330"/>
           </a:xfrm>
           <a:prstGeom prst="rect">
             <a:avLst/>
           </a:prstGeom>
           <a:noFill/>
-          <a:ln>
-            <a:solidFill>
-              <a:schemeClr val="tx1"/>
-            </a:solidFill>
-          </a:ln>
         </p:spPr>
         <p:txBody>
           <a:bodyPr wrap="square" rtlCol="0">
@@ -12698,15 +13202,237 @@
           </a:bodyPr>
           <a:lstStyle/>
           <a:p>
-            <a:r>
-              <a:rPr lang="en-GB" dirty="0"/>
-              <a:t>works well for homogenous, unstructured data (e.g., text, images)</a:t>
-            </a:r>
-          </a:p>
-          <a:p>
-            <a:r>
-              <a:rPr lang="en-GB" dirty="0"/>
-              <a:t>but very difficult for heterogenous, structured/tabular data</a:t>
+            <a:pPr marL="285750" indent="-285750">
+              <a:buFont typeface="Arial" panose="020B0604020202020204" pitchFamily="34" charset="0"/>
+              <a:buChar char="•"/>
+            </a:pPr>
+            <a:r>
+              <a:rPr lang="de-DE" dirty="0" err="1"/>
+              <a:t>assistant</a:t>
+            </a:r>
+            <a:r>
+              <a:rPr lang="de-DE" dirty="0"/>
+              <a:t>/</a:t>
+            </a:r>
+            <a:r>
+              <a:rPr lang="de-DE" dirty="0" err="1"/>
+              <a:t>chatbot</a:t>
+            </a:r>
+            <a:r>
+              <a:rPr lang="de-DE" dirty="0"/>
+              <a:t> (</a:t>
+            </a:r>
+            <a:r>
+              <a:rPr lang="de-DE" dirty="0" err="1"/>
+              <a:t>multipurpose</a:t>
+            </a:r>
+            <a:r>
+              <a:rPr lang="de-DE" dirty="0"/>
+              <a:t>)</a:t>
+            </a:r>
+          </a:p>
+          <a:p>
+            <a:pPr marL="285750" indent="-285750">
+              <a:buFont typeface="Arial" panose="020B0604020202020204" pitchFamily="34" charset="0"/>
+              <a:buChar char="•"/>
+            </a:pPr>
+            <a:r>
+              <a:rPr lang="de-DE" dirty="0" err="1"/>
+              <a:t>instruction</a:t>
+            </a:r>
+            <a:r>
+              <a:rPr lang="de-DE" dirty="0"/>
+              <a:t> </a:t>
+            </a:r>
+            <a:r>
+              <a:rPr lang="de-DE" dirty="0" err="1"/>
+              <a:t>tuning</a:t>
+            </a:r>
+            <a:r>
+              <a:rPr lang="de-DE" dirty="0"/>
+              <a:t> (</a:t>
+            </a:r>
+            <a:r>
+              <a:rPr lang="de-DE" dirty="0" err="1"/>
+              <a:t>decoder-only</a:t>
+            </a:r>
+            <a:r>
+              <a:rPr lang="de-DE" dirty="0"/>
+              <a:t> </a:t>
+            </a:r>
+            <a:r>
+              <a:rPr lang="de-DE" dirty="0" err="1"/>
+              <a:t>transformer</a:t>
+            </a:r>
+            <a:r>
+              <a:rPr lang="de-DE" dirty="0"/>
+              <a:t>), </a:t>
+            </a:r>
+            <a:r>
+              <a:rPr lang="de-DE" dirty="0" err="1"/>
+              <a:t>potentially</a:t>
+            </a:r>
+            <a:r>
+              <a:rPr lang="de-DE" dirty="0"/>
+              <a:t> </a:t>
+            </a:r>
+            <a:r>
+              <a:rPr lang="de-DE" dirty="0" err="1"/>
+              <a:t>followed</a:t>
+            </a:r>
+            <a:r>
+              <a:rPr lang="de-DE" dirty="0"/>
+              <a:t> </a:t>
+            </a:r>
+            <a:r>
+              <a:rPr lang="de-DE" dirty="0" err="1"/>
+              <a:t>by</a:t>
+            </a:r>
+            <a:r>
+              <a:rPr lang="de-DE" dirty="0"/>
+              <a:t> </a:t>
+            </a:r>
+            <a:r>
+              <a:rPr lang="de-DE" dirty="0" err="1"/>
+              <a:t>alignment</a:t>
+            </a:r>
+            <a:endParaRPr lang="de-DE" dirty="0"/>
+          </a:p>
+        </p:txBody>
+      </p:sp>
+      <p:sp>
+        <p:nvSpPr>
+          <p:cNvPr id="14" name="Textfeld 13">
+            <a:extLst>
+              <a:ext uri="{FF2B5EF4-FFF2-40B4-BE49-F238E27FC236}">
+                <a16:creationId xmlns:a16="http://schemas.microsoft.com/office/drawing/2014/main" id="{0ABA88E0-558D-4BEA-50DB-887EA4201B2E}"/>
+              </a:ext>
+            </a:extLst>
+          </p:cNvPr>
+          <p:cNvSpPr txBox="1"/>
+          <p:nvPr/>
+        </p:nvSpPr>
+        <p:spPr>
+          <a:xfrm>
+            <a:off x="838200" y="5486399"/>
+            <a:ext cx="5257799" cy="923330"/>
+          </a:xfrm>
+          <a:prstGeom prst="rect">
+            <a:avLst/>
+          </a:prstGeom>
+          <a:noFill/>
+        </p:spPr>
+        <p:txBody>
+          <a:bodyPr wrap="square" rtlCol="0">
+            <a:spAutoFit/>
+          </a:bodyPr>
+          <a:lstStyle/>
+          <a:p>
+            <a:pPr marL="285750" indent="-285750">
+              <a:buFont typeface="Arial" panose="020B0604020202020204" pitchFamily="34" charset="0"/>
+              <a:buChar char="•"/>
+            </a:pPr>
+            <a:r>
+              <a:rPr lang="de-DE" dirty="0" err="1"/>
+              <a:t>classification</a:t>
+            </a:r>
+            <a:r>
+              <a:rPr lang="de-DE" dirty="0"/>
+              <a:t> </a:t>
+            </a:r>
+            <a:r>
+              <a:rPr lang="de-DE" dirty="0" err="1"/>
+              <a:t>model</a:t>
+            </a:r>
+            <a:r>
+              <a:rPr lang="de-DE" dirty="0"/>
+              <a:t> (</a:t>
+            </a:r>
+            <a:r>
+              <a:rPr lang="de-DE" dirty="0" err="1"/>
+              <a:t>specific</a:t>
+            </a:r>
+            <a:r>
+              <a:rPr lang="de-DE" dirty="0"/>
+              <a:t> </a:t>
+            </a:r>
+            <a:r>
+              <a:rPr lang="de-DE" dirty="0" err="1"/>
+              <a:t>task</a:t>
+            </a:r>
+            <a:r>
+              <a:rPr lang="de-DE" dirty="0"/>
+              <a:t>)</a:t>
+            </a:r>
+          </a:p>
+          <a:p>
+            <a:pPr marL="285750" indent="-285750">
+              <a:buFont typeface="Arial" panose="020B0604020202020204" pitchFamily="34" charset="0"/>
+              <a:buChar char="•"/>
+            </a:pPr>
+            <a:r>
+              <a:rPr lang="de-DE" dirty="0" err="1"/>
+              <a:t>finetuning</a:t>
+            </a:r>
+            <a:r>
+              <a:rPr lang="de-DE" dirty="0"/>
+              <a:t> on </a:t>
+            </a:r>
+            <a:r>
+              <a:rPr lang="de-DE" dirty="0" err="1"/>
+              <a:t>labeled</a:t>
+            </a:r>
+            <a:r>
+              <a:rPr lang="de-DE" dirty="0"/>
+              <a:t> </a:t>
+            </a:r>
+            <a:r>
+              <a:rPr lang="de-DE" dirty="0" err="1"/>
+              <a:t>data</a:t>
+            </a:r>
+            <a:r>
+              <a:rPr lang="de-DE" dirty="0"/>
+              <a:t> </a:t>
+            </a:r>
+            <a:r>
+              <a:rPr lang="de-DE" dirty="0" err="1"/>
+              <a:t>set</a:t>
+            </a:r>
+            <a:r>
+              <a:rPr lang="de-DE" dirty="0"/>
+              <a:t> (</a:t>
+            </a:r>
+            <a:r>
+              <a:rPr lang="de-DE" dirty="0" err="1"/>
+              <a:t>often</a:t>
+            </a:r>
+            <a:r>
+              <a:rPr lang="de-DE" dirty="0"/>
+              <a:t> </a:t>
+            </a:r>
+            <a:r>
+              <a:rPr lang="de-DE" dirty="0" err="1"/>
+              <a:t>using</a:t>
+            </a:r>
+            <a:r>
+              <a:rPr lang="de-DE" dirty="0"/>
+              <a:t> </a:t>
+            </a:r>
+            <a:r>
+              <a:rPr lang="de-DE" dirty="0" err="1"/>
+              <a:t>encoder-only</a:t>
+            </a:r>
+            <a:r>
+              <a:rPr lang="de-DE" dirty="0"/>
+              <a:t> </a:t>
+            </a:r>
+            <a:r>
+              <a:rPr lang="de-DE" dirty="0" err="1"/>
+              <a:t>transformer</a:t>
+            </a:r>
+            <a:r>
+              <a:rPr lang="de-DE" dirty="0"/>
+              <a:t>)</a:t>
             </a:r>
           </a:p>
         </p:txBody>
@@ -12714,7 +13440,7 @@
     </p:spTree>
     <p:extLst>
       <p:ext uri="{BB962C8B-B14F-4D97-AF65-F5344CB8AC3E}">
-        <p14:creationId xmlns:p14="http://schemas.microsoft.com/office/powerpoint/2010/main" val="2733141780"/>
+        <p14:creationId xmlns:p14="http://schemas.microsoft.com/office/powerpoint/2010/main" val="106762038"/>
       </p:ext>
     </p:extLst>
   </p:cSld>
@@ -12743,10 +13469,10 @@
       </p:grpSpPr>
       <p:sp>
         <p:nvSpPr>
-          <p:cNvPr id="2" name="Titel 1">
-            <a:extLst>
-              <a:ext uri="{FF2B5EF4-FFF2-40B4-BE49-F238E27FC236}">
-                <a16:creationId xmlns:a16="http://schemas.microsoft.com/office/drawing/2014/main" id="{06E23BCC-EA2F-2E03-E8A6-ACECAA471E84}"/>
+          <p:cNvPr id="5" name="Title 4">
+            <a:extLst>
+              <a:ext uri="{FF2B5EF4-FFF2-40B4-BE49-F238E27FC236}">
+                <a16:creationId xmlns:a16="http://schemas.microsoft.com/office/drawing/2014/main" id="{3EF7C251-E411-67C1-497C-2BFFEBC05F2B}"/>
               </a:ext>
             </a:extLst>
           </p:cNvPr>
@@ -12762,16 +13488,36 @@
           <a:bodyPr/>
           <a:lstStyle/>
           <a:p>
-            <a:endParaRPr lang="de-DE"/>
-          </a:p>
-        </p:txBody>
-      </p:sp>
-      <p:sp>
-        <p:nvSpPr>
-          <p:cNvPr id="3" name="Inhaltsplatzhalter 2">
-            <a:extLst>
-              <a:ext uri="{FF2B5EF4-FFF2-40B4-BE49-F238E27FC236}">
-                <a16:creationId xmlns:a16="http://schemas.microsoft.com/office/drawing/2014/main" id="{B75D134A-03B5-8F8A-AB03-A32CFC6CB2F1}"/>
+            <a:r>
+              <a:rPr lang="de-DE" dirty="0"/>
+              <a:t>Transfer Learning </a:t>
+            </a:r>
+            <a:r>
+              <a:rPr lang="de-DE" dirty="0" err="1"/>
+              <a:t>from</a:t>
+            </a:r>
+            <a:r>
+              <a:rPr lang="de-DE" dirty="0"/>
+              <a:t> </a:t>
+            </a:r>
+            <a:r>
+              <a:rPr lang="de-DE" dirty="0" err="1"/>
+              <a:t>Foundation</a:t>
+            </a:r>
+            <a:r>
+              <a:rPr lang="de-DE" dirty="0"/>
+              <a:t> Models</a:t>
+            </a:r>
+            <a:endParaRPr lang="en-GB" dirty="0"/>
+          </a:p>
+        </p:txBody>
+      </p:sp>
+      <p:sp>
+        <p:nvSpPr>
+          <p:cNvPr id="6" name="Content Placeholder 5">
+            <a:extLst>
+              <a:ext uri="{FF2B5EF4-FFF2-40B4-BE49-F238E27FC236}">
+                <a16:creationId xmlns:a16="http://schemas.microsoft.com/office/drawing/2014/main" id="{194FF263-6A7E-63B8-37B4-8152AC6DF7EF}"/>
               </a:ext>
             </a:extLst>
           </p:cNvPr>
@@ -12791,48 +13537,8 @@
               <a:buNone/>
             </a:pPr>
             <a:r>
-              <a:rPr lang="de-DE" b="1" dirty="0"/>
-              <a:t>Classification </a:t>
-            </a:r>
-            <a:r>
-              <a:rPr lang="de-DE" b="1" dirty="0" err="1"/>
-              <a:t>tasks</a:t>
-            </a:r>
-            <a:r>
-              <a:rPr lang="de-DE" dirty="0"/>
-              <a:t> → [CLS] (</a:t>
-            </a:r>
-            <a:r>
-              <a:rPr lang="de-DE" dirty="0" err="1"/>
-              <a:t>or</a:t>
-            </a:r>
-            <a:r>
-              <a:rPr lang="de-DE" dirty="0"/>
-              <a:t> </a:t>
-            </a:r>
-            <a:r>
-              <a:rPr lang="de-DE" dirty="0" err="1"/>
-              <a:t>sometimes</a:t>
-            </a:r>
-            <a:r>
-              <a:rPr lang="de-DE" dirty="0"/>
-              <a:t> </a:t>
-            </a:r>
-            <a:r>
-              <a:rPr lang="de-DE" dirty="0" err="1"/>
-              <a:t>average</a:t>
-            </a:r>
-            <a:r>
-              <a:rPr lang="de-DE" dirty="0"/>
-              <a:t> </a:t>
-            </a:r>
-            <a:r>
-              <a:rPr lang="de-DE" dirty="0" err="1"/>
-              <a:t>pooling</a:t>
-            </a:r>
-            <a:r>
-              <a:rPr lang="de-DE" dirty="0"/>
-              <a:t>).</a:t>
+              <a:rPr lang="en-GB" dirty="0"/>
+              <a:t>idea:</a:t>
             </a:r>
           </a:p>
           <a:p>
@@ -12840,95 +13546,35 @@
               <a:buNone/>
             </a:pPr>
             <a:r>
-              <a:rPr lang="de-DE" b="1" dirty="0"/>
-              <a:t>Token-level </a:t>
-            </a:r>
-            <a:r>
-              <a:rPr lang="de-DE" b="1" dirty="0" err="1"/>
-              <a:t>tasks</a:t>
-            </a:r>
-            <a:r>
-              <a:rPr lang="de-DE" dirty="0"/>
-              <a:t> → </a:t>
-            </a:r>
-            <a:r>
-              <a:rPr lang="de-DE" dirty="0" err="1"/>
-              <a:t>hidden</a:t>
-            </a:r>
-            <a:r>
-              <a:rPr lang="de-DE" dirty="0"/>
-              <a:t> </a:t>
-            </a:r>
-            <a:r>
-              <a:rPr lang="de-DE" dirty="0" err="1"/>
-              <a:t>states</a:t>
-            </a:r>
-            <a:r>
-              <a:rPr lang="de-DE" dirty="0"/>
-              <a:t> </a:t>
-            </a:r>
-            <a:r>
-              <a:rPr lang="de-DE" dirty="0" err="1"/>
-              <a:t>directly</a:t>
-            </a:r>
-            <a:r>
-              <a:rPr lang="de-DE" dirty="0"/>
-              <a:t>.</a:t>
+              <a:rPr lang="en-GB" dirty="0"/>
+              <a:t>pretrain a big model (called foundation model) on a broad data set, and then use these learnings for subsequent trainings on specific (typically narrow) data by means of feature extraction or finetuning</a:t>
             </a:r>
           </a:p>
           <a:p>
             <a:pPr marL="0" indent="0">
               <a:buNone/>
             </a:pPr>
-            <a:r>
-              <a:rPr lang="de-DE" b="1" dirty="0"/>
-              <a:t>MLM</a:t>
-            </a:r>
-            <a:r>
-              <a:rPr lang="de-DE" dirty="0"/>
-              <a:t> → </a:t>
-            </a:r>
-            <a:r>
-              <a:rPr lang="de-DE" dirty="0" err="1"/>
-              <a:t>masked</a:t>
-            </a:r>
-            <a:r>
-              <a:rPr lang="de-DE" dirty="0"/>
-              <a:t> </a:t>
-            </a:r>
-            <a:r>
-              <a:rPr lang="de-DE" dirty="0" err="1"/>
-              <a:t>token</a:t>
-            </a:r>
-            <a:r>
-              <a:rPr lang="de-DE" dirty="0"/>
-              <a:t> </a:t>
-            </a:r>
-            <a:r>
-              <a:rPr lang="de-DE" dirty="0" err="1"/>
-              <a:t>embeddings</a:t>
-            </a:r>
-            <a:r>
-              <a:rPr lang="de-DE" dirty="0"/>
-              <a:t> </a:t>
-            </a:r>
-            <a:r>
-              <a:rPr lang="de-DE" dirty="0" err="1"/>
-              <a:t>only</a:t>
-            </a:r>
-            <a:r>
-              <a:rPr lang="de-DE" dirty="0"/>
-              <a:t>.</a:t>
-            </a:r>
-          </a:p>
-        </p:txBody>
-      </p:sp>
-      <p:sp>
-        <p:nvSpPr>
-          <p:cNvPr id="4" name="Foliennummernplatzhalter 3">
-            <a:extLst>
-              <a:ext uri="{FF2B5EF4-FFF2-40B4-BE49-F238E27FC236}">
-                <a16:creationId xmlns:a16="http://schemas.microsoft.com/office/drawing/2014/main" id="{C37B8CF4-165F-DCF3-1604-8B15312E525F}"/>
+            <a:endParaRPr lang="en-GB" dirty="0"/>
+          </a:p>
+          <a:p>
+            <a:pPr marL="0" indent="0">
+              <a:buNone/>
+            </a:pPr>
+            <a:r>
+              <a:rPr lang="en-GB" dirty="0">
+                <a:sym typeface="Wingdings" pitchFamily="2" charset="2"/>
+              </a:rPr>
+              <a:t> here: self-supervised, internet-scale pretraining of models like BERT or GPT</a:t>
+            </a:r>
+          </a:p>
+        </p:txBody>
+      </p:sp>
+      <p:sp>
+        <p:nvSpPr>
+          <p:cNvPr id="4" name="Slide Number Placeholder 3">
+            <a:extLst>
+              <a:ext uri="{FF2B5EF4-FFF2-40B4-BE49-F238E27FC236}">
+                <a16:creationId xmlns:a16="http://schemas.microsoft.com/office/drawing/2014/main" id="{4F0B5BE9-331D-0505-FC7E-005F6B05B627}"/>
               </a:ext>
             </a:extLst>
           </p:cNvPr>
@@ -12944,18 +13590,64 @@
           <a:bodyPr/>
           <a:lstStyle/>
           <a:p>
-            <a:fld id="{4055531C-5681-6B44-B2CA-926D7A74B06D}" type="slidenum">
-              <a:rPr lang="de-DE" smtClean="0"/>
+            <a:fld id="{3D4C94FE-FF23-4504-88E9-14D481113291}" type="slidenum">
+              <a:rPr lang="en-GB" smtClean="0"/>
               <a:t>5</a:t>
             </a:fld>
-            <a:endParaRPr lang="de-DE"/>
+            <a:endParaRPr lang="en-GB"/>
+          </a:p>
+        </p:txBody>
+      </p:sp>
+      <p:sp>
+        <p:nvSpPr>
+          <p:cNvPr id="2" name="TextBox 4">
+            <a:extLst>
+              <a:ext uri="{FF2B5EF4-FFF2-40B4-BE49-F238E27FC236}">
+                <a16:creationId xmlns:a16="http://schemas.microsoft.com/office/drawing/2014/main" id="{F66358C6-7FB2-EACB-408F-55037CA86FF9}"/>
+              </a:ext>
+            </a:extLst>
+          </p:cNvPr>
+          <p:cNvSpPr txBox="1"/>
+          <p:nvPr/>
+        </p:nvSpPr>
+        <p:spPr>
+          <a:xfrm>
+            <a:off x="2799205" y="5988734"/>
+            <a:ext cx="6593589" cy="646331"/>
+          </a:xfrm>
+          <a:prstGeom prst="rect">
+            <a:avLst/>
+          </a:prstGeom>
+          <a:noFill/>
+          <a:ln>
+            <a:solidFill>
+              <a:schemeClr val="tx1"/>
+            </a:solidFill>
+          </a:ln>
+        </p:spPr>
+        <p:txBody>
+          <a:bodyPr wrap="square" rtlCol="0">
+            <a:spAutoFit/>
+          </a:bodyPr>
+          <a:lstStyle/>
+          <a:p>
+            <a:r>
+              <a:rPr lang="en-GB" dirty="0"/>
+              <a:t>works well for homogenous, unstructured data (e.g., text, images)</a:t>
+            </a:r>
+          </a:p>
+          <a:p>
+            <a:r>
+              <a:rPr lang="en-GB" dirty="0"/>
+              <a:t>but very difficult for heterogenous, structured/tabular data</a:t>
+            </a:r>
           </a:p>
         </p:txBody>
       </p:sp>
     </p:spTree>
     <p:extLst>
       <p:ext uri="{BB962C8B-B14F-4D97-AF65-F5344CB8AC3E}">
-        <p14:creationId xmlns:p14="http://schemas.microsoft.com/office/powerpoint/2010/main" val="2846108880"/>
+        <p14:creationId xmlns:p14="http://schemas.microsoft.com/office/powerpoint/2010/main" val="2733141780"/>
       </p:ext>
     </p:extLst>
   </p:cSld>
@@ -12987,7 +13679,7 @@
           <p:cNvPr id="2" name="Titel 1">
             <a:extLst>
               <a:ext uri="{FF2B5EF4-FFF2-40B4-BE49-F238E27FC236}">
-                <a16:creationId xmlns:a16="http://schemas.microsoft.com/office/drawing/2014/main" id="{61FF0D77-63F1-825D-6560-C80B0DE3E9FD}"/>
+                <a16:creationId xmlns:a16="http://schemas.microsoft.com/office/drawing/2014/main" id="{06E23BCC-EA2F-2E03-E8A6-ACECAA471E84}"/>
               </a:ext>
             </a:extLst>
           </p:cNvPr>
@@ -13012,7 +13704,7 @@
           <p:cNvPr id="3" name="Inhaltsplatzhalter 2">
             <a:extLst>
               <a:ext uri="{FF2B5EF4-FFF2-40B4-BE49-F238E27FC236}">
-                <a16:creationId xmlns:a16="http://schemas.microsoft.com/office/drawing/2014/main" id="{3B55EF91-9EAF-B878-3441-F9D7A7F93FD9}"/>
+                <a16:creationId xmlns:a16="http://schemas.microsoft.com/office/drawing/2014/main" id="{B75D134A-03B5-8F8A-AB03-A32CFC6CB2F1}"/>
               </a:ext>
             </a:extLst>
           </p:cNvPr>
@@ -13025,45 +13717,55 @@
         </p:nvSpPr>
         <p:spPr/>
         <p:txBody>
-          <a:bodyPr>
-            <a:normAutofit lnSpcReduction="10000"/>
-          </a:bodyPr>
+          <a:bodyPr/>
           <a:lstStyle/>
           <a:p>
             <a:pPr marL="0" indent="0">
               <a:buNone/>
             </a:pPr>
             <a:r>
+              <a:rPr lang="de-DE" b="1" dirty="0"/>
+              <a:t>Classification </a:t>
+            </a:r>
+            <a:r>
               <a:rPr lang="de-DE" b="1" dirty="0" err="1"/>
-              <a:t>Sequence</a:t>
-            </a:r>
-            <a:r>
-              <a:rPr lang="de-DE" b="1" dirty="0"/>
-              <a:t> </a:t>
-            </a:r>
-            <a:r>
-              <a:rPr lang="de-DE" b="1" dirty="0" err="1"/>
-              <a:t>classification</a:t>
-            </a:r>
-            <a:r>
-              <a:rPr lang="de-DE" b="1" dirty="0"/>
-              <a:t> (</a:t>
-            </a:r>
-            <a:r>
-              <a:rPr lang="de-DE" b="1" dirty="0" err="1"/>
-              <a:t>sentiment</a:t>
-            </a:r>
-            <a:r>
-              <a:rPr lang="de-DE" b="1" dirty="0"/>
-              <a:t>, </a:t>
-            </a:r>
-            <a:r>
-              <a:rPr lang="de-DE" b="1" dirty="0" err="1"/>
-              <a:t>topic</a:t>
-            </a:r>
-            <a:r>
-              <a:rPr lang="de-DE" b="1" dirty="0"/>
-              <a:t>, NLI, etc.)</a:t>
+              <a:t>tasks</a:t>
+            </a:r>
+            <a:r>
+              <a:rPr lang="de-DE" dirty="0"/>
+              <a:t> → [CLS] (</a:t>
+            </a:r>
+            <a:r>
+              <a:rPr lang="de-DE" dirty="0" err="1"/>
+              <a:t>or</a:t>
+            </a:r>
+            <a:r>
+              <a:rPr lang="de-DE" dirty="0"/>
+              <a:t> </a:t>
+            </a:r>
+            <a:r>
+              <a:rPr lang="de-DE" dirty="0" err="1"/>
+              <a:t>sometimes</a:t>
+            </a:r>
+            <a:r>
+              <a:rPr lang="de-DE" dirty="0"/>
+              <a:t> </a:t>
+            </a:r>
+            <a:r>
+              <a:rPr lang="de-DE" dirty="0" err="1"/>
+              <a:t>average</a:t>
+            </a:r>
+            <a:r>
+              <a:rPr lang="de-DE" dirty="0"/>
+              <a:t> </a:t>
+            </a:r>
+            <a:r>
+              <a:rPr lang="de-DE" dirty="0" err="1"/>
+              <a:t>pooling</a:t>
+            </a:r>
+            <a:r>
+              <a:rPr lang="de-DE" dirty="0"/>
+              <a:t>).</a:t>
             </a:r>
           </a:p>
           <a:p>
@@ -13071,68 +13773,36 @@
               <a:buNone/>
             </a:pPr>
             <a:r>
-              <a:rPr lang="de-DE" dirty="0"/>
-              <a:t>A </a:t>
-            </a:r>
-            <a:r>
-              <a:rPr lang="de-DE" dirty="0" err="1"/>
-              <a:t>special</a:t>
-            </a:r>
-            <a:r>
-              <a:rPr lang="de-DE" dirty="0"/>
-              <a:t> </a:t>
-            </a:r>
-            <a:r>
-              <a:rPr lang="de-DE" dirty="0" err="1"/>
-              <a:t>token</a:t>
-            </a:r>
-            <a:r>
-              <a:rPr lang="de-DE" dirty="0"/>
-              <a:t> </a:t>
-            </a:r>
-            <a:r>
               <a:rPr lang="de-DE" b="1" dirty="0"/>
-              <a:t>[CLS]</a:t>
-            </a:r>
-            <a:r>
-              <a:rPr lang="de-DE" dirty="0"/>
-              <a:t> </a:t>
-            </a:r>
-            <a:r>
-              <a:rPr lang="de-DE" dirty="0" err="1"/>
-              <a:t>is</a:t>
-            </a:r>
-            <a:r>
-              <a:rPr lang="de-DE" dirty="0"/>
-              <a:t> </a:t>
-            </a:r>
-            <a:r>
-              <a:rPr lang="de-DE" dirty="0" err="1"/>
-              <a:t>prepended</a:t>
-            </a:r>
-            <a:r>
-              <a:rPr lang="de-DE" dirty="0"/>
-              <a:t> </a:t>
-            </a:r>
-            <a:r>
-              <a:rPr lang="de-DE" dirty="0" err="1"/>
-              <a:t>to</a:t>
-            </a:r>
-            <a:r>
-              <a:rPr lang="de-DE" dirty="0"/>
-              <a:t> </a:t>
-            </a:r>
-            <a:r>
-              <a:rPr lang="de-DE" dirty="0" err="1"/>
-              <a:t>the</a:t>
-            </a:r>
-            <a:r>
-              <a:rPr lang="de-DE" dirty="0"/>
-              <a:t> </a:t>
-            </a:r>
-            <a:r>
-              <a:rPr lang="de-DE" dirty="0" err="1"/>
-              <a:t>input</a:t>
+              <a:t>Token-level </a:t>
+            </a:r>
+            <a:r>
+              <a:rPr lang="de-DE" b="1" dirty="0" err="1"/>
+              <a:t>tasks</a:t>
+            </a:r>
+            <a:r>
+              <a:rPr lang="de-DE" dirty="0"/>
+              <a:t> → </a:t>
+            </a:r>
+            <a:r>
+              <a:rPr lang="de-DE" dirty="0" err="1"/>
+              <a:t>hidden</a:t>
+            </a:r>
+            <a:r>
+              <a:rPr lang="de-DE" dirty="0"/>
+              <a:t> </a:t>
+            </a:r>
+            <a:r>
+              <a:rPr lang="de-DE" dirty="0" err="1"/>
+              <a:t>states</a:t>
+            </a:r>
+            <a:r>
+              <a:rPr lang="de-DE" dirty="0"/>
+              <a:t> </a:t>
+            </a:r>
+            <a:r>
+              <a:rPr lang="de-DE" dirty="0" err="1"/>
+              <a:t>directly</a:t>
             </a:r>
             <a:r>
               <a:rPr lang="de-DE" dirty="0"/>
@@ -13144,321 +13814,46 @@
               <a:buNone/>
             </a:pPr>
             <a:r>
-              <a:rPr lang="de-DE" dirty="0" err="1"/>
-              <a:t>Its</a:t>
-            </a:r>
-            <a:r>
-              <a:rPr lang="de-DE" dirty="0"/>
-              <a:t> final </a:t>
-            </a:r>
-            <a:r>
-              <a:rPr lang="de-DE" dirty="0" err="1"/>
-              <a:t>hidden</a:t>
-            </a:r>
-            <a:r>
-              <a:rPr lang="de-DE" dirty="0"/>
-              <a:t> </a:t>
-            </a:r>
-            <a:r>
-              <a:rPr lang="de-DE" dirty="0" err="1"/>
-              <a:t>state</a:t>
-            </a:r>
-            <a:r>
-              <a:rPr lang="de-DE" dirty="0"/>
-              <a:t> h_[CLS] </a:t>
-            </a:r>
-            <a:r>
-              <a:rPr lang="de-DE" dirty="0" err="1"/>
-              <a:t>is</a:t>
-            </a:r>
-            <a:r>
-              <a:rPr lang="de-DE" dirty="0"/>
-              <a:t> </a:t>
-            </a:r>
-            <a:r>
-              <a:rPr lang="de-DE" dirty="0" err="1"/>
-              <a:t>treated</a:t>
-            </a:r>
-            <a:r>
-              <a:rPr lang="de-DE" dirty="0"/>
-              <a:t> </a:t>
-            </a:r>
-            <a:r>
-              <a:rPr lang="de-DE" dirty="0" err="1"/>
-              <a:t>as</a:t>
-            </a:r>
-            <a:r>
-              <a:rPr lang="de-DE" dirty="0"/>
-              <a:t> a </a:t>
-            </a:r>
-            <a:r>
-              <a:rPr lang="de-DE" dirty="0" err="1"/>
-              <a:t>summary</a:t>
-            </a:r>
-            <a:r>
-              <a:rPr lang="de-DE" dirty="0"/>
-              <a:t> </a:t>
-            </a:r>
-            <a:r>
-              <a:rPr lang="de-DE" dirty="0" err="1"/>
-              <a:t>of</a:t>
-            </a:r>
-            <a:r>
-              <a:rPr lang="de-DE" dirty="0"/>
-              <a:t> </a:t>
-            </a:r>
-            <a:r>
-              <a:rPr lang="de-DE" dirty="0" err="1"/>
-              <a:t>the</a:t>
-            </a:r>
-            <a:r>
-              <a:rPr lang="de-DE" dirty="0"/>
-              <a:t> </a:t>
-            </a:r>
-            <a:r>
-              <a:rPr lang="de-DE" dirty="0" err="1"/>
-              <a:t>whole</a:t>
-            </a:r>
-            <a:r>
-              <a:rPr lang="de-DE" dirty="0"/>
-              <a:t> </a:t>
-            </a:r>
-            <a:r>
-              <a:rPr lang="de-DE" dirty="0" err="1"/>
-              <a:t>sequence</a:t>
+              <a:rPr lang="de-DE" b="1" dirty="0"/>
+              <a:t>MLM</a:t>
+            </a:r>
+            <a:r>
+              <a:rPr lang="de-DE" dirty="0"/>
+              <a:t> → </a:t>
+            </a:r>
+            <a:r>
+              <a:rPr lang="de-DE" dirty="0" err="1"/>
+              <a:t>masked</a:t>
+            </a:r>
+            <a:r>
+              <a:rPr lang="de-DE" dirty="0"/>
+              <a:t> </a:t>
+            </a:r>
+            <a:r>
+              <a:rPr lang="de-DE" dirty="0" err="1"/>
+              <a:t>token</a:t>
+            </a:r>
+            <a:r>
+              <a:rPr lang="de-DE" dirty="0"/>
+              <a:t> </a:t>
+            </a:r>
+            <a:r>
+              <a:rPr lang="de-DE" dirty="0" err="1"/>
+              <a:t>embeddings</a:t>
+            </a:r>
+            <a:r>
+              <a:rPr lang="de-DE" dirty="0"/>
+              <a:t> </a:t>
+            </a:r>
+            <a:r>
+              <a:rPr lang="de-DE" dirty="0" err="1"/>
+              <a:t>only</a:t>
             </a:r>
             <a:r>
               <a:rPr lang="de-DE" dirty="0"/>
               <a:t>.</a:t>
             </a:r>
           </a:p>
-          <a:p>
-            <a:pPr marL="0" indent="0">
-              <a:buNone/>
-            </a:pPr>
-            <a:r>
-              <a:rPr lang="de-DE" dirty="0" err="1"/>
-              <a:t>That</a:t>
-            </a:r>
-            <a:r>
-              <a:rPr lang="de-DE" dirty="0"/>
-              <a:t> </a:t>
-            </a:r>
-            <a:r>
-              <a:rPr lang="de-DE" dirty="0" err="1"/>
-              <a:t>vector</a:t>
-            </a:r>
-            <a:r>
-              <a:rPr lang="de-DE" dirty="0"/>
-              <a:t> </a:t>
-            </a:r>
-            <a:r>
-              <a:rPr lang="de-DE" dirty="0" err="1"/>
-              <a:t>is</a:t>
-            </a:r>
-            <a:r>
-              <a:rPr lang="de-DE" dirty="0"/>
-              <a:t> </a:t>
-            </a:r>
-            <a:r>
-              <a:rPr lang="de-DE" dirty="0" err="1"/>
-              <a:t>passed</a:t>
-            </a:r>
-            <a:r>
-              <a:rPr lang="de-DE" dirty="0"/>
-              <a:t> </a:t>
-            </a:r>
-            <a:r>
-              <a:rPr lang="de-DE" dirty="0" err="1"/>
-              <a:t>into</a:t>
-            </a:r>
-            <a:r>
-              <a:rPr lang="de-DE" dirty="0"/>
-              <a:t> a linear </a:t>
-            </a:r>
-            <a:r>
-              <a:rPr lang="de-DE" dirty="0" err="1"/>
-              <a:t>classification</a:t>
-            </a:r>
-            <a:r>
-              <a:rPr lang="de-DE" dirty="0"/>
-              <a:t> </a:t>
-            </a:r>
-            <a:r>
-              <a:rPr lang="de-DE" dirty="0" err="1"/>
-              <a:t>head</a:t>
-            </a:r>
-            <a:r>
-              <a:rPr lang="de-DE" dirty="0"/>
-              <a:t> → </a:t>
-            </a:r>
-            <a:r>
-              <a:rPr lang="de-DE" dirty="0" err="1"/>
-              <a:t>logits</a:t>
-            </a:r>
-            <a:r>
-              <a:rPr lang="de-DE" dirty="0"/>
-              <a:t> </a:t>
-            </a:r>
-            <a:r>
-              <a:rPr lang="de-DE" dirty="0" err="1"/>
-              <a:t>over</a:t>
-            </a:r>
-            <a:r>
-              <a:rPr lang="de-DE" dirty="0"/>
-              <a:t> </a:t>
-            </a:r>
-            <a:r>
-              <a:rPr lang="de-DE" dirty="0" err="1"/>
-              <a:t>classes</a:t>
-            </a:r>
-            <a:r>
-              <a:rPr lang="de-DE" dirty="0"/>
-              <a:t>.</a:t>
-            </a:r>
-          </a:p>
-          <a:p>
-            <a:pPr marL="0" indent="0">
-              <a:buNone/>
-            </a:pPr>
-            <a:r>
-              <a:rPr lang="de-DE" b="1" dirty="0" err="1"/>
-              <a:t>default</a:t>
-            </a:r>
-            <a:r>
-              <a:rPr lang="de-DE" b="1" dirty="0"/>
-              <a:t> in BERT-style </a:t>
-            </a:r>
-            <a:r>
-              <a:rPr lang="de-DE" b="1" dirty="0" err="1"/>
-              <a:t>models</a:t>
-            </a:r>
-            <a:endParaRPr lang="de-DE" b="1" dirty="0"/>
-          </a:p>
-          <a:p>
-            <a:pPr marL="0" indent="0">
-              <a:buNone/>
-            </a:pPr>
-            <a:br>
-              <a:rPr lang="de-DE" dirty="0"/>
-            </a:br>
-            <a:r>
-              <a:rPr lang="de-DE" dirty="0"/>
-              <a:t>(</a:t>
-            </a:r>
-            <a:r>
-              <a:rPr lang="de-DE" dirty="0" err="1"/>
-              <a:t>Some</a:t>
-            </a:r>
-            <a:r>
-              <a:rPr lang="de-DE" dirty="0"/>
-              <a:t> </a:t>
-            </a:r>
-            <a:r>
-              <a:rPr lang="de-DE" dirty="0" err="1"/>
-              <a:t>variants</a:t>
-            </a:r>
-            <a:r>
-              <a:rPr lang="de-DE" dirty="0"/>
-              <a:t> </a:t>
-            </a:r>
-            <a:r>
-              <a:rPr lang="de-DE" dirty="0" err="1"/>
-              <a:t>use</a:t>
-            </a:r>
-            <a:r>
-              <a:rPr lang="de-DE" dirty="0"/>
-              <a:t> </a:t>
-            </a:r>
-            <a:r>
-              <a:rPr lang="de-DE" b="1" dirty="0" err="1"/>
-              <a:t>average</a:t>
-            </a:r>
-            <a:r>
-              <a:rPr lang="de-DE" b="1" dirty="0"/>
-              <a:t> </a:t>
-            </a:r>
-            <a:r>
-              <a:rPr lang="de-DE" b="1" dirty="0" err="1"/>
-              <a:t>pooling</a:t>
-            </a:r>
-            <a:r>
-              <a:rPr lang="de-DE" dirty="0"/>
-              <a:t> </a:t>
-            </a:r>
-            <a:r>
-              <a:rPr lang="de-DE" dirty="0" err="1"/>
-              <a:t>over</a:t>
-            </a:r>
-            <a:r>
-              <a:rPr lang="de-DE" dirty="0"/>
-              <a:t> all </a:t>
-            </a:r>
-            <a:r>
-              <a:rPr lang="de-DE" dirty="0" err="1"/>
-              <a:t>token</a:t>
-            </a:r>
-            <a:r>
-              <a:rPr lang="de-DE" dirty="0"/>
-              <a:t> </a:t>
-            </a:r>
-            <a:r>
-              <a:rPr lang="de-DE" dirty="0" err="1"/>
-              <a:t>states</a:t>
-            </a:r>
-            <a:r>
-              <a:rPr lang="de-DE" dirty="0"/>
-              <a:t> </a:t>
-            </a:r>
-            <a:r>
-              <a:rPr lang="de-DE" dirty="0" err="1"/>
-              <a:t>instead</a:t>
-            </a:r>
-            <a:r>
-              <a:rPr lang="de-DE" dirty="0"/>
-              <a:t> </a:t>
-            </a:r>
-            <a:r>
-              <a:rPr lang="de-DE" dirty="0" err="1"/>
-              <a:t>of</a:t>
-            </a:r>
-            <a:r>
-              <a:rPr lang="de-DE" dirty="0"/>
-              <a:t> [CLS], but [CLS] </a:t>
-            </a:r>
-            <a:r>
-              <a:rPr lang="de-DE" dirty="0" err="1"/>
-              <a:t>is</a:t>
-            </a:r>
-            <a:r>
-              <a:rPr lang="de-DE" dirty="0"/>
-              <a:t> </a:t>
-            </a:r>
-            <a:r>
-              <a:rPr lang="de-DE" dirty="0" err="1"/>
-              <a:t>the</a:t>
-            </a:r>
-            <a:r>
-              <a:rPr lang="de-DE" dirty="0"/>
-              <a:t> original/</a:t>
-            </a:r>
-            <a:r>
-              <a:rPr lang="de-DE" dirty="0" err="1"/>
-              <a:t>standard</a:t>
-            </a:r>
-            <a:r>
-              <a:rPr lang="de-DE" dirty="0"/>
-              <a:t> </a:t>
-            </a:r>
-            <a:r>
-              <a:rPr lang="de-DE" dirty="0" err="1"/>
-              <a:t>choice</a:t>
-            </a:r>
-            <a:r>
-              <a:rPr lang="de-DE" dirty="0"/>
-              <a:t>.)</a:t>
-            </a:r>
-          </a:p>
         </p:txBody>
       </p:sp>
       <p:sp>
@@ -13466,7 +13861,7 @@
           <p:cNvPr id="4" name="Foliennummernplatzhalter 3">
             <a:extLst>
               <a:ext uri="{FF2B5EF4-FFF2-40B4-BE49-F238E27FC236}">
-                <a16:creationId xmlns:a16="http://schemas.microsoft.com/office/drawing/2014/main" id="{B04A72D0-DDFF-CBDD-9B6B-E819F5AD255C}"/>
+                <a16:creationId xmlns:a16="http://schemas.microsoft.com/office/drawing/2014/main" id="{C37B8CF4-165F-DCF3-1604-8B15312E525F}"/>
               </a:ext>
             </a:extLst>
           </p:cNvPr>
@@ -13493,7 +13888,7 @@
     </p:spTree>
     <p:extLst>
       <p:ext uri="{BB962C8B-B14F-4D97-AF65-F5344CB8AC3E}">
-        <p14:creationId xmlns:p14="http://schemas.microsoft.com/office/powerpoint/2010/main" val="1004237482"/>
+        <p14:creationId xmlns:p14="http://schemas.microsoft.com/office/powerpoint/2010/main" val="2846108880"/>
       </p:ext>
     </p:extLst>
   </p:cSld>
@@ -13525,7 +13920,7 @@
           <p:cNvPr id="2" name="Titel 1">
             <a:extLst>
               <a:ext uri="{FF2B5EF4-FFF2-40B4-BE49-F238E27FC236}">
-                <a16:creationId xmlns:a16="http://schemas.microsoft.com/office/drawing/2014/main" id="{AC8D2A51-B38D-9C57-1ABF-8D603A1E5500}"/>
+                <a16:creationId xmlns:a16="http://schemas.microsoft.com/office/drawing/2014/main" id="{61FF0D77-63F1-825D-6560-C80B0DE3E9FD}"/>
               </a:ext>
             </a:extLst>
           </p:cNvPr>
@@ -13550,7 +13945,7 @@
           <p:cNvPr id="3" name="Inhaltsplatzhalter 2">
             <a:extLst>
               <a:ext uri="{FF2B5EF4-FFF2-40B4-BE49-F238E27FC236}">
-                <a16:creationId xmlns:a16="http://schemas.microsoft.com/office/drawing/2014/main" id="{DFC6E1E0-93F3-C0C8-C345-1BD1F5C25C12}"/>
+                <a16:creationId xmlns:a16="http://schemas.microsoft.com/office/drawing/2014/main" id="{3B55EF91-9EAF-B878-3441-F9D7A7F93FD9}"/>
               </a:ext>
             </a:extLst>
           </p:cNvPr>
@@ -13563,15 +13958,21 @@
         </p:nvSpPr>
         <p:spPr/>
         <p:txBody>
-          <a:bodyPr/>
+          <a:bodyPr>
+            <a:normAutofit lnSpcReduction="10000"/>
+          </a:bodyPr>
           <a:lstStyle/>
           <a:p>
             <a:pPr marL="0" indent="0">
               <a:buNone/>
             </a:pPr>
             <a:r>
+              <a:rPr lang="de-DE" b="1" dirty="0" err="1"/>
+              <a:t>Sequence</a:t>
+            </a:r>
+            <a:r>
               <a:rPr lang="de-DE" b="1" dirty="0"/>
-              <a:t>Token </a:t>
+              <a:t> </a:t>
             </a:r>
             <a:r>
               <a:rPr lang="de-DE" b="1" dirty="0" err="1"/>
@@ -13579,15 +13980,23 @@
             </a:r>
             <a:r>
               <a:rPr lang="de-DE" b="1" dirty="0"/>
-              <a:t> (NER, POS </a:t>
+              <a:t> (</a:t>
             </a:r>
             <a:r>
               <a:rPr lang="de-DE" b="1" dirty="0" err="1"/>
-              <a:t>tagging</a:t>
+              <a:t>sentiment</a:t>
             </a:r>
             <a:r>
               <a:rPr lang="de-DE" b="1" dirty="0"/>
-              <a:t>, etc.)</a:t>
+              <a:t>, </a:t>
+            </a:r>
+            <a:r>
+              <a:rPr lang="de-DE" b="1" dirty="0" err="1"/>
+              <a:t>topic</a:t>
+            </a:r>
+            <a:r>
+              <a:rPr lang="de-DE" b="1" dirty="0"/>
+              <a:t>, NLI, etc.)</a:t>
             </a:r>
           </a:p>
           <a:p>
@@ -13595,32 +14004,28 @@
               <a:buNone/>
             </a:pPr>
             <a:r>
-              <a:rPr lang="de-DE" dirty="0" err="1"/>
-              <a:t>Each</a:t>
-            </a:r>
-            <a:r>
-              <a:rPr lang="de-DE" dirty="0"/>
-              <a:t> </a:t>
-            </a:r>
-            <a:r>
-              <a:rPr lang="de-DE" dirty="0" err="1"/>
-              <a:t>token’s</a:t>
-            </a:r>
-            <a:r>
-              <a:rPr lang="de-DE" dirty="0"/>
-              <a:t> </a:t>
-            </a:r>
-            <a:r>
-              <a:rPr lang="de-DE" dirty="0" err="1"/>
-              <a:t>hidden</a:t>
-            </a:r>
-            <a:r>
-              <a:rPr lang="de-DE" dirty="0"/>
-              <a:t> </a:t>
-            </a:r>
-            <a:r>
-              <a:rPr lang="de-DE" dirty="0" err="1"/>
-              <a:t>state</a:t>
+              <a:rPr lang="de-DE" dirty="0"/>
+              <a:t>A </a:t>
+            </a:r>
+            <a:r>
+              <a:rPr lang="de-DE" dirty="0" err="1"/>
+              <a:t>special</a:t>
+            </a:r>
+            <a:r>
+              <a:rPr lang="de-DE" dirty="0"/>
+              <a:t> </a:t>
+            </a:r>
+            <a:r>
+              <a:rPr lang="de-DE" dirty="0" err="1"/>
+              <a:t>token</a:t>
+            </a:r>
+            <a:r>
+              <a:rPr lang="de-DE" dirty="0"/>
+              <a:t> </a:t>
+            </a:r>
+            <a:r>
+              <a:rPr lang="de-DE" b="1" dirty="0"/>
+              <a:t>[CLS]</a:t>
             </a:r>
             <a:r>
               <a:rPr lang="de-DE" dirty="0"/>
@@ -13636,67 +14041,35 @@
             </a:r>
             <a:r>
               <a:rPr lang="de-DE" dirty="0" err="1"/>
-              <a:t>projected</a:t>
-            </a:r>
-            <a:r>
-              <a:rPr lang="de-DE" dirty="0"/>
-              <a:t> </a:t>
-            </a:r>
-            <a:r>
-              <a:rPr lang="de-DE" b="1" dirty="0" err="1"/>
-              <a:t>independently</a:t>
-            </a:r>
-            <a:r>
-              <a:rPr lang="de-DE" dirty="0"/>
-              <a:t> </a:t>
-            </a:r>
-            <a:r>
-              <a:rPr lang="de-DE" dirty="0" err="1"/>
-              <a:t>into</a:t>
-            </a:r>
-            <a:r>
-              <a:rPr lang="de-DE" dirty="0"/>
-              <a:t> </a:t>
-            </a:r>
-            <a:r>
-              <a:rPr lang="de-DE" dirty="0" err="1"/>
-              <a:t>logits</a:t>
-            </a:r>
-            <a:r>
-              <a:rPr lang="de-DE" dirty="0"/>
-              <a:t> (</a:t>
-            </a:r>
-            <a:r>
-              <a:rPr lang="de-DE" dirty="0" err="1"/>
-              <a:t>usually</a:t>
-            </a:r>
-            <a:r>
-              <a:rPr lang="de-DE" dirty="0"/>
-              <a:t> </a:t>
-            </a:r>
-            <a:r>
-              <a:rPr lang="de-DE" dirty="0" err="1"/>
-              <a:t>over</a:t>
-            </a:r>
-            <a:r>
-              <a:rPr lang="de-DE" dirty="0"/>
-              <a:t> </a:t>
-            </a:r>
-            <a:r>
-              <a:rPr lang="de-DE" dirty="0" err="1"/>
-              <a:t>entity</a:t>
-            </a:r>
-            <a:r>
-              <a:rPr lang="de-DE" dirty="0"/>
-              <a:t> </a:t>
-            </a:r>
-            <a:r>
-              <a:rPr lang="de-DE" dirty="0" err="1"/>
-              <a:t>labels</a:t>
-            </a:r>
-            <a:r>
-              <a:rPr lang="de-DE" dirty="0"/>
-              <a:t>).</a:t>
+              <a:t>prepended</a:t>
+            </a:r>
+            <a:r>
+              <a:rPr lang="de-DE" dirty="0"/>
+              <a:t> </a:t>
+            </a:r>
+            <a:r>
+              <a:rPr lang="de-DE" dirty="0" err="1"/>
+              <a:t>to</a:t>
+            </a:r>
+            <a:r>
+              <a:rPr lang="de-DE" dirty="0"/>
+              <a:t> </a:t>
+            </a:r>
+            <a:r>
+              <a:rPr lang="de-DE" dirty="0" err="1"/>
+              <a:t>the</a:t>
+            </a:r>
+            <a:r>
+              <a:rPr lang="de-DE" dirty="0"/>
+              <a:t> </a:t>
+            </a:r>
+            <a:r>
+              <a:rPr lang="de-DE" dirty="0" err="1"/>
+              <a:t>input</a:t>
+            </a:r>
+            <a:r>
+              <a:rPr lang="de-DE" dirty="0"/>
+              <a:t>.</a:t>
             </a:r>
           </a:p>
           <a:p>
@@ -13705,47 +14078,87 @@
             </a:pPr>
             <a:r>
               <a:rPr lang="de-DE" dirty="0" err="1"/>
-              <a:t>No</a:t>
-            </a:r>
-            <a:r>
-              <a:rPr lang="de-DE" dirty="0"/>
-              <a:t> </a:t>
-            </a:r>
-            <a:r>
-              <a:rPr lang="de-DE" dirty="0" err="1"/>
-              <a:t>pooling</a:t>
-            </a:r>
-            <a:r>
-              <a:rPr lang="de-DE" dirty="0"/>
-              <a:t>, </a:t>
-            </a:r>
-            <a:r>
-              <a:rPr lang="de-DE" dirty="0" err="1"/>
-              <a:t>because</a:t>
-            </a:r>
-            <a:r>
-              <a:rPr lang="de-DE" dirty="0"/>
-              <a:t> </a:t>
-            </a:r>
-            <a:r>
-              <a:rPr lang="de-DE" dirty="0" err="1"/>
-              <a:t>you</a:t>
-            </a:r>
-            <a:r>
-              <a:rPr lang="de-DE" dirty="0"/>
-              <a:t> </a:t>
-            </a:r>
-            <a:r>
-              <a:rPr lang="de-DE" dirty="0" err="1"/>
-              <a:t>need</a:t>
-            </a:r>
-            <a:r>
-              <a:rPr lang="de-DE" dirty="0"/>
-              <a:t> per-token </a:t>
-            </a:r>
-            <a:r>
-              <a:rPr lang="de-DE" dirty="0" err="1"/>
-              <a:t>predictions</a:t>
+              <a:t>Its</a:t>
+            </a:r>
+            <a:r>
+              <a:rPr lang="de-DE" dirty="0"/>
+              <a:t> final </a:t>
+            </a:r>
+            <a:r>
+              <a:rPr lang="de-DE" dirty="0" err="1"/>
+              <a:t>hidden</a:t>
+            </a:r>
+            <a:r>
+              <a:rPr lang="de-DE" dirty="0"/>
+              <a:t> </a:t>
+            </a:r>
+            <a:r>
+              <a:rPr lang="de-DE" dirty="0" err="1"/>
+              <a:t>state</a:t>
+            </a:r>
+            <a:r>
+              <a:rPr lang="de-DE" dirty="0"/>
+              <a:t> h_[CLS] </a:t>
+            </a:r>
+            <a:r>
+              <a:rPr lang="de-DE" dirty="0" err="1"/>
+              <a:t>is</a:t>
+            </a:r>
+            <a:r>
+              <a:rPr lang="de-DE" dirty="0"/>
+              <a:t> </a:t>
+            </a:r>
+            <a:r>
+              <a:rPr lang="de-DE" dirty="0" err="1"/>
+              <a:t>treated</a:t>
+            </a:r>
+            <a:r>
+              <a:rPr lang="de-DE" dirty="0"/>
+              <a:t> </a:t>
+            </a:r>
+            <a:r>
+              <a:rPr lang="de-DE" dirty="0" err="1"/>
+              <a:t>as</a:t>
+            </a:r>
+            <a:r>
+              <a:rPr lang="de-DE" dirty="0"/>
+              <a:t> a </a:t>
+            </a:r>
+            <a:r>
+              <a:rPr lang="de-DE" dirty="0" err="1"/>
+              <a:t>summary</a:t>
+            </a:r>
+            <a:r>
+              <a:rPr lang="de-DE" dirty="0"/>
+              <a:t> </a:t>
+            </a:r>
+            <a:r>
+              <a:rPr lang="de-DE" dirty="0" err="1"/>
+              <a:t>of</a:t>
+            </a:r>
+            <a:r>
+              <a:rPr lang="de-DE" dirty="0"/>
+              <a:t> </a:t>
+            </a:r>
+            <a:r>
+              <a:rPr lang="de-DE" dirty="0" err="1"/>
+              <a:t>the</a:t>
+            </a:r>
+            <a:r>
+              <a:rPr lang="de-DE" dirty="0"/>
+              <a:t> </a:t>
+            </a:r>
+            <a:r>
+              <a:rPr lang="de-DE" dirty="0" err="1"/>
+              <a:t>whole</a:t>
+            </a:r>
+            <a:r>
+              <a:rPr lang="de-DE" dirty="0"/>
+              <a:t> </a:t>
+            </a:r>
+            <a:r>
+              <a:rPr lang="de-DE" dirty="0" err="1"/>
+              <a:t>sequence</a:t>
             </a:r>
             <a:r>
               <a:rPr lang="de-DE" dirty="0"/>
@@ -13758,19 +14171,225 @@
             </a:pPr>
             <a:r>
               <a:rPr lang="de-DE" dirty="0" err="1"/>
-              <a:t>logits_i</a:t>
-            </a:r>
-            <a:r>
-              <a:rPr lang="de-DE" dirty="0"/>
-              <a:t> = </a:t>
-            </a:r>
-            <a:r>
-              <a:rPr lang="de-DE" dirty="0" err="1"/>
-              <a:t>h_i</a:t>
-            </a:r>
-            <a:r>
-              <a:rPr lang="de-DE" dirty="0"/>
-              <a:t> W + b</a:t>
+              <a:t>That</a:t>
+            </a:r>
+            <a:r>
+              <a:rPr lang="de-DE" dirty="0"/>
+              <a:t> </a:t>
+            </a:r>
+            <a:r>
+              <a:rPr lang="de-DE" dirty="0" err="1"/>
+              <a:t>vector</a:t>
+            </a:r>
+            <a:r>
+              <a:rPr lang="de-DE" dirty="0"/>
+              <a:t> </a:t>
+            </a:r>
+            <a:r>
+              <a:rPr lang="de-DE" dirty="0" err="1"/>
+              <a:t>is</a:t>
+            </a:r>
+            <a:r>
+              <a:rPr lang="de-DE" dirty="0"/>
+              <a:t> </a:t>
+            </a:r>
+            <a:r>
+              <a:rPr lang="de-DE" dirty="0" err="1"/>
+              <a:t>passed</a:t>
+            </a:r>
+            <a:r>
+              <a:rPr lang="de-DE" dirty="0"/>
+              <a:t> </a:t>
+            </a:r>
+            <a:r>
+              <a:rPr lang="de-DE" dirty="0" err="1"/>
+              <a:t>into</a:t>
+            </a:r>
+            <a:r>
+              <a:rPr lang="de-DE" dirty="0"/>
+              <a:t> a linear </a:t>
+            </a:r>
+            <a:r>
+              <a:rPr lang="de-DE" dirty="0" err="1"/>
+              <a:t>classification</a:t>
+            </a:r>
+            <a:r>
+              <a:rPr lang="de-DE" dirty="0"/>
+              <a:t> </a:t>
+            </a:r>
+            <a:r>
+              <a:rPr lang="de-DE" dirty="0" err="1"/>
+              <a:t>head</a:t>
+            </a:r>
+            <a:r>
+              <a:rPr lang="de-DE" dirty="0"/>
+              <a:t> → </a:t>
+            </a:r>
+            <a:r>
+              <a:rPr lang="de-DE" dirty="0" err="1"/>
+              <a:t>logits</a:t>
+            </a:r>
+            <a:r>
+              <a:rPr lang="de-DE" dirty="0"/>
+              <a:t> </a:t>
+            </a:r>
+            <a:r>
+              <a:rPr lang="de-DE" dirty="0" err="1"/>
+              <a:t>over</a:t>
+            </a:r>
+            <a:r>
+              <a:rPr lang="de-DE" dirty="0"/>
+              <a:t> </a:t>
+            </a:r>
+            <a:r>
+              <a:rPr lang="de-DE" dirty="0" err="1"/>
+              <a:t>classes</a:t>
+            </a:r>
+            <a:r>
+              <a:rPr lang="de-DE" dirty="0"/>
+              <a:t>.</a:t>
+            </a:r>
+          </a:p>
+          <a:p>
+            <a:pPr marL="0" indent="0">
+              <a:buNone/>
+            </a:pPr>
+            <a:r>
+              <a:rPr lang="de-DE" b="1" dirty="0" err="1"/>
+              <a:t>default</a:t>
+            </a:r>
+            <a:r>
+              <a:rPr lang="de-DE" b="1" dirty="0"/>
+              <a:t> in BERT-style </a:t>
+            </a:r>
+            <a:r>
+              <a:rPr lang="de-DE" b="1" dirty="0" err="1"/>
+              <a:t>models</a:t>
+            </a:r>
+            <a:endParaRPr lang="de-DE" b="1" dirty="0"/>
+          </a:p>
+          <a:p>
+            <a:pPr marL="0" indent="0">
+              <a:buNone/>
+            </a:pPr>
+            <a:br>
+              <a:rPr lang="de-DE" dirty="0"/>
+            </a:br>
+            <a:r>
+              <a:rPr lang="de-DE" dirty="0"/>
+              <a:t>(</a:t>
+            </a:r>
+            <a:r>
+              <a:rPr lang="de-DE" dirty="0" err="1"/>
+              <a:t>Some</a:t>
+            </a:r>
+            <a:r>
+              <a:rPr lang="de-DE" dirty="0"/>
+              <a:t> </a:t>
+            </a:r>
+            <a:r>
+              <a:rPr lang="de-DE" dirty="0" err="1"/>
+              <a:t>variants</a:t>
+            </a:r>
+            <a:r>
+              <a:rPr lang="de-DE" dirty="0"/>
+              <a:t> </a:t>
+            </a:r>
+            <a:r>
+              <a:rPr lang="de-DE" dirty="0" err="1"/>
+              <a:t>use</a:t>
+            </a:r>
+            <a:r>
+              <a:rPr lang="de-DE" dirty="0"/>
+              <a:t> </a:t>
+            </a:r>
+            <a:r>
+              <a:rPr lang="de-DE" b="1" dirty="0" err="1"/>
+              <a:t>average</a:t>
+            </a:r>
+            <a:r>
+              <a:rPr lang="de-DE" b="1" dirty="0"/>
+              <a:t> </a:t>
+            </a:r>
+            <a:r>
+              <a:rPr lang="de-DE" b="1" dirty="0" err="1"/>
+              <a:t>pooling</a:t>
+            </a:r>
+            <a:r>
+              <a:rPr lang="de-DE" dirty="0"/>
+              <a:t> </a:t>
+            </a:r>
+            <a:r>
+              <a:rPr lang="de-DE" dirty="0" err="1"/>
+              <a:t>over</a:t>
+            </a:r>
+            <a:r>
+              <a:rPr lang="de-DE" dirty="0"/>
+              <a:t> all </a:t>
+            </a:r>
+            <a:r>
+              <a:rPr lang="de-DE" dirty="0" err="1"/>
+              <a:t>token</a:t>
+            </a:r>
+            <a:r>
+              <a:rPr lang="de-DE" dirty="0"/>
+              <a:t> </a:t>
+            </a:r>
+            <a:r>
+              <a:rPr lang="de-DE" dirty="0" err="1"/>
+              <a:t>states</a:t>
+            </a:r>
+            <a:r>
+              <a:rPr lang="de-DE" dirty="0"/>
+              <a:t> </a:t>
+            </a:r>
+            <a:r>
+              <a:rPr lang="de-DE" dirty="0" err="1"/>
+              <a:t>instead</a:t>
+            </a:r>
+            <a:r>
+              <a:rPr lang="de-DE" dirty="0"/>
+              <a:t> </a:t>
+            </a:r>
+            <a:r>
+              <a:rPr lang="de-DE" dirty="0" err="1"/>
+              <a:t>of</a:t>
+            </a:r>
+            <a:r>
+              <a:rPr lang="de-DE" dirty="0"/>
+              <a:t> [CLS], but [CLS] </a:t>
+            </a:r>
+            <a:r>
+              <a:rPr lang="de-DE" dirty="0" err="1"/>
+              <a:t>is</a:t>
+            </a:r>
+            <a:r>
+              <a:rPr lang="de-DE" dirty="0"/>
+              <a:t> </a:t>
+            </a:r>
+            <a:r>
+              <a:rPr lang="de-DE" dirty="0" err="1"/>
+              <a:t>the</a:t>
+            </a:r>
+            <a:r>
+              <a:rPr lang="de-DE" dirty="0"/>
+              <a:t> original/</a:t>
+            </a:r>
+            <a:r>
+              <a:rPr lang="de-DE" dirty="0" err="1"/>
+              <a:t>standard</a:t>
+            </a:r>
+            <a:r>
+              <a:rPr lang="de-DE" dirty="0"/>
+              <a:t> </a:t>
+            </a:r>
+            <a:r>
+              <a:rPr lang="de-DE" dirty="0" err="1"/>
+              <a:t>choice</a:t>
+            </a:r>
+            <a:r>
+              <a:rPr lang="de-DE" dirty="0"/>
+              <a:t>.)</a:t>
             </a:r>
           </a:p>
         </p:txBody>
@@ -13780,7 +14399,7 @@
           <p:cNvPr id="4" name="Foliennummernplatzhalter 3">
             <a:extLst>
               <a:ext uri="{FF2B5EF4-FFF2-40B4-BE49-F238E27FC236}">
-                <a16:creationId xmlns:a16="http://schemas.microsoft.com/office/drawing/2014/main" id="{1F870D76-8BA8-B35C-291C-27A5AEB557B8}"/>
+                <a16:creationId xmlns:a16="http://schemas.microsoft.com/office/drawing/2014/main" id="{B04A72D0-DDFF-CBDD-9B6B-E819F5AD255C}"/>
               </a:ext>
             </a:extLst>
           </p:cNvPr>
@@ -13807,7 +14426,7 @@
     </p:spTree>
     <p:extLst>
       <p:ext uri="{BB962C8B-B14F-4D97-AF65-F5344CB8AC3E}">
-        <p14:creationId xmlns:p14="http://schemas.microsoft.com/office/powerpoint/2010/main" val="1781625330"/>
+        <p14:creationId xmlns:p14="http://schemas.microsoft.com/office/powerpoint/2010/main" val="1004237482"/>
       </p:ext>
     </p:extLst>
   </p:cSld>
@@ -13839,7 +14458,7 @@
           <p:cNvPr id="2" name="Titel 1">
             <a:extLst>
               <a:ext uri="{FF2B5EF4-FFF2-40B4-BE49-F238E27FC236}">
-                <a16:creationId xmlns:a16="http://schemas.microsoft.com/office/drawing/2014/main" id="{B17F9850-863B-4A7C-99A5-A8ED55900FF3}"/>
+                <a16:creationId xmlns:a16="http://schemas.microsoft.com/office/drawing/2014/main" id="{AC8D2A51-B38D-9C57-1ABF-8D603A1E5500}"/>
               </a:ext>
             </a:extLst>
           </p:cNvPr>
@@ -13864,7 +14483,7 @@
           <p:cNvPr id="3" name="Inhaltsplatzhalter 2">
             <a:extLst>
               <a:ext uri="{FF2B5EF4-FFF2-40B4-BE49-F238E27FC236}">
-                <a16:creationId xmlns:a16="http://schemas.microsoft.com/office/drawing/2014/main" id="{827E124F-2FF1-163C-3201-2FF90B52D75F}"/>
+                <a16:creationId xmlns:a16="http://schemas.microsoft.com/office/drawing/2014/main" id="{DFC6E1E0-93F3-C0C8-C345-1BD1F5C25C12}"/>
               </a:ext>
             </a:extLst>
           </p:cNvPr>
@@ -13884,26 +14503,25 @@
               <a:buNone/>
             </a:pPr>
             <a:r>
+              <a:rPr lang="de-DE" b="1" dirty="0"/>
+              <a:t>Token </a:t>
+            </a:r>
+            <a:r>
               <a:rPr lang="de-DE" b="1" dirty="0" err="1"/>
-              <a:t>Sentence</a:t>
+              <a:t>classification</a:t>
             </a:r>
             <a:r>
               <a:rPr lang="de-DE" b="1" dirty="0"/>
-              <a:t> </a:t>
+              <a:t> (NER, POS </a:t>
             </a:r>
             <a:r>
               <a:rPr lang="de-DE" b="1" dirty="0" err="1"/>
-              <a:t>similarity</a:t>
+              <a:t>tagging</a:t>
             </a:r>
             <a:r>
               <a:rPr lang="de-DE" b="1" dirty="0"/>
-              <a:t> / </a:t>
-            </a:r>
-            <a:r>
-              <a:rPr lang="de-DE" b="1" dirty="0" err="1"/>
-              <a:t>retrieval</a:t>
-            </a:r>
-            <a:endParaRPr lang="de-DE" b="1" dirty="0"/>
+              <a:t>, etc.)</a:t>
+            </a:r>
           </a:p>
           <a:p>
             <a:pPr marL="0" indent="0">
@@ -13911,23 +14529,71 @@
             </a:pPr>
             <a:r>
               <a:rPr lang="de-DE" dirty="0" err="1"/>
-              <a:t>Sometimes</a:t>
-            </a:r>
-            <a:r>
-              <a:rPr lang="de-DE" dirty="0"/>
-              <a:t> </a:t>
-            </a:r>
-            <a:r>
-              <a:rPr lang="de-DE" dirty="0" err="1"/>
-              <a:t>average</a:t>
-            </a:r>
-            <a:r>
-              <a:rPr lang="de-DE" dirty="0"/>
-              <a:t> </a:t>
-            </a:r>
-            <a:r>
-              <a:rPr lang="de-DE" dirty="0" err="1"/>
-              <a:t>pooling</a:t>
+              <a:t>Each</a:t>
+            </a:r>
+            <a:r>
+              <a:rPr lang="de-DE" dirty="0"/>
+              <a:t> </a:t>
+            </a:r>
+            <a:r>
+              <a:rPr lang="de-DE" dirty="0" err="1"/>
+              <a:t>token’s</a:t>
+            </a:r>
+            <a:r>
+              <a:rPr lang="de-DE" dirty="0"/>
+              <a:t> </a:t>
+            </a:r>
+            <a:r>
+              <a:rPr lang="de-DE" dirty="0" err="1"/>
+              <a:t>hidden</a:t>
+            </a:r>
+            <a:r>
+              <a:rPr lang="de-DE" dirty="0"/>
+              <a:t> </a:t>
+            </a:r>
+            <a:r>
+              <a:rPr lang="de-DE" dirty="0" err="1"/>
+              <a:t>state</a:t>
+            </a:r>
+            <a:r>
+              <a:rPr lang="de-DE" dirty="0"/>
+              <a:t> </a:t>
+            </a:r>
+            <a:r>
+              <a:rPr lang="de-DE" dirty="0" err="1"/>
+              <a:t>is</a:t>
+            </a:r>
+            <a:r>
+              <a:rPr lang="de-DE" dirty="0"/>
+              <a:t> </a:t>
+            </a:r>
+            <a:r>
+              <a:rPr lang="de-DE" dirty="0" err="1"/>
+              <a:t>projected</a:t>
+            </a:r>
+            <a:r>
+              <a:rPr lang="de-DE" dirty="0"/>
+              <a:t> </a:t>
+            </a:r>
+            <a:r>
+              <a:rPr lang="de-DE" b="1" dirty="0" err="1"/>
+              <a:t>independently</a:t>
+            </a:r>
+            <a:r>
+              <a:rPr lang="de-DE" dirty="0"/>
+              <a:t> </a:t>
+            </a:r>
+            <a:r>
+              <a:rPr lang="de-DE" dirty="0" err="1"/>
+              <a:t>into</a:t>
+            </a:r>
+            <a:r>
+              <a:rPr lang="de-DE" dirty="0"/>
+              <a:t> </a:t>
+            </a:r>
+            <a:r>
+              <a:rPr lang="de-DE" dirty="0" err="1"/>
+              <a:t>logits</a:t>
             </a:r>
             <a:r>
               <a:rPr lang="de-DE" dirty="0"/>
@@ -13935,115 +14601,35 @@
             </a:r>
             <a:r>
               <a:rPr lang="de-DE" dirty="0" err="1"/>
-              <a:t>mean</a:t>
-            </a:r>
-            <a:r>
-              <a:rPr lang="de-DE" dirty="0"/>
-              <a:t> </a:t>
-            </a:r>
-            <a:r>
-              <a:rPr lang="de-DE" dirty="0" err="1"/>
-              <a:t>of</a:t>
-            </a:r>
-            <a:r>
-              <a:rPr lang="de-DE" dirty="0"/>
-              <a:t> all </a:t>
-            </a:r>
-            <a:r>
-              <a:rPr lang="de-DE" dirty="0" err="1"/>
-              <a:t>hidden</a:t>
-            </a:r>
-            <a:r>
-              <a:rPr lang="de-DE" dirty="0"/>
-              <a:t> </a:t>
-            </a:r>
-            <a:r>
-              <a:rPr lang="de-DE" dirty="0" err="1"/>
-              <a:t>states</a:t>
-            </a:r>
-            <a:r>
-              <a:rPr lang="de-DE" dirty="0"/>
-              <a:t>) </a:t>
-            </a:r>
-            <a:r>
-              <a:rPr lang="de-DE" dirty="0" err="1"/>
-              <a:t>is</a:t>
-            </a:r>
-            <a:r>
-              <a:rPr lang="de-DE" dirty="0"/>
-              <a:t> </a:t>
-            </a:r>
-            <a:r>
-              <a:rPr lang="de-DE" dirty="0" err="1"/>
-              <a:t>used</a:t>
-            </a:r>
-            <a:r>
-              <a:rPr lang="de-DE" dirty="0"/>
-              <a:t> </a:t>
-            </a:r>
-            <a:r>
-              <a:rPr lang="de-DE" dirty="0" err="1"/>
-              <a:t>instead</a:t>
-            </a:r>
-            <a:r>
-              <a:rPr lang="de-DE" dirty="0"/>
-              <a:t> </a:t>
-            </a:r>
-            <a:r>
-              <a:rPr lang="de-DE" dirty="0" err="1"/>
-              <a:t>of</a:t>
-            </a:r>
-            <a:r>
-              <a:rPr lang="de-DE" dirty="0"/>
-              <a:t> [CLS], </a:t>
-            </a:r>
-            <a:r>
-              <a:rPr lang="de-DE" dirty="0" err="1"/>
-              <a:t>because</a:t>
-            </a:r>
-            <a:r>
-              <a:rPr lang="de-DE" dirty="0"/>
-              <a:t> </a:t>
-            </a:r>
-            <a:r>
-              <a:rPr lang="de-DE" dirty="0" err="1"/>
-              <a:t>it</a:t>
-            </a:r>
-            <a:r>
-              <a:rPr lang="de-DE" dirty="0"/>
-              <a:t> </a:t>
-            </a:r>
-            <a:r>
-              <a:rPr lang="de-DE" dirty="0" err="1"/>
-              <a:t>gives</a:t>
-            </a:r>
-            <a:r>
-              <a:rPr lang="de-DE" dirty="0"/>
-              <a:t> a smoother </a:t>
-            </a:r>
-            <a:r>
-              <a:rPr lang="de-DE" dirty="0" err="1"/>
-              <a:t>representation</a:t>
-            </a:r>
-            <a:r>
-              <a:rPr lang="de-DE" dirty="0"/>
-              <a:t> </a:t>
-            </a:r>
-            <a:r>
-              <a:rPr lang="de-DE" dirty="0" err="1"/>
-              <a:t>for</a:t>
-            </a:r>
-            <a:r>
-              <a:rPr lang="de-DE" dirty="0"/>
-              <a:t> </a:t>
-            </a:r>
-            <a:r>
-              <a:rPr lang="de-DE" dirty="0" err="1"/>
-              <a:t>embeddings</a:t>
-            </a:r>
-            <a:r>
-              <a:rPr lang="de-DE" dirty="0"/>
-              <a:t>.</a:t>
+              <a:t>usually</a:t>
+            </a:r>
+            <a:r>
+              <a:rPr lang="de-DE" dirty="0"/>
+              <a:t> </a:t>
+            </a:r>
+            <a:r>
+              <a:rPr lang="de-DE" dirty="0" err="1"/>
+              <a:t>over</a:t>
+            </a:r>
+            <a:r>
+              <a:rPr lang="de-DE" dirty="0"/>
+              <a:t> </a:t>
+            </a:r>
+            <a:r>
+              <a:rPr lang="de-DE" dirty="0" err="1"/>
+              <a:t>entity</a:t>
+            </a:r>
+            <a:r>
+              <a:rPr lang="de-DE" dirty="0"/>
+              <a:t> </a:t>
+            </a:r>
+            <a:r>
+              <a:rPr lang="de-DE" dirty="0" err="1"/>
+              <a:t>labels</a:t>
+            </a:r>
+            <a:r>
+              <a:rPr lang="de-DE" dirty="0"/>
+              <a:t>).</a:t>
             </a:r>
           </a:p>
           <a:p>
@@ -14052,41 +14638,74 @@
             </a:pPr>
             <a:r>
               <a:rPr lang="de-DE" dirty="0" err="1"/>
-              <a:t>That’s</a:t>
-            </a:r>
-            <a:r>
-              <a:rPr lang="de-DE" dirty="0"/>
-              <a:t> </a:t>
-            </a:r>
-            <a:r>
-              <a:rPr lang="de-DE" dirty="0" err="1"/>
-              <a:t>what</a:t>
-            </a:r>
-            <a:r>
-              <a:rPr lang="de-DE" dirty="0"/>
-              <a:t> </a:t>
-            </a:r>
-            <a:r>
-              <a:rPr lang="de-DE" b="1" dirty="0" err="1"/>
-              <a:t>Sentence</a:t>
-            </a:r>
-            <a:r>
-              <a:rPr lang="de-DE" b="1" dirty="0"/>
-              <a:t>-BERT (SBERT)</a:t>
-            </a:r>
-            <a:r>
-              <a:rPr lang="de-DE" dirty="0"/>
-              <a:t> </a:t>
-            </a:r>
-            <a:r>
-              <a:rPr lang="de-DE" dirty="0" err="1"/>
-              <a:t>does</a:t>
+              <a:t>No</a:t>
+            </a:r>
+            <a:r>
+              <a:rPr lang="de-DE" dirty="0"/>
+              <a:t> </a:t>
+            </a:r>
+            <a:r>
+              <a:rPr lang="de-DE" dirty="0" err="1"/>
+              <a:t>pooling</a:t>
+            </a:r>
+            <a:r>
+              <a:rPr lang="de-DE" dirty="0"/>
+              <a:t>, </a:t>
+            </a:r>
+            <a:r>
+              <a:rPr lang="de-DE" dirty="0" err="1"/>
+              <a:t>because</a:t>
+            </a:r>
+            <a:r>
+              <a:rPr lang="de-DE" dirty="0"/>
+              <a:t> </a:t>
+            </a:r>
+            <a:r>
+              <a:rPr lang="de-DE" dirty="0" err="1"/>
+              <a:t>you</a:t>
+            </a:r>
+            <a:r>
+              <a:rPr lang="de-DE" dirty="0"/>
+              <a:t> </a:t>
+            </a:r>
+            <a:r>
+              <a:rPr lang="de-DE" dirty="0" err="1"/>
+              <a:t>need</a:t>
+            </a:r>
+            <a:r>
+              <a:rPr lang="de-DE" dirty="0"/>
+              <a:t> per-token </a:t>
+            </a:r>
+            <a:r>
+              <a:rPr lang="de-DE" dirty="0" err="1"/>
+              <a:t>predictions</a:t>
             </a:r>
             <a:r>
               <a:rPr lang="de-DE" dirty="0"/>
               <a:t>.</a:t>
             </a:r>
           </a:p>
+          <a:p>
+            <a:pPr marL="0" indent="0">
+              <a:buNone/>
+            </a:pPr>
+            <a:r>
+              <a:rPr lang="de-DE" dirty="0" err="1"/>
+              <a:t>logits_i</a:t>
+            </a:r>
+            <a:r>
+              <a:rPr lang="de-DE" dirty="0"/>
+              <a:t> = </a:t>
+            </a:r>
+            <a:r>
+              <a:rPr lang="de-DE" dirty="0" err="1"/>
+              <a:t>h_i</a:t>
+            </a:r>
+            <a:r>
+              <a:rPr lang="de-DE" dirty="0"/>
+              <a:t> W + b</a:t>
+            </a:r>
+          </a:p>
         </p:txBody>
       </p:sp>
       <p:sp>
@@ -14094,7 +14713,7 @@
           <p:cNvPr id="4" name="Foliennummernplatzhalter 3">
             <a:extLst>
               <a:ext uri="{FF2B5EF4-FFF2-40B4-BE49-F238E27FC236}">
-                <a16:creationId xmlns:a16="http://schemas.microsoft.com/office/drawing/2014/main" id="{F3FA2F52-7FFF-92B0-F7A7-623ED745F3E6}"/>
+                <a16:creationId xmlns:a16="http://schemas.microsoft.com/office/drawing/2014/main" id="{1F870D76-8BA8-B35C-291C-27A5AEB557B8}"/>
               </a:ext>
             </a:extLst>
           </p:cNvPr>
@@ -14121,7 +14740,7 @@
     </p:spTree>
     <p:extLst>
       <p:ext uri="{BB962C8B-B14F-4D97-AF65-F5344CB8AC3E}">
-        <p14:creationId xmlns:p14="http://schemas.microsoft.com/office/powerpoint/2010/main" val="2476222795"/>
+        <p14:creationId xmlns:p14="http://schemas.microsoft.com/office/powerpoint/2010/main" val="1781625330"/>
       </p:ext>
     </p:extLst>
   </p:cSld>
@@ -14153,7 +14772,7 @@
           <p:cNvPr id="2" name="Titel 1">
             <a:extLst>
               <a:ext uri="{FF2B5EF4-FFF2-40B4-BE49-F238E27FC236}">
-                <a16:creationId xmlns:a16="http://schemas.microsoft.com/office/drawing/2014/main" id="{2893F29B-BD86-3EF8-10C3-E57EA752C0F3}"/>
+                <a16:creationId xmlns:a16="http://schemas.microsoft.com/office/drawing/2014/main" id="{B17F9850-863B-4A7C-99A5-A8ED55900FF3}"/>
               </a:ext>
             </a:extLst>
           </p:cNvPr>
@@ -14178,7 +14797,7 @@
           <p:cNvPr id="3" name="Inhaltsplatzhalter 2">
             <a:extLst>
               <a:ext uri="{FF2B5EF4-FFF2-40B4-BE49-F238E27FC236}">
-                <a16:creationId xmlns:a16="http://schemas.microsoft.com/office/drawing/2014/main" id="{EF684A05-346A-6203-E269-C1F6CFBE41A3}"/>
+                <a16:creationId xmlns:a16="http://schemas.microsoft.com/office/drawing/2014/main" id="{827E124F-2FF1-163C-3201-2FF90B52D75F}"/>
               </a:ext>
             </a:extLst>
           </p:cNvPr>
@@ -14191,728 +14810,216 @@
         </p:nvSpPr>
         <p:spPr/>
         <p:txBody>
-          <a:bodyPr>
-            <a:normAutofit fontScale="55000" lnSpcReduction="20000"/>
-          </a:bodyPr>
+          <a:bodyPr/>
           <a:lstStyle/>
           <a:p>
             <a:pPr marL="0" indent="0">
               <a:buNone/>
             </a:pPr>
             <a:r>
-              <a:rPr lang="en-GB" dirty="0"/>
-              <a:t>but uses a combination (average pooling or [CLS] token) of the hidden states of every token for projection to vector of logits</a:t>
-            </a:r>
+              <a:rPr lang="de-DE" b="1" dirty="0" err="1"/>
+              <a:t>Sentence</a:t>
+            </a:r>
+            <a:r>
+              <a:rPr lang="de-DE" b="1" dirty="0"/>
+              <a:t> </a:t>
+            </a:r>
+            <a:r>
+              <a:rPr lang="de-DE" b="1" dirty="0" err="1"/>
+              <a:t>similarity</a:t>
+            </a:r>
+            <a:r>
+              <a:rPr lang="de-DE" b="1" dirty="0"/>
+              <a:t> / </a:t>
+            </a:r>
+            <a:r>
+              <a:rPr lang="de-DE" b="1" dirty="0" err="1"/>
+              <a:t>retrieval</a:t>
+            </a:r>
+            <a:endParaRPr lang="de-DE" b="1" dirty="0"/>
           </a:p>
           <a:p>
             <a:pPr marL="0" indent="0">
               <a:buNone/>
             </a:pPr>
-            <a:endParaRPr lang="de-DE" dirty="0">
-              <a:hlinkClick r:id="rId2"/>
-            </a:endParaRPr>
+            <a:r>
+              <a:rPr lang="de-DE" dirty="0" err="1"/>
+              <a:t>Sometimes</a:t>
+            </a:r>
+            <a:r>
+              <a:rPr lang="de-DE" dirty="0"/>
+              <a:t> </a:t>
+            </a:r>
+            <a:r>
+              <a:rPr lang="de-DE" dirty="0" err="1"/>
+              <a:t>average</a:t>
+            </a:r>
+            <a:r>
+              <a:rPr lang="de-DE" dirty="0"/>
+              <a:t> </a:t>
+            </a:r>
+            <a:r>
+              <a:rPr lang="de-DE" dirty="0" err="1"/>
+              <a:t>pooling</a:t>
+            </a:r>
+            <a:r>
+              <a:rPr lang="de-DE" dirty="0"/>
+              <a:t> (</a:t>
+            </a:r>
+            <a:r>
+              <a:rPr lang="de-DE" dirty="0" err="1"/>
+              <a:t>mean</a:t>
+            </a:r>
+            <a:r>
+              <a:rPr lang="de-DE" dirty="0"/>
+              <a:t> </a:t>
+            </a:r>
+            <a:r>
+              <a:rPr lang="de-DE" dirty="0" err="1"/>
+              <a:t>of</a:t>
+            </a:r>
+            <a:r>
+              <a:rPr lang="de-DE" dirty="0"/>
+              <a:t> all </a:t>
+            </a:r>
+            <a:r>
+              <a:rPr lang="de-DE" dirty="0" err="1"/>
+              <a:t>hidden</a:t>
+            </a:r>
+            <a:r>
+              <a:rPr lang="de-DE" dirty="0"/>
+              <a:t> </a:t>
+            </a:r>
+            <a:r>
+              <a:rPr lang="de-DE" dirty="0" err="1"/>
+              <a:t>states</a:t>
+            </a:r>
+            <a:r>
+              <a:rPr lang="de-DE" dirty="0"/>
+              <a:t>) </a:t>
+            </a:r>
+            <a:r>
+              <a:rPr lang="de-DE" dirty="0" err="1"/>
+              <a:t>is</a:t>
+            </a:r>
+            <a:r>
+              <a:rPr lang="de-DE" dirty="0"/>
+              <a:t> </a:t>
+            </a:r>
+            <a:r>
+              <a:rPr lang="de-DE" dirty="0" err="1"/>
+              <a:t>used</a:t>
+            </a:r>
+            <a:r>
+              <a:rPr lang="de-DE" dirty="0"/>
+              <a:t> </a:t>
+            </a:r>
+            <a:r>
+              <a:rPr lang="de-DE" dirty="0" err="1"/>
+              <a:t>instead</a:t>
+            </a:r>
+            <a:r>
+              <a:rPr lang="de-DE" dirty="0"/>
+              <a:t> </a:t>
+            </a:r>
+            <a:r>
+              <a:rPr lang="de-DE" dirty="0" err="1"/>
+              <a:t>of</a:t>
+            </a:r>
+            <a:r>
+              <a:rPr lang="de-DE" dirty="0"/>
+              <a:t> [CLS], </a:t>
+            </a:r>
+            <a:r>
+              <a:rPr lang="de-DE" dirty="0" err="1"/>
+              <a:t>because</a:t>
+            </a:r>
+            <a:r>
+              <a:rPr lang="de-DE" dirty="0"/>
+              <a:t> </a:t>
+            </a:r>
+            <a:r>
+              <a:rPr lang="de-DE" dirty="0" err="1"/>
+              <a:t>it</a:t>
+            </a:r>
+            <a:r>
+              <a:rPr lang="de-DE" dirty="0"/>
+              <a:t> </a:t>
+            </a:r>
+            <a:r>
+              <a:rPr lang="de-DE" dirty="0" err="1"/>
+              <a:t>gives</a:t>
+            </a:r>
+            <a:r>
+              <a:rPr lang="de-DE" dirty="0"/>
+              <a:t> a smoother </a:t>
+            </a:r>
+            <a:r>
+              <a:rPr lang="de-DE" dirty="0" err="1"/>
+              <a:t>representation</a:t>
+            </a:r>
+            <a:r>
+              <a:rPr lang="de-DE" dirty="0"/>
+              <a:t> </a:t>
+            </a:r>
+            <a:r>
+              <a:rPr lang="de-DE" dirty="0" err="1"/>
+              <a:t>for</a:t>
+            </a:r>
+            <a:r>
+              <a:rPr lang="de-DE" dirty="0"/>
+              <a:t> </a:t>
+            </a:r>
+            <a:r>
+              <a:rPr lang="de-DE" dirty="0" err="1"/>
+              <a:t>embeddings</a:t>
+            </a:r>
+            <a:r>
+              <a:rPr lang="de-DE" dirty="0"/>
+              <a:t>.</a:t>
+            </a:r>
           </a:p>
           <a:p>
             <a:pPr marL="0" indent="0">
               <a:buNone/>
             </a:pPr>
             <a:r>
-              <a:rPr lang="en-DE">
-                <a:hlinkClick r:id="rId2"/>
-              </a:rPr>
-              <a:t>BERT</a:t>
-            </a:r>
-            <a:r>
-              <a:rPr lang="de-DE" dirty="0"/>
-              <a:t> (</a:t>
-            </a:r>
-            <a:r>
-              <a:rPr lang="de-DE" dirty="0" err="1"/>
-              <a:t>uses</a:t>
-            </a:r>
-            <a:r>
-              <a:rPr lang="de-DE" dirty="0"/>
-              <a:t> </a:t>
-            </a:r>
-            <a:r>
-              <a:rPr lang="en-GB" dirty="0"/>
-              <a:t>next-sentence prediction as additional pretraining objective</a:t>
-            </a:r>
-            <a:r>
-              <a:rPr lang="de-DE" dirty="0"/>
-              <a:t>)</a:t>
-            </a:r>
-          </a:p>
-          <a:p>
-            <a:pPr marL="0" indent="0">
-              <a:buNone/>
-            </a:pPr>
-            <a:endParaRPr lang="de-DE" dirty="0"/>
-          </a:p>
-          <a:p>
-            <a:r>
-              <a:rPr lang="de-DE" dirty="0" err="1"/>
-              <a:t>For</a:t>
-            </a:r>
-            <a:r>
-              <a:rPr lang="de-DE" dirty="0"/>
-              <a:t> </a:t>
-            </a:r>
-            <a:r>
-              <a:rPr lang="de-DE" dirty="0" err="1"/>
-              <a:t>each</a:t>
-            </a:r>
-            <a:r>
-              <a:rPr lang="de-DE" dirty="0"/>
-              <a:t> </a:t>
-            </a:r>
-            <a:r>
-              <a:rPr lang="de-DE" dirty="0" err="1"/>
-              <a:t>token</a:t>
-            </a:r>
-            <a:r>
-              <a:rPr lang="de-DE" dirty="0"/>
-              <a:t> </a:t>
-            </a:r>
-            <a:r>
-              <a:rPr lang="de-DE" dirty="0" err="1"/>
-              <a:t>selected</a:t>
-            </a:r>
-            <a:r>
-              <a:rPr lang="de-DE" dirty="0"/>
-              <a:t> </a:t>
-            </a:r>
-            <a:r>
-              <a:rPr lang="de-DE" dirty="0" err="1"/>
-              <a:t>for</a:t>
-            </a:r>
-            <a:r>
-              <a:rPr lang="de-DE" dirty="0"/>
-              <a:t> </a:t>
-            </a:r>
-            <a:r>
-              <a:rPr lang="de-DE" dirty="0" err="1"/>
-              <a:t>masking</a:t>
-            </a:r>
-            <a:r>
-              <a:rPr lang="de-DE" dirty="0"/>
-              <a:t> (15% </a:t>
-            </a:r>
-            <a:r>
-              <a:rPr lang="de-DE" dirty="0" err="1"/>
-              <a:t>of</a:t>
-            </a:r>
-            <a:r>
-              <a:rPr lang="de-DE" dirty="0"/>
-              <a:t> all </a:t>
-            </a:r>
-            <a:r>
-              <a:rPr lang="de-DE" dirty="0" err="1"/>
-              <a:t>tokens</a:t>
-            </a:r>
-            <a:r>
-              <a:rPr lang="de-DE" dirty="0"/>
-              <a:t>):</a:t>
-            </a:r>
-          </a:p>
-          <a:p>
+              <a:rPr lang="de-DE" dirty="0" err="1"/>
+              <a:t>That’s</a:t>
+            </a:r>
+            <a:r>
+              <a:rPr lang="de-DE" dirty="0"/>
+              <a:t> </a:t>
+            </a:r>
+            <a:r>
+              <a:rPr lang="de-DE" dirty="0" err="1"/>
+              <a:t>what</a:t>
+            </a:r>
+            <a:r>
+              <a:rPr lang="de-DE" dirty="0"/>
+              <a:t> </a:t>
+            </a:r>
+            <a:r>
+              <a:rPr lang="de-DE" b="1" dirty="0" err="1"/>
+              <a:t>Sentence</a:t>
+            </a:r>
             <a:r>
               <a:rPr lang="de-DE" b="1" dirty="0"/>
-              <a:t>80% </a:t>
-            </a:r>
-            <a:r>
-              <a:rPr lang="de-DE" b="1" dirty="0" err="1"/>
-              <a:t>of</a:t>
-            </a:r>
-            <a:r>
-              <a:rPr lang="de-DE" b="1" dirty="0"/>
-              <a:t> </a:t>
-            </a:r>
-            <a:r>
-              <a:rPr lang="de-DE" b="1" dirty="0" err="1"/>
-              <a:t>the</a:t>
-            </a:r>
-            <a:r>
-              <a:rPr lang="de-DE" b="1" dirty="0"/>
-              <a:t> time</a:t>
-            </a:r>
-            <a:r>
-              <a:rPr lang="de-DE" dirty="0"/>
-              <a:t> → </a:t>
-            </a:r>
-            <a:r>
-              <a:rPr lang="de-DE" dirty="0" err="1"/>
-              <a:t>Replace</a:t>
-            </a:r>
-            <a:r>
-              <a:rPr lang="de-DE" dirty="0"/>
-              <a:t> </a:t>
-            </a:r>
-            <a:r>
-              <a:rPr lang="de-DE" dirty="0" err="1"/>
-              <a:t>it</a:t>
-            </a:r>
-            <a:r>
-              <a:rPr lang="de-DE" dirty="0"/>
-              <a:t> </a:t>
-            </a:r>
-            <a:r>
-              <a:rPr lang="de-DE" dirty="0" err="1"/>
-              <a:t>with</a:t>
-            </a:r>
-            <a:r>
-              <a:rPr lang="de-DE" dirty="0"/>
-              <a:t> [MASK].</a:t>
-            </a:r>
-          </a:p>
-          <a:p>
-            <a:r>
-              <a:rPr lang="de-DE" dirty="0" err="1"/>
-              <a:t>Example</a:t>
-            </a:r>
-            <a:r>
-              <a:rPr lang="de-DE" dirty="0"/>
-              <a:t>: "</a:t>
-            </a:r>
-            <a:r>
-              <a:rPr lang="de-DE" dirty="0" err="1"/>
-              <a:t>the</a:t>
-            </a:r>
-            <a:r>
-              <a:rPr lang="de-DE" dirty="0"/>
-              <a:t> </a:t>
-            </a:r>
-            <a:r>
-              <a:rPr lang="de-DE" dirty="0" err="1"/>
-              <a:t>cat</a:t>
-            </a:r>
-            <a:r>
-              <a:rPr lang="de-DE" dirty="0"/>
-              <a:t> </a:t>
-            </a:r>
-            <a:r>
-              <a:rPr lang="de-DE" dirty="0" err="1"/>
-              <a:t>sat</a:t>
-            </a:r>
-            <a:r>
-              <a:rPr lang="de-DE" dirty="0"/>
-              <a:t>" → "</a:t>
-            </a:r>
-            <a:r>
-              <a:rPr lang="de-DE" dirty="0" err="1"/>
-              <a:t>the</a:t>
-            </a:r>
-            <a:r>
-              <a:rPr lang="de-DE" dirty="0"/>
-              <a:t> [MASK] </a:t>
-            </a:r>
-            <a:r>
-              <a:rPr lang="de-DE" dirty="0" err="1"/>
-              <a:t>sat</a:t>
-            </a:r>
-            <a:r>
-              <a:rPr lang="de-DE" dirty="0"/>
-              <a:t>".</a:t>
-            </a:r>
-          </a:p>
-          <a:p>
-            <a:r>
-              <a:rPr lang="de-DE" dirty="0"/>
-              <a:t>The </a:t>
-            </a:r>
-            <a:r>
-              <a:rPr lang="de-DE" dirty="0" err="1"/>
-              <a:t>embedding</a:t>
-            </a:r>
-            <a:r>
-              <a:rPr lang="de-DE" dirty="0"/>
-              <a:t> </a:t>
-            </a:r>
-            <a:r>
-              <a:rPr lang="de-DE" dirty="0" err="1"/>
-              <a:t>is</a:t>
-            </a:r>
-            <a:r>
-              <a:rPr lang="de-DE" dirty="0"/>
-              <a:t> </a:t>
-            </a:r>
-            <a:r>
-              <a:rPr lang="de-DE" dirty="0" err="1"/>
-              <a:t>the</a:t>
-            </a:r>
-            <a:r>
-              <a:rPr lang="de-DE" dirty="0"/>
-              <a:t> </a:t>
-            </a:r>
-            <a:r>
-              <a:rPr lang="de-DE" dirty="0" err="1"/>
-              <a:t>learned</a:t>
-            </a:r>
-            <a:r>
-              <a:rPr lang="de-DE" dirty="0"/>
-              <a:t> </a:t>
-            </a:r>
-            <a:r>
-              <a:rPr lang="de-DE" dirty="0" err="1"/>
-              <a:t>embedding</a:t>
-            </a:r>
-            <a:r>
-              <a:rPr lang="de-DE" dirty="0"/>
-              <a:t> </a:t>
-            </a:r>
-            <a:r>
-              <a:rPr lang="de-DE" dirty="0" err="1"/>
-              <a:t>vector</a:t>
-            </a:r>
-            <a:r>
-              <a:rPr lang="de-DE" dirty="0"/>
-              <a:t> </a:t>
-            </a:r>
-            <a:r>
-              <a:rPr lang="de-DE" dirty="0" err="1"/>
-              <a:t>for</a:t>
-            </a:r>
-            <a:r>
-              <a:rPr lang="de-DE" dirty="0"/>
-              <a:t> </a:t>
-            </a:r>
-            <a:r>
-              <a:rPr lang="de-DE" dirty="0" err="1"/>
-              <a:t>the</a:t>
-            </a:r>
-            <a:r>
-              <a:rPr lang="de-DE" dirty="0"/>
-              <a:t> [MASK] </a:t>
-            </a:r>
-            <a:r>
-              <a:rPr lang="de-DE" dirty="0" err="1"/>
-              <a:t>token</a:t>
-            </a:r>
-            <a:r>
-              <a:rPr lang="de-DE" dirty="0"/>
-              <a:t> (just like </a:t>
-            </a:r>
-            <a:r>
-              <a:rPr lang="de-DE" dirty="0" err="1"/>
-              <a:t>any</a:t>
-            </a:r>
-            <a:r>
-              <a:rPr lang="de-DE" dirty="0"/>
-              <a:t> </a:t>
-            </a:r>
-            <a:r>
-              <a:rPr lang="de-DE" dirty="0" err="1"/>
-              <a:t>other</a:t>
-            </a:r>
-            <a:r>
-              <a:rPr lang="de-DE" dirty="0"/>
-              <a:t> </a:t>
-            </a:r>
-            <a:r>
-              <a:rPr lang="de-DE" dirty="0" err="1"/>
-              <a:t>token</a:t>
-            </a:r>
-            <a:r>
-              <a:rPr lang="de-DE" dirty="0"/>
-              <a:t>).</a:t>
-            </a:r>
-          </a:p>
-          <a:p>
-            <a:r>
-              <a:rPr lang="de-DE" b="1" dirty="0"/>
-              <a:t>10% </a:t>
-            </a:r>
-            <a:r>
-              <a:rPr lang="de-DE" b="1" dirty="0" err="1"/>
-              <a:t>of</a:t>
-            </a:r>
-            <a:r>
-              <a:rPr lang="de-DE" b="1" dirty="0"/>
-              <a:t> </a:t>
-            </a:r>
-            <a:r>
-              <a:rPr lang="de-DE" b="1" dirty="0" err="1"/>
-              <a:t>the</a:t>
-            </a:r>
-            <a:r>
-              <a:rPr lang="de-DE" b="1" dirty="0"/>
-              <a:t> time</a:t>
-            </a:r>
-            <a:r>
-              <a:rPr lang="de-DE" dirty="0"/>
-              <a:t> → </a:t>
-            </a:r>
-            <a:r>
-              <a:rPr lang="de-DE" dirty="0" err="1"/>
-              <a:t>Replace</a:t>
-            </a:r>
-            <a:r>
-              <a:rPr lang="de-DE" dirty="0"/>
-              <a:t> </a:t>
-            </a:r>
-            <a:r>
-              <a:rPr lang="de-DE" dirty="0" err="1"/>
-              <a:t>it</a:t>
-            </a:r>
-            <a:r>
-              <a:rPr lang="de-DE" dirty="0"/>
-              <a:t> </a:t>
-            </a:r>
-            <a:r>
-              <a:rPr lang="de-DE" dirty="0" err="1"/>
-              <a:t>with</a:t>
-            </a:r>
-            <a:r>
-              <a:rPr lang="de-DE" dirty="0"/>
-              <a:t> a </a:t>
-            </a:r>
-            <a:r>
-              <a:rPr lang="de-DE" b="1" dirty="0" err="1"/>
-              <a:t>random</a:t>
-            </a:r>
-            <a:r>
-              <a:rPr lang="de-DE" b="1" dirty="0"/>
-              <a:t> </a:t>
-            </a:r>
-            <a:r>
-              <a:rPr lang="de-DE" b="1" dirty="0" err="1"/>
-              <a:t>token</a:t>
-            </a:r>
-            <a:r>
-              <a:rPr lang="de-DE" dirty="0"/>
-              <a:t> </a:t>
-            </a:r>
-            <a:r>
-              <a:rPr lang="de-DE" dirty="0" err="1"/>
-              <a:t>from</a:t>
-            </a:r>
-            <a:r>
-              <a:rPr lang="de-DE" dirty="0"/>
-              <a:t> </a:t>
-            </a:r>
-            <a:r>
-              <a:rPr lang="de-DE" dirty="0" err="1"/>
-              <a:t>the</a:t>
-            </a:r>
-            <a:r>
-              <a:rPr lang="de-DE" dirty="0"/>
-              <a:t> </a:t>
-            </a:r>
-            <a:r>
-              <a:rPr lang="de-DE" dirty="0" err="1"/>
-              <a:t>vocabulary</a:t>
+              <a:t>-BERT (SBERT)</a:t>
+            </a:r>
+            <a:r>
+              <a:rPr lang="de-DE" dirty="0"/>
+              <a:t> </a:t>
+            </a:r>
+            <a:r>
+              <a:rPr lang="de-DE" dirty="0" err="1"/>
+              <a:t>does</a:t>
             </a:r>
             <a:r>
               <a:rPr lang="de-DE" dirty="0"/>
               <a:t>.</a:t>
             </a:r>
           </a:p>
-          <a:p>
-            <a:r>
-              <a:rPr lang="de-DE" dirty="0" err="1"/>
-              <a:t>Prevents</a:t>
-            </a:r>
-            <a:r>
-              <a:rPr lang="de-DE" dirty="0"/>
-              <a:t> </a:t>
-            </a:r>
-            <a:r>
-              <a:rPr lang="de-DE" dirty="0" err="1"/>
-              <a:t>the</a:t>
-            </a:r>
-            <a:r>
-              <a:rPr lang="de-DE" dirty="0"/>
-              <a:t> </a:t>
-            </a:r>
-            <a:r>
-              <a:rPr lang="de-DE" dirty="0" err="1"/>
-              <a:t>model</a:t>
-            </a:r>
-            <a:r>
-              <a:rPr lang="de-DE" dirty="0"/>
-              <a:t> </a:t>
-            </a:r>
-            <a:r>
-              <a:rPr lang="de-DE" dirty="0" err="1"/>
-              <a:t>from</a:t>
-            </a:r>
-            <a:r>
-              <a:rPr lang="de-DE" dirty="0"/>
-              <a:t> </a:t>
-            </a:r>
-            <a:r>
-              <a:rPr lang="de-DE" dirty="0" err="1"/>
-              <a:t>overfitting</a:t>
-            </a:r>
-            <a:r>
-              <a:rPr lang="de-DE" dirty="0"/>
-              <a:t> </a:t>
-            </a:r>
-            <a:r>
-              <a:rPr lang="de-DE" dirty="0" err="1"/>
-              <a:t>to</a:t>
-            </a:r>
-            <a:r>
-              <a:rPr lang="de-DE" dirty="0"/>
-              <a:t> </a:t>
-            </a:r>
-            <a:r>
-              <a:rPr lang="de-DE" dirty="0" err="1"/>
-              <a:t>always</a:t>
-            </a:r>
-            <a:r>
-              <a:rPr lang="de-DE" dirty="0"/>
-              <a:t> </a:t>
-            </a:r>
-            <a:r>
-              <a:rPr lang="de-DE" dirty="0" err="1"/>
-              <a:t>associating</a:t>
-            </a:r>
-            <a:r>
-              <a:rPr lang="de-DE" dirty="0"/>
-              <a:t> [MASK] </a:t>
-            </a:r>
-            <a:r>
-              <a:rPr lang="de-DE" dirty="0" err="1"/>
-              <a:t>with</a:t>
-            </a:r>
-            <a:r>
-              <a:rPr lang="de-DE" dirty="0"/>
-              <a:t> </a:t>
-            </a:r>
-            <a:r>
-              <a:rPr lang="de-DE" dirty="0" err="1"/>
-              <a:t>prediction</a:t>
-            </a:r>
-            <a:r>
-              <a:rPr lang="de-DE" dirty="0"/>
-              <a:t>.</a:t>
-            </a:r>
-          </a:p>
-          <a:p>
-            <a:r>
-              <a:rPr lang="de-DE" b="1" dirty="0"/>
-              <a:t>10% </a:t>
-            </a:r>
-            <a:r>
-              <a:rPr lang="de-DE" b="1" dirty="0" err="1"/>
-              <a:t>of</a:t>
-            </a:r>
-            <a:r>
-              <a:rPr lang="de-DE" b="1" dirty="0"/>
-              <a:t> </a:t>
-            </a:r>
-            <a:r>
-              <a:rPr lang="de-DE" b="1" dirty="0" err="1"/>
-              <a:t>the</a:t>
-            </a:r>
-            <a:r>
-              <a:rPr lang="de-DE" b="1" dirty="0"/>
-              <a:t> time</a:t>
-            </a:r>
-            <a:r>
-              <a:rPr lang="de-DE" dirty="0"/>
-              <a:t> → </a:t>
-            </a:r>
-            <a:r>
-              <a:rPr lang="de-DE" dirty="0" err="1"/>
-              <a:t>Leave</a:t>
-            </a:r>
-            <a:r>
-              <a:rPr lang="de-DE" dirty="0"/>
-              <a:t> </a:t>
-            </a:r>
-            <a:r>
-              <a:rPr lang="de-DE" dirty="0" err="1"/>
-              <a:t>it</a:t>
-            </a:r>
-            <a:r>
-              <a:rPr lang="de-DE" dirty="0"/>
-              <a:t> </a:t>
-            </a:r>
-            <a:r>
-              <a:rPr lang="de-DE" b="1" dirty="0" err="1"/>
-              <a:t>unchanged</a:t>
-            </a:r>
-            <a:r>
-              <a:rPr lang="de-DE" dirty="0"/>
-              <a:t>.</a:t>
-            </a:r>
-          </a:p>
-          <a:p>
-            <a:r>
-              <a:rPr lang="de-DE" dirty="0"/>
-              <a:t>Forces </a:t>
-            </a:r>
-            <a:r>
-              <a:rPr lang="de-DE" dirty="0" err="1"/>
-              <a:t>the</a:t>
-            </a:r>
-            <a:r>
-              <a:rPr lang="de-DE" dirty="0"/>
-              <a:t> </a:t>
-            </a:r>
-            <a:r>
-              <a:rPr lang="de-DE" dirty="0" err="1"/>
-              <a:t>model</a:t>
-            </a:r>
-            <a:r>
-              <a:rPr lang="de-DE" dirty="0"/>
-              <a:t> </a:t>
-            </a:r>
-            <a:r>
-              <a:rPr lang="de-DE" dirty="0" err="1"/>
-              <a:t>to</a:t>
-            </a:r>
-            <a:r>
-              <a:rPr lang="de-DE" dirty="0"/>
-              <a:t> </a:t>
-            </a:r>
-            <a:r>
-              <a:rPr lang="de-DE" dirty="0" err="1"/>
-              <a:t>sometimes</a:t>
-            </a:r>
-            <a:r>
-              <a:rPr lang="de-DE" dirty="0"/>
-              <a:t> </a:t>
-            </a:r>
-            <a:r>
-              <a:rPr lang="de-DE" dirty="0" err="1"/>
-              <a:t>predict</a:t>
-            </a:r>
-            <a:r>
-              <a:rPr lang="de-DE" dirty="0"/>
-              <a:t> </a:t>
-            </a:r>
-            <a:r>
-              <a:rPr lang="de-DE" dirty="0" err="1"/>
-              <a:t>without</a:t>
-            </a:r>
-            <a:r>
-              <a:rPr lang="de-DE" dirty="0"/>
-              <a:t> </a:t>
-            </a:r>
-            <a:r>
-              <a:rPr lang="de-DE" dirty="0" err="1"/>
-              <a:t>seeing</a:t>
-            </a:r>
-            <a:r>
-              <a:rPr lang="de-DE" dirty="0"/>
-              <a:t> an explicit [MASK].</a:t>
-            </a:r>
-          </a:p>
-          <a:p>
-            <a:pPr marL="0" indent="0">
-              <a:buNone/>
-            </a:pPr>
-            <a:br>
-              <a:rPr lang="de-DE" dirty="0"/>
-            </a:br>
-            <a:r>
-              <a:rPr lang="de-DE" dirty="0" err="1"/>
-              <a:t>Regardless</a:t>
-            </a:r>
-            <a:r>
-              <a:rPr lang="de-DE" dirty="0"/>
-              <a:t> </a:t>
-            </a:r>
-            <a:r>
-              <a:rPr lang="de-DE" dirty="0" err="1"/>
-              <a:t>of</a:t>
-            </a:r>
-            <a:r>
-              <a:rPr lang="de-DE" dirty="0"/>
-              <a:t> </a:t>
-            </a:r>
-            <a:r>
-              <a:rPr lang="de-DE" dirty="0" err="1"/>
-              <a:t>which</a:t>
-            </a:r>
-            <a:r>
-              <a:rPr lang="de-DE" dirty="0"/>
-              <a:t> </a:t>
-            </a:r>
-            <a:r>
-              <a:rPr lang="de-DE" dirty="0" err="1"/>
-              <a:t>replacement</a:t>
-            </a:r>
-            <a:r>
-              <a:rPr lang="de-DE" dirty="0"/>
-              <a:t> </a:t>
-            </a:r>
-            <a:r>
-              <a:rPr lang="de-DE" dirty="0" err="1"/>
-              <a:t>is</a:t>
-            </a:r>
-            <a:r>
-              <a:rPr lang="de-DE" dirty="0"/>
-              <a:t> </a:t>
-            </a:r>
-            <a:r>
-              <a:rPr lang="de-DE" dirty="0" err="1"/>
-              <a:t>used</a:t>
-            </a:r>
-            <a:r>
-              <a:rPr lang="de-DE" dirty="0"/>
-              <a:t>, </a:t>
-            </a:r>
-            <a:r>
-              <a:rPr lang="de-DE" dirty="0" err="1"/>
-              <a:t>the</a:t>
-            </a:r>
-            <a:r>
-              <a:rPr lang="de-DE" dirty="0"/>
-              <a:t> </a:t>
-            </a:r>
-            <a:r>
-              <a:rPr lang="de-DE" b="1" dirty="0" err="1"/>
-              <a:t>loss</a:t>
-            </a:r>
-            <a:r>
-              <a:rPr lang="de-DE" b="1" dirty="0"/>
-              <a:t> </a:t>
-            </a:r>
-            <a:r>
-              <a:rPr lang="de-DE" b="1" dirty="0" err="1"/>
-              <a:t>is</a:t>
-            </a:r>
-            <a:r>
-              <a:rPr lang="de-DE" b="1" dirty="0"/>
-              <a:t> still </a:t>
-            </a:r>
-            <a:r>
-              <a:rPr lang="de-DE" b="1" dirty="0" err="1"/>
-              <a:t>computed</a:t>
-            </a:r>
-            <a:r>
-              <a:rPr lang="de-DE" b="1" dirty="0"/>
-              <a:t> </a:t>
-            </a:r>
-            <a:r>
-              <a:rPr lang="de-DE" b="1" dirty="0" err="1"/>
-              <a:t>against</a:t>
-            </a:r>
-            <a:r>
-              <a:rPr lang="de-DE" b="1" dirty="0"/>
-              <a:t> </a:t>
-            </a:r>
-            <a:r>
-              <a:rPr lang="de-DE" b="1" dirty="0" err="1"/>
-              <a:t>the</a:t>
-            </a:r>
-            <a:r>
-              <a:rPr lang="de-DE" b="1" dirty="0"/>
-              <a:t> original </a:t>
-            </a:r>
-            <a:r>
-              <a:rPr lang="de-DE" b="1" dirty="0" err="1"/>
-              <a:t>token</a:t>
-            </a:r>
-            <a:r>
-              <a:rPr lang="de-DE" dirty="0"/>
-              <a:t>.</a:t>
-            </a:r>
-          </a:p>
         </p:txBody>
       </p:sp>
       <p:sp>
@@ -14920,7 +15027,7 @@
           <p:cNvPr id="4" name="Foliennummernplatzhalter 3">
             <a:extLst>
               <a:ext uri="{FF2B5EF4-FFF2-40B4-BE49-F238E27FC236}">
-                <a16:creationId xmlns:a16="http://schemas.microsoft.com/office/drawing/2014/main" id="{98A71D12-1308-5AA4-28A9-50891017FA54}"/>
+                <a16:creationId xmlns:a16="http://schemas.microsoft.com/office/drawing/2014/main" id="{F3FA2F52-7FFF-92B0-F7A7-623ED745F3E6}"/>
               </a:ext>
             </a:extLst>
           </p:cNvPr>
@@ -14947,7 +15054,7 @@
     </p:spTree>
     <p:extLst>
       <p:ext uri="{BB962C8B-B14F-4D97-AF65-F5344CB8AC3E}">
-        <p14:creationId xmlns:p14="http://schemas.microsoft.com/office/powerpoint/2010/main" val="209083973"/>
+        <p14:creationId xmlns:p14="http://schemas.microsoft.com/office/powerpoint/2010/main" val="2476222795"/>
       </p:ext>
     </p:extLst>
   </p:cSld>

--- a/slides/5_finetuning.pptx
+++ b/slides/5_finetuning.pptx
@@ -5,7 +5,7 @@
     <p:sldMasterId id="2147483648" r:id="rId1"/>
   </p:sldMasterIdLst>
   <p:notesMasterIdLst>
-    <p:notesMasterId r:id="rId30"/>
+    <p:notesMasterId r:id="rId31"/>
   </p:notesMasterIdLst>
   <p:sldIdLst>
     <p:sldId id="256" r:id="rId2"/>
@@ -27,15 +27,16 @@
     <p:sldId id="828" r:id="rId18"/>
     <p:sldId id="810" r:id="rId19"/>
     <p:sldId id="829" r:id="rId20"/>
-    <p:sldId id="830" r:id="rId21"/>
-    <p:sldId id="800" r:id="rId22"/>
-    <p:sldId id="819" r:id="rId23"/>
-    <p:sldId id="821" r:id="rId24"/>
-    <p:sldId id="831" r:id="rId25"/>
-    <p:sldId id="333" r:id="rId26"/>
-    <p:sldId id="837" r:id="rId27"/>
-    <p:sldId id="840" r:id="rId28"/>
-    <p:sldId id="839" r:id="rId29"/>
+    <p:sldId id="841" r:id="rId21"/>
+    <p:sldId id="830" r:id="rId22"/>
+    <p:sldId id="800" r:id="rId23"/>
+    <p:sldId id="819" r:id="rId24"/>
+    <p:sldId id="821" r:id="rId25"/>
+    <p:sldId id="831" r:id="rId26"/>
+    <p:sldId id="333" r:id="rId27"/>
+    <p:sldId id="837" r:id="rId28"/>
+    <p:sldId id="840" r:id="rId29"/>
+    <p:sldId id="839" r:id="rId30"/>
   </p:sldIdLst>
   <p:sldSz cx="12192000" cy="6858000"/>
   <p:notesSz cx="6858000" cy="9144000"/>
@@ -8831,8 +8832,21 @@
             </a:pPr>
             <a:r>
               <a:rPr lang="de-DE" dirty="0"/>
-              <a:t>…</a:t>
-            </a:r>
+              <a:t>… </a:t>
+            </a:r>
+            <a:r>
+              <a:rPr lang="de-DE" dirty="0" err="1"/>
+              <a:t>data</a:t>
+            </a:r>
+            <a:r>
+              <a:rPr lang="de-DE" dirty="0"/>
+              <a:t> </a:t>
+            </a:r>
+            <a:r>
+              <a:rPr lang="de-DE" dirty="0" err="1"/>
+              <a:t>example</a:t>
+            </a:r>
+            <a:endParaRPr lang="de-DE" dirty="0"/>
           </a:p>
           <a:p>
             <a:pPr marL="0" indent="0">
@@ -11008,7 +11022,7 @@
           <a:bodyPr/>
           <a:lstStyle/>
           <a:p>
-            <a:endParaRPr lang="de-DE"/>
+            <a:endParaRPr lang="de-DE" dirty="0"/>
           </a:p>
         </p:txBody>
       </p:sp>
@@ -11189,42 +11203,12 @@
           <a:chExt cx="0" cy="0"/>
         </a:xfrm>
       </p:grpSpPr>
-      <p:pic>
-        <p:nvPicPr>
-          <p:cNvPr id="5" name="Grafik 4" descr="Ein Bild, das Text, Diagramm, Reihe, Screenshot enthält.&#10;&#10;KI-generierte Inhalte können fehlerhaft sein.">
-            <a:extLst>
-              <a:ext uri="{FF2B5EF4-FFF2-40B4-BE49-F238E27FC236}">
-                <a16:creationId xmlns:a16="http://schemas.microsoft.com/office/drawing/2014/main" id="{96747100-59AE-6262-89EF-8C7470AFFDAD}"/>
-              </a:ext>
-            </a:extLst>
-          </p:cNvPr>
-          <p:cNvPicPr>
-            <a:picLocks noChangeAspect="1"/>
-          </p:cNvPicPr>
-          <p:nvPr/>
-        </p:nvPicPr>
-        <p:blipFill>
-          <a:blip r:embed="rId2"/>
-          <a:stretch>
-            <a:fillRect/>
-          </a:stretch>
-        </p:blipFill>
-        <p:spPr>
-          <a:xfrm>
-            <a:off x="838200" y="3334977"/>
-            <a:ext cx="10515600" cy="3298525"/>
-          </a:xfrm>
-          <a:prstGeom prst="rect">
-            <a:avLst/>
-          </a:prstGeom>
-        </p:spPr>
-      </p:pic>
       <p:sp>
         <p:nvSpPr>
           <p:cNvPr id="2" name="Titel 1">
             <a:extLst>
               <a:ext uri="{FF2B5EF4-FFF2-40B4-BE49-F238E27FC236}">
-                <a16:creationId xmlns:a16="http://schemas.microsoft.com/office/drawing/2014/main" id="{A2D747F7-B5C9-14F0-BC67-84479A070FE6}"/>
+                <a16:creationId xmlns:a16="http://schemas.microsoft.com/office/drawing/2014/main" id="{DB84EF70-DD53-EE93-A295-AE17AAE3F9CB}"/>
               </a:ext>
             </a:extLst>
           </p:cNvPr>
@@ -11240,10 +11224,7 @@
           <a:bodyPr/>
           <a:lstStyle/>
           <a:p>
-            <a:r>
-              <a:rPr lang="de-DE" dirty="0"/>
-              <a:t>Alignment</a:t>
-            </a:r>
+            <a:endParaRPr lang="de-DE"/>
           </a:p>
         </p:txBody>
       </p:sp>
@@ -11252,7 +11233,7 @@
           <p:cNvPr id="3" name="Inhaltsplatzhalter 2">
             <a:extLst>
               <a:ext uri="{FF2B5EF4-FFF2-40B4-BE49-F238E27FC236}">
-                <a16:creationId xmlns:a16="http://schemas.microsoft.com/office/drawing/2014/main" id="{FDF9E407-E7CD-CEC9-08A9-C9287C7FD409}"/>
+                <a16:creationId xmlns:a16="http://schemas.microsoft.com/office/drawing/2014/main" id="{E808A8D4-7493-94C3-D8F7-BDE4EBBC2F4E}"/>
               </a:ext>
             </a:extLst>
           </p:cNvPr>
@@ -11270,47 +11251,45 @@
           <a:p>
             <a:r>
               <a:rPr lang="de-DE" dirty="0"/>
-              <a:t>…</a:t>
-            </a:r>
-          </a:p>
-          <a:p>
-            <a:r>
-              <a:rPr lang="en-GB" dirty="0"/>
-              <a:t>reinforcement learning from human feedback (</a:t>
-            </a:r>
-            <a:r>
-              <a:rPr lang="en-GB" dirty="0">
-                <a:hlinkClick r:id="rId3"/>
-              </a:rPr>
-              <a:t>RLHF</a:t>
-            </a:r>
-            <a:r>
-              <a:rPr lang="en-GB" dirty="0"/>
-              <a:t>)</a:t>
-            </a:r>
-          </a:p>
-          <a:p>
-            <a:r>
-              <a:rPr lang="en-GB" dirty="0"/>
-              <a:t>alternatives: </a:t>
-            </a:r>
-            <a:r>
-              <a:rPr lang="en-GB" dirty="0">
-                <a:hlinkClick r:id="rId4"/>
-              </a:rPr>
-              <a:t>DPO</a:t>
-            </a:r>
-            <a:r>
-              <a:rPr lang="en-GB" dirty="0"/>
-              <a:t>, </a:t>
-            </a:r>
-            <a:r>
-              <a:rPr lang="en-GB" dirty="0">
-                <a:hlinkClick r:id="rId5"/>
-              </a:rPr>
-              <a:t>ORPO</a:t>
-            </a:r>
-            <a:endParaRPr lang="en-GB" dirty="0"/>
+              <a:t> … </a:t>
+            </a:r>
+            <a:r>
+              <a:rPr lang="de-DE" dirty="0" err="1"/>
+              <a:t>data</a:t>
+            </a:r>
+            <a:r>
+              <a:rPr lang="de-DE" dirty="0"/>
+              <a:t> </a:t>
+            </a:r>
+            <a:r>
+              <a:rPr lang="de-DE" dirty="0" err="1"/>
+              <a:t>example</a:t>
+            </a:r>
+            <a:r>
+              <a:rPr lang="de-DE" dirty="0"/>
+              <a:t> </a:t>
+            </a:r>
+            <a:r>
+              <a:rPr lang="de-DE" dirty="0" err="1"/>
+              <a:t>Kaggle</a:t>
+            </a:r>
+            <a:r>
+              <a:rPr lang="de-DE" dirty="0"/>
+              <a:t> </a:t>
+            </a:r>
+            <a:r>
+              <a:rPr lang="de-DE" dirty="0" err="1"/>
+              <a:t>disaster</a:t>
+            </a:r>
+            <a:r>
+              <a:rPr lang="de-DE" dirty="0"/>
+              <a:t> </a:t>
+            </a:r>
+            <a:r>
+              <a:rPr lang="de-DE" dirty="0" err="1"/>
+              <a:t>tweets</a:t>
+            </a:r>
+            <a:endParaRPr lang="de-DE" dirty="0"/>
           </a:p>
         </p:txBody>
       </p:sp>
@@ -11319,7 +11298,7 @@
           <p:cNvPr id="4" name="Foliennummernplatzhalter 3">
             <a:extLst>
               <a:ext uri="{FF2B5EF4-FFF2-40B4-BE49-F238E27FC236}">
-                <a16:creationId xmlns:a16="http://schemas.microsoft.com/office/drawing/2014/main" id="{EAE107DF-A4FD-7351-4A7D-0434F1EAC98D}"/>
+                <a16:creationId xmlns:a16="http://schemas.microsoft.com/office/drawing/2014/main" id="{A54AA4BB-A69A-19C2-88BD-3D0A692B2ECB}"/>
               </a:ext>
             </a:extLst>
           </p:cNvPr>
@@ -11346,7 +11325,7 @@
     </p:spTree>
     <p:extLst>
       <p:ext uri="{BB962C8B-B14F-4D97-AF65-F5344CB8AC3E}">
-        <p14:creationId xmlns:p14="http://schemas.microsoft.com/office/powerpoint/2010/main" val="1126874156"/>
+        <p14:creationId xmlns:p14="http://schemas.microsoft.com/office/powerpoint/2010/main" val="183389966"/>
       </p:ext>
     </p:extLst>
   </p:cSld>
@@ -11373,12 +11352,42 @@
           <a:chExt cx="0" cy="0"/>
         </a:xfrm>
       </p:grpSpPr>
-      <p:sp>
-        <p:nvSpPr>
-          <p:cNvPr id="2" name="Title 1">
-            <a:extLst>
-              <a:ext uri="{FF2B5EF4-FFF2-40B4-BE49-F238E27FC236}">
-                <a16:creationId xmlns:a16="http://schemas.microsoft.com/office/drawing/2014/main" id="{8BDD99FF-C910-A0E8-3381-C448E5F1653D}"/>
+      <p:pic>
+        <p:nvPicPr>
+          <p:cNvPr id="5" name="Grafik 4" descr="Ein Bild, das Text, Diagramm, Reihe, Screenshot enthält.&#10;&#10;KI-generierte Inhalte können fehlerhaft sein.">
+            <a:extLst>
+              <a:ext uri="{FF2B5EF4-FFF2-40B4-BE49-F238E27FC236}">
+                <a16:creationId xmlns:a16="http://schemas.microsoft.com/office/drawing/2014/main" id="{96747100-59AE-6262-89EF-8C7470AFFDAD}"/>
+              </a:ext>
+            </a:extLst>
+          </p:cNvPr>
+          <p:cNvPicPr>
+            <a:picLocks noChangeAspect="1"/>
+          </p:cNvPicPr>
+          <p:nvPr/>
+        </p:nvPicPr>
+        <p:blipFill>
+          <a:blip r:embed="rId2"/>
+          <a:stretch>
+            <a:fillRect/>
+          </a:stretch>
+        </p:blipFill>
+        <p:spPr>
+          <a:xfrm>
+            <a:off x="838200" y="3334977"/>
+            <a:ext cx="10515600" cy="3298525"/>
+          </a:xfrm>
+          <a:prstGeom prst="rect">
+            <a:avLst/>
+          </a:prstGeom>
+        </p:spPr>
+      </p:pic>
+      <p:sp>
+        <p:nvSpPr>
+          <p:cNvPr id="2" name="Titel 1">
+            <a:extLst>
+              <a:ext uri="{FF2B5EF4-FFF2-40B4-BE49-F238E27FC236}">
+                <a16:creationId xmlns:a16="http://schemas.microsoft.com/office/drawing/2014/main" id="{A2D747F7-B5C9-14F0-BC67-84479A070FE6}"/>
               </a:ext>
             </a:extLst>
           </p:cNvPr>
@@ -11395,10 +11404,74 @@
           <a:lstStyle/>
           <a:p>
             <a:r>
-              <a:rPr lang="en-GB" dirty="0" err="1">
-                <a:hlinkClick r:id="rId2"/>
+              <a:rPr lang="de-DE" dirty="0"/>
+              <a:t>Alignment</a:t>
+            </a:r>
+          </a:p>
+        </p:txBody>
+      </p:sp>
+      <p:sp>
+        <p:nvSpPr>
+          <p:cNvPr id="3" name="Inhaltsplatzhalter 2">
+            <a:extLst>
+              <a:ext uri="{FF2B5EF4-FFF2-40B4-BE49-F238E27FC236}">
+                <a16:creationId xmlns:a16="http://schemas.microsoft.com/office/drawing/2014/main" id="{FDF9E407-E7CD-CEC9-08A9-C9287C7FD409}"/>
+              </a:ext>
+            </a:extLst>
+          </p:cNvPr>
+          <p:cNvSpPr>
+            <a:spLocks noGrp="1"/>
+          </p:cNvSpPr>
+          <p:nvPr>
+            <p:ph idx="1"/>
+          </p:nvPr>
+        </p:nvSpPr>
+        <p:spPr/>
+        <p:txBody>
+          <a:bodyPr/>
+          <a:lstStyle/>
+          <a:p>
+            <a:r>
+              <a:rPr lang="de-DE" dirty="0"/>
+              <a:t>…</a:t>
+            </a:r>
+          </a:p>
+          <a:p>
+            <a:r>
+              <a:rPr lang="en-GB" dirty="0"/>
+              <a:t>reinforcement learning from human feedback (</a:t>
+            </a:r>
+            <a:r>
+              <a:rPr lang="en-GB" dirty="0">
+                <a:hlinkClick r:id="rId3"/>
               </a:rPr>
-              <a:t>InstructGPT</a:t>
+              <a:t>RLHF</a:t>
+            </a:r>
+            <a:r>
+              <a:rPr lang="en-GB" dirty="0"/>
+              <a:t>)</a:t>
+            </a:r>
+          </a:p>
+          <a:p>
+            <a:r>
+              <a:rPr lang="en-GB" dirty="0"/>
+              <a:t>alternatives: </a:t>
+            </a:r>
+            <a:r>
+              <a:rPr lang="en-GB" dirty="0">
+                <a:hlinkClick r:id="rId4"/>
+              </a:rPr>
+              <a:t>DPO</a:t>
+            </a:r>
+            <a:r>
+              <a:rPr lang="en-GB" dirty="0"/>
+              <a:t>, </a:t>
+            </a:r>
+            <a:r>
+              <a:rPr lang="en-GB" dirty="0">
+                <a:hlinkClick r:id="rId5"/>
+              </a:rPr>
+              <a:t>ORPO</a:t>
             </a:r>
             <a:endParaRPr lang="en-GB" dirty="0"/>
           </a:p>
@@ -11406,10 +11479,10 @@
       </p:sp>
       <p:sp>
         <p:nvSpPr>
-          <p:cNvPr id="4" name="Slide Number Placeholder 3">
-            <a:extLst>
-              <a:ext uri="{FF2B5EF4-FFF2-40B4-BE49-F238E27FC236}">
-                <a16:creationId xmlns:a16="http://schemas.microsoft.com/office/drawing/2014/main" id="{98FF788B-7FE4-0E3B-1C93-49275F5E6753}"/>
+          <p:cNvPr id="4" name="Foliennummernplatzhalter 3">
+            <a:extLst>
+              <a:ext uri="{FF2B5EF4-FFF2-40B4-BE49-F238E27FC236}">
+                <a16:creationId xmlns:a16="http://schemas.microsoft.com/office/drawing/2014/main" id="{EAE107DF-A4FD-7351-4A7D-0434F1EAC98D}"/>
               </a:ext>
             </a:extLst>
           </p:cNvPr>
@@ -11425,124 +11498,18 @@
           <a:bodyPr/>
           <a:lstStyle/>
           <a:p>
-            <a:fld id="{849D05A8-43E9-1C49-8606-50AB68220DEC}" type="slidenum">
-              <a:rPr lang="en-DE" smtClean="0"/>
+            <a:fld id="{4055531C-5681-6B44-B2CA-926D7A74B06D}" type="slidenum">
+              <a:rPr lang="de-DE" smtClean="0"/>
               <a:t>21</a:t>
             </a:fld>
-            <a:endParaRPr lang="en-DE"/>
-          </a:p>
-        </p:txBody>
-      </p:sp>
-      <p:sp>
-        <p:nvSpPr>
-          <p:cNvPr id="5" name="TextBox 4">
-            <a:extLst>
-              <a:ext uri="{FF2B5EF4-FFF2-40B4-BE49-F238E27FC236}">
-                <a16:creationId xmlns:a16="http://schemas.microsoft.com/office/drawing/2014/main" id="{F3F48B22-F5A5-3996-02A4-5527B567641F}"/>
-              </a:ext>
-            </a:extLst>
-          </p:cNvPr>
-          <p:cNvSpPr txBox="1"/>
-          <p:nvPr/>
-        </p:nvSpPr>
-        <p:spPr>
-          <a:xfrm>
-            <a:off x="11277600" y="5178391"/>
-            <a:ext cx="608718" cy="246219"/>
-          </a:xfrm>
-          <a:prstGeom prst="rect">
-            <a:avLst/>
-          </a:prstGeom>
-          <a:noFill/>
-        </p:spPr>
-        <p:txBody>
-          <a:bodyPr wrap="square" rtlCol="0">
-            <a:spAutoFit/>
-          </a:bodyPr>
-          <a:lstStyle/>
-          <a:p>
-            <a:r>
-              <a:rPr lang="de-DE" sz="1000" dirty="0">
-                <a:hlinkClick r:id="rId3"/>
-              </a:rPr>
-              <a:t>source</a:t>
-            </a:r>
-            <a:endParaRPr lang="de-DE" sz="1000" dirty="0"/>
-          </a:p>
-        </p:txBody>
-      </p:sp>
-      <p:pic>
-        <p:nvPicPr>
-          <p:cNvPr id="7" name="Grafik 6" descr="Ein Bild, das Text, Screenshot enthält.&#10;&#10;KI-generierte Inhalte können fehlerhaft sein.">
-            <a:extLst>
-              <a:ext uri="{FF2B5EF4-FFF2-40B4-BE49-F238E27FC236}">
-                <a16:creationId xmlns:a16="http://schemas.microsoft.com/office/drawing/2014/main" id="{51ABF00D-E8BF-27E7-1A48-C092AAB646B2}"/>
-              </a:ext>
-            </a:extLst>
-          </p:cNvPr>
-          <p:cNvPicPr>
-            <a:picLocks noChangeAspect="1"/>
-          </p:cNvPicPr>
-          <p:nvPr/>
-        </p:nvPicPr>
-        <p:blipFill>
-          <a:blip r:embed="rId4"/>
-          <a:stretch>
-            <a:fillRect/>
-          </a:stretch>
-        </p:blipFill>
-        <p:spPr>
-          <a:xfrm>
-            <a:off x="436605" y="1690688"/>
-            <a:ext cx="11449713" cy="3258162"/>
-          </a:xfrm>
-          <a:prstGeom prst="rect">
-            <a:avLst/>
-          </a:prstGeom>
-        </p:spPr>
-      </p:pic>
-      <p:sp>
-        <p:nvSpPr>
-          <p:cNvPr id="9" name="Textfeld 8">
-            <a:extLst>
-              <a:ext uri="{FF2B5EF4-FFF2-40B4-BE49-F238E27FC236}">
-                <a16:creationId xmlns:a16="http://schemas.microsoft.com/office/drawing/2014/main" id="{DFB0CE71-E065-7443-636C-0D3D508B9E73}"/>
-              </a:ext>
-            </a:extLst>
-          </p:cNvPr>
-          <p:cNvSpPr txBox="1"/>
-          <p:nvPr/>
-        </p:nvSpPr>
-        <p:spPr>
-          <a:xfrm>
-            <a:off x="2984938" y="5424610"/>
-            <a:ext cx="6222124" cy="492443"/>
-          </a:xfrm>
-          <a:prstGeom prst="rect">
-            <a:avLst/>
-          </a:prstGeom>
-          <a:noFill/>
-        </p:spPr>
-        <p:txBody>
-          <a:bodyPr wrap="square">
-            <a:spAutoFit/>
-          </a:bodyPr>
-          <a:lstStyle/>
-          <a:p>
-            <a:pPr marL="0" indent="0">
-              <a:buNone/>
-            </a:pPr>
-            <a:r>
-              <a:rPr lang="en-GB" sz="2600" dirty="0"/>
-              <a:t>aligning LLM output with human intention</a:t>
-            </a:r>
+            <a:endParaRPr lang="de-DE"/>
           </a:p>
         </p:txBody>
       </p:sp>
     </p:spTree>
     <p:extLst>
       <p:ext uri="{BB962C8B-B14F-4D97-AF65-F5344CB8AC3E}">
-        <p14:creationId xmlns:p14="http://schemas.microsoft.com/office/powerpoint/2010/main" val="2859818903"/>
+        <p14:creationId xmlns:p14="http://schemas.microsoft.com/office/powerpoint/2010/main" val="1126874156"/>
       </p:ext>
     </p:extLst>
   </p:cSld>
@@ -11571,10 +11538,10 @@
       </p:grpSpPr>
       <p:sp>
         <p:nvSpPr>
-          <p:cNvPr id="2" name="Titel 1">
-            <a:extLst>
-              <a:ext uri="{FF2B5EF4-FFF2-40B4-BE49-F238E27FC236}">
-                <a16:creationId xmlns:a16="http://schemas.microsoft.com/office/drawing/2014/main" id="{09493DE1-8681-E946-F35C-2A338BAFE2C4}"/>
+          <p:cNvPr id="2" name="Title 1">
+            <a:extLst>
+              <a:ext uri="{FF2B5EF4-FFF2-40B4-BE49-F238E27FC236}">
+                <a16:creationId xmlns:a16="http://schemas.microsoft.com/office/drawing/2014/main" id="{8BDD99FF-C910-A0E8-3381-C448E5F1653D}"/>
               </a:ext>
             </a:extLst>
           </p:cNvPr>
@@ -11590,64 +11557,22 @@
           <a:bodyPr/>
           <a:lstStyle/>
           <a:p>
-            <a:endParaRPr lang="de-DE"/>
-          </a:p>
-        </p:txBody>
-      </p:sp>
-      <p:sp>
-        <p:nvSpPr>
-          <p:cNvPr id="3" name="Inhaltsplatzhalter 2">
-            <a:extLst>
-              <a:ext uri="{FF2B5EF4-FFF2-40B4-BE49-F238E27FC236}">
-                <a16:creationId xmlns:a16="http://schemas.microsoft.com/office/drawing/2014/main" id="{84C5182F-76D3-02B3-807F-78D531F2C37B}"/>
-              </a:ext>
-            </a:extLst>
-          </p:cNvPr>
-          <p:cNvSpPr>
-            <a:spLocks noGrp="1"/>
-          </p:cNvSpPr>
-          <p:nvPr>
-            <p:ph idx="1"/>
-          </p:nvPr>
-        </p:nvSpPr>
-        <p:spPr/>
-        <p:txBody>
-          <a:bodyPr/>
-          <a:lstStyle/>
-          <a:p>
-            <a:r>
-              <a:rPr lang="de-DE" dirty="0" err="1"/>
-              <a:t>from</a:t>
-            </a:r>
-            <a:r>
-              <a:rPr lang="de-DE" dirty="0"/>
-              <a:t> GPT-3 </a:t>
-            </a:r>
-            <a:r>
-              <a:rPr lang="de-DE" dirty="0" err="1"/>
-              <a:t>to</a:t>
-            </a:r>
-            <a:r>
-              <a:rPr lang="de-DE" dirty="0"/>
-              <a:t> </a:t>
-            </a:r>
-            <a:r>
-              <a:rPr lang="de-DE" dirty="0" err="1"/>
+            <a:r>
+              <a:rPr lang="en-GB" dirty="0" err="1">
+                <a:hlinkClick r:id="rId2"/>
+              </a:rPr>
               <a:t>InstructGPT</a:t>
             </a:r>
-            <a:r>
-              <a:rPr lang="de-DE" dirty="0"/>
-              <a:t> and ChatGPT</a:t>
-            </a:r>
-          </a:p>
-        </p:txBody>
-      </p:sp>
-      <p:sp>
-        <p:nvSpPr>
-          <p:cNvPr id="4" name="Foliennummernplatzhalter 3">
-            <a:extLst>
-              <a:ext uri="{FF2B5EF4-FFF2-40B4-BE49-F238E27FC236}">
-                <a16:creationId xmlns:a16="http://schemas.microsoft.com/office/drawing/2014/main" id="{425A7FC5-9ED3-4885-ECCE-73FBD8CB7493}"/>
+            <a:endParaRPr lang="en-GB" dirty="0"/>
+          </a:p>
+        </p:txBody>
+      </p:sp>
+      <p:sp>
+        <p:nvSpPr>
+          <p:cNvPr id="4" name="Slide Number Placeholder 3">
+            <a:extLst>
+              <a:ext uri="{FF2B5EF4-FFF2-40B4-BE49-F238E27FC236}">
+                <a16:creationId xmlns:a16="http://schemas.microsoft.com/office/drawing/2014/main" id="{98FF788B-7FE4-0E3B-1C93-49275F5E6753}"/>
               </a:ext>
             </a:extLst>
           </p:cNvPr>
@@ -11663,18 +11588,124 @@
           <a:bodyPr/>
           <a:lstStyle/>
           <a:p>
-            <a:fld id="{4055531C-5681-6B44-B2CA-926D7A74B06D}" type="slidenum">
-              <a:rPr lang="de-DE" smtClean="0"/>
+            <a:fld id="{849D05A8-43E9-1C49-8606-50AB68220DEC}" type="slidenum">
+              <a:rPr lang="en-DE" smtClean="0"/>
               <a:t>22</a:t>
             </a:fld>
-            <a:endParaRPr lang="de-DE"/>
+            <a:endParaRPr lang="en-DE"/>
+          </a:p>
+        </p:txBody>
+      </p:sp>
+      <p:sp>
+        <p:nvSpPr>
+          <p:cNvPr id="5" name="TextBox 4">
+            <a:extLst>
+              <a:ext uri="{FF2B5EF4-FFF2-40B4-BE49-F238E27FC236}">
+                <a16:creationId xmlns:a16="http://schemas.microsoft.com/office/drawing/2014/main" id="{F3F48B22-F5A5-3996-02A4-5527B567641F}"/>
+              </a:ext>
+            </a:extLst>
+          </p:cNvPr>
+          <p:cNvSpPr txBox="1"/>
+          <p:nvPr/>
+        </p:nvSpPr>
+        <p:spPr>
+          <a:xfrm>
+            <a:off x="11277600" y="5178391"/>
+            <a:ext cx="608718" cy="246219"/>
+          </a:xfrm>
+          <a:prstGeom prst="rect">
+            <a:avLst/>
+          </a:prstGeom>
+          <a:noFill/>
+        </p:spPr>
+        <p:txBody>
+          <a:bodyPr wrap="square" rtlCol="0">
+            <a:spAutoFit/>
+          </a:bodyPr>
+          <a:lstStyle/>
+          <a:p>
+            <a:r>
+              <a:rPr lang="de-DE" sz="1000" dirty="0">
+                <a:hlinkClick r:id="rId3"/>
+              </a:rPr>
+              <a:t>source</a:t>
+            </a:r>
+            <a:endParaRPr lang="de-DE" sz="1000" dirty="0"/>
+          </a:p>
+        </p:txBody>
+      </p:sp>
+      <p:pic>
+        <p:nvPicPr>
+          <p:cNvPr id="7" name="Grafik 6" descr="Ein Bild, das Text, Screenshot enthält.&#10;&#10;KI-generierte Inhalte können fehlerhaft sein.">
+            <a:extLst>
+              <a:ext uri="{FF2B5EF4-FFF2-40B4-BE49-F238E27FC236}">
+                <a16:creationId xmlns:a16="http://schemas.microsoft.com/office/drawing/2014/main" id="{51ABF00D-E8BF-27E7-1A48-C092AAB646B2}"/>
+              </a:ext>
+            </a:extLst>
+          </p:cNvPr>
+          <p:cNvPicPr>
+            <a:picLocks noChangeAspect="1"/>
+          </p:cNvPicPr>
+          <p:nvPr/>
+        </p:nvPicPr>
+        <p:blipFill>
+          <a:blip r:embed="rId4"/>
+          <a:stretch>
+            <a:fillRect/>
+          </a:stretch>
+        </p:blipFill>
+        <p:spPr>
+          <a:xfrm>
+            <a:off x="436605" y="1690688"/>
+            <a:ext cx="11449713" cy="3258162"/>
+          </a:xfrm>
+          <a:prstGeom prst="rect">
+            <a:avLst/>
+          </a:prstGeom>
+        </p:spPr>
+      </p:pic>
+      <p:sp>
+        <p:nvSpPr>
+          <p:cNvPr id="9" name="Textfeld 8">
+            <a:extLst>
+              <a:ext uri="{FF2B5EF4-FFF2-40B4-BE49-F238E27FC236}">
+                <a16:creationId xmlns:a16="http://schemas.microsoft.com/office/drawing/2014/main" id="{DFB0CE71-E065-7443-636C-0D3D508B9E73}"/>
+              </a:ext>
+            </a:extLst>
+          </p:cNvPr>
+          <p:cNvSpPr txBox="1"/>
+          <p:nvPr/>
+        </p:nvSpPr>
+        <p:spPr>
+          <a:xfrm>
+            <a:off x="2984938" y="5424610"/>
+            <a:ext cx="6222124" cy="492443"/>
+          </a:xfrm>
+          <a:prstGeom prst="rect">
+            <a:avLst/>
+          </a:prstGeom>
+          <a:noFill/>
+        </p:spPr>
+        <p:txBody>
+          <a:bodyPr wrap="square">
+            <a:spAutoFit/>
+          </a:bodyPr>
+          <a:lstStyle/>
+          <a:p>
+            <a:pPr marL="0" indent="0">
+              <a:buNone/>
+            </a:pPr>
+            <a:r>
+              <a:rPr lang="en-GB" sz="2600" dirty="0"/>
+              <a:t>aligning LLM output with human intention</a:t>
+            </a:r>
           </a:p>
         </p:txBody>
       </p:sp>
     </p:spTree>
     <p:extLst>
       <p:ext uri="{BB962C8B-B14F-4D97-AF65-F5344CB8AC3E}">
-        <p14:creationId xmlns:p14="http://schemas.microsoft.com/office/powerpoint/2010/main" val="3914762839"/>
+        <p14:creationId xmlns:p14="http://schemas.microsoft.com/office/powerpoint/2010/main" val="2859818903"/>
       </p:ext>
     </p:extLst>
   </p:cSld>
@@ -11706,7 +11737,7 @@
           <p:cNvPr id="2" name="Titel 1">
             <a:extLst>
               <a:ext uri="{FF2B5EF4-FFF2-40B4-BE49-F238E27FC236}">
-                <a16:creationId xmlns:a16="http://schemas.microsoft.com/office/drawing/2014/main" id="{5A1B08B0-5FAB-8E36-9583-086C5FE7FBA2}"/>
+                <a16:creationId xmlns:a16="http://schemas.microsoft.com/office/drawing/2014/main" id="{09493DE1-8681-E946-F35C-2A338BAFE2C4}"/>
               </a:ext>
             </a:extLst>
           </p:cNvPr>
@@ -11722,15 +11753,7 @@
           <a:bodyPr/>
           <a:lstStyle/>
           <a:p>
-            <a:r>
-              <a:rPr lang="de-DE" dirty="0"/>
-              <a:t>Multi-Turn </a:t>
-            </a:r>
-            <a:r>
-              <a:rPr lang="de-DE" dirty="0" err="1"/>
-              <a:t>Dialogue</a:t>
-            </a:r>
-            <a:endParaRPr lang="de-DE" dirty="0"/>
+            <a:endParaRPr lang="de-DE"/>
           </a:p>
         </p:txBody>
       </p:sp>
@@ -11739,7 +11762,7 @@
           <p:cNvPr id="3" name="Inhaltsplatzhalter 2">
             <a:extLst>
               <a:ext uri="{FF2B5EF4-FFF2-40B4-BE49-F238E27FC236}">
-                <a16:creationId xmlns:a16="http://schemas.microsoft.com/office/drawing/2014/main" id="{BFDAE060-03E4-7410-C0A6-AE36D46743C1}"/>
+                <a16:creationId xmlns:a16="http://schemas.microsoft.com/office/drawing/2014/main" id="{84C5182F-76D3-02B3-807F-78D531F2C37B}"/>
               </a:ext>
             </a:extLst>
           </p:cNvPr>
@@ -11757,99 +11780,11 @@
           <a:p>
             <a:r>
               <a:rPr lang="de-DE" dirty="0" err="1"/>
-              <a:t>Handled</a:t>
-            </a:r>
-            <a:r>
-              <a:rPr lang="de-DE" dirty="0"/>
-              <a:t> </a:t>
-            </a:r>
-            <a:r>
-              <a:rPr lang="de-DE" dirty="0" err="1"/>
-              <a:t>entirely</a:t>
-            </a:r>
-            <a:r>
-              <a:rPr lang="de-DE" dirty="0"/>
-              <a:t> </a:t>
-            </a:r>
-            <a:r>
-              <a:rPr lang="de-DE" dirty="0" err="1"/>
-              <a:t>by</a:t>
-            </a:r>
-            <a:r>
-              <a:rPr lang="de-DE" dirty="0"/>
-              <a:t> </a:t>
-            </a:r>
-            <a:r>
-              <a:rPr lang="de-DE" dirty="0" err="1"/>
-              <a:t>passing</a:t>
-            </a:r>
-            <a:r>
-              <a:rPr lang="de-DE" dirty="0"/>
-              <a:t> </a:t>
-            </a:r>
-            <a:r>
-              <a:rPr lang="de-DE" dirty="0" err="1"/>
-              <a:t>the</a:t>
-            </a:r>
-            <a:r>
-              <a:rPr lang="de-DE" dirty="0"/>
-              <a:t> </a:t>
-            </a:r>
-            <a:r>
-              <a:rPr lang="de-DE" dirty="0" err="1"/>
-              <a:t>conversation</a:t>
-            </a:r>
-            <a:r>
-              <a:rPr lang="de-DE" dirty="0"/>
-              <a:t> </a:t>
-            </a:r>
-            <a:r>
-              <a:rPr lang="de-DE" dirty="0" err="1"/>
-              <a:t>history</a:t>
-            </a:r>
-            <a:r>
-              <a:rPr lang="de-DE" dirty="0"/>
-              <a:t> </a:t>
-            </a:r>
-            <a:r>
-              <a:rPr lang="de-DE" dirty="0" err="1"/>
-              <a:t>as</a:t>
-            </a:r>
-            <a:r>
-              <a:rPr lang="de-DE" dirty="0"/>
-              <a:t> </a:t>
-            </a:r>
-            <a:r>
-              <a:rPr lang="de-DE" dirty="0" err="1"/>
-              <a:t>part</a:t>
-            </a:r>
-            <a:r>
-              <a:rPr lang="de-DE" dirty="0"/>
-              <a:t> </a:t>
-            </a:r>
-            <a:r>
-              <a:rPr lang="de-DE" dirty="0" err="1"/>
-              <a:t>of</a:t>
-            </a:r>
-            <a:r>
-              <a:rPr lang="de-DE" dirty="0"/>
-              <a:t> </a:t>
-            </a:r>
-            <a:r>
-              <a:rPr lang="de-DE" dirty="0" err="1"/>
-              <a:t>the</a:t>
-            </a:r>
-            <a:r>
-              <a:rPr lang="de-DE" dirty="0"/>
-              <a:t> </a:t>
-            </a:r>
-            <a:r>
-              <a:rPr lang="de-DE" dirty="0" err="1"/>
-              <a:t>input</a:t>
-            </a:r>
-            <a:r>
-              <a:rPr lang="de-DE" dirty="0"/>
-              <a:t> </a:t>
+              <a:t>from</a:t>
+            </a:r>
+            <a:r>
+              <a:rPr lang="de-DE" dirty="0"/>
+              <a:t> GPT-3 </a:t>
             </a:r>
             <a:r>
               <a:rPr lang="de-DE" dirty="0" err="1"/>
@@ -11861,35 +11796,11 @@
             </a:r>
             <a:r>
               <a:rPr lang="de-DE" dirty="0" err="1"/>
-              <a:t>the</a:t>
-            </a:r>
-            <a:r>
-              <a:rPr lang="de-DE" dirty="0"/>
-              <a:t> </a:t>
-            </a:r>
-            <a:r>
-              <a:rPr lang="de-DE" dirty="0" err="1"/>
-              <a:t>model</a:t>
-            </a:r>
-            <a:r>
-              <a:rPr lang="de-DE" dirty="0"/>
-              <a:t> at </a:t>
-            </a:r>
-            <a:r>
-              <a:rPr lang="de-DE" dirty="0" err="1"/>
-              <a:t>each</a:t>
-            </a:r>
-            <a:r>
-              <a:rPr lang="de-DE" dirty="0"/>
-              <a:t> </a:t>
-            </a:r>
-            <a:r>
-              <a:rPr lang="de-DE" dirty="0" err="1"/>
-              <a:t>step</a:t>
-            </a:r>
-            <a:r>
-              <a:rPr lang="de-DE" dirty="0"/>
-              <a:t>.</a:t>
+              <a:t>InstructGPT</a:t>
+            </a:r>
+            <a:r>
+              <a:rPr lang="de-DE" dirty="0"/>
+              <a:t> and ChatGPT</a:t>
             </a:r>
           </a:p>
         </p:txBody>
@@ -11899,7 +11810,7 @@
           <p:cNvPr id="4" name="Foliennummernplatzhalter 3">
             <a:extLst>
               <a:ext uri="{FF2B5EF4-FFF2-40B4-BE49-F238E27FC236}">
-                <a16:creationId xmlns:a16="http://schemas.microsoft.com/office/drawing/2014/main" id="{4341BFF8-BEC1-70D4-324B-8FD51E0DAC79}"/>
+                <a16:creationId xmlns:a16="http://schemas.microsoft.com/office/drawing/2014/main" id="{425A7FC5-9ED3-4885-ECCE-73FBD8CB7493}"/>
               </a:ext>
             </a:extLst>
           </p:cNvPr>
@@ -11926,7 +11837,7 @@
     </p:spTree>
     <p:extLst>
       <p:ext uri="{BB962C8B-B14F-4D97-AF65-F5344CB8AC3E}">
-        <p14:creationId xmlns:p14="http://schemas.microsoft.com/office/powerpoint/2010/main" val="2345780904"/>
+        <p14:creationId xmlns:p14="http://schemas.microsoft.com/office/powerpoint/2010/main" val="3914762839"/>
       </p:ext>
     </p:extLst>
   </p:cSld>
@@ -11958,7 +11869,7 @@
           <p:cNvPr id="2" name="Titel 1">
             <a:extLst>
               <a:ext uri="{FF2B5EF4-FFF2-40B4-BE49-F238E27FC236}">
-                <a16:creationId xmlns:a16="http://schemas.microsoft.com/office/drawing/2014/main" id="{26EB045E-1272-3E62-6E68-080CE472E3FB}"/>
+                <a16:creationId xmlns:a16="http://schemas.microsoft.com/office/drawing/2014/main" id="{5A1B08B0-5FAB-8E36-9583-086C5FE7FBA2}"/>
               </a:ext>
             </a:extLst>
           </p:cNvPr>
@@ -11976,8 +11887,13 @@
           <a:p>
             <a:r>
               <a:rPr lang="de-DE" dirty="0"/>
-              <a:t>Dialog Systems</a:t>
-            </a:r>
+              <a:t>Multi-Turn </a:t>
+            </a:r>
+            <a:r>
+              <a:rPr lang="de-DE" dirty="0" err="1"/>
+              <a:t>Dialogue</a:t>
+            </a:r>
+            <a:endParaRPr lang="de-DE" dirty="0"/>
           </a:p>
         </p:txBody>
       </p:sp>
@@ -11986,7 +11902,7 @@
           <p:cNvPr id="3" name="Inhaltsplatzhalter 2">
             <a:extLst>
               <a:ext uri="{FF2B5EF4-FFF2-40B4-BE49-F238E27FC236}">
-                <a16:creationId xmlns:a16="http://schemas.microsoft.com/office/drawing/2014/main" id="{C16BFCD0-FDF6-89AF-2AC1-D92E4EB10467}"/>
+                <a16:creationId xmlns:a16="http://schemas.microsoft.com/office/drawing/2014/main" id="{BFDAE060-03E4-7410-C0A6-AE36D46743C1}"/>
               </a:ext>
             </a:extLst>
           </p:cNvPr>
@@ -12002,61 +11918,142 @@
           <a:bodyPr/>
           <a:lstStyle/>
           <a:p>
-            <a:pPr marL="0" indent="0">
-              <a:buNone/>
-            </a:pPr>
-            <a:r>
-              <a:rPr lang="de-DE" dirty="0"/>
-              <a:t>…</a:t>
-            </a:r>
-          </a:p>
-          <a:p>
-            <a:pPr marL="0" indent="0">
-              <a:buNone/>
-            </a:pPr>
-            <a:endParaRPr lang="de-DE" dirty="0"/>
-          </a:p>
-          <a:p>
-            <a:pPr marL="0" indent="0">
-              <a:buNone/>
-            </a:pPr>
-            <a:r>
-              <a:rPr lang="de-DE" dirty="0" err="1"/>
-              <a:t>with</a:t>
-            </a:r>
-            <a:r>
-              <a:rPr lang="de-DE" dirty="0"/>
-              <a:t> </a:t>
-            </a:r>
-            <a:r>
-              <a:rPr lang="de-DE" dirty="0" err="1"/>
-              <a:t>instruction-tuned</a:t>
-            </a:r>
-            <a:r>
-              <a:rPr lang="de-DE" dirty="0"/>
-              <a:t> and </a:t>
-            </a:r>
-            <a:r>
-              <a:rPr lang="de-DE" dirty="0" err="1"/>
-              <a:t>aligned</a:t>
-            </a:r>
-            <a:r>
-              <a:rPr lang="de-DE" dirty="0"/>
-              <a:t> LLMs: </a:t>
-            </a:r>
-            <a:r>
-              <a:rPr lang="de-DE" dirty="0" err="1"/>
-              <a:t>assistant</a:t>
-            </a:r>
-            <a:r>
-              <a:rPr lang="de-DE" dirty="0"/>
-              <a:t>-style </a:t>
-            </a:r>
-            <a:r>
-              <a:rPr lang="de-DE" dirty="0" err="1"/>
-              <a:t>models</a:t>
-            </a:r>
-            <a:endParaRPr lang="de-DE" dirty="0"/>
+            <a:r>
+              <a:rPr lang="de-DE" dirty="0" err="1"/>
+              <a:t>Handled</a:t>
+            </a:r>
+            <a:r>
+              <a:rPr lang="de-DE" dirty="0"/>
+              <a:t> </a:t>
+            </a:r>
+            <a:r>
+              <a:rPr lang="de-DE" dirty="0" err="1"/>
+              <a:t>entirely</a:t>
+            </a:r>
+            <a:r>
+              <a:rPr lang="de-DE" dirty="0"/>
+              <a:t> </a:t>
+            </a:r>
+            <a:r>
+              <a:rPr lang="de-DE" dirty="0" err="1"/>
+              <a:t>by</a:t>
+            </a:r>
+            <a:r>
+              <a:rPr lang="de-DE" dirty="0"/>
+              <a:t> </a:t>
+            </a:r>
+            <a:r>
+              <a:rPr lang="de-DE" dirty="0" err="1"/>
+              <a:t>passing</a:t>
+            </a:r>
+            <a:r>
+              <a:rPr lang="de-DE" dirty="0"/>
+              <a:t> </a:t>
+            </a:r>
+            <a:r>
+              <a:rPr lang="de-DE" dirty="0" err="1"/>
+              <a:t>the</a:t>
+            </a:r>
+            <a:r>
+              <a:rPr lang="de-DE" dirty="0"/>
+              <a:t> </a:t>
+            </a:r>
+            <a:r>
+              <a:rPr lang="de-DE" dirty="0" err="1"/>
+              <a:t>conversation</a:t>
+            </a:r>
+            <a:r>
+              <a:rPr lang="de-DE" dirty="0"/>
+              <a:t> </a:t>
+            </a:r>
+            <a:r>
+              <a:rPr lang="de-DE" dirty="0" err="1"/>
+              <a:t>history</a:t>
+            </a:r>
+            <a:r>
+              <a:rPr lang="de-DE" dirty="0"/>
+              <a:t> </a:t>
+            </a:r>
+            <a:r>
+              <a:rPr lang="de-DE" dirty="0" err="1"/>
+              <a:t>as</a:t>
+            </a:r>
+            <a:r>
+              <a:rPr lang="de-DE" dirty="0"/>
+              <a:t> </a:t>
+            </a:r>
+            <a:r>
+              <a:rPr lang="de-DE" dirty="0" err="1"/>
+              <a:t>part</a:t>
+            </a:r>
+            <a:r>
+              <a:rPr lang="de-DE" dirty="0"/>
+              <a:t> </a:t>
+            </a:r>
+            <a:r>
+              <a:rPr lang="de-DE" dirty="0" err="1"/>
+              <a:t>of</a:t>
+            </a:r>
+            <a:r>
+              <a:rPr lang="de-DE" dirty="0"/>
+              <a:t> </a:t>
+            </a:r>
+            <a:r>
+              <a:rPr lang="de-DE" dirty="0" err="1"/>
+              <a:t>the</a:t>
+            </a:r>
+            <a:r>
+              <a:rPr lang="de-DE" dirty="0"/>
+              <a:t> </a:t>
+            </a:r>
+            <a:r>
+              <a:rPr lang="de-DE" dirty="0" err="1"/>
+              <a:t>input</a:t>
+            </a:r>
+            <a:r>
+              <a:rPr lang="de-DE" dirty="0"/>
+              <a:t> </a:t>
+            </a:r>
+            <a:r>
+              <a:rPr lang="de-DE" dirty="0" err="1"/>
+              <a:t>to</a:t>
+            </a:r>
+            <a:r>
+              <a:rPr lang="de-DE" dirty="0"/>
+              <a:t> </a:t>
+            </a:r>
+            <a:r>
+              <a:rPr lang="de-DE" dirty="0" err="1"/>
+              <a:t>the</a:t>
+            </a:r>
+            <a:r>
+              <a:rPr lang="de-DE" dirty="0"/>
+              <a:t> </a:t>
+            </a:r>
+            <a:r>
+              <a:rPr lang="de-DE" dirty="0" err="1"/>
+              <a:t>model</a:t>
+            </a:r>
+            <a:r>
+              <a:rPr lang="de-DE" dirty="0"/>
+              <a:t> at </a:t>
+            </a:r>
+            <a:r>
+              <a:rPr lang="de-DE" dirty="0" err="1"/>
+              <a:t>each</a:t>
+            </a:r>
+            <a:r>
+              <a:rPr lang="de-DE" dirty="0"/>
+              <a:t> </a:t>
+            </a:r>
+            <a:r>
+              <a:rPr lang="de-DE" dirty="0" err="1"/>
+              <a:t>step</a:t>
+            </a:r>
+            <a:r>
+              <a:rPr lang="de-DE" dirty="0"/>
+              <a:t>.</a:t>
+            </a:r>
           </a:p>
         </p:txBody>
       </p:sp>
@@ -12065,7 +12062,7 @@
           <p:cNvPr id="4" name="Foliennummernplatzhalter 3">
             <a:extLst>
               <a:ext uri="{FF2B5EF4-FFF2-40B4-BE49-F238E27FC236}">
-                <a16:creationId xmlns:a16="http://schemas.microsoft.com/office/drawing/2014/main" id="{96D7745C-33A3-5E08-9676-31B82A7FED49}"/>
+                <a16:creationId xmlns:a16="http://schemas.microsoft.com/office/drawing/2014/main" id="{4341BFF8-BEC1-70D4-324B-8FD51E0DAC79}"/>
               </a:ext>
             </a:extLst>
           </p:cNvPr>
@@ -12092,7 +12089,7 @@
     </p:spTree>
     <p:extLst>
       <p:ext uri="{BB962C8B-B14F-4D97-AF65-F5344CB8AC3E}">
-        <p14:creationId xmlns:p14="http://schemas.microsoft.com/office/powerpoint/2010/main" val="2682940258"/>
+        <p14:creationId xmlns:p14="http://schemas.microsoft.com/office/powerpoint/2010/main" val="2345780904"/>
       </p:ext>
     </p:extLst>
   </p:cSld>
@@ -12121,10 +12118,10 @@
       </p:grpSpPr>
       <p:sp>
         <p:nvSpPr>
-          <p:cNvPr id="2" name="Title 1">
-            <a:extLst>
-              <a:ext uri="{FF2B5EF4-FFF2-40B4-BE49-F238E27FC236}">
-                <a16:creationId xmlns:a16="http://schemas.microsoft.com/office/drawing/2014/main" id="{C69AD07C-8362-D471-3F09-B2FC347557A6}"/>
+          <p:cNvPr id="2" name="Titel 1">
+            <a:extLst>
+              <a:ext uri="{FF2B5EF4-FFF2-40B4-BE49-F238E27FC236}">
+                <a16:creationId xmlns:a16="http://schemas.microsoft.com/office/drawing/2014/main" id="{26EB045E-1272-3E62-6E68-080CE472E3FB}"/>
               </a:ext>
             </a:extLst>
           </p:cNvPr>
@@ -12141,18 +12138,18 @@
           <a:lstStyle/>
           <a:p>
             <a:r>
-              <a:rPr lang="en-GB" dirty="0"/>
-              <a:t>Parameter-Efficient Finetuning (PEFT)</a:t>
-            </a:r>
-          </a:p>
-        </p:txBody>
-      </p:sp>
-      <p:sp>
-        <p:nvSpPr>
-          <p:cNvPr id="3" name="Content Placeholder 2">
-            <a:extLst>
-              <a:ext uri="{FF2B5EF4-FFF2-40B4-BE49-F238E27FC236}">
-                <a16:creationId xmlns:a16="http://schemas.microsoft.com/office/drawing/2014/main" id="{E9876C3D-25E9-6468-66D7-A1D0E870E374}"/>
+              <a:rPr lang="de-DE" dirty="0"/>
+              <a:t>Dialog Systems</a:t>
+            </a:r>
+          </a:p>
+        </p:txBody>
+      </p:sp>
+      <p:sp>
+        <p:nvSpPr>
+          <p:cNvPr id="3" name="Inhaltsplatzhalter 2">
+            <a:extLst>
+              <a:ext uri="{FF2B5EF4-FFF2-40B4-BE49-F238E27FC236}">
+                <a16:creationId xmlns:a16="http://schemas.microsoft.com/office/drawing/2014/main" id="{C16BFCD0-FDF6-89AF-2AC1-D92E4EB10467}"/>
               </a:ext>
             </a:extLst>
           </p:cNvPr>
@@ -12163,6 +12160,172 @@
             <p:ph idx="1"/>
           </p:nvPr>
         </p:nvSpPr>
+        <p:spPr/>
+        <p:txBody>
+          <a:bodyPr/>
+          <a:lstStyle/>
+          <a:p>
+            <a:pPr marL="0" indent="0">
+              <a:buNone/>
+            </a:pPr>
+            <a:r>
+              <a:rPr lang="de-DE" dirty="0"/>
+              <a:t>…</a:t>
+            </a:r>
+          </a:p>
+          <a:p>
+            <a:pPr marL="0" indent="0">
+              <a:buNone/>
+            </a:pPr>
+            <a:endParaRPr lang="de-DE" dirty="0"/>
+          </a:p>
+          <a:p>
+            <a:pPr marL="0" indent="0">
+              <a:buNone/>
+            </a:pPr>
+            <a:r>
+              <a:rPr lang="de-DE" dirty="0" err="1"/>
+              <a:t>with</a:t>
+            </a:r>
+            <a:r>
+              <a:rPr lang="de-DE" dirty="0"/>
+              <a:t> </a:t>
+            </a:r>
+            <a:r>
+              <a:rPr lang="de-DE" dirty="0" err="1"/>
+              <a:t>instruction-tuned</a:t>
+            </a:r>
+            <a:r>
+              <a:rPr lang="de-DE" dirty="0"/>
+              <a:t> and </a:t>
+            </a:r>
+            <a:r>
+              <a:rPr lang="de-DE" dirty="0" err="1"/>
+              <a:t>aligned</a:t>
+            </a:r>
+            <a:r>
+              <a:rPr lang="de-DE" dirty="0"/>
+              <a:t> LLMs: </a:t>
+            </a:r>
+            <a:r>
+              <a:rPr lang="de-DE" dirty="0" err="1"/>
+              <a:t>assistant</a:t>
+            </a:r>
+            <a:r>
+              <a:rPr lang="de-DE" dirty="0"/>
+              <a:t>-style </a:t>
+            </a:r>
+            <a:r>
+              <a:rPr lang="de-DE" dirty="0" err="1"/>
+              <a:t>models</a:t>
+            </a:r>
+            <a:endParaRPr lang="de-DE" dirty="0"/>
+          </a:p>
+        </p:txBody>
+      </p:sp>
+      <p:sp>
+        <p:nvSpPr>
+          <p:cNvPr id="4" name="Foliennummernplatzhalter 3">
+            <a:extLst>
+              <a:ext uri="{FF2B5EF4-FFF2-40B4-BE49-F238E27FC236}">
+                <a16:creationId xmlns:a16="http://schemas.microsoft.com/office/drawing/2014/main" id="{96D7745C-33A3-5E08-9676-31B82A7FED49}"/>
+              </a:ext>
+            </a:extLst>
+          </p:cNvPr>
+          <p:cNvSpPr>
+            <a:spLocks noGrp="1"/>
+          </p:cNvSpPr>
+          <p:nvPr>
+            <p:ph type="sldNum" sz="quarter" idx="12"/>
+          </p:nvPr>
+        </p:nvSpPr>
+        <p:spPr/>
+        <p:txBody>
+          <a:bodyPr/>
+          <a:lstStyle/>
+          <a:p>
+            <a:fld id="{4055531C-5681-6B44-B2CA-926D7A74B06D}" type="slidenum">
+              <a:rPr lang="de-DE" smtClean="0"/>
+              <a:t>25</a:t>
+            </a:fld>
+            <a:endParaRPr lang="de-DE"/>
+          </a:p>
+        </p:txBody>
+      </p:sp>
+    </p:spTree>
+    <p:extLst>
+      <p:ext uri="{BB962C8B-B14F-4D97-AF65-F5344CB8AC3E}">
+        <p14:creationId xmlns:p14="http://schemas.microsoft.com/office/powerpoint/2010/main" val="2682940258"/>
+      </p:ext>
+    </p:extLst>
+  </p:cSld>
+  <p:clrMapOvr>
+    <a:masterClrMapping/>
+  </p:clrMapOvr>
+</p:sld>
+</file>
+
+<file path=ppt/slides/slide26.xml><?xml version="1.0" encoding="utf-8"?>
+<p:sld xmlns:a="http://schemas.openxmlformats.org/drawingml/2006/main" xmlns:r="http://schemas.openxmlformats.org/officeDocument/2006/relationships" xmlns:p="http://schemas.openxmlformats.org/presentationml/2006/main">
+  <p:cSld>
+    <p:spTree>
+      <p:nvGrpSpPr>
+        <p:cNvPr id="1" name=""/>
+        <p:cNvGrpSpPr/>
+        <p:nvPr/>
+      </p:nvGrpSpPr>
+      <p:grpSpPr>
+        <a:xfrm>
+          <a:off x="0" y="0"/>
+          <a:ext cx="0" cy="0"/>
+          <a:chOff x="0" y="0"/>
+          <a:chExt cx="0" cy="0"/>
+        </a:xfrm>
+      </p:grpSpPr>
+      <p:sp>
+        <p:nvSpPr>
+          <p:cNvPr id="2" name="Title 1">
+            <a:extLst>
+              <a:ext uri="{FF2B5EF4-FFF2-40B4-BE49-F238E27FC236}">
+                <a16:creationId xmlns:a16="http://schemas.microsoft.com/office/drawing/2014/main" id="{C69AD07C-8362-D471-3F09-B2FC347557A6}"/>
+              </a:ext>
+            </a:extLst>
+          </p:cNvPr>
+          <p:cNvSpPr>
+            <a:spLocks noGrp="1"/>
+          </p:cNvSpPr>
+          <p:nvPr>
+            <p:ph type="title"/>
+          </p:nvPr>
+        </p:nvSpPr>
+        <p:spPr/>
+        <p:txBody>
+          <a:bodyPr/>
+          <a:lstStyle/>
+          <a:p>
+            <a:r>
+              <a:rPr lang="en-GB" dirty="0"/>
+              <a:t>Parameter-Efficient Finetuning (PEFT)</a:t>
+            </a:r>
+          </a:p>
+        </p:txBody>
+      </p:sp>
+      <p:sp>
+        <p:nvSpPr>
+          <p:cNvPr id="3" name="Content Placeholder 2">
+            <a:extLst>
+              <a:ext uri="{FF2B5EF4-FFF2-40B4-BE49-F238E27FC236}">
+                <a16:creationId xmlns:a16="http://schemas.microsoft.com/office/drawing/2014/main" id="{E9876C3D-25E9-6468-66D7-A1D0E870E374}"/>
+              </a:ext>
+            </a:extLst>
+          </p:cNvPr>
+          <p:cNvSpPr>
+            <a:spLocks noGrp="1"/>
+          </p:cNvSpPr>
+          <p:nvPr>
+            <p:ph idx="1"/>
+          </p:nvPr>
+        </p:nvSpPr>
         <p:spPr>
           <a:xfrm>
             <a:off x="838199" y="1825625"/>
@@ -12215,7 +12378,7 @@
           <a:p>
             <a:fld id="{849D05A8-43E9-1C49-8606-50AB68220DEC}" type="slidenum">
               <a:rPr lang="en-DE" smtClean="0"/>
-              <a:t>25</a:t>
+              <a:t>26</a:t>
             </a:fld>
             <a:endParaRPr lang="en-DE"/>
           </a:p>
@@ -12264,157 +12427,6 @@
 </p:sld>
 </file>
 
-<file path=ppt/slides/slide26.xml><?xml version="1.0" encoding="utf-8"?>
-<p:sld xmlns:a="http://schemas.openxmlformats.org/drawingml/2006/main" xmlns:r="http://schemas.openxmlformats.org/officeDocument/2006/relationships" xmlns:p="http://schemas.openxmlformats.org/presentationml/2006/main">
-  <p:cSld>
-    <p:spTree>
-      <p:nvGrpSpPr>
-        <p:cNvPr id="1" name=""/>
-        <p:cNvGrpSpPr/>
-        <p:nvPr/>
-      </p:nvGrpSpPr>
-      <p:grpSpPr>
-        <a:xfrm>
-          <a:off x="0" y="0"/>
-          <a:ext cx="0" cy="0"/>
-          <a:chOff x="0" y="0"/>
-          <a:chExt cx="0" cy="0"/>
-        </a:xfrm>
-      </p:grpSpPr>
-      <p:sp>
-        <p:nvSpPr>
-          <p:cNvPr id="2" name="Titel 1">
-            <a:extLst>
-              <a:ext uri="{FF2B5EF4-FFF2-40B4-BE49-F238E27FC236}">
-                <a16:creationId xmlns:a16="http://schemas.microsoft.com/office/drawing/2014/main" id="{B644D5EC-B5AA-E834-EBB8-678B95596DB8}"/>
-              </a:ext>
-            </a:extLst>
-          </p:cNvPr>
-          <p:cNvSpPr>
-            <a:spLocks noGrp="1"/>
-          </p:cNvSpPr>
-          <p:nvPr>
-            <p:ph type="title"/>
-          </p:nvPr>
-        </p:nvSpPr>
-        <p:spPr/>
-        <p:txBody>
-          <a:bodyPr/>
-          <a:lstStyle/>
-          <a:p>
-            <a:endParaRPr lang="de-DE"/>
-          </a:p>
-        </p:txBody>
-      </p:sp>
-      <p:sp>
-        <p:nvSpPr>
-          <p:cNvPr id="3" name="Inhaltsplatzhalter 2">
-            <a:extLst>
-              <a:ext uri="{FF2B5EF4-FFF2-40B4-BE49-F238E27FC236}">
-                <a16:creationId xmlns:a16="http://schemas.microsoft.com/office/drawing/2014/main" id="{4B87694A-0859-8A10-3458-6B8052C23052}"/>
-              </a:ext>
-            </a:extLst>
-          </p:cNvPr>
-          <p:cNvSpPr>
-            <a:spLocks noGrp="1"/>
-          </p:cNvSpPr>
-          <p:nvPr>
-            <p:ph idx="1"/>
-          </p:nvPr>
-        </p:nvSpPr>
-        <p:spPr/>
-        <p:txBody>
-          <a:bodyPr/>
-          <a:lstStyle/>
-          <a:p>
-            <a:pPr marL="0" indent="0">
-              <a:buNone/>
-            </a:pPr>
-            <a:r>
-              <a:rPr lang="de-DE" dirty="0"/>
-              <a:t>…</a:t>
-            </a:r>
-          </a:p>
-          <a:p>
-            <a:pPr marL="0" indent="0">
-              <a:buNone/>
-            </a:pPr>
-            <a:endParaRPr lang="de-DE" dirty="0"/>
-          </a:p>
-          <a:p>
-            <a:pPr marL="0" indent="0">
-              <a:buNone/>
-            </a:pPr>
-            <a:r>
-              <a:rPr lang="de-DE" dirty="0" err="1">
-                <a:hlinkClick r:id="rId2"/>
-              </a:rPr>
-              <a:t>Build</a:t>
-            </a:r>
-            <a:r>
-              <a:rPr lang="de-DE" dirty="0">
-                <a:hlinkClick r:id="rId2"/>
-              </a:rPr>
-              <a:t> a Large Language Model (</a:t>
-            </a:r>
-            <a:r>
-              <a:rPr lang="de-DE" dirty="0" err="1">
-                <a:hlinkClick r:id="rId2"/>
-              </a:rPr>
-              <a:t>From</a:t>
-            </a:r>
-            <a:r>
-              <a:rPr lang="de-DE" dirty="0">
-                <a:hlinkClick r:id="rId2"/>
-              </a:rPr>
-              <a:t> Scratch)</a:t>
-            </a:r>
-            <a:endParaRPr lang="de-DE" dirty="0"/>
-          </a:p>
-        </p:txBody>
-      </p:sp>
-      <p:sp>
-        <p:nvSpPr>
-          <p:cNvPr id="4" name="Foliennummernplatzhalter 3">
-            <a:extLst>
-              <a:ext uri="{FF2B5EF4-FFF2-40B4-BE49-F238E27FC236}">
-                <a16:creationId xmlns:a16="http://schemas.microsoft.com/office/drawing/2014/main" id="{F51A0954-1AA4-E4D1-74D2-588420CC4BB1}"/>
-              </a:ext>
-            </a:extLst>
-          </p:cNvPr>
-          <p:cNvSpPr>
-            <a:spLocks noGrp="1"/>
-          </p:cNvSpPr>
-          <p:nvPr>
-            <p:ph type="sldNum" sz="quarter" idx="12"/>
-          </p:nvPr>
-        </p:nvSpPr>
-        <p:spPr/>
-        <p:txBody>
-          <a:bodyPr/>
-          <a:lstStyle/>
-          <a:p>
-            <a:fld id="{4055531C-5681-6B44-B2CA-926D7A74B06D}" type="slidenum">
-              <a:rPr lang="de-DE" smtClean="0"/>
-              <a:t>26</a:t>
-            </a:fld>
-            <a:endParaRPr lang="de-DE"/>
-          </a:p>
-        </p:txBody>
-      </p:sp>
-    </p:spTree>
-    <p:extLst>
-      <p:ext uri="{BB962C8B-B14F-4D97-AF65-F5344CB8AC3E}">
-        <p14:creationId xmlns:p14="http://schemas.microsoft.com/office/powerpoint/2010/main" val="973004014"/>
-      </p:ext>
-    </p:extLst>
-  </p:cSld>
-  <p:clrMapOvr>
-    <a:masterClrMapping/>
-  </p:clrMapOvr>
-</p:sld>
-</file>
-
 <file path=ppt/slides/slide27.xml><?xml version="1.0" encoding="utf-8"?>
 <p:sld xmlns:a="http://schemas.openxmlformats.org/drawingml/2006/main" xmlns:r="http://schemas.openxmlformats.org/officeDocument/2006/relationships" xmlns:p="http://schemas.openxmlformats.org/presentationml/2006/main">
   <p:cSld>
@@ -12434,10 +12446,102 @@
       </p:grpSpPr>
       <p:sp>
         <p:nvSpPr>
+          <p:cNvPr id="2" name="Titel 1">
+            <a:extLst>
+              <a:ext uri="{FF2B5EF4-FFF2-40B4-BE49-F238E27FC236}">
+                <a16:creationId xmlns:a16="http://schemas.microsoft.com/office/drawing/2014/main" id="{B644D5EC-B5AA-E834-EBB8-678B95596DB8}"/>
+              </a:ext>
+            </a:extLst>
+          </p:cNvPr>
+          <p:cNvSpPr>
+            <a:spLocks noGrp="1"/>
+          </p:cNvSpPr>
+          <p:nvPr>
+            <p:ph type="title"/>
+          </p:nvPr>
+        </p:nvSpPr>
+        <p:spPr/>
+        <p:txBody>
+          <a:bodyPr/>
+          <a:lstStyle/>
+          <a:p>
+            <a:endParaRPr lang="de-DE"/>
+          </a:p>
+        </p:txBody>
+      </p:sp>
+      <p:sp>
+        <p:nvSpPr>
+          <p:cNvPr id="3" name="Inhaltsplatzhalter 2">
+            <a:extLst>
+              <a:ext uri="{FF2B5EF4-FFF2-40B4-BE49-F238E27FC236}">
+                <a16:creationId xmlns:a16="http://schemas.microsoft.com/office/drawing/2014/main" id="{4B87694A-0859-8A10-3458-6B8052C23052}"/>
+              </a:ext>
+            </a:extLst>
+          </p:cNvPr>
+          <p:cNvSpPr>
+            <a:spLocks noGrp="1"/>
+          </p:cNvSpPr>
+          <p:nvPr>
+            <p:ph idx="1"/>
+          </p:nvPr>
+        </p:nvSpPr>
+        <p:spPr/>
+        <p:txBody>
+          <a:bodyPr/>
+          <a:lstStyle/>
+          <a:p>
+            <a:pPr marL="0" indent="0">
+              <a:buNone/>
+            </a:pPr>
+            <a:r>
+              <a:rPr lang="de-DE" dirty="0"/>
+              <a:t>…</a:t>
+            </a:r>
+          </a:p>
+          <a:p>
+            <a:pPr marL="0" indent="0">
+              <a:buNone/>
+            </a:pPr>
+            <a:endParaRPr lang="de-DE" dirty="0"/>
+          </a:p>
+          <a:p>
+            <a:pPr marL="0" indent="0">
+              <a:buNone/>
+            </a:pPr>
+            <a:r>
+              <a:rPr lang="de-DE" dirty="0" err="1">
+                <a:hlinkClick r:id="rId2"/>
+              </a:rPr>
+              <a:t>Build</a:t>
+            </a:r>
+            <a:r>
+              <a:rPr lang="de-DE" dirty="0">
+                <a:hlinkClick r:id="rId2"/>
+              </a:rPr>
+              <a:t> a Large Language Model (</a:t>
+            </a:r>
+            <a:r>
+              <a:rPr lang="de-DE" dirty="0" err="1">
+                <a:hlinkClick r:id="rId2"/>
+              </a:rPr>
+              <a:t>From</a:t>
+            </a:r>
+            <a:r>
+              <a:rPr lang="de-DE" dirty="0">
+                <a:hlinkClick r:id="rId2"/>
+              </a:rPr>
+              <a:t> Scratch)</a:t>
+            </a:r>
+            <a:endParaRPr lang="de-DE" dirty="0"/>
+          </a:p>
+        </p:txBody>
+      </p:sp>
+      <p:sp>
+        <p:nvSpPr>
           <p:cNvPr id="4" name="Foliennummernplatzhalter 3">
             <a:extLst>
               <a:ext uri="{FF2B5EF4-FFF2-40B4-BE49-F238E27FC236}">
-                <a16:creationId xmlns:a16="http://schemas.microsoft.com/office/drawing/2014/main" id="{F8399663-9922-19FF-0C11-ACBEFDAAA30F}"/>
+                <a16:creationId xmlns:a16="http://schemas.microsoft.com/office/drawing/2014/main" id="{F51A0954-1AA4-E4D1-74D2-588420CC4BB1}"/>
               </a:ext>
             </a:extLst>
           </p:cNvPr>
@@ -12456,6 +12560,65 @@
             <a:fld id="{4055531C-5681-6B44-B2CA-926D7A74B06D}" type="slidenum">
               <a:rPr lang="de-DE" smtClean="0"/>
               <a:t>27</a:t>
+            </a:fld>
+            <a:endParaRPr lang="de-DE"/>
+          </a:p>
+        </p:txBody>
+      </p:sp>
+    </p:spTree>
+    <p:extLst>
+      <p:ext uri="{BB962C8B-B14F-4D97-AF65-F5344CB8AC3E}">
+        <p14:creationId xmlns:p14="http://schemas.microsoft.com/office/powerpoint/2010/main" val="973004014"/>
+      </p:ext>
+    </p:extLst>
+  </p:cSld>
+  <p:clrMapOvr>
+    <a:masterClrMapping/>
+  </p:clrMapOvr>
+</p:sld>
+</file>
+
+<file path=ppt/slides/slide28.xml><?xml version="1.0" encoding="utf-8"?>
+<p:sld xmlns:a="http://schemas.openxmlformats.org/drawingml/2006/main" xmlns:r="http://schemas.openxmlformats.org/officeDocument/2006/relationships" xmlns:p="http://schemas.openxmlformats.org/presentationml/2006/main">
+  <p:cSld>
+    <p:spTree>
+      <p:nvGrpSpPr>
+        <p:cNvPr id="1" name=""/>
+        <p:cNvGrpSpPr/>
+        <p:nvPr/>
+      </p:nvGrpSpPr>
+      <p:grpSpPr>
+        <a:xfrm>
+          <a:off x="0" y="0"/>
+          <a:ext cx="0" cy="0"/>
+          <a:chOff x="0" y="0"/>
+          <a:chExt cx="0" cy="0"/>
+        </a:xfrm>
+      </p:grpSpPr>
+      <p:sp>
+        <p:nvSpPr>
+          <p:cNvPr id="4" name="Foliennummernplatzhalter 3">
+            <a:extLst>
+              <a:ext uri="{FF2B5EF4-FFF2-40B4-BE49-F238E27FC236}">
+                <a16:creationId xmlns:a16="http://schemas.microsoft.com/office/drawing/2014/main" id="{F8399663-9922-19FF-0C11-ACBEFDAAA30F}"/>
+              </a:ext>
+            </a:extLst>
+          </p:cNvPr>
+          <p:cNvSpPr>
+            <a:spLocks noGrp="1"/>
+          </p:cNvSpPr>
+          <p:nvPr>
+            <p:ph type="sldNum" sz="quarter" idx="12"/>
+          </p:nvPr>
+        </p:nvSpPr>
+        <p:spPr/>
+        <p:txBody>
+          <a:bodyPr/>
+          <a:lstStyle/>
+          <a:p>
+            <a:fld id="{4055531C-5681-6B44-B2CA-926D7A74B06D}" type="slidenum">
+              <a:rPr lang="de-DE" smtClean="0"/>
+              <a:t>28</a:t>
             </a:fld>
             <a:endParaRPr lang="de-DE"/>
           </a:p>
@@ -12504,7 +12667,7 @@
 </p:sld>
 </file>
 
-<file path=ppt/slides/slide28.xml><?xml version="1.0" encoding="utf-8"?>
+<file path=ppt/slides/slide29.xml><?xml version="1.0" encoding="utf-8"?>
 <p:sld xmlns:a="http://schemas.openxmlformats.org/drawingml/2006/main" xmlns:r="http://schemas.openxmlformats.org/officeDocument/2006/relationships" xmlns:p="http://schemas.openxmlformats.org/presentationml/2006/main">
   <p:cSld>
     <p:spTree>
@@ -12578,16 +12741,75 @@
             <a:pPr marL="0" indent="0">
               <a:buNone/>
             </a:pPr>
-            <a:endParaRPr lang="de-DE" dirty="0"/>
-          </a:p>
-          <a:p>
-            <a:pPr marL="0" indent="0">
-              <a:buNone/>
-            </a:pPr>
-            <a:r>
-              <a:rPr lang="de-DE" dirty="0"/>
-              <a:t>…</a:t>
-            </a:r>
+            <a:r>
+              <a:rPr lang="de-DE" dirty="0" err="1"/>
+              <a:t>latest</a:t>
+            </a:r>
+            <a:r>
+              <a:rPr lang="de-DE" dirty="0"/>
+              <a:t> AI </a:t>
+            </a:r>
+            <a:r>
+              <a:rPr lang="de-DE" dirty="0" err="1"/>
+              <a:t>evolutionary</a:t>
+            </a:r>
+            <a:r>
+              <a:rPr lang="de-DE" dirty="0"/>
+              <a:t> </a:t>
+            </a:r>
+            <a:r>
+              <a:rPr lang="de-DE" dirty="0" err="1"/>
+              <a:t>step</a:t>
+            </a:r>
+            <a:r>
+              <a:rPr lang="de-DE" dirty="0"/>
+              <a:t>: </a:t>
+            </a:r>
+            <a:r>
+              <a:rPr lang="de-DE" b="1" dirty="0"/>
+              <a:t>LLMs </a:t>
+            </a:r>
+            <a:r>
+              <a:rPr lang="de-DE" b="1" dirty="0" err="1"/>
+              <a:t>as</a:t>
+            </a:r>
+            <a:r>
+              <a:rPr lang="de-DE" b="1" dirty="0"/>
+              <a:t> </a:t>
+            </a:r>
+            <a:r>
+              <a:rPr lang="de-DE" b="1" dirty="0" err="1"/>
+              <a:t>assistants</a:t>
+            </a:r>
+            <a:r>
+              <a:rPr lang="de-DE" dirty="0"/>
+              <a:t> </a:t>
+            </a:r>
+            <a:r>
+              <a:rPr lang="de-DE" dirty="0" err="1"/>
+              <a:t>to</a:t>
+            </a:r>
+            <a:r>
+              <a:rPr lang="de-DE" dirty="0"/>
+              <a:t> </a:t>
+            </a:r>
+            <a:r>
+              <a:rPr lang="de-DE" b="1" dirty="0"/>
+              <a:t>LLMs </a:t>
+            </a:r>
+            <a:r>
+              <a:rPr lang="de-DE" b="1" dirty="0" err="1"/>
+              <a:t>as</a:t>
+            </a:r>
+            <a:r>
+              <a:rPr lang="de-DE" b="1" dirty="0"/>
+              <a:t> </a:t>
+            </a:r>
+            <a:r>
+              <a:rPr lang="de-DE" b="1" dirty="0" err="1"/>
+              <a:t>agents</a:t>
+            </a:r>
+            <a:endParaRPr lang="de-DE" b="1" dirty="0"/>
           </a:p>
         </p:txBody>
       </p:sp>
@@ -12614,9 +12836,207 @@
           <a:p>
             <a:fld id="{3D4C94FE-FF23-4504-88E9-14D481113291}" type="slidenum">
               <a:rPr lang="en-GB" smtClean="0"/>
-              <a:t>28</a:t>
+              <a:t>29</a:t>
             </a:fld>
             <a:endParaRPr lang="en-GB"/>
+          </a:p>
+        </p:txBody>
+      </p:sp>
+      <p:pic>
+        <p:nvPicPr>
+          <p:cNvPr id="5" name="Grafik 4">
+            <a:extLst>
+              <a:ext uri="{FF2B5EF4-FFF2-40B4-BE49-F238E27FC236}">
+                <a16:creationId xmlns:a16="http://schemas.microsoft.com/office/drawing/2014/main" id="{BF9B6036-572A-3224-B445-73009FB1AF13}"/>
+              </a:ext>
+            </a:extLst>
+          </p:cNvPr>
+          <p:cNvPicPr>
+            <a:picLocks noChangeAspect="1"/>
+          </p:cNvPicPr>
+          <p:nvPr/>
+        </p:nvPicPr>
+        <p:blipFill>
+          <a:blip r:embed="rId2"/>
+          <a:stretch>
+            <a:fillRect/>
+          </a:stretch>
+        </p:blipFill>
+        <p:spPr>
+          <a:xfrm>
+            <a:off x="3096985" y="2540226"/>
+            <a:ext cx="5998029" cy="3998686"/>
+          </a:xfrm>
+          <a:prstGeom prst="rect">
+            <a:avLst/>
+          </a:prstGeom>
+        </p:spPr>
+      </p:pic>
+      <p:sp>
+        <p:nvSpPr>
+          <p:cNvPr id="7" name="Textfeld 6">
+            <a:extLst>
+              <a:ext uri="{FF2B5EF4-FFF2-40B4-BE49-F238E27FC236}">
+                <a16:creationId xmlns:a16="http://schemas.microsoft.com/office/drawing/2014/main" id="{16569F2A-99DD-137E-168F-1D632F00FA33}"/>
+              </a:ext>
+            </a:extLst>
+          </p:cNvPr>
+          <p:cNvSpPr txBox="1"/>
+          <p:nvPr/>
+        </p:nvSpPr>
+        <p:spPr>
+          <a:xfrm>
+            <a:off x="9095014" y="3339574"/>
+            <a:ext cx="2911928" cy="1323439"/>
+          </a:xfrm>
+          <a:prstGeom prst="rect">
+            <a:avLst/>
+          </a:prstGeom>
+          <a:noFill/>
+        </p:spPr>
+        <p:txBody>
+          <a:bodyPr wrap="square">
+            <a:spAutoFit/>
+          </a:bodyPr>
+          <a:lstStyle/>
+          <a:p>
+            <a:r>
+              <a:rPr lang="de-DE" sz="2000" dirty="0" err="1"/>
+              <a:t>active</a:t>
+            </a:r>
+            <a:r>
+              <a:rPr lang="de-DE" sz="2000" dirty="0"/>
+              <a:t>, </a:t>
+            </a:r>
+            <a:r>
+              <a:rPr lang="de-DE" sz="2000" dirty="0" err="1"/>
+              <a:t>autonomous</a:t>
+            </a:r>
+            <a:r>
+              <a:rPr lang="de-DE" sz="2000" dirty="0"/>
+              <a:t>, </a:t>
+            </a:r>
+            <a:r>
+              <a:rPr lang="de-DE" sz="2000" dirty="0" err="1"/>
+              <a:t>decision-making</a:t>
+            </a:r>
+            <a:r>
+              <a:rPr lang="de-DE" sz="2000" dirty="0"/>
+              <a:t> </a:t>
+            </a:r>
+            <a:r>
+              <a:rPr lang="de-DE" sz="2000" dirty="0" err="1"/>
+              <a:t>entities</a:t>
+            </a:r>
+            <a:endParaRPr lang="de-DE" sz="2000" dirty="0"/>
+          </a:p>
+          <a:p>
+            <a:endParaRPr lang="de-DE" sz="2000" dirty="0"/>
+          </a:p>
+          <a:p>
+            <a:r>
+              <a:rPr lang="de-DE" sz="2000" dirty="0" err="1"/>
+              <a:t>acting</a:t>
+            </a:r>
+            <a:r>
+              <a:rPr lang="de-DE" sz="2000" dirty="0"/>
+              <a:t> on </a:t>
+            </a:r>
+            <a:r>
+              <a:rPr lang="de-DE" sz="2000" dirty="0" err="1"/>
+              <a:t>goals</a:t>
+            </a:r>
+            <a:r>
+              <a:rPr lang="de-DE" sz="2000" dirty="0"/>
+              <a:t> </a:t>
+            </a:r>
+            <a:r>
+              <a:rPr lang="de-DE" sz="2000" dirty="0" err="1"/>
+              <a:t>or</a:t>
+            </a:r>
+            <a:r>
+              <a:rPr lang="de-DE" sz="2000" dirty="0"/>
+              <a:t> </a:t>
+            </a:r>
+            <a:r>
+              <a:rPr lang="de-DE" sz="2000" dirty="0" err="1"/>
+              <a:t>tasks</a:t>
+            </a:r>
+            <a:endParaRPr lang="de-DE" sz="2000" dirty="0"/>
+          </a:p>
+        </p:txBody>
+      </p:sp>
+      <p:sp>
+        <p:nvSpPr>
+          <p:cNvPr id="9" name="Textfeld 8">
+            <a:extLst>
+              <a:ext uri="{FF2B5EF4-FFF2-40B4-BE49-F238E27FC236}">
+                <a16:creationId xmlns:a16="http://schemas.microsoft.com/office/drawing/2014/main" id="{70A239DC-E007-4DEE-0753-ACE01E85E9D0}"/>
+              </a:ext>
+            </a:extLst>
+          </p:cNvPr>
+          <p:cNvSpPr txBox="1"/>
+          <p:nvPr/>
+        </p:nvSpPr>
+        <p:spPr>
+          <a:xfrm>
+            <a:off x="1055914" y="3339574"/>
+            <a:ext cx="2041071" cy="1323439"/>
+          </a:xfrm>
+          <a:prstGeom prst="rect">
+            <a:avLst/>
+          </a:prstGeom>
+          <a:noFill/>
+        </p:spPr>
+        <p:txBody>
+          <a:bodyPr wrap="square">
+            <a:spAutoFit/>
+          </a:bodyPr>
+          <a:lstStyle/>
+          <a:p>
+            <a:r>
+              <a:rPr lang="de-DE" sz="2000" dirty="0"/>
+              <a:t>passive, </a:t>
+            </a:r>
+            <a:r>
+              <a:rPr lang="de-DE" sz="2000" dirty="0" err="1"/>
+              <a:t>reactive</a:t>
+            </a:r>
+            <a:endParaRPr lang="de-DE" sz="2000" dirty="0"/>
+          </a:p>
+          <a:p>
+            <a:endParaRPr lang="de-DE" sz="2000" dirty="0"/>
+          </a:p>
+          <a:p>
+            <a:r>
+              <a:rPr lang="de-DE" sz="2000" dirty="0" err="1"/>
+              <a:t>responding</a:t>
+            </a:r>
+            <a:r>
+              <a:rPr lang="de-DE" sz="2000" dirty="0"/>
+              <a:t> </a:t>
+            </a:r>
+            <a:r>
+              <a:rPr lang="de-DE" sz="2000" dirty="0" err="1"/>
+              <a:t>to</a:t>
+            </a:r>
+            <a:r>
+              <a:rPr lang="de-DE" sz="2000" dirty="0"/>
+              <a:t> </a:t>
+            </a:r>
+            <a:r>
+              <a:rPr lang="de-DE" sz="2000" dirty="0" err="1"/>
+              <a:t>user</a:t>
+            </a:r>
+            <a:r>
+              <a:rPr lang="de-DE" sz="2000" dirty="0"/>
+              <a:t> </a:t>
+            </a:r>
+            <a:r>
+              <a:rPr lang="de-DE" sz="2000" dirty="0" err="1"/>
+              <a:t>prompts</a:t>
+            </a:r>
+            <a:endParaRPr lang="de-DE" sz="2000" dirty="0"/>
           </a:p>
         </p:txBody>
       </p:sp>
@@ -13188,8 +13608,8 @@
         </p:nvSpPr>
         <p:spPr>
           <a:xfrm>
-            <a:off x="6095999" y="5486399"/>
-            <a:ext cx="5257801" cy="923330"/>
+            <a:off x="6096000" y="5486399"/>
+            <a:ext cx="4669972" cy="923330"/>
           </a:xfrm>
           <a:prstGeom prst="rect">
             <a:avLst/>
@@ -13202,10 +13622,6 @@
           </a:bodyPr>
           <a:lstStyle/>
           <a:p>
-            <a:pPr marL="285750" indent="-285750">
-              <a:buFont typeface="Arial" panose="020B0604020202020204" pitchFamily="34" charset="0"/>
-              <a:buChar char="•"/>
-            </a:pPr>
             <a:r>
               <a:rPr lang="de-DE" dirty="0" err="1"/>
               <a:t>assistant</a:t>
@@ -13228,14 +13644,10 @@
             </a:r>
             <a:r>
               <a:rPr lang="de-DE" dirty="0"/>
-              <a:t>)</a:t>
-            </a:r>
-          </a:p>
-          <a:p>
-            <a:pPr marL="285750" indent="-285750">
-              <a:buFont typeface="Arial" panose="020B0604020202020204" pitchFamily="34" charset="0"/>
-              <a:buChar char="•"/>
-            </a:pPr>
+              <a:t>):</a:t>
+            </a:r>
+          </a:p>
+          <a:p>
             <a:r>
               <a:rPr lang="de-DE" dirty="0" err="1"/>
               <a:t>instruction</a:t>
@@ -13314,8 +13726,8 @@
         </p:nvSpPr>
         <p:spPr>
           <a:xfrm>
-            <a:off x="838200" y="5486399"/>
-            <a:ext cx="5257799" cy="923330"/>
+            <a:off x="903515" y="5486399"/>
+            <a:ext cx="4299857" cy="923330"/>
           </a:xfrm>
           <a:prstGeom prst="rect">
             <a:avLst/>
@@ -13328,10 +13740,6 @@
           </a:bodyPr>
           <a:lstStyle/>
           <a:p>
-            <a:pPr marL="285750" indent="-285750">
-              <a:buFont typeface="Arial" panose="020B0604020202020204" pitchFamily="34" charset="0"/>
-              <a:buChar char="•"/>
-            </a:pPr>
             <a:r>
               <a:rPr lang="de-DE" dirty="0" err="1"/>
               <a:t>classification</a:t>
@@ -13362,14 +13770,10 @@
             </a:r>
             <a:r>
               <a:rPr lang="de-DE" dirty="0"/>
-              <a:t>)</a:t>
-            </a:r>
-          </a:p>
-          <a:p>
-            <a:pPr marL="285750" indent="-285750">
-              <a:buFont typeface="Arial" panose="020B0604020202020204" pitchFamily="34" charset="0"/>
-              <a:buChar char="•"/>
-            </a:pPr>
+              <a:t>):</a:t>
+            </a:r>
+          </a:p>
+          <a:p>
             <a:r>
               <a:rPr lang="de-DE" dirty="0" err="1"/>
               <a:t>finetuning</a:t>
